--- a/examples/quarterly-report/Q3经营汇报-智能喂食器业务.pptx
+++ b/examples/quarterly-report/Q3经营汇报-智能喂食器业务.pptx
@@ -2695,7 +2695,7 @@
           </a:solidFill>
           <a:ln w="12700">
             <a:solidFill>
-              <a:srgbClr val="24405E"/>
+              <a:srgbClr val="D7DEE8"/>
             </a:solidFill>
             <a:prstDash val="solid"/>
           </a:ln>
@@ -2806,7 +2806,7 @@
             <a:r>
               <a:rPr lang="en-US" sz="2000" dirty="0">
                 <a:solidFill>
-                  <a:srgbClr val="A8C0DC"/>
+                  <a:srgbClr val="8FA6C0"/>
                 </a:solidFill>
                 <a:latin typeface="微软雅黑" pitchFamily="34" charset="0"/>
                 <a:ea typeface="微软雅黑" pitchFamily="34" charset="-122"/>
@@ -2885,6 +2885,254 @@
   <p:clrMapOvr>
     <a:masterClrMapping/>
   </p:clrMapOvr>
+  <p:transition spd="med">
+    <p:fade/>
+  </p:transition>
+  <p:timing>
+    <p:tnLst>
+      <p:par>
+        <p:cTn id="1" dur="indefinite" restart="never" nodeType="tmRoot">
+          <p:childTnLst>
+            <p:seq concurrent="1" nextAc="seek">
+              <p:cTn id="2" dur="indefinite" nodeType="mainSeq">
+                <p:childTnLst>
+                  <p:par>
+                    <p:cTn id="3" fill="hold">
+                      <p:stCondLst>
+                        <p:cond delay="indefinite"/>
+                        <p:cond evt="onBegin" delay="0">
+                          <p:tn val="2"/>
+                        </p:cond>
+                      </p:stCondLst>
+                      <p:childTnLst>
+                        <p:par>
+                          <p:cTn id="4" fill="hold">
+                            <p:stCondLst>
+                              <p:cond delay="0"/>
+                            </p:stCondLst>
+                            <p:childTnLst>
+                              <p:par>
+                                <p:cTn id="5" presetID="10" presetClass="entr" presetSubtype="0" fill="hold" grpId="0" nodeType="afterEffect">
+                                  <p:stCondLst>
+                                    <p:cond delay="0"/>
+                                  </p:stCondLst>
+                                  <p:childTnLst>
+                                    <p:set>
+                                      <p:cBhvr>
+                                        <p:cTn id="6" dur="1"/>
+                                        <p:tgtEl>
+                                          <p:spTgt spid="2"/>
+                                        </p:tgtEl>
+                                        <p:attrNameLst>
+                                          <p:attrName>style.visibility</p:attrName>
+                                        </p:attrNameLst>
+                                      </p:cBhvr>
+                                      <p:to>
+                                        <p:strVal val="visible"/>
+                                      </p:to>
+                                    </p:set>
+                                    <p:animEffect transition="in" filter="fade">
+                                      <p:cBhvr>
+                                        <p:cTn id="7" dur="450"/>
+                                        <p:tgtEl>
+                                          <p:spTgt spid="2"/>
+                                        </p:tgtEl>
+                                      </p:cBhvr>
+                                    </p:animEffect>
+                                  </p:childTnLst>
+                                </p:cTn>
+                              </p:par>
+                              <p:par>
+                                <p:cTn id="8" presetID="10" presetClass="entr" presetSubtype="0" fill="hold" grpId="0" nodeType="afterEffect">
+                                  <p:stCondLst>
+                                    <p:cond delay="630"/>
+                                  </p:stCondLst>
+                                  <p:childTnLst>
+                                    <p:set>
+                                      <p:cBhvr>
+                                        <p:cTn id="9" dur="1"/>
+                                        <p:tgtEl>
+                                          <p:spTgt spid="4"/>
+                                        </p:tgtEl>
+                                        <p:attrNameLst>
+                                          <p:attrName>style.visibility</p:attrName>
+                                        </p:attrNameLst>
+                                      </p:cBhvr>
+                                      <p:to>
+                                        <p:strVal val="visible"/>
+                                      </p:to>
+                                    </p:set>
+                                    <p:animEffect transition="in" filter="fade">
+                                      <p:cBhvr>
+                                        <p:cTn id="10" dur="450"/>
+                                        <p:tgtEl>
+                                          <p:spTgt spid="4"/>
+                                        </p:tgtEl>
+                                      </p:cBhvr>
+                                    </p:animEffect>
+                                  </p:childTnLst>
+                                </p:cTn>
+                              </p:par>
+                              <p:par>
+                                <p:cTn id="11" presetID="10" presetClass="entr" presetSubtype="0" fill="hold" grpId="0" nodeType="afterEffect">
+                                  <p:stCondLst>
+                                    <p:cond delay="1440"/>
+                                  </p:stCondLst>
+                                  <p:childTnLst>
+                                    <p:set>
+                                      <p:cBhvr>
+                                        <p:cTn id="12" dur="1"/>
+                                        <p:tgtEl>
+                                          <p:spTgt spid="5"/>
+                                        </p:tgtEl>
+                                        <p:attrNameLst>
+                                          <p:attrName>style.visibility</p:attrName>
+                                        </p:attrNameLst>
+                                      </p:cBhvr>
+                                      <p:to>
+                                        <p:strVal val="visible"/>
+                                      </p:to>
+                                    </p:set>
+                                    <p:animEffect transition="in" filter="fade">
+                                      <p:cBhvr>
+                                        <p:cTn id="13" dur="450"/>
+                                        <p:tgtEl>
+                                          <p:spTgt spid="5"/>
+                                        </p:tgtEl>
+                                      </p:cBhvr>
+                                    </p:animEffect>
+                                  </p:childTnLst>
+                                </p:cTn>
+                              </p:par>
+                              <p:par>
+                                <p:cTn id="14" presetID="10" presetClass="entr" presetSubtype="0" fill="hold" grpId="0" nodeType="afterEffect">
+                                  <p:stCondLst>
+                                    <p:cond delay="2430"/>
+                                  </p:stCondLst>
+                                  <p:childTnLst>
+                                    <p:set>
+                                      <p:cBhvr>
+                                        <p:cTn id="15" dur="1"/>
+                                        <p:tgtEl>
+                                          <p:spTgt spid="6"/>
+                                        </p:tgtEl>
+                                        <p:attrNameLst>
+                                          <p:attrName>style.visibility</p:attrName>
+                                        </p:attrNameLst>
+                                      </p:cBhvr>
+                                      <p:to>
+                                        <p:strVal val="visible"/>
+                                      </p:to>
+                                    </p:set>
+                                    <p:animEffect transition="in" filter="fade">
+                                      <p:cBhvr>
+                                        <p:cTn id="16" dur="450"/>
+                                        <p:tgtEl>
+                                          <p:spTgt spid="6"/>
+                                        </p:tgtEl>
+                                      </p:cBhvr>
+                                    </p:animEffect>
+                                  </p:childTnLst>
+                                </p:cTn>
+                              </p:par>
+                              <p:par>
+                                <p:cTn id="17" presetID="10" presetClass="entr" presetSubtype="0" fill="hold" grpId="0" nodeType="afterEffect">
+                                  <p:stCondLst>
+                                    <p:cond delay="3600"/>
+                                  </p:stCondLst>
+                                  <p:childTnLst>
+                                    <p:set>
+                                      <p:cBhvr>
+                                        <p:cTn id="18" dur="1"/>
+                                        <p:tgtEl>
+                                          <p:spTgt spid="3"/>
+                                        </p:tgtEl>
+                                        <p:attrNameLst>
+                                          <p:attrName>style.visibility</p:attrName>
+                                        </p:attrNameLst>
+                                      </p:cBhvr>
+                                      <p:to>
+                                        <p:strVal val="visible"/>
+                                      </p:to>
+                                    </p:set>
+                                    <p:animEffect transition="in" filter="fade">
+                                      <p:cBhvr>
+                                        <p:cTn id="19" dur="450"/>
+                                        <p:tgtEl>
+                                          <p:spTgt spid="3"/>
+                                        </p:tgtEl>
+                                      </p:cBhvr>
+                                    </p:animEffect>
+                                  </p:childTnLst>
+                                </p:cTn>
+                              </p:par>
+                              <p:par>
+                                <p:cTn id="20" presetID="10" presetClass="entr" presetSubtype="0" fill="hold" grpId="0" nodeType="afterEffect">
+                                  <p:stCondLst>
+                                    <p:cond delay="4950"/>
+                                  </p:stCondLst>
+                                  <p:childTnLst>
+                                    <p:set>
+                                      <p:cBhvr>
+                                        <p:cTn id="21" dur="1"/>
+                                        <p:tgtEl>
+                                          <p:spTgt spid="7"/>
+                                        </p:tgtEl>
+                                        <p:attrNameLst>
+                                          <p:attrName>style.visibility</p:attrName>
+                                        </p:attrNameLst>
+                                      </p:cBhvr>
+                                      <p:to>
+                                        <p:strVal val="visible"/>
+                                      </p:to>
+                                    </p:set>
+                                    <p:animEffect transition="in" filter="fade">
+                                      <p:cBhvr>
+                                        <p:cTn id="22" dur="450"/>
+                                        <p:tgtEl>
+                                          <p:spTgt spid="7"/>
+                                        </p:tgtEl>
+                                      </p:cBhvr>
+                                    </p:animEffect>
+                                  </p:childTnLst>
+                                </p:cTn>
+                              </p:par>
+                            </p:childTnLst>
+                          </p:cTn>
+                        </p:par>
+                      </p:childTnLst>
+                    </p:cTn>
+                  </p:par>
+                </p:childTnLst>
+              </p:cTn>
+              <p:prevCondLst>
+                <p:cond evt="onPrev" delay="0">
+                  <p:tgtEl>
+                    <p:sldTgt/>
+                  </p:tgtEl>
+                </p:cond>
+              </p:prevCondLst>
+              <p:nextCondLst>
+                <p:cond evt="onNext" delay="0">
+                  <p:tgtEl>
+                    <p:sldTgt/>
+                  </p:tgtEl>
+                </p:cond>
+              </p:nextCondLst>
+            </p:seq>
+          </p:childTnLst>
+        </p:cTn>
+      </p:par>
+    </p:tnLst>
+    <p:bldLst>
+      <p:bldP spid="2" grpId="0"/>
+      <p:bldP spid="4" grpId="0"/>
+      <p:bldP spid="5" grpId="0"/>
+      <p:bldP spid="6" grpId="0"/>
+      <p:bldP spid="3" grpId="0"/>
+      <p:bldP spid="7" grpId="0"/>
+    </p:bldLst>
+  </p:timing>
 </p:sld>
 </file>
 
@@ -3431,6 +3679,510 @@
   <p:clrMapOvr>
     <a:masterClrMapping/>
   </p:clrMapOvr>
+  <p:transition spd="med">
+    <p:fade/>
+  </p:transition>
+  <p:timing>
+    <p:tnLst>
+      <p:par>
+        <p:cTn id="1" dur="indefinite" restart="never" nodeType="tmRoot">
+          <p:childTnLst>
+            <p:seq concurrent="1" nextAc="seek">
+              <p:cTn id="2" dur="indefinite" nodeType="mainSeq">
+                <p:childTnLst>
+                  <p:par>
+                    <p:cTn id="3" fill="hold">
+                      <p:stCondLst>
+                        <p:cond delay="indefinite"/>
+                        <p:cond evt="onBegin" delay="0">
+                          <p:tn val="2"/>
+                        </p:cond>
+                      </p:stCondLst>
+                      <p:childTnLst>
+                        <p:par>
+                          <p:cTn id="4" fill="hold">
+                            <p:stCondLst>
+                              <p:cond delay="0"/>
+                            </p:stCondLst>
+                            <p:childTnLst>
+                              <p:par>
+                                <p:cTn id="5" presetID="10" presetClass="entr" presetSubtype="0" fill="hold" grpId="0" nodeType="afterEffect">
+                                  <p:stCondLst>
+                                    <p:cond delay="0"/>
+                                  </p:stCondLst>
+                                  <p:childTnLst>
+                                    <p:set>
+                                      <p:cBhvr>
+                                        <p:cTn id="6" dur="1"/>
+                                        <p:tgtEl>
+                                          <p:spTgt spid="2"/>
+                                        </p:tgtEl>
+                                        <p:attrNameLst>
+                                          <p:attrName>style.visibility</p:attrName>
+                                        </p:attrNameLst>
+                                      </p:cBhvr>
+                                      <p:to>
+                                        <p:strVal val="visible"/>
+                                      </p:to>
+                                    </p:set>
+                                    <p:animEffect transition="in" filter="fade">
+                                      <p:cBhvr>
+                                        <p:cTn id="7" dur="400"/>
+                                        <p:tgtEl>
+                                          <p:spTgt spid="2"/>
+                                        </p:tgtEl>
+                                      </p:cBhvr>
+                                    </p:animEffect>
+                                  </p:childTnLst>
+                                </p:cTn>
+                              </p:par>
+                              <p:par>
+                                <p:cTn id="8" presetID="10" presetClass="entr" presetSubtype="0" fill="hold" grpId="0" nodeType="afterEffect">
+                                  <p:stCondLst>
+                                    <p:cond delay="550"/>
+                                  </p:stCondLst>
+                                  <p:childTnLst>
+                                    <p:set>
+                                      <p:cBhvr>
+                                        <p:cTn id="9" dur="1"/>
+                                        <p:tgtEl>
+                                          <p:spTgt spid="3"/>
+                                        </p:tgtEl>
+                                        <p:attrNameLst>
+                                          <p:attrName>style.visibility</p:attrName>
+                                        </p:attrNameLst>
+                                      </p:cBhvr>
+                                      <p:to>
+                                        <p:strVal val="visible"/>
+                                      </p:to>
+                                    </p:set>
+                                    <p:animEffect transition="in" filter="fade">
+                                      <p:cBhvr>
+                                        <p:cTn id="10" dur="400"/>
+                                        <p:tgtEl>
+                                          <p:spTgt spid="3"/>
+                                        </p:tgtEl>
+                                      </p:cBhvr>
+                                    </p:animEffect>
+                                  </p:childTnLst>
+                                </p:cTn>
+                              </p:par>
+                              <p:par>
+                                <p:cTn id="11" presetID="10" presetClass="entr" presetSubtype="0" fill="hold" grpId="0" nodeType="afterEffect">
+                                  <p:stCondLst>
+                                    <p:cond delay="1250"/>
+                                  </p:stCondLst>
+                                  <p:childTnLst>
+                                    <p:set>
+                                      <p:cBhvr>
+                                        <p:cTn id="12" dur="1"/>
+                                        <p:tgtEl>
+                                          <p:spTgt spid="5"/>
+                                        </p:tgtEl>
+                                        <p:attrNameLst>
+                                          <p:attrName>style.visibility</p:attrName>
+                                        </p:attrNameLst>
+                                      </p:cBhvr>
+                                      <p:to>
+                                        <p:strVal val="visible"/>
+                                      </p:to>
+                                    </p:set>
+                                    <p:animEffect transition="in" filter="fade">
+                                      <p:cBhvr>
+                                        <p:cTn id="13" dur="400"/>
+                                        <p:tgtEl>
+                                          <p:spTgt spid="5"/>
+                                        </p:tgtEl>
+                                      </p:cBhvr>
+                                    </p:animEffect>
+                                  </p:childTnLst>
+                                </p:cTn>
+                              </p:par>
+                              <p:par>
+                                <p:cTn id="14" presetID="10" presetClass="entr" presetSubtype="0" fill="hold" grpId="0" nodeType="afterEffect">
+                                  <p:stCondLst>
+                                    <p:cond delay="2100"/>
+                                  </p:stCondLst>
+                                  <p:childTnLst>
+                                    <p:set>
+                                      <p:cBhvr>
+                                        <p:cTn id="15" dur="1"/>
+                                        <p:tgtEl>
+                                          <p:spTgt spid="7"/>
+                                        </p:tgtEl>
+                                        <p:attrNameLst>
+                                          <p:attrName>style.visibility</p:attrName>
+                                        </p:attrNameLst>
+                                      </p:cBhvr>
+                                      <p:to>
+                                        <p:strVal val="visible"/>
+                                      </p:to>
+                                    </p:set>
+                                    <p:animEffect transition="in" filter="fade">
+                                      <p:cBhvr>
+                                        <p:cTn id="16" dur="400"/>
+                                        <p:tgtEl>
+                                          <p:spTgt spid="7"/>
+                                        </p:tgtEl>
+                                      </p:cBhvr>
+                                    </p:animEffect>
+                                  </p:childTnLst>
+                                </p:cTn>
+                              </p:par>
+                              <p:par>
+                                <p:cTn id="17" presetID="10" presetClass="entr" presetSubtype="0" fill="hold" grpId="0" nodeType="afterEffect">
+                                  <p:stCondLst>
+                                    <p:cond delay="3100"/>
+                                  </p:stCondLst>
+                                  <p:childTnLst>
+                                    <p:set>
+                                      <p:cBhvr>
+                                        <p:cTn id="18" dur="1"/>
+                                        <p:tgtEl>
+                                          <p:spTgt spid="8"/>
+                                        </p:tgtEl>
+                                        <p:attrNameLst>
+                                          <p:attrName>style.visibility</p:attrName>
+                                        </p:attrNameLst>
+                                      </p:cBhvr>
+                                      <p:to>
+                                        <p:strVal val="visible"/>
+                                      </p:to>
+                                    </p:set>
+                                    <p:animEffect transition="in" filter="fade">
+                                      <p:cBhvr>
+                                        <p:cTn id="19" dur="400"/>
+                                        <p:tgtEl>
+                                          <p:spTgt spid="8"/>
+                                        </p:tgtEl>
+                                      </p:cBhvr>
+                                    </p:animEffect>
+                                  </p:childTnLst>
+                                </p:cTn>
+                              </p:par>
+                              <p:par>
+                                <p:cTn id="20" presetID="10" presetClass="entr" presetSubtype="0" fill="hold" grpId="0" nodeType="afterEffect">
+                                  <p:stCondLst>
+                                    <p:cond delay="4250"/>
+                                  </p:stCondLst>
+                                  <p:childTnLst>
+                                    <p:set>
+                                      <p:cBhvr>
+                                        <p:cTn id="21" dur="1"/>
+                                        <p:tgtEl>
+                                          <p:spTgt spid="9"/>
+                                        </p:tgtEl>
+                                        <p:attrNameLst>
+                                          <p:attrName>style.visibility</p:attrName>
+                                        </p:attrNameLst>
+                                      </p:cBhvr>
+                                      <p:to>
+                                        <p:strVal val="visible"/>
+                                      </p:to>
+                                    </p:set>
+                                    <p:animEffect transition="in" filter="fade">
+                                      <p:cBhvr>
+                                        <p:cTn id="22" dur="400"/>
+                                        <p:tgtEl>
+                                          <p:spTgt spid="9"/>
+                                        </p:tgtEl>
+                                      </p:cBhvr>
+                                    </p:animEffect>
+                                  </p:childTnLst>
+                                </p:cTn>
+                              </p:par>
+                              <p:par>
+                                <p:cTn id="23" presetID="10" presetClass="entr" presetSubtype="0" fill="hold" grpId="0" nodeType="afterEffect">
+                                  <p:stCondLst>
+                                    <p:cond delay="5550"/>
+                                  </p:stCondLst>
+                                  <p:childTnLst>
+                                    <p:set>
+                                      <p:cBhvr>
+                                        <p:cTn id="24" dur="1"/>
+                                        <p:tgtEl>
+                                          <p:spTgt spid="6"/>
+                                        </p:tgtEl>
+                                        <p:attrNameLst>
+                                          <p:attrName>style.visibility</p:attrName>
+                                        </p:attrNameLst>
+                                      </p:cBhvr>
+                                      <p:to>
+                                        <p:strVal val="visible"/>
+                                      </p:to>
+                                    </p:set>
+                                    <p:animEffect transition="in" filter="fade">
+                                      <p:cBhvr>
+                                        <p:cTn id="25" dur="400"/>
+                                        <p:tgtEl>
+                                          <p:spTgt spid="6"/>
+                                        </p:tgtEl>
+                                      </p:cBhvr>
+                                    </p:animEffect>
+                                  </p:childTnLst>
+                                </p:cTn>
+                              </p:par>
+                              <p:par>
+                                <p:cTn id="26" presetID="10" presetClass="entr" presetSubtype="0" fill="hold" grpId="0" nodeType="afterEffect">
+                                  <p:stCondLst>
+                                    <p:cond delay="7000"/>
+                                  </p:stCondLst>
+                                  <p:childTnLst>
+                                    <p:set>
+                                      <p:cBhvr>
+                                        <p:cTn id="27" dur="1"/>
+                                        <p:tgtEl>
+                                          <p:spTgt spid="10"/>
+                                        </p:tgtEl>
+                                        <p:attrNameLst>
+                                          <p:attrName>style.visibility</p:attrName>
+                                        </p:attrNameLst>
+                                      </p:cBhvr>
+                                      <p:to>
+                                        <p:strVal val="visible"/>
+                                      </p:to>
+                                    </p:set>
+                                    <p:animEffect transition="in" filter="fade">
+                                      <p:cBhvr>
+                                        <p:cTn id="28" dur="400"/>
+                                        <p:tgtEl>
+                                          <p:spTgt spid="10"/>
+                                        </p:tgtEl>
+                                      </p:cBhvr>
+                                    </p:animEffect>
+                                  </p:childTnLst>
+                                </p:cTn>
+                              </p:par>
+                              <p:par>
+                                <p:cTn id="29" presetID="10" presetClass="entr" presetSubtype="0" fill="hold" grpId="0" nodeType="afterEffect">
+                                  <p:stCondLst>
+                                    <p:cond delay="8600"/>
+                                  </p:stCondLst>
+                                  <p:childTnLst>
+                                    <p:set>
+                                      <p:cBhvr>
+                                        <p:cTn id="30" dur="1"/>
+                                        <p:tgtEl>
+                                          <p:spTgt spid="11"/>
+                                        </p:tgtEl>
+                                        <p:attrNameLst>
+                                          <p:attrName>style.visibility</p:attrName>
+                                        </p:attrNameLst>
+                                      </p:cBhvr>
+                                      <p:to>
+                                        <p:strVal val="visible"/>
+                                      </p:to>
+                                    </p:set>
+                                    <p:animEffect transition="in" filter="fade">
+                                      <p:cBhvr>
+                                        <p:cTn id="31" dur="400"/>
+                                        <p:tgtEl>
+                                          <p:spTgt spid="11"/>
+                                        </p:tgtEl>
+                                      </p:cBhvr>
+                                    </p:animEffect>
+                                  </p:childTnLst>
+                                </p:cTn>
+                              </p:par>
+                              <p:par>
+                                <p:cTn id="32" presetID="10" presetClass="entr" presetSubtype="0" fill="hold" grpId="0" nodeType="afterEffect">
+                                  <p:stCondLst>
+                                    <p:cond delay="10350"/>
+                                  </p:stCondLst>
+                                  <p:childTnLst>
+                                    <p:set>
+                                      <p:cBhvr>
+                                        <p:cTn id="33" dur="1"/>
+                                        <p:tgtEl>
+                                          <p:spTgt spid="12"/>
+                                        </p:tgtEl>
+                                        <p:attrNameLst>
+                                          <p:attrName>style.visibility</p:attrName>
+                                        </p:attrNameLst>
+                                      </p:cBhvr>
+                                      <p:to>
+                                        <p:strVal val="visible"/>
+                                      </p:to>
+                                    </p:set>
+                                    <p:animEffect transition="in" filter="fade">
+                                      <p:cBhvr>
+                                        <p:cTn id="34" dur="400"/>
+                                        <p:tgtEl>
+                                          <p:spTgt spid="12"/>
+                                        </p:tgtEl>
+                                      </p:cBhvr>
+                                    </p:animEffect>
+                                  </p:childTnLst>
+                                </p:cTn>
+                              </p:par>
+                              <p:par>
+                                <p:cTn id="35" presetID="10" presetClass="entr" presetSubtype="0" fill="hold" grpId="0" nodeType="afterEffect">
+                                  <p:stCondLst>
+                                    <p:cond delay="12250"/>
+                                  </p:stCondLst>
+                                  <p:childTnLst>
+                                    <p:set>
+                                      <p:cBhvr>
+                                        <p:cTn id="36" dur="1"/>
+                                        <p:tgtEl>
+                                          <p:spTgt spid="13"/>
+                                        </p:tgtEl>
+                                        <p:attrNameLst>
+                                          <p:attrName>style.visibility</p:attrName>
+                                        </p:attrNameLst>
+                                      </p:cBhvr>
+                                      <p:to>
+                                        <p:strVal val="visible"/>
+                                      </p:to>
+                                    </p:set>
+                                    <p:animEffect transition="in" filter="fade">
+                                      <p:cBhvr>
+                                        <p:cTn id="37" dur="400"/>
+                                        <p:tgtEl>
+                                          <p:spTgt spid="13"/>
+                                        </p:tgtEl>
+                                      </p:cBhvr>
+                                    </p:animEffect>
+                                  </p:childTnLst>
+                                </p:cTn>
+                              </p:par>
+                              <p:par>
+                                <p:cTn id="38" presetID="10" presetClass="entr" presetSubtype="0" fill="hold" grpId="0" nodeType="afterEffect">
+                                  <p:stCondLst>
+                                    <p:cond delay="14300"/>
+                                  </p:stCondLst>
+                                  <p:childTnLst>
+                                    <p:set>
+                                      <p:cBhvr>
+                                        <p:cTn id="39" dur="1"/>
+                                        <p:tgtEl>
+                                          <p:spTgt spid="14"/>
+                                        </p:tgtEl>
+                                        <p:attrNameLst>
+                                          <p:attrName>style.visibility</p:attrName>
+                                        </p:attrNameLst>
+                                      </p:cBhvr>
+                                      <p:to>
+                                        <p:strVal val="visible"/>
+                                      </p:to>
+                                    </p:set>
+                                    <p:animEffect transition="in" filter="fade">
+                                      <p:cBhvr>
+                                        <p:cTn id="40" dur="400"/>
+                                        <p:tgtEl>
+                                          <p:spTgt spid="14"/>
+                                        </p:tgtEl>
+                                      </p:cBhvr>
+                                    </p:animEffect>
+                                  </p:childTnLst>
+                                </p:cTn>
+                              </p:par>
+                              <p:par>
+                                <p:cTn id="41" presetID="10" presetClass="entr" presetSubtype="0" fill="hold" grpId="0" nodeType="afterEffect">
+                                  <p:stCondLst>
+                                    <p:cond delay="16500"/>
+                                  </p:stCondLst>
+                                  <p:childTnLst>
+                                    <p:set>
+                                      <p:cBhvr>
+                                        <p:cTn id="42" dur="1"/>
+                                        <p:tgtEl>
+                                          <p:spTgt spid="15"/>
+                                        </p:tgtEl>
+                                        <p:attrNameLst>
+                                          <p:attrName>style.visibility</p:attrName>
+                                        </p:attrNameLst>
+                                      </p:cBhvr>
+                                      <p:to>
+                                        <p:strVal val="visible"/>
+                                      </p:to>
+                                    </p:set>
+                                    <p:animEffect transition="in" filter="fade">
+                                      <p:cBhvr>
+                                        <p:cTn id="43" dur="400"/>
+                                        <p:tgtEl>
+                                          <p:spTgt spid="15"/>
+                                        </p:tgtEl>
+                                      </p:cBhvr>
+                                    </p:animEffect>
+                                  </p:childTnLst>
+                                </p:cTn>
+                              </p:par>
+                              <p:par>
+                                <p:cTn id="44" presetID="10" presetClass="entr" presetSubtype="0" fill="hold" grpId="0" nodeType="afterEffect">
+                                  <p:stCondLst>
+                                    <p:cond delay="18850"/>
+                                  </p:stCondLst>
+                                  <p:childTnLst>
+                                    <p:set>
+                                      <p:cBhvr>
+                                        <p:cTn id="45" dur="1"/>
+                                        <p:tgtEl>
+                                          <p:spTgt spid="16"/>
+                                        </p:tgtEl>
+                                        <p:attrNameLst>
+                                          <p:attrName>style.visibility</p:attrName>
+                                        </p:attrNameLst>
+                                      </p:cBhvr>
+                                      <p:to>
+                                        <p:strVal val="visible"/>
+                                      </p:to>
+                                    </p:set>
+                                    <p:animEffect transition="in" filter="fade">
+                                      <p:cBhvr>
+                                        <p:cTn id="46" dur="400"/>
+                                        <p:tgtEl>
+                                          <p:spTgt spid="16"/>
+                                        </p:tgtEl>
+                                      </p:cBhvr>
+                                    </p:animEffect>
+                                  </p:childTnLst>
+                                </p:cTn>
+                              </p:par>
+                            </p:childTnLst>
+                          </p:cTn>
+                        </p:par>
+                      </p:childTnLst>
+                    </p:cTn>
+                  </p:par>
+                </p:childTnLst>
+              </p:cTn>
+              <p:prevCondLst>
+                <p:cond evt="onPrev" delay="0">
+                  <p:tgtEl>
+                    <p:sldTgt/>
+                  </p:tgtEl>
+                </p:cond>
+              </p:prevCondLst>
+              <p:nextCondLst>
+                <p:cond evt="onNext" delay="0">
+                  <p:tgtEl>
+                    <p:sldTgt/>
+                  </p:tgtEl>
+                </p:cond>
+              </p:nextCondLst>
+            </p:seq>
+          </p:childTnLst>
+        </p:cTn>
+      </p:par>
+    </p:tnLst>
+    <p:bldLst>
+      <p:bldP spid="2" grpId="0"/>
+      <p:bldP spid="3" grpId="0"/>
+      <p:bldP spid="5" grpId="0"/>
+      <p:bldP spid="7" grpId="0"/>
+      <p:bldP spid="8" grpId="0"/>
+      <p:bldP spid="9" grpId="0"/>
+      <p:bldP spid="6" grpId="0"/>
+      <p:bldP spid="10" grpId="0"/>
+      <p:bldP spid="11" grpId="0"/>
+      <p:bldP spid="12" grpId="0"/>
+      <p:bldP spid="13" grpId="0"/>
+      <p:bldP spid="14" grpId="0"/>
+      <p:bldP spid="15" grpId="0"/>
+      <p:bldP spid="16" grpId="0"/>
+    </p:bldLst>
+  </p:timing>
 </p:sld>
 </file>
 
@@ -3479,7 +4231,7 @@
           </a:solidFill>
           <a:ln w="12700">
             <a:solidFill>
-              <a:srgbClr val="24405E"/>
+              <a:srgbClr val="D7DEE8"/>
             </a:solidFill>
             <a:prstDash val="solid"/>
           </a:ln>
@@ -3568,6 +4320,9 @@
   <p:clrMapOvr>
     <a:masterClrMapping/>
   </p:clrMapOvr>
+  <p:transition spd="med">
+    <p:fade/>
+  </p:transition>
 </p:sld>
 </file>
 
@@ -4153,6 +4908,542 @@
   <p:clrMapOvr>
     <a:masterClrMapping/>
   </p:clrMapOvr>
+  <p:transition spd="med">
+    <p:fade/>
+  </p:transition>
+  <p:timing>
+    <p:tnLst>
+      <p:par>
+        <p:cTn id="1" dur="indefinite" restart="never" nodeType="tmRoot">
+          <p:childTnLst>
+            <p:seq concurrent="1" nextAc="seek">
+              <p:cTn id="2" dur="indefinite" nodeType="mainSeq">
+                <p:childTnLst>
+                  <p:par>
+                    <p:cTn id="3" fill="hold">
+                      <p:stCondLst>
+                        <p:cond delay="indefinite"/>
+                        <p:cond evt="onBegin" delay="0">
+                          <p:tn val="2"/>
+                        </p:cond>
+                      </p:stCondLst>
+                      <p:childTnLst>
+                        <p:par>
+                          <p:cTn id="4" fill="hold">
+                            <p:stCondLst>
+                              <p:cond delay="0"/>
+                            </p:stCondLst>
+                            <p:childTnLst>
+                              <p:par>
+                                <p:cTn id="5" presetID="10" presetClass="entr" presetSubtype="0" fill="hold" grpId="0" nodeType="afterEffect">
+                                  <p:stCondLst>
+                                    <p:cond delay="0"/>
+                                  </p:stCondLst>
+                                  <p:childTnLst>
+                                    <p:set>
+                                      <p:cBhvr>
+                                        <p:cTn id="6" dur="1"/>
+                                        <p:tgtEl>
+                                          <p:spTgt spid="2"/>
+                                        </p:tgtEl>
+                                        <p:attrNameLst>
+                                          <p:attrName>style.visibility</p:attrName>
+                                        </p:attrNameLst>
+                                      </p:cBhvr>
+                                      <p:to>
+                                        <p:strVal val="visible"/>
+                                      </p:to>
+                                    </p:set>
+                                    <p:animEffect transition="in" filter="fade">
+                                      <p:cBhvr>
+                                        <p:cTn id="7" dur="400"/>
+                                        <p:tgtEl>
+                                          <p:spTgt spid="2"/>
+                                        </p:tgtEl>
+                                      </p:cBhvr>
+                                    </p:animEffect>
+                                  </p:childTnLst>
+                                </p:cTn>
+                              </p:par>
+                              <p:par>
+                                <p:cTn id="8" presetID="10" presetClass="entr" presetSubtype="0" fill="hold" grpId="0" nodeType="afterEffect">
+                                  <p:stCondLst>
+                                    <p:cond delay="520"/>
+                                  </p:stCondLst>
+                                  <p:childTnLst>
+                                    <p:set>
+                                      <p:cBhvr>
+                                        <p:cTn id="9" dur="1"/>
+                                        <p:tgtEl>
+                                          <p:spTgt spid="3"/>
+                                        </p:tgtEl>
+                                        <p:attrNameLst>
+                                          <p:attrName>style.visibility</p:attrName>
+                                        </p:attrNameLst>
+                                      </p:cBhvr>
+                                      <p:to>
+                                        <p:strVal val="visible"/>
+                                      </p:to>
+                                    </p:set>
+                                    <p:animEffect transition="in" filter="fade">
+                                      <p:cBhvr>
+                                        <p:cTn id="10" dur="400"/>
+                                        <p:tgtEl>
+                                          <p:spTgt spid="3"/>
+                                        </p:tgtEl>
+                                      </p:cBhvr>
+                                    </p:animEffect>
+                                  </p:childTnLst>
+                                </p:cTn>
+                              </p:par>
+                              <p:par>
+                                <p:cTn id="11" presetID="10" presetClass="entr" presetSubtype="0" fill="hold" grpId="0" nodeType="afterEffect">
+                                  <p:stCondLst>
+                                    <p:cond delay="1160"/>
+                                  </p:stCondLst>
+                                  <p:childTnLst>
+                                    <p:set>
+                                      <p:cBhvr>
+                                        <p:cTn id="12" dur="1"/>
+                                        <p:tgtEl>
+                                          <p:spTgt spid="6"/>
+                                        </p:tgtEl>
+                                        <p:attrNameLst>
+                                          <p:attrName>style.visibility</p:attrName>
+                                        </p:attrNameLst>
+                                      </p:cBhvr>
+                                      <p:to>
+                                        <p:strVal val="visible"/>
+                                      </p:to>
+                                    </p:set>
+                                    <p:animEffect transition="in" filter="fade">
+                                      <p:cBhvr>
+                                        <p:cTn id="13" dur="400"/>
+                                        <p:tgtEl>
+                                          <p:spTgt spid="6"/>
+                                        </p:tgtEl>
+                                      </p:cBhvr>
+                                    </p:animEffect>
+                                  </p:childTnLst>
+                                </p:cTn>
+                              </p:par>
+                              <p:par>
+                                <p:cTn id="14" presetID="10" presetClass="entr" presetSubtype="0" fill="hold" grpId="0" nodeType="afterEffect">
+                                  <p:stCondLst>
+                                    <p:cond delay="1920"/>
+                                  </p:stCondLst>
+                                  <p:childTnLst>
+                                    <p:set>
+                                      <p:cBhvr>
+                                        <p:cTn id="15" dur="1"/>
+                                        <p:tgtEl>
+                                          <p:spTgt spid="5"/>
+                                        </p:tgtEl>
+                                        <p:attrNameLst>
+                                          <p:attrName>style.visibility</p:attrName>
+                                        </p:attrNameLst>
+                                      </p:cBhvr>
+                                      <p:to>
+                                        <p:strVal val="visible"/>
+                                      </p:to>
+                                    </p:set>
+                                    <p:animEffect transition="in" filter="fade">
+                                      <p:cBhvr>
+                                        <p:cTn id="16" dur="400"/>
+                                        <p:tgtEl>
+                                          <p:spTgt spid="5"/>
+                                        </p:tgtEl>
+                                      </p:cBhvr>
+                                    </p:animEffect>
+                                  </p:childTnLst>
+                                </p:cTn>
+                              </p:par>
+                              <p:par>
+                                <p:cTn id="17" presetID="10" presetClass="entr" presetSubtype="0" fill="hold" grpId="0" nodeType="afterEffect">
+                                  <p:stCondLst>
+                                    <p:cond delay="2800"/>
+                                  </p:stCondLst>
+                                  <p:childTnLst>
+                                    <p:set>
+                                      <p:cBhvr>
+                                        <p:cTn id="18" dur="1"/>
+                                        <p:tgtEl>
+                                          <p:spTgt spid="7"/>
+                                        </p:tgtEl>
+                                        <p:attrNameLst>
+                                          <p:attrName>style.visibility</p:attrName>
+                                        </p:attrNameLst>
+                                      </p:cBhvr>
+                                      <p:to>
+                                        <p:strVal val="visible"/>
+                                      </p:to>
+                                    </p:set>
+                                    <p:animEffect transition="in" filter="fade">
+                                      <p:cBhvr>
+                                        <p:cTn id="19" dur="400"/>
+                                        <p:tgtEl>
+                                          <p:spTgt spid="7"/>
+                                        </p:tgtEl>
+                                      </p:cBhvr>
+                                    </p:animEffect>
+                                  </p:childTnLst>
+                                </p:cTn>
+                              </p:par>
+                              <p:par>
+                                <p:cTn id="20" presetID="10" presetClass="entr" presetSubtype="0" fill="hold" grpId="0" nodeType="afterEffect">
+                                  <p:stCondLst>
+                                    <p:cond delay="3800"/>
+                                  </p:stCondLst>
+                                  <p:childTnLst>
+                                    <p:set>
+                                      <p:cBhvr>
+                                        <p:cTn id="21" dur="1"/>
+                                        <p:tgtEl>
+                                          <p:spTgt spid="8"/>
+                                        </p:tgtEl>
+                                        <p:attrNameLst>
+                                          <p:attrName>style.visibility</p:attrName>
+                                        </p:attrNameLst>
+                                      </p:cBhvr>
+                                      <p:to>
+                                        <p:strVal val="visible"/>
+                                      </p:to>
+                                    </p:set>
+                                    <p:animEffect transition="in" filter="fade">
+                                      <p:cBhvr>
+                                        <p:cTn id="22" dur="400"/>
+                                        <p:tgtEl>
+                                          <p:spTgt spid="8"/>
+                                        </p:tgtEl>
+                                      </p:cBhvr>
+                                    </p:animEffect>
+                                  </p:childTnLst>
+                                </p:cTn>
+                              </p:par>
+                              <p:par>
+                                <p:cTn id="23" presetID="10" presetClass="entr" presetSubtype="0" fill="hold" grpId="0" nodeType="afterEffect">
+                                  <p:stCondLst>
+                                    <p:cond delay="4920"/>
+                                  </p:stCondLst>
+                                  <p:childTnLst>
+                                    <p:set>
+                                      <p:cBhvr>
+                                        <p:cTn id="24" dur="1"/>
+                                        <p:tgtEl>
+                                          <p:spTgt spid="10"/>
+                                        </p:tgtEl>
+                                        <p:attrNameLst>
+                                          <p:attrName>style.visibility</p:attrName>
+                                        </p:attrNameLst>
+                                      </p:cBhvr>
+                                      <p:to>
+                                        <p:strVal val="visible"/>
+                                      </p:to>
+                                    </p:set>
+                                    <p:animEffect transition="in" filter="fade">
+                                      <p:cBhvr>
+                                        <p:cTn id="25" dur="400"/>
+                                        <p:tgtEl>
+                                          <p:spTgt spid="10"/>
+                                        </p:tgtEl>
+                                      </p:cBhvr>
+                                    </p:animEffect>
+                                  </p:childTnLst>
+                                </p:cTn>
+                              </p:par>
+                              <p:par>
+                                <p:cTn id="26" presetID="10" presetClass="entr" presetSubtype="0" fill="hold" grpId="0" nodeType="afterEffect">
+                                  <p:stCondLst>
+                                    <p:cond delay="6160"/>
+                                  </p:stCondLst>
+                                  <p:childTnLst>
+                                    <p:set>
+                                      <p:cBhvr>
+                                        <p:cTn id="27" dur="1"/>
+                                        <p:tgtEl>
+                                          <p:spTgt spid="9"/>
+                                        </p:tgtEl>
+                                        <p:attrNameLst>
+                                          <p:attrName>style.visibility</p:attrName>
+                                        </p:attrNameLst>
+                                      </p:cBhvr>
+                                      <p:to>
+                                        <p:strVal val="visible"/>
+                                      </p:to>
+                                    </p:set>
+                                    <p:animEffect transition="in" filter="fade">
+                                      <p:cBhvr>
+                                        <p:cTn id="28" dur="400"/>
+                                        <p:tgtEl>
+                                          <p:spTgt spid="9"/>
+                                        </p:tgtEl>
+                                      </p:cBhvr>
+                                    </p:animEffect>
+                                  </p:childTnLst>
+                                </p:cTn>
+                              </p:par>
+                              <p:par>
+                                <p:cTn id="29" presetID="10" presetClass="entr" presetSubtype="0" fill="hold" grpId="0" nodeType="afterEffect">
+                                  <p:stCondLst>
+                                    <p:cond delay="7520"/>
+                                  </p:stCondLst>
+                                  <p:childTnLst>
+                                    <p:set>
+                                      <p:cBhvr>
+                                        <p:cTn id="30" dur="1"/>
+                                        <p:tgtEl>
+                                          <p:spTgt spid="11"/>
+                                        </p:tgtEl>
+                                        <p:attrNameLst>
+                                          <p:attrName>style.visibility</p:attrName>
+                                        </p:attrNameLst>
+                                      </p:cBhvr>
+                                      <p:to>
+                                        <p:strVal val="visible"/>
+                                      </p:to>
+                                    </p:set>
+                                    <p:animEffect transition="in" filter="fade">
+                                      <p:cBhvr>
+                                        <p:cTn id="31" dur="400"/>
+                                        <p:tgtEl>
+                                          <p:spTgt spid="11"/>
+                                        </p:tgtEl>
+                                      </p:cBhvr>
+                                    </p:animEffect>
+                                  </p:childTnLst>
+                                </p:cTn>
+                              </p:par>
+                              <p:par>
+                                <p:cTn id="32" presetID="10" presetClass="entr" presetSubtype="0" fill="hold" grpId="0" nodeType="afterEffect">
+                                  <p:stCondLst>
+                                    <p:cond delay="9000"/>
+                                  </p:stCondLst>
+                                  <p:childTnLst>
+                                    <p:set>
+                                      <p:cBhvr>
+                                        <p:cTn id="33" dur="1"/>
+                                        <p:tgtEl>
+                                          <p:spTgt spid="12"/>
+                                        </p:tgtEl>
+                                        <p:attrNameLst>
+                                          <p:attrName>style.visibility</p:attrName>
+                                        </p:attrNameLst>
+                                      </p:cBhvr>
+                                      <p:to>
+                                        <p:strVal val="visible"/>
+                                      </p:to>
+                                    </p:set>
+                                    <p:animEffect transition="in" filter="fade">
+                                      <p:cBhvr>
+                                        <p:cTn id="34" dur="400"/>
+                                        <p:tgtEl>
+                                          <p:spTgt spid="12"/>
+                                        </p:tgtEl>
+                                      </p:cBhvr>
+                                    </p:animEffect>
+                                  </p:childTnLst>
+                                </p:cTn>
+                              </p:par>
+                              <p:par>
+                                <p:cTn id="35" presetID="10" presetClass="entr" presetSubtype="0" fill="hold" grpId="0" nodeType="afterEffect">
+                                  <p:stCondLst>
+                                    <p:cond delay="10600"/>
+                                  </p:stCondLst>
+                                  <p:childTnLst>
+                                    <p:set>
+                                      <p:cBhvr>
+                                        <p:cTn id="36" dur="1"/>
+                                        <p:tgtEl>
+                                          <p:spTgt spid="14"/>
+                                        </p:tgtEl>
+                                        <p:attrNameLst>
+                                          <p:attrName>style.visibility</p:attrName>
+                                        </p:attrNameLst>
+                                      </p:cBhvr>
+                                      <p:to>
+                                        <p:strVal val="visible"/>
+                                      </p:to>
+                                    </p:set>
+                                    <p:animEffect transition="in" filter="fade">
+                                      <p:cBhvr>
+                                        <p:cTn id="37" dur="400"/>
+                                        <p:tgtEl>
+                                          <p:spTgt spid="14"/>
+                                        </p:tgtEl>
+                                      </p:cBhvr>
+                                    </p:animEffect>
+                                  </p:childTnLst>
+                                </p:cTn>
+                              </p:par>
+                              <p:par>
+                                <p:cTn id="38" presetID="10" presetClass="entr" presetSubtype="0" fill="hold" grpId="0" nodeType="afterEffect">
+                                  <p:stCondLst>
+                                    <p:cond delay="12320"/>
+                                  </p:stCondLst>
+                                  <p:childTnLst>
+                                    <p:set>
+                                      <p:cBhvr>
+                                        <p:cTn id="39" dur="1"/>
+                                        <p:tgtEl>
+                                          <p:spTgt spid="13"/>
+                                        </p:tgtEl>
+                                        <p:attrNameLst>
+                                          <p:attrName>style.visibility</p:attrName>
+                                        </p:attrNameLst>
+                                      </p:cBhvr>
+                                      <p:to>
+                                        <p:strVal val="visible"/>
+                                      </p:to>
+                                    </p:set>
+                                    <p:animEffect transition="in" filter="fade">
+                                      <p:cBhvr>
+                                        <p:cTn id="40" dur="400"/>
+                                        <p:tgtEl>
+                                          <p:spTgt spid="13"/>
+                                        </p:tgtEl>
+                                      </p:cBhvr>
+                                    </p:animEffect>
+                                  </p:childTnLst>
+                                </p:cTn>
+                              </p:par>
+                              <p:par>
+                                <p:cTn id="41" presetID="10" presetClass="entr" presetSubtype="0" fill="hold" grpId="0" nodeType="afterEffect">
+                                  <p:stCondLst>
+                                    <p:cond delay="14160"/>
+                                  </p:stCondLst>
+                                  <p:childTnLst>
+                                    <p:set>
+                                      <p:cBhvr>
+                                        <p:cTn id="42" dur="1"/>
+                                        <p:tgtEl>
+                                          <p:spTgt spid="15"/>
+                                        </p:tgtEl>
+                                        <p:attrNameLst>
+                                          <p:attrName>style.visibility</p:attrName>
+                                        </p:attrNameLst>
+                                      </p:cBhvr>
+                                      <p:to>
+                                        <p:strVal val="visible"/>
+                                      </p:to>
+                                    </p:set>
+                                    <p:animEffect transition="in" filter="fade">
+                                      <p:cBhvr>
+                                        <p:cTn id="43" dur="400"/>
+                                        <p:tgtEl>
+                                          <p:spTgt spid="15"/>
+                                        </p:tgtEl>
+                                      </p:cBhvr>
+                                    </p:animEffect>
+                                  </p:childTnLst>
+                                </p:cTn>
+                              </p:par>
+                              <p:par>
+                                <p:cTn id="44" presetID="10" presetClass="entr" presetSubtype="0" fill="hold" grpId="0" nodeType="afterEffect">
+                                  <p:stCondLst>
+                                    <p:cond delay="16120"/>
+                                  </p:stCondLst>
+                                  <p:childTnLst>
+                                    <p:set>
+                                      <p:cBhvr>
+                                        <p:cTn id="45" dur="1"/>
+                                        <p:tgtEl>
+                                          <p:spTgt spid="16"/>
+                                        </p:tgtEl>
+                                        <p:attrNameLst>
+                                          <p:attrName>style.visibility</p:attrName>
+                                        </p:attrNameLst>
+                                      </p:cBhvr>
+                                      <p:to>
+                                        <p:strVal val="visible"/>
+                                      </p:to>
+                                    </p:set>
+                                    <p:animEffect transition="in" filter="fade">
+                                      <p:cBhvr>
+                                        <p:cTn id="46" dur="400"/>
+                                        <p:tgtEl>
+                                          <p:spTgt spid="16"/>
+                                        </p:tgtEl>
+                                      </p:cBhvr>
+                                    </p:animEffect>
+                                  </p:childTnLst>
+                                </p:cTn>
+                              </p:par>
+                              <p:par>
+                                <p:cTn id="47" presetID="10" presetClass="entr" presetSubtype="0" fill="hold" grpId="0" nodeType="afterEffect">
+                                  <p:stCondLst>
+                                    <p:cond delay="18200"/>
+                                  </p:stCondLst>
+                                  <p:childTnLst>
+                                    <p:set>
+                                      <p:cBhvr>
+                                        <p:cTn id="48" dur="1"/>
+                                        <p:tgtEl>
+                                          <p:spTgt spid="17"/>
+                                        </p:tgtEl>
+                                        <p:attrNameLst>
+                                          <p:attrName>style.visibility</p:attrName>
+                                        </p:attrNameLst>
+                                      </p:cBhvr>
+                                      <p:to>
+                                        <p:strVal val="visible"/>
+                                      </p:to>
+                                    </p:set>
+                                    <p:animEffect transition="in" filter="fade">
+                                      <p:cBhvr>
+                                        <p:cTn id="49" dur="400"/>
+                                        <p:tgtEl>
+                                          <p:spTgt spid="17"/>
+                                        </p:tgtEl>
+                                      </p:cBhvr>
+                                    </p:animEffect>
+                                  </p:childTnLst>
+                                </p:cTn>
+                              </p:par>
+                            </p:childTnLst>
+                          </p:cTn>
+                        </p:par>
+                      </p:childTnLst>
+                    </p:cTn>
+                  </p:par>
+                </p:childTnLst>
+              </p:cTn>
+              <p:prevCondLst>
+                <p:cond evt="onPrev" delay="0">
+                  <p:tgtEl>
+                    <p:sldTgt/>
+                  </p:tgtEl>
+                </p:cond>
+              </p:prevCondLst>
+              <p:nextCondLst>
+                <p:cond evt="onNext" delay="0">
+                  <p:tgtEl>
+                    <p:sldTgt/>
+                  </p:tgtEl>
+                </p:cond>
+              </p:nextCondLst>
+            </p:seq>
+          </p:childTnLst>
+        </p:cTn>
+      </p:par>
+    </p:tnLst>
+    <p:bldLst>
+      <p:bldP spid="2" grpId="0"/>
+      <p:bldP spid="3" grpId="0"/>
+      <p:bldP spid="6" grpId="0"/>
+      <p:bldP spid="5" grpId="0"/>
+      <p:bldP spid="7" grpId="0"/>
+      <p:bldP spid="8" grpId="0"/>
+      <p:bldP spid="10" grpId="0"/>
+      <p:bldP spid="9" grpId="0"/>
+      <p:bldP spid="11" grpId="0"/>
+      <p:bldP spid="12" grpId="0"/>
+      <p:bldP spid="14" grpId="0"/>
+      <p:bldP spid="13" grpId="0"/>
+      <p:bldP spid="15" grpId="0"/>
+      <p:bldP spid="16" grpId="0"/>
+      <p:bldP spid="17" grpId="0"/>
+    </p:bldLst>
+  </p:timing>
 </p:sld>
 </file>
 
@@ -4275,7 +5566,7 @@
           <a:noFill/>
           <a:ln w="19050">
             <a:solidFill>
-              <a:srgbClr val="C9D4E2"/>
+              <a:srgbClr val="D7DEE8"/>
             </a:solidFill>
             <a:prstDash val="solid"/>
           </a:ln>
@@ -4912,6 +6203,1532 @@
   <p:clrMapOvr>
     <a:masterClrMapping/>
   </p:clrMapOvr>
+  <p:transition spd="med">
+    <p:fade/>
+  </p:transition>
+  <p:timing>
+    <p:tnLst>
+      <p:par>
+        <p:cTn id="1" dur="indefinite" restart="never" nodeType="tmRoot">
+          <p:childTnLst>
+            <p:seq concurrent="1" nextAc="seek">
+              <p:cTn id="2" dur="indefinite" nodeType="mainSeq">
+                <p:childTnLst>
+                  <p:par>
+                    <p:cTn id="3" fill="hold">
+                      <p:stCondLst>
+                        <p:cond delay="indefinite"/>
+                        <p:cond evt="onBegin" delay="0">
+                          <p:tn val="2"/>
+                        </p:cond>
+                      </p:stCondLst>
+                      <p:childTnLst>
+                        <p:par>
+                          <p:cTn id="4" fill="hold">
+                            <p:stCondLst>
+                              <p:cond delay="0"/>
+                            </p:stCondLst>
+                            <p:childTnLst>
+                              <p:par>
+                                <p:cTn id="5" presetID="2" presetClass="entr" presetSubtype="8" fill="hold" grpId="0" nodeType="afterEffect">
+                                  <p:stCondLst>
+                                    <p:cond delay="0"/>
+                                  </p:stCondLst>
+                                  <p:childTnLst>
+                                    <p:set>
+                                      <p:cBhvr>
+                                        <p:cTn id="6" dur="1"/>
+                                        <p:tgtEl>
+                                          <p:spTgt spid="2"/>
+                                        </p:tgtEl>
+                                        <p:attrNameLst>
+                                          <p:attrName>style.visibility</p:attrName>
+                                        </p:attrNameLst>
+                                      </p:cBhvr>
+                                      <p:to>
+                                        <p:strVal val="visible"/>
+                                      </p:to>
+                                    </p:set>
+                                    <p:anim calcmode="lin" valueType="num">
+                                      <p:cBhvr additive="base">
+                                        <p:cTn id="7" dur="400"/>
+                                        <p:tgtEl>
+                                          <p:spTgt spid="2"/>
+                                        </p:tgtEl>
+                                        <p:attrNameLst>
+                                          <p:attrName>ppt_y</p:attrName>
+                                        </p:attrNameLst>
+                                      </p:cBhvr>
+                                      <p:tavLst>
+                                        <p:tav tm="0">
+                                          <p:val>
+                                            <p:strVal val="#ppt_y"/>
+                                          </p:val>
+                                        </p:tav>
+                                        <p:tav tm="100000">
+                                          <p:val>
+                                            <p:strVal val="#ppt_y"/>
+                                          </p:val>
+                                        </p:tav>
+                                      </p:tavLst>
+                                    </p:anim>
+                                    <p:anim calcmode="lin" valueType="num">
+                                      <p:cBhvr additive="base">
+                                        <p:cTn id="8" dur="400"/>
+                                        <p:tgtEl>
+                                          <p:spTgt spid="2"/>
+                                        </p:tgtEl>
+                                        <p:attrNameLst>
+                                          <p:attrName>ppt_x</p:attrName>
+                                        </p:attrNameLst>
+                                      </p:cBhvr>
+                                      <p:tavLst>
+                                        <p:tav tm="0">
+                                          <p:val>
+                                            <p:strVal val="0-#ppt_w/2"/>
+                                          </p:val>
+                                        </p:tav>
+                                        <p:tav tm="100000">
+                                          <p:val>
+                                            <p:strVal val="#ppt_x"/>
+                                          </p:val>
+                                        </p:tav>
+                                      </p:tavLst>
+                                    </p:anim>
+                                  </p:childTnLst>
+                                </p:cTn>
+                              </p:par>
+                              <p:par>
+                                <p:cTn id="9" presetID="2" presetClass="entr" presetSubtype="8" fill="hold" grpId="0" nodeType="afterEffect">
+                                  <p:stCondLst>
+                                    <p:cond delay="500"/>
+                                  </p:stCondLst>
+                                  <p:childTnLst>
+                                    <p:set>
+                                      <p:cBhvr>
+                                        <p:cTn id="10" dur="1"/>
+                                        <p:tgtEl>
+                                          <p:spTgt spid="3"/>
+                                        </p:tgtEl>
+                                        <p:attrNameLst>
+                                          <p:attrName>style.visibility</p:attrName>
+                                        </p:attrNameLst>
+                                      </p:cBhvr>
+                                      <p:to>
+                                        <p:strVal val="visible"/>
+                                      </p:to>
+                                    </p:set>
+                                    <p:anim calcmode="lin" valueType="num">
+                                      <p:cBhvr additive="base">
+                                        <p:cTn id="11" dur="400"/>
+                                        <p:tgtEl>
+                                          <p:spTgt spid="3"/>
+                                        </p:tgtEl>
+                                        <p:attrNameLst>
+                                          <p:attrName>ppt_y</p:attrName>
+                                        </p:attrNameLst>
+                                      </p:cBhvr>
+                                      <p:tavLst>
+                                        <p:tav tm="0">
+                                          <p:val>
+                                            <p:strVal val="#ppt_y"/>
+                                          </p:val>
+                                        </p:tav>
+                                        <p:tav tm="100000">
+                                          <p:val>
+                                            <p:strVal val="#ppt_y"/>
+                                          </p:val>
+                                        </p:tav>
+                                      </p:tavLst>
+                                    </p:anim>
+                                    <p:anim calcmode="lin" valueType="num">
+                                      <p:cBhvr additive="base">
+                                        <p:cTn id="12" dur="400"/>
+                                        <p:tgtEl>
+                                          <p:spTgt spid="3"/>
+                                        </p:tgtEl>
+                                        <p:attrNameLst>
+                                          <p:attrName>ppt_x</p:attrName>
+                                        </p:attrNameLst>
+                                      </p:cBhvr>
+                                      <p:tavLst>
+                                        <p:tav tm="0">
+                                          <p:val>
+                                            <p:strVal val="0-#ppt_w/2"/>
+                                          </p:val>
+                                        </p:tav>
+                                        <p:tav tm="100000">
+                                          <p:val>
+                                            <p:strVal val="#ppt_x"/>
+                                          </p:val>
+                                        </p:tav>
+                                      </p:tavLst>
+                                    </p:anim>
+                                  </p:childTnLst>
+                                </p:cTn>
+                              </p:par>
+                              <p:par>
+                                <p:cTn id="13" presetID="2" presetClass="entr" presetSubtype="8" fill="hold" grpId="0" nodeType="afterEffect">
+                                  <p:stCondLst>
+                                    <p:cond delay="1100"/>
+                                  </p:stCondLst>
+                                  <p:childTnLst>
+                                    <p:set>
+                                      <p:cBhvr>
+                                        <p:cTn id="14" dur="1"/>
+                                        <p:tgtEl>
+                                          <p:spTgt spid="7"/>
+                                        </p:tgtEl>
+                                        <p:attrNameLst>
+                                          <p:attrName>style.visibility</p:attrName>
+                                        </p:attrNameLst>
+                                      </p:cBhvr>
+                                      <p:to>
+                                        <p:strVal val="visible"/>
+                                      </p:to>
+                                    </p:set>
+                                    <p:anim calcmode="lin" valueType="num">
+                                      <p:cBhvr additive="base">
+                                        <p:cTn id="15" dur="400"/>
+                                        <p:tgtEl>
+                                          <p:spTgt spid="7"/>
+                                        </p:tgtEl>
+                                        <p:attrNameLst>
+                                          <p:attrName>ppt_y</p:attrName>
+                                        </p:attrNameLst>
+                                      </p:cBhvr>
+                                      <p:tavLst>
+                                        <p:tav tm="0">
+                                          <p:val>
+                                            <p:strVal val="#ppt_y"/>
+                                          </p:val>
+                                        </p:tav>
+                                        <p:tav tm="100000">
+                                          <p:val>
+                                            <p:strVal val="#ppt_y"/>
+                                          </p:val>
+                                        </p:tav>
+                                      </p:tavLst>
+                                    </p:anim>
+                                    <p:anim calcmode="lin" valueType="num">
+                                      <p:cBhvr additive="base">
+                                        <p:cTn id="16" dur="400"/>
+                                        <p:tgtEl>
+                                          <p:spTgt spid="7"/>
+                                        </p:tgtEl>
+                                        <p:attrNameLst>
+                                          <p:attrName>ppt_x</p:attrName>
+                                        </p:attrNameLst>
+                                      </p:cBhvr>
+                                      <p:tavLst>
+                                        <p:tav tm="0">
+                                          <p:val>
+                                            <p:strVal val="0-#ppt_w/2"/>
+                                          </p:val>
+                                        </p:tav>
+                                        <p:tav tm="100000">
+                                          <p:val>
+                                            <p:strVal val="#ppt_x"/>
+                                          </p:val>
+                                        </p:tav>
+                                      </p:tavLst>
+                                    </p:anim>
+                                  </p:childTnLst>
+                                </p:cTn>
+                              </p:par>
+                              <p:par>
+                                <p:cTn id="17" presetID="2" presetClass="entr" presetSubtype="8" fill="hold" grpId="0" nodeType="afterEffect">
+                                  <p:stCondLst>
+                                    <p:cond delay="1800"/>
+                                  </p:stCondLst>
+                                  <p:childTnLst>
+                                    <p:set>
+                                      <p:cBhvr>
+                                        <p:cTn id="18" dur="1"/>
+                                        <p:tgtEl>
+                                          <p:spTgt spid="11"/>
+                                        </p:tgtEl>
+                                        <p:attrNameLst>
+                                          <p:attrName>style.visibility</p:attrName>
+                                        </p:attrNameLst>
+                                      </p:cBhvr>
+                                      <p:to>
+                                        <p:strVal val="visible"/>
+                                      </p:to>
+                                    </p:set>
+                                    <p:anim calcmode="lin" valueType="num">
+                                      <p:cBhvr additive="base">
+                                        <p:cTn id="19" dur="400"/>
+                                        <p:tgtEl>
+                                          <p:spTgt spid="11"/>
+                                        </p:tgtEl>
+                                        <p:attrNameLst>
+                                          <p:attrName>ppt_y</p:attrName>
+                                        </p:attrNameLst>
+                                      </p:cBhvr>
+                                      <p:tavLst>
+                                        <p:tav tm="0">
+                                          <p:val>
+                                            <p:strVal val="#ppt_y"/>
+                                          </p:val>
+                                        </p:tav>
+                                        <p:tav tm="100000">
+                                          <p:val>
+                                            <p:strVal val="#ppt_y"/>
+                                          </p:val>
+                                        </p:tav>
+                                      </p:tavLst>
+                                    </p:anim>
+                                    <p:anim calcmode="lin" valueType="num">
+                                      <p:cBhvr additive="base">
+                                        <p:cTn id="20" dur="400"/>
+                                        <p:tgtEl>
+                                          <p:spTgt spid="11"/>
+                                        </p:tgtEl>
+                                        <p:attrNameLst>
+                                          <p:attrName>ppt_x</p:attrName>
+                                        </p:attrNameLst>
+                                      </p:cBhvr>
+                                      <p:tavLst>
+                                        <p:tav tm="0">
+                                          <p:val>
+                                            <p:strVal val="0-#ppt_w/2"/>
+                                          </p:val>
+                                        </p:tav>
+                                        <p:tav tm="100000">
+                                          <p:val>
+                                            <p:strVal val="#ppt_x"/>
+                                          </p:val>
+                                        </p:tav>
+                                      </p:tavLst>
+                                    </p:anim>
+                                  </p:childTnLst>
+                                </p:cTn>
+                              </p:par>
+                              <p:par>
+                                <p:cTn id="21" presetID="2" presetClass="entr" presetSubtype="8" fill="hold" grpId="0" nodeType="afterEffect">
+                                  <p:stCondLst>
+                                    <p:cond delay="2600"/>
+                                  </p:stCondLst>
+                                  <p:childTnLst>
+                                    <p:set>
+                                      <p:cBhvr>
+                                        <p:cTn id="22" dur="1"/>
+                                        <p:tgtEl>
+                                          <p:spTgt spid="15"/>
+                                        </p:tgtEl>
+                                        <p:attrNameLst>
+                                          <p:attrName>style.visibility</p:attrName>
+                                        </p:attrNameLst>
+                                      </p:cBhvr>
+                                      <p:to>
+                                        <p:strVal val="visible"/>
+                                      </p:to>
+                                    </p:set>
+                                    <p:anim calcmode="lin" valueType="num">
+                                      <p:cBhvr additive="base">
+                                        <p:cTn id="23" dur="400"/>
+                                        <p:tgtEl>
+                                          <p:spTgt spid="15"/>
+                                        </p:tgtEl>
+                                        <p:attrNameLst>
+                                          <p:attrName>ppt_y</p:attrName>
+                                        </p:attrNameLst>
+                                      </p:cBhvr>
+                                      <p:tavLst>
+                                        <p:tav tm="0">
+                                          <p:val>
+                                            <p:strVal val="#ppt_y"/>
+                                          </p:val>
+                                        </p:tav>
+                                        <p:tav tm="100000">
+                                          <p:val>
+                                            <p:strVal val="#ppt_y"/>
+                                          </p:val>
+                                        </p:tav>
+                                      </p:tavLst>
+                                    </p:anim>
+                                    <p:anim calcmode="lin" valueType="num">
+                                      <p:cBhvr additive="base">
+                                        <p:cTn id="24" dur="400"/>
+                                        <p:tgtEl>
+                                          <p:spTgt spid="15"/>
+                                        </p:tgtEl>
+                                        <p:attrNameLst>
+                                          <p:attrName>ppt_x</p:attrName>
+                                        </p:attrNameLst>
+                                      </p:cBhvr>
+                                      <p:tavLst>
+                                        <p:tav tm="0">
+                                          <p:val>
+                                            <p:strVal val="0-#ppt_w/2"/>
+                                          </p:val>
+                                        </p:tav>
+                                        <p:tav tm="100000">
+                                          <p:val>
+                                            <p:strVal val="#ppt_x"/>
+                                          </p:val>
+                                        </p:tav>
+                                      </p:tavLst>
+                                    </p:anim>
+                                  </p:childTnLst>
+                                </p:cTn>
+                              </p:par>
+                              <p:par>
+                                <p:cTn id="25" presetID="2" presetClass="entr" presetSubtype="8" fill="hold" grpId="0" nodeType="afterEffect">
+                                  <p:stCondLst>
+                                    <p:cond delay="3500"/>
+                                  </p:stCondLst>
+                                  <p:childTnLst>
+                                    <p:set>
+                                      <p:cBhvr>
+                                        <p:cTn id="26" dur="1"/>
+                                        <p:tgtEl>
+                                          <p:spTgt spid="19"/>
+                                        </p:tgtEl>
+                                        <p:attrNameLst>
+                                          <p:attrName>style.visibility</p:attrName>
+                                        </p:attrNameLst>
+                                      </p:cBhvr>
+                                      <p:to>
+                                        <p:strVal val="visible"/>
+                                      </p:to>
+                                    </p:set>
+                                    <p:anim calcmode="lin" valueType="num">
+                                      <p:cBhvr additive="base">
+                                        <p:cTn id="27" dur="400"/>
+                                        <p:tgtEl>
+                                          <p:spTgt spid="19"/>
+                                        </p:tgtEl>
+                                        <p:attrNameLst>
+                                          <p:attrName>ppt_y</p:attrName>
+                                        </p:attrNameLst>
+                                      </p:cBhvr>
+                                      <p:tavLst>
+                                        <p:tav tm="0">
+                                          <p:val>
+                                            <p:strVal val="#ppt_y"/>
+                                          </p:val>
+                                        </p:tav>
+                                        <p:tav tm="100000">
+                                          <p:val>
+                                            <p:strVal val="#ppt_y"/>
+                                          </p:val>
+                                        </p:tav>
+                                      </p:tavLst>
+                                    </p:anim>
+                                    <p:anim calcmode="lin" valueType="num">
+                                      <p:cBhvr additive="base">
+                                        <p:cTn id="28" dur="400"/>
+                                        <p:tgtEl>
+                                          <p:spTgt spid="19"/>
+                                        </p:tgtEl>
+                                        <p:attrNameLst>
+                                          <p:attrName>ppt_x</p:attrName>
+                                        </p:attrNameLst>
+                                      </p:cBhvr>
+                                      <p:tavLst>
+                                        <p:tav tm="0">
+                                          <p:val>
+                                            <p:strVal val="0-#ppt_w/2"/>
+                                          </p:val>
+                                        </p:tav>
+                                        <p:tav tm="100000">
+                                          <p:val>
+                                            <p:strVal val="#ppt_x"/>
+                                          </p:val>
+                                        </p:tav>
+                                      </p:tavLst>
+                                    </p:anim>
+                                  </p:childTnLst>
+                                </p:cTn>
+                              </p:par>
+                              <p:par>
+                                <p:cTn id="29" presetID="2" presetClass="entr" presetSubtype="8" fill="hold" grpId="0" nodeType="afterEffect">
+                                  <p:stCondLst>
+                                    <p:cond delay="4500"/>
+                                  </p:stCondLst>
+                                  <p:childTnLst>
+                                    <p:set>
+                                      <p:cBhvr>
+                                        <p:cTn id="30" dur="1"/>
+                                        <p:tgtEl>
+                                          <p:spTgt spid="6"/>
+                                        </p:tgtEl>
+                                        <p:attrNameLst>
+                                          <p:attrName>style.visibility</p:attrName>
+                                        </p:attrNameLst>
+                                      </p:cBhvr>
+                                      <p:to>
+                                        <p:strVal val="visible"/>
+                                      </p:to>
+                                    </p:set>
+                                    <p:anim calcmode="lin" valueType="num">
+                                      <p:cBhvr additive="base">
+                                        <p:cTn id="31" dur="400"/>
+                                        <p:tgtEl>
+                                          <p:spTgt spid="6"/>
+                                        </p:tgtEl>
+                                        <p:attrNameLst>
+                                          <p:attrName>ppt_y</p:attrName>
+                                        </p:attrNameLst>
+                                      </p:cBhvr>
+                                      <p:tavLst>
+                                        <p:tav tm="0">
+                                          <p:val>
+                                            <p:strVal val="#ppt_y"/>
+                                          </p:val>
+                                        </p:tav>
+                                        <p:tav tm="100000">
+                                          <p:val>
+                                            <p:strVal val="#ppt_y"/>
+                                          </p:val>
+                                        </p:tav>
+                                      </p:tavLst>
+                                    </p:anim>
+                                    <p:anim calcmode="lin" valueType="num">
+                                      <p:cBhvr additive="base">
+                                        <p:cTn id="32" dur="400"/>
+                                        <p:tgtEl>
+                                          <p:spTgt spid="6"/>
+                                        </p:tgtEl>
+                                        <p:attrNameLst>
+                                          <p:attrName>ppt_x</p:attrName>
+                                        </p:attrNameLst>
+                                      </p:cBhvr>
+                                      <p:tavLst>
+                                        <p:tav tm="0">
+                                          <p:val>
+                                            <p:strVal val="0-#ppt_w/2"/>
+                                          </p:val>
+                                        </p:tav>
+                                        <p:tav tm="100000">
+                                          <p:val>
+                                            <p:strVal val="#ppt_x"/>
+                                          </p:val>
+                                        </p:tav>
+                                      </p:tavLst>
+                                    </p:anim>
+                                  </p:childTnLst>
+                                </p:cTn>
+                              </p:par>
+                              <p:par>
+                                <p:cTn id="33" presetID="2" presetClass="entr" presetSubtype="8" fill="hold" grpId="0" nodeType="afterEffect">
+                                  <p:stCondLst>
+                                    <p:cond delay="5600"/>
+                                  </p:stCondLst>
+                                  <p:childTnLst>
+                                    <p:set>
+                                      <p:cBhvr>
+                                        <p:cTn id="34" dur="1"/>
+                                        <p:tgtEl>
+                                          <p:spTgt spid="10"/>
+                                        </p:tgtEl>
+                                        <p:attrNameLst>
+                                          <p:attrName>style.visibility</p:attrName>
+                                        </p:attrNameLst>
+                                      </p:cBhvr>
+                                      <p:to>
+                                        <p:strVal val="visible"/>
+                                      </p:to>
+                                    </p:set>
+                                    <p:anim calcmode="lin" valueType="num">
+                                      <p:cBhvr additive="base">
+                                        <p:cTn id="35" dur="400"/>
+                                        <p:tgtEl>
+                                          <p:spTgt spid="10"/>
+                                        </p:tgtEl>
+                                        <p:attrNameLst>
+                                          <p:attrName>ppt_y</p:attrName>
+                                        </p:attrNameLst>
+                                      </p:cBhvr>
+                                      <p:tavLst>
+                                        <p:tav tm="0">
+                                          <p:val>
+                                            <p:strVal val="#ppt_y"/>
+                                          </p:val>
+                                        </p:tav>
+                                        <p:tav tm="100000">
+                                          <p:val>
+                                            <p:strVal val="#ppt_y"/>
+                                          </p:val>
+                                        </p:tav>
+                                      </p:tavLst>
+                                    </p:anim>
+                                    <p:anim calcmode="lin" valueType="num">
+                                      <p:cBhvr additive="base">
+                                        <p:cTn id="36" dur="400"/>
+                                        <p:tgtEl>
+                                          <p:spTgt spid="10"/>
+                                        </p:tgtEl>
+                                        <p:attrNameLst>
+                                          <p:attrName>ppt_x</p:attrName>
+                                        </p:attrNameLst>
+                                      </p:cBhvr>
+                                      <p:tavLst>
+                                        <p:tav tm="0">
+                                          <p:val>
+                                            <p:strVal val="0-#ppt_w/2"/>
+                                          </p:val>
+                                        </p:tav>
+                                        <p:tav tm="100000">
+                                          <p:val>
+                                            <p:strVal val="#ppt_x"/>
+                                          </p:val>
+                                        </p:tav>
+                                      </p:tavLst>
+                                    </p:anim>
+                                  </p:childTnLst>
+                                </p:cTn>
+                              </p:par>
+                              <p:par>
+                                <p:cTn id="37" presetID="2" presetClass="entr" presetSubtype="8" fill="hold" grpId="0" nodeType="afterEffect">
+                                  <p:stCondLst>
+                                    <p:cond delay="6800"/>
+                                  </p:stCondLst>
+                                  <p:childTnLst>
+                                    <p:set>
+                                      <p:cBhvr>
+                                        <p:cTn id="38" dur="1"/>
+                                        <p:tgtEl>
+                                          <p:spTgt spid="14"/>
+                                        </p:tgtEl>
+                                        <p:attrNameLst>
+                                          <p:attrName>style.visibility</p:attrName>
+                                        </p:attrNameLst>
+                                      </p:cBhvr>
+                                      <p:to>
+                                        <p:strVal val="visible"/>
+                                      </p:to>
+                                    </p:set>
+                                    <p:anim calcmode="lin" valueType="num">
+                                      <p:cBhvr additive="base">
+                                        <p:cTn id="39" dur="400"/>
+                                        <p:tgtEl>
+                                          <p:spTgt spid="14"/>
+                                        </p:tgtEl>
+                                        <p:attrNameLst>
+                                          <p:attrName>ppt_y</p:attrName>
+                                        </p:attrNameLst>
+                                      </p:cBhvr>
+                                      <p:tavLst>
+                                        <p:tav tm="0">
+                                          <p:val>
+                                            <p:strVal val="#ppt_y"/>
+                                          </p:val>
+                                        </p:tav>
+                                        <p:tav tm="100000">
+                                          <p:val>
+                                            <p:strVal val="#ppt_y"/>
+                                          </p:val>
+                                        </p:tav>
+                                      </p:tavLst>
+                                    </p:anim>
+                                    <p:anim calcmode="lin" valueType="num">
+                                      <p:cBhvr additive="base">
+                                        <p:cTn id="40" dur="400"/>
+                                        <p:tgtEl>
+                                          <p:spTgt spid="14"/>
+                                        </p:tgtEl>
+                                        <p:attrNameLst>
+                                          <p:attrName>ppt_x</p:attrName>
+                                        </p:attrNameLst>
+                                      </p:cBhvr>
+                                      <p:tavLst>
+                                        <p:tav tm="0">
+                                          <p:val>
+                                            <p:strVal val="0-#ppt_w/2"/>
+                                          </p:val>
+                                        </p:tav>
+                                        <p:tav tm="100000">
+                                          <p:val>
+                                            <p:strVal val="#ppt_x"/>
+                                          </p:val>
+                                        </p:tav>
+                                      </p:tavLst>
+                                    </p:anim>
+                                  </p:childTnLst>
+                                </p:cTn>
+                              </p:par>
+                              <p:par>
+                                <p:cTn id="41" presetID="2" presetClass="entr" presetSubtype="8" fill="hold" grpId="0" nodeType="afterEffect">
+                                  <p:stCondLst>
+                                    <p:cond delay="8100"/>
+                                  </p:stCondLst>
+                                  <p:childTnLst>
+                                    <p:set>
+                                      <p:cBhvr>
+                                        <p:cTn id="42" dur="1"/>
+                                        <p:tgtEl>
+                                          <p:spTgt spid="18"/>
+                                        </p:tgtEl>
+                                        <p:attrNameLst>
+                                          <p:attrName>style.visibility</p:attrName>
+                                        </p:attrNameLst>
+                                      </p:cBhvr>
+                                      <p:to>
+                                        <p:strVal val="visible"/>
+                                      </p:to>
+                                    </p:set>
+                                    <p:anim calcmode="lin" valueType="num">
+                                      <p:cBhvr additive="base">
+                                        <p:cTn id="43" dur="400"/>
+                                        <p:tgtEl>
+                                          <p:spTgt spid="18"/>
+                                        </p:tgtEl>
+                                        <p:attrNameLst>
+                                          <p:attrName>ppt_y</p:attrName>
+                                        </p:attrNameLst>
+                                      </p:cBhvr>
+                                      <p:tavLst>
+                                        <p:tav tm="0">
+                                          <p:val>
+                                            <p:strVal val="#ppt_y"/>
+                                          </p:val>
+                                        </p:tav>
+                                        <p:tav tm="100000">
+                                          <p:val>
+                                            <p:strVal val="#ppt_y"/>
+                                          </p:val>
+                                        </p:tav>
+                                      </p:tavLst>
+                                    </p:anim>
+                                    <p:anim calcmode="lin" valueType="num">
+                                      <p:cBhvr additive="base">
+                                        <p:cTn id="44" dur="400"/>
+                                        <p:tgtEl>
+                                          <p:spTgt spid="18"/>
+                                        </p:tgtEl>
+                                        <p:attrNameLst>
+                                          <p:attrName>ppt_x</p:attrName>
+                                        </p:attrNameLst>
+                                      </p:cBhvr>
+                                      <p:tavLst>
+                                        <p:tav tm="0">
+                                          <p:val>
+                                            <p:strVal val="0-#ppt_w/2"/>
+                                          </p:val>
+                                        </p:tav>
+                                        <p:tav tm="100000">
+                                          <p:val>
+                                            <p:strVal val="#ppt_x"/>
+                                          </p:val>
+                                        </p:tav>
+                                      </p:tavLst>
+                                    </p:anim>
+                                  </p:childTnLst>
+                                </p:cTn>
+                              </p:par>
+                              <p:par>
+                                <p:cTn id="45" presetID="2" presetClass="entr" presetSubtype="8" fill="hold" grpId="0" nodeType="afterEffect">
+                                  <p:stCondLst>
+                                    <p:cond delay="9500"/>
+                                  </p:stCondLst>
+                                  <p:childTnLst>
+                                    <p:set>
+                                      <p:cBhvr>
+                                        <p:cTn id="46" dur="1"/>
+                                        <p:tgtEl>
+                                          <p:spTgt spid="5"/>
+                                        </p:tgtEl>
+                                        <p:attrNameLst>
+                                          <p:attrName>style.visibility</p:attrName>
+                                        </p:attrNameLst>
+                                      </p:cBhvr>
+                                      <p:to>
+                                        <p:strVal val="visible"/>
+                                      </p:to>
+                                    </p:set>
+                                    <p:anim calcmode="lin" valueType="num">
+                                      <p:cBhvr additive="base">
+                                        <p:cTn id="47" dur="400"/>
+                                        <p:tgtEl>
+                                          <p:spTgt spid="5"/>
+                                        </p:tgtEl>
+                                        <p:attrNameLst>
+                                          <p:attrName>ppt_y</p:attrName>
+                                        </p:attrNameLst>
+                                      </p:cBhvr>
+                                      <p:tavLst>
+                                        <p:tav tm="0">
+                                          <p:val>
+                                            <p:strVal val="#ppt_y"/>
+                                          </p:val>
+                                        </p:tav>
+                                        <p:tav tm="100000">
+                                          <p:val>
+                                            <p:strVal val="#ppt_y"/>
+                                          </p:val>
+                                        </p:tav>
+                                      </p:tavLst>
+                                    </p:anim>
+                                    <p:anim calcmode="lin" valueType="num">
+                                      <p:cBhvr additive="base">
+                                        <p:cTn id="48" dur="400"/>
+                                        <p:tgtEl>
+                                          <p:spTgt spid="5"/>
+                                        </p:tgtEl>
+                                        <p:attrNameLst>
+                                          <p:attrName>ppt_x</p:attrName>
+                                        </p:attrNameLst>
+                                      </p:cBhvr>
+                                      <p:tavLst>
+                                        <p:tav tm="0">
+                                          <p:val>
+                                            <p:strVal val="0-#ppt_w/2"/>
+                                          </p:val>
+                                        </p:tav>
+                                        <p:tav tm="100000">
+                                          <p:val>
+                                            <p:strVal val="#ppt_x"/>
+                                          </p:val>
+                                        </p:tav>
+                                      </p:tavLst>
+                                    </p:anim>
+                                  </p:childTnLst>
+                                </p:cTn>
+                              </p:par>
+                              <p:par>
+                                <p:cTn id="49" presetID="2" presetClass="entr" presetSubtype="8" fill="hold" grpId="0" nodeType="afterEffect">
+                                  <p:stCondLst>
+                                    <p:cond delay="11000"/>
+                                  </p:stCondLst>
+                                  <p:childTnLst>
+                                    <p:set>
+                                      <p:cBhvr>
+                                        <p:cTn id="50" dur="1"/>
+                                        <p:tgtEl>
+                                          <p:spTgt spid="8"/>
+                                        </p:tgtEl>
+                                        <p:attrNameLst>
+                                          <p:attrName>style.visibility</p:attrName>
+                                        </p:attrNameLst>
+                                      </p:cBhvr>
+                                      <p:to>
+                                        <p:strVal val="visible"/>
+                                      </p:to>
+                                    </p:set>
+                                    <p:anim calcmode="lin" valueType="num">
+                                      <p:cBhvr additive="base">
+                                        <p:cTn id="51" dur="400"/>
+                                        <p:tgtEl>
+                                          <p:spTgt spid="8"/>
+                                        </p:tgtEl>
+                                        <p:attrNameLst>
+                                          <p:attrName>ppt_y</p:attrName>
+                                        </p:attrNameLst>
+                                      </p:cBhvr>
+                                      <p:tavLst>
+                                        <p:tav tm="0">
+                                          <p:val>
+                                            <p:strVal val="#ppt_y"/>
+                                          </p:val>
+                                        </p:tav>
+                                        <p:tav tm="100000">
+                                          <p:val>
+                                            <p:strVal val="#ppt_y"/>
+                                          </p:val>
+                                        </p:tav>
+                                      </p:tavLst>
+                                    </p:anim>
+                                    <p:anim calcmode="lin" valueType="num">
+                                      <p:cBhvr additive="base">
+                                        <p:cTn id="52" dur="400"/>
+                                        <p:tgtEl>
+                                          <p:spTgt spid="8"/>
+                                        </p:tgtEl>
+                                        <p:attrNameLst>
+                                          <p:attrName>ppt_x</p:attrName>
+                                        </p:attrNameLst>
+                                      </p:cBhvr>
+                                      <p:tavLst>
+                                        <p:tav tm="0">
+                                          <p:val>
+                                            <p:strVal val="0-#ppt_w/2"/>
+                                          </p:val>
+                                        </p:tav>
+                                        <p:tav tm="100000">
+                                          <p:val>
+                                            <p:strVal val="#ppt_x"/>
+                                          </p:val>
+                                        </p:tav>
+                                      </p:tavLst>
+                                    </p:anim>
+                                  </p:childTnLst>
+                                </p:cTn>
+                              </p:par>
+                              <p:par>
+                                <p:cTn id="53" presetID="2" presetClass="entr" presetSubtype="8" fill="hold" grpId="0" nodeType="afterEffect">
+                                  <p:stCondLst>
+                                    <p:cond delay="12600"/>
+                                  </p:stCondLst>
+                                  <p:childTnLst>
+                                    <p:set>
+                                      <p:cBhvr>
+                                        <p:cTn id="54" dur="1"/>
+                                        <p:tgtEl>
+                                          <p:spTgt spid="12"/>
+                                        </p:tgtEl>
+                                        <p:attrNameLst>
+                                          <p:attrName>style.visibility</p:attrName>
+                                        </p:attrNameLst>
+                                      </p:cBhvr>
+                                      <p:to>
+                                        <p:strVal val="visible"/>
+                                      </p:to>
+                                    </p:set>
+                                    <p:anim calcmode="lin" valueType="num">
+                                      <p:cBhvr additive="base">
+                                        <p:cTn id="55" dur="400"/>
+                                        <p:tgtEl>
+                                          <p:spTgt spid="12"/>
+                                        </p:tgtEl>
+                                        <p:attrNameLst>
+                                          <p:attrName>ppt_y</p:attrName>
+                                        </p:attrNameLst>
+                                      </p:cBhvr>
+                                      <p:tavLst>
+                                        <p:tav tm="0">
+                                          <p:val>
+                                            <p:strVal val="#ppt_y"/>
+                                          </p:val>
+                                        </p:tav>
+                                        <p:tav tm="100000">
+                                          <p:val>
+                                            <p:strVal val="#ppt_y"/>
+                                          </p:val>
+                                        </p:tav>
+                                      </p:tavLst>
+                                    </p:anim>
+                                    <p:anim calcmode="lin" valueType="num">
+                                      <p:cBhvr additive="base">
+                                        <p:cTn id="56" dur="400"/>
+                                        <p:tgtEl>
+                                          <p:spTgt spid="12"/>
+                                        </p:tgtEl>
+                                        <p:attrNameLst>
+                                          <p:attrName>ppt_x</p:attrName>
+                                        </p:attrNameLst>
+                                      </p:cBhvr>
+                                      <p:tavLst>
+                                        <p:tav tm="0">
+                                          <p:val>
+                                            <p:strVal val="0-#ppt_w/2"/>
+                                          </p:val>
+                                        </p:tav>
+                                        <p:tav tm="100000">
+                                          <p:val>
+                                            <p:strVal val="#ppt_x"/>
+                                          </p:val>
+                                        </p:tav>
+                                      </p:tavLst>
+                                    </p:anim>
+                                  </p:childTnLst>
+                                </p:cTn>
+                              </p:par>
+                              <p:par>
+                                <p:cTn id="57" presetID="2" presetClass="entr" presetSubtype="8" fill="hold" grpId="0" nodeType="afterEffect">
+                                  <p:stCondLst>
+                                    <p:cond delay="14300"/>
+                                  </p:stCondLst>
+                                  <p:childTnLst>
+                                    <p:set>
+                                      <p:cBhvr>
+                                        <p:cTn id="58" dur="1"/>
+                                        <p:tgtEl>
+                                          <p:spTgt spid="16"/>
+                                        </p:tgtEl>
+                                        <p:attrNameLst>
+                                          <p:attrName>style.visibility</p:attrName>
+                                        </p:attrNameLst>
+                                      </p:cBhvr>
+                                      <p:to>
+                                        <p:strVal val="visible"/>
+                                      </p:to>
+                                    </p:set>
+                                    <p:anim calcmode="lin" valueType="num">
+                                      <p:cBhvr additive="base">
+                                        <p:cTn id="59" dur="400"/>
+                                        <p:tgtEl>
+                                          <p:spTgt spid="16"/>
+                                        </p:tgtEl>
+                                        <p:attrNameLst>
+                                          <p:attrName>ppt_y</p:attrName>
+                                        </p:attrNameLst>
+                                      </p:cBhvr>
+                                      <p:tavLst>
+                                        <p:tav tm="0">
+                                          <p:val>
+                                            <p:strVal val="#ppt_y"/>
+                                          </p:val>
+                                        </p:tav>
+                                        <p:tav tm="100000">
+                                          <p:val>
+                                            <p:strVal val="#ppt_y"/>
+                                          </p:val>
+                                        </p:tav>
+                                      </p:tavLst>
+                                    </p:anim>
+                                    <p:anim calcmode="lin" valueType="num">
+                                      <p:cBhvr additive="base">
+                                        <p:cTn id="60" dur="400"/>
+                                        <p:tgtEl>
+                                          <p:spTgt spid="16"/>
+                                        </p:tgtEl>
+                                        <p:attrNameLst>
+                                          <p:attrName>ppt_x</p:attrName>
+                                        </p:attrNameLst>
+                                      </p:cBhvr>
+                                      <p:tavLst>
+                                        <p:tav tm="0">
+                                          <p:val>
+                                            <p:strVal val="0-#ppt_w/2"/>
+                                          </p:val>
+                                        </p:tav>
+                                        <p:tav tm="100000">
+                                          <p:val>
+                                            <p:strVal val="#ppt_x"/>
+                                          </p:val>
+                                        </p:tav>
+                                      </p:tavLst>
+                                    </p:anim>
+                                  </p:childTnLst>
+                                </p:cTn>
+                              </p:par>
+                              <p:par>
+                                <p:cTn id="61" presetID="2" presetClass="entr" presetSubtype="8" fill="hold" grpId="0" nodeType="afterEffect">
+                                  <p:stCondLst>
+                                    <p:cond delay="16100"/>
+                                  </p:stCondLst>
+                                  <p:childTnLst>
+                                    <p:set>
+                                      <p:cBhvr>
+                                        <p:cTn id="62" dur="1"/>
+                                        <p:tgtEl>
+                                          <p:spTgt spid="20"/>
+                                        </p:tgtEl>
+                                        <p:attrNameLst>
+                                          <p:attrName>style.visibility</p:attrName>
+                                        </p:attrNameLst>
+                                      </p:cBhvr>
+                                      <p:to>
+                                        <p:strVal val="visible"/>
+                                      </p:to>
+                                    </p:set>
+                                    <p:anim calcmode="lin" valueType="num">
+                                      <p:cBhvr additive="base">
+                                        <p:cTn id="63" dur="400"/>
+                                        <p:tgtEl>
+                                          <p:spTgt spid="20"/>
+                                        </p:tgtEl>
+                                        <p:attrNameLst>
+                                          <p:attrName>ppt_y</p:attrName>
+                                        </p:attrNameLst>
+                                      </p:cBhvr>
+                                      <p:tavLst>
+                                        <p:tav tm="0">
+                                          <p:val>
+                                            <p:strVal val="#ppt_y"/>
+                                          </p:val>
+                                        </p:tav>
+                                        <p:tav tm="100000">
+                                          <p:val>
+                                            <p:strVal val="#ppt_y"/>
+                                          </p:val>
+                                        </p:tav>
+                                      </p:tavLst>
+                                    </p:anim>
+                                    <p:anim calcmode="lin" valueType="num">
+                                      <p:cBhvr additive="base">
+                                        <p:cTn id="64" dur="400"/>
+                                        <p:tgtEl>
+                                          <p:spTgt spid="20"/>
+                                        </p:tgtEl>
+                                        <p:attrNameLst>
+                                          <p:attrName>ppt_x</p:attrName>
+                                        </p:attrNameLst>
+                                      </p:cBhvr>
+                                      <p:tavLst>
+                                        <p:tav tm="0">
+                                          <p:val>
+                                            <p:strVal val="0-#ppt_w/2"/>
+                                          </p:val>
+                                        </p:tav>
+                                        <p:tav tm="100000">
+                                          <p:val>
+                                            <p:strVal val="#ppt_x"/>
+                                          </p:val>
+                                        </p:tav>
+                                      </p:tavLst>
+                                    </p:anim>
+                                  </p:childTnLst>
+                                </p:cTn>
+                              </p:par>
+                              <p:par>
+                                <p:cTn id="65" presetID="2" presetClass="entr" presetSubtype="8" fill="hold" grpId="0" nodeType="afterEffect">
+                                  <p:stCondLst>
+                                    <p:cond delay="18000"/>
+                                  </p:stCondLst>
+                                  <p:childTnLst>
+                                    <p:set>
+                                      <p:cBhvr>
+                                        <p:cTn id="66" dur="1"/>
+                                        <p:tgtEl>
+                                          <p:spTgt spid="9"/>
+                                        </p:tgtEl>
+                                        <p:attrNameLst>
+                                          <p:attrName>style.visibility</p:attrName>
+                                        </p:attrNameLst>
+                                      </p:cBhvr>
+                                      <p:to>
+                                        <p:strVal val="visible"/>
+                                      </p:to>
+                                    </p:set>
+                                    <p:anim calcmode="lin" valueType="num">
+                                      <p:cBhvr additive="base">
+                                        <p:cTn id="67" dur="400"/>
+                                        <p:tgtEl>
+                                          <p:spTgt spid="9"/>
+                                        </p:tgtEl>
+                                        <p:attrNameLst>
+                                          <p:attrName>ppt_y</p:attrName>
+                                        </p:attrNameLst>
+                                      </p:cBhvr>
+                                      <p:tavLst>
+                                        <p:tav tm="0">
+                                          <p:val>
+                                            <p:strVal val="#ppt_y"/>
+                                          </p:val>
+                                        </p:tav>
+                                        <p:tav tm="100000">
+                                          <p:val>
+                                            <p:strVal val="#ppt_y"/>
+                                          </p:val>
+                                        </p:tav>
+                                      </p:tavLst>
+                                    </p:anim>
+                                    <p:anim calcmode="lin" valueType="num">
+                                      <p:cBhvr additive="base">
+                                        <p:cTn id="68" dur="400"/>
+                                        <p:tgtEl>
+                                          <p:spTgt spid="9"/>
+                                        </p:tgtEl>
+                                        <p:attrNameLst>
+                                          <p:attrName>ppt_x</p:attrName>
+                                        </p:attrNameLst>
+                                      </p:cBhvr>
+                                      <p:tavLst>
+                                        <p:tav tm="0">
+                                          <p:val>
+                                            <p:strVal val="0-#ppt_w/2"/>
+                                          </p:val>
+                                        </p:tav>
+                                        <p:tav tm="100000">
+                                          <p:val>
+                                            <p:strVal val="#ppt_x"/>
+                                          </p:val>
+                                        </p:tav>
+                                      </p:tavLst>
+                                    </p:anim>
+                                  </p:childTnLst>
+                                </p:cTn>
+                              </p:par>
+                              <p:par>
+                                <p:cTn id="69" presetID="2" presetClass="entr" presetSubtype="8" fill="hold" grpId="0" nodeType="afterEffect">
+                                  <p:stCondLst>
+                                    <p:cond delay="20000"/>
+                                  </p:stCondLst>
+                                  <p:childTnLst>
+                                    <p:set>
+                                      <p:cBhvr>
+                                        <p:cTn id="70" dur="1"/>
+                                        <p:tgtEl>
+                                          <p:spTgt spid="13"/>
+                                        </p:tgtEl>
+                                        <p:attrNameLst>
+                                          <p:attrName>style.visibility</p:attrName>
+                                        </p:attrNameLst>
+                                      </p:cBhvr>
+                                      <p:to>
+                                        <p:strVal val="visible"/>
+                                      </p:to>
+                                    </p:set>
+                                    <p:anim calcmode="lin" valueType="num">
+                                      <p:cBhvr additive="base">
+                                        <p:cTn id="71" dur="400"/>
+                                        <p:tgtEl>
+                                          <p:spTgt spid="13"/>
+                                        </p:tgtEl>
+                                        <p:attrNameLst>
+                                          <p:attrName>ppt_y</p:attrName>
+                                        </p:attrNameLst>
+                                      </p:cBhvr>
+                                      <p:tavLst>
+                                        <p:tav tm="0">
+                                          <p:val>
+                                            <p:strVal val="#ppt_y"/>
+                                          </p:val>
+                                        </p:tav>
+                                        <p:tav tm="100000">
+                                          <p:val>
+                                            <p:strVal val="#ppt_y"/>
+                                          </p:val>
+                                        </p:tav>
+                                      </p:tavLst>
+                                    </p:anim>
+                                    <p:anim calcmode="lin" valueType="num">
+                                      <p:cBhvr additive="base">
+                                        <p:cTn id="72" dur="400"/>
+                                        <p:tgtEl>
+                                          <p:spTgt spid="13"/>
+                                        </p:tgtEl>
+                                        <p:attrNameLst>
+                                          <p:attrName>ppt_x</p:attrName>
+                                        </p:attrNameLst>
+                                      </p:cBhvr>
+                                      <p:tavLst>
+                                        <p:tav tm="0">
+                                          <p:val>
+                                            <p:strVal val="0-#ppt_w/2"/>
+                                          </p:val>
+                                        </p:tav>
+                                        <p:tav tm="100000">
+                                          <p:val>
+                                            <p:strVal val="#ppt_x"/>
+                                          </p:val>
+                                        </p:tav>
+                                      </p:tavLst>
+                                    </p:anim>
+                                  </p:childTnLst>
+                                </p:cTn>
+                              </p:par>
+                              <p:par>
+                                <p:cTn id="73" presetID="2" presetClass="entr" presetSubtype="8" fill="hold" grpId="0" nodeType="afterEffect">
+                                  <p:stCondLst>
+                                    <p:cond delay="22100"/>
+                                  </p:stCondLst>
+                                  <p:childTnLst>
+                                    <p:set>
+                                      <p:cBhvr>
+                                        <p:cTn id="74" dur="1"/>
+                                        <p:tgtEl>
+                                          <p:spTgt spid="17"/>
+                                        </p:tgtEl>
+                                        <p:attrNameLst>
+                                          <p:attrName>style.visibility</p:attrName>
+                                        </p:attrNameLst>
+                                      </p:cBhvr>
+                                      <p:to>
+                                        <p:strVal val="visible"/>
+                                      </p:to>
+                                    </p:set>
+                                    <p:anim calcmode="lin" valueType="num">
+                                      <p:cBhvr additive="base">
+                                        <p:cTn id="75" dur="400"/>
+                                        <p:tgtEl>
+                                          <p:spTgt spid="17"/>
+                                        </p:tgtEl>
+                                        <p:attrNameLst>
+                                          <p:attrName>ppt_y</p:attrName>
+                                        </p:attrNameLst>
+                                      </p:cBhvr>
+                                      <p:tavLst>
+                                        <p:tav tm="0">
+                                          <p:val>
+                                            <p:strVal val="#ppt_y"/>
+                                          </p:val>
+                                        </p:tav>
+                                        <p:tav tm="100000">
+                                          <p:val>
+                                            <p:strVal val="#ppt_y"/>
+                                          </p:val>
+                                        </p:tav>
+                                      </p:tavLst>
+                                    </p:anim>
+                                    <p:anim calcmode="lin" valueType="num">
+                                      <p:cBhvr additive="base">
+                                        <p:cTn id="76" dur="400"/>
+                                        <p:tgtEl>
+                                          <p:spTgt spid="17"/>
+                                        </p:tgtEl>
+                                        <p:attrNameLst>
+                                          <p:attrName>ppt_x</p:attrName>
+                                        </p:attrNameLst>
+                                      </p:cBhvr>
+                                      <p:tavLst>
+                                        <p:tav tm="0">
+                                          <p:val>
+                                            <p:strVal val="0-#ppt_w/2"/>
+                                          </p:val>
+                                        </p:tav>
+                                        <p:tav tm="100000">
+                                          <p:val>
+                                            <p:strVal val="#ppt_x"/>
+                                          </p:val>
+                                        </p:tav>
+                                      </p:tavLst>
+                                    </p:anim>
+                                  </p:childTnLst>
+                                </p:cTn>
+                              </p:par>
+                              <p:par>
+                                <p:cTn id="77" presetID="2" presetClass="entr" presetSubtype="8" fill="hold" grpId="0" nodeType="afterEffect">
+                                  <p:stCondLst>
+                                    <p:cond delay="24300"/>
+                                  </p:stCondLst>
+                                  <p:childTnLst>
+                                    <p:set>
+                                      <p:cBhvr>
+                                        <p:cTn id="78" dur="1"/>
+                                        <p:tgtEl>
+                                          <p:spTgt spid="21"/>
+                                        </p:tgtEl>
+                                        <p:attrNameLst>
+                                          <p:attrName>style.visibility</p:attrName>
+                                        </p:attrNameLst>
+                                      </p:cBhvr>
+                                      <p:to>
+                                        <p:strVal val="visible"/>
+                                      </p:to>
+                                    </p:set>
+                                    <p:anim calcmode="lin" valueType="num">
+                                      <p:cBhvr additive="base">
+                                        <p:cTn id="79" dur="400"/>
+                                        <p:tgtEl>
+                                          <p:spTgt spid="21"/>
+                                        </p:tgtEl>
+                                        <p:attrNameLst>
+                                          <p:attrName>ppt_y</p:attrName>
+                                        </p:attrNameLst>
+                                      </p:cBhvr>
+                                      <p:tavLst>
+                                        <p:tav tm="0">
+                                          <p:val>
+                                            <p:strVal val="#ppt_y"/>
+                                          </p:val>
+                                        </p:tav>
+                                        <p:tav tm="100000">
+                                          <p:val>
+                                            <p:strVal val="#ppt_y"/>
+                                          </p:val>
+                                        </p:tav>
+                                      </p:tavLst>
+                                    </p:anim>
+                                    <p:anim calcmode="lin" valueType="num">
+                                      <p:cBhvr additive="base">
+                                        <p:cTn id="80" dur="400"/>
+                                        <p:tgtEl>
+                                          <p:spTgt spid="21"/>
+                                        </p:tgtEl>
+                                        <p:attrNameLst>
+                                          <p:attrName>ppt_x</p:attrName>
+                                        </p:attrNameLst>
+                                      </p:cBhvr>
+                                      <p:tavLst>
+                                        <p:tav tm="0">
+                                          <p:val>
+                                            <p:strVal val="0-#ppt_w/2"/>
+                                          </p:val>
+                                        </p:tav>
+                                        <p:tav tm="100000">
+                                          <p:val>
+                                            <p:strVal val="#ppt_x"/>
+                                          </p:val>
+                                        </p:tav>
+                                      </p:tavLst>
+                                    </p:anim>
+                                  </p:childTnLst>
+                                </p:cTn>
+                              </p:par>
+                              <p:par>
+                                <p:cTn id="81" presetID="2" presetClass="entr" presetSubtype="8" fill="hold" grpId="0" nodeType="afterEffect">
+                                  <p:stCondLst>
+                                    <p:cond delay="26600"/>
+                                  </p:stCondLst>
+                                  <p:childTnLst>
+                                    <p:set>
+                                      <p:cBhvr>
+                                        <p:cTn id="82" dur="1"/>
+                                        <p:tgtEl>
+                                          <p:spTgt spid="22"/>
+                                        </p:tgtEl>
+                                        <p:attrNameLst>
+                                          <p:attrName>style.visibility</p:attrName>
+                                        </p:attrNameLst>
+                                      </p:cBhvr>
+                                      <p:to>
+                                        <p:strVal val="visible"/>
+                                      </p:to>
+                                    </p:set>
+                                    <p:anim calcmode="lin" valueType="num">
+                                      <p:cBhvr additive="base">
+                                        <p:cTn id="83" dur="400"/>
+                                        <p:tgtEl>
+                                          <p:spTgt spid="22"/>
+                                        </p:tgtEl>
+                                        <p:attrNameLst>
+                                          <p:attrName>ppt_y</p:attrName>
+                                        </p:attrNameLst>
+                                      </p:cBhvr>
+                                      <p:tavLst>
+                                        <p:tav tm="0">
+                                          <p:val>
+                                            <p:strVal val="#ppt_y"/>
+                                          </p:val>
+                                        </p:tav>
+                                        <p:tav tm="100000">
+                                          <p:val>
+                                            <p:strVal val="#ppt_y"/>
+                                          </p:val>
+                                        </p:tav>
+                                      </p:tavLst>
+                                    </p:anim>
+                                    <p:anim calcmode="lin" valueType="num">
+                                      <p:cBhvr additive="base">
+                                        <p:cTn id="84" dur="400"/>
+                                        <p:tgtEl>
+                                          <p:spTgt spid="22"/>
+                                        </p:tgtEl>
+                                        <p:attrNameLst>
+                                          <p:attrName>ppt_x</p:attrName>
+                                        </p:attrNameLst>
+                                      </p:cBhvr>
+                                      <p:tavLst>
+                                        <p:tav tm="0">
+                                          <p:val>
+                                            <p:strVal val="0-#ppt_w/2"/>
+                                          </p:val>
+                                        </p:tav>
+                                        <p:tav tm="100000">
+                                          <p:val>
+                                            <p:strVal val="#ppt_x"/>
+                                          </p:val>
+                                        </p:tav>
+                                      </p:tavLst>
+                                    </p:anim>
+                                  </p:childTnLst>
+                                </p:cTn>
+                              </p:par>
+                              <p:par>
+                                <p:cTn id="85" presetID="2" presetClass="entr" presetSubtype="8" fill="hold" grpId="0" nodeType="afterEffect">
+                                  <p:stCondLst>
+                                    <p:cond delay="29000"/>
+                                  </p:stCondLst>
+                                  <p:childTnLst>
+                                    <p:set>
+                                      <p:cBhvr>
+                                        <p:cTn id="86" dur="1"/>
+                                        <p:tgtEl>
+                                          <p:spTgt spid="23"/>
+                                        </p:tgtEl>
+                                        <p:attrNameLst>
+                                          <p:attrName>style.visibility</p:attrName>
+                                        </p:attrNameLst>
+                                      </p:cBhvr>
+                                      <p:to>
+                                        <p:strVal val="visible"/>
+                                      </p:to>
+                                    </p:set>
+                                    <p:anim calcmode="lin" valueType="num">
+                                      <p:cBhvr additive="base">
+                                        <p:cTn id="87" dur="400"/>
+                                        <p:tgtEl>
+                                          <p:spTgt spid="23"/>
+                                        </p:tgtEl>
+                                        <p:attrNameLst>
+                                          <p:attrName>ppt_y</p:attrName>
+                                        </p:attrNameLst>
+                                      </p:cBhvr>
+                                      <p:tavLst>
+                                        <p:tav tm="0">
+                                          <p:val>
+                                            <p:strVal val="#ppt_y"/>
+                                          </p:val>
+                                        </p:tav>
+                                        <p:tav tm="100000">
+                                          <p:val>
+                                            <p:strVal val="#ppt_y"/>
+                                          </p:val>
+                                        </p:tav>
+                                      </p:tavLst>
+                                    </p:anim>
+                                    <p:anim calcmode="lin" valueType="num">
+                                      <p:cBhvr additive="base">
+                                        <p:cTn id="88" dur="400"/>
+                                        <p:tgtEl>
+                                          <p:spTgt spid="23"/>
+                                        </p:tgtEl>
+                                        <p:attrNameLst>
+                                          <p:attrName>ppt_x</p:attrName>
+                                        </p:attrNameLst>
+                                      </p:cBhvr>
+                                      <p:tavLst>
+                                        <p:tav tm="0">
+                                          <p:val>
+                                            <p:strVal val="0-#ppt_w/2"/>
+                                          </p:val>
+                                        </p:tav>
+                                        <p:tav tm="100000">
+                                          <p:val>
+                                            <p:strVal val="#ppt_x"/>
+                                          </p:val>
+                                        </p:tav>
+                                      </p:tavLst>
+                                    </p:anim>
+                                  </p:childTnLst>
+                                </p:cTn>
+                              </p:par>
+                            </p:childTnLst>
+                          </p:cTn>
+                        </p:par>
+                      </p:childTnLst>
+                    </p:cTn>
+                  </p:par>
+                </p:childTnLst>
+              </p:cTn>
+              <p:prevCondLst>
+                <p:cond evt="onPrev" delay="0">
+                  <p:tgtEl>
+                    <p:sldTgt/>
+                  </p:tgtEl>
+                </p:cond>
+              </p:prevCondLst>
+              <p:nextCondLst>
+                <p:cond evt="onNext" delay="0">
+                  <p:tgtEl>
+                    <p:sldTgt/>
+                  </p:tgtEl>
+                </p:cond>
+              </p:nextCondLst>
+            </p:seq>
+          </p:childTnLst>
+        </p:cTn>
+      </p:par>
+    </p:tnLst>
+    <p:bldLst>
+      <p:bldP spid="2" grpId="0"/>
+      <p:bldP spid="3" grpId="0"/>
+      <p:bldP spid="7" grpId="0"/>
+      <p:bldP spid="11" grpId="0"/>
+      <p:bldP spid="15" grpId="0"/>
+      <p:bldP spid="19" grpId="0"/>
+      <p:bldP spid="6" grpId="0"/>
+      <p:bldP spid="10" grpId="0"/>
+      <p:bldP spid="14" grpId="0"/>
+      <p:bldP spid="18" grpId="0"/>
+      <p:bldP spid="5" grpId="0"/>
+      <p:bldP spid="8" grpId="0"/>
+      <p:bldP spid="12" grpId="0"/>
+      <p:bldP spid="16" grpId="0"/>
+      <p:bldP spid="20" grpId="0"/>
+      <p:bldP spid="9" grpId="0"/>
+      <p:bldP spid="13" grpId="0"/>
+      <p:bldP spid="17" grpId="0"/>
+      <p:bldP spid="21" grpId="0"/>
+      <p:bldP spid="22" grpId="0"/>
+      <p:bldP spid="23" grpId="0"/>
+    </p:bldLst>
+  </p:timing>
 </p:sld>
 </file>
 
@@ -5019,7 +7836,7 @@
       </p:sp>
       <p:sp>
         <p:nvSpPr>
-          <p:cNvPr id="5" name="Text 2"/>
+          <p:cNvPr id="5" name="kpi-growth"/>
           <p:cNvSpPr/>
           <p:nvPr/>
         </p:nvSpPr>
@@ -5058,7 +7875,7 @@
       </p:sp>
       <p:sp>
         <p:nvSpPr>
-          <p:cNvPr id="6" name="Text 3"/>
+          <p:cNvPr id="6" name="growth-label"/>
           <p:cNvSpPr/>
           <p:nvPr/>
         </p:nvSpPr>
@@ -5159,7 +7976,7 @@
       </p:sp>
       <p:graphicFrame>
         <p:nvGraphicFramePr>
-          <p:cNvPr id="8" name="Chart 0" descr=""/>
+          <p:cNvPr id="8" name="chart-revenue" descr=""/>
           <p:cNvGraphicFramePr/>
           <p:nvPr/>
         </p:nvGraphicFramePr>
@@ -5256,6 +8073,160 @@
   <p:clrMapOvr>
     <a:masterClrMapping/>
   </p:clrMapOvr>
+  <p:transition spd="med">
+    <p:fade/>
+  </p:transition>
+  <p:timing>
+    <p:tnLst>
+      <p:par>
+        <p:cTn id="1" dur="indefinite" restart="never" nodeType="tmRoot">
+          <p:childTnLst>
+            <p:seq concurrent="1" nextAc="seek">
+              <p:cTn id="2" dur="indefinite" nodeType="mainSeq">
+                <p:childTnLst>
+                  <p:par>
+                    <p:cTn id="3" fill="hold">
+                      <p:stCondLst>
+                        <p:cond delay="indefinite"/>
+                        <p:cond evt="onBegin" delay="0">
+                          <p:tn val="2"/>
+                        </p:cond>
+                      </p:stCondLst>
+                      <p:childTnLst>
+                        <p:par>
+                          <p:cTn id="4" fill="hold">
+                            <p:stCondLst>
+                              <p:cond delay="0"/>
+                            </p:stCondLst>
+                            <p:childTnLst>
+                              <p:par>
+                                <p:cTn id="5" presetID="10" presetClass="entr" presetSubtype="0" fill="hold" grpId="0" nodeType="afterEffect">
+                                  <p:stCondLst>
+                                    <p:cond delay="0"/>
+                                  </p:stCondLst>
+                                  <p:childTnLst>
+                                    <p:set>
+                                      <p:cBhvr>
+                                        <p:cTn id="6" dur="1"/>
+                                        <p:tgtEl>
+                                          <p:spTgt spid="5"/>
+                                        </p:tgtEl>
+                                        <p:attrNameLst>
+                                          <p:attrName>style.visibility</p:attrName>
+                                        </p:attrNameLst>
+                                      </p:cBhvr>
+                                      <p:to>
+                                        <p:strVal val="visible"/>
+                                      </p:to>
+                                    </p:set>
+                                    <p:animEffect transition="in" filter="fade">
+                                      <p:cBhvr>
+                                        <p:cTn id="7" dur="450"/>
+                                        <p:tgtEl>
+                                          <p:spTgt spid="5"/>
+                                        </p:tgtEl>
+                                      </p:cBhvr>
+                                    </p:animEffect>
+                                  </p:childTnLst>
+                                </p:cTn>
+                              </p:par>
+                              <p:par>
+                                <p:cTn id="8" presetID="10" presetClass="entr" presetSubtype="0" fill="hold" grpId="0" nodeType="afterEffect">
+                                  <p:stCondLst>
+                                    <p:cond delay="450"/>
+                                  </p:stCondLst>
+                                  <p:childTnLst>
+                                    <p:set>
+                                      <p:cBhvr>
+                                        <p:cTn id="9" dur="1"/>
+                                        <p:tgtEl>
+                                          <p:spTgt spid="6"/>
+                                        </p:tgtEl>
+                                        <p:attrNameLst>
+                                          <p:attrName>style.visibility</p:attrName>
+                                        </p:attrNameLst>
+                                      </p:cBhvr>
+                                      <p:to>
+                                        <p:strVal val="visible"/>
+                                      </p:to>
+                                    </p:set>
+                                    <p:animEffect transition="in" filter="fade">
+                                      <p:cBhvr>
+                                        <p:cTn id="10" dur="350"/>
+                                        <p:tgtEl>
+                                          <p:spTgt spid="6"/>
+                                        </p:tgtEl>
+                                      </p:cBhvr>
+                                    </p:animEffect>
+                                  </p:childTnLst>
+                                </p:cTn>
+                              </p:par>
+                              <p:par>
+                                <p:cTn id="11" presetID="22" presetClass="entr" presetSubtype="8" fill="hold" grpId="0" nodeType="afterEffect">
+                                  <p:stCondLst>
+                                    <p:cond delay="800"/>
+                                  </p:stCondLst>
+                                  <p:childTnLst>
+                                    <p:set>
+                                      <p:cBhvr>
+                                        <p:cTn id="12" dur="1"/>
+                                        <p:tgtEl>
+                                          <p:spTgt spid="8"/>
+                                        </p:tgtEl>
+                                        <p:attrNameLst>
+                                          <p:attrName>style.visibility</p:attrName>
+                                        </p:attrNameLst>
+                                      </p:cBhvr>
+                                      <p:to>
+                                        <p:strVal val="visible"/>
+                                      </p:to>
+                                    </p:set>
+                                    <p:animEffect transition="in" filter="wipe(right)">
+                                      <p:cBhvr>
+                                        <p:cTn id="13" dur="700"/>
+                                        <p:tgtEl>
+                                          <p:spTgt spid="8"/>
+                                        </p:tgtEl>
+                                      </p:cBhvr>
+                                    </p:animEffect>
+                                  </p:childTnLst>
+                                </p:cTn>
+                              </p:par>
+                            </p:childTnLst>
+                          </p:cTn>
+                        </p:par>
+                      </p:childTnLst>
+                    </p:cTn>
+                  </p:par>
+                </p:childTnLst>
+              </p:cTn>
+              <p:prevCondLst>
+                <p:cond evt="onPrev" delay="0">
+                  <p:tgtEl>
+                    <p:sldTgt/>
+                  </p:tgtEl>
+                </p:cond>
+              </p:prevCondLst>
+              <p:nextCondLst>
+                <p:cond evt="onNext" delay="0">
+                  <p:tgtEl>
+                    <p:sldTgt/>
+                  </p:tgtEl>
+                </p:cond>
+              </p:nextCondLst>
+            </p:seq>
+          </p:childTnLst>
+        </p:cTn>
+      </p:par>
+    </p:tnLst>
+    <p:bldLst>
+      <p:bldP spid="5" grpId="0"/>
+      <p:bldP spid="6" grpId="0"/>
+      <p:bldGraphic spid="8" grpId="0">
+        <p:bldAsOne/>
+      </p:bldGraphic>
+    </p:bldLst>
+  </p:timing>
 </p:sld>
 </file>
 
@@ -5772,6 +8743,480 @@
   <p:clrMapOvr>
     <a:masterClrMapping/>
   </p:clrMapOvr>
+  <p:transition spd="med">
+    <p:fade/>
+  </p:transition>
+  <p:timing>
+    <p:tnLst>
+      <p:par>
+        <p:cTn id="1" dur="indefinite" restart="never" nodeType="tmRoot">
+          <p:childTnLst>
+            <p:seq concurrent="1" nextAc="seek">
+              <p:cTn id="2" dur="indefinite" nodeType="mainSeq">
+                <p:childTnLst>
+                  <p:par>
+                    <p:cTn id="3" fill="hold">
+                      <p:stCondLst>
+                        <p:cond delay="indefinite"/>
+                        <p:cond evt="onBegin" delay="0">
+                          <p:tn val="2"/>
+                        </p:cond>
+                      </p:stCondLst>
+                      <p:childTnLst>
+                        <p:par>
+                          <p:cTn id="4" fill="hold">
+                            <p:stCondLst>
+                              <p:cond delay="0"/>
+                            </p:stCondLst>
+                            <p:childTnLst>
+                              <p:par>
+                                <p:cTn id="5" presetID="10" presetClass="entr" presetSubtype="0" fill="hold" grpId="0" nodeType="afterEffect">
+                                  <p:stCondLst>
+                                    <p:cond delay="0"/>
+                                  </p:stCondLst>
+                                  <p:childTnLst>
+                                    <p:set>
+                                      <p:cBhvr>
+                                        <p:cTn id="6" dur="1"/>
+                                        <p:tgtEl>
+                                          <p:spTgt spid="5"/>
+                                        </p:tgtEl>
+                                        <p:attrNameLst>
+                                          <p:attrName>style.visibility</p:attrName>
+                                        </p:attrNameLst>
+                                      </p:cBhvr>
+                                      <p:to>
+                                        <p:strVal val="visible"/>
+                                      </p:to>
+                                    </p:set>
+                                    <p:animEffect transition="in" filter="fade">
+                                      <p:cBhvr>
+                                        <p:cTn id="7" dur="400"/>
+                                        <p:tgtEl>
+                                          <p:spTgt spid="5"/>
+                                        </p:tgtEl>
+                                      </p:cBhvr>
+                                    </p:animEffect>
+                                  </p:childTnLst>
+                                </p:cTn>
+                              </p:par>
+                              <p:par>
+                                <p:cTn id="8" presetID="10" presetClass="entr" presetSubtype="0" fill="hold" grpId="0" nodeType="afterEffect">
+                                  <p:stCondLst>
+                                    <p:cond delay="550"/>
+                                  </p:stCondLst>
+                                  <p:childTnLst>
+                                    <p:set>
+                                      <p:cBhvr>
+                                        <p:cTn id="9" dur="1"/>
+                                        <p:tgtEl>
+                                          <p:spTgt spid="2"/>
+                                        </p:tgtEl>
+                                        <p:attrNameLst>
+                                          <p:attrName>style.visibility</p:attrName>
+                                        </p:attrNameLst>
+                                      </p:cBhvr>
+                                      <p:to>
+                                        <p:strVal val="visible"/>
+                                      </p:to>
+                                    </p:set>
+                                    <p:animEffect transition="in" filter="fade">
+                                      <p:cBhvr>
+                                        <p:cTn id="10" dur="400"/>
+                                        <p:tgtEl>
+                                          <p:spTgt spid="2"/>
+                                        </p:tgtEl>
+                                      </p:cBhvr>
+                                    </p:animEffect>
+                                  </p:childTnLst>
+                                </p:cTn>
+                              </p:par>
+                              <p:par>
+                                <p:cTn id="11" presetID="10" presetClass="entr" presetSubtype="0" fill="hold" grpId="0" nodeType="afterEffect">
+                                  <p:stCondLst>
+                                    <p:cond delay="1250"/>
+                                  </p:stCondLst>
+                                  <p:childTnLst>
+                                    <p:set>
+                                      <p:cBhvr>
+                                        <p:cTn id="12" dur="1"/>
+                                        <p:tgtEl>
+                                          <p:spTgt spid="3"/>
+                                        </p:tgtEl>
+                                        <p:attrNameLst>
+                                          <p:attrName>style.visibility</p:attrName>
+                                        </p:attrNameLst>
+                                      </p:cBhvr>
+                                      <p:to>
+                                        <p:strVal val="visible"/>
+                                      </p:to>
+                                    </p:set>
+                                    <p:animEffect transition="in" filter="fade">
+                                      <p:cBhvr>
+                                        <p:cTn id="13" dur="400"/>
+                                        <p:tgtEl>
+                                          <p:spTgt spid="3"/>
+                                        </p:tgtEl>
+                                      </p:cBhvr>
+                                    </p:animEffect>
+                                  </p:childTnLst>
+                                </p:cTn>
+                              </p:par>
+                              <p:par>
+                                <p:cTn id="14" presetID="10" presetClass="entr" presetSubtype="0" fill="hold" grpId="0" nodeType="afterEffect">
+                                  <p:stCondLst>
+                                    <p:cond delay="2100"/>
+                                  </p:stCondLst>
+                                  <p:childTnLst>
+                                    <p:set>
+                                      <p:cBhvr>
+                                        <p:cTn id="15" dur="1"/>
+                                        <p:tgtEl>
+                                          <p:spTgt spid="8"/>
+                                        </p:tgtEl>
+                                        <p:attrNameLst>
+                                          <p:attrName>style.visibility</p:attrName>
+                                        </p:attrNameLst>
+                                      </p:cBhvr>
+                                      <p:to>
+                                        <p:strVal val="visible"/>
+                                      </p:to>
+                                    </p:set>
+                                    <p:animEffect transition="in" filter="fade">
+                                      <p:cBhvr>
+                                        <p:cTn id="16" dur="400"/>
+                                        <p:tgtEl>
+                                          <p:spTgt spid="8"/>
+                                        </p:tgtEl>
+                                      </p:cBhvr>
+                                    </p:animEffect>
+                                  </p:childTnLst>
+                                </p:cTn>
+                              </p:par>
+                              <p:par>
+                                <p:cTn id="17" presetID="10" presetClass="entr" presetSubtype="0" fill="hold" grpId="0" nodeType="afterEffect">
+                                  <p:stCondLst>
+                                    <p:cond delay="3100"/>
+                                  </p:stCondLst>
+                                  <p:childTnLst>
+                                    <p:set>
+                                      <p:cBhvr>
+                                        <p:cTn id="18" dur="1"/>
+                                        <p:tgtEl>
+                                          <p:spTgt spid="9"/>
+                                        </p:tgtEl>
+                                        <p:attrNameLst>
+                                          <p:attrName>style.visibility</p:attrName>
+                                        </p:attrNameLst>
+                                      </p:cBhvr>
+                                      <p:to>
+                                        <p:strVal val="visible"/>
+                                      </p:to>
+                                    </p:set>
+                                    <p:animEffect transition="in" filter="fade">
+                                      <p:cBhvr>
+                                        <p:cTn id="19" dur="400"/>
+                                        <p:tgtEl>
+                                          <p:spTgt spid="9"/>
+                                        </p:tgtEl>
+                                      </p:cBhvr>
+                                    </p:animEffect>
+                                  </p:childTnLst>
+                                </p:cTn>
+                              </p:par>
+                              <p:par>
+                                <p:cTn id="20" presetID="10" presetClass="entr" presetSubtype="0" fill="hold" grpId="0" nodeType="afterEffect">
+                                  <p:stCondLst>
+                                    <p:cond delay="4250"/>
+                                  </p:stCondLst>
+                                  <p:childTnLst>
+                                    <p:set>
+                                      <p:cBhvr>
+                                        <p:cTn id="21" dur="1"/>
+                                        <p:tgtEl>
+                                          <p:spTgt spid="6"/>
+                                        </p:tgtEl>
+                                        <p:attrNameLst>
+                                          <p:attrName>style.visibility</p:attrName>
+                                        </p:attrNameLst>
+                                      </p:cBhvr>
+                                      <p:to>
+                                        <p:strVal val="visible"/>
+                                      </p:to>
+                                    </p:set>
+                                    <p:animEffect transition="in" filter="fade">
+                                      <p:cBhvr>
+                                        <p:cTn id="22" dur="400"/>
+                                        <p:tgtEl>
+                                          <p:spTgt spid="6"/>
+                                        </p:tgtEl>
+                                      </p:cBhvr>
+                                    </p:animEffect>
+                                  </p:childTnLst>
+                                </p:cTn>
+                              </p:par>
+                              <p:par>
+                                <p:cTn id="23" presetID="10" presetClass="entr" presetSubtype="0" fill="hold" grpId="0" nodeType="afterEffect">
+                                  <p:stCondLst>
+                                    <p:cond delay="5550"/>
+                                  </p:stCondLst>
+                                  <p:childTnLst>
+                                    <p:set>
+                                      <p:cBhvr>
+                                        <p:cTn id="24" dur="1"/>
+                                        <p:tgtEl>
+                                          <p:spTgt spid="10"/>
+                                        </p:tgtEl>
+                                        <p:attrNameLst>
+                                          <p:attrName>style.visibility</p:attrName>
+                                        </p:attrNameLst>
+                                      </p:cBhvr>
+                                      <p:to>
+                                        <p:strVal val="visible"/>
+                                      </p:to>
+                                    </p:set>
+                                    <p:animEffect transition="in" filter="fade">
+                                      <p:cBhvr>
+                                        <p:cTn id="25" dur="400"/>
+                                        <p:tgtEl>
+                                          <p:spTgt spid="10"/>
+                                        </p:tgtEl>
+                                      </p:cBhvr>
+                                    </p:animEffect>
+                                  </p:childTnLst>
+                                </p:cTn>
+                              </p:par>
+                              <p:par>
+                                <p:cTn id="26" presetID="10" presetClass="entr" presetSubtype="0" fill="hold" grpId="0" nodeType="afterEffect">
+                                  <p:stCondLst>
+                                    <p:cond delay="7000"/>
+                                  </p:stCondLst>
+                                  <p:childTnLst>
+                                    <p:set>
+                                      <p:cBhvr>
+                                        <p:cTn id="27" dur="1"/>
+                                        <p:tgtEl>
+                                          <p:spTgt spid="7"/>
+                                        </p:tgtEl>
+                                        <p:attrNameLst>
+                                          <p:attrName>style.visibility</p:attrName>
+                                        </p:attrNameLst>
+                                      </p:cBhvr>
+                                      <p:to>
+                                        <p:strVal val="visible"/>
+                                      </p:to>
+                                    </p:set>
+                                    <p:animEffect transition="in" filter="fade">
+                                      <p:cBhvr>
+                                        <p:cTn id="28" dur="400"/>
+                                        <p:tgtEl>
+                                          <p:spTgt spid="7"/>
+                                        </p:tgtEl>
+                                      </p:cBhvr>
+                                    </p:animEffect>
+                                  </p:childTnLst>
+                                </p:cTn>
+                              </p:par>
+                              <p:par>
+                                <p:cTn id="29" presetID="10" presetClass="entr" presetSubtype="0" fill="hold" grpId="0" nodeType="afterEffect">
+                                  <p:stCondLst>
+                                    <p:cond delay="8600"/>
+                                  </p:stCondLst>
+                                  <p:childTnLst>
+                                    <p:set>
+                                      <p:cBhvr>
+                                        <p:cTn id="30" dur="1"/>
+                                        <p:tgtEl>
+                                          <p:spTgt spid="11"/>
+                                        </p:tgtEl>
+                                        <p:attrNameLst>
+                                          <p:attrName>style.visibility</p:attrName>
+                                        </p:attrNameLst>
+                                      </p:cBhvr>
+                                      <p:to>
+                                        <p:strVal val="visible"/>
+                                      </p:to>
+                                    </p:set>
+                                    <p:animEffect transition="in" filter="fade">
+                                      <p:cBhvr>
+                                        <p:cTn id="31" dur="400"/>
+                                        <p:tgtEl>
+                                          <p:spTgt spid="11"/>
+                                        </p:tgtEl>
+                                      </p:cBhvr>
+                                    </p:animEffect>
+                                  </p:childTnLst>
+                                </p:cTn>
+                              </p:par>
+                              <p:par>
+                                <p:cTn id="32" presetID="10" presetClass="entr" presetSubtype="0" fill="hold" grpId="0" nodeType="afterEffect">
+                                  <p:stCondLst>
+                                    <p:cond delay="10350"/>
+                                  </p:stCondLst>
+                                  <p:childTnLst>
+                                    <p:set>
+                                      <p:cBhvr>
+                                        <p:cTn id="33" dur="1"/>
+                                        <p:tgtEl>
+                                          <p:spTgt spid="12"/>
+                                        </p:tgtEl>
+                                        <p:attrNameLst>
+                                          <p:attrName>style.visibility</p:attrName>
+                                        </p:attrNameLst>
+                                      </p:cBhvr>
+                                      <p:to>
+                                        <p:strVal val="visible"/>
+                                      </p:to>
+                                    </p:set>
+                                    <p:animEffect transition="in" filter="fade">
+                                      <p:cBhvr>
+                                        <p:cTn id="34" dur="400"/>
+                                        <p:tgtEl>
+                                          <p:spTgt spid="12"/>
+                                        </p:tgtEl>
+                                      </p:cBhvr>
+                                    </p:animEffect>
+                                  </p:childTnLst>
+                                </p:cTn>
+                              </p:par>
+                              <p:par>
+                                <p:cTn id="35" presetID="10" presetClass="entr" presetSubtype="0" fill="hold" grpId="0" nodeType="afterEffect">
+                                  <p:stCondLst>
+                                    <p:cond delay="12250"/>
+                                  </p:stCondLst>
+                                  <p:childTnLst>
+                                    <p:set>
+                                      <p:cBhvr>
+                                        <p:cTn id="36" dur="1"/>
+                                        <p:tgtEl>
+                                          <p:spTgt spid="13"/>
+                                        </p:tgtEl>
+                                        <p:attrNameLst>
+                                          <p:attrName>style.visibility</p:attrName>
+                                        </p:attrNameLst>
+                                      </p:cBhvr>
+                                      <p:to>
+                                        <p:strVal val="visible"/>
+                                      </p:to>
+                                    </p:set>
+                                    <p:animEffect transition="in" filter="fade">
+                                      <p:cBhvr>
+                                        <p:cTn id="37" dur="400"/>
+                                        <p:tgtEl>
+                                          <p:spTgt spid="13"/>
+                                        </p:tgtEl>
+                                      </p:cBhvr>
+                                    </p:animEffect>
+                                  </p:childTnLst>
+                                </p:cTn>
+                              </p:par>
+                              <p:par>
+                                <p:cTn id="38" presetID="10" presetClass="entr" presetSubtype="0" fill="hold" grpId="0" nodeType="afterEffect">
+                                  <p:stCondLst>
+                                    <p:cond delay="14300"/>
+                                  </p:stCondLst>
+                                  <p:childTnLst>
+                                    <p:set>
+                                      <p:cBhvr>
+                                        <p:cTn id="39" dur="1"/>
+                                        <p:tgtEl>
+                                          <p:spTgt spid="14"/>
+                                        </p:tgtEl>
+                                        <p:attrNameLst>
+                                          <p:attrName>style.visibility</p:attrName>
+                                        </p:attrNameLst>
+                                      </p:cBhvr>
+                                      <p:to>
+                                        <p:strVal val="visible"/>
+                                      </p:to>
+                                    </p:set>
+                                    <p:animEffect transition="in" filter="fade">
+                                      <p:cBhvr>
+                                        <p:cTn id="40" dur="400"/>
+                                        <p:tgtEl>
+                                          <p:spTgt spid="14"/>
+                                        </p:tgtEl>
+                                      </p:cBhvr>
+                                    </p:animEffect>
+                                  </p:childTnLst>
+                                </p:cTn>
+                              </p:par>
+                              <p:par>
+                                <p:cTn id="41" presetID="10" presetClass="entr" presetSubtype="0" fill="hold" grpId="0" nodeType="afterEffect">
+                                  <p:stCondLst>
+                                    <p:cond delay="16500"/>
+                                  </p:stCondLst>
+                                  <p:childTnLst>
+                                    <p:set>
+                                      <p:cBhvr>
+                                        <p:cTn id="42" dur="1"/>
+                                        <p:tgtEl>
+                                          <p:spTgt spid="15"/>
+                                        </p:tgtEl>
+                                        <p:attrNameLst>
+                                          <p:attrName>style.visibility</p:attrName>
+                                        </p:attrNameLst>
+                                      </p:cBhvr>
+                                      <p:to>
+                                        <p:strVal val="visible"/>
+                                      </p:to>
+                                    </p:set>
+                                    <p:animEffect transition="in" filter="fade">
+                                      <p:cBhvr>
+                                        <p:cTn id="43" dur="400"/>
+                                        <p:tgtEl>
+                                          <p:spTgt spid="15"/>
+                                        </p:tgtEl>
+                                      </p:cBhvr>
+                                    </p:animEffect>
+                                  </p:childTnLst>
+                                </p:cTn>
+                              </p:par>
+                            </p:childTnLst>
+                          </p:cTn>
+                        </p:par>
+                      </p:childTnLst>
+                    </p:cTn>
+                  </p:par>
+                </p:childTnLst>
+              </p:cTn>
+              <p:prevCondLst>
+                <p:cond evt="onPrev" delay="0">
+                  <p:tgtEl>
+                    <p:sldTgt/>
+                  </p:tgtEl>
+                </p:cond>
+              </p:prevCondLst>
+              <p:nextCondLst>
+                <p:cond evt="onNext" delay="0">
+                  <p:tgtEl>
+                    <p:sldTgt/>
+                  </p:tgtEl>
+                </p:cond>
+              </p:nextCondLst>
+            </p:seq>
+          </p:childTnLst>
+        </p:cTn>
+      </p:par>
+    </p:tnLst>
+    <p:bldLst>
+      <p:bldGraphic spid="5" grpId="0">
+        <p:bldAsOne/>
+      </p:bldGraphic>
+      <p:bldP spid="2" grpId="0"/>
+      <p:bldP spid="3" grpId="0"/>
+      <p:bldP spid="8" grpId="0"/>
+      <p:bldP spid="9" grpId="0"/>
+      <p:bldP spid="6" grpId="0"/>
+      <p:bldP spid="10" grpId="0"/>
+      <p:bldP spid="7" grpId="0"/>
+      <p:bldP spid="11" grpId="0"/>
+      <p:bldP spid="12" grpId="0"/>
+      <p:bldP spid="13" grpId="0"/>
+      <p:bldP spid="14" grpId="0"/>
+      <p:bldP spid="15" grpId="0"/>
+    </p:bldLst>
+  </p:timing>
 </p:sld>
 </file>
 
@@ -6171,6 +9616,384 @@
   <p:clrMapOvr>
     <a:masterClrMapping/>
   </p:clrMapOvr>
+  <p:transition spd="med">
+    <p:fade/>
+  </p:transition>
+  <p:timing>
+    <p:tnLst>
+      <p:par>
+        <p:cTn id="1" dur="indefinite" restart="never" nodeType="tmRoot">
+          <p:childTnLst>
+            <p:seq concurrent="1" nextAc="seek">
+              <p:cTn id="2" dur="indefinite" nodeType="mainSeq">
+                <p:childTnLst>
+                  <p:par>
+                    <p:cTn id="3" fill="hold">
+                      <p:stCondLst>
+                        <p:cond delay="indefinite"/>
+                        <p:cond evt="onBegin" delay="0">
+                          <p:tn val="2"/>
+                        </p:cond>
+                      </p:stCondLst>
+                      <p:childTnLst>
+                        <p:par>
+                          <p:cTn id="4" fill="hold">
+                            <p:stCondLst>
+                              <p:cond delay="0"/>
+                            </p:stCondLst>
+                            <p:childTnLst>
+                              <p:par>
+                                <p:cTn id="5" presetID="10" presetClass="entr" presetSubtype="0" fill="hold" grpId="0" nodeType="afterEffect">
+                                  <p:stCondLst>
+                                    <p:cond delay="0"/>
+                                  </p:stCondLst>
+                                  <p:childTnLst>
+                                    <p:set>
+                                      <p:cBhvr>
+                                        <p:cTn id="6" dur="1"/>
+                                        <p:tgtEl>
+                                          <p:spTgt spid="9"/>
+                                        </p:tgtEl>
+                                        <p:attrNameLst>
+                                          <p:attrName>style.visibility</p:attrName>
+                                        </p:attrNameLst>
+                                      </p:cBhvr>
+                                      <p:to>
+                                        <p:strVal val="visible"/>
+                                      </p:to>
+                                    </p:set>
+                                    <p:animEffect transition="in" filter="fade">
+                                      <p:cBhvr>
+                                        <p:cTn id="7" dur="400"/>
+                                        <p:tgtEl>
+                                          <p:spTgt spid="9"/>
+                                        </p:tgtEl>
+                                      </p:cBhvr>
+                                    </p:animEffect>
+                                  </p:childTnLst>
+                                </p:cTn>
+                              </p:par>
+                              <p:par>
+                                <p:cTn id="8" presetID="10" presetClass="entr" presetSubtype="0" fill="hold" grpId="0" nodeType="afterEffect">
+                                  <p:stCondLst>
+                                    <p:cond delay="520"/>
+                                  </p:stCondLst>
+                                  <p:childTnLst>
+                                    <p:set>
+                                      <p:cBhvr>
+                                        <p:cTn id="9" dur="1"/>
+                                        <p:tgtEl>
+                                          <p:spTgt spid="2"/>
+                                        </p:tgtEl>
+                                        <p:attrNameLst>
+                                          <p:attrName>style.visibility</p:attrName>
+                                        </p:attrNameLst>
+                                      </p:cBhvr>
+                                      <p:to>
+                                        <p:strVal val="visible"/>
+                                      </p:to>
+                                    </p:set>
+                                    <p:animEffect transition="in" filter="fade">
+                                      <p:cBhvr>
+                                        <p:cTn id="10" dur="400"/>
+                                        <p:tgtEl>
+                                          <p:spTgt spid="2"/>
+                                        </p:tgtEl>
+                                      </p:cBhvr>
+                                    </p:animEffect>
+                                  </p:childTnLst>
+                                </p:cTn>
+                              </p:par>
+                              <p:par>
+                                <p:cTn id="11" presetID="10" presetClass="entr" presetSubtype="0" fill="hold" grpId="0" nodeType="afterEffect">
+                                  <p:stCondLst>
+                                    <p:cond delay="1160"/>
+                                  </p:stCondLst>
+                                  <p:childTnLst>
+                                    <p:set>
+                                      <p:cBhvr>
+                                        <p:cTn id="12" dur="1"/>
+                                        <p:tgtEl>
+                                          <p:spTgt spid="3"/>
+                                        </p:tgtEl>
+                                        <p:attrNameLst>
+                                          <p:attrName>style.visibility</p:attrName>
+                                        </p:attrNameLst>
+                                      </p:cBhvr>
+                                      <p:to>
+                                        <p:strVal val="visible"/>
+                                      </p:to>
+                                    </p:set>
+                                    <p:animEffect transition="in" filter="fade">
+                                      <p:cBhvr>
+                                        <p:cTn id="13" dur="400"/>
+                                        <p:tgtEl>
+                                          <p:spTgt spid="3"/>
+                                        </p:tgtEl>
+                                      </p:cBhvr>
+                                    </p:animEffect>
+                                  </p:childTnLst>
+                                </p:cTn>
+                              </p:par>
+                              <p:par>
+                                <p:cTn id="14" presetID="10" presetClass="entr" presetSubtype="0" fill="hold" grpId="0" nodeType="afterEffect">
+                                  <p:stCondLst>
+                                    <p:cond delay="1920"/>
+                                  </p:stCondLst>
+                                  <p:childTnLst>
+                                    <p:set>
+                                      <p:cBhvr>
+                                        <p:cTn id="15" dur="1"/>
+                                        <p:tgtEl>
+                                          <p:spTgt spid="5"/>
+                                        </p:tgtEl>
+                                        <p:attrNameLst>
+                                          <p:attrName>style.visibility</p:attrName>
+                                        </p:attrNameLst>
+                                      </p:cBhvr>
+                                      <p:to>
+                                        <p:strVal val="visible"/>
+                                      </p:to>
+                                    </p:set>
+                                    <p:animEffect transition="in" filter="fade">
+                                      <p:cBhvr>
+                                        <p:cTn id="16" dur="400"/>
+                                        <p:tgtEl>
+                                          <p:spTgt spid="5"/>
+                                        </p:tgtEl>
+                                      </p:cBhvr>
+                                    </p:animEffect>
+                                  </p:childTnLst>
+                                </p:cTn>
+                              </p:par>
+                              <p:par>
+                                <p:cTn id="17" presetID="10" presetClass="entr" presetSubtype="0" fill="hold" grpId="0" nodeType="afterEffect">
+                                  <p:stCondLst>
+                                    <p:cond delay="2800"/>
+                                  </p:stCondLst>
+                                  <p:childTnLst>
+                                    <p:set>
+                                      <p:cBhvr>
+                                        <p:cTn id="18" dur="1"/>
+                                        <p:tgtEl>
+                                          <p:spTgt spid="6"/>
+                                        </p:tgtEl>
+                                        <p:attrNameLst>
+                                          <p:attrName>style.visibility</p:attrName>
+                                        </p:attrNameLst>
+                                      </p:cBhvr>
+                                      <p:to>
+                                        <p:strVal val="visible"/>
+                                      </p:to>
+                                    </p:set>
+                                    <p:animEffect transition="in" filter="fade">
+                                      <p:cBhvr>
+                                        <p:cTn id="19" dur="400"/>
+                                        <p:tgtEl>
+                                          <p:spTgt spid="6"/>
+                                        </p:tgtEl>
+                                      </p:cBhvr>
+                                    </p:animEffect>
+                                  </p:childTnLst>
+                                </p:cTn>
+                              </p:par>
+                              <p:par>
+                                <p:cTn id="20" presetID="10" presetClass="entr" presetSubtype="0" fill="hold" grpId="0" nodeType="afterEffect">
+                                  <p:stCondLst>
+                                    <p:cond delay="3800"/>
+                                  </p:stCondLst>
+                                  <p:childTnLst>
+                                    <p:set>
+                                      <p:cBhvr>
+                                        <p:cTn id="21" dur="1"/>
+                                        <p:tgtEl>
+                                          <p:spTgt spid="7"/>
+                                        </p:tgtEl>
+                                        <p:attrNameLst>
+                                          <p:attrName>style.visibility</p:attrName>
+                                        </p:attrNameLst>
+                                      </p:cBhvr>
+                                      <p:to>
+                                        <p:strVal val="visible"/>
+                                      </p:to>
+                                    </p:set>
+                                    <p:animEffect transition="in" filter="fade">
+                                      <p:cBhvr>
+                                        <p:cTn id="22" dur="400"/>
+                                        <p:tgtEl>
+                                          <p:spTgt spid="7"/>
+                                        </p:tgtEl>
+                                      </p:cBhvr>
+                                    </p:animEffect>
+                                  </p:childTnLst>
+                                </p:cTn>
+                              </p:par>
+                              <p:par>
+                                <p:cTn id="23" presetID="10" presetClass="entr" presetSubtype="0" fill="hold" grpId="0" nodeType="afterEffect">
+                                  <p:stCondLst>
+                                    <p:cond delay="4920"/>
+                                  </p:stCondLst>
+                                  <p:childTnLst>
+                                    <p:set>
+                                      <p:cBhvr>
+                                        <p:cTn id="24" dur="1"/>
+                                        <p:tgtEl>
+                                          <p:spTgt spid="8"/>
+                                        </p:tgtEl>
+                                        <p:attrNameLst>
+                                          <p:attrName>style.visibility</p:attrName>
+                                        </p:attrNameLst>
+                                      </p:cBhvr>
+                                      <p:to>
+                                        <p:strVal val="visible"/>
+                                      </p:to>
+                                    </p:set>
+                                    <p:animEffect transition="in" filter="fade">
+                                      <p:cBhvr>
+                                        <p:cTn id="25" dur="400"/>
+                                        <p:tgtEl>
+                                          <p:spTgt spid="8"/>
+                                        </p:tgtEl>
+                                      </p:cBhvr>
+                                    </p:animEffect>
+                                  </p:childTnLst>
+                                </p:cTn>
+                              </p:par>
+                              <p:par>
+                                <p:cTn id="26" presetID="10" presetClass="entr" presetSubtype="0" fill="hold" grpId="0" nodeType="afterEffect">
+                                  <p:stCondLst>
+                                    <p:cond delay="6160"/>
+                                  </p:stCondLst>
+                                  <p:childTnLst>
+                                    <p:set>
+                                      <p:cBhvr>
+                                        <p:cTn id="27" dur="1"/>
+                                        <p:tgtEl>
+                                          <p:spTgt spid="10"/>
+                                        </p:tgtEl>
+                                        <p:attrNameLst>
+                                          <p:attrName>style.visibility</p:attrName>
+                                        </p:attrNameLst>
+                                      </p:cBhvr>
+                                      <p:to>
+                                        <p:strVal val="visible"/>
+                                      </p:to>
+                                    </p:set>
+                                    <p:animEffect transition="in" filter="fade">
+                                      <p:cBhvr>
+                                        <p:cTn id="28" dur="400"/>
+                                        <p:tgtEl>
+                                          <p:spTgt spid="10"/>
+                                        </p:tgtEl>
+                                      </p:cBhvr>
+                                    </p:animEffect>
+                                  </p:childTnLst>
+                                </p:cTn>
+                              </p:par>
+                              <p:par>
+                                <p:cTn id="29" presetID="10" presetClass="entr" presetSubtype="0" fill="hold" grpId="0" nodeType="afterEffect">
+                                  <p:stCondLst>
+                                    <p:cond delay="7520"/>
+                                  </p:stCondLst>
+                                  <p:childTnLst>
+                                    <p:set>
+                                      <p:cBhvr>
+                                        <p:cTn id="30" dur="1"/>
+                                        <p:tgtEl>
+                                          <p:spTgt spid="11"/>
+                                        </p:tgtEl>
+                                        <p:attrNameLst>
+                                          <p:attrName>style.visibility</p:attrName>
+                                        </p:attrNameLst>
+                                      </p:cBhvr>
+                                      <p:to>
+                                        <p:strVal val="visible"/>
+                                      </p:to>
+                                    </p:set>
+                                    <p:animEffect transition="in" filter="fade">
+                                      <p:cBhvr>
+                                        <p:cTn id="31" dur="400"/>
+                                        <p:tgtEl>
+                                          <p:spTgt spid="11"/>
+                                        </p:tgtEl>
+                                      </p:cBhvr>
+                                    </p:animEffect>
+                                  </p:childTnLst>
+                                </p:cTn>
+                              </p:par>
+                              <p:par>
+                                <p:cTn id="32" presetID="10" presetClass="entr" presetSubtype="0" fill="hold" grpId="0" nodeType="afterEffect">
+                                  <p:stCondLst>
+                                    <p:cond delay="9000"/>
+                                  </p:stCondLst>
+                                  <p:childTnLst>
+                                    <p:set>
+                                      <p:cBhvr>
+                                        <p:cTn id="33" dur="1"/>
+                                        <p:tgtEl>
+                                          <p:spTgt spid="12"/>
+                                        </p:tgtEl>
+                                        <p:attrNameLst>
+                                          <p:attrName>style.visibility</p:attrName>
+                                        </p:attrNameLst>
+                                      </p:cBhvr>
+                                      <p:to>
+                                        <p:strVal val="visible"/>
+                                      </p:to>
+                                    </p:set>
+                                    <p:animEffect transition="in" filter="fade">
+                                      <p:cBhvr>
+                                        <p:cTn id="34" dur="400"/>
+                                        <p:tgtEl>
+                                          <p:spTgt spid="12"/>
+                                        </p:tgtEl>
+                                      </p:cBhvr>
+                                    </p:animEffect>
+                                  </p:childTnLst>
+                                </p:cTn>
+                              </p:par>
+                            </p:childTnLst>
+                          </p:cTn>
+                        </p:par>
+                      </p:childTnLst>
+                    </p:cTn>
+                  </p:par>
+                </p:childTnLst>
+              </p:cTn>
+              <p:prevCondLst>
+                <p:cond evt="onPrev" delay="0">
+                  <p:tgtEl>
+                    <p:sldTgt/>
+                  </p:tgtEl>
+                </p:cond>
+              </p:prevCondLst>
+              <p:nextCondLst>
+                <p:cond evt="onNext" delay="0">
+                  <p:tgtEl>
+                    <p:sldTgt/>
+                  </p:tgtEl>
+                </p:cond>
+              </p:nextCondLst>
+            </p:seq>
+          </p:childTnLst>
+        </p:cTn>
+      </p:par>
+    </p:tnLst>
+    <p:bldLst>
+      <p:bldGraphic spid="9" grpId="0">
+        <p:bldAsOne/>
+      </p:bldGraphic>
+      <p:bldP spid="2" grpId="0"/>
+      <p:bldP spid="3" grpId="0"/>
+      <p:bldP spid="5" grpId="0"/>
+      <p:bldP spid="6" grpId="0"/>
+      <p:bldP spid="7" grpId="0"/>
+      <p:bldP spid="8" grpId="0"/>
+      <p:bldP spid="10" grpId="0"/>
+      <p:bldP spid="11" grpId="0"/>
+      <p:bldP spid="12" grpId="0"/>
+    </p:bldLst>
+  </p:timing>
 </p:sld>
 </file>
 
@@ -6873,6 +10696,638 @@
   <p:clrMapOvr>
     <a:masterClrMapping/>
   </p:clrMapOvr>
+  <p:transition spd="med">
+    <p:fade/>
+  </p:transition>
+  <p:timing>
+    <p:tnLst>
+      <p:par>
+        <p:cTn id="1" dur="indefinite" restart="never" nodeType="tmRoot">
+          <p:childTnLst>
+            <p:seq concurrent="1" nextAc="seek">
+              <p:cTn id="2" dur="indefinite" nodeType="mainSeq">
+                <p:childTnLst>
+                  <p:par>
+                    <p:cTn id="3" fill="hold">
+                      <p:stCondLst>
+                        <p:cond delay="indefinite"/>
+                        <p:cond evt="onBegin" delay="0">
+                          <p:tn val="2"/>
+                        </p:cond>
+                      </p:stCondLst>
+                      <p:childTnLst>
+                        <p:par>
+                          <p:cTn id="4" fill="hold">
+                            <p:stCondLst>
+                              <p:cond delay="0"/>
+                            </p:stCondLst>
+                            <p:childTnLst>
+                              <p:par>
+                                <p:cTn id="5" presetID="10" presetClass="entr" presetSubtype="0" fill="hold" grpId="0" nodeType="afterEffect">
+                                  <p:stCondLst>
+                                    <p:cond delay="0"/>
+                                  </p:stCondLst>
+                                  <p:childTnLst>
+                                    <p:set>
+                                      <p:cBhvr>
+                                        <p:cTn id="6" dur="1"/>
+                                        <p:tgtEl>
+                                          <p:spTgt spid="2"/>
+                                        </p:tgtEl>
+                                        <p:attrNameLst>
+                                          <p:attrName>style.visibility</p:attrName>
+                                        </p:attrNameLst>
+                                      </p:cBhvr>
+                                      <p:to>
+                                        <p:strVal val="visible"/>
+                                      </p:to>
+                                    </p:set>
+                                    <p:animEffect transition="in" filter="fade">
+                                      <p:cBhvr>
+                                        <p:cTn id="7" dur="350"/>
+                                        <p:tgtEl>
+                                          <p:spTgt spid="2"/>
+                                        </p:tgtEl>
+                                      </p:cBhvr>
+                                    </p:animEffect>
+                                  </p:childTnLst>
+                                </p:cTn>
+                              </p:par>
+                              <p:par>
+                                <p:cTn id="8" presetID="10" presetClass="entr" presetSubtype="0" fill="hold" grpId="0" nodeType="afterEffect">
+                                  <p:stCondLst>
+                                    <p:cond delay="450"/>
+                                  </p:stCondLst>
+                                  <p:childTnLst>
+                                    <p:set>
+                                      <p:cBhvr>
+                                        <p:cTn id="9" dur="1"/>
+                                        <p:tgtEl>
+                                          <p:spTgt spid="3"/>
+                                        </p:tgtEl>
+                                        <p:attrNameLst>
+                                          <p:attrName>style.visibility</p:attrName>
+                                        </p:attrNameLst>
+                                      </p:cBhvr>
+                                      <p:to>
+                                        <p:strVal val="visible"/>
+                                      </p:to>
+                                    </p:set>
+                                    <p:animEffect transition="in" filter="fade">
+                                      <p:cBhvr>
+                                        <p:cTn id="10" dur="350"/>
+                                        <p:tgtEl>
+                                          <p:spTgt spid="3"/>
+                                        </p:tgtEl>
+                                      </p:cBhvr>
+                                    </p:animEffect>
+                                  </p:childTnLst>
+                                </p:cTn>
+                              </p:par>
+                              <p:par>
+                                <p:cTn id="11" presetID="10" presetClass="entr" presetSubtype="0" fill="hold" grpId="0" nodeType="afterEffect">
+                                  <p:stCondLst>
+                                    <p:cond delay="1000"/>
+                                  </p:stCondLst>
+                                  <p:childTnLst>
+                                    <p:set>
+                                      <p:cBhvr>
+                                        <p:cTn id="12" dur="1"/>
+                                        <p:tgtEl>
+                                          <p:spTgt spid="5"/>
+                                        </p:tgtEl>
+                                        <p:attrNameLst>
+                                          <p:attrName>style.visibility</p:attrName>
+                                        </p:attrNameLst>
+                                      </p:cBhvr>
+                                      <p:to>
+                                        <p:strVal val="visible"/>
+                                      </p:to>
+                                    </p:set>
+                                    <p:animEffect transition="in" filter="fade">
+                                      <p:cBhvr>
+                                        <p:cTn id="13" dur="350"/>
+                                        <p:tgtEl>
+                                          <p:spTgt spid="5"/>
+                                        </p:tgtEl>
+                                      </p:cBhvr>
+                                    </p:animEffect>
+                                  </p:childTnLst>
+                                </p:cTn>
+                              </p:par>
+                              <p:par>
+                                <p:cTn id="14" presetID="10" presetClass="entr" presetSubtype="0" fill="hold" grpId="0" nodeType="afterEffect">
+                                  <p:stCondLst>
+                                    <p:cond delay="1650"/>
+                                  </p:stCondLst>
+                                  <p:childTnLst>
+                                    <p:set>
+                                      <p:cBhvr>
+                                        <p:cTn id="15" dur="1"/>
+                                        <p:tgtEl>
+                                          <p:spTgt spid="6"/>
+                                        </p:tgtEl>
+                                        <p:attrNameLst>
+                                          <p:attrName>style.visibility</p:attrName>
+                                        </p:attrNameLst>
+                                      </p:cBhvr>
+                                      <p:to>
+                                        <p:strVal val="visible"/>
+                                      </p:to>
+                                    </p:set>
+                                    <p:animEffect transition="in" filter="fade">
+                                      <p:cBhvr>
+                                        <p:cTn id="16" dur="350"/>
+                                        <p:tgtEl>
+                                          <p:spTgt spid="6"/>
+                                        </p:tgtEl>
+                                      </p:cBhvr>
+                                    </p:animEffect>
+                                  </p:childTnLst>
+                                </p:cTn>
+                              </p:par>
+                              <p:par>
+                                <p:cTn id="17" presetID="10" presetClass="entr" presetSubtype="0" fill="hold" grpId="0" nodeType="afterEffect">
+                                  <p:stCondLst>
+                                    <p:cond delay="2400"/>
+                                  </p:stCondLst>
+                                  <p:childTnLst>
+                                    <p:set>
+                                      <p:cBhvr>
+                                        <p:cTn id="18" dur="1"/>
+                                        <p:tgtEl>
+                                          <p:spTgt spid="7"/>
+                                        </p:tgtEl>
+                                        <p:attrNameLst>
+                                          <p:attrName>style.visibility</p:attrName>
+                                        </p:attrNameLst>
+                                      </p:cBhvr>
+                                      <p:to>
+                                        <p:strVal val="visible"/>
+                                      </p:to>
+                                    </p:set>
+                                    <p:animEffect transition="in" filter="fade">
+                                      <p:cBhvr>
+                                        <p:cTn id="19" dur="350"/>
+                                        <p:tgtEl>
+                                          <p:spTgt spid="7"/>
+                                        </p:tgtEl>
+                                      </p:cBhvr>
+                                    </p:animEffect>
+                                  </p:childTnLst>
+                                </p:cTn>
+                              </p:par>
+                              <p:par>
+                                <p:cTn id="20" presetID="10" presetClass="entr" presetSubtype="0" fill="hold" grpId="0" nodeType="afterEffect">
+                                  <p:stCondLst>
+                                    <p:cond delay="3250"/>
+                                  </p:stCondLst>
+                                  <p:childTnLst>
+                                    <p:set>
+                                      <p:cBhvr>
+                                        <p:cTn id="21" dur="1"/>
+                                        <p:tgtEl>
+                                          <p:spTgt spid="8"/>
+                                        </p:tgtEl>
+                                        <p:attrNameLst>
+                                          <p:attrName>style.visibility</p:attrName>
+                                        </p:attrNameLst>
+                                      </p:cBhvr>
+                                      <p:to>
+                                        <p:strVal val="visible"/>
+                                      </p:to>
+                                    </p:set>
+                                    <p:animEffect transition="in" filter="fade">
+                                      <p:cBhvr>
+                                        <p:cTn id="22" dur="350"/>
+                                        <p:tgtEl>
+                                          <p:spTgt spid="8"/>
+                                        </p:tgtEl>
+                                      </p:cBhvr>
+                                    </p:animEffect>
+                                  </p:childTnLst>
+                                </p:cTn>
+                              </p:par>
+                              <p:par>
+                                <p:cTn id="23" presetID="10" presetClass="entr" presetSubtype="0" fill="hold" grpId="0" nodeType="afterEffect">
+                                  <p:stCondLst>
+                                    <p:cond delay="4200"/>
+                                  </p:stCondLst>
+                                  <p:childTnLst>
+                                    <p:set>
+                                      <p:cBhvr>
+                                        <p:cTn id="24" dur="1"/>
+                                        <p:tgtEl>
+                                          <p:spTgt spid="9"/>
+                                        </p:tgtEl>
+                                        <p:attrNameLst>
+                                          <p:attrName>style.visibility</p:attrName>
+                                        </p:attrNameLst>
+                                      </p:cBhvr>
+                                      <p:to>
+                                        <p:strVal val="visible"/>
+                                      </p:to>
+                                    </p:set>
+                                    <p:animEffect transition="in" filter="fade">
+                                      <p:cBhvr>
+                                        <p:cTn id="25" dur="350"/>
+                                        <p:tgtEl>
+                                          <p:spTgt spid="9"/>
+                                        </p:tgtEl>
+                                      </p:cBhvr>
+                                    </p:animEffect>
+                                  </p:childTnLst>
+                                </p:cTn>
+                              </p:par>
+                              <p:par>
+                                <p:cTn id="26" presetID="10" presetClass="entr" presetSubtype="0" fill="hold" grpId="0" nodeType="afterEffect">
+                                  <p:stCondLst>
+                                    <p:cond delay="5250"/>
+                                  </p:stCondLst>
+                                  <p:childTnLst>
+                                    <p:set>
+                                      <p:cBhvr>
+                                        <p:cTn id="27" dur="1"/>
+                                        <p:tgtEl>
+                                          <p:spTgt spid="10"/>
+                                        </p:tgtEl>
+                                        <p:attrNameLst>
+                                          <p:attrName>style.visibility</p:attrName>
+                                        </p:attrNameLst>
+                                      </p:cBhvr>
+                                      <p:to>
+                                        <p:strVal val="visible"/>
+                                      </p:to>
+                                    </p:set>
+                                    <p:animEffect transition="in" filter="fade">
+                                      <p:cBhvr>
+                                        <p:cTn id="28" dur="350"/>
+                                        <p:tgtEl>
+                                          <p:spTgt spid="10"/>
+                                        </p:tgtEl>
+                                      </p:cBhvr>
+                                    </p:animEffect>
+                                  </p:childTnLst>
+                                </p:cTn>
+                              </p:par>
+                              <p:par>
+                                <p:cTn id="29" presetID="10" presetClass="entr" presetSubtype="0" fill="hold" grpId="0" nodeType="afterEffect">
+                                  <p:stCondLst>
+                                    <p:cond delay="6400"/>
+                                  </p:stCondLst>
+                                  <p:childTnLst>
+                                    <p:set>
+                                      <p:cBhvr>
+                                        <p:cTn id="30" dur="1"/>
+                                        <p:tgtEl>
+                                          <p:spTgt spid="11"/>
+                                        </p:tgtEl>
+                                        <p:attrNameLst>
+                                          <p:attrName>style.visibility</p:attrName>
+                                        </p:attrNameLst>
+                                      </p:cBhvr>
+                                      <p:to>
+                                        <p:strVal val="visible"/>
+                                      </p:to>
+                                    </p:set>
+                                    <p:animEffect transition="in" filter="fade">
+                                      <p:cBhvr>
+                                        <p:cTn id="31" dur="350"/>
+                                        <p:tgtEl>
+                                          <p:spTgt spid="11"/>
+                                        </p:tgtEl>
+                                      </p:cBhvr>
+                                    </p:animEffect>
+                                  </p:childTnLst>
+                                </p:cTn>
+                              </p:par>
+                              <p:par>
+                                <p:cTn id="32" presetID="10" presetClass="entr" presetSubtype="0" fill="hold" grpId="0" nodeType="afterEffect">
+                                  <p:stCondLst>
+                                    <p:cond delay="7650"/>
+                                  </p:stCondLst>
+                                  <p:childTnLst>
+                                    <p:set>
+                                      <p:cBhvr>
+                                        <p:cTn id="33" dur="1"/>
+                                        <p:tgtEl>
+                                          <p:spTgt spid="12"/>
+                                        </p:tgtEl>
+                                        <p:attrNameLst>
+                                          <p:attrName>style.visibility</p:attrName>
+                                        </p:attrNameLst>
+                                      </p:cBhvr>
+                                      <p:to>
+                                        <p:strVal val="visible"/>
+                                      </p:to>
+                                    </p:set>
+                                    <p:animEffect transition="in" filter="fade">
+                                      <p:cBhvr>
+                                        <p:cTn id="34" dur="350"/>
+                                        <p:tgtEl>
+                                          <p:spTgt spid="12"/>
+                                        </p:tgtEl>
+                                      </p:cBhvr>
+                                    </p:animEffect>
+                                  </p:childTnLst>
+                                </p:cTn>
+                              </p:par>
+                              <p:par>
+                                <p:cTn id="35" presetID="10" presetClass="entr" presetSubtype="0" fill="hold" grpId="0" nodeType="afterEffect">
+                                  <p:stCondLst>
+                                    <p:cond delay="9000"/>
+                                  </p:stCondLst>
+                                  <p:childTnLst>
+                                    <p:set>
+                                      <p:cBhvr>
+                                        <p:cTn id="36" dur="1"/>
+                                        <p:tgtEl>
+                                          <p:spTgt spid="13"/>
+                                        </p:tgtEl>
+                                        <p:attrNameLst>
+                                          <p:attrName>style.visibility</p:attrName>
+                                        </p:attrNameLst>
+                                      </p:cBhvr>
+                                      <p:to>
+                                        <p:strVal val="visible"/>
+                                      </p:to>
+                                    </p:set>
+                                    <p:animEffect transition="in" filter="fade">
+                                      <p:cBhvr>
+                                        <p:cTn id="37" dur="350"/>
+                                        <p:tgtEl>
+                                          <p:spTgt spid="13"/>
+                                        </p:tgtEl>
+                                      </p:cBhvr>
+                                    </p:animEffect>
+                                  </p:childTnLst>
+                                </p:cTn>
+                              </p:par>
+                              <p:par>
+                                <p:cTn id="38" presetID="10" presetClass="entr" presetSubtype="0" fill="hold" grpId="0" nodeType="afterEffect">
+                                  <p:stCondLst>
+                                    <p:cond delay="10450"/>
+                                  </p:stCondLst>
+                                  <p:childTnLst>
+                                    <p:set>
+                                      <p:cBhvr>
+                                        <p:cTn id="39" dur="1"/>
+                                        <p:tgtEl>
+                                          <p:spTgt spid="14"/>
+                                        </p:tgtEl>
+                                        <p:attrNameLst>
+                                          <p:attrName>style.visibility</p:attrName>
+                                        </p:attrNameLst>
+                                      </p:cBhvr>
+                                      <p:to>
+                                        <p:strVal val="visible"/>
+                                      </p:to>
+                                    </p:set>
+                                    <p:animEffect transition="in" filter="fade">
+                                      <p:cBhvr>
+                                        <p:cTn id="40" dur="350"/>
+                                        <p:tgtEl>
+                                          <p:spTgt spid="14"/>
+                                        </p:tgtEl>
+                                      </p:cBhvr>
+                                    </p:animEffect>
+                                  </p:childTnLst>
+                                </p:cTn>
+                              </p:par>
+                              <p:par>
+                                <p:cTn id="41" presetID="10" presetClass="entr" presetSubtype="0" fill="hold" grpId="0" nodeType="afterEffect">
+                                  <p:stCondLst>
+                                    <p:cond delay="12000"/>
+                                  </p:stCondLst>
+                                  <p:childTnLst>
+                                    <p:set>
+                                      <p:cBhvr>
+                                        <p:cTn id="42" dur="1"/>
+                                        <p:tgtEl>
+                                          <p:spTgt spid="15"/>
+                                        </p:tgtEl>
+                                        <p:attrNameLst>
+                                          <p:attrName>style.visibility</p:attrName>
+                                        </p:attrNameLst>
+                                      </p:cBhvr>
+                                      <p:to>
+                                        <p:strVal val="visible"/>
+                                      </p:to>
+                                    </p:set>
+                                    <p:animEffect transition="in" filter="fade">
+                                      <p:cBhvr>
+                                        <p:cTn id="43" dur="350"/>
+                                        <p:tgtEl>
+                                          <p:spTgt spid="15"/>
+                                        </p:tgtEl>
+                                      </p:cBhvr>
+                                    </p:animEffect>
+                                  </p:childTnLst>
+                                </p:cTn>
+                              </p:par>
+                              <p:par>
+                                <p:cTn id="44" presetID="10" presetClass="entr" presetSubtype="0" fill="hold" grpId="0" nodeType="afterEffect">
+                                  <p:stCondLst>
+                                    <p:cond delay="13650"/>
+                                  </p:stCondLst>
+                                  <p:childTnLst>
+                                    <p:set>
+                                      <p:cBhvr>
+                                        <p:cTn id="45" dur="1"/>
+                                        <p:tgtEl>
+                                          <p:spTgt spid="16"/>
+                                        </p:tgtEl>
+                                        <p:attrNameLst>
+                                          <p:attrName>style.visibility</p:attrName>
+                                        </p:attrNameLst>
+                                      </p:cBhvr>
+                                      <p:to>
+                                        <p:strVal val="visible"/>
+                                      </p:to>
+                                    </p:set>
+                                    <p:animEffect transition="in" filter="fade">
+                                      <p:cBhvr>
+                                        <p:cTn id="46" dur="350"/>
+                                        <p:tgtEl>
+                                          <p:spTgt spid="16"/>
+                                        </p:tgtEl>
+                                      </p:cBhvr>
+                                    </p:animEffect>
+                                  </p:childTnLst>
+                                </p:cTn>
+                              </p:par>
+                              <p:par>
+                                <p:cTn id="47" presetID="10" presetClass="entr" presetSubtype="0" fill="hold" grpId="0" nodeType="afterEffect">
+                                  <p:stCondLst>
+                                    <p:cond delay="15400"/>
+                                  </p:stCondLst>
+                                  <p:childTnLst>
+                                    <p:set>
+                                      <p:cBhvr>
+                                        <p:cTn id="48" dur="1"/>
+                                        <p:tgtEl>
+                                          <p:spTgt spid="17"/>
+                                        </p:tgtEl>
+                                        <p:attrNameLst>
+                                          <p:attrName>style.visibility</p:attrName>
+                                        </p:attrNameLst>
+                                      </p:cBhvr>
+                                      <p:to>
+                                        <p:strVal val="visible"/>
+                                      </p:to>
+                                    </p:set>
+                                    <p:animEffect transition="in" filter="fade">
+                                      <p:cBhvr>
+                                        <p:cTn id="49" dur="350"/>
+                                        <p:tgtEl>
+                                          <p:spTgt spid="17"/>
+                                        </p:tgtEl>
+                                      </p:cBhvr>
+                                    </p:animEffect>
+                                  </p:childTnLst>
+                                </p:cTn>
+                              </p:par>
+                              <p:par>
+                                <p:cTn id="50" presetID="10" presetClass="entr" presetSubtype="0" fill="hold" grpId="0" nodeType="afterEffect">
+                                  <p:stCondLst>
+                                    <p:cond delay="17250"/>
+                                  </p:stCondLst>
+                                  <p:childTnLst>
+                                    <p:set>
+                                      <p:cBhvr>
+                                        <p:cTn id="51" dur="1"/>
+                                        <p:tgtEl>
+                                          <p:spTgt spid="18"/>
+                                        </p:tgtEl>
+                                        <p:attrNameLst>
+                                          <p:attrName>style.visibility</p:attrName>
+                                        </p:attrNameLst>
+                                      </p:cBhvr>
+                                      <p:to>
+                                        <p:strVal val="visible"/>
+                                      </p:to>
+                                    </p:set>
+                                    <p:animEffect transition="in" filter="fade">
+                                      <p:cBhvr>
+                                        <p:cTn id="52" dur="350"/>
+                                        <p:tgtEl>
+                                          <p:spTgt spid="18"/>
+                                        </p:tgtEl>
+                                      </p:cBhvr>
+                                    </p:animEffect>
+                                  </p:childTnLst>
+                                </p:cTn>
+                              </p:par>
+                              <p:par>
+                                <p:cTn id="53" presetID="10" presetClass="entr" presetSubtype="0" fill="hold" grpId="0" nodeType="afterEffect">
+                                  <p:stCondLst>
+                                    <p:cond delay="19200"/>
+                                  </p:stCondLst>
+                                  <p:childTnLst>
+                                    <p:set>
+                                      <p:cBhvr>
+                                        <p:cTn id="54" dur="1"/>
+                                        <p:tgtEl>
+                                          <p:spTgt spid="19"/>
+                                        </p:tgtEl>
+                                        <p:attrNameLst>
+                                          <p:attrName>style.visibility</p:attrName>
+                                        </p:attrNameLst>
+                                      </p:cBhvr>
+                                      <p:to>
+                                        <p:strVal val="visible"/>
+                                      </p:to>
+                                    </p:set>
+                                    <p:animEffect transition="in" filter="fade">
+                                      <p:cBhvr>
+                                        <p:cTn id="55" dur="350"/>
+                                        <p:tgtEl>
+                                          <p:spTgt spid="19"/>
+                                        </p:tgtEl>
+                                      </p:cBhvr>
+                                    </p:animEffect>
+                                  </p:childTnLst>
+                                </p:cTn>
+                              </p:par>
+                              <p:par>
+                                <p:cTn id="56" presetID="10" presetClass="entr" presetSubtype="0" fill="hold" grpId="0" nodeType="afterEffect">
+                                  <p:stCondLst>
+                                    <p:cond delay="21250"/>
+                                  </p:stCondLst>
+                                  <p:childTnLst>
+                                    <p:set>
+                                      <p:cBhvr>
+                                        <p:cTn id="57" dur="1"/>
+                                        <p:tgtEl>
+                                          <p:spTgt spid="20"/>
+                                        </p:tgtEl>
+                                        <p:attrNameLst>
+                                          <p:attrName>style.visibility</p:attrName>
+                                        </p:attrNameLst>
+                                      </p:cBhvr>
+                                      <p:to>
+                                        <p:strVal val="visible"/>
+                                      </p:to>
+                                    </p:set>
+                                    <p:animEffect transition="in" filter="fade">
+                                      <p:cBhvr>
+                                        <p:cTn id="58" dur="350"/>
+                                        <p:tgtEl>
+                                          <p:spTgt spid="20"/>
+                                        </p:tgtEl>
+                                      </p:cBhvr>
+                                    </p:animEffect>
+                                  </p:childTnLst>
+                                </p:cTn>
+                              </p:par>
+                            </p:childTnLst>
+                          </p:cTn>
+                        </p:par>
+                      </p:childTnLst>
+                    </p:cTn>
+                  </p:par>
+                </p:childTnLst>
+              </p:cTn>
+              <p:prevCondLst>
+                <p:cond evt="onPrev" delay="0">
+                  <p:tgtEl>
+                    <p:sldTgt/>
+                  </p:tgtEl>
+                </p:cond>
+              </p:prevCondLst>
+              <p:nextCondLst>
+                <p:cond evt="onNext" delay="0">
+                  <p:tgtEl>
+                    <p:sldTgt/>
+                  </p:tgtEl>
+                </p:cond>
+              </p:nextCondLst>
+            </p:seq>
+          </p:childTnLst>
+        </p:cTn>
+      </p:par>
+    </p:tnLst>
+    <p:bldLst>
+      <p:bldP spid="2" grpId="0"/>
+      <p:bldP spid="3" grpId="0"/>
+      <p:bldP spid="5" grpId="0"/>
+      <p:bldP spid="6" grpId="0"/>
+      <p:bldP spid="7" grpId="0"/>
+      <p:bldP spid="8" grpId="0"/>
+      <p:bldP spid="9" grpId="0"/>
+      <p:bldP spid="10" grpId="0"/>
+      <p:bldP spid="11" grpId="0"/>
+      <p:bldP spid="12" grpId="0"/>
+      <p:bldP spid="13" grpId="0"/>
+      <p:bldP spid="14" grpId="0"/>
+      <p:bldP spid="15" grpId="0"/>
+      <p:bldP spid="16" grpId="0"/>
+      <p:bldP spid="17" grpId="0"/>
+      <p:bldP spid="18" grpId="0"/>
+      <p:bldP spid="19" grpId="0"/>
+      <p:bldP spid="20" grpId="0"/>
+    </p:bldLst>
+  </p:timing>
 </p:sld>
 </file>
 
@@ -6999,7 +11454,7 @@
           </a:solidFill>
           <a:ln w="9525">
             <a:solidFill>
-              <a:srgbClr val="E3E9F1"/>
+              <a:srgbClr val="D7DEE8"/>
             </a:solidFill>
             <a:prstDash val="solid"/>
           </a:ln>
@@ -7150,7 +11605,7 @@
           </a:solidFill>
           <a:ln w="9525">
             <a:solidFill>
-              <a:srgbClr val="E3E9F1"/>
+              <a:srgbClr val="D7DEE8"/>
             </a:solidFill>
             <a:prstDash val="solid"/>
           </a:ln>
@@ -7301,7 +11756,7 @@
           </a:solidFill>
           <a:ln w="9525">
             <a:solidFill>
-              <a:srgbClr val="E3E9F1"/>
+              <a:srgbClr val="D7DEE8"/>
             </a:solidFill>
             <a:prstDash val="solid"/>
           </a:ln>
@@ -7452,7 +11907,7 @@
           </a:solidFill>
           <a:ln w="9525">
             <a:solidFill>
-              <a:srgbClr val="E3E9F1"/>
+              <a:srgbClr val="D7DEE8"/>
             </a:solidFill>
             <a:prstDash val="solid"/>
           </a:ln>
@@ -7665,6 +12120,1462 @@
   <p:clrMapOvr>
     <a:masterClrMapping/>
   </p:clrMapOvr>
+  <p:transition spd="med">
+    <p:fade/>
+  </p:transition>
+  <p:timing>
+    <p:tnLst>
+      <p:par>
+        <p:cTn id="1" dur="indefinite" restart="never" nodeType="tmRoot">
+          <p:childTnLst>
+            <p:seq concurrent="1" nextAc="seek">
+              <p:cTn id="2" dur="indefinite" nodeType="mainSeq">
+                <p:childTnLst>
+                  <p:par>
+                    <p:cTn id="3" fill="hold">
+                      <p:stCondLst>
+                        <p:cond delay="indefinite"/>
+                        <p:cond evt="onBegin" delay="0">
+                          <p:tn val="2"/>
+                        </p:cond>
+                      </p:stCondLst>
+                      <p:childTnLst>
+                        <p:par>
+                          <p:cTn id="4" fill="hold">
+                            <p:stCondLst>
+                              <p:cond delay="0"/>
+                            </p:stCondLst>
+                            <p:childTnLst>
+                              <p:par>
+                                <p:cTn id="5" presetID="2" presetClass="entr" presetSubtype="4" fill="hold" grpId="0" nodeType="afterEffect">
+                                  <p:stCondLst>
+                                    <p:cond delay="0"/>
+                                  </p:stCondLst>
+                                  <p:childTnLst>
+                                    <p:set>
+                                      <p:cBhvr>
+                                        <p:cTn id="6" dur="1"/>
+                                        <p:tgtEl>
+                                          <p:spTgt spid="2"/>
+                                        </p:tgtEl>
+                                        <p:attrNameLst>
+                                          <p:attrName>style.visibility</p:attrName>
+                                        </p:attrNameLst>
+                                      </p:cBhvr>
+                                      <p:to>
+                                        <p:strVal val="visible"/>
+                                      </p:to>
+                                    </p:set>
+                                    <p:anim calcmode="lin" valueType="num">
+                                      <p:cBhvr additive="base">
+                                        <p:cTn id="7" dur="400"/>
+                                        <p:tgtEl>
+                                          <p:spTgt spid="2"/>
+                                        </p:tgtEl>
+                                        <p:attrNameLst>
+                                          <p:attrName>ppt_x</p:attrName>
+                                        </p:attrNameLst>
+                                      </p:cBhvr>
+                                      <p:tavLst>
+                                        <p:tav tm="0">
+                                          <p:val>
+                                            <p:strVal val="#ppt_x"/>
+                                          </p:val>
+                                        </p:tav>
+                                        <p:tav tm="100000">
+                                          <p:val>
+                                            <p:strVal val="#ppt_x"/>
+                                          </p:val>
+                                        </p:tav>
+                                      </p:tavLst>
+                                    </p:anim>
+                                    <p:anim calcmode="lin" valueType="num">
+                                      <p:cBhvr additive="base">
+                                        <p:cTn id="8" dur="400"/>
+                                        <p:tgtEl>
+                                          <p:spTgt spid="2"/>
+                                        </p:tgtEl>
+                                        <p:attrNameLst>
+                                          <p:attrName>ppt_y</p:attrName>
+                                        </p:attrNameLst>
+                                      </p:cBhvr>
+                                      <p:tavLst>
+                                        <p:tav tm="0">
+                                          <p:val>
+                                            <p:strVal val="1+#ppt_h/2"/>
+                                          </p:val>
+                                        </p:tav>
+                                        <p:tav tm="100000">
+                                          <p:val>
+                                            <p:strVal val="#ppt_y"/>
+                                          </p:val>
+                                        </p:tav>
+                                      </p:tavLst>
+                                    </p:anim>
+                                  </p:childTnLst>
+                                </p:cTn>
+                              </p:par>
+                              <p:par>
+                                <p:cTn id="9" presetID="2" presetClass="entr" presetSubtype="4" fill="hold" grpId="0" nodeType="afterEffect">
+                                  <p:stCondLst>
+                                    <p:cond delay="550"/>
+                                  </p:stCondLst>
+                                  <p:childTnLst>
+                                    <p:set>
+                                      <p:cBhvr>
+                                        <p:cTn id="10" dur="1"/>
+                                        <p:tgtEl>
+                                          <p:spTgt spid="3"/>
+                                        </p:tgtEl>
+                                        <p:attrNameLst>
+                                          <p:attrName>style.visibility</p:attrName>
+                                        </p:attrNameLst>
+                                      </p:cBhvr>
+                                      <p:to>
+                                        <p:strVal val="visible"/>
+                                      </p:to>
+                                    </p:set>
+                                    <p:anim calcmode="lin" valueType="num">
+                                      <p:cBhvr additive="base">
+                                        <p:cTn id="11" dur="400"/>
+                                        <p:tgtEl>
+                                          <p:spTgt spid="3"/>
+                                        </p:tgtEl>
+                                        <p:attrNameLst>
+                                          <p:attrName>ppt_x</p:attrName>
+                                        </p:attrNameLst>
+                                      </p:cBhvr>
+                                      <p:tavLst>
+                                        <p:tav tm="0">
+                                          <p:val>
+                                            <p:strVal val="#ppt_x"/>
+                                          </p:val>
+                                        </p:tav>
+                                        <p:tav tm="100000">
+                                          <p:val>
+                                            <p:strVal val="#ppt_x"/>
+                                          </p:val>
+                                        </p:tav>
+                                      </p:tavLst>
+                                    </p:anim>
+                                    <p:anim calcmode="lin" valueType="num">
+                                      <p:cBhvr additive="base">
+                                        <p:cTn id="12" dur="400"/>
+                                        <p:tgtEl>
+                                          <p:spTgt spid="3"/>
+                                        </p:tgtEl>
+                                        <p:attrNameLst>
+                                          <p:attrName>ppt_y</p:attrName>
+                                        </p:attrNameLst>
+                                      </p:cBhvr>
+                                      <p:tavLst>
+                                        <p:tav tm="0">
+                                          <p:val>
+                                            <p:strVal val="1+#ppt_h/2"/>
+                                          </p:val>
+                                        </p:tav>
+                                        <p:tav tm="100000">
+                                          <p:val>
+                                            <p:strVal val="#ppt_y"/>
+                                          </p:val>
+                                        </p:tav>
+                                      </p:tavLst>
+                                    </p:anim>
+                                  </p:childTnLst>
+                                </p:cTn>
+                              </p:par>
+                              <p:par>
+                                <p:cTn id="13" presetID="2" presetClass="entr" presetSubtype="4" fill="hold" grpId="0" nodeType="afterEffect">
+                                  <p:stCondLst>
+                                    <p:cond delay="1250"/>
+                                  </p:stCondLst>
+                                  <p:childTnLst>
+                                    <p:set>
+                                      <p:cBhvr>
+                                        <p:cTn id="14" dur="1"/>
+                                        <p:tgtEl>
+                                          <p:spTgt spid="5"/>
+                                        </p:tgtEl>
+                                        <p:attrNameLst>
+                                          <p:attrName>style.visibility</p:attrName>
+                                        </p:attrNameLst>
+                                      </p:cBhvr>
+                                      <p:to>
+                                        <p:strVal val="visible"/>
+                                      </p:to>
+                                    </p:set>
+                                    <p:anim calcmode="lin" valueType="num">
+                                      <p:cBhvr additive="base">
+                                        <p:cTn id="15" dur="400"/>
+                                        <p:tgtEl>
+                                          <p:spTgt spid="5"/>
+                                        </p:tgtEl>
+                                        <p:attrNameLst>
+                                          <p:attrName>ppt_x</p:attrName>
+                                        </p:attrNameLst>
+                                      </p:cBhvr>
+                                      <p:tavLst>
+                                        <p:tav tm="0">
+                                          <p:val>
+                                            <p:strVal val="#ppt_x"/>
+                                          </p:val>
+                                        </p:tav>
+                                        <p:tav tm="100000">
+                                          <p:val>
+                                            <p:strVal val="#ppt_x"/>
+                                          </p:val>
+                                        </p:tav>
+                                      </p:tavLst>
+                                    </p:anim>
+                                    <p:anim calcmode="lin" valueType="num">
+                                      <p:cBhvr additive="base">
+                                        <p:cTn id="16" dur="400"/>
+                                        <p:tgtEl>
+                                          <p:spTgt spid="5"/>
+                                        </p:tgtEl>
+                                        <p:attrNameLst>
+                                          <p:attrName>ppt_y</p:attrName>
+                                        </p:attrNameLst>
+                                      </p:cBhvr>
+                                      <p:tavLst>
+                                        <p:tav tm="0">
+                                          <p:val>
+                                            <p:strVal val="1+#ppt_h/2"/>
+                                          </p:val>
+                                        </p:tav>
+                                        <p:tav tm="100000">
+                                          <p:val>
+                                            <p:strVal val="#ppt_y"/>
+                                          </p:val>
+                                        </p:tav>
+                                      </p:tavLst>
+                                    </p:anim>
+                                  </p:childTnLst>
+                                </p:cTn>
+                              </p:par>
+                              <p:par>
+                                <p:cTn id="17" presetID="2" presetClass="entr" presetSubtype="4" fill="hold" grpId="0" nodeType="afterEffect">
+                                  <p:stCondLst>
+                                    <p:cond delay="2100"/>
+                                  </p:stCondLst>
+                                  <p:childTnLst>
+                                    <p:set>
+                                      <p:cBhvr>
+                                        <p:cTn id="18" dur="1"/>
+                                        <p:tgtEl>
+                                          <p:spTgt spid="9"/>
+                                        </p:tgtEl>
+                                        <p:attrNameLst>
+                                          <p:attrName>style.visibility</p:attrName>
+                                        </p:attrNameLst>
+                                      </p:cBhvr>
+                                      <p:to>
+                                        <p:strVal val="visible"/>
+                                      </p:to>
+                                    </p:set>
+                                    <p:anim calcmode="lin" valueType="num">
+                                      <p:cBhvr additive="base">
+                                        <p:cTn id="19" dur="400"/>
+                                        <p:tgtEl>
+                                          <p:spTgt spid="9"/>
+                                        </p:tgtEl>
+                                        <p:attrNameLst>
+                                          <p:attrName>ppt_x</p:attrName>
+                                        </p:attrNameLst>
+                                      </p:cBhvr>
+                                      <p:tavLst>
+                                        <p:tav tm="0">
+                                          <p:val>
+                                            <p:strVal val="#ppt_x"/>
+                                          </p:val>
+                                        </p:tav>
+                                        <p:tav tm="100000">
+                                          <p:val>
+                                            <p:strVal val="#ppt_x"/>
+                                          </p:val>
+                                        </p:tav>
+                                      </p:tavLst>
+                                    </p:anim>
+                                    <p:anim calcmode="lin" valueType="num">
+                                      <p:cBhvr additive="base">
+                                        <p:cTn id="20" dur="400"/>
+                                        <p:tgtEl>
+                                          <p:spTgt spid="9"/>
+                                        </p:tgtEl>
+                                        <p:attrNameLst>
+                                          <p:attrName>ppt_y</p:attrName>
+                                        </p:attrNameLst>
+                                      </p:cBhvr>
+                                      <p:tavLst>
+                                        <p:tav tm="0">
+                                          <p:val>
+                                            <p:strVal val="1+#ppt_h/2"/>
+                                          </p:val>
+                                        </p:tav>
+                                        <p:tav tm="100000">
+                                          <p:val>
+                                            <p:strVal val="#ppt_y"/>
+                                          </p:val>
+                                        </p:tav>
+                                      </p:tavLst>
+                                    </p:anim>
+                                  </p:childTnLst>
+                                </p:cTn>
+                              </p:par>
+                              <p:par>
+                                <p:cTn id="21" presetID="2" presetClass="entr" presetSubtype="4" fill="hold" grpId="0" nodeType="afterEffect">
+                                  <p:stCondLst>
+                                    <p:cond delay="3100"/>
+                                  </p:stCondLst>
+                                  <p:childTnLst>
+                                    <p:set>
+                                      <p:cBhvr>
+                                        <p:cTn id="22" dur="1"/>
+                                        <p:tgtEl>
+                                          <p:spTgt spid="6"/>
+                                        </p:tgtEl>
+                                        <p:attrNameLst>
+                                          <p:attrName>style.visibility</p:attrName>
+                                        </p:attrNameLst>
+                                      </p:cBhvr>
+                                      <p:to>
+                                        <p:strVal val="visible"/>
+                                      </p:to>
+                                    </p:set>
+                                    <p:anim calcmode="lin" valueType="num">
+                                      <p:cBhvr additive="base">
+                                        <p:cTn id="23" dur="400"/>
+                                        <p:tgtEl>
+                                          <p:spTgt spid="6"/>
+                                        </p:tgtEl>
+                                        <p:attrNameLst>
+                                          <p:attrName>ppt_x</p:attrName>
+                                        </p:attrNameLst>
+                                      </p:cBhvr>
+                                      <p:tavLst>
+                                        <p:tav tm="0">
+                                          <p:val>
+                                            <p:strVal val="#ppt_x"/>
+                                          </p:val>
+                                        </p:tav>
+                                        <p:tav tm="100000">
+                                          <p:val>
+                                            <p:strVal val="#ppt_x"/>
+                                          </p:val>
+                                        </p:tav>
+                                      </p:tavLst>
+                                    </p:anim>
+                                    <p:anim calcmode="lin" valueType="num">
+                                      <p:cBhvr additive="base">
+                                        <p:cTn id="24" dur="400"/>
+                                        <p:tgtEl>
+                                          <p:spTgt spid="6"/>
+                                        </p:tgtEl>
+                                        <p:attrNameLst>
+                                          <p:attrName>ppt_y</p:attrName>
+                                        </p:attrNameLst>
+                                      </p:cBhvr>
+                                      <p:tavLst>
+                                        <p:tav tm="0">
+                                          <p:val>
+                                            <p:strVal val="1+#ppt_h/2"/>
+                                          </p:val>
+                                        </p:tav>
+                                        <p:tav tm="100000">
+                                          <p:val>
+                                            <p:strVal val="#ppt_y"/>
+                                          </p:val>
+                                        </p:tav>
+                                      </p:tavLst>
+                                    </p:anim>
+                                  </p:childTnLst>
+                                </p:cTn>
+                              </p:par>
+                              <p:par>
+                                <p:cTn id="25" presetID="2" presetClass="entr" presetSubtype="4" fill="hold" grpId="0" nodeType="afterEffect">
+                                  <p:stCondLst>
+                                    <p:cond delay="4250"/>
+                                  </p:stCondLst>
+                                  <p:childTnLst>
+                                    <p:set>
+                                      <p:cBhvr>
+                                        <p:cTn id="26" dur="1"/>
+                                        <p:tgtEl>
+                                          <p:spTgt spid="10"/>
+                                        </p:tgtEl>
+                                        <p:attrNameLst>
+                                          <p:attrName>style.visibility</p:attrName>
+                                        </p:attrNameLst>
+                                      </p:cBhvr>
+                                      <p:to>
+                                        <p:strVal val="visible"/>
+                                      </p:to>
+                                    </p:set>
+                                    <p:anim calcmode="lin" valueType="num">
+                                      <p:cBhvr additive="base">
+                                        <p:cTn id="27" dur="400"/>
+                                        <p:tgtEl>
+                                          <p:spTgt spid="10"/>
+                                        </p:tgtEl>
+                                        <p:attrNameLst>
+                                          <p:attrName>ppt_x</p:attrName>
+                                        </p:attrNameLst>
+                                      </p:cBhvr>
+                                      <p:tavLst>
+                                        <p:tav tm="0">
+                                          <p:val>
+                                            <p:strVal val="#ppt_x"/>
+                                          </p:val>
+                                        </p:tav>
+                                        <p:tav tm="100000">
+                                          <p:val>
+                                            <p:strVal val="#ppt_x"/>
+                                          </p:val>
+                                        </p:tav>
+                                      </p:tavLst>
+                                    </p:anim>
+                                    <p:anim calcmode="lin" valueType="num">
+                                      <p:cBhvr additive="base">
+                                        <p:cTn id="28" dur="400"/>
+                                        <p:tgtEl>
+                                          <p:spTgt spid="10"/>
+                                        </p:tgtEl>
+                                        <p:attrNameLst>
+                                          <p:attrName>ppt_y</p:attrName>
+                                        </p:attrNameLst>
+                                      </p:cBhvr>
+                                      <p:tavLst>
+                                        <p:tav tm="0">
+                                          <p:val>
+                                            <p:strVal val="1+#ppt_h/2"/>
+                                          </p:val>
+                                        </p:tav>
+                                        <p:tav tm="100000">
+                                          <p:val>
+                                            <p:strVal val="#ppt_y"/>
+                                          </p:val>
+                                        </p:tav>
+                                      </p:tavLst>
+                                    </p:anim>
+                                  </p:childTnLst>
+                                </p:cTn>
+                              </p:par>
+                              <p:par>
+                                <p:cTn id="29" presetID="2" presetClass="entr" presetSubtype="4" fill="hold" grpId="0" nodeType="afterEffect">
+                                  <p:stCondLst>
+                                    <p:cond delay="5550"/>
+                                  </p:stCondLst>
+                                  <p:childTnLst>
+                                    <p:set>
+                                      <p:cBhvr>
+                                        <p:cTn id="30" dur="1"/>
+                                        <p:tgtEl>
+                                          <p:spTgt spid="7"/>
+                                        </p:tgtEl>
+                                        <p:attrNameLst>
+                                          <p:attrName>style.visibility</p:attrName>
+                                        </p:attrNameLst>
+                                      </p:cBhvr>
+                                      <p:to>
+                                        <p:strVal val="visible"/>
+                                      </p:to>
+                                    </p:set>
+                                    <p:anim calcmode="lin" valueType="num">
+                                      <p:cBhvr additive="base">
+                                        <p:cTn id="31" dur="400"/>
+                                        <p:tgtEl>
+                                          <p:spTgt spid="7"/>
+                                        </p:tgtEl>
+                                        <p:attrNameLst>
+                                          <p:attrName>ppt_x</p:attrName>
+                                        </p:attrNameLst>
+                                      </p:cBhvr>
+                                      <p:tavLst>
+                                        <p:tav tm="0">
+                                          <p:val>
+                                            <p:strVal val="#ppt_x"/>
+                                          </p:val>
+                                        </p:tav>
+                                        <p:tav tm="100000">
+                                          <p:val>
+                                            <p:strVal val="#ppt_x"/>
+                                          </p:val>
+                                        </p:tav>
+                                      </p:tavLst>
+                                    </p:anim>
+                                    <p:anim calcmode="lin" valueType="num">
+                                      <p:cBhvr additive="base">
+                                        <p:cTn id="32" dur="400"/>
+                                        <p:tgtEl>
+                                          <p:spTgt spid="7"/>
+                                        </p:tgtEl>
+                                        <p:attrNameLst>
+                                          <p:attrName>ppt_y</p:attrName>
+                                        </p:attrNameLst>
+                                      </p:cBhvr>
+                                      <p:tavLst>
+                                        <p:tav tm="0">
+                                          <p:val>
+                                            <p:strVal val="1+#ppt_h/2"/>
+                                          </p:val>
+                                        </p:tav>
+                                        <p:tav tm="100000">
+                                          <p:val>
+                                            <p:strVal val="#ppt_y"/>
+                                          </p:val>
+                                        </p:tav>
+                                      </p:tavLst>
+                                    </p:anim>
+                                  </p:childTnLst>
+                                </p:cTn>
+                              </p:par>
+                              <p:par>
+                                <p:cTn id="33" presetID="2" presetClass="entr" presetSubtype="4" fill="hold" grpId="0" nodeType="afterEffect">
+                                  <p:stCondLst>
+                                    <p:cond delay="7000"/>
+                                  </p:stCondLst>
+                                  <p:childTnLst>
+                                    <p:set>
+                                      <p:cBhvr>
+                                        <p:cTn id="34" dur="1"/>
+                                        <p:tgtEl>
+                                          <p:spTgt spid="11"/>
+                                        </p:tgtEl>
+                                        <p:attrNameLst>
+                                          <p:attrName>style.visibility</p:attrName>
+                                        </p:attrNameLst>
+                                      </p:cBhvr>
+                                      <p:to>
+                                        <p:strVal val="visible"/>
+                                      </p:to>
+                                    </p:set>
+                                    <p:anim calcmode="lin" valueType="num">
+                                      <p:cBhvr additive="base">
+                                        <p:cTn id="35" dur="400"/>
+                                        <p:tgtEl>
+                                          <p:spTgt spid="11"/>
+                                        </p:tgtEl>
+                                        <p:attrNameLst>
+                                          <p:attrName>ppt_x</p:attrName>
+                                        </p:attrNameLst>
+                                      </p:cBhvr>
+                                      <p:tavLst>
+                                        <p:tav tm="0">
+                                          <p:val>
+                                            <p:strVal val="#ppt_x"/>
+                                          </p:val>
+                                        </p:tav>
+                                        <p:tav tm="100000">
+                                          <p:val>
+                                            <p:strVal val="#ppt_x"/>
+                                          </p:val>
+                                        </p:tav>
+                                      </p:tavLst>
+                                    </p:anim>
+                                    <p:anim calcmode="lin" valueType="num">
+                                      <p:cBhvr additive="base">
+                                        <p:cTn id="36" dur="400"/>
+                                        <p:tgtEl>
+                                          <p:spTgt spid="11"/>
+                                        </p:tgtEl>
+                                        <p:attrNameLst>
+                                          <p:attrName>ppt_y</p:attrName>
+                                        </p:attrNameLst>
+                                      </p:cBhvr>
+                                      <p:tavLst>
+                                        <p:tav tm="0">
+                                          <p:val>
+                                            <p:strVal val="1+#ppt_h/2"/>
+                                          </p:val>
+                                        </p:tav>
+                                        <p:tav tm="100000">
+                                          <p:val>
+                                            <p:strVal val="#ppt_y"/>
+                                          </p:val>
+                                        </p:tav>
+                                      </p:tavLst>
+                                    </p:anim>
+                                  </p:childTnLst>
+                                </p:cTn>
+                              </p:par>
+                              <p:par>
+                                <p:cTn id="37" presetID="2" presetClass="entr" presetSubtype="4" fill="hold" grpId="0" nodeType="afterEffect">
+                                  <p:stCondLst>
+                                    <p:cond delay="8600"/>
+                                  </p:stCondLst>
+                                  <p:childTnLst>
+                                    <p:set>
+                                      <p:cBhvr>
+                                        <p:cTn id="38" dur="1"/>
+                                        <p:tgtEl>
+                                          <p:spTgt spid="8"/>
+                                        </p:tgtEl>
+                                        <p:attrNameLst>
+                                          <p:attrName>style.visibility</p:attrName>
+                                        </p:attrNameLst>
+                                      </p:cBhvr>
+                                      <p:to>
+                                        <p:strVal val="visible"/>
+                                      </p:to>
+                                    </p:set>
+                                    <p:anim calcmode="lin" valueType="num">
+                                      <p:cBhvr additive="base">
+                                        <p:cTn id="39" dur="400"/>
+                                        <p:tgtEl>
+                                          <p:spTgt spid="8"/>
+                                        </p:tgtEl>
+                                        <p:attrNameLst>
+                                          <p:attrName>ppt_x</p:attrName>
+                                        </p:attrNameLst>
+                                      </p:cBhvr>
+                                      <p:tavLst>
+                                        <p:tav tm="0">
+                                          <p:val>
+                                            <p:strVal val="#ppt_x"/>
+                                          </p:val>
+                                        </p:tav>
+                                        <p:tav tm="100000">
+                                          <p:val>
+                                            <p:strVal val="#ppt_x"/>
+                                          </p:val>
+                                        </p:tav>
+                                      </p:tavLst>
+                                    </p:anim>
+                                    <p:anim calcmode="lin" valueType="num">
+                                      <p:cBhvr additive="base">
+                                        <p:cTn id="40" dur="400"/>
+                                        <p:tgtEl>
+                                          <p:spTgt spid="8"/>
+                                        </p:tgtEl>
+                                        <p:attrNameLst>
+                                          <p:attrName>ppt_y</p:attrName>
+                                        </p:attrNameLst>
+                                      </p:cBhvr>
+                                      <p:tavLst>
+                                        <p:tav tm="0">
+                                          <p:val>
+                                            <p:strVal val="1+#ppt_h/2"/>
+                                          </p:val>
+                                        </p:tav>
+                                        <p:tav tm="100000">
+                                          <p:val>
+                                            <p:strVal val="#ppt_y"/>
+                                          </p:val>
+                                        </p:tav>
+                                      </p:tavLst>
+                                    </p:anim>
+                                  </p:childTnLst>
+                                </p:cTn>
+                              </p:par>
+                              <p:par>
+                                <p:cTn id="41" presetID="2" presetClass="entr" presetSubtype="4" fill="hold" grpId="0" nodeType="afterEffect">
+                                  <p:stCondLst>
+                                    <p:cond delay="10350"/>
+                                  </p:stCondLst>
+                                  <p:childTnLst>
+                                    <p:set>
+                                      <p:cBhvr>
+                                        <p:cTn id="42" dur="1"/>
+                                        <p:tgtEl>
+                                          <p:spTgt spid="12"/>
+                                        </p:tgtEl>
+                                        <p:attrNameLst>
+                                          <p:attrName>style.visibility</p:attrName>
+                                        </p:attrNameLst>
+                                      </p:cBhvr>
+                                      <p:to>
+                                        <p:strVal val="visible"/>
+                                      </p:to>
+                                    </p:set>
+                                    <p:anim calcmode="lin" valueType="num">
+                                      <p:cBhvr additive="base">
+                                        <p:cTn id="43" dur="400"/>
+                                        <p:tgtEl>
+                                          <p:spTgt spid="12"/>
+                                        </p:tgtEl>
+                                        <p:attrNameLst>
+                                          <p:attrName>ppt_x</p:attrName>
+                                        </p:attrNameLst>
+                                      </p:cBhvr>
+                                      <p:tavLst>
+                                        <p:tav tm="0">
+                                          <p:val>
+                                            <p:strVal val="#ppt_x"/>
+                                          </p:val>
+                                        </p:tav>
+                                        <p:tav tm="100000">
+                                          <p:val>
+                                            <p:strVal val="#ppt_x"/>
+                                          </p:val>
+                                        </p:tav>
+                                      </p:tavLst>
+                                    </p:anim>
+                                    <p:anim calcmode="lin" valueType="num">
+                                      <p:cBhvr additive="base">
+                                        <p:cTn id="44" dur="400"/>
+                                        <p:tgtEl>
+                                          <p:spTgt spid="12"/>
+                                        </p:tgtEl>
+                                        <p:attrNameLst>
+                                          <p:attrName>ppt_y</p:attrName>
+                                        </p:attrNameLst>
+                                      </p:cBhvr>
+                                      <p:tavLst>
+                                        <p:tav tm="0">
+                                          <p:val>
+                                            <p:strVal val="1+#ppt_h/2"/>
+                                          </p:val>
+                                        </p:tav>
+                                        <p:tav tm="100000">
+                                          <p:val>
+                                            <p:strVal val="#ppt_y"/>
+                                          </p:val>
+                                        </p:tav>
+                                      </p:tavLst>
+                                    </p:anim>
+                                  </p:childTnLst>
+                                </p:cTn>
+                              </p:par>
+                              <p:par>
+                                <p:cTn id="45" presetID="2" presetClass="entr" presetSubtype="4" fill="hold" grpId="0" nodeType="afterEffect">
+                                  <p:stCondLst>
+                                    <p:cond delay="12250"/>
+                                  </p:stCondLst>
+                                  <p:childTnLst>
+                                    <p:set>
+                                      <p:cBhvr>
+                                        <p:cTn id="46" dur="1"/>
+                                        <p:tgtEl>
+                                          <p:spTgt spid="13"/>
+                                        </p:tgtEl>
+                                        <p:attrNameLst>
+                                          <p:attrName>style.visibility</p:attrName>
+                                        </p:attrNameLst>
+                                      </p:cBhvr>
+                                      <p:to>
+                                        <p:strVal val="visible"/>
+                                      </p:to>
+                                    </p:set>
+                                    <p:anim calcmode="lin" valueType="num">
+                                      <p:cBhvr additive="base">
+                                        <p:cTn id="47" dur="400"/>
+                                        <p:tgtEl>
+                                          <p:spTgt spid="13"/>
+                                        </p:tgtEl>
+                                        <p:attrNameLst>
+                                          <p:attrName>ppt_x</p:attrName>
+                                        </p:attrNameLst>
+                                      </p:cBhvr>
+                                      <p:tavLst>
+                                        <p:tav tm="0">
+                                          <p:val>
+                                            <p:strVal val="#ppt_x"/>
+                                          </p:val>
+                                        </p:tav>
+                                        <p:tav tm="100000">
+                                          <p:val>
+                                            <p:strVal val="#ppt_x"/>
+                                          </p:val>
+                                        </p:tav>
+                                      </p:tavLst>
+                                    </p:anim>
+                                    <p:anim calcmode="lin" valueType="num">
+                                      <p:cBhvr additive="base">
+                                        <p:cTn id="48" dur="400"/>
+                                        <p:tgtEl>
+                                          <p:spTgt spid="13"/>
+                                        </p:tgtEl>
+                                        <p:attrNameLst>
+                                          <p:attrName>ppt_y</p:attrName>
+                                        </p:attrNameLst>
+                                      </p:cBhvr>
+                                      <p:tavLst>
+                                        <p:tav tm="0">
+                                          <p:val>
+                                            <p:strVal val="1+#ppt_h/2"/>
+                                          </p:val>
+                                        </p:tav>
+                                        <p:tav tm="100000">
+                                          <p:val>
+                                            <p:strVal val="#ppt_y"/>
+                                          </p:val>
+                                        </p:tav>
+                                      </p:tavLst>
+                                    </p:anim>
+                                  </p:childTnLst>
+                                </p:cTn>
+                              </p:par>
+                              <p:par>
+                                <p:cTn id="49" presetID="2" presetClass="entr" presetSubtype="4" fill="hold" grpId="0" nodeType="afterEffect">
+                                  <p:stCondLst>
+                                    <p:cond delay="14300"/>
+                                  </p:stCondLst>
+                                  <p:childTnLst>
+                                    <p:set>
+                                      <p:cBhvr>
+                                        <p:cTn id="50" dur="1"/>
+                                        <p:tgtEl>
+                                          <p:spTgt spid="17"/>
+                                        </p:tgtEl>
+                                        <p:attrNameLst>
+                                          <p:attrName>style.visibility</p:attrName>
+                                        </p:attrNameLst>
+                                      </p:cBhvr>
+                                      <p:to>
+                                        <p:strVal val="visible"/>
+                                      </p:to>
+                                    </p:set>
+                                    <p:anim calcmode="lin" valueType="num">
+                                      <p:cBhvr additive="base">
+                                        <p:cTn id="51" dur="400"/>
+                                        <p:tgtEl>
+                                          <p:spTgt spid="17"/>
+                                        </p:tgtEl>
+                                        <p:attrNameLst>
+                                          <p:attrName>ppt_x</p:attrName>
+                                        </p:attrNameLst>
+                                      </p:cBhvr>
+                                      <p:tavLst>
+                                        <p:tav tm="0">
+                                          <p:val>
+                                            <p:strVal val="#ppt_x"/>
+                                          </p:val>
+                                        </p:tav>
+                                        <p:tav tm="100000">
+                                          <p:val>
+                                            <p:strVal val="#ppt_x"/>
+                                          </p:val>
+                                        </p:tav>
+                                      </p:tavLst>
+                                    </p:anim>
+                                    <p:anim calcmode="lin" valueType="num">
+                                      <p:cBhvr additive="base">
+                                        <p:cTn id="52" dur="400"/>
+                                        <p:tgtEl>
+                                          <p:spTgt spid="17"/>
+                                        </p:tgtEl>
+                                        <p:attrNameLst>
+                                          <p:attrName>ppt_y</p:attrName>
+                                        </p:attrNameLst>
+                                      </p:cBhvr>
+                                      <p:tavLst>
+                                        <p:tav tm="0">
+                                          <p:val>
+                                            <p:strVal val="1+#ppt_h/2"/>
+                                          </p:val>
+                                        </p:tav>
+                                        <p:tav tm="100000">
+                                          <p:val>
+                                            <p:strVal val="#ppt_y"/>
+                                          </p:val>
+                                        </p:tav>
+                                      </p:tavLst>
+                                    </p:anim>
+                                  </p:childTnLst>
+                                </p:cTn>
+                              </p:par>
+                              <p:par>
+                                <p:cTn id="53" presetID="2" presetClass="entr" presetSubtype="4" fill="hold" grpId="0" nodeType="afterEffect">
+                                  <p:stCondLst>
+                                    <p:cond delay="16500"/>
+                                  </p:stCondLst>
+                                  <p:childTnLst>
+                                    <p:set>
+                                      <p:cBhvr>
+                                        <p:cTn id="54" dur="1"/>
+                                        <p:tgtEl>
+                                          <p:spTgt spid="14"/>
+                                        </p:tgtEl>
+                                        <p:attrNameLst>
+                                          <p:attrName>style.visibility</p:attrName>
+                                        </p:attrNameLst>
+                                      </p:cBhvr>
+                                      <p:to>
+                                        <p:strVal val="visible"/>
+                                      </p:to>
+                                    </p:set>
+                                    <p:anim calcmode="lin" valueType="num">
+                                      <p:cBhvr additive="base">
+                                        <p:cTn id="55" dur="400"/>
+                                        <p:tgtEl>
+                                          <p:spTgt spid="14"/>
+                                        </p:tgtEl>
+                                        <p:attrNameLst>
+                                          <p:attrName>ppt_x</p:attrName>
+                                        </p:attrNameLst>
+                                      </p:cBhvr>
+                                      <p:tavLst>
+                                        <p:tav tm="0">
+                                          <p:val>
+                                            <p:strVal val="#ppt_x"/>
+                                          </p:val>
+                                        </p:tav>
+                                        <p:tav tm="100000">
+                                          <p:val>
+                                            <p:strVal val="#ppt_x"/>
+                                          </p:val>
+                                        </p:tav>
+                                      </p:tavLst>
+                                    </p:anim>
+                                    <p:anim calcmode="lin" valueType="num">
+                                      <p:cBhvr additive="base">
+                                        <p:cTn id="56" dur="400"/>
+                                        <p:tgtEl>
+                                          <p:spTgt spid="14"/>
+                                        </p:tgtEl>
+                                        <p:attrNameLst>
+                                          <p:attrName>ppt_y</p:attrName>
+                                        </p:attrNameLst>
+                                      </p:cBhvr>
+                                      <p:tavLst>
+                                        <p:tav tm="0">
+                                          <p:val>
+                                            <p:strVal val="1+#ppt_h/2"/>
+                                          </p:val>
+                                        </p:tav>
+                                        <p:tav tm="100000">
+                                          <p:val>
+                                            <p:strVal val="#ppt_y"/>
+                                          </p:val>
+                                        </p:tav>
+                                      </p:tavLst>
+                                    </p:anim>
+                                  </p:childTnLst>
+                                </p:cTn>
+                              </p:par>
+                              <p:par>
+                                <p:cTn id="57" presetID="2" presetClass="entr" presetSubtype="4" fill="hold" grpId="0" nodeType="afterEffect">
+                                  <p:stCondLst>
+                                    <p:cond delay="18850"/>
+                                  </p:stCondLst>
+                                  <p:childTnLst>
+                                    <p:set>
+                                      <p:cBhvr>
+                                        <p:cTn id="58" dur="1"/>
+                                        <p:tgtEl>
+                                          <p:spTgt spid="18"/>
+                                        </p:tgtEl>
+                                        <p:attrNameLst>
+                                          <p:attrName>style.visibility</p:attrName>
+                                        </p:attrNameLst>
+                                      </p:cBhvr>
+                                      <p:to>
+                                        <p:strVal val="visible"/>
+                                      </p:to>
+                                    </p:set>
+                                    <p:anim calcmode="lin" valueType="num">
+                                      <p:cBhvr additive="base">
+                                        <p:cTn id="59" dur="400"/>
+                                        <p:tgtEl>
+                                          <p:spTgt spid="18"/>
+                                        </p:tgtEl>
+                                        <p:attrNameLst>
+                                          <p:attrName>ppt_x</p:attrName>
+                                        </p:attrNameLst>
+                                      </p:cBhvr>
+                                      <p:tavLst>
+                                        <p:tav tm="0">
+                                          <p:val>
+                                            <p:strVal val="#ppt_x"/>
+                                          </p:val>
+                                        </p:tav>
+                                        <p:tav tm="100000">
+                                          <p:val>
+                                            <p:strVal val="#ppt_x"/>
+                                          </p:val>
+                                        </p:tav>
+                                      </p:tavLst>
+                                    </p:anim>
+                                    <p:anim calcmode="lin" valueType="num">
+                                      <p:cBhvr additive="base">
+                                        <p:cTn id="60" dur="400"/>
+                                        <p:tgtEl>
+                                          <p:spTgt spid="18"/>
+                                        </p:tgtEl>
+                                        <p:attrNameLst>
+                                          <p:attrName>ppt_y</p:attrName>
+                                        </p:attrNameLst>
+                                      </p:cBhvr>
+                                      <p:tavLst>
+                                        <p:tav tm="0">
+                                          <p:val>
+                                            <p:strVal val="1+#ppt_h/2"/>
+                                          </p:val>
+                                        </p:tav>
+                                        <p:tav tm="100000">
+                                          <p:val>
+                                            <p:strVal val="#ppt_y"/>
+                                          </p:val>
+                                        </p:tav>
+                                      </p:tavLst>
+                                    </p:anim>
+                                  </p:childTnLst>
+                                </p:cTn>
+                              </p:par>
+                              <p:par>
+                                <p:cTn id="61" presetID="2" presetClass="entr" presetSubtype="4" fill="hold" grpId="0" nodeType="afterEffect">
+                                  <p:stCondLst>
+                                    <p:cond delay="21350"/>
+                                  </p:stCondLst>
+                                  <p:childTnLst>
+                                    <p:set>
+                                      <p:cBhvr>
+                                        <p:cTn id="62" dur="1"/>
+                                        <p:tgtEl>
+                                          <p:spTgt spid="15"/>
+                                        </p:tgtEl>
+                                        <p:attrNameLst>
+                                          <p:attrName>style.visibility</p:attrName>
+                                        </p:attrNameLst>
+                                      </p:cBhvr>
+                                      <p:to>
+                                        <p:strVal val="visible"/>
+                                      </p:to>
+                                    </p:set>
+                                    <p:anim calcmode="lin" valueType="num">
+                                      <p:cBhvr additive="base">
+                                        <p:cTn id="63" dur="400"/>
+                                        <p:tgtEl>
+                                          <p:spTgt spid="15"/>
+                                        </p:tgtEl>
+                                        <p:attrNameLst>
+                                          <p:attrName>ppt_x</p:attrName>
+                                        </p:attrNameLst>
+                                      </p:cBhvr>
+                                      <p:tavLst>
+                                        <p:tav tm="0">
+                                          <p:val>
+                                            <p:strVal val="#ppt_x"/>
+                                          </p:val>
+                                        </p:tav>
+                                        <p:tav tm="100000">
+                                          <p:val>
+                                            <p:strVal val="#ppt_x"/>
+                                          </p:val>
+                                        </p:tav>
+                                      </p:tavLst>
+                                    </p:anim>
+                                    <p:anim calcmode="lin" valueType="num">
+                                      <p:cBhvr additive="base">
+                                        <p:cTn id="64" dur="400"/>
+                                        <p:tgtEl>
+                                          <p:spTgt spid="15"/>
+                                        </p:tgtEl>
+                                        <p:attrNameLst>
+                                          <p:attrName>ppt_y</p:attrName>
+                                        </p:attrNameLst>
+                                      </p:cBhvr>
+                                      <p:tavLst>
+                                        <p:tav tm="0">
+                                          <p:val>
+                                            <p:strVal val="1+#ppt_h/2"/>
+                                          </p:val>
+                                        </p:tav>
+                                        <p:tav tm="100000">
+                                          <p:val>
+                                            <p:strVal val="#ppt_y"/>
+                                          </p:val>
+                                        </p:tav>
+                                      </p:tavLst>
+                                    </p:anim>
+                                  </p:childTnLst>
+                                </p:cTn>
+                              </p:par>
+                              <p:par>
+                                <p:cTn id="65" presetID="2" presetClass="entr" presetSubtype="4" fill="hold" grpId="0" nodeType="afterEffect">
+                                  <p:stCondLst>
+                                    <p:cond delay="24000"/>
+                                  </p:stCondLst>
+                                  <p:childTnLst>
+                                    <p:set>
+                                      <p:cBhvr>
+                                        <p:cTn id="66" dur="1"/>
+                                        <p:tgtEl>
+                                          <p:spTgt spid="19"/>
+                                        </p:tgtEl>
+                                        <p:attrNameLst>
+                                          <p:attrName>style.visibility</p:attrName>
+                                        </p:attrNameLst>
+                                      </p:cBhvr>
+                                      <p:to>
+                                        <p:strVal val="visible"/>
+                                      </p:to>
+                                    </p:set>
+                                    <p:anim calcmode="lin" valueType="num">
+                                      <p:cBhvr additive="base">
+                                        <p:cTn id="67" dur="400"/>
+                                        <p:tgtEl>
+                                          <p:spTgt spid="19"/>
+                                        </p:tgtEl>
+                                        <p:attrNameLst>
+                                          <p:attrName>ppt_x</p:attrName>
+                                        </p:attrNameLst>
+                                      </p:cBhvr>
+                                      <p:tavLst>
+                                        <p:tav tm="0">
+                                          <p:val>
+                                            <p:strVal val="#ppt_x"/>
+                                          </p:val>
+                                        </p:tav>
+                                        <p:tav tm="100000">
+                                          <p:val>
+                                            <p:strVal val="#ppt_x"/>
+                                          </p:val>
+                                        </p:tav>
+                                      </p:tavLst>
+                                    </p:anim>
+                                    <p:anim calcmode="lin" valueType="num">
+                                      <p:cBhvr additive="base">
+                                        <p:cTn id="68" dur="400"/>
+                                        <p:tgtEl>
+                                          <p:spTgt spid="19"/>
+                                        </p:tgtEl>
+                                        <p:attrNameLst>
+                                          <p:attrName>ppt_y</p:attrName>
+                                        </p:attrNameLst>
+                                      </p:cBhvr>
+                                      <p:tavLst>
+                                        <p:tav tm="0">
+                                          <p:val>
+                                            <p:strVal val="1+#ppt_h/2"/>
+                                          </p:val>
+                                        </p:tav>
+                                        <p:tav tm="100000">
+                                          <p:val>
+                                            <p:strVal val="#ppt_y"/>
+                                          </p:val>
+                                        </p:tav>
+                                      </p:tavLst>
+                                    </p:anim>
+                                  </p:childTnLst>
+                                </p:cTn>
+                              </p:par>
+                              <p:par>
+                                <p:cTn id="69" presetID="2" presetClass="entr" presetSubtype="4" fill="hold" grpId="0" nodeType="afterEffect">
+                                  <p:stCondLst>
+                                    <p:cond delay="26800"/>
+                                  </p:stCondLst>
+                                  <p:childTnLst>
+                                    <p:set>
+                                      <p:cBhvr>
+                                        <p:cTn id="70" dur="1"/>
+                                        <p:tgtEl>
+                                          <p:spTgt spid="16"/>
+                                        </p:tgtEl>
+                                        <p:attrNameLst>
+                                          <p:attrName>style.visibility</p:attrName>
+                                        </p:attrNameLst>
+                                      </p:cBhvr>
+                                      <p:to>
+                                        <p:strVal val="visible"/>
+                                      </p:to>
+                                    </p:set>
+                                    <p:anim calcmode="lin" valueType="num">
+                                      <p:cBhvr additive="base">
+                                        <p:cTn id="71" dur="400"/>
+                                        <p:tgtEl>
+                                          <p:spTgt spid="16"/>
+                                        </p:tgtEl>
+                                        <p:attrNameLst>
+                                          <p:attrName>ppt_x</p:attrName>
+                                        </p:attrNameLst>
+                                      </p:cBhvr>
+                                      <p:tavLst>
+                                        <p:tav tm="0">
+                                          <p:val>
+                                            <p:strVal val="#ppt_x"/>
+                                          </p:val>
+                                        </p:tav>
+                                        <p:tav tm="100000">
+                                          <p:val>
+                                            <p:strVal val="#ppt_x"/>
+                                          </p:val>
+                                        </p:tav>
+                                      </p:tavLst>
+                                    </p:anim>
+                                    <p:anim calcmode="lin" valueType="num">
+                                      <p:cBhvr additive="base">
+                                        <p:cTn id="72" dur="400"/>
+                                        <p:tgtEl>
+                                          <p:spTgt spid="16"/>
+                                        </p:tgtEl>
+                                        <p:attrNameLst>
+                                          <p:attrName>ppt_y</p:attrName>
+                                        </p:attrNameLst>
+                                      </p:cBhvr>
+                                      <p:tavLst>
+                                        <p:tav tm="0">
+                                          <p:val>
+                                            <p:strVal val="1+#ppt_h/2"/>
+                                          </p:val>
+                                        </p:tav>
+                                        <p:tav tm="100000">
+                                          <p:val>
+                                            <p:strVal val="#ppt_y"/>
+                                          </p:val>
+                                        </p:tav>
+                                      </p:tavLst>
+                                    </p:anim>
+                                  </p:childTnLst>
+                                </p:cTn>
+                              </p:par>
+                              <p:par>
+                                <p:cTn id="73" presetID="2" presetClass="entr" presetSubtype="4" fill="hold" grpId="0" nodeType="afterEffect">
+                                  <p:stCondLst>
+                                    <p:cond delay="29750"/>
+                                  </p:stCondLst>
+                                  <p:childTnLst>
+                                    <p:set>
+                                      <p:cBhvr>
+                                        <p:cTn id="74" dur="1"/>
+                                        <p:tgtEl>
+                                          <p:spTgt spid="20"/>
+                                        </p:tgtEl>
+                                        <p:attrNameLst>
+                                          <p:attrName>style.visibility</p:attrName>
+                                        </p:attrNameLst>
+                                      </p:cBhvr>
+                                      <p:to>
+                                        <p:strVal val="visible"/>
+                                      </p:to>
+                                    </p:set>
+                                    <p:anim calcmode="lin" valueType="num">
+                                      <p:cBhvr additive="base">
+                                        <p:cTn id="75" dur="400"/>
+                                        <p:tgtEl>
+                                          <p:spTgt spid="20"/>
+                                        </p:tgtEl>
+                                        <p:attrNameLst>
+                                          <p:attrName>ppt_x</p:attrName>
+                                        </p:attrNameLst>
+                                      </p:cBhvr>
+                                      <p:tavLst>
+                                        <p:tav tm="0">
+                                          <p:val>
+                                            <p:strVal val="#ppt_x"/>
+                                          </p:val>
+                                        </p:tav>
+                                        <p:tav tm="100000">
+                                          <p:val>
+                                            <p:strVal val="#ppt_x"/>
+                                          </p:val>
+                                        </p:tav>
+                                      </p:tavLst>
+                                    </p:anim>
+                                    <p:anim calcmode="lin" valueType="num">
+                                      <p:cBhvr additive="base">
+                                        <p:cTn id="76" dur="400"/>
+                                        <p:tgtEl>
+                                          <p:spTgt spid="20"/>
+                                        </p:tgtEl>
+                                        <p:attrNameLst>
+                                          <p:attrName>ppt_y</p:attrName>
+                                        </p:attrNameLst>
+                                      </p:cBhvr>
+                                      <p:tavLst>
+                                        <p:tav tm="0">
+                                          <p:val>
+                                            <p:strVal val="1+#ppt_h/2"/>
+                                          </p:val>
+                                        </p:tav>
+                                        <p:tav tm="100000">
+                                          <p:val>
+                                            <p:strVal val="#ppt_y"/>
+                                          </p:val>
+                                        </p:tav>
+                                      </p:tavLst>
+                                    </p:anim>
+                                  </p:childTnLst>
+                                </p:cTn>
+                              </p:par>
+                              <p:par>
+                                <p:cTn id="77" presetID="2" presetClass="entr" presetSubtype="4" fill="hold" grpId="0" nodeType="afterEffect">
+                                  <p:stCondLst>
+                                    <p:cond delay="32850"/>
+                                  </p:stCondLst>
+                                  <p:childTnLst>
+                                    <p:set>
+                                      <p:cBhvr>
+                                        <p:cTn id="78" dur="1"/>
+                                        <p:tgtEl>
+                                          <p:spTgt spid="21"/>
+                                        </p:tgtEl>
+                                        <p:attrNameLst>
+                                          <p:attrName>style.visibility</p:attrName>
+                                        </p:attrNameLst>
+                                      </p:cBhvr>
+                                      <p:to>
+                                        <p:strVal val="visible"/>
+                                      </p:to>
+                                    </p:set>
+                                    <p:anim calcmode="lin" valueType="num">
+                                      <p:cBhvr additive="base">
+                                        <p:cTn id="79" dur="400"/>
+                                        <p:tgtEl>
+                                          <p:spTgt spid="21"/>
+                                        </p:tgtEl>
+                                        <p:attrNameLst>
+                                          <p:attrName>ppt_x</p:attrName>
+                                        </p:attrNameLst>
+                                      </p:cBhvr>
+                                      <p:tavLst>
+                                        <p:tav tm="0">
+                                          <p:val>
+                                            <p:strVal val="#ppt_x"/>
+                                          </p:val>
+                                        </p:tav>
+                                        <p:tav tm="100000">
+                                          <p:val>
+                                            <p:strVal val="#ppt_x"/>
+                                          </p:val>
+                                        </p:tav>
+                                      </p:tavLst>
+                                    </p:anim>
+                                    <p:anim calcmode="lin" valueType="num">
+                                      <p:cBhvr additive="base">
+                                        <p:cTn id="80" dur="400"/>
+                                        <p:tgtEl>
+                                          <p:spTgt spid="21"/>
+                                        </p:tgtEl>
+                                        <p:attrNameLst>
+                                          <p:attrName>ppt_y</p:attrName>
+                                        </p:attrNameLst>
+                                      </p:cBhvr>
+                                      <p:tavLst>
+                                        <p:tav tm="0">
+                                          <p:val>
+                                            <p:strVal val="1+#ppt_h/2"/>
+                                          </p:val>
+                                        </p:tav>
+                                        <p:tav tm="100000">
+                                          <p:val>
+                                            <p:strVal val="#ppt_y"/>
+                                          </p:val>
+                                        </p:tav>
+                                      </p:tavLst>
+                                    </p:anim>
+                                  </p:childTnLst>
+                                </p:cTn>
+                              </p:par>
+                              <p:par>
+                                <p:cTn id="81" presetID="2" presetClass="entr" presetSubtype="4" fill="hold" grpId="0" nodeType="afterEffect">
+                                  <p:stCondLst>
+                                    <p:cond delay="36100"/>
+                                  </p:stCondLst>
+                                  <p:childTnLst>
+                                    <p:set>
+                                      <p:cBhvr>
+                                        <p:cTn id="82" dur="1"/>
+                                        <p:tgtEl>
+                                          <p:spTgt spid="22"/>
+                                        </p:tgtEl>
+                                        <p:attrNameLst>
+                                          <p:attrName>style.visibility</p:attrName>
+                                        </p:attrNameLst>
+                                      </p:cBhvr>
+                                      <p:to>
+                                        <p:strVal val="visible"/>
+                                      </p:to>
+                                    </p:set>
+                                    <p:anim calcmode="lin" valueType="num">
+                                      <p:cBhvr additive="base">
+                                        <p:cTn id="83" dur="400"/>
+                                        <p:tgtEl>
+                                          <p:spTgt spid="22"/>
+                                        </p:tgtEl>
+                                        <p:attrNameLst>
+                                          <p:attrName>ppt_x</p:attrName>
+                                        </p:attrNameLst>
+                                      </p:cBhvr>
+                                      <p:tavLst>
+                                        <p:tav tm="0">
+                                          <p:val>
+                                            <p:strVal val="#ppt_x"/>
+                                          </p:val>
+                                        </p:tav>
+                                        <p:tav tm="100000">
+                                          <p:val>
+                                            <p:strVal val="#ppt_x"/>
+                                          </p:val>
+                                        </p:tav>
+                                      </p:tavLst>
+                                    </p:anim>
+                                    <p:anim calcmode="lin" valueType="num">
+                                      <p:cBhvr additive="base">
+                                        <p:cTn id="84" dur="400"/>
+                                        <p:tgtEl>
+                                          <p:spTgt spid="22"/>
+                                        </p:tgtEl>
+                                        <p:attrNameLst>
+                                          <p:attrName>ppt_y</p:attrName>
+                                        </p:attrNameLst>
+                                      </p:cBhvr>
+                                      <p:tavLst>
+                                        <p:tav tm="0">
+                                          <p:val>
+                                            <p:strVal val="1+#ppt_h/2"/>
+                                          </p:val>
+                                        </p:tav>
+                                        <p:tav tm="100000">
+                                          <p:val>
+                                            <p:strVal val="#ppt_y"/>
+                                          </p:val>
+                                        </p:tav>
+                                      </p:tavLst>
+                                    </p:anim>
+                                  </p:childTnLst>
+                                </p:cTn>
+                              </p:par>
+                            </p:childTnLst>
+                          </p:cTn>
+                        </p:par>
+                      </p:childTnLst>
+                    </p:cTn>
+                  </p:par>
+                </p:childTnLst>
+              </p:cTn>
+              <p:prevCondLst>
+                <p:cond evt="onPrev" delay="0">
+                  <p:tgtEl>
+                    <p:sldTgt/>
+                  </p:tgtEl>
+                </p:cond>
+              </p:prevCondLst>
+              <p:nextCondLst>
+                <p:cond evt="onNext" delay="0">
+                  <p:tgtEl>
+                    <p:sldTgt/>
+                  </p:tgtEl>
+                </p:cond>
+              </p:nextCondLst>
+            </p:seq>
+          </p:childTnLst>
+        </p:cTn>
+      </p:par>
+    </p:tnLst>
+    <p:bldLst>
+      <p:bldP spid="2" grpId="0"/>
+      <p:bldP spid="3" grpId="0"/>
+      <p:bldP spid="5" grpId="0"/>
+      <p:bldP spid="9" grpId="0"/>
+      <p:bldP spid="6" grpId="0"/>
+      <p:bldP spid="10" grpId="0"/>
+      <p:bldP spid="7" grpId="0"/>
+      <p:bldP spid="11" grpId="0"/>
+      <p:bldP spid="8" grpId="0"/>
+      <p:bldP spid="12" grpId="0"/>
+      <p:bldP spid="13" grpId="0"/>
+      <p:bldP spid="17" grpId="0"/>
+      <p:bldP spid="14" grpId="0"/>
+      <p:bldP spid="18" grpId="0"/>
+      <p:bldP spid="15" grpId="0"/>
+      <p:bldP spid="19" grpId="0"/>
+      <p:bldP spid="16" grpId="0"/>
+      <p:bldP spid="20" grpId="0"/>
+      <p:bldP spid="21" grpId="0"/>
+      <p:bldP spid="22" grpId="0"/>
+    </p:bldLst>
+  </p:timing>
 </p:sld>
 </file>
 
@@ -8021,7 +13932,7 @@
           <a:noFill/>
           <a:ln w="19050">
             <a:solidFill>
-              <a:srgbClr val="C9D4E2"/>
+              <a:srgbClr val="D7DEE8"/>
             </a:solidFill>
             <a:prstDash val="solid"/>
           </a:ln>
@@ -8502,6 +14413,798 @@
   <p:clrMapOvr>
     <a:masterClrMapping/>
   </p:clrMapOvr>
+  <p:transition spd="med">
+    <p:fade/>
+  </p:transition>
+  <p:timing>
+    <p:tnLst>
+      <p:par>
+        <p:cTn id="1" dur="indefinite" restart="never" nodeType="tmRoot">
+          <p:childTnLst>
+            <p:seq concurrent="1" nextAc="seek">
+              <p:cTn id="2" dur="indefinite" nodeType="mainSeq">
+                <p:childTnLst>
+                  <p:par>
+                    <p:cTn id="3" fill="hold">
+                      <p:stCondLst>
+                        <p:cond delay="indefinite"/>
+                        <p:cond evt="onBegin" delay="0">
+                          <p:tn val="2"/>
+                        </p:cond>
+                      </p:stCondLst>
+                      <p:childTnLst>
+                        <p:par>
+                          <p:cTn id="4" fill="hold">
+                            <p:stCondLst>
+                              <p:cond delay="0"/>
+                            </p:stCondLst>
+                            <p:childTnLst>
+                              <p:par>
+                                <p:cTn id="5" presetID="10" presetClass="entr" presetSubtype="0" fill="hold" grpId="0" nodeType="afterEffect">
+                                  <p:stCondLst>
+                                    <p:cond delay="0"/>
+                                  </p:stCondLst>
+                                  <p:childTnLst>
+                                    <p:set>
+                                      <p:cBhvr>
+                                        <p:cTn id="6" dur="1"/>
+                                        <p:tgtEl>
+                                          <p:spTgt spid="2"/>
+                                        </p:tgtEl>
+                                        <p:attrNameLst>
+                                          <p:attrName>style.visibility</p:attrName>
+                                        </p:attrNameLst>
+                                      </p:cBhvr>
+                                      <p:to>
+                                        <p:strVal val="visible"/>
+                                      </p:to>
+                                    </p:set>
+                                    <p:animEffect transition="in" filter="fade">
+                                      <p:cBhvr>
+                                        <p:cTn id="7" dur="400"/>
+                                        <p:tgtEl>
+                                          <p:spTgt spid="2"/>
+                                        </p:tgtEl>
+                                      </p:cBhvr>
+                                    </p:animEffect>
+                                  </p:childTnLst>
+                                </p:cTn>
+                              </p:par>
+                              <p:par>
+                                <p:cTn id="8" presetID="10" presetClass="entr" presetSubtype="0" fill="hold" grpId="0" nodeType="afterEffect">
+                                  <p:stCondLst>
+                                    <p:cond delay="520"/>
+                                  </p:stCondLst>
+                                  <p:childTnLst>
+                                    <p:set>
+                                      <p:cBhvr>
+                                        <p:cTn id="9" dur="1"/>
+                                        <p:tgtEl>
+                                          <p:spTgt spid="3"/>
+                                        </p:tgtEl>
+                                        <p:attrNameLst>
+                                          <p:attrName>style.visibility</p:attrName>
+                                        </p:attrNameLst>
+                                      </p:cBhvr>
+                                      <p:to>
+                                        <p:strVal val="visible"/>
+                                      </p:to>
+                                    </p:set>
+                                    <p:animEffect transition="in" filter="fade">
+                                      <p:cBhvr>
+                                        <p:cTn id="10" dur="400"/>
+                                        <p:tgtEl>
+                                          <p:spTgt spid="3"/>
+                                        </p:tgtEl>
+                                      </p:cBhvr>
+                                    </p:animEffect>
+                                  </p:childTnLst>
+                                </p:cTn>
+                              </p:par>
+                              <p:par>
+                                <p:cTn id="11" presetID="10" presetClass="entr" presetSubtype="0" fill="hold" grpId="0" nodeType="afterEffect">
+                                  <p:stCondLst>
+                                    <p:cond delay="1160"/>
+                                  </p:stCondLst>
+                                  <p:childTnLst>
+                                    <p:set>
+                                      <p:cBhvr>
+                                        <p:cTn id="12" dur="1"/>
+                                        <p:tgtEl>
+                                          <p:spTgt spid="5"/>
+                                        </p:tgtEl>
+                                        <p:attrNameLst>
+                                          <p:attrName>style.visibility</p:attrName>
+                                        </p:attrNameLst>
+                                      </p:cBhvr>
+                                      <p:to>
+                                        <p:strVal val="visible"/>
+                                      </p:to>
+                                    </p:set>
+                                    <p:animEffect transition="in" filter="fade">
+                                      <p:cBhvr>
+                                        <p:cTn id="13" dur="400"/>
+                                        <p:tgtEl>
+                                          <p:spTgt spid="5"/>
+                                        </p:tgtEl>
+                                      </p:cBhvr>
+                                    </p:animEffect>
+                                  </p:childTnLst>
+                                </p:cTn>
+                              </p:par>
+                              <p:par>
+                                <p:cTn id="14" presetID="10" presetClass="entr" presetSubtype="0" fill="hold" grpId="0" nodeType="afterEffect">
+                                  <p:stCondLst>
+                                    <p:cond delay="1920"/>
+                                  </p:stCondLst>
+                                  <p:childTnLst>
+                                    <p:set>
+                                      <p:cBhvr>
+                                        <p:cTn id="15" dur="1"/>
+                                        <p:tgtEl>
+                                          <p:spTgt spid="7"/>
+                                        </p:tgtEl>
+                                        <p:attrNameLst>
+                                          <p:attrName>style.visibility</p:attrName>
+                                        </p:attrNameLst>
+                                      </p:cBhvr>
+                                      <p:to>
+                                        <p:strVal val="visible"/>
+                                      </p:to>
+                                    </p:set>
+                                    <p:animEffect transition="in" filter="fade">
+                                      <p:cBhvr>
+                                        <p:cTn id="16" dur="400"/>
+                                        <p:tgtEl>
+                                          <p:spTgt spid="7"/>
+                                        </p:tgtEl>
+                                      </p:cBhvr>
+                                    </p:animEffect>
+                                  </p:childTnLst>
+                                </p:cTn>
+                              </p:par>
+                              <p:par>
+                                <p:cTn id="17" presetID="10" presetClass="entr" presetSubtype="0" fill="hold" grpId="0" nodeType="afterEffect">
+                                  <p:stCondLst>
+                                    <p:cond delay="2800"/>
+                                  </p:stCondLst>
+                                  <p:childTnLst>
+                                    <p:set>
+                                      <p:cBhvr>
+                                        <p:cTn id="18" dur="1"/>
+                                        <p:tgtEl>
+                                          <p:spTgt spid="9"/>
+                                        </p:tgtEl>
+                                        <p:attrNameLst>
+                                          <p:attrName>style.visibility</p:attrName>
+                                        </p:attrNameLst>
+                                      </p:cBhvr>
+                                      <p:to>
+                                        <p:strVal val="visible"/>
+                                      </p:to>
+                                    </p:set>
+                                    <p:animEffect transition="in" filter="fade">
+                                      <p:cBhvr>
+                                        <p:cTn id="19" dur="400"/>
+                                        <p:tgtEl>
+                                          <p:spTgt spid="9"/>
+                                        </p:tgtEl>
+                                      </p:cBhvr>
+                                    </p:animEffect>
+                                  </p:childTnLst>
+                                </p:cTn>
+                              </p:par>
+                              <p:par>
+                                <p:cTn id="20" presetID="10" presetClass="entr" presetSubtype="0" fill="hold" grpId="0" nodeType="afterEffect">
+                                  <p:stCondLst>
+                                    <p:cond delay="3800"/>
+                                  </p:stCondLst>
+                                  <p:childTnLst>
+                                    <p:set>
+                                      <p:cBhvr>
+                                        <p:cTn id="21" dur="1"/>
+                                        <p:tgtEl>
+                                          <p:spTgt spid="6"/>
+                                        </p:tgtEl>
+                                        <p:attrNameLst>
+                                          <p:attrName>style.visibility</p:attrName>
+                                        </p:attrNameLst>
+                                      </p:cBhvr>
+                                      <p:to>
+                                        <p:strVal val="visible"/>
+                                      </p:to>
+                                    </p:set>
+                                    <p:animEffect transition="in" filter="fade">
+                                      <p:cBhvr>
+                                        <p:cTn id="22" dur="400"/>
+                                        <p:tgtEl>
+                                          <p:spTgt spid="6"/>
+                                        </p:tgtEl>
+                                      </p:cBhvr>
+                                    </p:animEffect>
+                                  </p:childTnLst>
+                                </p:cTn>
+                              </p:par>
+                              <p:par>
+                                <p:cTn id="23" presetID="10" presetClass="entr" presetSubtype="0" fill="hold" grpId="0" nodeType="afterEffect">
+                                  <p:stCondLst>
+                                    <p:cond delay="4920"/>
+                                  </p:stCondLst>
+                                  <p:childTnLst>
+                                    <p:set>
+                                      <p:cBhvr>
+                                        <p:cTn id="24" dur="1"/>
+                                        <p:tgtEl>
+                                          <p:spTgt spid="8"/>
+                                        </p:tgtEl>
+                                        <p:attrNameLst>
+                                          <p:attrName>style.visibility</p:attrName>
+                                        </p:attrNameLst>
+                                      </p:cBhvr>
+                                      <p:to>
+                                        <p:strVal val="visible"/>
+                                      </p:to>
+                                    </p:set>
+                                    <p:animEffect transition="in" filter="fade">
+                                      <p:cBhvr>
+                                        <p:cTn id="25" dur="400"/>
+                                        <p:tgtEl>
+                                          <p:spTgt spid="8"/>
+                                        </p:tgtEl>
+                                      </p:cBhvr>
+                                    </p:animEffect>
+                                  </p:childTnLst>
+                                </p:cTn>
+                              </p:par>
+                              <p:par>
+                                <p:cTn id="26" presetID="10" presetClass="entr" presetSubtype="0" fill="hold" grpId="0" nodeType="afterEffect">
+                                  <p:stCondLst>
+                                    <p:cond delay="6160"/>
+                                  </p:stCondLst>
+                                  <p:childTnLst>
+                                    <p:set>
+                                      <p:cBhvr>
+                                        <p:cTn id="27" dur="1"/>
+                                        <p:tgtEl>
+                                          <p:spTgt spid="10"/>
+                                        </p:tgtEl>
+                                        <p:attrNameLst>
+                                          <p:attrName>style.visibility</p:attrName>
+                                        </p:attrNameLst>
+                                      </p:cBhvr>
+                                      <p:to>
+                                        <p:strVal val="visible"/>
+                                      </p:to>
+                                    </p:set>
+                                    <p:animEffect transition="in" filter="fade">
+                                      <p:cBhvr>
+                                        <p:cTn id="28" dur="400"/>
+                                        <p:tgtEl>
+                                          <p:spTgt spid="10"/>
+                                        </p:tgtEl>
+                                      </p:cBhvr>
+                                    </p:animEffect>
+                                  </p:childTnLst>
+                                </p:cTn>
+                              </p:par>
+                              <p:par>
+                                <p:cTn id="29" presetID="10" presetClass="entr" presetSubtype="0" fill="hold" grpId="0" nodeType="afterEffect">
+                                  <p:stCondLst>
+                                    <p:cond delay="7520"/>
+                                  </p:stCondLst>
+                                  <p:childTnLst>
+                                    <p:set>
+                                      <p:cBhvr>
+                                        <p:cTn id="30" dur="1"/>
+                                        <p:tgtEl>
+                                          <p:spTgt spid="12"/>
+                                        </p:tgtEl>
+                                        <p:attrNameLst>
+                                          <p:attrName>style.visibility</p:attrName>
+                                        </p:attrNameLst>
+                                      </p:cBhvr>
+                                      <p:to>
+                                        <p:strVal val="visible"/>
+                                      </p:to>
+                                    </p:set>
+                                    <p:animEffect transition="in" filter="fade">
+                                      <p:cBhvr>
+                                        <p:cTn id="31" dur="400"/>
+                                        <p:tgtEl>
+                                          <p:spTgt spid="12"/>
+                                        </p:tgtEl>
+                                      </p:cBhvr>
+                                    </p:animEffect>
+                                  </p:childTnLst>
+                                </p:cTn>
+                              </p:par>
+                              <p:par>
+                                <p:cTn id="32" presetID="10" presetClass="entr" presetSubtype="0" fill="hold" grpId="0" nodeType="afterEffect">
+                                  <p:stCondLst>
+                                    <p:cond delay="9000"/>
+                                  </p:stCondLst>
+                                  <p:childTnLst>
+                                    <p:set>
+                                      <p:cBhvr>
+                                        <p:cTn id="33" dur="1"/>
+                                        <p:tgtEl>
+                                          <p:spTgt spid="15"/>
+                                        </p:tgtEl>
+                                        <p:attrNameLst>
+                                          <p:attrName>style.visibility</p:attrName>
+                                        </p:attrNameLst>
+                                      </p:cBhvr>
+                                      <p:to>
+                                        <p:strVal val="visible"/>
+                                      </p:to>
+                                    </p:set>
+                                    <p:animEffect transition="in" filter="fade">
+                                      <p:cBhvr>
+                                        <p:cTn id="34" dur="400"/>
+                                        <p:tgtEl>
+                                          <p:spTgt spid="15"/>
+                                        </p:tgtEl>
+                                      </p:cBhvr>
+                                    </p:animEffect>
+                                  </p:childTnLst>
+                                </p:cTn>
+                              </p:par>
+                              <p:par>
+                                <p:cTn id="35" presetID="10" presetClass="entr" presetSubtype="0" fill="hold" grpId="0" nodeType="afterEffect">
+                                  <p:stCondLst>
+                                    <p:cond delay="10600"/>
+                                  </p:stCondLst>
+                                  <p:childTnLst>
+                                    <p:set>
+                                      <p:cBhvr>
+                                        <p:cTn id="36" dur="1"/>
+                                        <p:tgtEl>
+                                          <p:spTgt spid="18"/>
+                                        </p:tgtEl>
+                                        <p:attrNameLst>
+                                          <p:attrName>style.visibility</p:attrName>
+                                        </p:attrNameLst>
+                                      </p:cBhvr>
+                                      <p:to>
+                                        <p:strVal val="visible"/>
+                                      </p:to>
+                                    </p:set>
+                                    <p:animEffect transition="in" filter="fade">
+                                      <p:cBhvr>
+                                        <p:cTn id="37" dur="400"/>
+                                        <p:tgtEl>
+                                          <p:spTgt spid="18"/>
+                                        </p:tgtEl>
+                                      </p:cBhvr>
+                                    </p:animEffect>
+                                  </p:childTnLst>
+                                </p:cTn>
+                              </p:par>
+                              <p:par>
+                                <p:cTn id="38" presetID="10" presetClass="entr" presetSubtype="0" fill="hold" grpId="0" nodeType="afterEffect">
+                                  <p:stCondLst>
+                                    <p:cond delay="12320"/>
+                                  </p:stCondLst>
+                                  <p:childTnLst>
+                                    <p:set>
+                                      <p:cBhvr>
+                                        <p:cTn id="39" dur="1"/>
+                                        <p:tgtEl>
+                                          <p:spTgt spid="21"/>
+                                        </p:tgtEl>
+                                        <p:attrNameLst>
+                                          <p:attrName>style.visibility</p:attrName>
+                                        </p:attrNameLst>
+                                      </p:cBhvr>
+                                      <p:to>
+                                        <p:strVal val="visible"/>
+                                      </p:to>
+                                    </p:set>
+                                    <p:animEffect transition="in" filter="fade">
+                                      <p:cBhvr>
+                                        <p:cTn id="40" dur="400"/>
+                                        <p:tgtEl>
+                                          <p:spTgt spid="21"/>
+                                        </p:tgtEl>
+                                      </p:cBhvr>
+                                    </p:animEffect>
+                                  </p:childTnLst>
+                                </p:cTn>
+                              </p:par>
+                              <p:par>
+                                <p:cTn id="41" presetID="10" presetClass="entr" presetSubtype="0" fill="hold" grpId="0" nodeType="afterEffect">
+                                  <p:stCondLst>
+                                    <p:cond delay="14160"/>
+                                  </p:stCondLst>
+                                  <p:childTnLst>
+                                    <p:set>
+                                      <p:cBhvr>
+                                        <p:cTn id="42" dur="1"/>
+                                        <p:tgtEl>
+                                          <p:spTgt spid="11"/>
+                                        </p:tgtEl>
+                                        <p:attrNameLst>
+                                          <p:attrName>style.visibility</p:attrName>
+                                        </p:attrNameLst>
+                                      </p:cBhvr>
+                                      <p:to>
+                                        <p:strVal val="visible"/>
+                                      </p:to>
+                                    </p:set>
+                                    <p:animEffect transition="in" filter="fade">
+                                      <p:cBhvr>
+                                        <p:cTn id="43" dur="400"/>
+                                        <p:tgtEl>
+                                          <p:spTgt spid="11"/>
+                                        </p:tgtEl>
+                                      </p:cBhvr>
+                                    </p:animEffect>
+                                  </p:childTnLst>
+                                </p:cTn>
+                              </p:par>
+                              <p:par>
+                                <p:cTn id="44" presetID="10" presetClass="entr" presetSubtype="0" fill="hold" grpId="0" nodeType="afterEffect">
+                                  <p:stCondLst>
+                                    <p:cond delay="16120"/>
+                                  </p:stCondLst>
+                                  <p:childTnLst>
+                                    <p:set>
+                                      <p:cBhvr>
+                                        <p:cTn id="45" dur="1"/>
+                                        <p:tgtEl>
+                                          <p:spTgt spid="13"/>
+                                        </p:tgtEl>
+                                        <p:attrNameLst>
+                                          <p:attrName>style.visibility</p:attrName>
+                                        </p:attrNameLst>
+                                      </p:cBhvr>
+                                      <p:to>
+                                        <p:strVal val="visible"/>
+                                      </p:to>
+                                    </p:set>
+                                    <p:animEffect transition="in" filter="fade">
+                                      <p:cBhvr>
+                                        <p:cTn id="46" dur="400"/>
+                                        <p:tgtEl>
+                                          <p:spTgt spid="13"/>
+                                        </p:tgtEl>
+                                      </p:cBhvr>
+                                    </p:animEffect>
+                                  </p:childTnLst>
+                                </p:cTn>
+                              </p:par>
+                              <p:par>
+                                <p:cTn id="47" presetID="10" presetClass="entr" presetSubtype="0" fill="hold" grpId="0" nodeType="afterEffect">
+                                  <p:stCondLst>
+                                    <p:cond delay="18200"/>
+                                  </p:stCondLst>
+                                  <p:childTnLst>
+                                    <p:set>
+                                      <p:cBhvr>
+                                        <p:cTn id="48" dur="1"/>
+                                        <p:tgtEl>
+                                          <p:spTgt spid="16"/>
+                                        </p:tgtEl>
+                                        <p:attrNameLst>
+                                          <p:attrName>style.visibility</p:attrName>
+                                        </p:attrNameLst>
+                                      </p:cBhvr>
+                                      <p:to>
+                                        <p:strVal val="visible"/>
+                                      </p:to>
+                                    </p:set>
+                                    <p:animEffect transition="in" filter="fade">
+                                      <p:cBhvr>
+                                        <p:cTn id="49" dur="400"/>
+                                        <p:tgtEl>
+                                          <p:spTgt spid="16"/>
+                                        </p:tgtEl>
+                                      </p:cBhvr>
+                                    </p:animEffect>
+                                  </p:childTnLst>
+                                </p:cTn>
+                              </p:par>
+                              <p:par>
+                                <p:cTn id="50" presetID="10" presetClass="entr" presetSubtype="0" fill="hold" grpId="0" nodeType="afterEffect">
+                                  <p:stCondLst>
+                                    <p:cond delay="20400"/>
+                                  </p:stCondLst>
+                                  <p:childTnLst>
+                                    <p:set>
+                                      <p:cBhvr>
+                                        <p:cTn id="51" dur="1"/>
+                                        <p:tgtEl>
+                                          <p:spTgt spid="19"/>
+                                        </p:tgtEl>
+                                        <p:attrNameLst>
+                                          <p:attrName>style.visibility</p:attrName>
+                                        </p:attrNameLst>
+                                      </p:cBhvr>
+                                      <p:to>
+                                        <p:strVal val="visible"/>
+                                      </p:to>
+                                    </p:set>
+                                    <p:animEffect transition="in" filter="fade">
+                                      <p:cBhvr>
+                                        <p:cTn id="52" dur="400"/>
+                                        <p:tgtEl>
+                                          <p:spTgt spid="19"/>
+                                        </p:tgtEl>
+                                      </p:cBhvr>
+                                    </p:animEffect>
+                                  </p:childTnLst>
+                                </p:cTn>
+                              </p:par>
+                              <p:par>
+                                <p:cTn id="53" presetID="10" presetClass="entr" presetSubtype="0" fill="hold" grpId="0" nodeType="afterEffect">
+                                  <p:stCondLst>
+                                    <p:cond delay="22720"/>
+                                  </p:stCondLst>
+                                  <p:childTnLst>
+                                    <p:set>
+                                      <p:cBhvr>
+                                        <p:cTn id="54" dur="1"/>
+                                        <p:tgtEl>
+                                          <p:spTgt spid="22"/>
+                                        </p:tgtEl>
+                                        <p:attrNameLst>
+                                          <p:attrName>style.visibility</p:attrName>
+                                        </p:attrNameLst>
+                                      </p:cBhvr>
+                                      <p:to>
+                                        <p:strVal val="visible"/>
+                                      </p:to>
+                                    </p:set>
+                                    <p:animEffect transition="in" filter="fade">
+                                      <p:cBhvr>
+                                        <p:cTn id="55" dur="400"/>
+                                        <p:tgtEl>
+                                          <p:spTgt spid="22"/>
+                                        </p:tgtEl>
+                                      </p:cBhvr>
+                                    </p:animEffect>
+                                  </p:childTnLst>
+                                </p:cTn>
+                              </p:par>
+                              <p:par>
+                                <p:cTn id="56" presetID="10" presetClass="entr" presetSubtype="0" fill="hold" grpId="0" nodeType="afterEffect">
+                                  <p:stCondLst>
+                                    <p:cond delay="25160"/>
+                                  </p:stCondLst>
+                                  <p:childTnLst>
+                                    <p:set>
+                                      <p:cBhvr>
+                                        <p:cTn id="57" dur="1"/>
+                                        <p:tgtEl>
+                                          <p:spTgt spid="14"/>
+                                        </p:tgtEl>
+                                        <p:attrNameLst>
+                                          <p:attrName>style.visibility</p:attrName>
+                                        </p:attrNameLst>
+                                      </p:cBhvr>
+                                      <p:to>
+                                        <p:strVal val="visible"/>
+                                      </p:to>
+                                    </p:set>
+                                    <p:animEffect transition="in" filter="fade">
+                                      <p:cBhvr>
+                                        <p:cTn id="58" dur="400"/>
+                                        <p:tgtEl>
+                                          <p:spTgt spid="14"/>
+                                        </p:tgtEl>
+                                      </p:cBhvr>
+                                    </p:animEffect>
+                                  </p:childTnLst>
+                                </p:cTn>
+                              </p:par>
+                              <p:par>
+                                <p:cTn id="59" presetID="10" presetClass="entr" presetSubtype="0" fill="hold" grpId="0" nodeType="afterEffect">
+                                  <p:stCondLst>
+                                    <p:cond delay="27720"/>
+                                  </p:stCondLst>
+                                  <p:childTnLst>
+                                    <p:set>
+                                      <p:cBhvr>
+                                        <p:cTn id="60" dur="1"/>
+                                        <p:tgtEl>
+                                          <p:spTgt spid="17"/>
+                                        </p:tgtEl>
+                                        <p:attrNameLst>
+                                          <p:attrName>style.visibility</p:attrName>
+                                        </p:attrNameLst>
+                                      </p:cBhvr>
+                                      <p:to>
+                                        <p:strVal val="visible"/>
+                                      </p:to>
+                                    </p:set>
+                                    <p:animEffect transition="in" filter="fade">
+                                      <p:cBhvr>
+                                        <p:cTn id="61" dur="400"/>
+                                        <p:tgtEl>
+                                          <p:spTgt spid="17"/>
+                                        </p:tgtEl>
+                                      </p:cBhvr>
+                                    </p:animEffect>
+                                  </p:childTnLst>
+                                </p:cTn>
+                              </p:par>
+                              <p:par>
+                                <p:cTn id="62" presetID="10" presetClass="entr" presetSubtype="0" fill="hold" grpId="0" nodeType="afterEffect">
+                                  <p:stCondLst>
+                                    <p:cond delay="30400"/>
+                                  </p:stCondLst>
+                                  <p:childTnLst>
+                                    <p:set>
+                                      <p:cBhvr>
+                                        <p:cTn id="63" dur="1"/>
+                                        <p:tgtEl>
+                                          <p:spTgt spid="20"/>
+                                        </p:tgtEl>
+                                        <p:attrNameLst>
+                                          <p:attrName>style.visibility</p:attrName>
+                                        </p:attrNameLst>
+                                      </p:cBhvr>
+                                      <p:to>
+                                        <p:strVal val="visible"/>
+                                      </p:to>
+                                    </p:set>
+                                    <p:animEffect transition="in" filter="fade">
+                                      <p:cBhvr>
+                                        <p:cTn id="64" dur="400"/>
+                                        <p:tgtEl>
+                                          <p:spTgt spid="20"/>
+                                        </p:tgtEl>
+                                      </p:cBhvr>
+                                    </p:animEffect>
+                                  </p:childTnLst>
+                                </p:cTn>
+                              </p:par>
+                              <p:par>
+                                <p:cTn id="65" presetID="10" presetClass="entr" presetSubtype="0" fill="hold" grpId="0" nodeType="afterEffect">
+                                  <p:stCondLst>
+                                    <p:cond delay="33200"/>
+                                  </p:stCondLst>
+                                  <p:childTnLst>
+                                    <p:set>
+                                      <p:cBhvr>
+                                        <p:cTn id="66" dur="1"/>
+                                        <p:tgtEl>
+                                          <p:spTgt spid="23"/>
+                                        </p:tgtEl>
+                                        <p:attrNameLst>
+                                          <p:attrName>style.visibility</p:attrName>
+                                        </p:attrNameLst>
+                                      </p:cBhvr>
+                                      <p:to>
+                                        <p:strVal val="visible"/>
+                                      </p:to>
+                                    </p:set>
+                                    <p:animEffect transition="in" filter="fade">
+                                      <p:cBhvr>
+                                        <p:cTn id="67" dur="400"/>
+                                        <p:tgtEl>
+                                          <p:spTgt spid="23"/>
+                                        </p:tgtEl>
+                                      </p:cBhvr>
+                                    </p:animEffect>
+                                  </p:childTnLst>
+                                </p:cTn>
+                              </p:par>
+                              <p:par>
+                                <p:cTn id="68" presetID="10" presetClass="entr" presetSubtype="0" fill="hold" grpId="0" nodeType="afterEffect">
+                                  <p:stCondLst>
+                                    <p:cond delay="36120"/>
+                                  </p:stCondLst>
+                                  <p:childTnLst>
+                                    <p:set>
+                                      <p:cBhvr>
+                                        <p:cTn id="69" dur="1"/>
+                                        <p:tgtEl>
+                                          <p:spTgt spid="24"/>
+                                        </p:tgtEl>
+                                        <p:attrNameLst>
+                                          <p:attrName>style.visibility</p:attrName>
+                                        </p:attrNameLst>
+                                      </p:cBhvr>
+                                      <p:to>
+                                        <p:strVal val="visible"/>
+                                      </p:to>
+                                    </p:set>
+                                    <p:animEffect transition="in" filter="fade">
+                                      <p:cBhvr>
+                                        <p:cTn id="70" dur="400"/>
+                                        <p:tgtEl>
+                                          <p:spTgt spid="24"/>
+                                        </p:tgtEl>
+                                      </p:cBhvr>
+                                    </p:animEffect>
+                                  </p:childTnLst>
+                                </p:cTn>
+                              </p:par>
+                              <p:par>
+                                <p:cTn id="71" presetID="10" presetClass="entr" presetSubtype="0" fill="hold" grpId="0" nodeType="afterEffect">
+                                  <p:stCondLst>
+                                    <p:cond delay="39160"/>
+                                  </p:stCondLst>
+                                  <p:childTnLst>
+                                    <p:set>
+                                      <p:cBhvr>
+                                        <p:cTn id="72" dur="1"/>
+                                        <p:tgtEl>
+                                          <p:spTgt spid="25"/>
+                                        </p:tgtEl>
+                                        <p:attrNameLst>
+                                          <p:attrName>style.visibility</p:attrName>
+                                        </p:attrNameLst>
+                                      </p:cBhvr>
+                                      <p:to>
+                                        <p:strVal val="visible"/>
+                                      </p:to>
+                                    </p:set>
+                                    <p:animEffect transition="in" filter="fade">
+                                      <p:cBhvr>
+                                        <p:cTn id="73" dur="400"/>
+                                        <p:tgtEl>
+                                          <p:spTgt spid="25"/>
+                                        </p:tgtEl>
+                                      </p:cBhvr>
+                                    </p:animEffect>
+                                  </p:childTnLst>
+                                </p:cTn>
+                              </p:par>
+                            </p:childTnLst>
+                          </p:cTn>
+                        </p:par>
+                      </p:childTnLst>
+                    </p:cTn>
+                  </p:par>
+                </p:childTnLst>
+              </p:cTn>
+              <p:prevCondLst>
+                <p:cond evt="onPrev" delay="0">
+                  <p:tgtEl>
+                    <p:sldTgt/>
+                  </p:tgtEl>
+                </p:cond>
+              </p:prevCondLst>
+              <p:nextCondLst>
+                <p:cond evt="onNext" delay="0">
+                  <p:tgtEl>
+                    <p:sldTgt/>
+                  </p:tgtEl>
+                </p:cond>
+              </p:nextCondLst>
+            </p:seq>
+          </p:childTnLst>
+        </p:cTn>
+      </p:par>
+    </p:tnLst>
+    <p:bldLst>
+      <p:bldP spid="2" grpId="0"/>
+      <p:bldP spid="3" grpId="0"/>
+      <p:bldP spid="5" grpId="0"/>
+      <p:bldP spid="7" grpId="0"/>
+      <p:bldP spid="9" grpId="0"/>
+      <p:bldP spid="6" grpId="0"/>
+      <p:bldP spid="8" grpId="0"/>
+      <p:bldP spid="10" grpId="0"/>
+      <p:bldP spid="12" grpId="0"/>
+      <p:bldP spid="15" grpId="0"/>
+      <p:bldP spid="18" grpId="0"/>
+      <p:bldP spid="21" grpId="0"/>
+      <p:bldP spid="11" grpId="0"/>
+      <p:bldP spid="13" grpId="0"/>
+      <p:bldP spid="16" grpId="0"/>
+      <p:bldP spid="19" grpId="0"/>
+      <p:bldP spid="22" grpId="0"/>
+      <p:bldP spid="14" grpId="0"/>
+      <p:bldP spid="17" grpId="0"/>
+      <p:bldP spid="20" grpId="0"/>
+      <p:bldP spid="23" grpId="0"/>
+      <p:bldP spid="24" grpId="0"/>
+      <p:bldP spid="25" grpId="0"/>
+    </p:bldLst>
+  </p:timing>
 </p:sld>
 </file>
 

--- a/examples/quarterly-report/Q3经营汇报-智能喂食器业务.pptx
+++ b/examples/quarterly-report/Q3经营汇报-智能喂食器业务.pptx
@@ -2912,14 +2912,14 @@
                             </p:stCondLst>
                             <p:childTnLst>
                               <p:par>
-                                <p:cTn id="5" presetID="10" presetClass="entr" presetSubtype="0" fill="hold" grpId="0" nodeType="afterEffect">
+                                <p:cTn presetID="10" presetClass="entr" presetSubtype="0" fill="hold" grpId="0" nodeType="afterEffect">
                                   <p:stCondLst>
                                     <p:cond delay="0"/>
                                   </p:stCondLst>
                                   <p:childTnLst>
                                     <p:set>
                                       <p:cBhvr>
-                                        <p:cTn id="6" dur="1"/>
+                                        <p:cTn id="5" dur="1"/>
                                         <p:tgtEl>
                                           <p:spTgt spid="2"/>
                                         </p:tgtEl>
@@ -2933,7 +2933,7 @@
                                     </p:set>
                                     <p:animEffect transition="in" filter="fade">
                                       <p:cBhvr>
-                                        <p:cTn id="7" dur="450"/>
+                                        <p:cTn id="6" dur="450"/>
                                         <p:tgtEl>
                                           <p:spTgt spid="2"/>
                                         </p:tgtEl>
@@ -2943,14 +2943,14 @@
                                 </p:cTn>
                               </p:par>
                               <p:par>
-                                <p:cTn id="8" presetID="10" presetClass="entr" presetSubtype="0" fill="hold" grpId="0" nodeType="afterEffect">
+                                <p:cTn presetID="10" presetClass="entr" presetSubtype="0" fill="hold" grpId="0" nodeType="afterEffect">
                                   <p:stCondLst>
                                     <p:cond delay="630"/>
                                   </p:stCondLst>
                                   <p:childTnLst>
                                     <p:set>
                                       <p:cBhvr>
-                                        <p:cTn id="9" dur="1"/>
+                                        <p:cTn id="7" dur="1"/>
                                         <p:tgtEl>
                                           <p:spTgt spid="4"/>
                                         </p:tgtEl>
@@ -2964,7 +2964,7 @@
                                     </p:set>
                                     <p:animEffect transition="in" filter="fade">
                                       <p:cBhvr>
-                                        <p:cTn id="10" dur="450"/>
+                                        <p:cTn id="8" dur="450"/>
                                         <p:tgtEl>
                                           <p:spTgt spid="4"/>
                                         </p:tgtEl>
@@ -2974,14 +2974,14 @@
                                 </p:cTn>
                               </p:par>
                               <p:par>
-                                <p:cTn id="11" presetID="10" presetClass="entr" presetSubtype="0" fill="hold" grpId="0" nodeType="afterEffect">
+                                <p:cTn presetID="10" presetClass="entr" presetSubtype="0" fill="hold" grpId="0" nodeType="afterEffect">
                                   <p:stCondLst>
                                     <p:cond delay="1440"/>
                                   </p:stCondLst>
                                   <p:childTnLst>
                                     <p:set>
                                       <p:cBhvr>
-                                        <p:cTn id="12" dur="1"/>
+                                        <p:cTn id="9" dur="1"/>
                                         <p:tgtEl>
                                           <p:spTgt spid="5"/>
                                         </p:tgtEl>
@@ -2995,7 +2995,7 @@
                                     </p:set>
                                     <p:animEffect transition="in" filter="fade">
                                       <p:cBhvr>
-                                        <p:cTn id="13" dur="450"/>
+                                        <p:cTn id="10" dur="450"/>
                                         <p:tgtEl>
                                           <p:spTgt spid="5"/>
                                         </p:tgtEl>
@@ -3005,14 +3005,14 @@
                                 </p:cTn>
                               </p:par>
                               <p:par>
-                                <p:cTn id="14" presetID="10" presetClass="entr" presetSubtype="0" fill="hold" grpId="0" nodeType="afterEffect">
+                                <p:cTn presetID="10" presetClass="entr" presetSubtype="0" fill="hold" grpId="0" nodeType="afterEffect">
                                   <p:stCondLst>
                                     <p:cond delay="2430"/>
                                   </p:stCondLst>
                                   <p:childTnLst>
                                     <p:set>
                                       <p:cBhvr>
-                                        <p:cTn id="15" dur="1"/>
+                                        <p:cTn id="11" dur="1"/>
                                         <p:tgtEl>
                                           <p:spTgt spid="6"/>
                                         </p:tgtEl>
@@ -3026,7 +3026,7 @@
                                     </p:set>
                                     <p:animEffect transition="in" filter="fade">
                                       <p:cBhvr>
-                                        <p:cTn id="16" dur="450"/>
+                                        <p:cTn id="12" dur="450"/>
                                         <p:tgtEl>
                                           <p:spTgt spid="6"/>
                                         </p:tgtEl>
@@ -3036,14 +3036,14 @@
                                 </p:cTn>
                               </p:par>
                               <p:par>
-                                <p:cTn id="17" presetID="10" presetClass="entr" presetSubtype="0" fill="hold" grpId="0" nodeType="afterEffect">
+                                <p:cTn presetID="10" presetClass="entr" presetSubtype="0" fill="hold" grpId="0" nodeType="afterEffect">
                                   <p:stCondLst>
                                     <p:cond delay="3600"/>
                                   </p:stCondLst>
                                   <p:childTnLst>
                                     <p:set>
                                       <p:cBhvr>
-                                        <p:cTn id="18" dur="1"/>
+                                        <p:cTn id="13" dur="1"/>
                                         <p:tgtEl>
                                           <p:spTgt spid="3"/>
                                         </p:tgtEl>
@@ -3057,7 +3057,7 @@
                                     </p:set>
                                     <p:animEffect transition="in" filter="fade">
                                       <p:cBhvr>
-                                        <p:cTn id="19" dur="450"/>
+                                        <p:cTn id="14" dur="450"/>
                                         <p:tgtEl>
                                           <p:spTgt spid="3"/>
                                         </p:tgtEl>
@@ -3067,14 +3067,14 @@
                                 </p:cTn>
                               </p:par>
                               <p:par>
-                                <p:cTn id="20" presetID="10" presetClass="entr" presetSubtype="0" fill="hold" grpId="0" nodeType="afterEffect">
+                                <p:cTn presetID="10" presetClass="entr" presetSubtype="0" fill="hold" grpId="0" nodeType="afterEffect">
                                   <p:stCondLst>
                                     <p:cond delay="4950"/>
                                   </p:stCondLst>
                                   <p:childTnLst>
                                     <p:set>
                                       <p:cBhvr>
-                                        <p:cTn id="21" dur="1"/>
+                                        <p:cTn id="15" dur="1"/>
                                         <p:tgtEl>
                                           <p:spTgt spid="7"/>
                                         </p:tgtEl>
@@ -3088,7 +3088,7 @@
                                     </p:set>
                                     <p:animEffect transition="in" filter="fade">
                                       <p:cBhvr>
-                                        <p:cTn id="22" dur="450"/>
+                                        <p:cTn id="16" dur="450"/>
                                         <p:tgtEl>
                                           <p:spTgt spid="7"/>
                                         </p:tgtEl>
@@ -3706,14 +3706,14 @@
                             </p:stCondLst>
                             <p:childTnLst>
                               <p:par>
-                                <p:cTn id="5" presetID="10" presetClass="entr" presetSubtype="0" fill="hold" grpId="0" nodeType="afterEffect">
+                                <p:cTn presetID="10" presetClass="entr" presetSubtype="0" fill="hold" grpId="0" nodeType="afterEffect">
                                   <p:stCondLst>
                                     <p:cond delay="0"/>
                                   </p:stCondLst>
                                   <p:childTnLst>
                                     <p:set>
                                       <p:cBhvr>
-                                        <p:cTn id="6" dur="1"/>
+                                        <p:cTn id="5" dur="1"/>
                                         <p:tgtEl>
                                           <p:spTgt spid="2"/>
                                         </p:tgtEl>
@@ -3727,7 +3727,7 @@
                                     </p:set>
                                     <p:animEffect transition="in" filter="fade">
                                       <p:cBhvr>
-                                        <p:cTn id="7" dur="400"/>
+                                        <p:cTn id="6" dur="400"/>
                                         <p:tgtEl>
                                           <p:spTgt spid="2"/>
                                         </p:tgtEl>
@@ -3737,14 +3737,14 @@
                                 </p:cTn>
                               </p:par>
                               <p:par>
-                                <p:cTn id="8" presetID="10" presetClass="entr" presetSubtype="0" fill="hold" grpId="0" nodeType="afterEffect">
+                                <p:cTn presetID="10" presetClass="entr" presetSubtype="0" fill="hold" grpId="0" nodeType="afterEffect">
                                   <p:stCondLst>
                                     <p:cond delay="550"/>
                                   </p:stCondLst>
                                   <p:childTnLst>
                                     <p:set>
                                       <p:cBhvr>
-                                        <p:cTn id="9" dur="1"/>
+                                        <p:cTn id="7" dur="1"/>
                                         <p:tgtEl>
                                           <p:spTgt spid="3"/>
                                         </p:tgtEl>
@@ -3758,7 +3758,7 @@
                                     </p:set>
                                     <p:animEffect transition="in" filter="fade">
                                       <p:cBhvr>
-                                        <p:cTn id="10" dur="400"/>
+                                        <p:cTn id="8" dur="400"/>
                                         <p:tgtEl>
                                           <p:spTgt spid="3"/>
                                         </p:tgtEl>
@@ -3768,14 +3768,14 @@
                                 </p:cTn>
                               </p:par>
                               <p:par>
-                                <p:cTn id="11" presetID="10" presetClass="entr" presetSubtype="0" fill="hold" grpId="0" nodeType="afterEffect">
+                                <p:cTn presetID="10" presetClass="entr" presetSubtype="0" fill="hold" grpId="0" nodeType="afterEffect">
                                   <p:stCondLst>
                                     <p:cond delay="1250"/>
                                   </p:stCondLst>
                                   <p:childTnLst>
                                     <p:set>
                                       <p:cBhvr>
-                                        <p:cTn id="12" dur="1"/>
+                                        <p:cTn id="9" dur="1"/>
                                         <p:tgtEl>
                                           <p:spTgt spid="5"/>
                                         </p:tgtEl>
@@ -3789,7 +3789,7 @@
                                     </p:set>
                                     <p:animEffect transition="in" filter="fade">
                                       <p:cBhvr>
-                                        <p:cTn id="13" dur="400"/>
+                                        <p:cTn id="10" dur="400"/>
                                         <p:tgtEl>
                                           <p:spTgt spid="5"/>
                                         </p:tgtEl>
@@ -3799,14 +3799,14 @@
                                 </p:cTn>
                               </p:par>
                               <p:par>
-                                <p:cTn id="14" presetID="10" presetClass="entr" presetSubtype="0" fill="hold" grpId="0" nodeType="afterEffect">
+                                <p:cTn presetID="10" presetClass="entr" presetSubtype="0" fill="hold" grpId="0" nodeType="afterEffect">
                                   <p:stCondLst>
                                     <p:cond delay="2100"/>
                                   </p:stCondLst>
                                   <p:childTnLst>
                                     <p:set>
                                       <p:cBhvr>
-                                        <p:cTn id="15" dur="1"/>
+                                        <p:cTn id="11" dur="1"/>
                                         <p:tgtEl>
                                           <p:spTgt spid="7"/>
                                         </p:tgtEl>
@@ -3820,7 +3820,7 @@
                                     </p:set>
                                     <p:animEffect transition="in" filter="fade">
                                       <p:cBhvr>
-                                        <p:cTn id="16" dur="400"/>
+                                        <p:cTn id="12" dur="400"/>
                                         <p:tgtEl>
                                           <p:spTgt spid="7"/>
                                         </p:tgtEl>
@@ -3830,14 +3830,14 @@
                                 </p:cTn>
                               </p:par>
                               <p:par>
-                                <p:cTn id="17" presetID="10" presetClass="entr" presetSubtype="0" fill="hold" grpId="0" nodeType="afterEffect">
+                                <p:cTn presetID="10" presetClass="entr" presetSubtype="0" fill="hold" grpId="0" nodeType="afterEffect">
                                   <p:stCondLst>
                                     <p:cond delay="3100"/>
                                   </p:stCondLst>
                                   <p:childTnLst>
                                     <p:set>
                                       <p:cBhvr>
-                                        <p:cTn id="18" dur="1"/>
+                                        <p:cTn id="13" dur="1"/>
                                         <p:tgtEl>
                                           <p:spTgt spid="8"/>
                                         </p:tgtEl>
@@ -3851,7 +3851,7 @@
                                     </p:set>
                                     <p:animEffect transition="in" filter="fade">
                                       <p:cBhvr>
-                                        <p:cTn id="19" dur="400"/>
+                                        <p:cTn id="14" dur="400"/>
                                         <p:tgtEl>
                                           <p:spTgt spid="8"/>
                                         </p:tgtEl>
@@ -3861,14 +3861,14 @@
                                 </p:cTn>
                               </p:par>
                               <p:par>
-                                <p:cTn id="20" presetID="10" presetClass="entr" presetSubtype="0" fill="hold" grpId="0" nodeType="afterEffect">
+                                <p:cTn presetID="10" presetClass="entr" presetSubtype="0" fill="hold" grpId="0" nodeType="afterEffect">
                                   <p:stCondLst>
                                     <p:cond delay="4250"/>
                                   </p:stCondLst>
                                   <p:childTnLst>
                                     <p:set>
                                       <p:cBhvr>
-                                        <p:cTn id="21" dur="1"/>
+                                        <p:cTn id="15" dur="1"/>
                                         <p:tgtEl>
                                           <p:spTgt spid="9"/>
                                         </p:tgtEl>
@@ -3882,7 +3882,7 @@
                                     </p:set>
                                     <p:animEffect transition="in" filter="fade">
                                       <p:cBhvr>
-                                        <p:cTn id="22" dur="400"/>
+                                        <p:cTn id="16" dur="400"/>
                                         <p:tgtEl>
                                           <p:spTgt spid="9"/>
                                         </p:tgtEl>
@@ -3892,14 +3892,14 @@
                                 </p:cTn>
                               </p:par>
                               <p:par>
-                                <p:cTn id="23" presetID="10" presetClass="entr" presetSubtype="0" fill="hold" grpId="0" nodeType="afterEffect">
+                                <p:cTn presetID="10" presetClass="entr" presetSubtype="0" fill="hold" grpId="0" nodeType="afterEffect">
                                   <p:stCondLst>
                                     <p:cond delay="5550"/>
                                   </p:stCondLst>
                                   <p:childTnLst>
                                     <p:set>
                                       <p:cBhvr>
-                                        <p:cTn id="24" dur="1"/>
+                                        <p:cTn id="17" dur="1"/>
                                         <p:tgtEl>
                                           <p:spTgt spid="6"/>
                                         </p:tgtEl>
@@ -3913,7 +3913,7 @@
                                     </p:set>
                                     <p:animEffect transition="in" filter="fade">
                                       <p:cBhvr>
-                                        <p:cTn id="25" dur="400"/>
+                                        <p:cTn id="18" dur="400"/>
                                         <p:tgtEl>
                                           <p:spTgt spid="6"/>
                                         </p:tgtEl>
@@ -3923,14 +3923,14 @@
                                 </p:cTn>
                               </p:par>
                               <p:par>
-                                <p:cTn id="26" presetID="10" presetClass="entr" presetSubtype="0" fill="hold" grpId="0" nodeType="afterEffect">
+                                <p:cTn presetID="10" presetClass="entr" presetSubtype="0" fill="hold" grpId="0" nodeType="afterEffect">
                                   <p:stCondLst>
                                     <p:cond delay="7000"/>
                                   </p:stCondLst>
                                   <p:childTnLst>
                                     <p:set>
                                       <p:cBhvr>
-                                        <p:cTn id="27" dur="1"/>
+                                        <p:cTn id="19" dur="1"/>
                                         <p:tgtEl>
                                           <p:spTgt spid="10"/>
                                         </p:tgtEl>
@@ -3944,7 +3944,7 @@
                                     </p:set>
                                     <p:animEffect transition="in" filter="fade">
                                       <p:cBhvr>
-                                        <p:cTn id="28" dur="400"/>
+                                        <p:cTn id="20" dur="400"/>
                                         <p:tgtEl>
                                           <p:spTgt spid="10"/>
                                         </p:tgtEl>
@@ -3954,14 +3954,14 @@
                                 </p:cTn>
                               </p:par>
                               <p:par>
-                                <p:cTn id="29" presetID="10" presetClass="entr" presetSubtype="0" fill="hold" grpId="0" nodeType="afterEffect">
+                                <p:cTn presetID="10" presetClass="entr" presetSubtype="0" fill="hold" grpId="0" nodeType="afterEffect">
                                   <p:stCondLst>
                                     <p:cond delay="8600"/>
                                   </p:stCondLst>
                                   <p:childTnLst>
                                     <p:set>
                                       <p:cBhvr>
-                                        <p:cTn id="30" dur="1"/>
+                                        <p:cTn id="21" dur="1"/>
                                         <p:tgtEl>
                                           <p:spTgt spid="11"/>
                                         </p:tgtEl>
@@ -3975,7 +3975,7 @@
                                     </p:set>
                                     <p:animEffect transition="in" filter="fade">
                                       <p:cBhvr>
-                                        <p:cTn id="31" dur="400"/>
+                                        <p:cTn id="22" dur="400"/>
                                         <p:tgtEl>
                                           <p:spTgt spid="11"/>
                                         </p:tgtEl>
@@ -3985,14 +3985,14 @@
                                 </p:cTn>
                               </p:par>
                               <p:par>
-                                <p:cTn id="32" presetID="10" presetClass="entr" presetSubtype="0" fill="hold" grpId="0" nodeType="afterEffect">
+                                <p:cTn presetID="10" presetClass="entr" presetSubtype="0" fill="hold" grpId="0" nodeType="afterEffect">
                                   <p:stCondLst>
                                     <p:cond delay="10350"/>
                                   </p:stCondLst>
                                   <p:childTnLst>
                                     <p:set>
                                       <p:cBhvr>
-                                        <p:cTn id="33" dur="1"/>
+                                        <p:cTn id="23" dur="1"/>
                                         <p:tgtEl>
                                           <p:spTgt spid="12"/>
                                         </p:tgtEl>
@@ -4006,7 +4006,7 @@
                                     </p:set>
                                     <p:animEffect transition="in" filter="fade">
                                       <p:cBhvr>
-                                        <p:cTn id="34" dur="400"/>
+                                        <p:cTn id="24" dur="400"/>
                                         <p:tgtEl>
                                           <p:spTgt spid="12"/>
                                         </p:tgtEl>
@@ -4016,14 +4016,14 @@
                                 </p:cTn>
                               </p:par>
                               <p:par>
-                                <p:cTn id="35" presetID="10" presetClass="entr" presetSubtype="0" fill="hold" grpId="0" nodeType="afterEffect">
+                                <p:cTn presetID="10" presetClass="entr" presetSubtype="0" fill="hold" grpId="0" nodeType="afterEffect">
                                   <p:stCondLst>
                                     <p:cond delay="12250"/>
                                   </p:stCondLst>
                                   <p:childTnLst>
                                     <p:set>
                                       <p:cBhvr>
-                                        <p:cTn id="36" dur="1"/>
+                                        <p:cTn id="25" dur="1"/>
                                         <p:tgtEl>
                                           <p:spTgt spid="13"/>
                                         </p:tgtEl>
@@ -4037,7 +4037,7 @@
                                     </p:set>
                                     <p:animEffect transition="in" filter="fade">
                                       <p:cBhvr>
-                                        <p:cTn id="37" dur="400"/>
+                                        <p:cTn id="26" dur="400"/>
                                         <p:tgtEl>
                                           <p:spTgt spid="13"/>
                                         </p:tgtEl>
@@ -4047,14 +4047,14 @@
                                 </p:cTn>
                               </p:par>
                               <p:par>
-                                <p:cTn id="38" presetID="10" presetClass="entr" presetSubtype="0" fill="hold" grpId="0" nodeType="afterEffect">
+                                <p:cTn presetID="10" presetClass="entr" presetSubtype="0" fill="hold" grpId="0" nodeType="afterEffect">
                                   <p:stCondLst>
                                     <p:cond delay="14300"/>
                                   </p:stCondLst>
                                   <p:childTnLst>
                                     <p:set>
                                       <p:cBhvr>
-                                        <p:cTn id="39" dur="1"/>
+                                        <p:cTn id="27" dur="1"/>
                                         <p:tgtEl>
                                           <p:spTgt spid="14"/>
                                         </p:tgtEl>
@@ -4068,7 +4068,7 @@
                                     </p:set>
                                     <p:animEffect transition="in" filter="fade">
                                       <p:cBhvr>
-                                        <p:cTn id="40" dur="400"/>
+                                        <p:cTn id="28" dur="400"/>
                                         <p:tgtEl>
                                           <p:spTgt spid="14"/>
                                         </p:tgtEl>
@@ -4078,14 +4078,14 @@
                                 </p:cTn>
                               </p:par>
                               <p:par>
-                                <p:cTn id="41" presetID="10" presetClass="entr" presetSubtype="0" fill="hold" grpId="0" nodeType="afterEffect">
+                                <p:cTn presetID="10" presetClass="entr" presetSubtype="0" fill="hold" grpId="0" nodeType="afterEffect">
                                   <p:stCondLst>
                                     <p:cond delay="16500"/>
                                   </p:stCondLst>
                                   <p:childTnLst>
                                     <p:set>
                                       <p:cBhvr>
-                                        <p:cTn id="42" dur="1"/>
+                                        <p:cTn id="29" dur="1"/>
                                         <p:tgtEl>
                                           <p:spTgt spid="15"/>
                                         </p:tgtEl>
@@ -4099,7 +4099,7 @@
                                     </p:set>
                                     <p:animEffect transition="in" filter="fade">
                                       <p:cBhvr>
-                                        <p:cTn id="43" dur="400"/>
+                                        <p:cTn id="30" dur="400"/>
                                         <p:tgtEl>
                                           <p:spTgt spid="15"/>
                                         </p:tgtEl>
@@ -4109,14 +4109,14 @@
                                 </p:cTn>
                               </p:par>
                               <p:par>
-                                <p:cTn id="44" presetID="10" presetClass="entr" presetSubtype="0" fill="hold" grpId="0" nodeType="afterEffect">
+                                <p:cTn presetID="10" presetClass="entr" presetSubtype="0" fill="hold" grpId="0" nodeType="afterEffect">
                                   <p:stCondLst>
                                     <p:cond delay="18850"/>
                                   </p:stCondLst>
                                   <p:childTnLst>
                                     <p:set>
                                       <p:cBhvr>
-                                        <p:cTn id="45" dur="1"/>
+                                        <p:cTn id="31" dur="1"/>
                                         <p:tgtEl>
                                           <p:spTgt spid="16"/>
                                         </p:tgtEl>
@@ -4130,7 +4130,7 @@
                                     </p:set>
                                     <p:animEffect transition="in" filter="fade">
                                       <p:cBhvr>
-                                        <p:cTn id="46" dur="400"/>
+                                        <p:cTn id="32" dur="400"/>
                                         <p:tgtEl>
                                           <p:spTgt spid="16"/>
                                         </p:tgtEl>
@@ -4935,14 +4935,14 @@
                             </p:stCondLst>
                             <p:childTnLst>
                               <p:par>
-                                <p:cTn id="5" presetID="10" presetClass="entr" presetSubtype="0" fill="hold" grpId="0" nodeType="afterEffect">
+                                <p:cTn presetID="10" presetClass="entr" presetSubtype="0" fill="hold" grpId="0" nodeType="afterEffect">
                                   <p:stCondLst>
                                     <p:cond delay="0"/>
                                   </p:stCondLst>
                                   <p:childTnLst>
                                     <p:set>
                                       <p:cBhvr>
-                                        <p:cTn id="6" dur="1"/>
+                                        <p:cTn id="5" dur="1"/>
                                         <p:tgtEl>
                                           <p:spTgt spid="2"/>
                                         </p:tgtEl>
@@ -4956,7 +4956,7 @@
                                     </p:set>
                                     <p:animEffect transition="in" filter="fade">
                                       <p:cBhvr>
-                                        <p:cTn id="7" dur="400"/>
+                                        <p:cTn id="6" dur="400"/>
                                         <p:tgtEl>
                                           <p:spTgt spid="2"/>
                                         </p:tgtEl>
@@ -4966,14 +4966,14 @@
                                 </p:cTn>
                               </p:par>
                               <p:par>
-                                <p:cTn id="8" presetID="10" presetClass="entr" presetSubtype="0" fill="hold" grpId="0" nodeType="afterEffect">
+                                <p:cTn presetID="10" presetClass="entr" presetSubtype="0" fill="hold" grpId="0" nodeType="afterEffect">
                                   <p:stCondLst>
                                     <p:cond delay="520"/>
                                   </p:stCondLst>
                                   <p:childTnLst>
                                     <p:set>
                                       <p:cBhvr>
-                                        <p:cTn id="9" dur="1"/>
+                                        <p:cTn id="7" dur="1"/>
                                         <p:tgtEl>
                                           <p:spTgt spid="3"/>
                                         </p:tgtEl>
@@ -4987,7 +4987,7 @@
                                     </p:set>
                                     <p:animEffect transition="in" filter="fade">
                                       <p:cBhvr>
-                                        <p:cTn id="10" dur="400"/>
+                                        <p:cTn id="8" dur="400"/>
                                         <p:tgtEl>
                                           <p:spTgt spid="3"/>
                                         </p:tgtEl>
@@ -4997,14 +4997,14 @@
                                 </p:cTn>
                               </p:par>
                               <p:par>
-                                <p:cTn id="11" presetID="10" presetClass="entr" presetSubtype="0" fill="hold" grpId="0" nodeType="afterEffect">
+                                <p:cTn presetID="10" presetClass="entr" presetSubtype="0" fill="hold" grpId="0" nodeType="afterEffect">
                                   <p:stCondLst>
                                     <p:cond delay="1160"/>
                                   </p:stCondLst>
                                   <p:childTnLst>
                                     <p:set>
                                       <p:cBhvr>
-                                        <p:cTn id="12" dur="1"/>
+                                        <p:cTn id="9" dur="1"/>
                                         <p:tgtEl>
                                           <p:spTgt spid="6"/>
                                         </p:tgtEl>
@@ -5018,7 +5018,7 @@
                                     </p:set>
                                     <p:animEffect transition="in" filter="fade">
                                       <p:cBhvr>
-                                        <p:cTn id="13" dur="400"/>
+                                        <p:cTn id="10" dur="400"/>
                                         <p:tgtEl>
                                           <p:spTgt spid="6"/>
                                         </p:tgtEl>
@@ -5028,14 +5028,14 @@
                                 </p:cTn>
                               </p:par>
                               <p:par>
-                                <p:cTn id="14" presetID="10" presetClass="entr" presetSubtype="0" fill="hold" grpId="0" nodeType="afterEffect">
+                                <p:cTn presetID="10" presetClass="entr" presetSubtype="0" fill="hold" grpId="0" nodeType="afterEffect">
                                   <p:stCondLst>
                                     <p:cond delay="1920"/>
                                   </p:stCondLst>
                                   <p:childTnLst>
                                     <p:set>
                                       <p:cBhvr>
-                                        <p:cTn id="15" dur="1"/>
+                                        <p:cTn id="11" dur="1"/>
                                         <p:tgtEl>
                                           <p:spTgt spid="5"/>
                                         </p:tgtEl>
@@ -5049,7 +5049,7 @@
                                     </p:set>
                                     <p:animEffect transition="in" filter="fade">
                                       <p:cBhvr>
-                                        <p:cTn id="16" dur="400"/>
+                                        <p:cTn id="12" dur="400"/>
                                         <p:tgtEl>
                                           <p:spTgt spid="5"/>
                                         </p:tgtEl>
@@ -5059,14 +5059,14 @@
                                 </p:cTn>
                               </p:par>
                               <p:par>
-                                <p:cTn id="17" presetID="10" presetClass="entr" presetSubtype="0" fill="hold" grpId="0" nodeType="afterEffect">
+                                <p:cTn presetID="10" presetClass="entr" presetSubtype="0" fill="hold" grpId="0" nodeType="afterEffect">
                                   <p:stCondLst>
                                     <p:cond delay="2800"/>
                                   </p:stCondLst>
                                   <p:childTnLst>
                                     <p:set>
                                       <p:cBhvr>
-                                        <p:cTn id="18" dur="1"/>
+                                        <p:cTn id="13" dur="1"/>
                                         <p:tgtEl>
                                           <p:spTgt spid="7"/>
                                         </p:tgtEl>
@@ -5080,7 +5080,7 @@
                                     </p:set>
                                     <p:animEffect transition="in" filter="fade">
                                       <p:cBhvr>
-                                        <p:cTn id="19" dur="400"/>
+                                        <p:cTn id="14" dur="400"/>
                                         <p:tgtEl>
                                           <p:spTgt spid="7"/>
                                         </p:tgtEl>
@@ -5090,14 +5090,14 @@
                                 </p:cTn>
                               </p:par>
                               <p:par>
-                                <p:cTn id="20" presetID="10" presetClass="entr" presetSubtype="0" fill="hold" grpId="0" nodeType="afterEffect">
+                                <p:cTn presetID="10" presetClass="entr" presetSubtype="0" fill="hold" grpId="0" nodeType="afterEffect">
                                   <p:stCondLst>
                                     <p:cond delay="3800"/>
                                   </p:stCondLst>
                                   <p:childTnLst>
                                     <p:set>
                                       <p:cBhvr>
-                                        <p:cTn id="21" dur="1"/>
+                                        <p:cTn id="15" dur="1"/>
                                         <p:tgtEl>
                                           <p:spTgt spid="8"/>
                                         </p:tgtEl>
@@ -5111,7 +5111,7 @@
                                     </p:set>
                                     <p:animEffect transition="in" filter="fade">
                                       <p:cBhvr>
-                                        <p:cTn id="22" dur="400"/>
+                                        <p:cTn id="16" dur="400"/>
                                         <p:tgtEl>
                                           <p:spTgt spid="8"/>
                                         </p:tgtEl>
@@ -5121,14 +5121,14 @@
                                 </p:cTn>
                               </p:par>
                               <p:par>
-                                <p:cTn id="23" presetID="10" presetClass="entr" presetSubtype="0" fill="hold" grpId="0" nodeType="afterEffect">
+                                <p:cTn presetID="10" presetClass="entr" presetSubtype="0" fill="hold" grpId="0" nodeType="afterEffect">
                                   <p:stCondLst>
                                     <p:cond delay="4920"/>
                                   </p:stCondLst>
                                   <p:childTnLst>
                                     <p:set>
                                       <p:cBhvr>
-                                        <p:cTn id="24" dur="1"/>
+                                        <p:cTn id="17" dur="1"/>
                                         <p:tgtEl>
                                           <p:spTgt spid="10"/>
                                         </p:tgtEl>
@@ -5142,7 +5142,7 @@
                                     </p:set>
                                     <p:animEffect transition="in" filter="fade">
                                       <p:cBhvr>
-                                        <p:cTn id="25" dur="400"/>
+                                        <p:cTn id="18" dur="400"/>
                                         <p:tgtEl>
                                           <p:spTgt spid="10"/>
                                         </p:tgtEl>
@@ -5152,14 +5152,14 @@
                                 </p:cTn>
                               </p:par>
                               <p:par>
-                                <p:cTn id="26" presetID="10" presetClass="entr" presetSubtype="0" fill="hold" grpId="0" nodeType="afterEffect">
+                                <p:cTn presetID="10" presetClass="entr" presetSubtype="0" fill="hold" grpId="0" nodeType="afterEffect">
                                   <p:stCondLst>
                                     <p:cond delay="6160"/>
                                   </p:stCondLst>
                                   <p:childTnLst>
                                     <p:set>
                                       <p:cBhvr>
-                                        <p:cTn id="27" dur="1"/>
+                                        <p:cTn id="19" dur="1"/>
                                         <p:tgtEl>
                                           <p:spTgt spid="9"/>
                                         </p:tgtEl>
@@ -5173,7 +5173,7 @@
                                     </p:set>
                                     <p:animEffect transition="in" filter="fade">
                                       <p:cBhvr>
-                                        <p:cTn id="28" dur="400"/>
+                                        <p:cTn id="20" dur="400"/>
                                         <p:tgtEl>
                                           <p:spTgt spid="9"/>
                                         </p:tgtEl>
@@ -5183,14 +5183,14 @@
                                 </p:cTn>
                               </p:par>
                               <p:par>
-                                <p:cTn id="29" presetID="10" presetClass="entr" presetSubtype="0" fill="hold" grpId="0" nodeType="afterEffect">
+                                <p:cTn presetID="10" presetClass="entr" presetSubtype="0" fill="hold" grpId="0" nodeType="afterEffect">
                                   <p:stCondLst>
                                     <p:cond delay="7520"/>
                                   </p:stCondLst>
                                   <p:childTnLst>
                                     <p:set>
                                       <p:cBhvr>
-                                        <p:cTn id="30" dur="1"/>
+                                        <p:cTn id="21" dur="1"/>
                                         <p:tgtEl>
                                           <p:spTgt spid="11"/>
                                         </p:tgtEl>
@@ -5204,7 +5204,7 @@
                                     </p:set>
                                     <p:animEffect transition="in" filter="fade">
                                       <p:cBhvr>
-                                        <p:cTn id="31" dur="400"/>
+                                        <p:cTn id="22" dur="400"/>
                                         <p:tgtEl>
                                           <p:spTgt spid="11"/>
                                         </p:tgtEl>
@@ -5214,14 +5214,14 @@
                                 </p:cTn>
                               </p:par>
                               <p:par>
-                                <p:cTn id="32" presetID="10" presetClass="entr" presetSubtype="0" fill="hold" grpId="0" nodeType="afterEffect">
+                                <p:cTn presetID="10" presetClass="entr" presetSubtype="0" fill="hold" grpId="0" nodeType="afterEffect">
                                   <p:stCondLst>
                                     <p:cond delay="9000"/>
                                   </p:stCondLst>
                                   <p:childTnLst>
                                     <p:set>
                                       <p:cBhvr>
-                                        <p:cTn id="33" dur="1"/>
+                                        <p:cTn id="23" dur="1"/>
                                         <p:tgtEl>
                                           <p:spTgt spid="12"/>
                                         </p:tgtEl>
@@ -5235,7 +5235,7 @@
                                     </p:set>
                                     <p:animEffect transition="in" filter="fade">
                                       <p:cBhvr>
-                                        <p:cTn id="34" dur="400"/>
+                                        <p:cTn id="24" dur="400"/>
                                         <p:tgtEl>
                                           <p:spTgt spid="12"/>
                                         </p:tgtEl>
@@ -5245,14 +5245,14 @@
                                 </p:cTn>
                               </p:par>
                               <p:par>
-                                <p:cTn id="35" presetID="10" presetClass="entr" presetSubtype="0" fill="hold" grpId="0" nodeType="afterEffect">
+                                <p:cTn presetID="10" presetClass="entr" presetSubtype="0" fill="hold" grpId="0" nodeType="afterEffect">
                                   <p:stCondLst>
                                     <p:cond delay="10600"/>
                                   </p:stCondLst>
                                   <p:childTnLst>
                                     <p:set>
                                       <p:cBhvr>
-                                        <p:cTn id="36" dur="1"/>
+                                        <p:cTn id="25" dur="1"/>
                                         <p:tgtEl>
                                           <p:spTgt spid="14"/>
                                         </p:tgtEl>
@@ -5266,7 +5266,7 @@
                                     </p:set>
                                     <p:animEffect transition="in" filter="fade">
                                       <p:cBhvr>
-                                        <p:cTn id="37" dur="400"/>
+                                        <p:cTn id="26" dur="400"/>
                                         <p:tgtEl>
                                           <p:spTgt spid="14"/>
                                         </p:tgtEl>
@@ -5276,14 +5276,14 @@
                                 </p:cTn>
                               </p:par>
                               <p:par>
-                                <p:cTn id="38" presetID="10" presetClass="entr" presetSubtype="0" fill="hold" grpId="0" nodeType="afterEffect">
+                                <p:cTn presetID="10" presetClass="entr" presetSubtype="0" fill="hold" grpId="0" nodeType="afterEffect">
                                   <p:stCondLst>
                                     <p:cond delay="12320"/>
                                   </p:stCondLst>
                                   <p:childTnLst>
                                     <p:set>
                                       <p:cBhvr>
-                                        <p:cTn id="39" dur="1"/>
+                                        <p:cTn id="27" dur="1"/>
                                         <p:tgtEl>
                                           <p:spTgt spid="13"/>
                                         </p:tgtEl>
@@ -5297,7 +5297,7 @@
                                     </p:set>
                                     <p:animEffect transition="in" filter="fade">
                                       <p:cBhvr>
-                                        <p:cTn id="40" dur="400"/>
+                                        <p:cTn id="28" dur="400"/>
                                         <p:tgtEl>
                                           <p:spTgt spid="13"/>
                                         </p:tgtEl>
@@ -5307,14 +5307,14 @@
                                 </p:cTn>
                               </p:par>
                               <p:par>
-                                <p:cTn id="41" presetID="10" presetClass="entr" presetSubtype="0" fill="hold" grpId="0" nodeType="afterEffect">
+                                <p:cTn presetID="10" presetClass="entr" presetSubtype="0" fill="hold" grpId="0" nodeType="afterEffect">
                                   <p:stCondLst>
                                     <p:cond delay="14160"/>
                                   </p:stCondLst>
                                   <p:childTnLst>
                                     <p:set>
                                       <p:cBhvr>
-                                        <p:cTn id="42" dur="1"/>
+                                        <p:cTn id="29" dur="1"/>
                                         <p:tgtEl>
                                           <p:spTgt spid="15"/>
                                         </p:tgtEl>
@@ -5328,7 +5328,7 @@
                                     </p:set>
                                     <p:animEffect transition="in" filter="fade">
                                       <p:cBhvr>
-                                        <p:cTn id="43" dur="400"/>
+                                        <p:cTn id="30" dur="400"/>
                                         <p:tgtEl>
                                           <p:spTgt spid="15"/>
                                         </p:tgtEl>
@@ -5338,14 +5338,14 @@
                                 </p:cTn>
                               </p:par>
                               <p:par>
-                                <p:cTn id="44" presetID="10" presetClass="entr" presetSubtype="0" fill="hold" grpId="0" nodeType="afterEffect">
+                                <p:cTn presetID="10" presetClass="entr" presetSubtype="0" fill="hold" grpId="0" nodeType="afterEffect">
                                   <p:stCondLst>
                                     <p:cond delay="16120"/>
                                   </p:stCondLst>
                                   <p:childTnLst>
                                     <p:set>
                                       <p:cBhvr>
-                                        <p:cTn id="45" dur="1"/>
+                                        <p:cTn id="31" dur="1"/>
                                         <p:tgtEl>
                                           <p:spTgt spid="16"/>
                                         </p:tgtEl>
@@ -5359,7 +5359,7 @@
                                     </p:set>
                                     <p:animEffect transition="in" filter="fade">
                                       <p:cBhvr>
-                                        <p:cTn id="46" dur="400"/>
+                                        <p:cTn id="32" dur="400"/>
                                         <p:tgtEl>
                                           <p:spTgt spid="16"/>
                                         </p:tgtEl>
@@ -5369,14 +5369,14 @@
                                 </p:cTn>
                               </p:par>
                               <p:par>
-                                <p:cTn id="47" presetID="10" presetClass="entr" presetSubtype="0" fill="hold" grpId="0" nodeType="afterEffect">
+                                <p:cTn presetID="10" presetClass="entr" presetSubtype="0" fill="hold" grpId="0" nodeType="afterEffect">
                                   <p:stCondLst>
                                     <p:cond delay="18200"/>
                                   </p:stCondLst>
                                   <p:childTnLst>
                                     <p:set>
                                       <p:cBhvr>
-                                        <p:cTn id="48" dur="1"/>
+                                        <p:cTn id="33" dur="1"/>
                                         <p:tgtEl>
                                           <p:spTgt spid="17"/>
                                         </p:tgtEl>
@@ -5390,7 +5390,7 @@
                                     </p:set>
                                     <p:animEffect transition="in" filter="fade">
                                       <p:cBhvr>
-                                        <p:cTn id="49" dur="400"/>
+                                        <p:cTn id="34" dur="400"/>
                                         <p:tgtEl>
                                           <p:spTgt spid="17"/>
                                         </p:tgtEl>
@@ -6230,14 +6230,14 @@
                             </p:stCondLst>
                             <p:childTnLst>
                               <p:par>
-                                <p:cTn id="5" presetID="2" presetClass="entr" presetSubtype="8" fill="hold" grpId="0" nodeType="afterEffect">
+                                <p:cTn presetID="2" presetClass="entr" presetSubtype="8" fill="hold" grpId="0" nodeType="afterEffect">
                                   <p:stCondLst>
                                     <p:cond delay="0"/>
                                   </p:stCondLst>
                                   <p:childTnLst>
                                     <p:set>
                                       <p:cBhvr>
-                                        <p:cTn id="6" dur="1"/>
+                                        <p:cTn id="5" dur="1"/>
                                         <p:tgtEl>
                                           <p:spTgt spid="2"/>
                                         </p:tgtEl>
@@ -6251,7 +6251,7 @@
                                     </p:set>
                                     <p:anim calcmode="lin" valueType="num">
                                       <p:cBhvr additive="base">
-                                        <p:cTn id="7" dur="400"/>
+                                        <p:cTn id="6" dur="400"/>
                                         <p:tgtEl>
                                           <p:spTgt spid="2"/>
                                         </p:tgtEl>
@@ -6274,7 +6274,7 @@
                                     </p:anim>
                                     <p:anim calcmode="lin" valueType="num">
                                       <p:cBhvr additive="base">
-                                        <p:cTn id="8" dur="400"/>
+                                        <p:cTn id="7" dur="400"/>
                                         <p:tgtEl>
                                           <p:spTgt spid="2"/>
                                         </p:tgtEl>
@@ -6299,14 +6299,14 @@
                                 </p:cTn>
                               </p:par>
                               <p:par>
-                                <p:cTn id="9" presetID="2" presetClass="entr" presetSubtype="8" fill="hold" grpId="0" nodeType="afterEffect">
+                                <p:cTn presetID="2" presetClass="entr" presetSubtype="8" fill="hold" grpId="0" nodeType="afterEffect">
                                   <p:stCondLst>
                                     <p:cond delay="500"/>
                                   </p:stCondLst>
                                   <p:childTnLst>
                                     <p:set>
                                       <p:cBhvr>
-                                        <p:cTn id="10" dur="1"/>
+                                        <p:cTn id="8" dur="1"/>
                                         <p:tgtEl>
                                           <p:spTgt spid="3"/>
                                         </p:tgtEl>
@@ -6320,7 +6320,7 @@
                                     </p:set>
                                     <p:anim calcmode="lin" valueType="num">
                                       <p:cBhvr additive="base">
-                                        <p:cTn id="11" dur="400"/>
+                                        <p:cTn id="9" dur="400"/>
                                         <p:tgtEl>
                                           <p:spTgt spid="3"/>
                                         </p:tgtEl>
@@ -6343,7 +6343,7 @@
                                     </p:anim>
                                     <p:anim calcmode="lin" valueType="num">
                                       <p:cBhvr additive="base">
-                                        <p:cTn id="12" dur="400"/>
+                                        <p:cTn id="10" dur="400"/>
                                         <p:tgtEl>
                                           <p:spTgt spid="3"/>
                                         </p:tgtEl>
@@ -6368,16 +6368,85 @@
                                 </p:cTn>
                               </p:par>
                               <p:par>
-                                <p:cTn id="13" presetID="2" presetClass="entr" presetSubtype="8" fill="hold" grpId="0" nodeType="afterEffect">
+                                <p:cTn presetID="2" presetClass="entr" presetSubtype="8" fill="hold" grpId="0" nodeType="afterEffect">
                                   <p:stCondLst>
                                     <p:cond delay="1100"/>
                                   </p:stCondLst>
                                   <p:childTnLst>
                                     <p:set>
                                       <p:cBhvr>
+                                        <p:cTn id="11" dur="1"/>
+                                        <p:tgtEl>
+                                          <p:spTgt spid="7"/>
+                                        </p:tgtEl>
+                                        <p:attrNameLst>
+                                          <p:attrName>style.visibility</p:attrName>
+                                        </p:attrNameLst>
+                                      </p:cBhvr>
+                                      <p:to>
+                                        <p:strVal val="visible"/>
+                                      </p:to>
+                                    </p:set>
+                                    <p:anim calcmode="lin" valueType="num">
+                                      <p:cBhvr additive="base">
+                                        <p:cTn id="12" dur="400"/>
+                                        <p:tgtEl>
+                                          <p:spTgt spid="7"/>
+                                        </p:tgtEl>
+                                        <p:attrNameLst>
+                                          <p:attrName>ppt_y</p:attrName>
+                                        </p:attrNameLst>
+                                      </p:cBhvr>
+                                      <p:tavLst>
+                                        <p:tav tm="0">
+                                          <p:val>
+                                            <p:strVal val="#ppt_y"/>
+                                          </p:val>
+                                        </p:tav>
+                                        <p:tav tm="100000">
+                                          <p:val>
+                                            <p:strVal val="#ppt_y"/>
+                                          </p:val>
+                                        </p:tav>
+                                      </p:tavLst>
+                                    </p:anim>
+                                    <p:anim calcmode="lin" valueType="num">
+                                      <p:cBhvr additive="base">
+                                        <p:cTn id="13" dur="400"/>
+                                        <p:tgtEl>
+                                          <p:spTgt spid="7"/>
+                                        </p:tgtEl>
+                                        <p:attrNameLst>
+                                          <p:attrName>ppt_x</p:attrName>
+                                        </p:attrNameLst>
+                                      </p:cBhvr>
+                                      <p:tavLst>
+                                        <p:tav tm="0">
+                                          <p:val>
+                                            <p:strVal val="0-#ppt_w/2"/>
+                                          </p:val>
+                                        </p:tav>
+                                        <p:tav tm="100000">
+                                          <p:val>
+                                            <p:strVal val="#ppt_x"/>
+                                          </p:val>
+                                        </p:tav>
+                                      </p:tavLst>
+                                    </p:anim>
+                                  </p:childTnLst>
+                                </p:cTn>
+                              </p:par>
+                              <p:par>
+                                <p:cTn presetID="2" presetClass="entr" presetSubtype="8" fill="hold" grpId="0" nodeType="afterEffect">
+                                  <p:stCondLst>
+                                    <p:cond delay="1800"/>
+                                  </p:stCondLst>
+                                  <p:childTnLst>
+                                    <p:set>
+                                      <p:cBhvr>
                                         <p:cTn id="14" dur="1"/>
                                         <p:tgtEl>
-                                          <p:spTgt spid="7"/>
+                                          <p:spTgt spid="11"/>
                                         </p:tgtEl>
                                         <p:attrNameLst>
                                           <p:attrName>style.visibility</p:attrName>
@@ -6391,7 +6460,7 @@
                                       <p:cBhvr additive="base">
                                         <p:cTn id="15" dur="400"/>
                                         <p:tgtEl>
-                                          <p:spTgt spid="7"/>
+                                          <p:spTgt spid="11"/>
                                         </p:tgtEl>
                                         <p:attrNameLst>
                                           <p:attrName>ppt_y</p:attrName>
@@ -6414,7 +6483,7 @@
                                       <p:cBhvr additive="base">
                                         <p:cTn id="16" dur="400"/>
                                         <p:tgtEl>
-                                          <p:spTgt spid="7"/>
+                                          <p:spTgt spid="11"/>
                                         </p:tgtEl>
                                         <p:attrNameLst>
                                           <p:attrName>ppt_x</p:attrName>
@@ -6437,16 +6506,16 @@
                                 </p:cTn>
                               </p:par>
                               <p:par>
-                                <p:cTn id="17" presetID="2" presetClass="entr" presetSubtype="8" fill="hold" grpId="0" nodeType="afterEffect">
+                                <p:cTn presetID="2" presetClass="entr" presetSubtype="8" fill="hold" grpId="0" nodeType="afterEffect">
                                   <p:stCondLst>
-                                    <p:cond delay="1800"/>
+                                    <p:cond delay="2600"/>
                                   </p:stCondLst>
                                   <p:childTnLst>
                                     <p:set>
                                       <p:cBhvr>
-                                        <p:cTn id="18" dur="1"/>
-                                        <p:tgtEl>
-                                          <p:spTgt spid="11"/>
+                                        <p:cTn id="17" dur="1"/>
+                                        <p:tgtEl>
+                                          <p:spTgt spid="15"/>
                                         </p:tgtEl>
                                         <p:attrNameLst>
                                           <p:attrName>style.visibility</p:attrName>
@@ -6458,9 +6527,9 @@
                                     </p:set>
                                     <p:anim calcmode="lin" valueType="num">
                                       <p:cBhvr additive="base">
-                                        <p:cTn id="19" dur="400"/>
-                                        <p:tgtEl>
-                                          <p:spTgt spid="11"/>
+                                        <p:cTn id="18" dur="400"/>
+                                        <p:tgtEl>
+                                          <p:spTgt spid="15"/>
                                         </p:tgtEl>
                                         <p:attrNameLst>
                                           <p:attrName>ppt_y</p:attrName>
@@ -6481,9 +6550,9 @@
                                     </p:anim>
                                     <p:anim calcmode="lin" valueType="num">
                                       <p:cBhvr additive="base">
-                                        <p:cTn id="20" dur="400"/>
-                                        <p:tgtEl>
-                                          <p:spTgt spid="11"/>
+                                        <p:cTn id="19" dur="400"/>
+                                        <p:tgtEl>
+                                          <p:spTgt spid="15"/>
                                         </p:tgtEl>
                                         <p:attrNameLst>
                                           <p:attrName>ppt_x</p:attrName>
@@ -6506,16 +6575,16 @@
                                 </p:cTn>
                               </p:par>
                               <p:par>
-                                <p:cTn id="21" presetID="2" presetClass="entr" presetSubtype="8" fill="hold" grpId="0" nodeType="afterEffect">
+                                <p:cTn presetID="2" presetClass="entr" presetSubtype="8" fill="hold" grpId="0" nodeType="afterEffect">
                                   <p:stCondLst>
-                                    <p:cond delay="2600"/>
+                                    <p:cond delay="3500"/>
                                   </p:stCondLst>
                                   <p:childTnLst>
                                     <p:set>
                                       <p:cBhvr>
-                                        <p:cTn id="22" dur="1"/>
-                                        <p:tgtEl>
-                                          <p:spTgt spid="15"/>
+                                        <p:cTn id="20" dur="1"/>
+                                        <p:tgtEl>
+                                          <p:spTgt spid="19"/>
                                         </p:tgtEl>
                                         <p:attrNameLst>
                                           <p:attrName>style.visibility</p:attrName>
@@ -6527,9 +6596,9 @@
                                     </p:set>
                                     <p:anim calcmode="lin" valueType="num">
                                       <p:cBhvr additive="base">
-                                        <p:cTn id="23" dur="400"/>
-                                        <p:tgtEl>
-                                          <p:spTgt spid="15"/>
+                                        <p:cTn id="21" dur="400"/>
+                                        <p:tgtEl>
+                                          <p:spTgt spid="19"/>
                                         </p:tgtEl>
                                         <p:attrNameLst>
                                           <p:attrName>ppt_y</p:attrName>
@@ -6550,9 +6619,9 @@
                                     </p:anim>
                                     <p:anim calcmode="lin" valueType="num">
                                       <p:cBhvr additive="base">
-                                        <p:cTn id="24" dur="400"/>
-                                        <p:tgtEl>
-                                          <p:spTgt spid="15"/>
+                                        <p:cTn id="22" dur="400"/>
+                                        <p:tgtEl>
+                                          <p:spTgt spid="19"/>
                                         </p:tgtEl>
                                         <p:attrNameLst>
                                           <p:attrName>ppt_x</p:attrName>
@@ -6575,16 +6644,85 @@
                                 </p:cTn>
                               </p:par>
                               <p:par>
-                                <p:cTn id="25" presetID="2" presetClass="entr" presetSubtype="8" fill="hold" grpId="0" nodeType="afterEffect">
+                                <p:cTn presetID="2" presetClass="entr" presetSubtype="8" fill="hold" grpId="0" nodeType="afterEffect">
                                   <p:stCondLst>
-                                    <p:cond delay="3500"/>
+                                    <p:cond delay="4500"/>
                                   </p:stCondLst>
                                   <p:childTnLst>
                                     <p:set>
                                       <p:cBhvr>
+                                        <p:cTn id="23" dur="1"/>
+                                        <p:tgtEl>
+                                          <p:spTgt spid="6"/>
+                                        </p:tgtEl>
+                                        <p:attrNameLst>
+                                          <p:attrName>style.visibility</p:attrName>
+                                        </p:attrNameLst>
+                                      </p:cBhvr>
+                                      <p:to>
+                                        <p:strVal val="visible"/>
+                                      </p:to>
+                                    </p:set>
+                                    <p:anim calcmode="lin" valueType="num">
+                                      <p:cBhvr additive="base">
+                                        <p:cTn id="24" dur="400"/>
+                                        <p:tgtEl>
+                                          <p:spTgt spid="6"/>
+                                        </p:tgtEl>
+                                        <p:attrNameLst>
+                                          <p:attrName>ppt_y</p:attrName>
+                                        </p:attrNameLst>
+                                      </p:cBhvr>
+                                      <p:tavLst>
+                                        <p:tav tm="0">
+                                          <p:val>
+                                            <p:strVal val="#ppt_y"/>
+                                          </p:val>
+                                        </p:tav>
+                                        <p:tav tm="100000">
+                                          <p:val>
+                                            <p:strVal val="#ppt_y"/>
+                                          </p:val>
+                                        </p:tav>
+                                      </p:tavLst>
+                                    </p:anim>
+                                    <p:anim calcmode="lin" valueType="num">
+                                      <p:cBhvr additive="base">
+                                        <p:cTn id="25" dur="400"/>
+                                        <p:tgtEl>
+                                          <p:spTgt spid="6"/>
+                                        </p:tgtEl>
+                                        <p:attrNameLst>
+                                          <p:attrName>ppt_x</p:attrName>
+                                        </p:attrNameLst>
+                                      </p:cBhvr>
+                                      <p:tavLst>
+                                        <p:tav tm="0">
+                                          <p:val>
+                                            <p:strVal val="0-#ppt_w/2"/>
+                                          </p:val>
+                                        </p:tav>
+                                        <p:tav tm="100000">
+                                          <p:val>
+                                            <p:strVal val="#ppt_x"/>
+                                          </p:val>
+                                        </p:tav>
+                                      </p:tavLst>
+                                    </p:anim>
+                                  </p:childTnLst>
+                                </p:cTn>
+                              </p:par>
+                              <p:par>
+                                <p:cTn presetID="2" presetClass="entr" presetSubtype="8" fill="hold" grpId="0" nodeType="afterEffect">
+                                  <p:stCondLst>
+                                    <p:cond delay="5600"/>
+                                  </p:stCondLst>
+                                  <p:childTnLst>
+                                    <p:set>
+                                      <p:cBhvr>
                                         <p:cTn id="26" dur="1"/>
                                         <p:tgtEl>
-                                          <p:spTgt spid="19"/>
+                                          <p:spTgt spid="10"/>
                                         </p:tgtEl>
                                         <p:attrNameLst>
                                           <p:attrName>style.visibility</p:attrName>
@@ -6598,7 +6736,7 @@
                                       <p:cBhvr additive="base">
                                         <p:cTn id="27" dur="400"/>
                                         <p:tgtEl>
-                                          <p:spTgt spid="19"/>
+                                          <p:spTgt spid="10"/>
                                         </p:tgtEl>
                                         <p:attrNameLst>
                                           <p:attrName>ppt_y</p:attrName>
@@ -6621,7 +6759,7 @@
                                       <p:cBhvr additive="base">
                                         <p:cTn id="28" dur="400"/>
                                         <p:tgtEl>
-                                          <p:spTgt spid="19"/>
+                                          <p:spTgt spid="10"/>
                                         </p:tgtEl>
                                         <p:attrNameLst>
                                           <p:attrName>ppt_x</p:attrName>
@@ -6644,16 +6782,16 @@
                                 </p:cTn>
                               </p:par>
                               <p:par>
-                                <p:cTn id="29" presetID="2" presetClass="entr" presetSubtype="8" fill="hold" grpId="0" nodeType="afterEffect">
+                                <p:cTn presetID="2" presetClass="entr" presetSubtype="8" fill="hold" grpId="0" nodeType="afterEffect">
                                   <p:stCondLst>
-                                    <p:cond delay="4500"/>
+                                    <p:cond delay="6800"/>
                                   </p:stCondLst>
                                   <p:childTnLst>
                                     <p:set>
                                       <p:cBhvr>
-                                        <p:cTn id="30" dur="1"/>
-                                        <p:tgtEl>
-                                          <p:spTgt spid="6"/>
+                                        <p:cTn id="29" dur="1"/>
+                                        <p:tgtEl>
+                                          <p:spTgt spid="14"/>
                                         </p:tgtEl>
                                         <p:attrNameLst>
                                           <p:attrName>style.visibility</p:attrName>
@@ -6665,9 +6803,9 @@
                                     </p:set>
                                     <p:anim calcmode="lin" valueType="num">
                                       <p:cBhvr additive="base">
-                                        <p:cTn id="31" dur="400"/>
-                                        <p:tgtEl>
-                                          <p:spTgt spid="6"/>
+                                        <p:cTn id="30" dur="400"/>
+                                        <p:tgtEl>
+                                          <p:spTgt spid="14"/>
                                         </p:tgtEl>
                                         <p:attrNameLst>
                                           <p:attrName>ppt_y</p:attrName>
@@ -6688,9 +6826,9 @@
                                     </p:anim>
                                     <p:anim calcmode="lin" valueType="num">
                                       <p:cBhvr additive="base">
-                                        <p:cTn id="32" dur="400"/>
-                                        <p:tgtEl>
-                                          <p:spTgt spid="6"/>
+                                        <p:cTn id="31" dur="400"/>
+                                        <p:tgtEl>
+                                          <p:spTgt spid="14"/>
                                         </p:tgtEl>
                                         <p:attrNameLst>
                                           <p:attrName>ppt_x</p:attrName>
@@ -6713,16 +6851,16 @@
                                 </p:cTn>
                               </p:par>
                               <p:par>
-                                <p:cTn id="33" presetID="2" presetClass="entr" presetSubtype="8" fill="hold" grpId="0" nodeType="afterEffect">
+                                <p:cTn presetID="2" presetClass="entr" presetSubtype="8" fill="hold" grpId="0" nodeType="afterEffect">
                                   <p:stCondLst>
-                                    <p:cond delay="5600"/>
+                                    <p:cond delay="8100"/>
                                   </p:stCondLst>
                                   <p:childTnLst>
                                     <p:set>
                                       <p:cBhvr>
-                                        <p:cTn id="34" dur="1"/>
-                                        <p:tgtEl>
-                                          <p:spTgt spid="10"/>
+                                        <p:cTn id="32" dur="1"/>
+                                        <p:tgtEl>
+                                          <p:spTgt spid="18"/>
                                         </p:tgtEl>
                                         <p:attrNameLst>
                                           <p:attrName>style.visibility</p:attrName>
@@ -6734,9 +6872,9 @@
                                     </p:set>
                                     <p:anim calcmode="lin" valueType="num">
                                       <p:cBhvr additive="base">
-                                        <p:cTn id="35" dur="400"/>
-                                        <p:tgtEl>
-                                          <p:spTgt spid="10"/>
+                                        <p:cTn id="33" dur="400"/>
+                                        <p:tgtEl>
+                                          <p:spTgt spid="18"/>
                                         </p:tgtEl>
                                         <p:attrNameLst>
                                           <p:attrName>ppt_y</p:attrName>
@@ -6757,9 +6895,9 @@
                                     </p:anim>
                                     <p:anim calcmode="lin" valueType="num">
                                       <p:cBhvr additive="base">
-                                        <p:cTn id="36" dur="400"/>
-                                        <p:tgtEl>
-                                          <p:spTgt spid="10"/>
+                                        <p:cTn id="34" dur="400"/>
+                                        <p:tgtEl>
+                                          <p:spTgt spid="18"/>
                                         </p:tgtEl>
                                         <p:attrNameLst>
                                           <p:attrName>ppt_x</p:attrName>
@@ -6782,16 +6920,85 @@
                                 </p:cTn>
                               </p:par>
                               <p:par>
-                                <p:cTn id="37" presetID="2" presetClass="entr" presetSubtype="8" fill="hold" grpId="0" nodeType="afterEffect">
+                                <p:cTn presetID="2" presetClass="entr" presetSubtype="8" fill="hold" grpId="0" nodeType="afterEffect">
                                   <p:stCondLst>
-                                    <p:cond delay="6800"/>
+                                    <p:cond delay="9500"/>
                                   </p:stCondLst>
                                   <p:childTnLst>
                                     <p:set>
                                       <p:cBhvr>
+                                        <p:cTn id="35" dur="1"/>
+                                        <p:tgtEl>
+                                          <p:spTgt spid="5"/>
+                                        </p:tgtEl>
+                                        <p:attrNameLst>
+                                          <p:attrName>style.visibility</p:attrName>
+                                        </p:attrNameLst>
+                                      </p:cBhvr>
+                                      <p:to>
+                                        <p:strVal val="visible"/>
+                                      </p:to>
+                                    </p:set>
+                                    <p:anim calcmode="lin" valueType="num">
+                                      <p:cBhvr additive="base">
+                                        <p:cTn id="36" dur="400"/>
+                                        <p:tgtEl>
+                                          <p:spTgt spid="5"/>
+                                        </p:tgtEl>
+                                        <p:attrNameLst>
+                                          <p:attrName>ppt_y</p:attrName>
+                                        </p:attrNameLst>
+                                      </p:cBhvr>
+                                      <p:tavLst>
+                                        <p:tav tm="0">
+                                          <p:val>
+                                            <p:strVal val="#ppt_y"/>
+                                          </p:val>
+                                        </p:tav>
+                                        <p:tav tm="100000">
+                                          <p:val>
+                                            <p:strVal val="#ppt_y"/>
+                                          </p:val>
+                                        </p:tav>
+                                      </p:tavLst>
+                                    </p:anim>
+                                    <p:anim calcmode="lin" valueType="num">
+                                      <p:cBhvr additive="base">
+                                        <p:cTn id="37" dur="400"/>
+                                        <p:tgtEl>
+                                          <p:spTgt spid="5"/>
+                                        </p:tgtEl>
+                                        <p:attrNameLst>
+                                          <p:attrName>ppt_x</p:attrName>
+                                        </p:attrNameLst>
+                                      </p:cBhvr>
+                                      <p:tavLst>
+                                        <p:tav tm="0">
+                                          <p:val>
+                                            <p:strVal val="0-#ppt_w/2"/>
+                                          </p:val>
+                                        </p:tav>
+                                        <p:tav tm="100000">
+                                          <p:val>
+                                            <p:strVal val="#ppt_x"/>
+                                          </p:val>
+                                        </p:tav>
+                                      </p:tavLst>
+                                    </p:anim>
+                                  </p:childTnLst>
+                                </p:cTn>
+                              </p:par>
+                              <p:par>
+                                <p:cTn presetID="2" presetClass="entr" presetSubtype="8" fill="hold" grpId="0" nodeType="afterEffect">
+                                  <p:stCondLst>
+                                    <p:cond delay="11000"/>
+                                  </p:stCondLst>
+                                  <p:childTnLst>
+                                    <p:set>
+                                      <p:cBhvr>
                                         <p:cTn id="38" dur="1"/>
                                         <p:tgtEl>
-                                          <p:spTgt spid="14"/>
+                                          <p:spTgt spid="8"/>
                                         </p:tgtEl>
                                         <p:attrNameLst>
                                           <p:attrName>style.visibility</p:attrName>
@@ -6805,7 +7012,7 @@
                                       <p:cBhvr additive="base">
                                         <p:cTn id="39" dur="400"/>
                                         <p:tgtEl>
-                                          <p:spTgt spid="14"/>
+                                          <p:spTgt spid="8"/>
                                         </p:tgtEl>
                                         <p:attrNameLst>
                                           <p:attrName>ppt_y</p:attrName>
@@ -6828,7 +7035,7 @@
                                       <p:cBhvr additive="base">
                                         <p:cTn id="40" dur="400"/>
                                         <p:tgtEl>
-                                          <p:spTgt spid="14"/>
+                                          <p:spTgt spid="8"/>
                                         </p:tgtEl>
                                         <p:attrNameLst>
                                           <p:attrName>ppt_x</p:attrName>
@@ -6851,16 +7058,16 @@
                                 </p:cTn>
                               </p:par>
                               <p:par>
-                                <p:cTn id="41" presetID="2" presetClass="entr" presetSubtype="8" fill="hold" grpId="0" nodeType="afterEffect">
+                                <p:cTn presetID="2" presetClass="entr" presetSubtype="8" fill="hold" grpId="0" nodeType="afterEffect">
                                   <p:stCondLst>
-                                    <p:cond delay="8100"/>
+                                    <p:cond delay="12600"/>
                                   </p:stCondLst>
                                   <p:childTnLst>
                                     <p:set>
                                       <p:cBhvr>
-                                        <p:cTn id="42" dur="1"/>
-                                        <p:tgtEl>
-                                          <p:spTgt spid="18"/>
+                                        <p:cTn id="41" dur="1"/>
+                                        <p:tgtEl>
+                                          <p:spTgt spid="12"/>
                                         </p:tgtEl>
                                         <p:attrNameLst>
                                           <p:attrName>style.visibility</p:attrName>
@@ -6872,9 +7079,9 @@
                                     </p:set>
                                     <p:anim calcmode="lin" valueType="num">
                                       <p:cBhvr additive="base">
-                                        <p:cTn id="43" dur="400"/>
-                                        <p:tgtEl>
-                                          <p:spTgt spid="18"/>
+                                        <p:cTn id="42" dur="400"/>
+                                        <p:tgtEl>
+                                          <p:spTgt spid="12"/>
                                         </p:tgtEl>
                                         <p:attrNameLst>
                                           <p:attrName>ppt_y</p:attrName>
@@ -6895,9 +7102,9 @@
                                     </p:anim>
                                     <p:anim calcmode="lin" valueType="num">
                                       <p:cBhvr additive="base">
-                                        <p:cTn id="44" dur="400"/>
-                                        <p:tgtEl>
-                                          <p:spTgt spid="18"/>
+                                        <p:cTn id="43" dur="400"/>
+                                        <p:tgtEl>
+                                          <p:spTgt spid="12"/>
                                         </p:tgtEl>
                                         <p:attrNameLst>
                                           <p:attrName>ppt_x</p:attrName>
@@ -6920,16 +7127,16 @@
                                 </p:cTn>
                               </p:par>
                               <p:par>
-                                <p:cTn id="45" presetID="2" presetClass="entr" presetSubtype="8" fill="hold" grpId="0" nodeType="afterEffect">
+                                <p:cTn presetID="2" presetClass="entr" presetSubtype="8" fill="hold" grpId="0" nodeType="afterEffect">
                                   <p:stCondLst>
-                                    <p:cond delay="9500"/>
+                                    <p:cond delay="14300"/>
                                   </p:stCondLst>
                                   <p:childTnLst>
                                     <p:set>
                                       <p:cBhvr>
-                                        <p:cTn id="46" dur="1"/>
-                                        <p:tgtEl>
-                                          <p:spTgt spid="5"/>
+                                        <p:cTn id="44" dur="1"/>
+                                        <p:tgtEl>
+                                          <p:spTgt spid="16"/>
                                         </p:tgtEl>
                                         <p:attrNameLst>
                                           <p:attrName>style.visibility</p:attrName>
@@ -6941,9 +7148,9 @@
                                     </p:set>
                                     <p:anim calcmode="lin" valueType="num">
                                       <p:cBhvr additive="base">
-                                        <p:cTn id="47" dur="400"/>
-                                        <p:tgtEl>
-                                          <p:spTgt spid="5"/>
+                                        <p:cTn id="45" dur="400"/>
+                                        <p:tgtEl>
+                                          <p:spTgt spid="16"/>
                                         </p:tgtEl>
                                         <p:attrNameLst>
                                           <p:attrName>ppt_y</p:attrName>
@@ -6964,9 +7171,9 @@
                                     </p:anim>
                                     <p:anim calcmode="lin" valueType="num">
                                       <p:cBhvr additive="base">
-                                        <p:cTn id="48" dur="400"/>
-                                        <p:tgtEl>
-                                          <p:spTgt spid="5"/>
+                                        <p:cTn id="46" dur="400"/>
+                                        <p:tgtEl>
+                                          <p:spTgt spid="16"/>
                                         </p:tgtEl>
                                         <p:attrNameLst>
                                           <p:attrName>ppt_x</p:attrName>
@@ -6989,16 +7196,85 @@
                                 </p:cTn>
                               </p:par>
                               <p:par>
-                                <p:cTn id="49" presetID="2" presetClass="entr" presetSubtype="8" fill="hold" grpId="0" nodeType="afterEffect">
+                                <p:cTn presetID="2" presetClass="entr" presetSubtype="8" fill="hold" grpId="0" nodeType="afterEffect">
                                   <p:stCondLst>
-                                    <p:cond delay="11000"/>
+                                    <p:cond delay="16100"/>
                                   </p:stCondLst>
                                   <p:childTnLst>
                                     <p:set>
                                       <p:cBhvr>
+                                        <p:cTn id="47" dur="1"/>
+                                        <p:tgtEl>
+                                          <p:spTgt spid="20"/>
+                                        </p:tgtEl>
+                                        <p:attrNameLst>
+                                          <p:attrName>style.visibility</p:attrName>
+                                        </p:attrNameLst>
+                                      </p:cBhvr>
+                                      <p:to>
+                                        <p:strVal val="visible"/>
+                                      </p:to>
+                                    </p:set>
+                                    <p:anim calcmode="lin" valueType="num">
+                                      <p:cBhvr additive="base">
+                                        <p:cTn id="48" dur="400"/>
+                                        <p:tgtEl>
+                                          <p:spTgt spid="20"/>
+                                        </p:tgtEl>
+                                        <p:attrNameLst>
+                                          <p:attrName>ppt_y</p:attrName>
+                                        </p:attrNameLst>
+                                      </p:cBhvr>
+                                      <p:tavLst>
+                                        <p:tav tm="0">
+                                          <p:val>
+                                            <p:strVal val="#ppt_y"/>
+                                          </p:val>
+                                        </p:tav>
+                                        <p:tav tm="100000">
+                                          <p:val>
+                                            <p:strVal val="#ppt_y"/>
+                                          </p:val>
+                                        </p:tav>
+                                      </p:tavLst>
+                                    </p:anim>
+                                    <p:anim calcmode="lin" valueType="num">
+                                      <p:cBhvr additive="base">
+                                        <p:cTn id="49" dur="400"/>
+                                        <p:tgtEl>
+                                          <p:spTgt spid="20"/>
+                                        </p:tgtEl>
+                                        <p:attrNameLst>
+                                          <p:attrName>ppt_x</p:attrName>
+                                        </p:attrNameLst>
+                                      </p:cBhvr>
+                                      <p:tavLst>
+                                        <p:tav tm="0">
+                                          <p:val>
+                                            <p:strVal val="0-#ppt_w/2"/>
+                                          </p:val>
+                                        </p:tav>
+                                        <p:tav tm="100000">
+                                          <p:val>
+                                            <p:strVal val="#ppt_x"/>
+                                          </p:val>
+                                        </p:tav>
+                                      </p:tavLst>
+                                    </p:anim>
+                                  </p:childTnLst>
+                                </p:cTn>
+                              </p:par>
+                              <p:par>
+                                <p:cTn presetID="2" presetClass="entr" presetSubtype="8" fill="hold" grpId="0" nodeType="afterEffect">
+                                  <p:stCondLst>
+                                    <p:cond delay="18000"/>
+                                  </p:stCondLst>
+                                  <p:childTnLst>
+                                    <p:set>
+                                      <p:cBhvr>
                                         <p:cTn id="50" dur="1"/>
                                         <p:tgtEl>
-                                          <p:spTgt spid="8"/>
+                                          <p:spTgt spid="9"/>
                                         </p:tgtEl>
                                         <p:attrNameLst>
                                           <p:attrName>style.visibility</p:attrName>
@@ -7012,7 +7288,7 @@
                                       <p:cBhvr additive="base">
                                         <p:cTn id="51" dur="400"/>
                                         <p:tgtEl>
-                                          <p:spTgt spid="8"/>
+                                          <p:spTgt spid="9"/>
                                         </p:tgtEl>
                                         <p:attrNameLst>
                                           <p:attrName>ppt_y</p:attrName>
@@ -7035,7 +7311,7 @@
                                       <p:cBhvr additive="base">
                                         <p:cTn id="52" dur="400"/>
                                         <p:tgtEl>
-                                          <p:spTgt spid="8"/>
+                                          <p:spTgt spid="9"/>
                                         </p:tgtEl>
                                         <p:attrNameLst>
                                           <p:attrName>ppt_x</p:attrName>
@@ -7058,16 +7334,16 @@
                                 </p:cTn>
                               </p:par>
                               <p:par>
-                                <p:cTn id="53" presetID="2" presetClass="entr" presetSubtype="8" fill="hold" grpId="0" nodeType="afterEffect">
+                                <p:cTn presetID="2" presetClass="entr" presetSubtype="8" fill="hold" grpId="0" nodeType="afterEffect">
                                   <p:stCondLst>
-                                    <p:cond delay="12600"/>
+                                    <p:cond delay="20000"/>
                                   </p:stCondLst>
                                   <p:childTnLst>
                                     <p:set>
                                       <p:cBhvr>
-                                        <p:cTn id="54" dur="1"/>
-                                        <p:tgtEl>
-                                          <p:spTgt spid="12"/>
+                                        <p:cTn id="53" dur="1"/>
+                                        <p:tgtEl>
+                                          <p:spTgt spid="13"/>
                                         </p:tgtEl>
                                         <p:attrNameLst>
                                           <p:attrName>style.visibility</p:attrName>
@@ -7079,9 +7355,9 @@
                                     </p:set>
                                     <p:anim calcmode="lin" valueType="num">
                                       <p:cBhvr additive="base">
-                                        <p:cTn id="55" dur="400"/>
-                                        <p:tgtEl>
-                                          <p:spTgt spid="12"/>
+                                        <p:cTn id="54" dur="400"/>
+                                        <p:tgtEl>
+                                          <p:spTgt spid="13"/>
                                         </p:tgtEl>
                                         <p:attrNameLst>
                                           <p:attrName>ppt_y</p:attrName>
@@ -7102,9 +7378,9 @@
                                     </p:anim>
                                     <p:anim calcmode="lin" valueType="num">
                                       <p:cBhvr additive="base">
-                                        <p:cTn id="56" dur="400"/>
-                                        <p:tgtEl>
-                                          <p:spTgt spid="12"/>
+                                        <p:cTn id="55" dur="400"/>
+                                        <p:tgtEl>
+                                          <p:spTgt spid="13"/>
                                         </p:tgtEl>
                                         <p:attrNameLst>
                                           <p:attrName>ppt_x</p:attrName>
@@ -7127,16 +7403,16 @@
                                 </p:cTn>
                               </p:par>
                               <p:par>
-                                <p:cTn id="57" presetID="2" presetClass="entr" presetSubtype="8" fill="hold" grpId="0" nodeType="afterEffect">
+                                <p:cTn presetID="2" presetClass="entr" presetSubtype="8" fill="hold" grpId="0" nodeType="afterEffect">
                                   <p:stCondLst>
-                                    <p:cond delay="14300"/>
+                                    <p:cond delay="22100"/>
                                   </p:stCondLst>
                                   <p:childTnLst>
                                     <p:set>
                                       <p:cBhvr>
-                                        <p:cTn id="58" dur="1"/>
-                                        <p:tgtEl>
-                                          <p:spTgt spid="16"/>
+                                        <p:cTn id="56" dur="1"/>
+                                        <p:tgtEl>
+                                          <p:spTgt spid="17"/>
                                         </p:tgtEl>
                                         <p:attrNameLst>
                                           <p:attrName>style.visibility</p:attrName>
@@ -7148,9 +7424,9 @@
                                     </p:set>
                                     <p:anim calcmode="lin" valueType="num">
                                       <p:cBhvr additive="base">
-                                        <p:cTn id="59" dur="400"/>
-                                        <p:tgtEl>
-                                          <p:spTgt spid="16"/>
+                                        <p:cTn id="57" dur="400"/>
+                                        <p:tgtEl>
+                                          <p:spTgt spid="17"/>
                                         </p:tgtEl>
                                         <p:attrNameLst>
                                           <p:attrName>ppt_y</p:attrName>
@@ -7171,9 +7447,9 @@
                                     </p:anim>
                                     <p:anim calcmode="lin" valueType="num">
                                       <p:cBhvr additive="base">
-                                        <p:cTn id="60" dur="400"/>
-                                        <p:tgtEl>
-                                          <p:spTgt spid="16"/>
+                                        <p:cTn id="58" dur="400"/>
+                                        <p:tgtEl>
+                                          <p:spTgt spid="17"/>
                                         </p:tgtEl>
                                         <p:attrNameLst>
                                           <p:attrName>ppt_x</p:attrName>
@@ -7196,16 +7472,85 @@
                                 </p:cTn>
                               </p:par>
                               <p:par>
-                                <p:cTn id="61" presetID="2" presetClass="entr" presetSubtype="8" fill="hold" grpId="0" nodeType="afterEffect">
+                                <p:cTn presetID="2" presetClass="entr" presetSubtype="8" fill="hold" grpId="0" nodeType="afterEffect">
                                   <p:stCondLst>
-                                    <p:cond delay="16100"/>
+                                    <p:cond delay="24300"/>
                                   </p:stCondLst>
                                   <p:childTnLst>
                                     <p:set>
                                       <p:cBhvr>
+                                        <p:cTn id="59" dur="1"/>
+                                        <p:tgtEl>
+                                          <p:spTgt spid="21"/>
+                                        </p:tgtEl>
+                                        <p:attrNameLst>
+                                          <p:attrName>style.visibility</p:attrName>
+                                        </p:attrNameLst>
+                                      </p:cBhvr>
+                                      <p:to>
+                                        <p:strVal val="visible"/>
+                                      </p:to>
+                                    </p:set>
+                                    <p:anim calcmode="lin" valueType="num">
+                                      <p:cBhvr additive="base">
+                                        <p:cTn id="60" dur="400"/>
+                                        <p:tgtEl>
+                                          <p:spTgt spid="21"/>
+                                        </p:tgtEl>
+                                        <p:attrNameLst>
+                                          <p:attrName>ppt_y</p:attrName>
+                                        </p:attrNameLst>
+                                      </p:cBhvr>
+                                      <p:tavLst>
+                                        <p:tav tm="0">
+                                          <p:val>
+                                            <p:strVal val="#ppt_y"/>
+                                          </p:val>
+                                        </p:tav>
+                                        <p:tav tm="100000">
+                                          <p:val>
+                                            <p:strVal val="#ppt_y"/>
+                                          </p:val>
+                                        </p:tav>
+                                      </p:tavLst>
+                                    </p:anim>
+                                    <p:anim calcmode="lin" valueType="num">
+                                      <p:cBhvr additive="base">
+                                        <p:cTn id="61" dur="400"/>
+                                        <p:tgtEl>
+                                          <p:spTgt spid="21"/>
+                                        </p:tgtEl>
+                                        <p:attrNameLst>
+                                          <p:attrName>ppt_x</p:attrName>
+                                        </p:attrNameLst>
+                                      </p:cBhvr>
+                                      <p:tavLst>
+                                        <p:tav tm="0">
+                                          <p:val>
+                                            <p:strVal val="0-#ppt_w/2"/>
+                                          </p:val>
+                                        </p:tav>
+                                        <p:tav tm="100000">
+                                          <p:val>
+                                            <p:strVal val="#ppt_x"/>
+                                          </p:val>
+                                        </p:tav>
+                                      </p:tavLst>
+                                    </p:anim>
+                                  </p:childTnLst>
+                                </p:cTn>
+                              </p:par>
+                              <p:par>
+                                <p:cTn presetID="2" presetClass="entr" presetSubtype="8" fill="hold" grpId="0" nodeType="afterEffect">
+                                  <p:stCondLst>
+                                    <p:cond delay="26600"/>
+                                  </p:stCondLst>
+                                  <p:childTnLst>
+                                    <p:set>
+                                      <p:cBhvr>
                                         <p:cTn id="62" dur="1"/>
                                         <p:tgtEl>
-                                          <p:spTgt spid="20"/>
+                                          <p:spTgt spid="22"/>
                                         </p:tgtEl>
                                         <p:attrNameLst>
                                           <p:attrName>style.visibility</p:attrName>
@@ -7219,7 +7564,7 @@
                                       <p:cBhvr additive="base">
                                         <p:cTn id="63" dur="400"/>
                                         <p:tgtEl>
-                                          <p:spTgt spid="20"/>
+                                          <p:spTgt spid="22"/>
                                         </p:tgtEl>
                                         <p:attrNameLst>
                                           <p:attrName>ppt_y</p:attrName>
@@ -7242,7 +7587,7 @@
                                       <p:cBhvr additive="base">
                                         <p:cTn id="64" dur="400"/>
                                         <p:tgtEl>
-                                          <p:spTgt spid="20"/>
+                                          <p:spTgt spid="22"/>
                                         </p:tgtEl>
                                         <p:attrNameLst>
                                           <p:attrName>ppt_x</p:attrName>
@@ -7265,16 +7610,16 @@
                                 </p:cTn>
                               </p:par>
                               <p:par>
-                                <p:cTn id="65" presetID="2" presetClass="entr" presetSubtype="8" fill="hold" grpId="0" nodeType="afterEffect">
+                                <p:cTn presetID="2" presetClass="entr" presetSubtype="8" fill="hold" grpId="0" nodeType="afterEffect">
                                   <p:stCondLst>
-                                    <p:cond delay="18000"/>
+                                    <p:cond delay="29000"/>
                                   </p:stCondLst>
                                   <p:childTnLst>
                                     <p:set>
                                       <p:cBhvr>
-                                        <p:cTn id="66" dur="1"/>
-                                        <p:tgtEl>
-                                          <p:spTgt spid="9"/>
+                                        <p:cTn id="65" dur="1"/>
+                                        <p:tgtEl>
+                                          <p:spTgt spid="23"/>
                                         </p:tgtEl>
                                         <p:attrNameLst>
                                           <p:attrName>style.visibility</p:attrName>
@@ -7286,9 +7631,9 @@
                                     </p:set>
                                     <p:anim calcmode="lin" valueType="num">
                                       <p:cBhvr additive="base">
-                                        <p:cTn id="67" dur="400"/>
-                                        <p:tgtEl>
-                                          <p:spTgt spid="9"/>
+                                        <p:cTn id="66" dur="400"/>
+                                        <p:tgtEl>
+                                          <p:spTgt spid="23"/>
                                         </p:tgtEl>
                                         <p:attrNameLst>
                                           <p:attrName>ppt_y</p:attrName>
@@ -7309,352 +7654,7 @@
                                     </p:anim>
                                     <p:anim calcmode="lin" valueType="num">
                                       <p:cBhvr additive="base">
-                                        <p:cTn id="68" dur="400"/>
-                                        <p:tgtEl>
-                                          <p:spTgt spid="9"/>
-                                        </p:tgtEl>
-                                        <p:attrNameLst>
-                                          <p:attrName>ppt_x</p:attrName>
-                                        </p:attrNameLst>
-                                      </p:cBhvr>
-                                      <p:tavLst>
-                                        <p:tav tm="0">
-                                          <p:val>
-                                            <p:strVal val="0-#ppt_w/2"/>
-                                          </p:val>
-                                        </p:tav>
-                                        <p:tav tm="100000">
-                                          <p:val>
-                                            <p:strVal val="#ppt_x"/>
-                                          </p:val>
-                                        </p:tav>
-                                      </p:tavLst>
-                                    </p:anim>
-                                  </p:childTnLst>
-                                </p:cTn>
-                              </p:par>
-                              <p:par>
-                                <p:cTn id="69" presetID="2" presetClass="entr" presetSubtype="8" fill="hold" grpId="0" nodeType="afterEffect">
-                                  <p:stCondLst>
-                                    <p:cond delay="20000"/>
-                                  </p:stCondLst>
-                                  <p:childTnLst>
-                                    <p:set>
-                                      <p:cBhvr>
-                                        <p:cTn id="70" dur="1"/>
-                                        <p:tgtEl>
-                                          <p:spTgt spid="13"/>
-                                        </p:tgtEl>
-                                        <p:attrNameLst>
-                                          <p:attrName>style.visibility</p:attrName>
-                                        </p:attrNameLst>
-                                      </p:cBhvr>
-                                      <p:to>
-                                        <p:strVal val="visible"/>
-                                      </p:to>
-                                    </p:set>
-                                    <p:anim calcmode="lin" valueType="num">
-                                      <p:cBhvr additive="base">
-                                        <p:cTn id="71" dur="400"/>
-                                        <p:tgtEl>
-                                          <p:spTgt spid="13"/>
-                                        </p:tgtEl>
-                                        <p:attrNameLst>
-                                          <p:attrName>ppt_y</p:attrName>
-                                        </p:attrNameLst>
-                                      </p:cBhvr>
-                                      <p:tavLst>
-                                        <p:tav tm="0">
-                                          <p:val>
-                                            <p:strVal val="#ppt_y"/>
-                                          </p:val>
-                                        </p:tav>
-                                        <p:tav tm="100000">
-                                          <p:val>
-                                            <p:strVal val="#ppt_y"/>
-                                          </p:val>
-                                        </p:tav>
-                                      </p:tavLst>
-                                    </p:anim>
-                                    <p:anim calcmode="lin" valueType="num">
-                                      <p:cBhvr additive="base">
-                                        <p:cTn id="72" dur="400"/>
-                                        <p:tgtEl>
-                                          <p:spTgt spid="13"/>
-                                        </p:tgtEl>
-                                        <p:attrNameLst>
-                                          <p:attrName>ppt_x</p:attrName>
-                                        </p:attrNameLst>
-                                      </p:cBhvr>
-                                      <p:tavLst>
-                                        <p:tav tm="0">
-                                          <p:val>
-                                            <p:strVal val="0-#ppt_w/2"/>
-                                          </p:val>
-                                        </p:tav>
-                                        <p:tav tm="100000">
-                                          <p:val>
-                                            <p:strVal val="#ppt_x"/>
-                                          </p:val>
-                                        </p:tav>
-                                      </p:tavLst>
-                                    </p:anim>
-                                  </p:childTnLst>
-                                </p:cTn>
-                              </p:par>
-                              <p:par>
-                                <p:cTn id="73" presetID="2" presetClass="entr" presetSubtype="8" fill="hold" grpId="0" nodeType="afterEffect">
-                                  <p:stCondLst>
-                                    <p:cond delay="22100"/>
-                                  </p:stCondLst>
-                                  <p:childTnLst>
-                                    <p:set>
-                                      <p:cBhvr>
-                                        <p:cTn id="74" dur="1"/>
-                                        <p:tgtEl>
-                                          <p:spTgt spid="17"/>
-                                        </p:tgtEl>
-                                        <p:attrNameLst>
-                                          <p:attrName>style.visibility</p:attrName>
-                                        </p:attrNameLst>
-                                      </p:cBhvr>
-                                      <p:to>
-                                        <p:strVal val="visible"/>
-                                      </p:to>
-                                    </p:set>
-                                    <p:anim calcmode="lin" valueType="num">
-                                      <p:cBhvr additive="base">
-                                        <p:cTn id="75" dur="400"/>
-                                        <p:tgtEl>
-                                          <p:spTgt spid="17"/>
-                                        </p:tgtEl>
-                                        <p:attrNameLst>
-                                          <p:attrName>ppt_y</p:attrName>
-                                        </p:attrNameLst>
-                                      </p:cBhvr>
-                                      <p:tavLst>
-                                        <p:tav tm="0">
-                                          <p:val>
-                                            <p:strVal val="#ppt_y"/>
-                                          </p:val>
-                                        </p:tav>
-                                        <p:tav tm="100000">
-                                          <p:val>
-                                            <p:strVal val="#ppt_y"/>
-                                          </p:val>
-                                        </p:tav>
-                                      </p:tavLst>
-                                    </p:anim>
-                                    <p:anim calcmode="lin" valueType="num">
-                                      <p:cBhvr additive="base">
-                                        <p:cTn id="76" dur="400"/>
-                                        <p:tgtEl>
-                                          <p:spTgt spid="17"/>
-                                        </p:tgtEl>
-                                        <p:attrNameLst>
-                                          <p:attrName>ppt_x</p:attrName>
-                                        </p:attrNameLst>
-                                      </p:cBhvr>
-                                      <p:tavLst>
-                                        <p:tav tm="0">
-                                          <p:val>
-                                            <p:strVal val="0-#ppt_w/2"/>
-                                          </p:val>
-                                        </p:tav>
-                                        <p:tav tm="100000">
-                                          <p:val>
-                                            <p:strVal val="#ppt_x"/>
-                                          </p:val>
-                                        </p:tav>
-                                      </p:tavLst>
-                                    </p:anim>
-                                  </p:childTnLst>
-                                </p:cTn>
-                              </p:par>
-                              <p:par>
-                                <p:cTn id="77" presetID="2" presetClass="entr" presetSubtype="8" fill="hold" grpId="0" nodeType="afterEffect">
-                                  <p:stCondLst>
-                                    <p:cond delay="24300"/>
-                                  </p:stCondLst>
-                                  <p:childTnLst>
-                                    <p:set>
-                                      <p:cBhvr>
-                                        <p:cTn id="78" dur="1"/>
-                                        <p:tgtEl>
-                                          <p:spTgt spid="21"/>
-                                        </p:tgtEl>
-                                        <p:attrNameLst>
-                                          <p:attrName>style.visibility</p:attrName>
-                                        </p:attrNameLst>
-                                      </p:cBhvr>
-                                      <p:to>
-                                        <p:strVal val="visible"/>
-                                      </p:to>
-                                    </p:set>
-                                    <p:anim calcmode="lin" valueType="num">
-                                      <p:cBhvr additive="base">
-                                        <p:cTn id="79" dur="400"/>
-                                        <p:tgtEl>
-                                          <p:spTgt spid="21"/>
-                                        </p:tgtEl>
-                                        <p:attrNameLst>
-                                          <p:attrName>ppt_y</p:attrName>
-                                        </p:attrNameLst>
-                                      </p:cBhvr>
-                                      <p:tavLst>
-                                        <p:tav tm="0">
-                                          <p:val>
-                                            <p:strVal val="#ppt_y"/>
-                                          </p:val>
-                                        </p:tav>
-                                        <p:tav tm="100000">
-                                          <p:val>
-                                            <p:strVal val="#ppt_y"/>
-                                          </p:val>
-                                        </p:tav>
-                                      </p:tavLst>
-                                    </p:anim>
-                                    <p:anim calcmode="lin" valueType="num">
-                                      <p:cBhvr additive="base">
-                                        <p:cTn id="80" dur="400"/>
-                                        <p:tgtEl>
-                                          <p:spTgt spid="21"/>
-                                        </p:tgtEl>
-                                        <p:attrNameLst>
-                                          <p:attrName>ppt_x</p:attrName>
-                                        </p:attrNameLst>
-                                      </p:cBhvr>
-                                      <p:tavLst>
-                                        <p:tav tm="0">
-                                          <p:val>
-                                            <p:strVal val="0-#ppt_w/2"/>
-                                          </p:val>
-                                        </p:tav>
-                                        <p:tav tm="100000">
-                                          <p:val>
-                                            <p:strVal val="#ppt_x"/>
-                                          </p:val>
-                                        </p:tav>
-                                      </p:tavLst>
-                                    </p:anim>
-                                  </p:childTnLst>
-                                </p:cTn>
-                              </p:par>
-                              <p:par>
-                                <p:cTn id="81" presetID="2" presetClass="entr" presetSubtype="8" fill="hold" grpId="0" nodeType="afterEffect">
-                                  <p:stCondLst>
-                                    <p:cond delay="26600"/>
-                                  </p:stCondLst>
-                                  <p:childTnLst>
-                                    <p:set>
-                                      <p:cBhvr>
-                                        <p:cTn id="82" dur="1"/>
-                                        <p:tgtEl>
-                                          <p:spTgt spid="22"/>
-                                        </p:tgtEl>
-                                        <p:attrNameLst>
-                                          <p:attrName>style.visibility</p:attrName>
-                                        </p:attrNameLst>
-                                      </p:cBhvr>
-                                      <p:to>
-                                        <p:strVal val="visible"/>
-                                      </p:to>
-                                    </p:set>
-                                    <p:anim calcmode="lin" valueType="num">
-                                      <p:cBhvr additive="base">
-                                        <p:cTn id="83" dur="400"/>
-                                        <p:tgtEl>
-                                          <p:spTgt spid="22"/>
-                                        </p:tgtEl>
-                                        <p:attrNameLst>
-                                          <p:attrName>ppt_y</p:attrName>
-                                        </p:attrNameLst>
-                                      </p:cBhvr>
-                                      <p:tavLst>
-                                        <p:tav tm="0">
-                                          <p:val>
-                                            <p:strVal val="#ppt_y"/>
-                                          </p:val>
-                                        </p:tav>
-                                        <p:tav tm="100000">
-                                          <p:val>
-                                            <p:strVal val="#ppt_y"/>
-                                          </p:val>
-                                        </p:tav>
-                                      </p:tavLst>
-                                    </p:anim>
-                                    <p:anim calcmode="lin" valueType="num">
-                                      <p:cBhvr additive="base">
-                                        <p:cTn id="84" dur="400"/>
-                                        <p:tgtEl>
-                                          <p:spTgt spid="22"/>
-                                        </p:tgtEl>
-                                        <p:attrNameLst>
-                                          <p:attrName>ppt_x</p:attrName>
-                                        </p:attrNameLst>
-                                      </p:cBhvr>
-                                      <p:tavLst>
-                                        <p:tav tm="0">
-                                          <p:val>
-                                            <p:strVal val="0-#ppt_w/2"/>
-                                          </p:val>
-                                        </p:tav>
-                                        <p:tav tm="100000">
-                                          <p:val>
-                                            <p:strVal val="#ppt_x"/>
-                                          </p:val>
-                                        </p:tav>
-                                      </p:tavLst>
-                                    </p:anim>
-                                  </p:childTnLst>
-                                </p:cTn>
-                              </p:par>
-                              <p:par>
-                                <p:cTn id="85" presetID="2" presetClass="entr" presetSubtype="8" fill="hold" grpId="0" nodeType="afterEffect">
-                                  <p:stCondLst>
-                                    <p:cond delay="29000"/>
-                                  </p:stCondLst>
-                                  <p:childTnLst>
-                                    <p:set>
-                                      <p:cBhvr>
-                                        <p:cTn id="86" dur="1"/>
-                                        <p:tgtEl>
-                                          <p:spTgt spid="23"/>
-                                        </p:tgtEl>
-                                        <p:attrNameLst>
-                                          <p:attrName>style.visibility</p:attrName>
-                                        </p:attrNameLst>
-                                      </p:cBhvr>
-                                      <p:to>
-                                        <p:strVal val="visible"/>
-                                      </p:to>
-                                    </p:set>
-                                    <p:anim calcmode="lin" valueType="num">
-                                      <p:cBhvr additive="base">
-                                        <p:cTn id="87" dur="400"/>
-                                        <p:tgtEl>
-                                          <p:spTgt spid="23"/>
-                                        </p:tgtEl>
-                                        <p:attrNameLst>
-                                          <p:attrName>ppt_y</p:attrName>
-                                        </p:attrNameLst>
-                                      </p:cBhvr>
-                                      <p:tavLst>
-                                        <p:tav tm="0">
-                                          <p:val>
-                                            <p:strVal val="#ppt_y"/>
-                                          </p:val>
-                                        </p:tav>
-                                        <p:tav tm="100000">
-                                          <p:val>
-                                            <p:strVal val="#ppt_y"/>
-                                          </p:val>
-                                        </p:tav>
-                                      </p:tavLst>
-                                    </p:anim>
-                                    <p:anim calcmode="lin" valueType="num">
-                                      <p:cBhvr additive="base">
-                                        <p:cTn id="88" dur="400"/>
+                                        <p:cTn id="67" dur="400"/>
                                         <p:tgtEl>
                                           <p:spTgt spid="23"/>
                                         </p:tgtEl>
@@ -8100,14 +8100,14 @@
                             </p:stCondLst>
                             <p:childTnLst>
                               <p:par>
-                                <p:cTn id="5" presetID="10" presetClass="entr" presetSubtype="0" fill="hold" grpId="0" nodeType="afterEffect">
+                                <p:cTn presetID="10" presetClass="entr" presetSubtype="0" fill="hold" grpId="0" nodeType="afterEffect">
                                   <p:stCondLst>
                                     <p:cond delay="0"/>
                                   </p:stCondLst>
                                   <p:childTnLst>
                                     <p:set>
                                       <p:cBhvr>
-                                        <p:cTn id="6" dur="1"/>
+                                        <p:cTn id="5" dur="1"/>
                                         <p:tgtEl>
                                           <p:spTgt spid="5"/>
                                         </p:tgtEl>
@@ -8121,7 +8121,7 @@
                                     </p:set>
                                     <p:animEffect transition="in" filter="fade">
                                       <p:cBhvr>
-                                        <p:cTn id="7" dur="450"/>
+                                        <p:cTn id="6" dur="450"/>
                                         <p:tgtEl>
                                           <p:spTgt spid="5"/>
                                         </p:tgtEl>
@@ -8131,14 +8131,14 @@
                                 </p:cTn>
                               </p:par>
                               <p:par>
-                                <p:cTn id="8" presetID="10" presetClass="entr" presetSubtype="0" fill="hold" grpId="0" nodeType="afterEffect">
+                                <p:cTn presetID="10" presetClass="entr" presetSubtype="0" fill="hold" grpId="0" nodeType="afterEffect">
                                   <p:stCondLst>
                                     <p:cond delay="450"/>
                                   </p:stCondLst>
                                   <p:childTnLst>
                                     <p:set>
                                       <p:cBhvr>
-                                        <p:cTn id="9" dur="1"/>
+                                        <p:cTn id="7" dur="1"/>
                                         <p:tgtEl>
                                           <p:spTgt spid="6"/>
                                         </p:tgtEl>
@@ -8152,7 +8152,7 @@
                                     </p:set>
                                     <p:animEffect transition="in" filter="fade">
                                       <p:cBhvr>
-                                        <p:cTn id="10" dur="350"/>
+                                        <p:cTn id="8" dur="350"/>
                                         <p:tgtEl>
                                           <p:spTgt spid="6"/>
                                         </p:tgtEl>
@@ -8162,14 +8162,14 @@
                                 </p:cTn>
                               </p:par>
                               <p:par>
-                                <p:cTn id="11" presetID="22" presetClass="entr" presetSubtype="8" fill="hold" grpId="0" nodeType="afterEffect">
+                                <p:cTn presetID="22" presetClass="entr" presetSubtype="8" fill="hold" grpId="0" nodeType="afterEffect">
                                   <p:stCondLst>
                                     <p:cond delay="800"/>
                                   </p:stCondLst>
                                   <p:childTnLst>
                                     <p:set>
                                       <p:cBhvr>
-                                        <p:cTn id="12" dur="1"/>
+                                        <p:cTn id="9" dur="1"/>
                                         <p:tgtEl>
                                           <p:spTgt spid="8"/>
                                         </p:tgtEl>
@@ -8183,7 +8183,7 @@
                                     </p:set>
                                     <p:animEffect transition="in" filter="wipe(right)">
                                       <p:cBhvr>
-                                        <p:cTn id="13" dur="700"/>
+                                        <p:cTn id="10" dur="700"/>
                                         <p:tgtEl>
                                           <p:spTgt spid="8"/>
                                         </p:tgtEl>
@@ -8223,7 +8223,9 @@
       <p:bldP spid="5" grpId="0"/>
       <p:bldP spid="6" grpId="0"/>
       <p:bldGraphic spid="8" grpId="0">
-        <p:bldAsOne/>
+        <p:bldSub>
+          <a:bldChart bld="category" animBg="1"/>
+        </p:bldSub>
       </p:bldGraphic>
     </p:bldLst>
   </p:timing>
@@ -8770,14 +8772,14 @@
                             </p:stCondLst>
                             <p:childTnLst>
                               <p:par>
-                                <p:cTn id="5" presetID="10" presetClass="entr" presetSubtype="0" fill="hold" grpId="0" nodeType="afterEffect">
+                                <p:cTn presetID="10" presetClass="entr" presetSubtype="0" fill="hold" grpId="0" nodeType="afterEffect">
                                   <p:stCondLst>
                                     <p:cond delay="0"/>
                                   </p:stCondLst>
                                   <p:childTnLst>
                                     <p:set>
                                       <p:cBhvr>
-                                        <p:cTn id="6" dur="1"/>
+                                        <p:cTn id="5" dur="1"/>
                                         <p:tgtEl>
                                           <p:spTgt spid="5"/>
                                         </p:tgtEl>
@@ -8791,7 +8793,7 @@
                                     </p:set>
                                     <p:animEffect transition="in" filter="fade">
                                       <p:cBhvr>
-                                        <p:cTn id="7" dur="400"/>
+                                        <p:cTn id="6" dur="400"/>
                                         <p:tgtEl>
                                           <p:spTgt spid="5"/>
                                         </p:tgtEl>
@@ -8801,14 +8803,14 @@
                                 </p:cTn>
                               </p:par>
                               <p:par>
-                                <p:cTn id="8" presetID="10" presetClass="entr" presetSubtype="0" fill="hold" grpId="0" nodeType="afterEffect">
+                                <p:cTn presetID="10" presetClass="entr" presetSubtype="0" fill="hold" grpId="0" nodeType="afterEffect">
                                   <p:stCondLst>
                                     <p:cond delay="550"/>
                                   </p:stCondLst>
                                   <p:childTnLst>
                                     <p:set>
                                       <p:cBhvr>
-                                        <p:cTn id="9" dur="1"/>
+                                        <p:cTn id="7" dur="1"/>
                                         <p:tgtEl>
                                           <p:spTgt spid="2"/>
                                         </p:tgtEl>
@@ -8822,7 +8824,7 @@
                                     </p:set>
                                     <p:animEffect transition="in" filter="fade">
                                       <p:cBhvr>
-                                        <p:cTn id="10" dur="400"/>
+                                        <p:cTn id="8" dur="400"/>
                                         <p:tgtEl>
                                           <p:spTgt spid="2"/>
                                         </p:tgtEl>
@@ -8832,14 +8834,14 @@
                                 </p:cTn>
                               </p:par>
                               <p:par>
-                                <p:cTn id="11" presetID="10" presetClass="entr" presetSubtype="0" fill="hold" grpId="0" nodeType="afterEffect">
+                                <p:cTn presetID="10" presetClass="entr" presetSubtype="0" fill="hold" grpId="0" nodeType="afterEffect">
                                   <p:stCondLst>
                                     <p:cond delay="1250"/>
                                   </p:stCondLst>
                                   <p:childTnLst>
                                     <p:set>
                                       <p:cBhvr>
-                                        <p:cTn id="12" dur="1"/>
+                                        <p:cTn id="9" dur="1"/>
                                         <p:tgtEl>
                                           <p:spTgt spid="3"/>
                                         </p:tgtEl>
@@ -8853,7 +8855,7 @@
                                     </p:set>
                                     <p:animEffect transition="in" filter="fade">
                                       <p:cBhvr>
-                                        <p:cTn id="13" dur="400"/>
+                                        <p:cTn id="10" dur="400"/>
                                         <p:tgtEl>
                                           <p:spTgt spid="3"/>
                                         </p:tgtEl>
@@ -8863,14 +8865,14 @@
                                 </p:cTn>
                               </p:par>
                               <p:par>
-                                <p:cTn id="14" presetID="10" presetClass="entr" presetSubtype="0" fill="hold" grpId="0" nodeType="afterEffect">
+                                <p:cTn presetID="10" presetClass="entr" presetSubtype="0" fill="hold" grpId="0" nodeType="afterEffect">
                                   <p:stCondLst>
                                     <p:cond delay="2100"/>
                                   </p:stCondLst>
                                   <p:childTnLst>
                                     <p:set>
                                       <p:cBhvr>
-                                        <p:cTn id="15" dur="1"/>
+                                        <p:cTn id="11" dur="1"/>
                                         <p:tgtEl>
                                           <p:spTgt spid="8"/>
                                         </p:tgtEl>
@@ -8884,7 +8886,7 @@
                                     </p:set>
                                     <p:animEffect transition="in" filter="fade">
                                       <p:cBhvr>
-                                        <p:cTn id="16" dur="400"/>
+                                        <p:cTn id="12" dur="400"/>
                                         <p:tgtEl>
                                           <p:spTgt spid="8"/>
                                         </p:tgtEl>
@@ -8894,14 +8896,14 @@
                                 </p:cTn>
                               </p:par>
                               <p:par>
-                                <p:cTn id="17" presetID="10" presetClass="entr" presetSubtype="0" fill="hold" grpId="0" nodeType="afterEffect">
+                                <p:cTn presetID="10" presetClass="entr" presetSubtype="0" fill="hold" grpId="0" nodeType="afterEffect">
                                   <p:stCondLst>
                                     <p:cond delay="3100"/>
                                   </p:stCondLst>
                                   <p:childTnLst>
                                     <p:set>
                                       <p:cBhvr>
-                                        <p:cTn id="18" dur="1"/>
+                                        <p:cTn id="13" dur="1"/>
                                         <p:tgtEl>
                                           <p:spTgt spid="9"/>
                                         </p:tgtEl>
@@ -8915,7 +8917,7 @@
                                     </p:set>
                                     <p:animEffect transition="in" filter="fade">
                                       <p:cBhvr>
-                                        <p:cTn id="19" dur="400"/>
+                                        <p:cTn id="14" dur="400"/>
                                         <p:tgtEl>
                                           <p:spTgt spid="9"/>
                                         </p:tgtEl>
@@ -8925,14 +8927,14 @@
                                 </p:cTn>
                               </p:par>
                               <p:par>
-                                <p:cTn id="20" presetID="10" presetClass="entr" presetSubtype="0" fill="hold" grpId="0" nodeType="afterEffect">
+                                <p:cTn presetID="10" presetClass="entr" presetSubtype="0" fill="hold" grpId="0" nodeType="afterEffect">
                                   <p:stCondLst>
                                     <p:cond delay="4250"/>
                                   </p:stCondLst>
                                   <p:childTnLst>
                                     <p:set>
                                       <p:cBhvr>
-                                        <p:cTn id="21" dur="1"/>
+                                        <p:cTn id="15" dur="1"/>
                                         <p:tgtEl>
                                           <p:spTgt spid="6"/>
                                         </p:tgtEl>
@@ -8946,7 +8948,7 @@
                                     </p:set>
                                     <p:animEffect transition="in" filter="fade">
                                       <p:cBhvr>
-                                        <p:cTn id="22" dur="400"/>
+                                        <p:cTn id="16" dur="400"/>
                                         <p:tgtEl>
                                           <p:spTgt spid="6"/>
                                         </p:tgtEl>
@@ -8956,14 +8958,14 @@
                                 </p:cTn>
                               </p:par>
                               <p:par>
-                                <p:cTn id="23" presetID="10" presetClass="entr" presetSubtype="0" fill="hold" grpId="0" nodeType="afterEffect">
+                                <p:cTn presetID="10" presetClass="entr" presetSubtype="0" fill="hold" grpId="0" nodeType="afterEffect">
                                   <p:stCondLst>
                                     <p:cond delay="5550"/>
                                   </p:stCondLst>
                                   <p:childTnLst>
                                     <p:set>
                                       <p:cBhvr>
-                                        <p:cTn id="24" dur="1"/>
+                                        <p:cTn id="17" dur="1"/>
                                         <p:tgtEl>
                                           <p:spTgt spid="10"/>
                                         </p:tgtEl>
@@ -8977,7 +8979,7 @@
                                     </p:set>
                                     <p:animEffect transition="in" filter="fade">
                                       <p:cBhvr>
-                                        <p:cTn id="25" dur="400"/>
+                                        <p:cTn id="18" dur="400"/>
                                         <p:tgtEl>
                                           <p:spTgt spid="10"/>
                                         </p:tgtEl>
@@ -8987,14 +8989,14 @@
                                 </p:cTn>
                               </p:par>
                               <p:par>
-                                <p:cTn id="26" presetID="10" presetClass="entr" presetSubtype="0" fill="hold" grpId="0" nodeType="afterEffect">
+                                <p:cTn presetID="10" presetClass="entr" presetSubtype="0" fill="hold" grpId="0" nodeType="afterEffect">
                                   <p:stCondLst>
                                     <p:cond delay="7000"/>
                                   </p:stCondLst>
                                   <p:childTnLst>
                                     <p:set>
                                       <p:cBhvr>
-                                        <p:cTn id="27" dur="1"/>
+                                        <p:cTn id="19" dur="1"/>
                                         <p:tgtEl>
                                           <p:spTgt spid="7"/>
                                         </p:tgtEl>
@@ -9008,7 +9010,7 @@
                                     </p:set>
                                     <p:animEffect transition="in" filter="fade">
                                       <p:cBhvr>
-                                        <p:cTn id="28" dur="400"/>
+                                        <p:cTn id="20" dur="400"/>
                                         <p:tgtEl>
                                           <p:spTgt spid="7"/>
                                         </p:tgtEl>
@@ -9018,14 +9020,14 @@
                                 </p:cTn>
                               </p:par>
                               <p:par>
-                                <p:cTn id="29" presetID="10" presetClass="entr" presetSubtype="0" fill="hold" grpId="0" nodeType="afterEffect">
+                                <p:cTn presetID="10" presetClass="entr" presetSubtype="0" fill="hold" grpId="0" nodeType="afterEffect">
                                   <p:stCondLst>
                                     <p:cond delay="8600"/>
                                   </p:stCondLst>
                                   <p:childTnLst>
                                     <p:set>
                                       <p:cBhvr>
-                                        <p:cTn id="30" dur="1"/>
+                                        <p:cTn id="21" dur="1"/>
                                         <p:tgtEl>
                                           <p:spTgt spid="11"/>
                                         </p:tgtEl>
@@ -9039,7 +9041,7 @@
                                     </p:set>
                                     <p:animEffect transition="in" filter="fade">
                                       <p:cBhvr>
-                                        <p:cTn id="31" dur="400"/>
+                                        <p:cTn id="22" dur="400"/>
                                         <p:tgtEl>
                                           <p:spTgt spid="11"/>
                                         </p:tgtEl>
@@ -9049,14 +9051,14 @@
                                 </p:cTn>
                               </p:par>
                               <p:par>
-                                <p:cTn id="32" presetID="10" presetClass="entr" presetSubtype="0" fill="hold" grpId="0" nodeType="afterEffect">
+                                <p:cTn presetID="10" presetClass="entr" presetSubtype="0" fill="hold" grpId="0" nodeType="afterEffect">
                                   <p:stCondLst>
                                     <p:cond delay="10350"/>
                                   </p:stCondLst>
                                   <p:childTnLst>
                                     <p:set>
                                       <p:cBhvr>
-                                        <p:cTn id="33" dur="1"/>
+                                        <p:cTn id="23" dur="1"/>
                                         <p:tgtEl>
                                           <p:spTgt spid="12"/>
                                         </p:tgtEl>
@@ -9070,7 +9072,7 @@
                                     </p:set>
                                     <p:animEffect transition="in" filter="fade">
                                       <p:cBhvr>
-                                        <p:cTn id="34" dur="400"/>
+                                        <p:cTn id="24" dur="400"/>
                                         <p:tgtEl>
                                           <p:spTgt spid="12"/>
                                         </p:tgtEl>
@@ -9080,14 +9082,14 @@
                                 </p:cTn>
                               </p:par>
                               <p:par>
-                                <p:cTn id="35" presetID="10" presetClass="entr" presetSubtype="0" fill="hold" grpId="0" nodeType="afterEffect">
+                                <p:cTn presetID="10" presetClass="entr" presetSubtype="0" fill="hold" grpId="0" nodeType="afterEffect">
                                   <p:stCondLst>
                                     <p:cond delay="12250"/>
                                   </p:stCondLst>
                                   <p:childTnLst>
                                     <p:set>
                                       <p:cBhvr>
-                                        <p:cTn id="36" dur="1"/>
+                                        <p:cTn id="25" dur="1"/>
                                         <p:tgtEl>
                                           <p:spTgt spid="13"/>
                                         </p:tgtEl>
@@ -9101,7 +9103,7 @@
                                     </p:set>
                                     <p:animEffect transition="in" filter="fade">
                                       <p:cBhvr>
-                                        <p:cTn id="37" dur="400"/>
+                                        <p:cTn id="26" dur="400"/>
                                         <p:tgtEl>
                                           <p:spTgt spid="13"/>
                                         </p:tgtEl>
@@ -9111,14 +9113,14 @@
                                 </p:cTn>
                               </p:par>
                               <p:par>
-                                <p:cTn id="38" presetID="10" presetClass="entr" presetSubtype="0" fill="hold" grpId="0" nodeType="afterEffect">
+                                <p:cTn presetID="10" presetClass="entr" presetSubtype="0" fill="hold" grpId="0" nodeType="afterEffect">
                                   <p:stCondLst>
                                     <p:cond delay="14300"/>
                                   </p:stCondLst>
                                   <p:childTnLst>
                                     <p:set>
                                       <p:cBhvr>
-                                        <p:cTn id="39" dur="1"/>
+                                        <p:cTn id="27" dur="1"/>
                                         <p:tgtEl>
                                           <p:spTgt spid="14"/>
                                         </p:tgtEl>
@@ -9132,7 +9134,7 @@
                                     </p:set>
                                     <p:animEffect transition="in" filter="fade">
                                       <p:cBhvr>
-                                        <p:cTn id="40" dur="400"/>
+                                        <p:cTn id="28" dur="400"/>
                                         <p:tgtEl>
                                           <p:spTgt spid="14"/>
                                         </p:tgtEl>
@@ -9142,14 +9144,14 @@
                                 </p:cTn>
                               </p:par>
                               <p:par>
-                                <p:cTn id="41" presetID="10" presetClass="entr" presetSubtype="0" fill="hold" grpId="0" nodeType="afterEffect">
+                                <p:cTn presetID="10" presetClass="entr" presetSubtype="0" fill="hold" grpId="0" nodeType="afterEffect">
                                   <p:stCondLst>
                                     <p:cond delay="16500"/>
                                   </p:stCondLst>
                                   <p:childTnLst>
                                     <p:set>
                                       <p:cBhvr>
-                                        <p:cTn id="42" dur="1"/>
+                                        <p:cTn id="29" dur="1"/>
                                         <p:tgtEl>
                                           <p:spTgt spid="15"/>
                                         </p:tgtEl>
@@ -9163,7 +9165,7 @@
                                     </p:set>
                                     <p:animEffect transition="in" filter="fade">
                                       <p:cBhvr>
-                                        <p:cTn id="43" dur="400"/>
+                                        <p:cTn id="30" dur="400"/>
                                         <p:tgtEl>
                                           <p:spTgt spid="15"/>
                                         </p:tgtEl>
@@ -9200,9 +9202,7 @@
       </p:par>
     </p:tnLst>
     <p:bldLst>
-      <p:bldGraphic spid="5" grpId="0">
-        <p:bldAsOne/>
-      </p:bldGraphic>
+      <p:bldP spid="5" grpId="0"/>
       <p:bldP spid="2" grpId="0"/>
       <p:bldP spid="3" grpId="0"/>
       <p:bldP spid="8" grpId="0"/>
@@ -9643,14 +9643,14 @@
                             </p:stCondLst>
                             <p:childTnLst>
                               <p:par>
-                                <p:cTn id="5" presetID="10" presetClass="entr" presetSubtype="0" fill="hold" grpId="0" nodeType="afterEffect">
+                                <p:cTn presetID="10" presetClass="entr" presetSubtype="0" fill="hold" grpId="0" nodeType="afterEffect">
                                   <p:stCondLst>
                                     <p:cond delay="0"/>
                                   </p:stCondLst>
                                   <p:childTnLst>
                                     <p:set>
                                       <p:cBhvr>
-                                        <p:cTn id="6" dur="1"/>
+                                        <p:cTn id="5" dur="1"/>
                                         <p:tgtEl>
                                           <p:spTgt spid="9"/>
                                         </p:tgtEl>
@@ -9664,7 +9664,7 @@
                                     </p:set>
                                     <p:animEffect transition="in" filter="fade">
                                       <p:cBhvr>
-                                        <p:cTn id="7" dur="400"/>
+                                        <p:cTn id="6" dur="400"/>
                                         <p:tgtEl>
                                           <p:spTgt spid="9"/>
                                         </p:tgtEl>
@@ -9674,14 +9674,14 @@
                                 </p:cTn>
                               </p:par>
                               <p:par>
-                                <p:cTn id="8" presetID="10" presetClass="entr" presetSubtype="0" fill="hold" grpId="0" nodeType="afterEffect">
+                                <p:cTn presetID="10" presetClass="entr" presetSubtype="0" fill="hold" grpId="0" nodeType="afterEffect">
                                   <p:stCondLst>
                                     <p:cond delay="520"/>
                                   </p:stCondLst>
                                   <p:childTnLst>
                                     <p:set>
                                       <p:cBhvr>
-                                        <p:cTn id="9" dur="1"/>
+                                        <p:cTn id="7" dur="1"/>
                                         <p:tgtEl>
                                           <p:spTgt spid="2"/>
                                         </p:tgtEl>
@@ -9695,7 +9695,7 @@
                                     </p:set>
                                     <p:animEffect transition="in" filter="fade">
                                       <p:cBhvr>
-                                        <p:cTn id="10" dur="400"/>
+                                        <p:cTn id="8" dur="400"/>
                                         <p:tgtEl>
                                           <p:spTgt spid="2"/>
                                         </p:tgtEl>
@@ -9705,14 +9705,14 @@
                                 </p:cTn>
                               </p:par>
                               <p:par>
-                                <p:cTn id="11" presetID="10" presetClass="entr" presetSubtype="0" fill="hold" grpId="0" nodeType="afterEffect">
+                                <p:cTn presetID="10" presetClass="entr" presetSubtype="0" fill="hold" grpId="0" nodeType="afterEffect">
                                   <p:stCondLst>
                                     <p:cond delay="1160"/>
                                   </p:stCondLst>
                                   <p:childTnLst>
                                     <p:set>
                                       <p:cBhvr>
-                                        <p:cTn id="12" dur="1"/>
+                                        <p:cTn id="9" dur="1"/>
                                         <p:tgtEl>
                                           <p:spTgt spid="3"/>
                                         </p:tgtEl>
@@ -9726,7 +9726,7 @@
                                     </p:set>
                                     <p:animEffect transition="in" filter="fade">
                                       <p:cBhvr>
-                                        <p:cTn id="13" dur="400"/>
+                                        <p:cTn id="10" dur="400"/>
                                         <p:tgtEl>
                                           <p:spTgt spid="3"/>
                                         </p:tgtEl>
@@ -9736,14 +9736,14 @@
                                 </p:cTn>
                               </p:par>
                               <p:par>
-                                <p:cTn id="14" presetID="10" presetClass="entr" presetSubtype="0" fill="hold" grpId="0" nodeType="afterEffect">
+                                <p:cTn presetID="10" presetClass="entr" presetSubtype="0" fill="hold" grpId="0" nodeType="afterEffect">
                                   <p:stCondLst>
                                     <p:cond delay="1920"/>
                                   </p:stCondLst>
                                   <p:childTnLst>
                                     <p:set>
                                       <p:cBhvr>
-                                        <p:cTn id="15" dur="1"/>
+                                        <p:cTn id="11" dur="1"/>
                                         <p:tgtEl>
                                           <p:spTgt spid="5"/>
                                         </p:tgtEl>
@@ -9757,7 +9757,7 @@
                                     </p:set>
                                     <p:animEffect transition="in" filter="fade">
                                       <p:cBhvr>
-                                        <p:cTn id="16" dur="400"/>
+                                        <p:cTn id="12" dur="400"/>
                                         <p:tgtEl>
                                           <p:spTgt spid="5"/>
                                         </p:tgtEl>
@@ -9767,14 +9767,14 @@
                                 </p:cTn>
                               </p:par>
                               <p:par>
-                                <p:cTn id="17" presetID="10" presetClass="entr" presetSubtype="0" fill="hold" grpId="0" nodeType="afterEffect">
+                                <p:cTn presetID="10" presetClass="entr" presetSubtype="0" fill="hold" grpId="0" nodeType="afterEffect">
                                   <p:stCondLst>
                                     <p:cond delay="2800"/>
                                   </p:stCondLst>
                                   <p:childTnLst>
                                     <p:set>
                                       <p:cBhvr>
-                                        <p:cTn id="18" dur="1"/>
+                                        <p:cTn id="13" dur="1"/>
                                         <p:tgtEl>
                                           <p:spTgt spid="6"/>
                                         </p:tgtEl>
@@ -9788,7 +9788,7 @@
                                     </p:set>
                                     <p:animEffect transition="in" filter="fade">
                                       <p:cBhvr>
-                                        <p:cTn id="19" dur="400"/>
+                                        <p:cTn id="14" dur="400"/>
                                         <p:tgtEl>
                                           <p:spTgt spid="6"/>
                                         </p:tgtEl>
@@ -9798,14 +9798,14 @@
                                 </p:cTn>
                               </p:par>
                               <p:par>
-                                <p:cTn id="20" presetID="10" presetClass="entr" presetSubtype="0" fill="hold" grpId="0" nodeType="afterEffect">
+                                <p:cTn presetID="10" presetClass="entr" presetSubtype="0" fill="hold" grpId="0" nodeType="afterEffect">
                                   <p:stCondLst>
                                     <p:cond delay="3800"/>
                                   </p:stCondLst>
                                   <p:childTnLst>
                                     <p:set>
                                       <p:cBhvr>
-                                        <p:cTn id="21" dur="1"/>
+                                        <p:cTn id="15" dur="1"/>
                                         <p:tgtEl>
                                           <p:spTgt spid="7"/>
                                         </p:tgtEl>
@@ -9819,7 +9819,7 @@
                                     </p:set>
                                     <p:animEffect transition="in" filter="fade">
                                       <p:cBhvr>
-                                        <p:cTn id="22" dur="400"/>
+                                        <p:cTn id="16" dur="400"/>
                                         <p:tgtEl>
                                           <p:spTgt spid="7"/>
                                         </p:tgtEl>
@@ -9829,14 +9829,14 @@
                                 </p:cTn>
                               </p:par>
                               <p:par>
-                                <p:cTn id="23" presetID="10" presetClass="entr" presetSubtype="0" fill="hold" grpId="0" nodeType="afterEffect">
+                                <p:cTn presetID="10" presetClass="entr" presetSubtype="0" fill="hold" grpId="0" nodeType="afterEffect">
                                   <p:stCondLst>
                                     <p:cond delay="4920"/>
                                   </p:stCondLst>
                                   <p:childTnLst>
                                     <p:set>
                                       <p:cBhvr>
-                                        <p:cTn id="24" dur="1"/>
+                                        <p:cTn id="17" dur="1"/>
                                         <p:tgtEl>
                                           <p:spTgt spid="8"/>
                                         </p:tgtEl>
@@ -9850,7 +9850,7 @@
                                     </p:set>
                                     <p:animEffect transition="in" filter="fade">
                                       <p:cBhvr>
-                                        <p:cTn id="25" dur="400"/>
+                                        <p:cTn id="18" dur="400"/>
                                         <p:tgtEl>
                                           <p:spTgt spid="8"/>
                                         </p:tgtEl>
@@ -9860,14 +9860,14 @@
                                 </p:cTn>
                               </p:par>
                               <p:par>
-                                <p:cTn id="26" presetID="10" presetClass="entr" presetSubtype="0" fill="hold" grpId="0" nodeType="afterEffect">
+                                <p:cTn presetID="10" presetClass="entr" presetSubtype="0" fill="hold" grpId="0" nodeType="afterEffect">
                                   <p:stCondLst>
                                     <p:cond delay="6160"/>
                                   </p:stCondLst>
                                   <p:childTnLst>
                                     <p:set>
                                       <p:cBhvr>
-                                        <p:cTn id="27" dur="1"/>
+                                        <p:cTn id="19" dur="1"/>
                                         <p:tgtEl>
                                           <p:spTgt spid="10"/>
                                         </p:tgtEl>
@@ -9881,7 +9881,7 @@
                                     </p:set>
                                     <p:animEffect transition="in" filter="fade">
                                       <p:cBhvr>
-                                        <p:cTn id="28" dur="400"/>
+                                        <p:cTn id="20" dur="400"/>
                                         <p:tgtEl>
                                           <p:spTgt spid="10"/>
                                         </p:tgtEl>
@@ -9891,14 +9891,14 @@
                                 </p:cTn>
                               </p:par>
                               <p:par>
-                                <p:cTn id="29" presetID="10" presetClass="entr" presetSubtype="0" fill="hold" grpId="0" nodeType="afterEffect">
+                                <p:cTn presetID="10" presetClass="entr" presetSubtype="0" fill="hold" grpId="0" nodeType="afterEffect">
                                   <p:stCondLst>
                                     <p:cond delay="7520"/>
                                   </p:stCondLst>
                                   <p:childTnLst>
                                     <p:set>
                                       <p:cBhvr>
-                                        <p:cTn id="30" dur="1"/>
+                                        <p:cTn id="21" dur="1"/>
                                         <p:tgtEl>
                                           <p:spTgt spid="11"/>
                                         </p:tgtEl>
@@ -9912,7 +9912,7 @@
                                     </p:set>
                                     <p:animEffect transition="in" filter="fade">
                                       <p:cBhvr>
-                                        <p:cTn id="31" dur="400"/>
+                                        <p:cTn id="22" dur="400"/>
                                         <p:tgtEl>
                                           <p:spTgt spid="11"/>
                                         </p:tgtEl>
@@ -9922,14 +9922,14 @@
                                 </p:cTn>
                               </p:par>
                               <p:par>
-                                <p:cTn id="32" presetID="10" presetClass="entr" presetSubtype="0" fill="hold" grpId="0" nodeType="afterEffect">
+                                <p:cTn presetID="10" presetClass="entr" presetSubtype="0" fill="hold" grpId="0" nodeType="afterEffect">
                                   <p:stCondLst>
                                     <p:cond delay="9000"/>
                                   </p:stCondLst>
                                   <p:childTnLst>
                                     <p:set>
                                       <p:cBhvr>
-                                        <p:cTn id="33" dur="1"/>
+                                        <p:cTn id="23" dur="1"/>
                                         <p:tgtEl>
                                           <p:spTgt spid="12"/>
                                         </p:tgtEl>
@@ -9943,7 +9943,7 @@
                                     </p:set>
                                     <p:animEffect transition="in" filter="fade">
                                       <p:cBhvr>
-                                        <p:cTn id="34" dur="400"/>
+                                        <p:cTn id="24" dur="400"/>
                                         <p:tgtEl>
                                           <p:spTgt spid="12"/>
                                         </p:tgtEl>
@@ -9980,9 +9980,7 @@
       </p:par>
     </p:tnLst>
     <p:bldLst>
-      <p:bldGraphic spid="9" grpId="0">
-        <p:bldAsOne/>
-      </p:bldGraphic>
+      <p:bldP spid="9" grpId="0"/>
       <p:bldP spid="2" grpId="0"/>
       <p:bldP spid="3" grpId="0"/>
       <p:bldP spid="5" grpId="0"/>
@@ -10723,14 +10721,14 @@
                             </p:stCondLst>
                             <p:childTnLst>
                               <p:par>
-                                <p:cTn id="5" presetID="10" presetClass="entr" presetSubtype="0" fill="hold" grpId="0" nodeType="afterEffect">
+                                <p:cTn presetID="10" presetClass="entr" presetSubtype="0" fill="hold" grpId="0" nodeType="afterEffect">
                                   <p:stCondLst>
                                     <p:cond delay="0"/>
                                   </p:stCondLst>
                                   <p:childTnLst>
                                     <p:set>
                                       <p:cBhvr>
-                                        <p:cTn id="6" dur="1"/>
+                                        <p:cTn id="5" dur="1"/>
                                         <p:tgtEl>
                                           <p:spTgt spid="2"/>
                                         </p:tgtEl>
@@ -10744,7 +10742,7 @@
                                     </p:set>
                                     <p:animEffect transition="in" filter="fade">
                                       <p:cBhvr>
-                                        <p:cTn id="7" dur="350"/>
+                                        <p:cTn id="6" dur="350"/>
                                         <p:tgtEl>
                                           <p:spTgt spid="2"/>
                                         </p:tgtEl>
@@ -10754,14 +10752,14 @@
                                 </p:cTn>
                               </p:par>
                               <p:par>
-                                <p:cTn id="8" presetID="10" presetClass="entr" presetSubtype="0" fill="hold" grpId="0" nodeType="afterEffect">
+                                <p:cTn presetID="10" presetClass="entr" presetSubtype="0" fill="hold" grpId="0" nodeType="afterEffect">
                                   <p:stCondLst>
                                     <p:cond delay="450"/>
                                   </p:stCondLst>
                                   <p:childTnLst>
                                     <p:set>
                                       <p:cBhvr>
-                                        <p:cTn id="9" dur="1"/>
+                                        <p:cTn id="7" dur="1"/>
                                         <p:tgtEl>
                                           <p:spTgt spid="3"/>
                                         </p:tgtEl>
@@ -10775,7 +10773,7 @@
                                     </p:set>
                                     <p:animEffect transition="in" filter="fade">
                                       <p:cBhvr>
-                                        <p:cTn id="10" dur="350"/>
+                                        <p:cTn id="8" dur="350"/>
                                         <p:tgtEl>
                                           <p:spTgt spid="3"/>
                                         </p:tgtEl>
@@ -10785,14 +10783,14 @@
                                 </p:cTn>
                               </p:par>
                               <p:par>
-                                <p:cTn id="11" presetID="10" presetClass="entr" presetSubtype="0" fill="hold" grpId="0" nodeType="afterEffect">
+                                <p:cTn presetID="10" presetClass="entr" presetSubtype="0" fill="hold" grpId="0" nodeType="afterEffect">
                                   <p:stCondLst>
                                     <p:cond delay="1000"/>
                                   </p:stCondLst>
                                   <p:childTnLst>
                                     <p:set>
                                       <p:cBhvr>
-                                        <p:cTn id="12" dur="1"/>
+                                        <p:cTn id="9" dur="1"/>
                                         <p:tgtEl>
                                           <p:spTgt spid="5"/>
                                         </p:tgtEl>
@@ -10806,7 +10804,7 @@
                                     </p:set>
                                     <p:animEffect transition="in" filter="fade">
                                       <p:cBhvr>
-                                        <p:cTn id="13" dur="350"/>
+                                        <p:cTn id="10" dur="350"/>
                                         <p:tgtEl>
                                           <p:spTgt spid="5"/>
                                         </p:tgtEl>
@@ -10816,14 +10814,14 @@
                                 </p:cTn>
                               </p:par>
                               <p:par>
-                                <p:cTn id="14" presetID="10" presetClass="entr" presetSubtype="0" fill="hold" grpId="0" nodeType="afterEffect">
+                                <p:cTn presetID="10" presetClass="entr" presetSubtype="0" fill="hold" grpId="0" nodeType="afterEffect">
                                   <p:stCondLst>
                                     <p:cond delay="1650"/>
                                   </p:stCondLst>
                                   <p:childTnLst>
                                     <p:set>
                                       <p:cBhvr>
-                                        <p:cTn id="15" dur="1"/>
+                                        <p:cTn id="11" dur="1"/>
                                         <p:tgtEl>
                                           <p:spTgt spid="6"/>
                                         </p:tgtEl>
@@ -10837,7 +10835,7 @@
                                     </p:set>
                                     <p:animEffect transition="in" filter="fade">
                                       <p:cBhvr>
-                                        <p:cTn id="16" dur="350"/>
+                                        <p:cTn id="12" dur="350"/>
                                         <p:tgtEl>
                                           <p:spTgt spid="6"/>
                                         </p:tgtEl>
@@ -10847,14 +10845,14 @@
                                 </p:cTn>
                               </p:par>
                               <p:par>
-                                <p:cTn id="17" presetID="10" presetClass="entr" presetSubtype="0" fill="hold" grpId="0" nodeType="afterEffect">
+                                <p:cTn presetID="10" presetClass="entr" presetSubtype="0" fill="hold" grpId="0" nodeType="afterEffect">
                                   <p:stCondLst>
                                     <p:cond delay="2400"/>
                                   </p:stCondLst>
                                   <p:childTnLst>
                                     <p:set>
                                       <p:cBhvr>
-                                        <p:cTn id="18" dur="1"/>
+                                        <p:cTn id="13" dur="1"/>
                                         <p:tgtEl>
                                           <p:spTgt spid="7"/>
                                         </p:tgtEl>
@@ -10868,7 +10866,7 @@
                                     </p:set>
                                     <p:animEffect transition="in" filter="fade">
                                       <p:cBhvr>
-                                        <p:cTn id="19" dur="350"/>
+                                        <p:cTn id="14" dur="350"/>
                                         <p:tgtEl>
                                           <p:spTgt spid="7"/>
                                         </p:tgtEl>
@@ -10878,14 +10876,14 @@
                                 </p:cTn>
                               </p:par>
                               <p:par>
-                                <p:cTn id="20" presetID="10" presetClass="entr" presetSubtype="0" fill="hold" grpId="0" nodeType="afterEffect">
+                                <p:cTn presetID="10" presetClass="entr" presetSubtype="0" fill="hold" grpId="0" nodeType="afterEffect">
                                   <p:stCondLst>
                                     <p:cond delay="3250"/>
                                   </p:stCondLst>
                                   <p:childTnLst>
                                     <p:set>
                                       <p:cBhvr>
-                                        <p:cTn id="21" dur="1"/>
+                                        <p:cTn id="15" dur="1"/>
                                         <p:tgtEl>
                                           <p:spTgt spid="8"/>
                                         </p:tgtEl>
@@ -10899,7 +10897,7 @@
                                     </p:set>
                                     <p:animEffect transition="in" filter="fade">
                                       <p:cBhvr>
-                                        <p:cTn id="22" dur="350"/>
+                                        <p:cTn id="16" dur="350"/>
                                         <p:tgtEl>
                                           <p:spTgt spid="8"/>
                                         </p:tgtEl>
@@ -10909,14 +10907,14 @@
                                 </p:cTn>
                               </p:par>
                               <p:par>
-                                <p:cTn id="23" presetID="10" presetClass="entr" presetSubtype="0" fill="hold" grpId="0" nodeType="afterEffect">
+                                <p:cTn presetID="10" presetClass="entr" presetSubtype="0" fill="hold" grpId="0" nodeType="afterEffect">
                                   <p:stCondLst>
                                     <p:cond delay="4200"/>
                                   </p:stCondLst>
                                   <p:childTnLst>
                                     <p:set>
                                       <p:cBhvr>
-                                        <p:cTn id="24" dur="1"/>
+                                        <p:cTn id="17" dur="1"/>
                                         <p:tgtEl>
                                           <p:spTgt spid="9"/>
                                         </p:tgtEl>
@@ -10930,7 +10928,7 @@
                                     </p:set>
                                     <p:animEffect transition="in" filter="fade">
                                       <p:cBhvr>
-                                        <p:cTn id="25" dur="350"/>
+                                        <p:cTn id="18" dur="350"/>
                                         <p:tgtEl>
                                           <p:spTgt spid="9"/>
                                         </p:tgtEl>
@@ -10940,14 +10938,14 @@
                                 </p:cTn>
                               </p:par>
                               <p:par>
-                                <p:cTn id="26" presetID="10" presetClass="entr" presetSubtype="0" fill="hold" grpId="0" nodeType="afterEffect">
+                                <p:cTn presetID="10" presetClass="entr" presetSubtype="0" fill="hold" grpId="0" nodeType="afterEffect">
                                   <p:stCondLst>
                                     <p:cond delay="5250"/>
                                   </p:stCondLst>
                                   <p:childTnLst>
                                     <p:set>
                                       <p:cBhvr>
-                                        <p:cTn id="27" dur="1"/>
+                                        <p:cTn id="19" dur="1"/>
                                         <p:tgtEl>
                                           <p:spTgt spid="10"/>
                                         </p:tgtEl>
@@ -10961,7 +10959,7 @@
                                     </p:set>
                                     <p:animEffect transition="in" filter="fade">
                                       <p:cBhvr>
-                                        <p:cTn id="28" dur="350"/>
+                                        <p:cTn id="20" dur="350"/>
                                         <p:tgtEl>
                                           <p:spTgt spid="10"/>
                                         </p:tgtEl>
@@ -10971,14 +10969,14 @@
                                 </p:cTn>
                               </p:par>
                               <p:par>
-                                <p:cTn id="29" presetID="10" presetClass="entr" presetSubtype="0" fill="hold" grpId="0" nodeType="afterEffect">
+                                <p:cTn presetID="10" presetClass="entr" presetSubtype="0" fill="hold" grpId="0" nodeType="afterEffect">
                                   <p:stCondLst>
                                     <p:cond delay="6400"/>
                                   </p:stCondLst>
                                   <p:childTnLst>
                                     <p:set>
                                       <p:cBhvr>
-                                        <p:cTn id="30" dur="1"/>
+                                        <p:cTn id="21" dur="1"/>
                                         <p:tgtEl>
                                           <p:spTgt spid="11"/>
                                         </p:tgtEl>
@@ -10992,7 +10990,7 @@
                                     </p:set>
                                     <p:animEffect transition="in" filter="fade">
                                       <p:cBhvr>
-                                        <p:cTn id="31" dur="350"/>
+                                        <p:cTn id="22" dur="350"/>
                                         <p:tgtEl>
                                           <p:spTgt spid="11"/>
                                         </p:tgtEl>
@@ -11002,14 +11000,14 @@
                                 </p:cTn>
                               </p:par>
                               <p:par>
-                                <p:cTn id="32" presetID="10" presetClass="entr" presetSubtype="0" fill="hold" grpId="0" nodeType="afterEffect">
+                                <p:cTn presetID="10" presetClass="entr" presetSubtype="0" fill="hold" grpId="0" nodeType="afterEffect">
                                   <p:stCondLst>
                                     <p:cond delay="7650"/>
                                   </p:stCondLst>
                                   <p:childTnLst>
                                     <p:set>
                                       <p:cBhvr>
-                                        <p:cTn id="33" dur="1"/>
+                                        <p:cTn id="23" dur="1"/>
                                         <p:tgtEl>
                                           <p:spTgt spid="12"/>
                                         </p:tgtEl>
@@ -11023,7 +11021,7 @@
                                     </p:set>
                                     <p:animEffect transition="in" filter="fade">
                                       <p:cBhvr>
-                                        <p:cTn id="34" dur="350"/>
+                                        <p:cTn id="24" dur="350"/>
                                         <p:tgtEl>
                                           <p:spTgt spid="12"/>
                                         </p:tgtEl>
@@ -11033,14 +11031,14 @@
                                 </p:cTn>
                               </p:par>
                               <p:par>
-                                <p:cTn id="35" presetID="10" presetClass="entr" presetSubtype="0" fill="hold" grpId="0" nodeType="afterEffect">
+                                <p:cTn presetID="10" presetClass="entr" presetSubtype="0" fill="hold" grpId="0" nodeType="afterEffect">
                                   <p:stCondLst>
                                     <p:cond delay="9000"/>
                                   </p:stCondLst>
                                   <p:childTnLst>
                                     <p:set>
                                       <p:cBhvr>
-                                        <p:cTn id="36" dur="1"/>
+                                        <p:cTn id="25" dur="1"/>
                                         <p:tgtEl>
                                           <p:spTgt spid="13"/>
                                         </p:tgtEl>
@@ -11054,7 +11052,7 @@
                                     </p:set>
                                     <p:animEffect transition="in" filter="fade">
                                       <p:cBhvr>
-                                        <p:cTn id="37" dur="350"/>
+                                        <p:cTn id="26" dur="350"/>
                                         <p:tgtEl>
                                           <p:spTgt spid="13"/>
                                         </p:tgtEl>
@@ -11064,14 +11062,14 @@
                                 </p:cTn>
                               </p:par>
                               <p:par>
-                                <p:cTn id="38" presetID="10" presetClass="entr" presetSubtype="0" fill="hold" grpId="0" nodeType="afterEffect">
+                                <p:cTn presetID="10" presetClass="entr" presetSubtype="0" fill="hold" grpId="0" nodeType="afterEffect">
                                   <p:stCondLst>
                                     <p:cond delay="10450"/>
                                   </p:stCondLst>
                                   <p:childTnLst>
                                     <p:set>
                                       <p:cBhvr>
-                                        <p:cTn id="39" dur="1"/>
+                                        <p:cTn id="27" dur="1"/>
                                         <p:tgtEl>
                                           <p:spTgt spid="14"/>
                                         </p:tgtEl>
@@ -11085,7 +11083,7 @@
                                     </p:set>
                                     <p:animEffect transition="in" filter="fade">
                                       <p:cBhvr>
-                                        <p:cTn id="40" dur="350"/>
+                                        <p:cTn id="28" dur="350"/>
                                         <p:tgtEl>
                                           <p:spTgt spid="14"/>
                                         </p:tgtEl>
@@ -11095,14 +11093,14 @@
                                 </p:cTn>
                               </p:par>
                               <p:par>
-                                <p:cTn id="41" presetID="10" presetClass="entr" presetSubtype="0" fill="hold" grpId="0" nodeType="afterEffect">
+                                <p:cTn presetID="10" presetClass="entr" presetSubtype="0" fill="hold" grpId="0" nodeType="afterEffect">
                                   <p:stCondLst>
                                     <p:cond delay="12000"/>
                                   </p:stCondLst>
                                   <p:childTnLst>
                                     <p:set>
                                       <p:cBhvr>
-                                        <p:cTn id="42" dur="1"/>
+                                        <p:cTn id="29" dur="1"/>
                                         <p:tgtEl>
                                           <p:spTgt spid="15"/>
                                         </p:tgtEl>
@@ -11116,7 +11114,7 @@
                                     </p:set>
                                     <p:animEffect transition="in" filter="fade">
                                       <p:cBhvr>
-                                        <p:cTn id="43" dur="350"/>
+                                        <p:cTn id="30" dur="350"/>
                                         <p:tgtEl>
                                           <p:spTgt spid="15"/>
                                         </p:tgtEl>
@@ -11126,14 +11124,14 @@
                                 </p:cTn>
                               </p:par>
                               <p:par>
-                                <p:cTn id="44" presetID="10" presetClass="entr" presetSubtype="0" fill="hold" grpId="0" nodeType="afterEffect">
+                                <p:cTn presetID="10" presetClass="entr" presetSubtype="0" fill="hold" grpId="0" nodeType="afterEffect">
                                   <p:stCondLst>
                                     <p:cond delay="13650"/>
                                   </p:stCondLst>
                                   <p:childTnLst>
                                     <p:set>
                                       <p:cBhvr>
-                                        <p:cTn id="45" dur="1"/>
+                                        <p:cTn id="31" dur="1"/>
                                         <p:tgtEl>
                                           <p:spTgt spid="16"/>
                                         </p:tgtEl>
@@ -11147,7 +11145,7 @@
                                     </p:set>
                                     <p:animEffect transition="in" filter="fade">
                                       <p:cBhvr>
-                                        <p:cTn id="46" dur="350"/>
+                                        <p:cTn id="32" dur="350"/>
                                         <p:tgtEl>
                                           <p:spTgt spid="16"/>
                                         </p:tgtEl>
@@ -11157,14 +11155,14 @@
                                 </p:cTn>
                               </p:par>
                               <p:par>
-                                <p:cTn id="47" presetID="10" presetClass="entr" presetSubtype="0" fill="hold" grpId="0" nodeType="afterEffect">
+                                <p:cTn presetID="10" presetClass="entr" presetSubtype="0" fill="hold" grpId="0" nodeType="afterEffect">
                                   <p:stCondLst>
                                     <p:cond delay="15400"/>
                                   </p:stCondLst>
                                   <p:childTnLst>
                                     <p:set>
                                       <p:cBhvr>
-                                        <p:cTn id="48" dur="1"/>
+                                        <p:cTn id="33" dur="1"/>
                                         <p:tgtEl>
                                           <p:spTgt spid="17"/>
                                         </p:tgtEl>
@@ -11178,7 +11176,7 @@
                                     </p:set>
                                     <p:animEffect transition="in" filter="fade">
                                       <p:cBhvr>
-                                        <p:cTn id="49" dur="350"/>
+                                        <p:cTn id="34" dur="350"/>
                                         <p:tgtEl>
                                           <p:spTgt spid="17"/>
                                         </p:tgtEl>
@@ -11188,14 +11186,14 @@
                                 </p:cTn>
                               </p:par>
                               <p:par>
-                                <p:cTn id="50" presetID="10" presetClass="entr" presetSubtype="0" fill="hold" grpId="0" nodeType="afterEffect">
+                                <p:cTn presetID="10" presetClass="entr" presetSubtype="0" fill="hold" grpId="0" nodeType="afterEffect">
                                   <p:stCondLst>
                                     <p:cond delay="17250"/>
                                   </p:stCondLst>
                                   <p:childTnLst>
                                     <p:set>
                                       <p:cBhvr>
-                                        <p:cTn id="51" dur="1"/>
+                                        <p:cTn id="35" dur="1"/>
                                         <p:tgtEl>
                                           <p:spTgt spid="18"/>
                                         </p:tgtEl>
@@ -11209,7 +11207,7 @@
                                     </p:set>
                                     <p:animEffect transition="in" filter="fade">
                                       <p:cBhvr>
-                                        <p:cTn id="52" dur="350"/>
+                                        <p:cTn id="36" dur="350"/>
                                         <p:tgtEl>
                                           <p:spTgt spid="18"/>
                                         </p:tgtEl>
@@ -11219,14 +11217,14 @@
                                 </p:cTn>
                               </p:par>
                               <p:par>
-                                <p:cTn id="53" presetID="10" presetClass="entr" presetSubtype="0" fill="hold" grpId="0" nodeType="afterEffect">
+                                <p:cTn presetID="10" presetClass="entr" presetSubtype="0" fill="hold" grpId="0" nodeType="afterEffect">
                                   <p:stCondLst>
                                     <p:cond delay="19200"/>
                                   </p:stCondLst>
                                   <p:childTnLst>
                                     <p:set>
                                       <p:cBhvr>
-                                        <p:cTn id="54" dur="1"/>
+                                        <p:cTn id="37" dur="1"/>
                                         <p:tgtEl>
                                           <p:spTgt spid="19"/>
                                         </p:tgtEl>
@@ -11240,7 +11238,7 @@
                                     </p:set>
                                     <p:animEffect transition="in" filter="fade">
                                       <p:cBhvr>
-                                        <p:cTn id="55" dur="350"/>
+                                        <p:cTn id="38" dur="350"/>
                                         <p:tgtEl>
                                           <p:spTgt spid="19"/>
                                         </p:tgtEl>
@@ -11250,14 +11248,14 @@
                                 </p:cTn>
                               </p:par>
                               <p:par>
-                                <p:cTn id="56" presetID="10" presetClass="entr" presetSubtype="0" fill="hold" grpId="0" nodeType="afterEffect">
+                                <p:cTn presetID="10" presetClass="entr" presetSubtype="0" fill="hold" grpId="0" nodeType="afterEffect">
                                   <p:stCondLst>
                                     <p:cond delay="21250"/>
                                   </p:stCondLst>
                                   <p:childTnLst>
                                     <p:set>
                                       <p:cBhvr>
-                                        <p:cTn id="57" dur="1"/>
+                                        <p:cTn id="39" dur="1"/>
                                         <p:tgtEl>
                                           <p:spTgt spid="20"/>
                                         </p:tgtEl>
@@ -11271,7 +11269,7 @@
                                     </p:set>
                                     <p:animEffect transition="in" filter="fade">
                                       <p:cBhvr>
-                                        <p:cTn id="58" dur="350"/>
+                                        <p:cTn id="40" dur="350"/>
                                         <p:tgtEl>
                                           <p:spTgt spid="20"/>
                                         </p:tgtEl>
@@ -12147,14 +12145,14 @@
                             </p:stCondLst>
                             <p:childTnLst>
                               <p:par>
-                                <p:cTn id="5" presetID="2" presetClass="entr" presetSubtype="4" fill="hold" grpId="0" nodeType="afterEffect">
+                                <p:cTn presetID="2" presetClass="entr" presetSubtype="4" fill="hold" grpId="0" nodeType="afterEffect">
                                   <p:stCondLst>
                                     <p:cond delay="0"/>
                                   </p:stCondLst>
                                   <p:childTnLst>
                                     <p:set>
                                       <p:cBhvr>
-                                        <p:cTn id="6" dur="1"/>
+                                        <p:cTn id="5" dur="1"/>
                                         <p:tgtEl>
                                           <p:spTgt spid="2"/>
                                         </p:tgtEl>
@@ -12168,7 +12166,7 @@
                                     </p:set>
                                     <p:anim calcmode="lin" valueType="num">
                                       <p:cBhvr additive="base">
-                                        <p:cTn id="7" dur="400"/>
+                                        <p:cTn id="6" dur="400"/>
                                         <p:tgtEl>
                                           <p:spTgt spid="2"/>
                                         </p:tgtEl>
@@ -12191,7 +12189,7 @@
                                     </p:anim>
                                     <p:anim calcmode="lin" valueType="num">
                                       <p:cBhvr additive="base">
-                                        <p:cTn id="8" dur="400"/>
+                                        <p:cTn id="7" dur="400"/>
                                         <p:tgtEl>
                                           <p:spTgt spid="2"/>
                                         </p:tgtEl>
@@ -12216,14 +12214,14 @@
                                 </p:cTn>
                               </p:par>
                               <p:par>
-                                <p:cTn id="9" presetID="2" presetClass="entr" presetSubtype="4" fill="hold" grpId="0" nodeType="afterEffect">
+                                <p:cTn presetID="2" presetClass="entr" presetSubtype="4" fill="hold" grpId="0" nodeType="afterEffect">
                                   <p:stCondLst>
                                     <p:cond delay="550"/>
                                   </p:stCondLst>
                                   <p:childTnLst>
                                     <p:set>
                                       <p:cBhvr>
-                                        <p:cTn id="10" dur="1"/>
+                                        <p:cTn id="8" dur="1"/>
                                         <p:tgtEl>
                                           <p:spTgt spid="3"/>
                                         </p:tgtEl>
@@ -12237,7 +12235,7 @@
                                     </p:set>
                                     <p:anim calcmode="lin" valueType="num">
                                       <p:cBhvr additive="base">
-                                        <p:cTn id="11" dur="400"/>
+                                        <p:cTn id="9" dur="400"/>
                                         <p:tgtEl>
                                           <p:spTgt spid="3"/>
                                         </p:tgtEl>
@@ -12260,7 +12258,7 @@
                                     </p:anim>
                                     <p:anim calcmode="lin" valueType="num">
                                       <p:cBhvr additive="base">
-                                        <p:cTn id="12" dur="400"/>
+                                        <p:cTn id="10" dur="400"/>
                                         <p:tgtEl>
                                           <p:spTgt spid="3"/>
                                         </p:tgtEl>
@@ -12285,16 +12283,85 @@
                                 </p:cTn>
                               </p:par>
                               <p:par>
-                                <p:cTn id="13" presetID="2" presetClass="entr" presetSubtype="4" fill="hold" grpId="0" nodeType="afterEffect">
+                                <p:cTn presetID="2" presetClass="entr" presetSubtype="4" fill="hold" grpId="0" nodeType="afterEffect">
                                   <p:stCondLst>
                                     <p:cond delay="1250"/>
                                   </p:stCondLst>
                                   <p:childTnLst>
                                     <p:set>
                                       <p:cBhvr>
+                                        <p:cTn id="11" dur="1"/>
+                                        <p:tgtEl>
+                                          <p:spTgt spid="5"/>
+                                        </p:tgtEl>
+                                        <p:attrNameLst>
+                                          <p:attrName>style.visibility</p:attrName>
+                                        </p:attrNameLst>
+                                      </p:cBhvr>
+                                      <p:to>
+                                        <p:strVal val="visible"/>
+                                      </p:to>
+                                    </p:set>
+                                    <p:anim calcmode="lin" valueType="num">
+                                      <p:cBhvr additive="base">
+                                        <p:cTn id="12" dur="400"/>
+                                        <p:tgtEl>
+                                          <p:spTgt spid="5"/>
+                                        </p:tgtEl>
+                                        <p:attrNameLst>
+                                          <p:attrName>ppt_x</p:attrName>
+                                        </p:attrNameLst>
+                                      </p:cBhvr>
+                                      <p:tavLst>
+                                        <p:tav tm="0">
+                                          <p:val>
+                                            <p:strVal val="#ppt_x"/>
+                                          </p:val>
+                                        </p:tav>
+                                        <p:tav tm="100000">
+                                          <p:val>
+                                            <p:strVal val="#ppt_x"/>
+                                          </p:val>
+                                        </p:tav>
+                                      </p:tavLst>
+                                    </p:anim>
+                                    <p:anim calcmode="lin" valueType="num">
+                                      <p:cBhvr additive="base">
+                                        <p:cTn id="13" dur="400"/>
+                                        <p:tgtEl>
+                                          <p:spTgt spid="5"/>
+                                        </p:tgtEl>
+                                        <p:attrNameLst>
+                                          <p:attrName>ppt_y</p:attrName>
+                                        </p:attrNameLst>
+                                      </p:cBhvr>
+                                      <p:tavLst>
+                                        <p:tav tm="0">
+                                          <p:val>
+                                            <p:strVal val="1+#ppt_h/2"/>
+                                          </p:val>
+                                        </p:tav>
+                                        <p:tav tm="100000">
+                                          <p:val>
+                                            <p:strVal val="#ppt_y"/>
+                                          </p:val>
+                                        </p:tav>
+                                      </p:tavLst>
+                                    </p:anim>
+                                  </p:childTnLst>
+                                </p:cTn>
+                              </p:par>
+                              <p:par>
+                                <p:cTn presetID="2" presetClass="entr" presetSubtype="4" fill="hold" grpId="0" nodeType="afterEffect">
+                                  <p:stCondLst>
+                                    <p:cond delay="2100"/>
+                                  </p:stCondLst>
+                                  <p:childTnLst>
+                                    <p:set>
+                                      <p:cBhvr>
                                         <p:cTn id="14" dur="1"/>
                                         <p:tgtEl>
-                                          <p:spTgt spid="5"/>
+                                          <p:spTgt spid="9"/>
                                         </p:tgtEl>
                                         <p:attrNameLst>
                                           <p:attrName>style.visibility</p:attrName>
@@ -12308,7 +12375,7 @@
                                       <p:cBhvr additive="base">
                                         <p:cTn id="15" dur="400"/>
                                         <p:tgtEl>
-                                          <p:spTgt spid="5"/>
+                                          <p:spTgt spid="9"/>
                                         </p:tgtEl>
                                         <p:attrNameLst>
                                           <p:attrName>ppt_x</p:attrName>
@@ -12331,7 +12398,7 @@
                                       <p:cBhvr additive="base">
                                         <p:cTn id="16" dur="400"/>
                                         <p:tgtEl>
-                                          <p:spTgt spid="5"/>
+                                          <p:spTgt spid="9"/>
                                         </p:tgtEl>
                                         <p:attrNameLst>
                                           <p:attrName>ppt_y</p:attrName>
@@ -12354,16 +12421,16 @@
                                 </p:cTn>
                               </p:par>
                               <p:par>
-                                <p:cTn id="17" presetID="2" presetClass="entr" presetSubtype="4" fill="hold" grpId="0" nodeType="afterEffect">
+                                <p:cTn presetID="2" presetClass="entr" presetSubtype="4" fill="hold" grpId="0" nodeType="afterEffect">
                                   <p:stCondLst>
-                                    <p:cond delay="2100"/>
+                                    <p:cond delay="3100"/>
                                   </p:stCondLst>
                                   <p:childTnLst>
                                     <p:set>
                                       <p:cBhvr>
-                                        <p:cTn id="18" dur="1"/>
-                                        <p:tgtEl>
-                                          <p:spTgt spid="9"/>
+                                        <p:cTn id="17" dur="1"/>
+                                        <p:tgtEl>
+                                          <p:spTgt spid="6"/>
                                         </p:tgtEl>
                                         <p:attrNameLst>
                                           <p:attrName>style.visibility</p:attrName>
@@ -12375,9 +12442,9 @@
                                     </p:set>
                                     <p:anim calcmode="lin" valueType="num">
                                       <p:cBhvr additive="base">
-                                        <p:cTn id="19" dur="400"/>
-                                        <p:tgtEl>
-                                          <p:spTgt spid="9"/>
+                                        <p:cTn id="18" dur="400"/>
+                                        <p:tgtEl>
+                                          <p:spTgt spid="6"/>
                                         </p:tgtEl>
                                         <p:attrNameLst>
                                           <p:attrName>ppt_x</p:attrName>
@@ -12398,9 +12465,9 @@
                                     </p:anim>
                                     <p:anim calcmode="lin" valueType="num">
                                       <p:cBhvr additive="base">
-                                        <p:cTn id="20" dur="400"/>
-                                        <p:tgtEl>
-                                          <p:spTgt spid="9"/>
+                                        <p:cTn id="19" dur="400"/>
+                                        <p:tgtEl>
+                                          <p:spTgt spid="6"/>
                                         </p:tgtEl>
                                         <p:attrNameLst>
                                           <p:attrName>ppt_y</p:attrName>
@@ -12423,16 +12490,16 @@
                                 </p:cTn>
                               </p:par>
                               <p:par>
-                                <p:cTn id="21" presetID="2" presetClass="entr" presetSubtype="4" fill="hold" grpId="0" nodeType="afterEffect">
+                                <p:cTn presetID="2" presetClass="entr" presetSubtype="4" fill="hold" grpId="0" nodeType="afterEffect">
                                   <p:stCondLst>
-                                    <p:cond delay="3100"/>
+                                    <p:cond delay="4250"/>
                                   </p:stCondLst>
                                   <p:childTnLst>
                                     <p:set>
                                       <p:cBhvr>
-                                        <p:cTn id="22" dur="1"/>
-                                        <p:tgtEl>
-                                          <p:spTgt spid="6"/>
+                                        <p:cTn id="20" dur="1"/>
+                                        <p:tgtEl>
+                                          <p:spTgt spid="10"/>
                                         </p:tgtEl>
                                         <p:attrNameLst>
                                           <p:attrName>style.visibility</p:attrName>
@@ -12444,9 +12511,9 @@
                                     </p:set>
                                     <p:anim calcmode="lin" valueType="num">
                                       <p:cBhvr additive="base">
-                                        <p:cTn id="23" dur="400"/>
-                                        <p:tgtEl>
-                                          <p:spTgt spid="6"/>
+                                        <p:cTn id="21" dur="400"/>
+                                        <p:tgtEl>
+                                          <p:spTgt spid="10"/>
                                         </p:tgtEl>
                                         <p:attrNameLst>
                                           <p:attrName>ppt_x</p:attrName>
@@ -12467,9 +12534,9 @@
                                     </p:anim>
                                     <p:anim calcmode="lin" valueType="num">
                                       <p:cBhvr additive="base">
-                                        <p:cTn id="24" dur="400"/>
-                                        <p:tgtEl>
-                                          <p:spTgt spid="6"/>
+                                        <p:cTn id="22" dur="400"/>
+                                        <p:tgtEl>
+                                          <p:spTgt spid="10"/>
                                         </p:tgtEl>
                                         <p:attrNameLst>
                                           <p:attrName>ppt_y</p:attrName>
@@ -12492,16 +12559,85 @@
                                 </p:cTn>
                               </p:par>
                               <p:par>
-                                <p:cTn id="25" presetID="2" presetClass="entr" presetSubtype="4" fill="hold" grpId="0" nodeType="afterEffect">
+                                <p:cTn presetID="2" presetClass="entr" presetSubtype="4" fill="hold" grpId="0" nodeType="afterEffect">
                                   <p:stCondLst>
-                                    <p:cond delay="4250"/>
+                                    <p:cond delay="5550"/>
                                   </p:stCondLst>
                                   <p:childTnLst>
                                     <p:set>
                                       <p:cBhvr>
+                                        <p:cTn id="23" dur="1"/>
+                                        <p:tgtEl>
+                                          <p:spTgt spid="7"/>
+                                        </p:tgtEl>
+                                        <p:attrNameLst>
+                                          <p:attrName>style.visibility</p:attrName>
+                                        </p:attrNameLst>
+                                      </p:cBhvr>
+                                      <p:to>
+                                        <p:strVal val="visible"/>
+                                      </p:to>
+                                    </p:set>
+                                    <p:anim calcmode="lin" valueType="num">
+                                      <p:cBhvr additive="base">
+                                        <p:cTn id="24" dur="400"/>
+                                        <p:tgtEl>
+                                          <p:spTgt spid="7"/>
+                                        </p:tgtEl>
+                                        <p:attrNameLst>
+                                          <p:attrName>ppt_x</p:attrName>
+                                        </p:attrNameLst>
+                                      </p:cBhvr>
+                                      <p:tavLst>
+                                        <p:tav tm="0">
+                                          <p:val>
+                                            <p:strVal val="#ppt_x"/>
+                                          </p:val>
+                                        </p:tav>
+                                        <p:tav tm="100000">
+                                          <p:val>
+                                            <p:strVal val="#ppt_x"/>
+                                          </p:val>
+                                        </p:tav>
+                                      </p:tavLst>
+                                    </p:anim>
+                                    <p:anim calcmode="lin" valueType="num">
+                                      <p:cBhvr additive="base">
+                                        <p:cTn id="25" dur="400"/>
+                                        <p:tgtEl>
+                                          <p:spTgt spid="7"/>
+                                        </p:tgtEl>
+                                        <p:attrNameLst>
+                                          <p:attrName>ppt_y</p:attrName>
+                                        </p:attrNameLst>
+                                      </p:cBhvr>
+                                      <p:tavLst>
+                                        <p:tav tm="0">
+                                          <p:val>
+                                            <p:strVal val="1+#ppt_h/2"/>
+                                          </p:val>
+                                        </p:tav>
+                                        <p:tav tm="100000">
+                                          <p:val>
+                                            <p:strVal val="#ppt_y"/>
+                                          </p:val>
+                                        </p:tav>
+                                      </p:tavLst>
+                                    </p:anim>
+                                  </p:childTnLst>
+                                </p:cTn>
+                              </p:par>
+                              <p:par>
+                                <p:cTn presetID="2" presetClass="entr" presetSubtype="4" fill="hold" grpId="0" nodeType="afterEffect">
+                                  <p:stCondLst>
+                                    <p:cond delay="7000"/>
+                                  </p:stCondLst>
+                                  <p:childTnLst>
+                                    <p:set>
+                                      <p:cBhvr>
                                         <p:cTn id="26" dur="1"/>
                                         <p:tgtEl>
-                                          <p:spTgt spid="10"/>
+                                          <p:spTgt spid="11"/>
                                         </p:tgtEl>
                                         <p:attrNameLst>
                                           <p:attrName>style.visibility</p:attrName>
@@ -12515,7 +12651,7 @@
                                       <p:cBhvr additive="base">
                                         <p:cTn id="27" dur="400"/>
                                         <p:tgtEl>
-                                          <p:spTgt spid="10"/>
+                                          <p:spTgt spid="11"/>
                                         </p:tgtEl>
                                         <p:attrNameLst>
                                           <p:attrName>ppt_x</p:attrName>
@@ -12538,7 +12674,7 @@
                                       <p:cBhvr additive="base">
                                         <p:cTn id="28" dur="400"/>
                                         <p:tgtEl>
-                                          <p:spTgt spid="10"/>
+                                          <p:spTgt spid="11"/>
                                         </p:tgtEl>
                                         <p:attrNameLst>
                                           <p:attrName>ppt_y</p:attrName>
@@ -12561,16 +12697,16 @@
                                 </p:cTn>
                               </p:par>
                               <p:par>
-                                <p:cTn id="29" presetID="2" presetClass="entr" presetSubtype="4" fill="hold" grpId="0" nodeType="afterEffect">
+                                <p:cTn presetID="2" presetClass="entr" presetSubtype="4" fill="hold" grpId="0" nodeType="afterEffect">
                                   <p:stCondLst>
-                                    <p:cond delay="5550"/>
+                                    <p:cond delay="8600"/>
                                   </p:stCondLst>
                                   <p:childTnLst>
                                     <p:set>
                                       <p:cBhvr>
-                                        <p:cTn id="30" dur="1"/>
-                                        <p:tgtEl>
-                                          <p:spTgt spid="7"/>
+                                        <p:cTn id="29" dur="1"/>
+                                        <p:tgtEl>
+                                          <p:spTgt spid="8"/>
                                         </p:tgtEl>
                                         <p:attrNameLst>
                                           <p:attrName>style.visibility</p:attrName>
@@ -12582,9 +12718,9 @@
                                     </p:set>
                                     <p:anim calcmode="lin" valueType="num">
                                       <p:cBhvr additive="base">
-                                        <p:cTn id="31" dur="400"/>
-                                        <p:tgtEl>
-                                          <p:spTgt spid="7"/>
+                                        <p:cTn id="30" dur="400"/>
+                                        <p:tgtEl>
+                                          <p:spTgt spid="8"/>
                                         </p:tgtEl>
                                         <p:attrNameLst>
                                           <p:attrName>ppt_x</p:attrName>
@@ -12605,9 +12741,9 @@
                                     </p:anim>
                                     <p:anim calcmode="lin" valueType="num">
                                       <p:cBhvr additive="base">
-                                        <p:cTn id="32" dur="400"/>
-                                        <p:tgtEl>
-                                          <p:spTgt spid="7"/>
+                                        <p:cTn id="31" dur="400"/>
+                                        <p:tgtEl>
+                                          <p:spTgt spid="8"/>
                                         </p:tgtEl>
                                         <p:attrNameLst>
                                           <p:attrName>ppt_y</p:attrName>
@@ -12630,16 +12766,16 @@
                                 </p:cTn>
                               </p:par>
                               <p:par>
-                                <p:cTn id="33" presetID="2" presetClass="entr" presetSubtype="4" fill="hold" grpId="0" nodeType="afterEffect">
+                                <p:cTn presetID="2" presetClass="entr" presetSubtype="4" fill="hold" grpId="0" nodeType="afterEffect">
                                   <p:stCondLst>
-                                    <p:cond delay="7000"/>
+                                    <p:cond delay="10350"/>
                                   </p:stCondLst>
                                   <p:childTnLst>
                                     <p:set>
                                       <p:cBhvr>
-                                        <p:cTn id="34" dur="1"/>
-                                        <p:tgtEl>
-                                          <p:spTgt spid="11"/>
+                                        <p:cTn id="32" dur="1"/>
+                                        <p:tgtEl>
+                                          <p:spTgt spid="12"/>
                                         </p:tgtEl>
                                         <p:attrNameLst>
                                           <p:attrName>style.visibility</p:attrName>
@@ -12651,9 +12787,9 @@
                                     </p:set>
                                     <p:anim calcmode="lin" valueType="num">
                                       <p:cBhvr additive="base">
-                                        <p:cTn id="35" dur="400"/>
-                                        <p:tgtEl>
-                                          <p:spTgt spid="11"/>
+                                        <p:cTn id="33" dur="400"/>
+                                        <p:tgtEl>
+                                          <p:spTgt spid="12"/>
                                         </p:tgtEl>
                                         <p:attrNameLst>
                                           <p:attrName>ppt_x</p:attrName>
@@ -12674,9 +12810,9 @@
                                     </p:anim>
                                     <p:anim calcmode="lin" valueType="num">
                                       <p:cBhvr additive="base">
-                                        <p:cTn id="36" dur="400"/>
-                                        <p:tgtEl>
-                                          <p:spTgt spid="11"/>
+                                        <p:cTn id="34" dur="400"/>
+                                        <p:tgtEl>
+                                          <p:spTgt spid="12"/>
                                         </p:tgtEl>
                                         <p:attrNameLst>
                                           <p:attrName>ppt_y</p:attrName>
@@ -12699,16 +12835,85 @@
                                 </p:cTn>
                               </p:par>
                               <p:par>
-                                <p:cTn id="37" presetID="2" presetClass="entr" presetSubtype="4" fill="hold" grpId="0" nodeType="afterEffect">
+                                <p:cTn presetID="2" presetClass="entr" presetSubtype="4" fill="hold" grpId="0" nodeType="afterEffect">
                                   <p:stCondLst>
-                                    <p:cond delay="8600"/>
+                                    <p:cond delay="12250"/>
                                   </p:stCondLst>
                                   <p:childTnLst>
                                     <p:set>
                                       <p:cBhvr>
+                                        <p:cTn id="35" dur="1"/>
+                                        <p:tgtEl>
+                                          <p:spTgt spid="13"/>
+                                        </p:tgtEl>
+                                        <p:attrNameLst>
+                                          <p:attrName>style.visibility</p:attrName>
+                                        </p:attrNameLst>
+                                      </p:cBhvr>
+                                      <p:to>
+                                        <p:strVal val="visible"/>
+                                      </p:to>
+                                    </p:set>
+                                    <p:anim calcmode="lin" valueType="num">
+                                      <p:cBhvr additive="base">
+                                        <p:cTn id="36" dur="400"/>
+                                        <p:tgtEl>
+                                          <p:spTgt spid="13"/>
+                                        </p:tgtEl>
+                                        <p:attrNameLst>
+                                          <p:attrName>ppt_x</p:attrName>
+                                        </p:attrNameLst>
+                                      </p:cBhvr>
+                                      <p:tavLst>
+                                        <p:tav tm="0">
+                                          <p:val>
+                                            <p:strVal val="#ppt_x"/>
+                                          </p:val>
+                                        </p:tav>
+                                        <p:tav tm="100000">
+                                          <p:val>
+                                            <p:strVal val="#ppt_x"/>
+                                          </p:val>
+                                        </p:tav>
+                                      </p:tavLst>
+                                    </p:anim>
+                                    <p:anim calcmode="lin" valueType="num">
+                                      <p:cBhvr additive="base">
+                                        <p:cTn id="37" dur="400"/>
+                                        <p:tgtEl>
+                                          <p:spTgt spid="13"/>
+                                        </p:tgtEl>
+                                        <p:attrNameLst>
+                                          <p:attrName>ppt_y</p:attrName>
+                                        </p:attrNameLst>
+                                      </p:cBhvr>
+                                      <p:tavLst>
+                                        <p:tav tm="0">
+                                          <p:val>
+                                            <p:strVal val="1+#ppt_h/2"/>
+                                          </p:val>
+                                        </p:tav>
+                                        <p:tav tm="100000">
+                                          <p:val>
+                                            <p:strVal val="#ppt_y"/>
+                                          </p:val>
+                                        </p:tav>
+                                      </p:tavLst>
+                                    </p:anim>
+                                  </p:childTnLst>
+                                </p:cTn>
+                              </p:par>
+                              <p:par>
+                                <p:cTn presetID="2" presetClass="entr" presetSubtype="4" fill="hold" grpId="0" nodeType="afterEffect">
+                                  <p:stCondLst>
+                                    <p:cond delay="14300"/>
+                                  </p:stCondLst>
+                                  <p:childTnLst>
+                                    <p:set>
+                                      <p:cBhvr>
                                         <p:cTn id="38" dur="1"/>
                                         <p:tgtEl>
-                                          <p:spTgt spid="8"/>
+                                          <p:spTgt spid="17"/>
                                         </p:tgtEl>
                                         <p:attrNameLst>
                                           <p:attrName>style.visibility</p:attrName>
@@ -12722,7 +12927,7 @@
                                       <p:cBhvr additive="base">
                                         <p:cTn id="39" dur="400"/>
                                         <p:tgtEl>
-                                          <p:spTgt spid="8"/>
+                                          <p:spTgt spid="17"/>
                                         </p:tgtEl>
                                         <p:attrNameLst>
                                           <p:attrName>ppt_x</p:attrName>
@@ -12745,7 +12950,7 @@
                                       <p:cBhvr additive="base">
                                         <p:cTn id="40" dur="400"/>
                                         <p:tgtEl>
-                                          <p:spTgt spid="8"/>
+                                          <p:spTgt spid="17"/>
                                         </p:tgtEl>
                                         <p:attrNameLst>
                                           <p:attrName>ppt_y</p:attrName>
@@ -12768,16 +12973,16 @@
                                 </p:cTn>
                               </p:par>
                               <p:par>
-                                <p:cTn id="41" presetID="2" presetClass="entr" presetSubtype="4" fill="hold" grpId="0" nodeType="afterEffect">
+                                <p:cTn presetID="2" presetClass="entr" presetSubtype="4" fill="hold" grpId="0" nodeType="afterEffect">
                                   <p:stCondLst>
-                                    <p:cond delay="10350"/>
+                                    <p:cond delay="16500"/>
                                   </p:stCondLst>
                                   <p:childTnLst>
                                     <p:set>
                                       <p:cBhvr>
-                                        <p:cTn id="42" dur="1"/>
-                                        <p:tgtEl>
-                                          <p:spTgt spid="12"/>
+                                        <p:cTn id="41" dur="1"/>
+                                        <p:tgtEl>
+                                          <p:spTgt spid="14"/>
                                         </p:tgtEl>
                                         <p:attrNameLst>
                                           <p:attrName>style.visibility</p:attrName>
@@ -12789,9 +12994,9 @@
                                     </p:set>
                                     <p:anim calcmode="lin" valueType="num">
                                       <p:cBhvr additive="base">
-                                        <p:cTn id="43" dur="400"/>
-                                        <p:tgtEl>
-                                          <p:spTgt spid="12"/>
+                                        <p:cTn id="42" dur="400"/>
+                                        <p:tgtEl>
+                                          <p:spTgt spid="14"/>
                                         </p:tgtEl>
                                         <p:attrNameLst>
                                           <p:attrName>ppt_x</p:attrName>
@@ -12812,9 +13017,9 @@
                                     </p:anim>
                                     <p:anim calcmode="lin" valueType="num">
                                       <p:cBhvr additive="base">
-                                        <p:cTn id="44" dur="400"/>
-                                        <p:tgtEl>
-                                          <p:spTgt spid="12"/>
+                                        <p:cTn id="43" dur="400"/>
+                                        <p:tgtEl>
+                                          <p:spTgt spid="14"/>
                                         </p:tgtEl>
                                         <p:attrNameLst>
                                           <p:attrName>ppt_y</p:attrName>
@@ -12837,16 +13042,16 @@
                                 </p:cTn>
                               </p:par>
                               <p:par>
-                                <p:cTn id="45" presetID="2" presetClass="entr" presetSubtype="4" fill="hold" grpId="0" nodeType="afterEffect">
+                                <p:cTn presetID="2" presetClass="entr" presetSubtype="4" fill="hold" grpId="0" nodeType="afterEffect">
                                   <p:stCondLst>
-                                    <p:cond delay="12250"/>
+                                    <p:cond delay="18850"/>
                                   </p:stCondLst>
                                   <p:childTnLst>
                                     <p:set>
                                       <p:cBhvr>
-                                        <p:cTn id="46" dur="1"/>
-                                        <p:tgtEl>
-                                          <p:spTgt spid="13"/>
+                                        <p:cTn id="44" dur="1"/>
+                                        <p:tgtEl>
+                                          <p:spTgt spid="18"/>
                                         </p:tgtEl>
                                         <p:attrNameLst>
                                           <p:attrName>style.visibility</p:attrName>
@@ -12858,9 +13063,9 @@
                                     </p:set>
                                     <p:anim calcmode="lin" valueType="num">
                                       <p:cBhvr additive="base">
-                                        <p:cTn id="47" dur="400"/>
-                                        <p:tgtEl>
-                                          <p:spTgt spid="13"/>
+                                        <p:cTn id="45" dur="400"/>
+                                        <p:tgtEl>
+                                          <p:spTgt spid="18"/>
                                         </p:tgtEl>
                                         <p:attrNameLst>
                                           <p:attrName>ppt_x</p:attrName>
@@ -12881,9 +13086,9 @@
                                     </p:anim>
                                     <p:anim calcmode="lin" valueType="num">
                                       <p:cBhvr additive="base">
-                                        <p:cTn id="48" dur="400"/>
-                                        <p:tgtEl>
-                                          <p:spTgt spid="13"/>
+                                        <p:cTn id="46" dur="400"/>
+                                        <p:tgtEl>
+                                          <p:spTgt spid="18"/>
                                         </p:tgtEl>
                                         <p:attrNameLst>
                                           <p:attrName>ppt_y</p:attrName>
@@ -12906,16 +13111,85 @@
                                 </p:cTn>
                               </p:par>
                               <p:par>
-                                <p:cTn id="49" presetID="2" presetClass="entr" presetSubtype="4" fill="hold" grpId="0" nodeType="afterEffect">
+                                <p:cTn presetID="2" presetClass="entr" presetSubtype="4" fill="hold" grpId="0" nodeType="afterEffect">
                                   <p:stCondLst>
-                                    <p:cond delay="14300"/>
+                                    <p:cond delay="21350"/>
                                   </p:stCondLst>
                                   <p:childTnLst>
                                     <p:set>
                                       <p:cBhvr>
+                                        <p:cTn id="47" dur="1"/>
+                                        <p:tgtEl>
+                                          <p:spTgt spid="15"/>
+                                        </p:tgtEl>
+                                        <p:attrNameLst>
+                                          <p:attrName>style.visibility</p:attrName>
+                                        </p:attrNameLst>
+                                      </p:cBhvr>
+                                      <p:to>
+                                        <p:strVal val="visible"/>
+                                      </p:to>
+                                    </p:set>
+                                    <p:anim calcmode="lin" valueType="num">
+                                      <p:cBhvr additive="base">
+                                        <p:cTn id="48" dur="400"/>
+                                        <p:tgtEl>
+                                          <p:spTgt spid="15"/>
+                                        </p:tgtEl>
+                                        <p:attrNameLst>
+                                          <p:attrName>ppt_x</p:attrName>
+                                        </p:attrNameLst>
+                                      </p:cBhvr>
+                                      <p:tavLst>
+                                        <p:tav tm="0">
+                                          <p:val>
+                                            <p:strVal val="#ppt_x"/>
+                                          </p:val>
+                                        </p:tav>
+                                        <p:tav tm="100000">
+                                          <p:val>
+                                            <p:strVal val="#ppt_x"/>
+                                          </p:val>
+                                        </p:tav>
+                                      </p:tavLst>
+                                    </p:anim>
+                                    <p:anim calcmode="lin" valueType="num">
+                                      <p:cBhvr additive="base">
+                                        <p:cTn id="49" dur="400"/>
+                                        <p:tgtEl>
+                                          <p:spTgt spid="15"/>
+                                        </p:tgtEl>
+                                        <p:attrNameLst>
+                                          <p:attrName>ppt_y</p:attrName>
+                                        </p:attrNameLst>
+                                      </p:cBhvr>
+                                      <p:tavLst>
+                                        <p:tav tm="0">
+                                          <p:val>
+                                            <p:strVal val="1+#ppt_h/2"/>
+                                          </p:val>
+                                        </p:tav>
+                                        <p:tav tm="100000">
+                                          <p:val>
+                                            <p:strVal val="#ppt_y"/>
+                                          </p:val>
+                                        </p:tav>
+                                      </p:tavLst>
+                                    </p:anim>
+                                  </p:childTnLst>
+                                </p:cTn>
+                              </p:par>
+                              <p:par>
+                                <p:cTn presetID="2" presetClass="entr" presetSubtype="4" fill="hold" grpId="0" nodeType="afterEffect">
+                                  <p:stCondLst>
+                                    <p:cond delay="24000"/>
+                                  </p:stCondLst>
+                                  <p:childTnLst>
+                                    <p:set>
+                                      <p:cBhvr>
                                         <p:cTn id="50" dur="1"/>
                                         <p:tgtEl>
-                                          <p:spTgt spid="17"/>
+                                          <p:spTgt spid="19"/>
                                         </p:tgtEl>
                                         <p:attrNameLst>
                                           <p:attrName>style.visibility</p:attrName>
@@ -12929,7 +13203,7 @@
                                       <p:cBhvr additive="base">
                                         <p:cTn id="51" dur="400"/>
                                         <p:tgtEl>
-                                          <p:spTgt spid="17"/>
+                                          <p:spTgt spid="19"/>
                                         </p:tgtEl>
                                         <p:attrNameLst>
                                           <p:attrName>ppt_x</p:attrName>
@@ -12952,7 +13226,7 @@
                                       <p:cBhvr additive="base">
                                         <p:cTn id="52" dur="400"/>
                                         <p:tgtEl>
-                                          <p:spTgt spid="17"/>
+                                          <p:spTgt spid="19"/>
                                         </p:tgtEl>
                                         <p:attrNameLst>
                                           <p:attrName>ppt_y</p:attrName>
@@ -12975,16 +13249,16 @@
                                 </p:cTn>
                               </p:par>
                               <p:par>
-                                <p:cTn id="53" presetID="2" presetClass="entr" presetSubtype="4" fill="hold" grpId="0" nodeType="afterEffect">
+                                <p:cTn presetID="2" presetClass="entr" presetSubtype="4" fill="hold" grpId="0" nodeType="afterEffect">
                                   <p:stCondLst>
-                                    <p:cond delay="16500"/>
+                                    <p:cond delay="26800"/>
                                   </p:stCondLst>
                                   <p:childTnLst>
                                     <p:set>
                                       <p:cBhvr>
-                                        <p:cTn id="54" dur="1"/>
-                                        <p:tgtEl>
-                                          <p:spTgt spid="14"/>
+                                        <p:cTn id="53" dur="1"/>
+                                        <p:tgtEl>
+                                          <p:spTgt spid="16"/>
                                         </p:tgtEl>
                                         <p:attrNameLst>
                                           <p:attrName>style.visibility</p:attrName>
@@ -12996,9 +13270,9 @@
                                     </p:set>
                                     <p:anim calcmode="lin" valueType="num">
                                       <p:cBhvr additive="base">
-                                        <p:cTn id="55" dur="400"/>
-                                        <p:tgtEl>
-                                          <p:spTgt spid="14"/>
+                                        <p:cTn id="54" dur="400"/>
+                                        <p:tgtEl>
+                                          <p:spTgt spid="16"/>
                                         </p:tgtEl>
                                         <p:attrNameLst>
                                           <p:attrName>ppt_x</p:attrName>
@@ -13019,9 +13293,9 @@
                                     </p:anim>
                                     <p:anim calcmode="lin" valueType="num">
                                       <p:cBhvr additive="base">
-                                        <p:cTn id="56" dur="400"/>
-                                        <p:tgtEl>
-                                          <p:spTgt spid="14"/>
+                                        <p:cTn id="55" dur="400"/>
+                                        <p:tgtEl>
+                                          <p:spTgt spid="16"/>
                                         </p:tgtEl>
                                         <p:attrNameLst>
                                           <p:attrName>ppt_y</p:attrName>
@@ -13044,16 +13318,16 @@
                                 </p:cTn>
                               </p:par>
                               <p:par>
-                                <p:cTn id="57" presetID="2" presetClass="entr" presetSubtype="4" fill="hold" grpId="0" nodeType="afterEffect">
+                                <p:cTn presetID="2" presetClass="entr" presetSubtype="4" fill="hold" grpId="0" nodeType="afterEffect">
                                   <p:stCondLst>
-                                    <p:cond delay="18850"/>
+                                    <p:cond delay="29750"/>
                                   </p:stCondLst>
                                   <p:childTnLst>
                                     <p:set>
                                       <p:cBhvr>
-                                        <p:cTn id="58" dur="1"/>
-                                        <p:tgtEl>
-                                          <p:spTgt spid="18"/>
+                                        <p:cTn id="56" dur="1"/>
+                                        <p:tgtEl>
+                                          <p:spTgt spid="20"/>
                                         </p:tgtEl>
                                         <p:attrNameLst>
                                           <p:attrName>style.visibility</p:attrName>
@@ -13065,9 +13339,9 @@
                                     </p:set>
                                     <p:anim calcmode="lin" valueType="num">
                                       <p:cBhvr additive="base">
-                                        <p:cTn id="59" dur="400"/>
-                                        <p:tgtEl>
-                                          <p:spTgt spid="18"/>
+                                        <p:cTn id="57" dur="400"/>
+                                        <p:tgtEl>
+                                          <p:spTgt spid="20"/>
                                         </p:tgtEl>
                                         <p:attrNameLst>
                                           <p:attrName>ppt_x</p:attrName>
@@ -13088,9 +13362,9 @@
                                     </p:anim>
                                     <p:anim calcmode="lin" valueType="num">
                                       <p:cBhvr additive="base">
-                                        <p:cTn id="60" dur="400"/>
-                                        <p:tgtEl>
-                                          <p:spTgt spid="18"/>
+                                        <p:cTn id="58" dur="400"/>
+                                        <p:tgtEl>
+                                          <p:spTgt spid="20"/>
                                         </p:tgtEl>
                                         <p:attrNameLst>
                                           <p:attrName>ppt_y</p:attrName>
@@ -13113,16 +13387,85 @@
                                 </p:cTn>
                               </p:par>
                               <p:par>
-                                <p:cTn id="61" presetID="2" presetClass="entr" presetSubtype="4" fill="hold" grpId="0" nodeType="afterEffect">
+                                <p:cTn presetID="2" presetClass="entr" presetSubtype="4" fill="hold" grpId="0" nodeType="afterEffect">
                                   <p:stCondLst>
-                                    <p:cond delay="21350"/>
+                                    <p:cond delay="32850"/>
                                   </p:stCondLst>
                                   <p:childTnLst>
                                     <p:set>
                                       <p:cBhvr>
+                                        <p:cTn id="59" dur="1"/>
+                                        <p:tgtEl>
+                                          <p:spTgt spid="21"/>
+                                        </p:tgtEl>
+                                        <p:attrNameLst>
+                                          <p:attrName>style.visibility</p:attrName>
+                                        </p:attrNameLst>
+                                      </p:cBhvr>
+                                      <p:to>
+                                        <p:strVal val="visible"/>
+                                      </p:to>
+                                    </p:set>
+                                    <p:anim calcmode="lin" valueType="num">
+                                      <p:cBhvr additive="base">
+                                        <p:cTn id="60" dur="400"/>
+                                        <p:tgtEl>
+                                          <p:spTgt spid="21"/>
+                                        </p:tgtEl>
+                                        <p:attrNameLst>
+                                          <p:attrName>ppt_x</p:attrName>
+                                        </p:attrNameLst>
+                                      </p:cBhvr>
+                                      <p:tavLst>
+                                        <p:tav tm="0">
+                                          <p:val>
+                                            <p:strVal val="#ppt_x"/>
+                                          </p:val>
+                                        </p:tav>
+                                        <p:tav tm="100000">
+                                          <p:val>
+                                            <p:strVal val="#ppt_x"/>
+                                          </p:val>
+                                        </p:tav>
+                                      </p:tavLst>
+                                    </p:anim>
+                                    <p:anim calcmode="lin" valueType="num">
+                                      <p:cBhvr additive="base">
+                                        <p:cTn id="61" dur="400"/>
+                                        <p:tgtEl>
+                                          <p:spTgt spid="21"/>
+                                        </p:tgtEl>
+                                        <p:attrNameLst>
+                                          <p:attrName>ppt_y</p:attrName>
+                                        </p:attrNameLst>
+                                      </p:cBhvr>
+                                      <p:tavLst>
+                                        <p:tav tm="0">
+                                          <p:val>
+                                            <p:strVal val="1+#ppt_h/2"/>
+                                          </p:val>
+                                        </p:tav>
+                                        <p:tav tm="100000">
+                                          <p:val>
+                                            <p:strVal val="#ppt_y"/>
+                                          </p:val>
+                                        </p:tav>
+                                      </p:tavLst>
+                                    </p:anim>
+                                  </p:childTnLst>
+                                </p:cTn>
+                              </p:par>
+                              <p:par>
+                                <p:cTn presetID="2" presetClass="entr" presetSubtype="4" fill="hold" grpId="0" nodeType="afterEffect">
+                                  <p:stCondLst>
+                                    <p:cond delay="36100"/>
+                                  </p:stCondLst>
+                                  <p:childTnLst>
+                                    <p:set>
+                                      <p:cBhvr>
                                         <p:cTn id="62" dur="1"/>
                                         <p:tgtEl>
-                                          <p:spTgt spid="15"/>
+                                          <p:spTgt spid="22"/>
                                         </p:tgtEl>
                                         <p:attrNameLst>
                                           <p:attrName>style.visibility</p:attrName>
@@ -13136,7 +13479,7 @@
                                       <p:cBhvr additive="base">
                                         <p:cTn id="63" dur="400"/>
                                         <p:tgtEl>
-                                          <p:spTgt spid="15"/>
+                                          <p:spTgt spid="22"/>
                                         </p:tgtEl>
                                         <p:attrNameLst>
                                           <p:attrName>ppt_x</p:attrName>
@@ -13158,351 +13501,6 @@
                                     <p:anim calcmode="lin" valueType="num">
                                       <p:cBhvr additive="base">
                                         <p:cTn id="64" dur="400"/>
-                                        <p:tgtEl>
-                                          <p:spTgt spid="15"/>
-                                        </p:tgtEl>
-                                        <p:attrNameLst>
-                                          <p:attrName>ppt_y</p:attrName>
-                                        </p:attrNameLst>
-                                      </p:cBhvr>
-                                      <p:tavLst>
-                                        <p:tav tm="0">
-                                          <p:val>
-                                            <p:strVal val="1+#ppt_h/2"/>
-                                          </p:val>
-                                        </p:tav>
-                                        <p:tav tm="100000">
-                                          <p:val>
-                                            <p:strVal val="#ppt_y"/>
-                                          </p:val>
-                                        </p:tav>
-                                      </p:tavLst>
-                                    </p:anim>
-                                  </p:childTnLst>
-                                </p:cTn>
-                              </p:par>
-                              <p:par>
-                                <p:cTn id="65" presetID="2" presetClass="entr" presetSubtype="4" fill="hold" grpId="0" nodeType="afterEffect">
-                                  <p:stCondLst>
-                                    <p:cond delay="24000"/>
-                                  </p:stCondLst>
-                                  <p:childTnLst>
-                                    <p:set>
-                                      <p:cBhvr>
-                                        <p:cTn id="66" dur="1"/>
-                                        <p:tgtEl>
-                                          <p:spTgt spid="19"/>
-                                        </p:tgtEl>
-                                        <p:attrNameLst>
-                                          <p:attrName>style.visibility</p:attrName>
-                                        </p:attrNameLst>
-                                      </p:cBhvr>
-                                      <p:to>
-                                        <p:strVal val="visible"/>
-                                      </p:to>
-                                    </p:set>
-                                    <p:anim calcmode="lin" valueType="num">
-                                      <p:cBhvr additive="base">
-                                        <p:cTn id="67" dur="400"/>
-                                        <p:tgtEl>
-                                          <p:spTgt spid="19"/>
-                                        </p:tgtEl>
-                                        <p:attrNameLst>
-                                          <p:attrName>ppt_x</p:attrName>
-                                        </p:attrNameLst>
-                                      </p:cBhvr>
-                                      <p:tavLst>
-                                        <p:tav tm="0">
-                                          <p:val>
-                                            <p:strVal val="#ppt_x"/>
-                                          </p:val>
-                                        </p:tav>
-                                        <p:tav tm="100000">
-                                          <p:val>
-                                            <p:strVal val="#ppt_x"/>
-                                          </p:val>
-                                        </p:tav>
-                                      </p:tavLst>
-                                    </p:anim>
-                                    <p:anim calcmode="lin" valueType="num">
-                                      <p:cBhvr additive="base">
-                                        <p:cTn id="68" dur="400"/>
-                                        <p:tgtEl>
-                                          <p:spTgt spid="19"/>
-                                        </p:tgtEl>
-                                        <p:attrNameLst>
-                                          <p:attrName>ppt_y</p:attrName>
-                                        </p:attrNameLst>
-                                      </p:cBhvr>
-                                      <p:tavLst>
-                                        <p:tav tm="0">
-                                          <p:val>
-                                            <p:strVal val="1+#ppt_h/2"/>
-                                          </p:val>
-                                        </p:tav>
-                                        <p:tav tm="100000">
-                                          <p:val>
-                                            <p:strVal val="#ppt_y"/>
-                                          </p:val>
-                                        </p:tav>
-                                      </p:tavLst>
-                                    </p:anim>
-                                  </p:childTnLst>
-                                </p:cTn>
-                              </p:par>
-                              <p:par>
-                                <p:cTn id="69" presetID="2" presetClass="entr" presetSubtype="4" fill="hold" grpId="0" nodeType="afterEffect">
-                                  <p:stCondLst>
-                                    <p:cond delay="26800"/>
-                                  </p:stCondLst>
-                                  <p:childTnLst>
-                                    <p:set>
-                                      <p:cBhvr>
-                                        <p:cTn id="70" dur="1"/>
-                                        <p:tgtEl>
-                                          <p:spTgt spid="16"/>
-                                        </p:tgtEl>
-                                        <p:attrNameLst>
-                                          <p:attrName>style.visibility</p:attrName>
-                                        </p:attrNameLst>
-                                      </p:cBhvr>
-                                      <p:to>
-                                        <p:strVal val="visible"/>
-                                      </p:to>
-                                    </p:set>
-                                    <p:anim calcmode="lin" valueType="num">
-                                      <p:cBhvr additive="base">
-                                        <p:cTn id="71" dur="400"/>
-                                        <p:tgtEl>
-                                          <p:spTgt spid="16"/>
-                                        </p:tgtEl>
-                                        <p:attrNameLst>
-                                          <p:attrName>ppt_x</p:attrName>
-                                        </p:attrNameLst>
-                                      </p:cBhvr>
-                                      <p:tavLst>
-                                        <p:tav tm="0">
-                                          <p:val>
-                                            <p:strVal val="#ppt_x"/>
-                                          </p:val>
-                                        </p:tav>
-                                        <p:tav tm="100000">
-                                          <p:val>
-                                            <p:strVal val="#ppt_x"/>
-                                          </p:val>
-                                        </p:tav>
-                                      </p:tavLst>
-                                    </p:anim>
-                                    <p:anim calcmode="lin" valueType="num">
-                                      <p:cBhvr additive="base">
-                                        <p:cTn id="72" dur="400"/>
-                                        <p:tgtEl>
-                                          <p:spTgt spid="16"/>
-                                        </p:tgtEl>
-                                        <p:attrNameLst>
-                                          <p:attrName>ppt_y</p:attrName>
-                                        </p:attrNameLst>
-                                      </p:cBhvr>
-                                      <p:tavLst>
-                                        <p:tav tm="0">
-                                          <p:val>
-                                            <p:strVal val="1+#ppt_h/2"/>
-                                          </p:val>
-                                        </p:tav>
-                                        <p:tav tm="100000">
-                                          <p:val>
-                                            <p:strVal val="#ppt_y"/>
-                                          </p:val>
-                                        </p:tav>
-                                      </p:tavLst>
-                                    </p:anim>
-                                  </p:childTnLst>
-                                </p:cTn>
-                              </p:par>
-                              <p:par>
-                                <p:cTn id="73" presetID="2" presetClass="entr" presetSubtype="4" fill="hold" grpId="0" nodeType="afterEffect">
-                                  <p:stCondLst>
-                                    <p:cond delay="29750"/>
-                                  </p:stCondLst>
-                                  <p:childTnLst>
-                                    <p:set>
-                                      <p:cBhvr>
-                                        <p:cTn id="74" dur="1"/>
-                                        <p:tgtEl>
-                                          <p:spTgt spid="20"/>
-                                        </p:tgtEl>
-                                        <p:attrNameLst>
-                                          <p:attrName>style.visibility</p:attrName>
-                                        </p:attrNameLst>
-                                      </p:cBhvr>
-                                      <p:to>
-                                        <p:strVal val="visible"/>
-                                      </p:to>
-                                    </p:set>
-                                    <p:anim calcmode="lin" valueType="num">
-                                      <p:cBhvr additive="base">
-                                        <p:cTn id="75" dur="400"/>
-                                        <p:tgtEl>
-                                          <p:spTgt spid="20"/>
-                                        </p:tgtEl>
-                                        <p:attrNameLst>
-                                          <p:attrName>ppt_x</p:attrName>
-                                        </p:attrNameLst>
-                                      </p:cBhvr>
-                                      <p:tavLst>
-                                        <p:tav tm="0">
-                                          <p:val>
-                                            <p:strVal val="#ppt_x"/>
-                                          </p:val>
-                                        </p:tav>
-                                        <p:tav tm="100000">
-                                          <p:val>
-                                            <p:strVal val="#ppt_x"/>
-                                          </p:val>
-                                        </p:tav>
-                                      </p:tavLst>
-                                    </p:anim>
-                                    <p:anim calcmode="lin" valueType="num">
-                                      <p:cBhvr additive="base">
-                                        <p:cTn id="76" dur="400"/>
-                                        <p:tgtEl>
-                                          <p:spTgt spid="20"/>
-                                        </p:tgtEl>
-                                        <p:attrNameLst>
-                                          <p:attrName>ppt_y</p:attrName>
-                                        </p:attrNameLst>
-                                      </p:cBhvr>
-                                      <p:tavLst>
-                                        <p:tav tm="0">
-                                          <p:val>
-                                            <p:strVal val="1+#ppt_h/2"/>
-                                          </p:val>
-                                        </p:tav>
-                                        <p:tav tm="100000">
-                                          <p:val>
-                                            <p:strVal val="#ppt_y"/>
-                                          </p:val>
-                                        </p:tav>
-                                      </p:tavLst>
-                                    </p:anim>
-                                  </p:childTnLst>
-                                </p:cTn>
-                              </p:par>
-                              <p:par>
-                                <p:cTn id="77" presetID="2" presetClass="entr" presetSubtype="4" fill="hold" grpId="0" nodeType="afterEffect">
-                                  <p:stCondLst>
-                                    <p:cond delay="32850"/>
-                                  </p:stCondLst>
-                                  <p:childTnLst>
-                                    <p:set>
-                                      <p:cBhvr>
-                                        <p:cTn id="78" dur="1"/>
-                                        <p:tgtEl>
-                                          <p:spTgt spid="21"/>
-                                        </p:tgtEl>
-                                        <p:attrNameLst>
-                                          <p:attrName>style.visibility</p:attrName>
-                                        </p:attrNameLst>
-                                      </p:cBhvr>
-                                      <p:to>
-                                        <p:strVal val="visible"/>
-                                      </p:to>
-                                    </p:set>
-                                    <p:anim calcmode="lin" valueType="num">
-                                      <p:cBhvr additive="base">
-                                        <p:cTn id="79" dur="400"/>
-                                        <p:tgtEl>
-                                          <p:spTgt spid="21"/>
-                                        </p:tgtEl>
-                                        <p:attrNameLst>
-                                          <p:attrName>ppt_x</p:attrName>
-                                        </p:attrNameLst>
-                                      </p:cBhvr>
-                                      <p:tavLst>
-                                        <p:tav tm="0">
-                                          <p:val>
-                                            <p:strVal val="#ppt_x"/>
-                                          </p:val>
-                                        </p:tav>
-                                        <p:tav tm="100000">
-                                          <p:val>
-                                            <p:strVal val="#ppt_x"/>
-                                          </p:val>
-                                        </p:tav>
-                                      </p:tavLst>
-                                    </p:anim>
-                                    <p:anim calcmode="lin" valueType="num">
-                                      <p:cBhvr additive="base">
-                                        <p:cTn id="80" dur="400"/>
-                                        <p:tgtEl>
-                                          <p:spTgt spid="21"/>
-                                        </p:tgtEl>
-                                        <p:attrNameLst>
-                                          <p:attrName>ppt_y</p:attrName>
-                                        </p:attrNameLst>
-                                      </p:cBhvr>
-                                      <p:tavLst>
-                                        <p:tav tm="0">
-                                          <p:val>
-                                            <p:strVal val="1+#ppt_h/2"/>
-                                          </p:val>
-                                        </p:tav>
-                                        <p:tav tm="100000">
-                                          <p:val>
-                                            <p:strVal val="#ppt_y"/>
-                                          </p:val>
-                                        </p:tav>
-                                      </p:tavLst>
-                                    </p:anim>
-                                  </p:childTnLst>
-                                </p:cTn>
-                              </p:par>
-                              <p:par>
-                                <p:cTn id="81" presetID="2" presetClass="entr" presetSubtype="4" fill="hold" grpId="0" nodeType="afterEffect">
-                                  <p:stCondLst>
-                                    <p:cond delay="36100"/>
-                                  </p:stCondLst>
-                                  <p:childTnLst>
-                                    <p:set>
-                                      <p:cBhvr>
-                                        <p:cTn id="82" dur="1"/>
-                                        <p:tgtEl>
-                                          <p:spTgt spid="22"/>
-                                        </p:tgtEl>
-                                        <p:attrNameLst>
-                                          <p:attrName>style.visibility</p:attrName>
-                                        </p:attrNameLst>
-                                      </p:cBhvr>
-                                      <p:to>
-                                        <p:strVal val="visible"/>
-                                      </p:to>
-                                    </p:set>
-                                    <p:anim calcmode="lin" valueType="num">
-                                      <p:cBhvr additive="base">
-                                        <p:cTn id="83" dur="400"/>
-                                        <p:tgtEl>
-                                          <p:spTgt spid="22"/>
-                                        </p:tgtEl>
-                                        <p:attrNameLst>
-                                          <p:attrName>ppt_x</p:attrName>
-                                        </p:attrNameLst>
-                                      </p:cBhvr>
-                                      <p:tavLst>
-                                        <p:tav tm="0">
-                                          <p:val>
-                                            <p:strVal val="#ppt_x"/>
-                                          </p:val>
-                                        </p:tav>
-                                        <p:tav tm="100000">
-                                          <p:val>
-                                            <p:strVal val="#ppt_x"/>
-                                          </p:val>
-                                        </p:tav>
-                                      </p:tavLst>
-                                    </p:anim>
-                                    <p:anim calcmode="lin" valueType="num">
-                                      <p:cBhvr additive="base">
-                                        <p:cTn id="84" dur="400"/>
                                         <p:tgtEl>
                                           <p:spTgt spid="22"/>
                                         </p:tgtEl>
@@ -14440,14 +14438,14 @@
                             </p:stCondLst>
                             <p:childTnLst>
                               <p:par>
-                                <p:cTn id="5" presetID="10" presetClass="entr" presetSubtype="0" fill="hold" grpId="0" nodeType="afterEffect">
+                                <p:cTn presetID="10" presetClass="entr" presetSubtype="0" fill="hold" grpId="0" nodeType="afterEffect">
                                   <p:stCondLst>
                                     <p:cond delay="0"/>
                                   </p:stCondLst>
                                   <p:childTnLst>
                                     <p:set>
                                       <p:cBhvr>
-                                        <p:cTn id="6" dur="1"/>
+                                        <p:cTn id="5" dur="1"/>
                                         <p:tgtEl>
                                           <p:spTgt spid="2"/>
                                         </p:tgtEl>
@@ -14461,7 +14459,7 @@
                                     </p:set>
                                     <p:animEffect transition="in" filter="fade">
                                       <p:cBhvr>
-                                        <p:cTn id="7" dur="400"/>
+                                        <p:cTn id="6" dur="400"/>
                                         <p:tgtEl>
                                           <p:spTgt spid="2"/>
                                         </p:tgtEl>
@@ -14471,14 +14469,14 @@
                                 </p:cTn>
                               </p:par>
                               <p:par>
-                                <p:cTn id="8" presetID="10" presetClass="entr" presetSubtype="0" fill="hold" grpId="0" nodeType="afterEffect">
+                                <p:cTn presetID="10" presetClass="entr" presetSubtype="0" fill="hold" grpId="0" nodeType="afterEffect">
                                   <p:stCondLst>
                                     <p:cond delay="520"/>
                                   </p:stCondLst>
                                   <p:childTnLst>
                                     <p:set>
                                       <p:cBhvr>
-                                        <p:cTn id="9" dur="1"/>
+                                        <p:cTn id="7" dur="1"/>
                                         <p:tgtEl>
                                           <p:spTgt spid="3"/>
                                         </p:tgtEl>
@@ -14492,7 +14490,7 @@
                                     </p:set>
                                     <p:animEffect transition="in" filter="fade">
                                       <p:cBhvr>
-                                        <p:cTn id="10" dur="400"/>
+                                        <p:cTn id="8" dur="400"/>
                                         <p:tgtEl>
                                           <p:spTgt spid="3"/>
                                         </p:tgtEl>
@@ -14502,14 +14500,14 @@
                                 </p:cTn>
                               </p:par>
                               <p:par>
-                                <p:cTn id="11" presetID="10" presetClass="entr" presetSubtype="0" fill="hold" grpId="0" nodeType="afterEffect">
+                                <p:cTn presetID="10" presetClass="entr" presetSubtype="0" fill="hold" grpId="0" nodeType="afterEffect">
                                   <p:stCondLst>
                                     <p:cond delay="1160"/>
                                   </p:stCondLst>
                                   <p:childTnLst>
                                     <p:set>
                                       <p:cBhvr>
-                                        <p:cTn id="12" dur="1"/>
+                                        <p:cTn id="9" dur="1"/>
                                         <p:tgtEl>
                                           <p:spTgt spid="5"/>
                                         </p:tgtEl>
@@ -14523,7 +14521,7 @@
                                     </p:set>
                                     <p:animEffect transition="in" filter="fade">
                                       <p:cBhvr>
-                                        <p:cTn id="13" dur="400"/>
+                                        <p:cTn id="10" dur="400"/>
                                         <p:tgtEl>
                                           <p:spTgt spid="5"/>
                                         </p:tgtEl>
@@ -14533,14 +14531,14 @@
                                 </p:cTn>
                               </p:par>
                               <p:par>
-                                <p:cTn id="14" presetID="10" presetClass="entr" presetSubtype="0" fill="hold" grpId="0" nodeType="afterEffect">
+                                <p:cTn presetID="10" presetClass="entr" presetSubtype="0" fill="hold" grpId="0" nodeType="afterEffect">
                                   <p:stCondLst>
                                     <p:cond delay="1920"/>
                                   </p:stCondLst>
                                   <p:childTnLst>
                                     <p:set>
                                       <p:cBhvr>
-                                        <p:cTn id="15" dur="1"/>
+                                        <p:cTn id="11" dur="1"/>
                                         <p:tgtEl>
                                           <p:spTgt spid="7"/>
                                         </p:tgtEl>
@@ -14554,7 +14552,7 @@
                                     </p:set>
                                     <p:animEffect transition="in" filter="fade">
                                       <p:cBhvr>
-                                        <p:cTn id="16" dur="400"/>
+                                        <p:cTn id="12" dur="400"/>
                                         <p:tgtEl>
                                           <p:spTgt spid="7"/>
                                         </p:tgtEl>
@@ -14564,14 +14562,14 @@
                                 </p:cTn>
                               </p:par>
                               <p:par>
-                                <p:cTn id="17" presetID="10" presetClass="entr" presetSubtype="0" fill="hold" grpId="0" nodeType="afterEffect">
+                                <p:cTn presetID="10" presetClass="entr" presetSubtype="0" fill="hold" grpId="0" nodeType="afterEffect">
                                   <p:stCondLst>
                                     <p:cond delay="2800"/>
                                   </p:stCondLst>
                                   <p:childTnLst>
                                     <p:set>
                                       <p:cBhvr>
-                                        <p:cTn id="18" dur="1"/>
+                                        <p:cTn id="13" dur="1"/>
                                         <p:tgtEl>
                                           <p:spTgt spid="9"/>
                                         </p:tgtEl>
@@ -14585,7 +14583,7 @@
                                     </p:set>
                                     <p:animEffect transition="in" filter="fade">
                                       <p:cBhvr>
-                                        <p:cTn id="19" dur="400"/>
+                                        <p:cTn id="14" dur="400"/>
                                         <p:tgtEl>
                                           <p:spTgt spid="9"/>
                                         </p:tgtEl>
@@ -14595,14 +14593,14 @@
                                 </p:cTn>
                               </p:par>
                               <p:par>
-                                <p:cTn id="20" presetID="10" presetClass="entr" presetSubtype="0" fill="hold" grpId="0" nodeType="afterEffect">
+                                <p:cTn presetID="10" presetClass="entr" presetSubtype="0" fill="hold" grpId="0" nodeType="afterEffect">
                                   <p:stCondLst>
                                     <p:cond delay="3800"/>
                                   </p:stCondLst>
                                   <p:childTnLst>
                                     <p:set>
                                       <p:cBhvr>
-                                        <p:cTn id="21" dur="1"/>
+                                        <p:cTn id="15" dur="1"/>
                                         <p:tgtEl>
                                           <p:spTgt spid="6"/>
                                         </p:tgtEl>
@@ -14616,7 +14614,7 @@
                                     </p:set>
                                     <p:animEffect transition="in" filter="fade">
                                       <p:cBhvr>
-                                        <p:cTn id="22" dur="400"/>
+                                        <p:cTn id="16" dur="400"/>
                                         <p:tgtEl>
                                           <p:spTgt spid="6"/>
                                         </p:tgtEl>
@@ -14626,14 +14624,14 @@
                                 </p:cTn>
                               </p:par>
                               <p:par>
-                                <p:cTn id="23" presetID="10" presetClass="entr" presetSubtype="0" fill="hold" grpId="0" nodeType="afterEffect">
+                                <p:cTn presetID="10" presetClass="entr" presetSubtype="0" fill="hold" grpId="0" nodeType="afterEffect">
                                   <p:stCondLst>
                                     <p:cond delay="4920"/>
                                   </p:stCondLst>
                                   <p:childTnLst>
                                     <p:set>
                                       <p:cBhvr>
-                                        <p:cTn id="24" dur="1"/>
+                                        <p:cTn id="17" dur="1"/>
                                         <p:tgtEl>
                                           <p:spTgt spid="8"/>
                                         </p:tgtEl>
@@ -14647,7 +14645,7 @@
                                     </p:set>
                                     <p:animEffect transition="in" filter="fade">
                                       <p:cBhvr>
-                                        <p:cTn id="25" dur="400"/>
+                                        <p:cTn id="18" dur="400"/>
                                         <p:tgtEl>
                                           <p:spTgt spid="8"/>
                                         </p:tgtEl>
@@ -14657,14 +14655,14 @@
                                 </p:cTn>
                               </p:par>
                               <p:par>
-                                <p:cTn id="26" presetID="10" presetClass="entr" presetSubtype="0" fill="hold" grpId="0" nodeType="afterEffect">
+                                <p:cTn presetID="10" presetClass="entr" presetSubtype="0" fill="hold" grpId="0" nodeType="afterEffect">
                                   <p:stCondLst>
                                     <p:cond delay="6160"/>
                                   </p:stCondLst>
                                   <p:childTnLst>
                                     <p:set>
                                       <p:cBhvr>
-                                        <p:cTn id="27" dur="1"/>
+                                        <p:cTn id="19" dur="1"/>
                                         <p:tgtEl>
                                           <p:spTgt spid="10"/>
                                         </p:tgtEl>
@@ -14678,7 +14676,7 @@
                                     </p:set>
                                     <p:animEffect transition="in" filter="fade">
                                       <p:cBhvr>
-                                        <p:cTn id="28" dur="400"/>
+                                        <p:cTn id="20" dur="400"/>
                                         <p:tgtEl>
                                           <p:spTgt spid="10"/>
                                         </p:tgtEl>
@@ -14688,14 +14686,14 @@
                                 </p:cTn>
                               </p:par>
                               <p:par>
-                                <p:cTn id="29" presetID="10" presetClass="entr" presetSubtype="0" fill="hold" grpId="0" nodeType="afterEffect">
+                                <p:cTn presetID="10" presetClass="entr" presetSubtype="0" fill="hold" grpId="0" nodeType="afterEffect">
                                   <p:stCondLst>
                                     <p:cond delay="7520"/>
                                   </p:stCondLst>
                                   <p:childTnLst>
                                     <p:set>
                                       <p:cBhvr>
-                                        <p:cTn id="30" dur="1"/>
+                                        <p:cTn id="21" dur="1"/>
                                         <p:tgtEl>
                                           <p:spTgt spid="12"/>
                                         </p:tgtEl>
@@ -14709,7 +14707,7 @@
                                     </p:set>
                                     <p:animEffect transition="in" filter="fade">
                                       <p:cBhvr>
-                                        <p:cTn id="31" dur="400"/>
+                                        <p:cTn id="22" dur="400"/>
                                         <p:tgtEl>
                                           <p:spTgt spid="12"/>
                                         </p:tgtEl>
@@ -14719,14 +14717,14 @@
                                 </p:cTn>
                               </p:par>
                               <p:par>
-                                <p:cTn id="32" presetID="10" presetClass="entr" presetSubtype="0" fill="hold" grpId="0" nodeType="afterEffect">
+                                <p:cTn presetID="10" presetClass="entr" presetSubtype="0" fill="hold" grpId="0" nodeType="afterEffect">
                                   <p:stCondLst>
                                     <p:cond delay="9000"/>
                                   </p:stCondLst>
                                   <p:childTnLst>
                                     <p:set>
                                       <p:cBhvr>
-                                        <p:cTn id="33" dur="1"/>
+                                        <p:cTn id="23" dur="1"/>
                                         <p:tgtEl>
                                           <p:spTgt spid="15"/>
                                         </p:tgtEl>
@@ -14740,7 +14738,7 @@
                                     </p:set>
                                     <p:animEffect transition="in" filter="fade">
                                       <p:cBhvr>
-                                        <p:cTn id="34" dur="400"/>
+                                        <p:cTn id="24" dur="400"/>
                                         <p:tgtEl>
                                           <p:spTgt spid="15"/>
                                         </p:tgtEl>
@@ -14750,14 +14748,14 @@
                                 </p:cTn>
                               </p:par>
                               <p:par>
-                                <p:cTn id="35" presetID="10" presetClass="entr" presetSubtype="0" fill="hold" grpId="0" nodeType="afterEffect">
+                                <p:cTn presetID="10" presetClass="entr" presetSubtype="0" fill="hold" grpId="0" nodeType="afterEffect">
                                   <p:stCondLst>
                                     <p:cond delay="10600"/>
                                   </p:stCondLst>
                                   <p:childTnLst>
                                     <p:set>
                                       <p:cBhvr>
-                                        <p:cTn id="36" dur="1"/>
+                                        <p:cTn id="25" dur="1"/>
                                         <p:tgtEl>
                                           <p:spTgt spid="18"/>
                                         </p:tgtEl>
@@ -14771,7 +14769,7 @@
                                     </p:set>
                                     <p:animEffect transition="in" filter="fade">
                                       <p:cBhvr>
-                                        <p:cTn id="37" dur="400"/>
+                                        <p:cTn id="26" dur="400"/>
                                         <p:tgtEl>
                                           <p:spTgt spid="18"/>
                                         </p:tgtEl>
@@ -14781,14 +14779,14 @@
                                 </p:cTn>
                               </p:par>
                               <p:par>
-                                <p:cTn id="38" presetID="10" presetClass="entr" presetSubtype="0" fill="hold" grpId="0" nodeType="afterEffect">
+                                <p:cTn presetID="10" presetClass="entr" presetSubtype="0" fill="hold" grpId="0" nodeType="afterEffect">
                                   <p:stCondLst>
                                     <p:cond delay="12320"/>
                                   </p:stCondLst>
                                   <p:childTnLst>
                                     <p:set>
                                       <p:cBhvr>
-                                        <p:cTn id="39" dur="1"/>
+                                        <p:cTn id="27" dur="1"/>
                                         <p:tgtEl>
                                           <p:spTgt spid="21"/>
                                         </p:tgtEl>
@@ -14802,7 +14800,7 @@
                                     </p:set>
                                     <p:animEffect transition="in" filter="fade">
                                       <p:cBhvr>
-                                        <p:cTn id="40" dur="400"/>
+                                        <p:cTn id="28" dur="400"/>
                                         <p:tgtEl>
                                           <p:spTgt spid="21"/>
                                         </p:tgtEl>
@@ -14812,14 +14810,14 @@
                                 </p:cTn>
                               </p:par>
                               <p:par>
-                                <p:cTn id="41" presetID="10" presetClass="entr" presetSubtype="0" fill="hold" grpId="0" nodeType="afterEffect">
+                                <p:cTn presetID="10" presetClass="entr" presetSubtype="0" fill="hold" grpId="0" nodeType="afterEffect">
                                   <p:stCondLst>
                                     <p:cond delay="14160"/>
                                   </p:stCondLst>
                                   <p:childTnLst>
                                     <p:set>
                                       <p:cBhvr>
-                                        <p:cTn id="42" dur="1"/>
+                                        <p:cTn id="29" dur="1"/>
                                         <p:tgtEl>
                                           <p:spTgt spid="11"/>
                                         </p:tgtEl>
@@ -14833,7 +14831,7 @@
                                     </p:set>
                                     <p:animEffect transition="in" filter="fade">
                                       <p:cBhvr>
-                                        <p:cTn id="43" dur="400"/>
+                                        <p:cTn id="30" dur="400"/>
                                         <p:tgtEl>
                                           <p:spTgt spid="11"/>
                                         </p:tgtEl>
@@ -14843,14 +14841,14 @@
                                 </p:cTn>
                               </p:par>
                               <p:par>
-                                <p:cTn id="44" presetID="10" presetClass="entr" presetSubtype="0" fill="hold" grpId="0" nodeType="afterEffect">
+                                <p:cTn presetID="10" presetClass="entr" presetSubtype="0" fill="hold" grpId="0" nodeType="afterEffect">
                                   <p:stCondLst>
                                     <p:cond delay="16120"/>
                                   </p:stCondLst>
                                   <p:childTnLst>
                                     <p:set>
                                       <p:cBhvr>
-                                        <p:cTn id="45" dur="1"/>
+                                        <p:cTn id="31" dur="1"/>
                                         <p:tgtEl>
                                           <p:spTgt spid="13"/>
                                         </p:tgtEl>
@@ -14864,7 +14862,7 @@
                                     </p:set>
                                     <p:animEffect transition="in" filter="fade">
                                       <p:cBhvr>
-                                        <p:cTn id="46" dur="400"/>
+                                        <p:cTn id="32" dur="400"/>
                                         <p:tgtEl>
                                           <p:spTgt spid="13"/>
                                         </p:tgtEl>
@@ -14874,14 +14872,14 @@
                                 </p:cTn>
                               </p:par>
                               <p:par>
-                                <p:cTn id="47" presetID="10" presetClass="entr" presetSubtype="0" fill="hold" grpId="0" nodeType="afterEffect">
+                                <p:cTn presetID="10" presetClass="entr" presetSubtype="0" fill="hold" grpId="0" nodeType="afterEffect">
                                   <p:stCondLst>
                                     <p:cond delay="18200"/>
                                   </p:stCondLst>
                                   <p:childTnLst>
                                     <p:set>
                                       <p:cBhvr>
-                                        <p:cTn id="48" dur="1"/>
+                                        <p:cTn id="33" dur="1"/>
                                         <p:tgtEl>
                                           <p:spTgt spid="16"/>
                                         </p:tgtEl>
@@ -14895,7 +14893,7 @@
                                     </p:set>
                                     <p:animEffect transition="in" filter="fade">
                                       <p:cBhvr>
-                                        <p:cTn id="49" dur="400"/>
+                                        <p:cTn id="34" dur="400"/>
                                         <p:tgtEl>
                                           <p:spTgt spid="16"/>
                                         </p:tgtEl>
@@ -14905,14 +14903,14 @@
                                 </p:cTn>
                               </p:par>
                               <p:par>
-                                <p:cTn id="50" presetID="10" presetClass="entr" presetSubtype="0" fill="hold" grpId="0" nodeType="afterEffect">
+                                <p:cTn presetID="10" presetClass="entr" presetSubtype="0" fill="hold" grpId="0" nodeType="afterEffect">
                                   <p:stCondLst>
                                     <p:cond delay="20400"/>
                                   </p:stCondLst>
                                   <p:childTnLst>
                                     <p:set>
                                       <p:cBhvr>
-                                        <p:cTn id="51" dur="1"/>
+                                        <p:cTn id="35" dur="1"/>
                                         <p:tgtEl>
                                           <p:spTgt spid="19"/>
                                         </p:tgtEl>
@@ -14926,7 +14924,7 @@
                                     </p:set>
                                     <p:animEffect transition="in" filter="fade">
                                       <p:cBhvr>
-                                        <p:cTn id="52" dur="400"/>
+                                        <p:cTn id="36" dur="400"/>
                                         <p:tgtEl>
                                           <p:spTgt spid="19"/>
                                         </p:tgtEl>
@@ -14936,14 +14934,14 @@
                                 </p:cTn>
                               </p:par>
                               <p:par>
-                                <p:cTn id="53" presetID="10" presetClass="entr" presetSubtype="0" fill="hold" grpId="0" nodeType="afterEffect">
+                                <p:cTn presetID="10" presetClass="entr" presetSubtype="0" fill="hold" grpId="0" nodeType="afterEffect">
                                   <p:stCondLst>
                                     <p:cond delay="22720"/>
                                   </p:stCondLst>
                                   <p:childTnLst>
                                     <p:set>
                                       <p:cBhvr>
-                                        <p:cTn id="54" dur="1"/>
+                                        <p:cTn id="37" dur="1"/>
                                         <p:tgtEl>
                                           <p:spTgt spid="22"/>
                                         </p:tgtEl>
@@ -14957,7 +14955,7 @@
                                     </p:set>
                                     <p:animEffect transition="in" filter="fade">
                                       <p:cBhvr>
-                                        <p:cTn id="55" dur="400"/>
+                                        <p:cTn id="38" dur="400"/>
                                         <p:tgtEl>
                                           <p:spTgt spid="22"/>
                                         </p:tgtEl>
@@ -14967,14 +14965,14 @@
                                 </p:cTn>
                               </p:par>
                               <p:par>
-                                <p:cTn id="56" presetID="10" presetClass="entr" presetSubtype="0" fill="hold" grpId="0" nodeType="afterEffect">
+                                <p:cTn presetID="10" presetClass="entr" presetSubtype="0" fill="hold" grpId="0" nodeType="afterEffect">
                                   <p:stCondLst>
                                     <p:cond delay="25160"/>
                                   </p:stCondLst>
                                   <p:childTnLst>
                                     <p:set>
                                       <p:cBhvr>
-                                        <p:cTn id="57" dur="1"/>
+                                        <p:cTn id="39" dur="1"/>
                                         <p:tgtEl>
                                           <p:spTgt spid="14"/>
                                         </p:tgtEl>
@@ -14988,7 +14986,7 @@
                                     </p:set>
                                     <p:animEffect transition="in" filter="fade">
                                       <p:cBhvr>
-                                        <p:cTn id="58" dur="400"/>
+                                        <p:cTn id="40" dur="400"/>
                                         <p:tgtEl>
                                           <p:spTgt spid="14"/>
                                         </p:tgtEl>
@@ -14998,14 +14996,14 @@
                                 </p:cTn>
                               </p:par>
                               <p:par>
-                                <p:cTn id="59" presetID="10" presetClass="entr" presetSubtype="0" fill="hold" grpId="0" nodeType="afterEffect">
+                                <p:cTn presetID="10" presetClass="entr" presetSubtype="0" fill="hold" grpId="0" nodeType="afterEffect">
                                   <p:stCondLst>
                                     <p:cond delay="27720"/>
                                   </p:stCondLst>
                                   <p:childTnLst>
                                     <p:set>
                                       <p:cBhvr>
-                                        <p:cTn id="60" dur="1"/>
+                                        <p:cTn id="41" dur="1"/>
                                         <p:tgtEl>
                                           <p:spTgt spid="17"/>
                                         </p:tgtEl>
@@ -15019,7 +15017,7 @@
                                     </p:set>
                                     <p:animEffect transition="in" filter="fade">
                                       <p:cBhvr>
-                                        <p:cTn id="61" dur="400"/>
+                                        <p:cTn id="42" dur="400"/>
                                         <p:tgtEl>
                                           <p:spTgt spid="17"/>
                                         </p:tgtEl>
@@ -15029,14 +15027,14 @@
                                 </p:cTn>
                               </p:par>
                               <p:par>
-                                <p:cTn id="62" presetID="10" presetClass="entr" presetSubtype="0" fill="hold" grpId="0" nodeType="afterEffect">
+                                <p:cTn presetID="10" presetClass="entr" presetSubtype="0" fill="hold" grpId="0" nodeType="afterEffect">
                                   <p:stCondLst>
                                     <p:cond delay="30400"/>
                                   </p:stCondLst>
                                   <p:childTnLst>
                                     <p:set>
                                       <p:cBhvr>
-                                        <p:cTn id="63" dur="1"/>
+                                        <p:cTn id="43" dur="1"/>
                                         <p:tgtEl>
                                           <p:spTgt spid="20"/>
                                         </p:tgtEl>
@@ -15050,7 +15048,7 @@
                                     </p:set>
                                     <p:animEffect transition="in" filter="fade">
                                       <p:cBhvr>
-                                        <p:cTn id="64" dur="400"/>
+                                        <p:cTn id="44" dur="400"/>
                                         <p:tgtEl>
                                           <p:spTgt spid="20"/>
                                         </p:tgtEl>
@@ -15060,14 +15058,14 @@
                                 </p:cTn>
                               </p:par>
                               <p:par>
-                                <p:cTn id="65" presetID="10" presetClass="entr" presetSubtype="0" fill="hold" grpId="0" nodeType="afterEffect">
+                                <p:cTn presetID="10" presetClass="entr" presetSubtype="0" fill="hold" grpId="0" nodeType="afterEffect">
                                   <p:stCondLst>
                                     <p:cond delay="33200"/>
                                   </p:stCondLst>
                                   <p:childTnLst>
                                     <p:set>
                                       <p:cBhvr>
-                                        <p:cTn id="66" dur="1"/>
+                                        <p:cTn id="45" dur="1"/>
                                         <p:tgtEl>
                                           <p:spTgt spid="23"/>
                                         </p:tgtEl>
@@ -15081,7 +15079,7 @@
                                     </p:set>
                                     <p:animEffect transition="in" filter="fade">
                                       <p:cBhvr>
-                                        <p:cTn id="67" dur="400"/>
+                                        <p:cTn id="46" dur="400"/>
                                         <p:tgtEl>
                                           <p:spTgt spid="23"/>
                                         </p:tgtEl>
@@ -15091,14 +15089,14 @@
                                 </p:cTn>
                               </p:par>
                               <p:par>
-                                <p:cTn id="68" presetID="10" presetClass="entr" presetSubtype="0" fill="hold" grpId="0" nodeType="afterEffect">
+                                <p:cTn presetID="10" presetClass="entr" presetSubtype="0" fill="hold" grpId="0" nodeType="afterEffect">
                                   <p:stCondLst>
                                     <p:cond delay="36120"/>
                                   </p:stCondLst>
                                   <p:childTnLst>
                                     <p:set>
                                       <p:cBhvr>
-                                        <p:cTn id="69" dur="1"/>
+                                        <p:cTn id="47" dur="1"/>
                                         <p:tgtEl>
                                           <p:spTgt spid="24"/>
                                         </p:tgtEl>
@@ -15112,7 +15110,7 @@
                                     </p:set>
                                     <p:animEffect transition="in" filter="fade">
                                       <p:cBhvr>
-                                        <p:cTn id="70" dur="400"/>
+                                        <p:cTn id="48" dur="400"/>
                                         <p:tgtEl>
                                           <p:spTgt spid="24"/>
                                         </p:tgtEl>
@@ -15122,14 +15120,14 @@
                                 </p:cTn>
                               </p:par>
                               <p:par>
-                                <p:cTn id="71" presetID="10" presetClass="entr" presetSubtype="0" fill="hold" grpId="0" nodeType="afterEffect">
+                                <p:cTn presetID="10" presetClass="entr" presetSubtype="0" fill="hold" grpId="0" nodeType="afterEffect">
                                   <p:stCondLst>
                                     <p:cond delay="39160"/>
                                   </p:stCondLst>
                                   <p:childTnLst>
                                     <p:set>
                                       <p:cBhvr>
-                                        <p:cTn id="72" dur="1"/>
+                                        <p:cTn id="49" dur="1"/>
                                         <p:tgtEl>
                                           <p:spTgt spid="25"/>
                                         </p:tgtEl>
@@ -15143,7 +15141,7 @@
                                     </p:set>
                                     <p:animEffect transition="in" filter="fade">
                                       <p:cBhvr>
-                                        <p:cTn id="73" dur="400"/>
+                                        <p:cTn id="50" dur="400"/>
                                         <p:tgtEl>
                                           <p:spTgt spid="25"/>
                                         </p:tgtEl>

--- a/examples/quarterly-report/Q3经营汇报-智能喂食器业务.pptx
+++ b/examples/quarterly-report/Q3经营汇报-智能喂食器业务.pptx
@@ -2899,10 +2899,7 @@
                   <p:par>
                     <p:cTn id="3" fill="hold">
                       <p:stCondLst>
-                        <p:cond delay="indefinite"/>
-                        <p:cond evt="onBegin" delay="0">
-                          <p:tn val="2"/>
-                        </p:cond>
+                        <p:cond delay="0"/>
                       </p:stCondLst>
                       <p:childTnLst>
                         <p:par>
@@ -2919,7 +2916,11 @@
                                   <p:childTnLst>
                                     <p:set>
                                       <p:cBhvr>
-                                        <p:cTn id="5" dur="1"/>
+                                        <p:cTn id="5" dur="1" fill="hold">
+                                          <p:stCondLst>
+                                            <p:cond delay="0"/>
+                                          </p:stCondLst>
+                                        </p:cTn>
                                         <p:tgtEl>
                                           <p:spTgt spid="2"/>
                                         </p:tgtEl>
@@ -2942,15 +2943,28 @@
                                   </p:childTnLst>
                                 </p:cTn>
                               </p:par>
+                            </p:childTnLst>
+                          </p:cTn>
+                        </p:par>
+                        <p:par>
+                          <p:cTn id="7" fill="hold">
+                            <p:stCondLst>
+                              <p:cond delay="630"/>
+                            </p:stCondLst>
+                            <p:childTnLst>
                               <p:par>
                                 <p:cTn presetID="10" presetClass="entr" presetSubtype="0" fill="hold" grpId="0" nodeType="afterEffect">
                                   <p:stCondLst>
-                                    <p:cond delay="630"/>
+                                    <p:cond delay="0"/>
                                   </p:stCondLst>
                                   <p:childTnLst>
                                     <p:set>
                                       <p:cBhvr>
-                                        <p:cTn id="7" dur="1"/>
+                                        <p:cTn id="8" dur="1" fill="hold">
+                                          <p:stCondLst>
+                                            <p:cond delay="0"/>
+                                          </p:stCondLst>
+                                        </p:cTn>
                                         <p:tgtEl>
                                           <p:spTgt spid="4"/>
                                         </p:tgtEl>
@@ -2964,7 +2978,7 @@
                                     </p:set>
                                     <p:animEffect transition="in" filter="fade">
                                       <p:cBhvr>
-                                        <p:cTn id="8" dur="450"/>
+                                        <p:cTn id="9" dur="450"/>
                                         <p:tgtEl>
                                           <p:spTgt spid="4"/>
                                         </p:tgtEl>
@@ -2973,15 +2987,28 @@
                                   </p:childTnLst>
                                 </p:cTn>
                               </p:par>
+                            </p:childTnLst>
+                          </p:cTn>
+                        </p:par>
+                        <p:par>
+                          <p:cTn id="10" fill="hold">
+                            <p:stCondLst>
+                              <p:cond delay="1440"/>
+                            </p:stCondLst>
+                            <p:childTnLst>
                               <p:par>
                                 <p:cTn presetID="10" presetClass="entr" presetSubtype="0" fill="hold" grpId="0" nodeType="afterEffect">
                                   <p:stCondLst>
-                                    <p:cond delay="1440"/>
+                                    <p:cond delay="0"/>
                                   </p:stCondLst>
                                   <p:childTnLst>
                                     <p:set>
                                       <p:cBhvr>
-                                        <p:cTn id="9" dur="1"/>
+                                        <p:cTn id="11" dur="1" fill="hold">
+                                          <p:stCondLst>
+                                            <p:cond delay="0"/>
+                                          </p:stCondLst>
+                                        </p:cTn>
                                         <p:tgtEl>
                                           <p:spTgt spid="5"/>
                                         </p:tgtEl>
@@ -2995,7 +3022,7 @@
                                     </p:set>
                                     <p:animEffect transition="in" filter="fade">
                                       <p:cBhvr>
-                                        <p:cTn id="10" dur="450"/>
+                                        <p:cTn id="12" dur="450"/>
                                         <p:tgtEl>
                                           <p:spTgt spid="5"/>
                                         </p:tgtEl>
@@ -3004,15 +3031,28 @@
                                   </p:childTnLst>
                                 </p:cTn>
                               </p:par>
+                            </p:childTnLst>
+                          </p:cTn>
+                        </p:par>
+                        <p:par>
+                          <p:cTn id="13" fill="hold">
+                            <p:stCondLst>
+                              <p:cond delay="2430"/>
+                            </p:stCondLst>
+                            <p:childTnLst>
                               <p:par>
                                 <p:cTn presetID="10" presetClass="entr" presetSubtype="0" fill="hold" grpId="0" nodeType="afterEffect">
                                   <p:stCondLst>
-                                    <p:cond delay="2430"/>
+                                    <p:cond delay="0"/>
                                   </p:stCondLst>
                                   <p:childTnLst>
                                     <p:set>
                                       <p:cBhvr>
-                                        <p:cTn id="11" dur="1"/>
+                                        <p:cTn id="14" dur="1" fill="hold">
+                                          <p:stCondLst>
+                                            <p:cond delay="0"/>
+                                          </p:stCondLst>
+                                        </p:cTn>
                                         <p:tgtEl>
                                           <p:spTgt spid="6"/>
                                         </p:tgtEl>
@@ -3026,7 +3066,7 @@
                                     </p:set>
                                     <p:animEffect transition="in" filter="fade">
                                       <p:cBhvr>
-                                        <p:cTn id="12" dur="450"/>
+                                        <p:cTn id="15" dur="450"/>
                                         <p:tgtEl>
                                           <p:spTgt spid="6"/>
                                         </p:tgtEl>
@@ -3035,15 +3075,28 @@
                                   </p:childTnLst>
                                 </p:cTn>
                               </p:par>
+                            </p:childTnLst>
+                          </p:cTn>
+                        </p:par>
+                        <p:par>
+                          <p:cTn id="16" fill="hold">
+                            <p:stCondLst>
+                              <p:cond delay="3600"/>
+                            </p:stCondLst>
+                            <p:childTnLst>
                               <p:par>
                                 <p:cTn presetID="10" presetClass="entr" presetSubtype="0" fill="hold" grpId="0" nodeType="afterEffect">
                                   <p:stCondLst>
-                                    <p:cond delay="3600"/>
+                                    <p:cond delay="0"/>
                                   </p:stCondLst>
                                   <p:childTnLst>
                                     <p:set>
                                       <p:cBhvr>
-                                        <p:cTn id="13" dur="1"/>
+                                        <p:cTn id="17" dur="1" fill="hold">
+                                          <p:stCondLst>
+                                            <p:cond delay="0"/>
+                                          </p:stCondLst>
+                                        </p:cTn>
                                         <p:tgtEl>
                                           <p:spTgt spid="3"/>
                                         </p:tgtEl>
@@ -3057,7 +3110,7 @@
                                     </p:set>
                                     <p:animEffect transition="in" filter="fade">
                                       <p:cBhvr>
-                                        <p:cTn id="14" dur="450"/>
+                                        <p:cTn id="18" dur="450"/>
                                         <p:tgtEl>
                                           <p:spTgt spid="3"/>
                                         </p:tgtEl>
@@ -3066,15 +3119,28 @@
                                   </p:childTnLst>
                                 </p:cTn>
                               </p:par>
+                            </p:childTnLst>
+                          </p:cTn>
+                        </p:par>
+                        <p:par>
+                          <p:cTn id="19" fill="hold">
+                            <p:stCondLst>
+                              <p:cond delay="4950"/>
+                            </p:stCondLst>
+                            <p:childTnLst>
                               <p:par>
                                 <p:cTn presetID="10" presetClass="entr" presetSubtype="0" fill="hold" grpId="0" nodeType="afterEffect">
                                   <p:stCondLst>
-                                    <p:cond delay="4950"/>
+                                    <p:cond delay="0"/>
                                   </p:stCondLst>
                                   <p:childTnLst>
                                     <p:set>
                                       <p:cBhvr>
-                                        <p:cTn id="15" dur="1"/>
+                                        <p:cTn id="20" dur="1" fill="hold">
+                                          <p:stCondLst>
+                                            <p:cond delay="0"/>
+                                          </p:stCondLst>
+                                        </p:cTn>
                                         <p:tgtEl>
                                           <p:spTgt spid="7"/>
                                         </p:tgtEl>
@@ -3088,7 +3154,7 @@
                                     </p:set>
                                     <p:animEffect transition="in" filter="fade">
                                       <p:cBhvr>
-                                        <p:cTn id="16" dur="450"/>
+                                        <p:cTn id="21" dur="450"/>
                                         <p:tgtEl>
                                           <p:spTgt spid="7"/>
                                         </p:tgtEl>
@@ -3693,10 +3759,7 @@
                   <p:par>
                     <p:cTn id="3" fill="hold">
                       <p:stCondLst>
-                        <p:cond delay="indefinite"/>
-                        <p:cond evt="onBegin" delay="0">
-                          <p:tn val="2"/>
-                        </p:cond>
+                        <p:cond delay="0"/>
                       </p:stCondLst>
                       <p:childTnLst>
                         <p:par>
@@ -3713,7 +3776,11 @@
                                   <p:childTnLst>
                                     <p:set>
                                       <p:cBhvr>
-                                        <p:cTn id="5" dur="1"/>
+                                        <p:cTn id="5" dur="1" fill="hold">
+                                          <p:stCondLst>
+                                            <p:cond delay="0"/>
+                                          </p:stCondLst>
+                                        </p:cTn>
                                         <p:tgtEl>
                                           <p:spTgt spid="2"/>
                                         </p:tgtEl>
@@ -3736,15 +3803,28 @@
                                   </p:childTnLst>
                                 </p:cTn>
                               </p:par>
+                            </p:childTnLst>
+                          </p:cTn>
+                        </p:par>
+                        <p:par>
+                          <p:cTn id="7" fill="hold">
+                            <p:stCondLst>
+                              <p:cond delay="550"/>
+                            </p:stCondLst>
+                            <p:childTnLst>
                               <p:par>
                                 <p:cTn presetID="10" presetClass="entr" presetSubtype="0" fill="hold" grpId="0" nodeType="afterEffect">
                                   <p:stCondLst>
-                                    <p:cond delay="550"/>
+                                    <p:cond delay="0"/>
                                   </p:stCondLst>
                                   <p:childTnLst>
                                     <p:set>
                                       <p:cBhvr>
-                                        <p:cTn id="7" dur="1"/>
+                                        <p:cTn id="8" dur="1" fill="hold">
+                                          <p:stCondLst>
+                                            <p:cond delay="0"/>
+                                          </p:stCondLst>
+                                        </p:cTn>
                                         <p:tgtEl>
                                           <p:spTgt spid="3"/>
                                         </p:tgtEl>
@@ -3758,7 +3838,7 @@
                                     </p:set>
                                     <p:animEffect transition="in" filter="fade">
                                       <p:cBhvr>
-                                        <p:cTn id="8" dur="400"/>
+                                        <p:cTn id="9" dur="400"/>
                                         <p:tgtEl>
                                           <p:spTgt spid="3"/>
                                         </p:tgtEl>
@@ -3767,15 +3847,28 @@
                                   </p:childTnLst>
                                 </p:cTn>
                               </p:par>
+                            </p:childTnLst>
+                          </p:cTn>
+                        </p:par>
+                        <p:par>
+                          <p:cTn id="10" fill="hold">
+                            <p:stCondLst>
+                              <p:cond delay="1250"/>
+                            </p:stCondLst>
+                            <p:childTnLst>
                               <p:par>
                                 <p:cTn presetID="10" presetClass="entr" presetSubtype="0" fill="hold" grpId="0" nodeType="afterEffect">
                                   <p:stCondLst>
-                                    <p:cond delay="1250"/>
+                                    <p:cond delay="0"/>
                                   </p:stCondLst>
                                   <p:childTnLst>
                                     <p:set>
                                       <p:cBhvr>
-                                        <p:cTn id="9" dur="1"/>
+                                        <p:cTn id="11" dur="1" fill="hold">
+                                          <p:stCondLst>
+                                            <p:cond delay="0"/>
+                                          </p:stCondLst>
+                                        </p:cTn>
                                         <p:tgtEl>
                                           <p:spTgt spid="5"/>
                                         </p:tgtEl>
@@ -3789,7 +3882,7 @@
                                     </p:set>
                                     <p:animEffect transition="in" filter="fade">
                                       <p:cBhvr>
-                                        <p:cTn id="10" dur="400"/>
+                                        <p:cTn id="12" dur="400"/>
                                         <p:tgtEl>
                                           <p:spTgt spid="5"/>
                                         </p:tgtEl>
@@ -3798,15 +3891,28 @@
                                   </p:childTnLst>
                                 </p:cTn>
                               </p:par>
+                            </p:childTnLst>
+                          </p:cTn>
+                        </p:par>
+                        <p:par>
+                          <p:cTn id="13" fill="hold">
+                            <p:stCondLst>
+                              <p:cond delay="2100"/>
+                            </p:stCondLst>
+                            <p:childTnLst>
                               <p:par>
                                 <p:cTn presetID="10" presetClass="entr" presetSubtype="0" fill="hold" grpId="0" nodeType="afterEffect">
                                   <p:stCondLst>
-                                    <p:cond delay="2100"/>
+                                    <p:cond delay="0"/>
                                   </p:stCondLst>
                                   <p:childTnLst>
                                     <p:set>
                                       <p:cBhvr>
-                                        <p:cTn id="11" dur="1"/>
+                                        <p:cTn id="14" dur="1" fill="hold">
+                                          <p:stCondLst>
+                                            <p:cond delay="0"/>
+                                          </p:stCondLst>
+                                        </p:cTn>
                                         <p:tgtEl>
                                           <p:spTgt spid="7"/>
                                         </p:tgtEl>
@@ -3820,7 +3926,7 @@
                                     </p:set>
                                     <p:animEffect transition="in" filter="fade">
                                       <p:cBhvr>
-                                        <p:cTn id="12" dur="400"/>
+                                        <p:cTn id="15" dur="400"/>
                                         <p:tgtEl>
                                           <p:spTgt spid="7"/>
                                         </p:tgtEl>
@@ -3829,15 +3935,28 @@
                                   </p:childTnLst>
                                 </p:cTn>
                               </p:par>
+                            </p:childTnLst>
+                          </p:cTn>
+                        </p:par>
+                        <p:par>
+                          <p:cTn id="16" fill="hold">
+                            <p:stCondLst>
+                              <p:cond delay="3100"/>
+                            </p:stCondLst>
+                            <p:childTnLst>
                               <p:par>
                                 <p:cTn presetID="10" presetClass="entr" presetSubtype="0" fill="hold" grpId="0" nodeType="afterEffect">
                                   <p:stCondLst>
-                                    <p:cond delay="3100"/>
+                                    <p:cond delay="0"/>
                                   </p:stCondLst>
                                   <p:childTnLst>
                                     <p:set>
                                       <p:cBhvr>
-                                        <p:cTn id="13" dur="1"/>
+                                        <p:cTn id="17" dur="1" fill="hold">
+                                          <p:stCondLst>
+                                            <p:cond delay="0"/>
+                                          </p:stCondLst>
+                                        </p:cTn>
                                         <p:tgtEl>
                                           <p:spTgt spid="8"/>
                                         </p:tgtEl>
@@ -3851,7 +3970,7 @@
                                     </p:set>
                                     <p:animEffect transition="in" filter="fade">
                                       <p:cBhvr>
-                                        <p:cTn id="14" dur="400"/>
+                                        <p:cTn id="18" dur="400"/>
                                         <p:tgtEl>
                                           <p:spTgt spid="8"/>
                                         </p:tgtEl>
@@ -3860,15 +3979,28 @@
                                   </p:childTnLst>
                                 </p:cTn>
                               </p:par>
+                            </p:childTnLst>
+                          </p:cTn>
+                        </p:par>
+                        <p:par>
+                          <p:cTn id="19" fill="hold">
+                            <p:stCondLst>
+                              <p:cond delay="4250"/>
+                            </p:stCondLst>
+                            <p:childTnLst>
                               <p:par>
                                 <p:cTn presetID="10" presetClass="entr" presetSubtype="0" fill="hold" grpId="0" nodeType="afterEffect">
                                   <p:stCondLst>
-                                    <p:cond delay="4250"/>
+                                    <p:cond delay="0"/>
                                   </p:stCondLst>
                                   <p:childTnLst>
                                     <p:set>
                                       <p:cBhvr>
-                                        <p:cTn id="15" dur="1"/>
+                                        <p:cTn id="20" dur="1" fill="hold">
+                                          <p:stCondLst>
+                                            <p:cond delay="0"/>
+                                          </p:stCondLst>
+                                        </p:cTn>
                                         <p:tgtEl>
                                           <p:spTgt spid="9"/>
                                         </p:tgtEl>
@@ -3882,7 +4014,7 @@
                                     </p:set>
                                     <p:animEffect transition="in" filter="fade">
                                       <p:cBhvr>
-                                        <p:cTn id="16" dur="400"/>
+                                        <p:cTn id="21" dur="400"/>
                                         <p:tgtEl>
                                           <p:spTgt spid="9"/>
                                         </p:tgtEl>
@@ -3891,15 +4023,28 @@
                                   </p:childTnLst>
                                 </p:cTn>
                               </p:par>
+                            </p:childTnLst>
+                          </p:cTn>
+                        </p:par>
+                        <p:par>
+                          <p:cTn id="22" fill="hold">
+                            <p:stCondLst>
+                              <p:cond delay="5550"/>
+                            </p:stCondLst>
+                            <p:childTnLst>
                               <p:par>
                                 <p:cTn presetID="10" presetClass="entr" presetSubtype="0" fill="hold" grpId="0" nodeType="afterEffect">
                                   <p:stCondLst>
-                                    <p:cond delay="5550"/>
+                                    <p:cond delay="0"/>
                                   </p:stCondLst>
                                   <p:childTnLst>
                                     <p:set>
                                       <p:cBhvr>
-                                        <p:cTn id="17" dur="1"/>
+                                        <p:cTn id="23" dur="1" fill="hold">
+                                          <p:stCondLst>
+                                            <p:cond delay="0"/>
+                                          </p:stCondLst>
+                                        </p:cTn>
                                         <p:tgtEl>
                                           <p:spTgt spid="6"/>
                                         </p:tgtEl>
@@ -3913,7 +4058,7 @@
                                     </p:set>
                                     <p:animEffect transition="in" filter="fade">
                                       <p:cBhvr>
-                                        <p:cTn id="18" dur="400"/>
+                                        <p:cTn id="24" dur="400"/>
                                         <p:tgtEl>
                                           <p:spTgt spid="6"/>
                                         </p:tgtEl>
@@ -3922,15 +4067,28 @@
                                   </p:childTnLst>
                                 </p:cTn>
                               </p:par>
+                            </p:childTnLst>
+                          </p:cTn>
+                        </p:par>
+                        <p:par>
+                          <p:cTn id="25" fill="hold">
+                            <p:stCondLst>
+                              <p:cond delay="7000"/>
+                            </p:stCondLst>
+                            <p:childTnLst>
                               <p:par>
                                 <p:cTn presetID="10" presetClass="entr" presetSubtype="0" fill="hold" grpId="0" nodeType="afterEffect">
                                   <p:stCondLst>
-                                    <p:cond delay="7000"/>
+                                    <p:cond delay="0"/>
                                   </p:stCondLst>
                                   <p:childTnLst>
                                     <p:set>
                                       <p:cBhvr>
-                                        <p:cTn id="19" dur="1"/>
+                                        <p:cTn id="26" dur="1" fill="hold">
+                                          <p:stCondLst>
+                                            <p:cond delay="0"/>
+                                          </p:stCondLst>
+                                        </p:cTn>
                                         <p:tgtEl>
                                           <p:spTgt spid="10"/>
                                         </p:tgtEl>
@@ -3944,7 +4102,7 @@
                                     </p:set>
                                     <p:animEffect transition="in" filter="fade">
                                       <p:cBhvr>
-                                        <p:cTn id="20" dur="400"/>
+                                        <p:cTn id="27" dur="400"/>
                                         <p:tgtEl>
                                           <p:spTgt spid="10"/>
                                         </p:tgtEl>
@@ -3953,15 +4111,28 @@
                                   </p:childTnLst>
                                 </p:cTn>
                               </p:par>
+                            </p:childTnLst>
+                          </p:cTn>
+                        </p:par>
+                        <p:par>
+                          <p:cTn id="28" fill="hold">
+                            <p:stCondLst>
+                              <p:cond delay="8600"/>
+                            </p:stCondLst>
+                            <p:childTnLst>
                               <p:par>
                                 <p:cTn presetID="10" presetClass="entr" presetSubtype="0" fill="hold" grpId="0" nodeType="afterEffect">
                                   <p:stCondLst>
-                                    <p:cond delay="8600"/>
+                                    <p:cond delay="0"/>
                                   </p:stCondLst>
                                   <p:childTnLst>
                                     <p:set>
                                       <p:cBhvr>
-                                        <p:cTn id="21" dur="1"/>
+                                        <p:cTn id="29" dur="1" fill="hold">
+                                          <p:stCondLst>
+                                            <p:cond delay="0"/>
+                                          </p:stCondLst>
+                                        </p:cTn>
                                         <p:tgtEl>
                                           <p:spTgt spid="11"/>
                                         </p:tgtEl>
@@ -3975,7 +4146,7 @@
                                     </p:set>
                                     <p:animEffect transition="in" filter="fade">
                                       <p:cBhvr>
-                                        <p:cTn id="22" dur="400"/>
+                                        <p:cTn id="30" dur="400"/>
                                         <p:tgtEl>
                                           <p:spTgt spid="11"/>
                                         </p:tgtEl>
@@ -3984,15 +4155,28 @@
                                   </p:childTnLst>
                                 </p:cTn>
                               </p:par>
+                            </p:childTnLst>
+                          </p:cTn>
+                        </p:par>
+                        <p:par>
+                          <p:cTn id="31" fill="hold">
+                            <p:stCondLst>
+                              <p:cond delay="10350"/>
+                            </p:stCondLst>
+                            <p:childTnLst>
                               <p:par>
                                 <p:cTn presetID="10" presetClass="entr" presetSubtype="0" fill="hold" grpId="0" nodeType="afterEffect">
                                   <p:stCondLst>
-                                    <p:cond delay="10350"/>
+                                    <p:cond delay="0"/>
                                   </p:stCondLst>
                                   <p:childTnLst>
                                     <p:set>
                                       <p:cBhvr>
-                                        <p:cTn id="23" dur="1"/>
+                                        <p:cTn id="32" dur="1" fill="hold">
+                                          <p:stCondLst>
+                                            <p:cond delay="0"/>
+                                          </p:stCondLst>
+                                        </p:cTn>
                                         <p:tgtEl>
                                           <p:spTgt spid="12"/>
                                         </p:tgtEl>
@@ -4006,7 +4190,7 @@
                                     </p:set>
                                     <p:animEffect transition="in" filter="fade">
                                       <p:cBhvr>
-                                        <p:cTn id="24" dur="400"/>
+                                        <p:cTn id="33" dur="400"/>
                                         <p:tgtEl>
                                           <p:spTgt spid="12"/>
                                         </p:tgtEl>
@@ -4015,15 +4199,28 @@
                                   </p:childTnLst>
                                 </p:cTn>
                               </p:par>
+                            </p:childTnLst>
+                          </p:cTn>
+                        </p:par>
+                        <p:par>
+                          <p:cTn id="34" fill="hold">
+                            <p:stCondLst>
+                              <p:cond delay="12250"/>
+                            </p:stCondLst>
+                            <p:childTnLst>
                               <p:par>
                                 <p:cTn presetID="10" presetClass="entr" presetSubtype="0" fill="hold" grpId="0" nodeType="afterEffect">
                                   <p:stCondLst>
-                                    <p:cond delay="12250"/>
+                                    <p:cond delay="0"/>
                                   </p:stCondLst>
                                   <p:childTnLst>
                                     <p:set>
                                       <p:cBhvr>
-                                        <p:cTn id="25" dur="1"/>
+                                        <p:cTn id="35" dur="1" fill="hold">
+                                          <p:stCondLst>
+                                            <p:cond delay="0"/>
+                                          </p:stCondLst>
+                                        </p:cTn>
                                         <p:tgtEl>
                                           <p:spTgt spid="13"/>
                                         </p:tgtEl>
@@ -4037,7 +4234,7 @@
                                     </p:set>
                                     <p:animEffect transition="in" filter="fade">
                                       <p:cBhvr>
-                                        <p:cTn id="26" dur="400"/>
+                                        <p:cTn id="36" dur="400"/>
                                         <p:tgtEl>
                                           <p:spTgt spid="13"/>
                                         </p:tgtEl>
@@ -4046,15 +4243,28 @@
                                   </p:childTnLst>
                                 </p:cTn>
                               </p:par>
+                            </p:childTnLst>
+                          </p:cTn>
+                        </p:par>
+                        <p:par>
+                          <p:cTn id="37" fill="hold">
+                            <p:stCondLst>
+                              <p:cond delay="14300"/>
+                            </p:stCondLst>
+                            <p:childTnLst>
                               <p:par>
                                 <p:cTn presetID="10" presetClass="entr" presetSubtype="0" fill="hold" grpId="0" nodeType="afterEffect">
                                   <p:stCondLst>
-                                    <p:cond delay="14300"/>
+                                    <p:cond delay="0"/>
                                   </p:stCondLst>
                                   <p:childTnLst>
                                     <p:set>
                                       <p:cBhvr>
-                                        <p:cTn id="27" dur="1"/>
+                                        <p:cTn id="38" dur="1" fill="hold">
+                                          <p:stCondLst>
+                                            <p:cond delay="0"/>
+                                          </p:stCondLst>
+                                        </p:cTn>
                                         <p:tgtEl>
                                           <p:spTgt spid="14"/>
                                         </p:tgtEl>
@@ -4068,7 +4278,7 @@
                                     </p:set>
                                     <p:animEffect transition="in" filter="fade">
                                       <p:cBhvr>
-                                        <p:cTn id="28" dur="400"/>
+                                        <p:cTn id="39" dur="400"/>
                                         <p:tgtEl>
                                           <p:spTgt spid="14"/>
                                         </p:tgtEl>
@@ -4077,15 +4287,28 @@
                                   </p:childTnLst>
                                 </p:cTn>
                               </p:par>
+                            </p:childTnLst>
+                          </p:cTn>
+                        </p:par>
+                        <p:par>
+                          <p:cTn id="40" fill="hold">
+                            <p:stCondLst>
+                              <p:cond delay="16500"/>
+                            </p:stCondLst>
+                            <p:childTnLst>
                               <p:par>
                                 <p:cTn presetID="10" presetClass="entr" presetSubtype="0" fill="hold" grpId="0" nodeType="afterEffect">
                                   <p:stCondLst>
-                                    <p:cond delay="16500"/>
+                                    <p:cond delay="0"/>
                                   </p:stCondLst>
                                   <p:childTnLst>
                                     <p:set>
                                       <p:cBhvr>
-                                        <p:cTn id="29" dur="1"/>
+                                        <p:cTn id="41" dur="1" fill="hold">
+                                          <p:stCondLst>
+                                            <p:cond delay="0"/>
+                                          </p:stCondLst>
+                                        </p:cTn>
                                         <p:tgtEl>
                                           <p:spTgt spid="15"/>
                                         </p:tgtEl>
@@ -4099,7 +4322,7 @@
                                     </p:set>
                                     <p:animEffect transition="in" filter="fade">
                                       <p:cBhvr>
-                                        <p:cTn id="30" dur="400"/>
+                                        <p:cTn id="42" dur="400"/>
                                         <p:tgtEl>
                                           <p:spTgt spid="15"/>
                                         </p:tgtEl>
@@ -4108,15 +4331,28 @@
                                   </p:childTnLst>
                                 </p:cTn>
                               </p:par>
+                            </p:childTnLst>
+                          </p:cTn>
+                        </p:par>
+                        <p:par>
+                          <p:cTn id="43" fill="hold">
+                            <p:stCondLst>
+                              <p:cond delay="18850"/>
+                            </p:stCondLst>
+                            <p:childTnLst>
                               <p:par>
                                 <p:cTn presetID="10" presetClass="entr" presetSubtype="0" fill="hold" grpId="0" nodeType="afterEffect">
                                   <p:stCondLst>
-                                    <p:cond delay="18850"/>
+                                    <p:cond delay="0"/>
                                   </p:stCondLst>
                                   <p:childTnLst>
                                     <p:set>
                                       <p:cBhvr>
-                                        <p:cTn id="31" dur="1"/>
+                                        <p:cTn id="44" dur="1" fill="hold">
+                                          <p:stCondLst>
+                                            <p:cond delay="0"/>
+                                          </p:stCondLst>
+                                        </p:cTn>
                                         <p:tgtEl>
                                           <p:spTgt spid="16"/>
                                         </p:tgtEl>
@@ -4130,7 +4366,7 @@
                                     </p:set>
                                     <p:animEffect transition="in" filter="fade">
                                       <p:cBhvr>
-                                        <p:cTn id="32" dur="400"/>
+                                        <p:cTn id="45" dur="400"/>
                                         <p:tgtEl>
                                           <p:spTgt spid="16"/>
                                         </p:tgtEl>
@@ -4922,10 +5158,7 @@
                   <p:par>
                     <p:cTn id="3" fill="hold">
                       <p:stCondLst>
-                        <p:cond delay="indefinite"/>
-                        <p:cond evt="onBegin" delay="0">
-                          <p:tn val="2"/>
-                        </p:cond>
+                        <p:cond delay="0"/>
                       </p:stCondLst>
                       <p:childTnLst>
                         <p:par>
@@ -4942,7 +5175,11 @@
                                   <p:childTnLst>
                                     <p:set>
                                       <p:cBhvr>
-                                        <p:cTn id="5" dur="1"/>
+                                        <p:cTn id="5" dur="1" fill="hold">
+                                          <p:stCondLst>
+                                            <p:cond delay="0"/>
+                                          </p:stCondLst>
+                                        </p:cTn>
                                         <p:tgtEl>
                                           <p:spTgt spid="2"/>
                                         </p:tgtEl>
@@ -4965,15 +5202,28 @@
                                   </p:childTnLst>
                                 </p:cTn>
                               </p:par>
+                            </p:childTnLst>
+                          </p:cTn>
+                        </p:par>
+                        <p:par>
+                          <p:cTn id="7" fill="hold">
+                            <p:stCondLst>
+                              <p:cond delay="520"/>
+                            </p:stCondLst>
+                            <p:childTnLst>
                               <p:par>
                                 <p:cTn presetID="10" presetClass="entr" presetSubtype="0" fill="hold" grpId="0" nodeType="afterEffect">
                                   <p:stCondLst>
-                                    <p:cond delay="520"/>
+                                    <p:cond delay="0"/>
                                   </p:stCondLst>
                                   <p:childTnLst>
                                     <p:set>
                                       <p:cBhvr>
-                                        <p:cTn id="7" dur="1"/>
+                                        <p:cTn id="8" dur="1" fill="hold">
+                                          <p:stCondLst>
+                                            <p:cond delay="0"/>
+                                          </p:stCondLst>
+                                        </p:cTn>
                                         <p:tgtEl>
                                           <p:spTgt spid="3"/>
                                         </p:tgtEl>
@@ -4987,7 +5237,7 @@
                                     </p:set>
                                     <p:animEffect transition="in" filter="fade">
                                       <p:cBhvr>
-                                        <p:cTn id="8" dur="400"/>
+                                        <p:cTn id="9" dur="400"/>
                                         <p:tgtEl>
                                           <p:spTgt spid="3"/>
                                         </p:tgtEl>
@@ -4996,15 +5246,28 @@
                                   </p:childTnLst>
                                 </p:cTn>
                               </p:par>
+                            </p:childTnLst>
+                          </p:cTn>
+                        </p:par>
+                        <p:par>
+                          <p:cTn id="10" fill="hold">
+                            <p:stCondLst>
+                              <p:cond delay="1160"/>
+                            </p:stCondLst>
+                            <p:childTnLst>
                               <p:par>
                                 <p:cTn presetID="10" presetClass="entr" presetSubtype="0" fill="hold" grpId="0" nodeType="afterEffect">
                                   <p:stCondLst>
-                                    <p:cond delay="1160"/>
+                                    <p:cond delay="0"/>
                                   </p:stCondLst>
                                   <p:childTnLst>
                                     <p:set>
                                       <p:cBhvr>
-                                        <p:cTn id="9" dur="1"/>
+                                        <p:cTn id="11" dur="1" fill="hold">
+                                          <p:stCondLst>
+                                            <p:cond delay="0"/>
+                                          </p:stCondLst>
+                                        </p:cTn>
                                         <p:tgtEl>
                                           <p:spTgt spid="6"/>
                                         </p:tgtEl>
@@ -5018,7 +5281,7 @@
                                     </p:set>
                                     <p:animEffect transition="in" filter="fade">
                                       <p:cBhvr>
-                                        <p:cTn id="10" dur="400"/>
+                                        <p:cTn id="12" dur="400"/>
                                         <p:tgtEl>
                                           <p:spTgt spid="6"/>
                                         </p:tgtEl>
@@ -5027,15 +5290,28 @@
                                   </p:childTnLst>
                                 </p:cTn>
                               </p:par>
+                            </p:childTnLst>
+                          </p:cTn>
+                        </p:par>
+                        <p:par>
+                          <p:cTn id="13" fill="hold">
+                            <p:stCondLst>
+                              <p:cond delay="1920"/>
+                            </p:stCondLst>
+                            <p:childTnLst>
                               <p:par>
                                 <p:cTn presetID="10" presetClass="entr" presetSubtype="0" fill="hold" grpId="0" nodeType="afterEffect">
                                   <p:stCondLst>
-                                    <p:cond delay="1920"/>
+                                    <p:cond delay="0"/>
                                   </p:stCondLst>
                                   <p:childTnLst>
                                     <p:set>
                                       <p:cBhvr>
-                                        <p:cTn id="11" dur="1"/>
+                                        <p:cTn id="14" dur="1" fill="hold">
+                                          <p:stCondLst>
+                                            <p:cond delay="0"/>
+                                          </p:stCondLst>
+                                        </p:cTn>
                                         <p:tgtEl>
                                           <p:spTgt spid="5"/>
                                         </p:tgtEl>
@@ -5049,7 +5325,7 @@
                                     </p:set>
                                     <p:animEffect transition="in" filter="fade">
                                       <p:cBhvr>
-                                        <p:cTn id="12" dur="400"/>
+                                        <p:cTn id="15" dur="400"/>
                                         <p:tgtEl>
                                           <p:spTgt spid="5"/>
                                         </p:tgtEl>
@@ -5058,15 +5334,28 @@
                                   </p:childTnLst>
                                 </p:cTn>
                               </p:par>
+                            </p:childTnLst>
+                          </p:cTn>
+                        </p:par>
+                        <p:par>
+                          <p:cTn id="16" fill="hold">
+                            <p:stCondLst>
+                              <p:cond delay="2800"/>
+                            </p:stCondLst>
+                            <p:childTnLst>
                               <p:par>
                                 <p:cTn presetID="10" presetClass="entr" presetSubtype="0" fill="hold" grpId="0" nodeType="afterEffect">
                                   <p:stCondLst>
-                                    <p:cond delay="2800"/>
+                                    <p:cond delay="0"/>
                                   </p:stCondLst>
                                   <p:childTnLst>
                                     <p:set>
                                       <p:cBhvr>
-                                        <p:cTn id="13" dur="1"/>
+                                        <p:cTn id="17" dur="1" fill="hold">
+                                          <p:stCondLst>
+                                            <p:cond delay="0"/>
+                                          </p:stCondLst>
+                                        </p:cTn>
                                         <p:tgtEl>
                                           <p:spTgt spid="7"/>
                                         </p:tgtEl>
@@ -5080,7 +5369,7 @@
                                     </p:set>
                                     <p:animEffect transition="in" filter="fade">
                                       <p:cBhvr>
-                                        <p:cTn id="14" dur="400"/>
+                                        <p:cTn id="18" dur="400"/>
                                         <p:tgtEl>
                                           <p:spTgt spid="7"/>
                                         </p:tgtEl>
@@ -5089,15 +5378,28 @@
                                   </p:childTnLst>
                                 </p:cTn>
                               </p:par>
+                            </p:childTnLst>
+                          </p:cTn>
+                        </p:par>
+                        <p:par>
+                          <p:cTn id="19" fill="hold">
+                            <p:stCondLst>
+                              <p:cond delay="3800"/>
+                            </p:stCondLst>
+                            <p:childTnLst>
                               <p:par>
                                 <p:cTn presetID="10" presetClass="entr" presetSubtype="0" fill="hold" grpId="0" nodeType="afterEffect">
                                   <p:stCondLst>
-                                    <p:cond delay="3800"/>
+                                    <p:cond delay="0"/>
                                   </p:stCondLst>
                                   <p:childTnLst>
                                     <p:set>
                                       <p:cBhvr>
-                                        <p:cTn id="15" dur="1"/>
+                                        <p:cTn id="20" dur="1" fill="hold">
+                                          <p:stCondLst>
+                                            <p:cond delay="0"/>
+                                          </p:stCondLst>
+                                        </p:cTn>
                                         <p:tgtEl>
                                           <p:spTgt spid="8"/>
                                         </p:tgtEl>
@@ -5111,7 +5413,7 @@
                                     </p:set>
                                     <p:animEffect transition="in" filter="fade">
                                       <p:cBhvr>
-                                        <p:cTn id="16" dur="400"/>
+                                        <p:cTn id="21" dur="400"/>
                                         <p:tgtEl>
                                           <p:spTgt spid="8"/>
                                         </p:tgtEl>
@@ -5120,15 +5422,28 @@
                                   </p:childTnLst>
                                 </p:cTn>
                               </p:par>
+                            </p:childTnLst>
+                          </p:cTn>
+                        </p:par>
+                        <p:par>
+                          <p:cTn id="22" fill="hold">
+                            <p:stCondLst>
+                              <p:cond delay="4920"/>
+                            </p:stCondLst>
+                            <p:childTnLst>
                               <p:par>
                                 <p:cTn presetID="10" presetClass="entr" presetSubtype="0" fill="hold" grpId="0" nodeType="afterEffect">
                                   <p:stCondLst>
-                                    <p:cond delay="4920"/>
+                                    <p:cond delay="0"/>
                                   </p:stCondLst>
                                   <p:childTnLst>
                                     <p:set>
                                       <p:cBhvr>
-                                        <p:cTn id="17" dur="1"/>
+                                        <p:cTn id="23" dur="1" fill="hold">
+                                          <p:stCondLst>
+                                            <p:cond delay="0"/>
+                                          </p:stCondLst>
+                                        </p:cTn>
                                         <p:tgtEl>
                                           <p:spTgt spid="10"/>
                                         </p:tgtEl>
@@ -5142,7 +5457,7 @@
                                     </p:set>
                                     <p:animEffect transition="in" filter="fade">
                                       <p:cBhvr>
-                                        <p:cTn id="18" dur="400"/>
+                                        <p:cTn id="24" dur="400"/>
                                         <p:tgtEl>
                                           <p:spTgt spid="10"/>
                                         </p:tgtEl>
@@ -5151,15 +5466,28 @@
                                   </p:childTnLst>
                                 </p:cTn>
                               </p:par>
+                            </p:childTnLst>
+                          </p:cTn>
+                        </p:par>
+                        <p:par>
+                          <p:cTn id="25" fill="hold">
+                            <p:stCondLst>
+                              <p:cond delay="6160"/>
+                            </p:stCondLst>
+                            <p:childTnLst>
                               <p:par>
                                 <p:cTn presetID="10" presetClass="entr" presetSubtype="0" fill="hold" grpId="0" nodeType="afterEffect">
                                   <p:stCondLst>
-                                    <p:cond delay="6160"/>
+                                    <p:cond delay="0"/>
                                   </p:stCondLst>
                                   <p:childTnLst>
                                     <p:set>
                                       <p:cBhvr>
-                                        <p:cTn id="19" dur="1"/>
+                                        <p:cTn id="26" dur="1" fill="hold">
+                                          <p:stCondLst>
+                                            <p:cond delay="0"/>
+                                          </p:stCondLst>
+                                        </p:cTn>
                                         <p:tgtEl>
                                           <p:spTgt spid="9"/>
                                         </p:tgtEl>
@@ -5173,7 +5501,7 @@
                                     </p:set>
                                     <p:animEffect transition="in" filter="fade">
                                       <p:cBhvr>
-                                        <p:cTn id="20" dur="400"/>
+                                        <p:cTn id="27" dur="400"/>
                                         <p:tgtEl>
                                           <p:spTgt spid="9"/>
                                         </p:tgtEl>
@@ -5182,15 +5510,28 @@
                                   </p:childTnLst>
                                 </p:cTn>
                               </p:par>
+                            </p:childTnLst>
+                          </p:cTn>
+                        </p:par>
+                        <p:par>
+                          <p:cTn id="28" fill="hold">
+                            <p:stCondLst>
+                              <p:cond delay="7520"/>
+                            </p:stCondLst>
+                            <p:childTnLst>
                               <p:par>
                                 <p:cTn presetID="10" presetClass="entr" presetSubtype="0" fill="hold" grpId="0" nodeType="afterEffect">
                                   <p:stCondLst>
-                                    <p:cond delay="7520"/>
+                                    <p:cond delay="0"/>
                                   </p:stCondLst>
                                   <p:childTnLst>
                                     <p:set>
                                       <p:cBhvr>
-                                        <p:cTn id="21" dur="1"/>
+                                        <p:cTn id="29" dur="1" fill="hold">
+                                          <p:stCondLst>
+                                            <p:cond delay="0"/>
+                                          </p:stCondLst>
+                                        </p:cTn>
                                         <p:tgtEl>
                                           <p:spTgt spid="11"/>
                                         </p:tgtEl>
@@ -5204,7 +5545,7 @@
                                     </p:set>
                                     <p:animEffect transition="in" filter="fade">
                                       <p:cBhvr>
-                                        <p:cTn id="22" dur="400"/>
+                                        <p:cTn id="30" dur="400"/>
                                         <p:tgtEl>
                                           <p:spTgt spid="11"/>
                                         </p:tgtEl>
@@ -5213,15 +5554,28 @@
                                   </p:childTnLst>
                                 </p:cTn>
                               </p:par>
+                            </p:childTnLst>
+                          </p:cTn>
+                        </p:par>
+                        <p:par>
+                          <p:cTn id="31" fill="hold">
+                            <p:stCondLst>
+                              <p:cond delay="9000"/>
+                            </p:stCondLst>
+                            <p:childTnLst>
                               <p:par>
                                 <p:cTn presetID="10" presetClass="entr" presetSubtype="0" fill="hold" grpId="0" nodeType="afterEffect">
                                   <p:stCondLst>
-                                    <p:cond delay="9000"/>
+                                    <p:cond delay="0"/>
                                   </p:stCondLst>
                                   <p:childTnLst>
                                     <p:set>
                                       <p:cBhvr>
-                                        <p:cTn id="23" dur="1"/>
+                                        <p:cTn id="32" dur="1" fill="hold">
+                                          <p:stCondLst>
+                                            <p:cond delay="0"/>
+                                          </p:stCondLst>
+                                        </p:cTn>
                                         <p:tgtEl>
                                           <p:spTgt spid="12"/>
                                         </p:tgtEl>
@@ -5235,7 +5589,7 @@
                                     </p:set>
                                     <p:animEffect transition="in" filter="fade">
                                       <p:cBhvr>
-                                        <p:cTn id="24" dur="400"/>
+                                        <p:cTn id="33" dur="400"/>
                                         <p:tgtEl>
                                           <p:spTgt spid="12"/>
                                         </p:tgtEl>
@@ -5244,15 +5598,28 @@
                                   </p:childTnLst>
                                 </p:cTn>
                               </p:par>
+                            </p:childTnLst>
+                          </p:cTn>
+                        </p:par>
+                        <p:par>
+                          <p:cTn id="34" fill="hold">
+                            <p:stCondLst>
+                              <p:cond delay="10600"/>
+                            </p:stCondLst>
+                            <p:childTnLst>
                               <p:par>
                                 <p:cTn presetID="10" presetClass="entr" presetSubtype="0" fill="hold" grpId="0" nodeType="afterEffect">
                                   <p:stCondLst>
-                                    <p:cond delay="10600"/>
+                                    <p:cond delay="0"/>
                                   </p:stCondLst>
                                   <p:childTnLst>
                                     <p:set>
                                       <p:cBhvr>
-                                        <p:cTn id="25" dur="1"/>
+                                        <p:cTn id="35" dur="1" fill="hold">
+                                          <p:stCondLst>
+                                            <p:cond delay="0"/>
+                                          </p:stCondLst>
+                                        </p:cTn>
                                         <p:tgtEl>
                                           <p:spTgt spid="14"/>
                                         </p:tgtEl>
@@ -5266,7 +5633,7 @@
                                     </p:set>
                                     <p:animEffect transition="in" filter="fade">
                                       <p:cBhvr>
-                                        <p:cTn id="26" dur="400"/>
+                                        <p:cTn id="36" dur="400"/>
                                         <p:tgtEl>
                                           <p:spTgt spid="14"/>
                                         </p:tgtEl>
@@ -5275,15 +5642,28 @@
                                   </p:childTnLst>
                                 </p:cTn>
                               </p:par>
+                            </p:childTnLst>
+                          </p:cTn>
+                        </p:par>
+                        <p:par>
+                          <p:cTn id="37" fill="hold">
+                            <p:stCondLst>
+                              <p:cond delay="12320"/>
+                            </p:stCondLst>
+                            <p:childTnLst>
                               <p:par>
                                 <p:cTn presetID="10" presetClass="entr" presetSubtype="0" fill="hold" grpId="0" nodeType="afterEffect">
                                   <p:stCondLst>
-                                    <p:cond delay="12320"/>
+                                    <p:cond delay="0"/>
                                   </p:stCondLst>
                                   <p:childTnLst>
                                     <p:set>
                                       <p:cBhvr>
-                                        <p:cTn id="27" dur="1"/>
+                                        <p:cTn id="38" dur="1" fill="hold">
+                                          <p:stCondLst>
+                                            <p:cond delay="0"/>
+                                          </p:stCondLst>
+                                        </p:cTn>
                                         <p:tgtEl>
                                           <p:spTgt spid="13"/>
                                         </p:tgtEl>
@@ -5297,7 +5677,7 @@
                                     </p:set>
                                     <p:animEffect transition="in" filter="fade">
                                       <p:cBhvr>
-                                        <p:cTn id="28" dur="400"/>
+                                        <p:cTn id="39" dur="400"/>
                                         <p:tgtEl>
                                           <p:spTgt spid="13"/>
                                         </p:tgtEl>
@@ -5306,15 +5686,28 @@
                                   </p:childTnLst>
                                 </p:cTn>
                               </p:par>
+                            </p:childTnLst>
+                          </p:cTn>
+                        </p:par>
+                        <p:par>
+                          <p:cTn id="40" fill="hold">
+                            <p:stCondLst>
+                              <p:cond delay="14160"/>
+                            </p:stCondLst>
+                            <p:childTnLst>
                               <p:par>
                                 <p:cTn presetID="10" presetClass="entr" presetSubtype="0" fill="hold" grpId="0" nodeType="afterEffect">
                                   <p:stCondLst>
-                                    <p:cond delay="14160"/>
+                                    <p:cond delay="0"/>
                                   </p:stCondLst>
                                   <p:childTnLst>
                                     <p:set>
                                       <p:cBhvr>
-                                        <p:cTn id="29" dur="1"/>
+                                        <p:cTn id="41" dur="1" fill="hold">
+                                          <p:stCondLst>
+                                            <p:cond delay="0"/>
+                                          </p:stCondLst>
+                                        </p:cTn>
                                         <p:tgtEl>
                                           <p:spTgt spid="15"/>
                                         </p:tgtEl>
@@ -5328,7 +5721,7 @@
                                     </p:set>
                                     <p:animEffect transition="in" filter="fade">
                                       <p:cBhvr>
-                                        <p:cTn id="30" dur="400"/>
+                                        <p:cTn id="42" dur="400"/>
                                         <p:tgtEl>
                                           <p:spTgt spid="15"/>
                                         </p:tgtEl>
@@ -5337,15 +5730,28 @@
                                   </p:childTnLst>
                                 </p:cTn>
                               </p:par>
+                            </p:childTnLst>
+                          </p:cTn>
+                        </p:par>
+                        <p:par>
+                          <p:cTn id="43" fill="hold">
+                            <p:stCondLst>
+                              <p:cond delay="16120"/>
+                            </p:stCondLst>
+                            <p:childTnLst>
                               <p:par>
                                 <p:cTn presetID="10" presetClass="entr" presetSubtype="0" fill="hold" grpId="0" nodeType="afterEffect">
                                   <p:stCondLst>
-                                    <p:cond delay="16120"/>
+                                    <p:cond delay="0"/>
                                   </p:stCondLst>
                                   <p:childTnLst>
                                     <p:set>
                                       <p:cBhvr>
-                                        <p:cTn id="31" dur="1"/>
+                                        <p:cTn id="44" dur="1" fill="hold">
+                                          <p:stCondLst>
+                                            <p:cond delay="0"/>
+                                          </p:stCondLst>
+                                        </p:cTn>
                                         <p:tgtEl>
                                           <p:spTgt spid="16"/>
                                         </p:tgtEl>
@@ -5359,7 +5765,7 @@
                                     </p:set>
                                     <p:animEffect transition="in" filter="fade">
                                       <p:cBhvr>
-                                        <p:cTn id="32" dur="400"/>
+                                        <p:cTn id="45" dur="400"/>
                                         <p:tgtEl>
                                           <p:spTgt spid="16"/>
                                         </p:tgtEl>
@@ -5368,15 +5774,28 @@
                                   </p:childTnLst>
                                 </p:cTn>
                               </p:par>
+                            </p:childTnLst>
+                          </p:cTn>
+                        </p:par>
+                        <p:par>
+                          <p:cTn id="46" fill="hold">
+                            <p:stCondLst>
+                              <p:cond delay="18200"/>
+                            </p:stCondLst>
+                            <p:childTnLst>
                               <p:par>
                                 <p:cTn presetID="10" presetClass="entr" presetSubtype="0" fill="hold" grpId="0" nodeType="afterEffect">
                                   <p:stCondLst>
-                                    <p:cond delay="18200"/>
+                                    <p:cond delay="0"/>
                                   </p:stCondLst>
                                   <p:childTnLst>
                                     <p:set>
                                       <p:cBhvr>
-                                        <p:cTn id="33" dur="1"/>
+                                        <p:cTn id="47" dur="1" fill="hold">
+                                          <p:stCondLst>
+                                            <p:cond delay="0"/>
+                                          </p:stCondLst>
+                                        </p:cTn>
                                         <p:tgtEl>
                                           <p:spTgt spid="17"/>
                                         </p:tgtEl>
@@ -5390,7 +5809,7 @@
                                     </p:set>
                                     <p:animEffect transition="in" filter="fade">
                                       <p:cBhvr>
-                                        <p:cTn id="34" dur="400"/>
+                                        <p:cTn id="48" dur="400"/>
                                         <p:tgtEl>
                                           <p:spTgt spid="17"/>
                                         </p:tgtEl>
@@ -6217,10 +6636,7 @@
                   <p:par>
                     <p:cTn id="3" fill="hold">
                       <p:stCondLst>
-                        <p:cond delay="indefinite"/>
-                        <p:cond evt="onBegin" delay="0">
-                          <p:tn val="2"/>
-                        </p:cond>
+                        <p:cond delay="0"/>
                       </p:stCondLst>
                       <p:childTnLst>
                         <p:par>
@@ -6237,7 +6653,11 @@
                                   <p:childTnLst>
                                     <p:set>
                                       <p:cBhvr>
-                                        <p:cTn id="5" dur="1"/>
+                                        <p:cTn id="5" dur="1" fill="hold">
+                                          <p:stCondLst>
+                                            <p:cond delay="0"/>
+                                          </p:stCondLst>
+                                        </p:cTn>
                                         <p:tgtEl>
                                           <p:spTgt spid="2"/>
                                         </p:tgtEl>
@@ -6298,15 +6718,28 @@
                                   </p:childTnLst>
                                 </p:cTn>
                               </p:par>
+                            </p:childTnLst>
+                          </p:cTn>
+                        </p:par>
+                        <p:par>
+                          <p:cTn id="8" fill="hold">
+                            <p:stCondLst>
+                              <p:cond delay="500"/>
+                            </p:stCondLst>
+                            <p:childTnLst>
                               <p:par>
                                 <p:cTn presetID="2" presetClass="entr" presetSubtype="8" fill="hold" grpId="0" nodeType="afterEffect">
                                   <p:stCondLst>
-                                    <p:cond delay="500"/>
+                                    <p:cond delay="0"/>
                                   </p:stCondLst>
                                   <p:childTnLst>
                                     <p:set>
                                       <p:cBhvr>
-                                        <p:cTn id="8" dur="1"/>
+                                        <p:cTn id="9" dur="1" fill="hold">
+                                          <p:stCondLst>
+                                            <p:cond delay="0"/>
+                                          </p:stCondLst>
+                                        </p:cTn>
                                         <p:tgtEl>
                                           <p:spTgt spid="3"/>
                                         </p:tgtEl>
@@ -6320,7 +6753,7 @@
                                     </p:set>
                                     <p:anim calcmode="lin" valueType="num">
                                       <p:cBhvr additive="base">
-                                        <p:cTn id="9" dur="400"/>
+                                        <p:cTn id="10" dur="400"/>
                                         <p:tgtEl>
                                           <p:spTgt spid="3"/>
                                         </p:tgtEl>
@@ -6343,7 +6776,7 @@
                                     </p:anim>
                                     <p:anim calcmode="lin" valueType="num">
                                       <p:cBhvr additive="base">
-                                        <p:cTn id="10" dur="400"/>
+                                        <p:cTn id="11" dur="400"/>
                                         <p:tgtEl>
                                           <p:spTgt spid="3"/>
                                         </p:tgtEl>
@@ -6367,15 +6800,28 @@
                                   </p:childTnLst>
                                 </p:cTn>
                               </p:par>
+                            </p:childTnLst>
+                          </p:cTn>
+                        </p:par>
+                        <p:par>
+                          <p:cTn id="12" fill="hold">
+                            <p:stCondLst>
+                              <p:cond delay="1100"/>
+                            </p:stCondLst>
+                            <p:childTnLst>
                               <p:par>
                                 <p:cTn presetID="2" presetClass="entr" presetSubtype="8" fill="hold" grpId="0" nodeType="afterEffect">
                                   <p:stCondLst>
-                                    <p:cond delay="1100"/>
+                                    <p:cond delay="0"/>
                                   </p:stCondLst>
                                   <p:childTnLst>
                                     <p:set>
                                       <p:cBhvr>
-                                        <p:cTn id="11" dur="1"/>
+                                        <p:cTn id="13" dur="1" fill="hold">
+                                          <p:stCondLst>
+                                            <p:cond delay="0"/>
+                                          </p:stCondLst>
+                                        </p:cTn>
                                         <p:tgtEl>
                                           <p:spTgt spid="7"/>
                                         </p:tgtEl>
@@ -6389,7 +6835,7 @@
                                     </p:set>
                                     <p:anim calcmode="lin" valueType="num">
                                       <p:cBhvr additive="base">
-                                        <p:cTn id="12" dur="400"/>
+                                        <p:cTn id="14" dur="400"/>
                                         <p:tgtEl>
                                           <p:spTgt spid="7"/>
                                         </p:tgtEl>
@@ -6412,7 +6858,7 @@
                                     </p:anim>
                                     <p:anim calcmode="lin" valueType="num">
                                       <p:cBhvr additive="base">
-                                        <p:cTn id="13" dur="400"/>
+                                        <p:cTn id="15" dur="400"/>
                                         <p:tgtEl>
                                           <p:spTgt spid="7"/>
                                         </p:tgtEl>
@@ -6436,15 +6882,28 @@
                                   </p:childTnLst>
                                 </p:cTn>
                               </p:par>
+                            </p:childTnLst>
+                          </p:cTn>
+                        </p:par>
+                        <p:par>
+                          <p:cTn id="16" fill="hold">
+                            <p:stCondLst>
+                              <p:cond delay="1800"/>
+                            </p:stCondLst>
+                            <p:childTnLst>
                               <p:par>
                                 <p:cTn presetID="2" presetClass="entr" presetSubtype="8" fill="hold" grpId="0" nodeType="afterEffect">
                                   <p:stCondLst>
-                                    <p:cond delay="1800"/>
+                                    <p:cond delay="0"/>
                                   </p:stCondLst>
                                   <p:childTnLst>
                                     <p:set>
                                       <p:cBhvr>
-                                        <p:cTn id="14" dur="1"/>
+                                        <p:cTn id="17" dur="1" fill="hold">
+                                          <p:stCondLst>
+                                            <p:cond delay="0"/>
+                                          </p:stCondLst>
+                                        </p:cTn>
                                         <p:tgtEl>
                                           <p:spTgt spid="11"/>
                                         </p:tgtEl>
@@ -6458,7 +6917,7 @@
                                     </p:set>
                                     <p:anim calcmode="lin" valueType="num">
                                       <p:cBhvr additive="base">
-                                        <p:cTn id="15" dur="400"/>
+                                        <p:cTn id="18" dur="400"/>
                                         <p:tgtEl>
                                           <p:spTgt spid="11"/>
                                         </p:tgtEl>
@@ -6481,7 +6940,7 @@
                                     </p:anim>
                                     <p:anim calcmode="lin" valueType="num">
                                       <p:cBhvr additive="base">
-                                        <p:cTn id="16" dur="400"/>
+                                        <p:cTn id="19" dur="400"/>
                                         <p:tgtEl>
                                           <p:spTgt spid="11"/>
                                         </p:tgtEl>
@@ -6505,15 +6964,28 @@
                                   </p:childTnLst>
                                 </p:cTn>
                               </p:par>
+                            </p:childTnLst>
+                          </p:cTn>
+                        </p:par>
+                        <p:par>
+                          <p:cTn id="20" fill="hold">
+                            <p:stCondLst>
+                              <p:cond delay="2600"/>
+                            </p:stCondLst>
+                            <p:childTnLst>
                               <p:par>
                                 <p:cTn presetID="2" presetClass="entr" presetSubtype="8" fill="hold" grpId="0" nodeType="afterEffect">
                                   <p:stCondLst>
-                                    <p:cond delay="2600"/>
+                                    <p:cond delay="0"/>
                                   </p:stCondLst>
                                   <p:childTnLst>
                                     <p:set>
                                       <p:cBhvr>
-                                        <p:cTn id="17" dur="1"/>
+                                        <p:cTn id="21" dur="1" fill="hold">
+                                          <p:stCondLst>
+                                            <p:cond delay="0"/>
+                                          </p:stCondLst>
+                                        </p:cTn>
                                         <p:tgtEl>
                                           <p:spTgt spid="15"/>
                                         </p:tgtEl>
@@ -6527,7 +6999,7 @@
                                     </p:set>
                                     <p:anim calcmode="lin" valueType="num">
                                       <p:cBhvr additive="base">
-                                        <p:cTn id="18" dur="400"/>
+                                        <p:cTn id="22" dur="400"/>
                                         <p:tgtEl>
                                           <p:spTgt spid="15"/>
                                         </p:tgtEl>
@@ -6550,7 +7022,7 @@
                                     </p:anim>
                                     <p:anim calcmode="lin" valueType="num">
                                       <p:cBhvr additive="base">
-                                        <p:cTn id="19" dur="400"/>
+                                        <p:cTn id="23" dur="400"/>
                                         <p:tgtEl>
                                           <p:spTgt spid="15"/>
                                         </p:tgtEl>
@@ -6574,15 +7046,28 @@
                                   </p:childTnLst>
                                 </p:cTn>
                               </p:par>
+                            </p:childTnLst>
+                          </p:cTn>
+                        </p:par>
+                        <p:par>
+                          <p:cTn id="24" fill="hold">
+                            <p:stCondLst>
+                              <p:cond delay="3500"/>
+                            </p:stCondLst>
+                            <p:childTnLst>
                               <p:par>
                                 <p:cTn presetID="2" presetClass="entr" presetSubtype="8" fill="hold" grpId="0" nodeType="afterEffect">
                                   <p:stCondLst>
-                                    <p:cond delay="3500"/>
+                                    <p:cond delay="0"/>
                                   </p:stCondLst>
                                   <p:childTnLst>
                                     <p:set>
                                       <p:cBhvr>
-                                        <p:cTn id="20" dur="1"/>
+                                        <p:cTn id="25" dur="1" fill="hold">
+                                          <p:stCondLst>
+                                            <p:cond delay="0"/>
+                                          </p:stCondLst>
+                                        </p:cTn>
                                         <p:tgtEl>
                                           <p:spTgt spid="19"/>
                                         </p:tgtEl>
@@ -6596,7 +7081,7 @@
                                     </p:set>
                                     <p:anim calcmode="lin" valueType="num">
                                       <p:cBhvr additive="base">
-                                        <p:cTn id="21" dur="400"/>
+                                        <p:cTn id="26" dur="400"/>
                                         <p:tgtEl>
                                           <p:spTgt spid="19"/>
                                         </p:tgtEl>
@@ -6619,7 +7104,7 @@
                                     </p:anim>
                                     <p:anim calcmode="lin" valueType="num">
                                       <p:cBhvr additive="base">
-                                        <p:cTn id="22" dur="400"/>
+                                        <p:cTn id="27" dur="400"/>
                                         <p:tgtEl>
                                           <p:spTgt spid="19"/>
                                         </p:tgtEl>
@@ -6643,15 +7128,28 @@
                                   </p:childTnLst>
                                 </p:cTn>
                               </p:par>
+                            </p:childTnLst>
+                          </p:cTn>
+                        </p:par>
+                        <p:par>
+                          <p:cTn id="28" fill="hold">
+                            <p:stCondLst>
+                              <p:cond delay="4500"/>
+                            </p:stCondLst>
+                            <p:childTnLst>
                               <p:par>
                                 <p:cTn presetID="2" presetClass="entr" presetSubtype="8" fill="hold" grpId="0" nodeType="afterEffect">
                                   <p:stCondLst>
-                                    <p:cond delay="4500"/>
+                                    <p:cond delay="0"/>
                                   </p:stCondLst>
                                   <p:childTnLst>
                                     <p:set>
                                       <p:cBhvr>
-                                        <p:cTn id="23" dur="1"/>
+                                        <p:cTn id="29" dur="1" fill="hold">
+                                          <p:stCondLst>
+                                            <p:cond delay="0"/>
+                                          </p:stCondLst>
+                                        </p:cTn>
                                         <p:tgtEl>
                                           <p:spTgt spid="6"/>
                                         </p:tgtEl>
@@ -6665,7 +7163,7 @@
                                     </p:set>
                                     <p:anim calcmode="lin" valueType="num">
                                       <p:cBhvr additive="base">
-                                        <p:cTn id="24" dur="400"/>
+                                        <p:cTn id="30" dur="400"/>
                                         <p:tgtEl>
                                           <p:spTgt spid="6"/>
                                         </p:tgtEl>
@@ -6688,7 +7186,7 @@
                                     </p:anim>
                                     <p:anim calcmode="lin" valueType="num">
                                       <p:cBhvr additive="base">
-                                        <p:cTn id="25" dur="400"/>
+                                        <p:cTn id="31" dur="400"/>
                                         <p:tgtEl>
                                           <p:spTgt spid="6"/>
                                         </p:tgtEl>
@@ -6712,15 +7210,28 @@
                                   </p:childTnLst>
                                 </p:cTn>
                               </p:par>
+                            </p:childTnLst>
+                          </p:cTn>
+                        </p:par>
+                        <p:par>
+                          <p:cTn id="32" fill="hold">
+                            <p:stCondLst>
+                              <p:cond delay="5600"/>
+                            </p:stCondLst>
+                            <p:childTnLst>
                               <p:par>
                                 <p:cTn presetID="2" presetClass="entr" presetSubtype="8" fill="hold" grpId="0" nodeType="afterEffect">
                                   <p:stCondLst>
-                                    <p:cond delay="5600"/>
+                                    <p:cond delay="0"/>
                                   </p:stCondLst>
                                   <p:childTnLst>
                                     <p:set>
                                       <p:cBhvr>
-                                        <p:cTn id="26" dur="1"/>
+                                        <p:cTn id="33" dur="1" fill="hold">
+                                          <p:stCondLst>
+                                            <p:cond delay="0"/>
+                                          </p:stCondLst>
+                                        </p:cTn>
                                         <p:tgtEl>
                                           <p:spTgt spid="10"/>
                                         </p:tgtEl>
@@ -6734,7 +7245,7 @@
                                     </p:set>
                                     <p:anim calcmode="lin" valueType="num">
                                       <p:cBhvr additive="base">
-                                        <p:cTn id="27" dur="400"/>
+                                        <p:cTn id="34" dur="400"/>
                                         <p:tgtEl>
                                           <p:spTgt spid="10"/>
                                         </p:tgtEl>
@@ -6757,7 +7268,7 @@
                                     </p:anim>
                                     <p:anim calcmode="lin" valueType="num">
                                       <p:cBhvr additive="base">
-                                        <p:cTn id="28" dur="400"/>
+                                        <p:cTn id="35" dur="400"/>
                                         <p:tgtEl>
                                           <p:spTgt spid="10"/>
                                         </p:tgtEl>
@@ -6781,15 +7292,28 @@
                                   </p:childTnLst>
                                 </p:cTn>
                               </p:par>
+                            </p:childTnLst>
+                          </p:cTn>
+                        </p:par>
+                        <p:par>
+                          <p:cTn id="36" fill="hold">
+                            <p:stCondLst>
+                              <p:cond delay="6800"/>
+                            </p:stCondLst>
+                            <p:childTnLst>
                               <p:par>
                                 <p:cTn presetID="2" presetClass="entr" presetSubtype="8" fill="hold" grpId="0" nodeType="afterEffect">
                                   <p:stCondLst>
-                                    <p:cond delay="6800"/>
+                                    <p:cond delay="0"/>
                                   </p:stCondLst>
                                   <p:childTnLst>
                                     <p:set>
                                       <p:cBhvr>
-                                        <p:cTn id="29" dur="1"/>
+                                        <p:cTn id="37" dur="1" fill="hold">
+                                          <p:stCondLst>
+                                            <p:cond delay="0"/>
+                                          </p:stCondLst>
+                                        </p:cTn>
                                         <p:tgtEl>
                                           <p:spTgt spid="14"/>
                                         </p:tgtEl>
@@ -6803,7 +7327,7 @@
                                     </p:set>
                                     <p:anim calcmode="lin" valueType="num">
                                       <p:cBhvr additive="base">
-                                        <p:cTn id="30" dur="400"/>
+                                        <p:cTn id="38" dur="400"/>
                                         <p:tgtEl>
                                           <p:spTgt spid="14"/>
                                         </p:tgtEl>
@@ -6826,7 +7350,7 @@
                                     </p:anim>
                                     <p:anim calcmode="lin" valueType="num">
                                       <p:cBhvr additive="base">
-                                        <p:cTn id="31" dur="400"/>
+                                        <p:cTn id="39" dur="400"/>
                                         <p:tgtEl>
                                           <p:spTgt spid="14"/>
                                         </p:tgtEl>
@@ -6850,15 +7374,28 @@
                                   </p:childTnLst>
                                 </p:cTn>
                               </p:par>
+                            </p:childTnLst>
+                          </p:cTn>
+                        </p:par>
+                        <p:par>
+                          <p:cTn id="40" fill="hold">
+                            <p:stCondLst>
+                              <p:cond delay="8100"/>
+                            </p:stCondLst>
+                            <p:childTnLst>
                               <p:par>
                                 <p:cTn presetID="2" presetClass="entr" presetSubtype="8" fill="hold" grpId="0" nodeType="afterEffect">
                                   <p:stCondLst>
-                                    <p:cond delay="8100"/>
+                                    <p:cond delay="0"/>
                                   </p:stCondLst>
                                   <p:childTnLst>
                                     <p:set>
                                       <p:cBhvr>
-                                        <p:cTn id="32" dur="1"/>
+                                        <p:cTn id="41" dur="1" fill="hold">
+                                          <p:stCondLst>
+                                            <p:cond delay="0"/>
+                                          </p:stCondLst>
+                                        </p:cTn>
                                         <p:tgtEl>
                                           <p:spTgt spid="18"/>
                                         </p:tgtEl>
@@ -6872,7 +7409,7 @@
                                     </p:set>
                                     <p:anim calcmode="lin" valueType="num">
                                       <p:cBhvr additive="base">
-                                        <p:cTn id="33" dur="400"/>
+                                        <p:cTn id="42" dur="400"/>
                                         <p:tgtEl>
                                           <p:spTgt spid="18"/>
                                         </p:tgtEl>
@@ -6895,7 +7432,7 @@
                                     </p:anim>
                                     <p:anim calcmode="lin" valueType="num">
                                       <p:cBhvr additive="base">
-                                        <p:cTn id="34" dur="400"/>
+                                        <p:cTn id="43" dur="400"/>
                                         <p:tgtEl>
                                           <p:spTgt spid="18"/>
                                         </p:tgtEl>
@@ -6919,15 +7456,28 @@
                                   </p:childTnLst>
                                 </p:cTn>
                               </p:par>
+                            </p:childTnLst>
+                          </p:cTn>
+                        </p:par>
+                        <p:par>
+                          <p:cTn id="44" fill="hold">
+                            <p:stCondLst>
+                              <p:cond delay="9500"/>
+                            </p:stCondLst>
+                            <p:childTnLst>
                               <p:par>
                                 <p:cTn presetID="2" presetClass="entr" presetSubtype="8" fill="hold" grpId="0" nodeType="afterEffect">
                                   <p:stCondLst>
-                                    <p:cond delay="9500"/>
+                                    <p:cond delay="0"/>
                                   </p:stCondLst>
                                   <p:childTnLst>
                                     <p:set>
                                       <p:cBhvr>
-                                        <p:cTn id="35" dur="1"/>
+                                        <p:cTn id="45" dur="1" fill="hold">
+                                          <p:stCondLst>
+                                            <p:cond delay="0"/>
+                                          </p:stCondLst>
+                                        </p:cTn>
                                         <p:tgtEl>
                                           <p:spTgt spid="5"/>
                                         </p:tgtEl>
@@ -6941,7 +7491,7 @@
                                     </p:set>
                                     <p:anim calcmode="lin" valueType="num">
                                       <p:cBhvr additive="base">
-                                        <p:cTn id="36" dur="400"/>
+                                        <p:cTn id="46" dur="400"/>
                                         <p:tgtEl>
                                           <p:spTgt spid="5"/>
                                         </p:tgtEl>
@@ -6964,7 +7514,7 @@
                                     </p:anim>
                                     <p:anim calcmode="lin" valueType="num">
                                       <p:cBhvr additive="base">
-                                        <p:cTn id="37" dur="400"/>
+                                        <p:cTn id="47" dur="400"/>
                                         <p:tgtEl>
                                           <p:spTgt spid="5"/>
                                         </p:tgtEl>
@@ -6988,15 +7538,28 @@
                                   </p:childTnLst>
                                 </p:cTn>
                               </p:par>
+                            </p:childTnLst>
+                          </p:cTn>
+                        </p:par>
+                        <p:par>
+                          <p:cTn id="48" fill="hold">
+                            <p:stCondLst>
+                              <p:cond delay="11000"/>
+                            </p:stCondLst>
+                            <p:childTnLst>
                               <p:par>
                                 <p:cTn presetID="2" presetClass="entr" presetSubtype="8" fill="hold" grpId="0" nodeType="afterEffect">
                                   <p:stCondLst>
-                                    <p:cond delay="11000"/>
+                                    <p:cond delay="0"/>
                                   </p:stCondLst>
                                   <p:childTnLst>
                                     <p:set>
                                       <p:cBhvr>
-                                        <p:cTn id="38" dur="1"/>
+                                        <p:cTn id="49" dur="1" fill="hold">
+                                          <p:stCondLst>
+                                            <p:cond delay="0"/>
+                                          </p:stCondLst>
+                                        </p:cTn>
                                         <p:tgtEl>
                                           <p:spTgt spid="8"/>
                                         </p:tgtEl>
@@ -7010,7 +7573,7 @@
                                     </p:set>
                                     <p:anim calcmode="lin" valueType="num">
                                       <p:cBhvr additive="base">
-                                        <p:cTn id="39" dur="400"/>
+                                        <p:cTn id="50" dur="400"/>
                                         <p:tgtEl>
                                           <p:spTgt spid="8"/>
                                         </p:tgtEl>
@@ -7033,7 +7596,7 @@
                                     </p:anim>
                                     <p:anim calcmode="lin" valueType="num">
                                       <p:cBhvr additive="base">
-                                        <p:cTn id="40" dur="400"/>
+                                        <p:cTn id="51" dur="400"/>
                                         <p:tgtEl>
                                           <p:spTgt spid="8"/>
                                         </p:tgtEl>
@@ -7057,15 +7620,28 @@
                                   </p:childTnLst>
                                 </p:cTn>
                               </p:par>
+                            </p:childTnLst>
+                          </p:cTn>
+                        </p:par>
+                        <p:par>
+                          <p:cTn id="52" fill="hold">
+                            <p:stCondLst>
+                              <p:cond delay="12600"/>
+                            </p:stCondLst>
+                            <p:childTnLst>
                               <p:par>
                                 <p:cTn presetID="2" presetClass="entr" presetSubtype="8" fill="hold" grpId="0" nodeType="afterEffect">
                                   <p:stCondLst>
-                                    <p:cond delay="12600"/>
+                                    <p:cond delay="0"/>
                                   </p:stCondLst>
                                   <p:childTnLst>
                                     <p:set>
                                       <p:cBhvr>
-                                        <p:cTn id="41" dur="1"/>
+                                        <p:cTn id="53" dur="1" fill="hold">
+                                          <p:stCondLst>
+                                            <p:cond delay="0"/>
+                                          </p:stCondLst>
+                                        </p:cTn>
                                         <p:tgtEl>
                                           <p:spTgt spid="12"/>
                                         </p:tgtEl>
@@ -7079,7 +7655,7 @@
                                     </p:set>
                                     <p:anim calcmode="lin" valueType="num">
                                       <p:cBhvr additive="base">
-                                        <p:cTn id="42" dur="400"/>
+                                        <p:cTn id="54" dur="400"/>
                                         <p:tgtEl>
                                           <p:spTgt spid="12"/>
                                         </p:tgtEl>
@@ -7102,7 +7678,7 @@
                                     </p:anim>
                                     <p:anim calcmode="lin" valueType="num">
                                       <p:cBhvr additive="base">
-                                        <p:cTn id="43" dur="400"/>
+                                        <p:cTn id="55" dur="400"/>
                                         <p:tgtEl>
                                           <p:spTgt spid="12"/>
                                         </p:tgtEl>
@@ -7126,15 +7702,28 @@
                                   </p:childTnLst>
                                 </p:cTn>
                               </p:par>
+                            </p:childTnLst>
+                          </p:cTn>
+                        </p:par>
+                        <p:par>
+                          <p:cTn id="56" fill="hold">
+                            <p:stCondLst>
+                              <p:cond delay="14300"/>
+                            </p:stCondLst>
+                            <p:childTnLst>
                               <p:par>
                                 <p:cTn presetID="2" presetClass="entr" presetSubtype="8" fill="hold" grpId="0" nodeType="afterEffect">
                                   <p:stCondLst>
-                                    <p:cond delay="14300"/>
+                                    <p:cond delay="0"/>
                                   </p:stCondLst>
                                   <p:childTnLst>
                                     <p:set>
                                       <p:cBhvr>
-                                        <p:cTn id="44" dur="1"/>
+                                        <p:cTn id="57" dur="1" fill="hold">
+                                          <p:stCondLst>
+                                            <p:cond delay="0"/>
+                                          </p:stCondLst>
+                                        </p:cTn>
                                         <p:tgtEl>
                                           <p:spTgt spid="16"/>
                                         </p:tgtEl>
@@ -7148,7 +7737,7 @@
                                     </p:set>
                                     <p:anim calcmode="lin" valueType="num">
                                       <p:cBhvr additive="base">
-                                        <p:cTn id="45" dur="400"/>
+                                        <p:cTn id="58" dur="400"/>
                                         <p:tgtEl>
                                           <p:spTgt spid="16"/>
                                         </p:tgtEl>
@@ -7171,7 +7760,7 @@
                                     </p:anim>
                                     <p:anim calcmode="lin" valueType="num">
                                       <p:cBhvr additive="base">
-                                        <p:cTn id="46" dur="400"/>
+                                        <p:cTn id="59" dur="400"/>
                                         <p:tgtEl>
                                           <p:spTgt spid="16"/>
                                         </p:tgtEl>
@@ -7195,15 +7784,28 @@
                                   </p:childTnLst>
                                 </p:cTn>
                               </p:par>
+                            </p:childTnLst>
+                          </p:cTn>
+                        </p:par>
+                        <p:par>
+                          <p:cTn id="60" fill="hold">
+                            <p:stCondLst>
+                              <p:cond delay="16100"/>
+                            </p:stCondLst>
+                            <p:childTnLst>
                               <p:par>
                                 <p:cTn presetID="2" presetClass="entr" presetSubtype="8" fill="hold" grpId="0" nodeType="afterEffect">
                                   <p:stCondLst>
-                                    <p:cond delay="16100"/>
+                                    <p:cond delay="0"/>
                                   </p:stCondLst>
                                   <p:childTnLst>
                                     <p:set>
                                       <p:cBhvr>
-                                        <p:cTn id="47" dur="1"/>
+                                        <p:cTn id="61" dur="1" fill="hold">
+                                          <p:stCondLst>
+                                            <p:cond delay="0"/>
+                                          </p:stCondLst>
+                                        </p:cTn>
                                         <p:tgtEl>
                                           <p:spTgt spid="20"/>
                                         </p:tgtEl>
@@ -7217,7 +7819,7 @@
                                     </p:set>
                                     <p:anim calcmode="lin" valueType="num">
                                       <p:cBhvr additive="base">
-                                        <p:cTn id="48" dur="400"/>
+                                        <p:cTn id="62" dur="400"/>
                                         <p:tgtEl>
                                           <p:spTgt spid="20"/>
                                         </p:tgtEl>
@@ -7240,7 +7842,7 @@
                                     </p:anim>
                                     <p:anim calcmode="lin" valueType="num">
                                       <p:cBhvr additive="base">
-                                        <p:cTn id="49" dur="400"/>
+                                        <p:cTn id="63" dur="400"/>
                                         <p:tgtEl>
                                           <p:spTgt spid="20"/>
                                         </p:tgtEl>
@@ -7264,15 +7866,28 @@
                                   </p:childTnLst>
                                 </p:cTn>
                               </p:par>
+                            </p:childTnLst>
+                          </p:cTn>
+                        </p:par>
+                        <p:par>
+                          <p:cTn id="64" fill="hold">
+                            <p:stCondLst>
+                              <p:cond delay="18000"/>
+                            </p:stCondLst>
+                            <p:childTnLst>
                               <p:par>
                                 <p:cTn presetID="2" presetClass="entr" presetSubtype="8" fill="hold" grpId="0" nodeType="afterEffect">
                                   <p:stCondLst>
-                                    <p:cond delay="18000"/>
+                                    <p:cond delay="0"/>
                                   </p:stCondLst>
                                   <p:childTnLst>
                                     <p:set>
                                       <p:cBhvr>
-                                        <p:cTn id="50" dur="1"/>
+                                        <p:cTn id="65" dur="1" fill="hold">
+                                          <p:stCondLst>
+                                            <p:cond delay="0"/>
+                                          </p:stCondLst>
+                                        </p:cTn>
                                         <p:tgtEl>
                                           <p:spTgt spid="9"/>
                                         </p:tgtEl>
@@ -7286,7 +7901,7 @@
                                     </p:set>
                                     <p:anim calcmode="lin" valueType="num">
                                       <p:cBhvr additive="base">
-                                        <p:cTn id="51" dur="400"/>
+                                        <p:cTn id="66" dur="400"/>
                                         <p:tgtEl>
                                           <p:spTgt spid="9"/>
                                         </p:tgtEl>
@@ -7309,7 +7924,7 @@
                                     </p:anim>
                                     <p:anim calcmode="lin" valueType="num">
                                       <p:cBhvr additive="base">
-                                        <p:cTn id="52" dur="400"/>
+                                        <p:cTn id="67" dur="400"/>
                                         <p:tgtEl>
                                           <p:spTgt spid="9"/>
                                         </p:tgtEl>
@@ -7333,15 +7948,28 @@
                                   </p:childTnLst>
                                 </p:cTn>
                               </p:par>
+                            </p:childTnLst>
+                          </p:cTn>
+                        </p:par>
+                        <p:par>
+                          <p:cTn id="68" fill="hold">
+                            <p:stCondLst>
+                              <p:cond delay="20000"/>
+                            </p:stCondLst>
+                            <p:childTnLst>
                               <p:par>
                                 <p:cTn presetID="2" presetClass="entr" presetSubtype="8" fill="hold" grpId="0" nodeType="afterEffect">
                                   <p:stCondLst>
-                                    <p:cond delay="20000"/>
+                                    <p:cond delay="0"/>
                                   </p:stCondLst>
                                   <p:childTnLst>
                                     <p:set>
                                       <p:cBhvr>
-                                        <p:cTn id="53" dur="1"/>
+                                        <p:cTn id="69" dur="1" fill="hold">
+                                          <p:stCondLst>
+                                            <p:cond delay="0"/>
+                                          </p:stCondLst>
+                                        </p:cTn>
                                         <p:tgtEl>
                                           <p:spTgt spid="13"/>
                                         </p:tgtEl>
@@ -7355,7 +7983,7 @@
                                     </p:set>
                                     <p:anim calcmode="lin" valueType="num">
                                       <p:cBhvr additive="base">
-                                        <p:cTn id="54" dur="400"/>
+                                        <p:cTn id="70" dur="400"/>
                                         <p:tgtEl>
                                           <p:spTgt spid="13"/>
                                         </p:tgtEl>
@@ -7378,7 +8006,7 @@
                                     </p:anim>
                                     <p:anim calcmode="lin" valueType="num">
                                       <p:cBhvr additive="base">
-                                        <p:cTn id="55" dur="400"/>
+                                        <p:cTn id="71" dur="400"/>
                                         <p:tgtEl>
                                           <p:spTgt spid="13"/>
                                         </p:tgtEl>
@@ -7402,15 +8030,28 @@
                                   </p:childTnLst>
                                 </p:cTn>
                               </p:par>
+                            </p:childTnLst>
+                          </p:cTn>
+                        </p:par>
+                        <p:par>
+                          <p:cTn id="72" fill="hold">
+                            <p:stCondLst>
+                              <p:cond delay="22100"/>
+                            </p:stCondLst>
+                            <p:childTnLst>
                               <p:par>
                                 <p:cTn presetID="2" presetClass="entr" presetSubtype="8" fill="hold" grpId="0" nodeType="afterEffect">
                                   <p:stCondLst>
-                                    <p:cond delay="22100"/>
+                                    <p:cond delay="0"/>
                                   </p:stCondLst>
                                   <p:childTnLst>
                                     <p:set>
                                       <p:cBhvr>
-                                        <p:cTn id="56" dur="1"/>
+                                        <p:cTn id="73" dur="1" fill="hold">
+                                          <p:stCondLst>
+                                            <p:cond delay="0"/>
+                                          </p:stCondLst>
+                                        </p:cTn>
                                         <p:tgtEl>
                                           <p:spTgt spid="17"/>
                                         </p:tgtEl>
@@ -7424,7 +8065,7 @@
                                     </p:set>
                                     <p:anim calcmode="lin" valueType="num">
                                       <p:cBhvr additive="base">
-                                        <p:cTn id="57" dur="400"/>
+                                        <p:cTn id="74" dur="400"/>
                                         <p:tgtEl>
                                           <p:spTgt spid="17"/>
                                         </p:tgtEl>
@@ -7447,7 +8088,7 @@
                                     </p:anim>
                                     <p:anim calcmode="lin" valueType="num">
                                       <p:cBhvr additive="base">
-                                        <p:cTn id="58" dur="400"/>
+                                        <p:cTn id="75" dur="400"/>
                                         <p:tgtEl>
                                           <p:spTgt spid="17"/>
                                         </p:tgtEl>
@@ -7471,15 +8112,28 @@
                                   </p:childTnLst>
                                 </p:cTn>
                               </p:par>
+                            </p:childTnLst>
+                          </p:cTn>
+                        </p:par>
+                        <p:par>
+                          <p:cTn id="76" fill="hold">
+                            <p:stCondLst>
+                              <p:cond delay="24300"/>
+                            </p:stCondLst>
+                            <p:childTnLst>
                               <p:par>
                                 <p:cTn presetID="2" presetClass="entr" presetSubtype="8" fill="hold" grpId="0" nodeType="afterEffect">
                                   <p:stCondLst>
-                                    <p:cond delay="24300"/>
+                                    <p:cond delay="0"/>
                                   </p:stCondLst>
                                   <p:childTnLst>
                                     <p:set>
                                       <p:cBhvr>
-                                        <p:cTn id="59" dur="1"/>
+                                        <p:cTn id="77" dur="1" fill="hold">
+                                          <p:stCondLst>
+                                            <p:cond delay="0"/>
+                                          </p:stCondLst>
+                                        </p:cTn>
                                         <p:tgtEl>
                                           <p:spTgt spid="21"/>
                                         </p:tgtEl>
@@ -7493,7 +8147,7 @@
                                     </p:set>
                                     <p:anim calcmode="lin" valueType="num">
                                       <p:cBhvr additive="base">
-                                        <p:cTn id="60" dur="400"/>
+                                        <p:cTn id="78" dur="400"/>
                                         <p:tgtEl>
                                           <p:spTgt spid="21"/>
                                         </p:tgtEl>
@@ -7516,7 +8170,7 @@
                                     </p:anim>
                                     <p:anim calcmode="lin" valueType="num">
                                       <p:cBhvr additive="base">
-                                        <p:cTn id="61" dur="400"/>
+                                        <p:cTn id="79" dur="400"/>
                                         <p:tgtEl>
                                           <p:spTgt spid="21"/>
                                         </p:tgtEl>
@@ -7540,15 +8194,28 @@
                                   </p:childTnLst>
                                 </p:cTn>
                               </p:par>
+                            </p:childTnLst>
+                          </p:cTn>
+                        </p:par>
+                        <p:par>
+                          <p:cTn id="80" fill="hold">
+                            <p:stCondLst>
+                              <p:cond delay="26600"/>
+                            </p:stCondLst>
+                            <p:childTnLst>
                               <p:par>
                                 <p:cTn presetID="2" presetClass="entr" presetSubtype="8" fill="hold" grpId="0" nodeType="afterEffect">
                                   <p:stCondLst>
-                                    <p:cond delay="26600"/>
+                                    <p:cond delay="0"/>
                                   </p:stCondLst>
                                   <p:childTnLst>
                                     <p:set>
                                       <p:cBhvr>
-                                        <p:cTn id="62" dur="1"/>
+                                        <p:cTn id="81" dur="1" fill="hold">
+                                          <p:stCondLst>
+                                            <p:cond delay="0"/>
+                                          </p:stCondLst>
+                                        </p:cTn>
                                         <p:tgtEl>
                                           <p:spTgt spid="22"/>
                                         </p:tgtEl>
@@ -7562,7 +8229,7 @@
                                     </p:set>
                                     <p:anim calcmode="lin" valueType="num">
                                       <p:cBhvr additive="base">
-                                        <p:cTn id="63" dur="400"/>
+                                        <p:cTn id="82" dur="400"/>
                                         <p:tgtEl>
                                           <p:spTgt spid="22"/>
                                         </p:tgtEl>
@@ -7585,7 +8252,7 @@
                                     </p:anim>
                                     <p:anim calcmode="lin" valueType="num">
                                       <p:cBhvr additive="base">
-                                        <p:cTn id="64" dur="400"/>
+                                        <p:cTn id="83" dur="400"/>
                                         <p:tgtEl>
                                           <p:spTgt spid="22"/>
                                         </p:tgtEl>
@@ -7609,15 +8276,28 @@
                                   </p:childTnLst>
                                 </p:cTn>
                               </p:par>
+                            </p:childTnLst>
+                          </p:cTn>
+                        </p:par>
+                        <p:par>
+                          <p:cTn id="84" fill="hold">
+                            <p:stCondLst>
+                              <p:cond delay="29000"/>
+                            </p:stCondLst>
+                            <p:childTnLst>
                               <p:par>
                                 <p:cTn presetID="2" presetClass="entr" presetSubtype="8" fill="hold" grpId="0" nodeType="afterEffect">
                                   <p:stCondLst>
-                                    <p:cond delay="29000"/>
+                                    <p:cond delay="0"/>
                                   </p:stCondLst>
                                   <p:childTnLst>
                                     <p:set>
                                       <p:cBhvr>
-                                        <p:cTn id="65" dur="1"/>
+                                        <p:cTn id="85" dur="1" fill="hold">
+                                          <p:stCondLst>
+                                            <p:cond delay="0"/>
+                                          </p:stCondLst>
+                                        </p:cTn>
                                         <p:tgtEl>
                                           <p:spTgt spid="23"/>
                                         </p:tgtEl>
@@ -7631,7 +8311,7 @@
                                     </p:set>
                                     <p:anim calcmode="lin" valueType="num">
                                       <p:cBhvr additive="base">
-                                        <p:cTn id="66" dur="400"/>
+                                        <p:cTn id="86" dur="400"/>
                                         <p:tgtEl>
                                           <p:spTgt spid="23"/>
                                         </p:tgtEl>
@@ -7654,7 +8334,7 @@
                                     </p:anim>
                                     <p:anim calcmode="lin" valueType="num">
                                       <p:cBhvr additive="base">
-                                        <p:cTn id="67" dur="400"/>
+                                        <p:cTn id="87" dur="400"/>
                                         <p:tgtEl>
                                           <p:spTgt spid="23"/>
                                         </p:tgtEl>
@@ -8087,10 +8767,7 @@
                   <p:par>
                     <p:cTn id="3" fill="hold">
                       <p:stCondLst>
-                        <p:cond delay="indefinite"/>
-                        <p:cond evt="onBegin" delay="0">
-                          <p:tn val="2"/>
-                        </p:cond>
+                        <p:cond delay="0"/>
                       </p:stCondLst>
                       <p:childTnLst>
                         <p:par>
@@ -8107,7 +8784,11 @@
                                   <p:childTnLst>
                                     <p:set>
                                       <p:cBhvr>
-                                        <p:cTn id="5" dur="1"/>
+                                        <p:cTn id="5" dur="1" fill="hold">
+                                          <p:stCondLst>
+                                            <p:cond delay="0"/>
+                                          </p:stCondLst>
+                                        </p:cTn>
                                         <p:tgtEl>
                                           <p:spTgt spid="5"/>
                                         </p:tgtEl>
@@ -8130,15 +8811,28 @@
                                   </p:childTnLst>
                                 </p:cTn>
                               </p:par>
+                            </p:childTnLst>
+                          </p:cTn>
+                        </p:par>
+                        <p:par>
+                          <p:cTn id="7" fill="hold">
+                            <p:stCondLst>
+                              <p:cond delay="450"/>
+                            </p:stCondLst>
+                            <p:childTnLst>
                               <p:par>
                                 <p:cTn presetID="10" presetClass="entr" presetSubtype="0" fill="hold" grpId="0" nodeType="afterEffect">
                                   <p:stCondLst>
-                                    <p:cond delay="450"/>
+                                    <p:cond delay="0"/>
                                   </p:stCondLst>
                                   <p:childTnLst>
                                     <p:set>
                                       <p:cBhvr>
-                                        <p:cTn id="7" dur="1"/>
+                                        <p:cTn id="8" dur="1" fill="hold">
+                                          <p:stCondLst>
+                                            <p:cond delay="0"/>
+                                          </p:stCondLst>
+                                        </p:cTn>
                                         <p:tgtEl>
                                           <p:spTgt spid="6"/>
                                         </p:tgtEl>
@@ -8152,7 +8846,7 @@
                                     </p:set>
                                     <p:animEffect transition="in" filter="fade">
                                       <p:cBhvr>
-                                        <p:cTn id="8" dur="350"/>
+                                        <p:cTn id="9" dur="350"/>
                                         <p:tgtEl>
                                           <p:spTgt spid="6"/>
                                         </p:tgtEl>
@@ -8161,15 +8855,28 @@
                                   </p:childTnLst>
                                 </p:cTn>
                               </p:par>
+                            </p:childTnLst>
+                          </p:cTn>
+                        </p:par>
+                        <p:par>
+                          <p:cTn id="10" fill="hold">
+                            <p:stCondLst>
+                              <p:cond delay="800"/>
+                            </p:stCondLst>
+                            <p:childTnLst>
                               <p:par>
                                 <p:cTn presetID="22" presetClass="entr" presetSubtype="8" fill="hold" grpId="0" nodeType="afterEffect">
                                   <p:stCondLst>
-                                    <p:cond delay="800"/>
+                                    <p:cond delay="0"/>
                                   </p:stCondLst>
                                   <p:childTnLst>
                                     <p:set>
                                       <p:cBhvr>
-                                        <p:cTn id="9" dur="1"/>
+                                        <p:cTn id="11" dur="1" fill="hold">
+                                          <p:stCondLst>
+                                            <p:cond delay="0"/>
+                                          </p:stCondLst>
+                                        </p:cTn>
                                         <p:tgtEl>
                                           <p:spTgt spid="8"/>
                                         </p:tgtEl>
@@ -8183,7 +8890,7 @@
                                     </p:set>
                                     <p:animEffect transition="in" filter="wipe(right)">
                                       <p:cBhvr>
-                                        <p:cTn id="10" dur="700"/>
+                                        <p:cTn id="12" dur="700"/>
                                         <p:tgtEl>
                                           <p:spTgt spid="8"/>
                                         </p:tgtEl>
@@ -8759,10 +9466,7 @@
                   <p:par>
                     <p:cTn id="3" fill="hold">
                       <p:stCondLst>
-                        <p:cond delay="indefinite"/>
-                        <p:cond evt="onBegin" delay="0">
-                          <p:tn val="2"/>
-                        </p:cond>
+                        <p:cond delay="0"/>
                       </p:stCondLst>
                       <p:childTnLst>
                         <p:par>
@@ -8779,7 +9483,11 @@
                                   <p:childTnLst>
                                     <p:set>
                                       <p:cBhvr>
-                                        <p:cTn id="5" dur="1"/>
+                                        <p:cTn id="5" dur="1" fill="hold">
+                                          <p:stCondLst>
+                                            <p:cond delay="0"/>
+                                          </p:stCondLst>
+                                        </p:cTn>
                                         <p:tgtEl>
                                           <p:spTgt spid="5"/>
                                         </p:tgtEl>
@@ -8802,15 +9510,28 @@
                                   </p:childTnLst>
                                 </p:cTn>
                               </p:par>
+                            </p:childTnLst>
+                          </p:cTn>
+                        </p:par>
+                        <p:par>
+                          <p:cTn id="7" fill="hold">
+                            <p:stCondLst>
+                              <p:cond delay="550"/>
+                            </p:stCondLst>
+                            <p:childTnLst>
                               <p:par>
                                 <p:cTn presetID="10" presetClass="entr" presetSubtype="0" fill="hold" grpId="0" nodeType="afterEffect">
                                   <p:stCondLst>
-                                    <p:cond delay="550"/>
+                                    <p:cond delay="0"/>
                                   </p:stCondLst>
                                   <p:childTnLst>
                                     <p:set>
                                       <p:cBhvr>
-                                        <p:cTn id="7" dur="1"/>
+                                        <p:cTn id="8" dur="1" fill="hold">
+                                          <p:stCondLst>
+                                            <p:cond delay="0"/>
+                                          </p:stCondLst>
+                                        </p:cTn>
                                         <p:tgtEl>
                                           <p:spTgt spid="2"/>
                                         </p:tgtEl>
@@ -8824,7 +9545,7 @@
                                     </p:set>
                                     <p:animEffect transition="in" filter="fade">
                                       <p:cBhvr>
-                                        <p:cTn id="8" dur="400"/>
+                                        <p:cTn id="9" dur="400"/>
                                         <p:tgtEl>
                                           <p:spTgt spid="2"/>
                                         </p:tgtEl>
@@ -8833,15 +9554,28 @@
                                   </p:childTnLst>
                                 </p:cTn>
                               </p:par>
+                            </p:childTnLst>
+                          </p:cTn>
+                        </p:par>
+                        <p:par>
+                          <p:cTn id="10" fill="hold">
+                            <p:stCondLst>
+                              <p:cond delay="1250"/>
+                            </p:stCondLst>
+                            <p:childTnLst>
                               <p:par>
                                 <p:cTn presetID="10" presetClass="entr" presetSubtype="0" fill="hold" grpId="0" nodeType="afterEffect">
                                   <p:stCondLst>
-                                    <p:cond delay="1250"/>
+                                    <p:cond delay="0"/>
                                   </p:stCondLst>
                                   <p:childTnLst>
                                     <p:set>
                                       <p:cBhvr>
-                                        <p:cTn id="9" dur="1"/>
+                                        <p:cTn id="11" dur="1" fill="hold">
+                                          <p:stCondLst>
+                                            <p:cond delay="0"/>
+                                          </p:stCondLst>
+                                        </p:cTn>
                                         <p:tgtEl>
                                           <p:spTgt spid="3"/>
                                         </p:tgtEl>
@@ -8855,7 +9589,7 @@
                                     </p:set>
                                     <p:animEffect transition="in" filter="fade">
                                       <p:cBhvr>
-                                        <p:cTn id="10" dur="400"/>
+                                        <p:cTn id="12" dur="400"/>
                                         <p:tgtEl>
                                           <p:spTgt spid="3"/>
                                         </p:tgtEl>
@@ -8864,15 +9598,28 @@
                                   </p:childTnLst>
                                 </p:cTn>
                               </p:par>
+                            </p:childTnLst>
+                          </p:cTn>
+                        </p:par>
+                        <p:par>
+                          <p:cTn id="13" fill="hold">
+                            <p:stCondLst>
+                              <p:cond delay="2100"/>
+                            </p:stCondLst>
+                            <p:childTnLst>
                               <p:par>
                                 <p:cTn presetID="10" presetClass="entr" presetSubtype="0" fill="hold" grpId="0" nodeType="afterEffect">
                                   <p:stCondLst>
-                                    <p:cond delay="2100"/>
+                                    <p:cond delay="0"/>
                                   </p:stCondLst>
                                   <p:childTnLst>
                                     <p:set>
                                       <p:cBhvr>
-                                        <p:cTn id="11" dur="1"/>
+                                        <p:cTn id="14" dur="1" fill="hold">
+                                          <p:stCondLst>
+                                            <p:cond delay="0"/>
+                                          </p:stCondLst>
+                                        </p:cTn>
                                         <p:tgtEl>
                                           <p:spTgt spid="8"/>
                                         </p:tgtEl>
@@ -8886,7 +9633,7 @@
                                     </p:set>
                                     <p:animEffect transition="in" filter="fade">
                                       <p:cBhvr>
-                                        <p:cTn id="12" dur="400"/>
+                                        <p:cTn id="15" dur="400"/>
                                         <p:tgtEl>
                                           <p:spTgt spid="8"/>
                                         </p:tgtEl>
@@ -8895,15 +9642,28 @@
                                   </p:childTnLst>
                                 </p:cTn>
                               </p:par>
+                            </p:childTnLst>
+                          </p:cTn>
+                        </p:par>
+                        <p:par>
+                          <p:cTn id="16" fill="hold">
+                            <p:stCondLst>
+                              <p:cond delay="3100"/>
+                            </p:stCondLst>
+                            <p:childTnLst>
                               <p:par>
                                 <p:cTn presetID="10" presetClass="entr" presetSubtype="0" fill="hold" grpId="0" nodeType="afterEffect">
                                   <p:stCondLst>
-                                    <p:cond delay="3100"/>
+                                    <p:cond delay="0"/>
                                   </p:stCondLst>
                                   <p:childTnLst>
                                     <p:set>
                                       <p:cBhvr>
-                                        <p:cTn id="13" dur="1"/>
+                                        <p:cTn id="17" dur="1" fill="hold">
+                                          <p:stCondLst>
+                                            <p:cond delay="0"/>
+                                          </p:stCondLst>
+                                        </p:cTn>
                                         <p:tgtEl>
                                           <p:spTgt spid="9"/>
                                         </p:tgtEl>
@@ -8917,7 +9677,7 @@
                                     </p:set>
                                     <p:animEffect transition="in" filter="fade">
                                       <p:cBhvr>
-                                        <p:cTn id="14" dur="400"/>
+                                        <p:cTn id="18" dur="400"/>
                                         <p:tgtEl>
                                           <p:spTgt spid="9"/>
                                         </p:tgtEl>
@@ -8926,15 +9686,28 @@
                                   </p:childTnLst>
                                 </p:cTn>
                               </p:par>
+                            </p:childTnLst>
+                          </p:cTn>
+                        </p:par>
+                        <p:par>
+                          <p:cTn id="19" fill="hold">
+                            <p:stCondLst>
+                              <p:cond delay="4250"/>
+                            </p:stCondLst>
+                            <p:childTnLst>
                               <p:par>
                                 <p:cTn presetID="10" presetClass="entr" presetSubtype="0" fill="hold" grpId="0" nodeType="afterEffect">
                                   <p:stCondLst>
-                                    <p:cond delay="4250"/>
+                                    <p:cond delay="0"/>
                                   </p:stCondLst>
                                   <p:childTnLst>
                                     <p:set>
                                       <p:cBhvr>
-                                        <p:cTn id="15" dur="1"/>
+                                        <p:cTn id="20" dur="1" fill="hold">
+                                          <p:stCondLst>
+                                            <p:cond delay="0"/>
+                                          </p:stCondLst>
+                                        </p:cTn>
                                         <p:tgtEl>
                                           <p:spTgt spid="6"/>
                                         </p:tgtEl>
@@ -8948,7 +9721,7 @@
                                     </p:set>
                                     <p:animEffect transition="in" filter="fade">
                                       <p:cBhvr>
-                                        <p:cTn id="16" dur="400"/>
+                                        <p:cTn id="21" dur="400"/>
                                         <p:tgtEl>
                                           <p:spTgt spid="6"/>
                                         </p:tgtEl>
@@ -8957,15 +9730,28 @@
                                   </p:childTnLst>
                                 </p:cTn>
                               </p:par>
+                            </p:childTnLst>
+                          </p:cTn>
+                        </p:par>
+                        <p:par>
+                          <p:cTn id="22" fill="hold">
+                            <p:stCondLst>
+                              <p:cond delay="5550"/>
+                            </p:stCondLst>
+                            <p:childTnLst>
                               <p:par>
                                 <p:cTn presetID="10" presetClass="entr" presetSubtype="0" fill="hold" grpId="0" nodeType="afterEffect">
                                   <p:stCondLst>
-                                    <p:cond delay="5550"/>
+                                    <p:cond delay="0"/>
                                   </p:stCondLst>
                                   <p:childTnLst>
                                     <p:set>
                                       <p:cBhvr>
-                                        <p:cTn id="17" dur="1"/>
+                                        <p:cTn id="23" dur="1" fill="hold">
+                                          <p:stCondLst>
+                                            <p:cond delay="0"/>
+                                          </p:stCondLst>
+                                        </p:cTn>
                                         <p:tgtEl>
                                           <p:spTgt spid="10"/>
                                         </p:tgtEl>
@@ -8979,7 +9765,7 @@
                                     </p:set>
                                     <p:animEffect transition="in" filter="fade">
                                       <p:cBhvr>
-                                        <p:cTn id="18" dur="400"/>
+                                        <p:cTn id="24" dur="400"/>
                                         <p:tgtEl>
                                           <p:spTgt spid="10"/>
                                         </p:tgtEl>
@@ -8988,15 +9774,28 @@
                                   </p:childTnLst>
                                 </p:cTn>
                               </p:par>
+                            </p:childTnLst>
+                          </p:cTn>
+                        </p:par>
+                        <p:par>
+                          <p:cTn id="25" fill="hold">
+                            <p:stCondLst>
+                              <p:cond delay="7000"/>
+                            </p:stCondLst>
+                            <p:childTnLst>
                               <p:par>
                                 <p:cTn presetID="10" presetClass="entr" presetSubtype="0" fill="hold" grpId="0" nodeType="afterEffect">
                                   <p:stCondLst>
-                                    <p:cond delay="7000"/>
+                                    <p:cond delay="0"/>
                                   </p:stCondLst>
                                   <p:childTnLst>
                                     <p:set>
                                       <p:cBhvr>
-                                        <p:cTn id="19" dur="1"/>
+                                        <p:cTn id="26" dur="1" fill="hold">
+                                          <p:stCondLst>
+                                            <p:cond delay="0"/>
+                                          </p:stCondLst>
+                                        </p:cTn>
                                         <p:tgtEl>
                                           <p:spTgt spid="7"/>
                                         </p:tgtEl>
@@ -9010,7 +9809,7 @@
                                     </p:set>
                                     <p:animEffect transition="in" filter="fade">
                                       <p:cBhvr>
-                                        <p:cTn id="20" dur="400"/>
+                                        <p:cTn id="27" dur="400"/>
                                         <p:tgtEl>
                                           <p:spTgt spid="7"/>
                                         </p:tgtEl>
@@ -9019,15 +9818,28 @@
                                   </p:childTnLst>
                                 </p:cTn>
                               </p:par>
+                            </p:childTnLst>
+                          </p:cTn>
+                        </p:par>
+                        <p:par>
+                          <p:cTn id="28" fill="hold">
+                            <p:stCondLst>
+                              <p:cond delay="8600"/>
+                            </p:stCondLst>
+                            <p:childTnLst>
                               <p:par>
                                 <p:cTn presetID="10" presetClass="entr" presetSubtype="0" fill="hold" grpId="0" nodeType="afterEffect">
                                   <p:stCondLst>
-                                    <p:cond delay="8600"/>
+                                    <p:cond delay="0"/>
                                   </p:stCondLst>
                                   <p:childTnLst>
                                     <p:set>
                                       <p:cBhvr>
-                                        <p:cTn id="21" dur="1"/>
+                                        <p:cTn id="29" dur="1" fill="hold">
+                                          <p:stCondLst>
+                                            <p:cond delay="0"/>
+                                          </p:stCondLst>
+                                        </p:cTn>
                                         <p:tgtEl>
                                           <p:spTgt spid="11"/>
                                         </p:tgtEl>
@@ -9041,7 +9853,7 @@
                                     </p:set>
                                     <p:animEffect transition="in" filter="fade">
                                       <p:cBhvr>
-                                        <p:cTn id="22" dur="400"/>
+                                        <p:cTn id="30" dur="400"/>
                                         <p:tgtEl>
                                           <p:spTgt spid="11"/>
                                         </p:tgtEl>
@@ -9050,15 +9862,28 @@
                                   </p:childTnLst>
                                 </p:cTn>
                               </p:par>
+                            </p:childTnLst>
+                          </p:cTn>
+                        </p:par>
+                        <p:par>
+                          <p:cTn id="31" fill="hold">
+                            <p:stCondLst>
+                              <p:cond delay="10350"/>
+                            </p:stCondLst>
+                            <p:childTnLst>
                               <p:par>
                                 <p:cTn presetID="10" presetClass="entr" presetSubtype="0" fill="hold" grpId="0" nodeType="afterEffect">
                                   <p:stCondLst>
-                                    <p:cond delay="10350"/>
+                                    <p:cond delay="0"/>
                                   </p:stCondLst>
                                   <p:childTnLst>
                                     <p:set>
                                       <p:cBhvr>
-                                        <p:cTn id="23" dur="1"/>
+                                        <p:cTn id="32" dur="1" fill="hold">
+                                          <p:stCondLst>
+                                            <p:cond delay="0"/>
+                                          </p:stCondLst>
+                                        </p:cTn>
                                         <p:tgtEl>
                                           <p:spTgt spid="12"/>
                                         </p:tgtEl>
@@ -9072,7 +9897,7 @@
                                     </p:set>
                                     <p:animEffect transition="in" filter="fade">
                                       <p:cBhvr>
-                                        <p:cTn id="24" dur="400"/>
+                                        <p:cTn id="33" dur="400"/>
                                         <p:tgtEl>
                                           <p:spTgt spid="12"/>
                                         </p:tgtEl>
@@ -9081,15 +9906,28 @@
                                   </p:childTnLst>
                                 </p:cTn>
                               </p:par>
+                            </p:childTnLst>
+                          </p:cTn>
+                        </p:par>
+                        <p:par>
+                          <p:cTn id="34" fill="hold">
+                            <p:stCondLst>
+                              <p:cond delay="12250"/>
+                            </p:stCondLst>
+                            <p:childTnLst>
                               <p:par>
                                 <p:cTn presetID="10" presetClass="entr" presetSubtype="0" fill="hold" grpId="0" nodeType="afterEffect">
                                   <p:stCondLst>
-                                    <p:cond delay="12250"/>
+                                    <p:cond delay="0"/>
                                   </p:stCondLst>
                                   <p:childTnLst>
                                     <p:set>
                                       <p:cBhvr>
-                                        <p:cTn id="25" dur="1"/>
+                                        <p:cTn id="35" dur="1" fill="hold">
+                                          <p:stCondLst>
+                                            <p:cond delay="0"/>
+                                          </p:stCondLst>
+                                        </p:cTn>
                                         <p:tgtEl>
                                           <p:spTgt spid="13"/>
                                         </p:tgtEl>
@@ -9103,7 +9941,7 @@
                                     </p:set>
                                     <p:animEffect transition="in" filter="fade">
                                       <p:cBhvr>
-                                        <p:cTn id="26" dur="400"/>
+                                        <p:cTn id="36" dur="400"/>
                                         <p:tgtEl>
                                           <p:spTgt spid="13"/>
                                         </p:tgtEl>
@@ -9112,15 +9950,28 @@
                                   </p:childTnLst>
                                 </p:cTn>
                               </p:par>
+                            </p:childTnLst>
+                          </p:cTn>
+                        </p:par>
+                        <p:par>
+                          <p:cTn id="37" fill="hold">
+                            <p:stCondLst>
+                              <p:cond delay="14300"/>
+                            </p:stCondLst>
+                            <p:childTnLst>
                               <p:par>
                                 <p:cTn presetID="10" presetClass="entr" presetSubtype="0" fill="hold" grpId="0" nodeType="afterEffect">
                                   <p:stCondLst>
-                                    <p:cond delay="14300"/>
+                                    <p:cond delay="0"/>
                                   </p:stCondLst>
                                   <p:childTnLst>
                                     <p:set>
                                       <p:cBhvr>
-                                        <p:cTn id="27" dur="1"/>
+                                        <p:cTn id="38" dur="1" fill="hold">
+                                          <p:stCondLst>
+                                            <p:cond delay="0"/>
+                                          </p:stCondLst>
+                                        </p:cTn>
                                         <p:tgtEl>
                                           <p:spTgt spid="14"/>
                                         </p:tgtEl>
@@ -9134,7 +9985,7 @@
                                     </p:set>
                                     <p:animEffect transition="in" filter="fade">
                                       <p:cBhvr>
-                                        <p:cTn id="28" dur="400"/>
+                                        <p:cTn id="39" dur="400"/>
                                         <p:tgtEl>
                                           <p:spTgt spid="14"/>
                                         </p:tgtEl>
@@ -9143,15 +9994,28 @@
                                   </p:childTnLst>
                                 </p:cTn>
                               </p:par>
+                            </p:childTnLst>
+                          </p:cTn>
+                        </p:par>
+                        <p:par>
+                          <p:cTn id="40" fill="hold">
+                            <p:stCondLst>
+                              <p:cond delay="16500"/>
+                            </p:stCondLst>
+                            <p:childTnLst>
                               <p:par>
                                 <p:cTn presetID="10" presetClass="entr" presetSubtype="0" fill="hold" grpId="0" nodeType="afterEffect">
                                   <p:stCondLst>
-                                    <p:cond delay="16500"/>
+                                    <p:cond delay="0"/>
                                   </p:stCondLst>
                                   <p:childTnLst>
                                     <p:set>
                                       <p:cBhvr>
-                                        <p:cTn id="29" dur="1"/>
+                                        <p:cTn id="41" dur="1" fill="hold">
+                                          <p:stCondLst>
+                                            <p:cond delay="0"/>
+                                          </p:stCondLst>
+                                        </p:cTn>
                                         <p:tgtEl>
                                           <p:spTgt spid="15"/>
                                         </p:tgtEl>
@@ -9165,7 +10029,7 @@
                                     </p:set>
                                     <p:animEffect transition="in" filter="fade">
                                       <p:cBhvr>
-                                        <p:cTn id="30" dur="400"/>
+                                        <p:cTn id="42" dur="400"/>
                                         <p:tgtEl>
                                           <p:spTgt spid="15"/>
                                         </p:tgtEl>
@@ -9630,10 +10494,7 @@
                   <p:par>
                     <p:cTn id="3" fill="hold">
                       <p:stCondLst>
-                        <p:cond delay="indefinite"/>
-                        <p:cond evt="onBegin" delay="0">
-                          <p:tn val="2"/>
-                        </p:cond>
+                        <p:cond delay="0"/>
                       </p:stCondLst>
                       <p:childTnLst>
                         <p:par>
@@ -9650,7 +10511,11 @@
                                   <p:childTnLst>
                                     <p:set>
                                       <p:cBhvr>
-                                        <p:cTn id="5" dur="1"/>
+                                        <p:cTn id="5" dur="1" fill="hold">
+                                          <p:stCondLst>
+                                            <p:cond delay="0"/>
+                                          </p:stCondLst>
+                                        </p:cTn>
                                         <p:tgtEl>
                                           <p:spTgt spid="9"/>
                                         </p:tgtEl>
@@ -9673,15 +10538,28 @@
                                   </p:childTnLst>
                                 </p:cTn>
                               </p:par>
+                            </p:childTnLst>
+                          </p:cTn>
+                        </p:par>
+                        <p:par>
+                          <p:cTn id="7" fill="hold">
+                            <p:stCondLst>
+                              <p:cond delay="520"/>
+                            </p:stCondLst>
+                            <p:childTnLst>
                               <p:par>
                                 <p:cTn presetID="10" presetClass="entr" presetSubtype="0" fill="hold" grpId="0" nodeType="afterEffect">
                                   <p:stCondLst>
-                                    <p:cond delay="520"/>
+                                    <p:cond delay="0"/>
                                   </p:stCondLst>
                                   <p:childTnLst>
                                     <p:set>
                                       <p:cBhvr>
-                                        <p:cTn id="7" dur="1"/>
+                                        <p:cTn id="8" dur="1" fill="hold">
+                                          <p:stCondLst>
+                                            <p:cond delay="0"/>
+                                          </p:stCondLst>
+                                        </p:cTn>
                                         <p:tgtEl>
                                           <p:spTgt spid="2"/>
                                         </p:tgtEl>
@@ -9695,7 +10573,7 @@
                                     </p:set>
                                     <p:animEffect transition="in" filter="fade">
                                       <p:cBhvr>
-                                        <p:cTn id="8" dur="400"/>
+                                        <p:cTn id="9" dur="400"/>
                                         <p:tgtEl>
                                           <p:spTgt spid="2"/>
                                         </p:tgtEl>
@@ -9704,15 +10582,28 @@
                                   </p:childTnLst>
                                 </p:cTn>
                               </p:par>
+                            </p:childTnLst>
+                          </p:cTn>
+                        </p:par>
+                        <p:par>
+                          <p:cTn id="10" fill="hold">
+                            <p:stCondLst>
+                              <p:cond delay="1160"/>
+                            </p:stCondLst>
+                            <p:childTnLst>
                               <p:par>
                                 <p:cTn presetID="10" presetClass="entr" presetSubtype="0" fill="hold" grpId="0" nodeType="afterEffect">
                                   <p:stCondLst>
-                                    <p:cond delay="1160"/>
+                                    <p:cond delay="0"/>
                                   </p:stCondLst>
                                   <p:childTnLst>
                                     <p:set>
                                       <p:cBhvr>
-                                        <p:cTn id="9" dur="1"/>
+                                        <p:cTn id="11" dur="1" fill="hold">
+                                          <p:stCondLst>
+                                            <p:cond delay="0"/>
+                                          </p:stCondLst>
+                                        </p:cTn>
                                         <p:tgtEl>
                                           <p:spTgt spid="3"/>
                                         </p:tgtEl>
@@ -9726,7 +10617,7 @@
                                     </p:set>
                                     <p:animEffect transition="in" filter="fade">
                                       <p:cBhvr>
-                                        <p:cTn id="10" dur="400"/>
+                                        <p:cTn id="12" dur="400"/>
                                         <p:tgtEl>
                                           <p:spTgt spid="3"/>
                                         </p:tgtEl>
@@ -9735,15 +10626,28 @@
                                   </p:childTnLst>
                                 </p:cTn>
                               </p:par>
+                            </p:childTnLst>
+                          </p:cTn>
+                        </p:par>
+                        <p:par>
+                          <p:cTn id="13" fill="hold">
+                            <p:stCondLst>
+                              <p:cond delay="1920"/>
+                            </p:stCondLst>
+                            <p:childTnLst>
                               <p:par>
                                 <p:cTn presetID="10" presetClass="entr" presetSubtype="0" fill="hold" grpId="0" nodeType="afterEffect">
                                   <p:stCondLst>
-                                    <p:cond delay="1920"/>
+                                    <p:cond delay="0"/>
                                   </p:stCondLst>
                                   <p:childTnLst>
                                     <p:set>
                                       <p:cBhvr>
-                                        <p:cTn id="11" dur="1"/>
+                                        <p:cTn id="14" dur="1" fill="hold">
+                                          <p:stCondLst>
+                                            <p:cond delay="0"/>
+                                          </p:stCondLst>
+                                        </p:cTn>
                                         <p:tgtEl>
                                           <p:spTgt spid="5"/>
                                         </p:tgtEl>
@@ -9757,7 +10661,7 @@
                                     </p:set>
                                     <p:animEffect transition="in" filter="fade">
                                       <p:cBhvr>
-                                        <p:cTn id="12" dur="400"/>
+                                        <p:cTn id="15" dur="400"/>
                                         <p:tgtEl>
                                           <p:spTgt spid="5"/>
                                         </p:tgtEl>
@@ -9766,15 +10670,28 @@
                                   </p:childTnLst>
                                 </p:cTn>
                               </p:par>
+                            </p:childTnLst>
+                          </p:cTn>
+                        </p:par>
+                        <p:par>
+                          <p:cTn id="16" fill="hold">
+                            <p:stCondLst>
+                              <p:cond delay="2800"/>
+                            </p:stCondLst>
+                            <p:childTnLst>
                               <p:par>
                                 <p:cTn presetID="10" presetClass="entr" presetSubtype="0" fill="hold" grpId="0" nodeType="afterEffect">
                                   <p:stCondLst>
-                                    <p:cond delay="2800"/>
+                                    <p:cond delay="0"/>
                                   </p:stCondLst>
                                   <p:childTnLst>
                                     <p:set>
                                       <p:cBhvr>
-                                        <p:cTn id="13" dur="1"/>
+                                        <p:cTn id="17" dur="1" fill="hold">
+                                          <p:stCondLst>
+                                            <p:cond delay="0"/>
+                                          </p:stCondLst>
+                                        </p:cTn>
                                         <p:tgtEl>
                                           <p:spTgt spid="6"/>
                                         </p:tgtEl>
@@ -9788,7 +10705,7 @@
                                     </p:set>
                                     <p:animEffect transition="in" filter="fade">
                                       <p:cBhvr>
-                                        <p:cTn id="14" dur="400"/>
+                                        <p:cTn id="18" dur="400"/>
                                         <p:tgtEl>
                                           <p:spTgt spid="6"/>
                                         </p:tgtEl>
@@ -9797,15 +10714,28 @@
                                   </p:childTnLst>
                                 </p:cTn>
                               </p:par>
+                            </p:childTnLst>
+                          </p:cTn>
+                        </p:par>
+                        <p:par>
+                          <p:cTn id="19" fill="hold">
+                            <p:stCondLst>
+                              <p:cond delay="3800"/>
+                            </p:stCondLst>
+                            <p:childTnLst>
                               <p:par>
                                 <p:cTn presetID="10" presetClass="entr" presetSubtype="0" fill="hold" grpId="0" nodeType="afterEffect">
                                   <p:stCondLst>
-                                    <p:cond delay="3800"/>
+                                    <p:cond delay="0"/>
                                   </p:stCondLst>
                                   <p:childTnLst>
                                     <p:set>
                                       <p:cBhvr>
-                                        <p:cTn id="15" dur="1"/>
+                                        <p:cTn id="20" dur="1" fill="hold">
+                                          <p:stCondLst>
+                                            <p:cond delay="0"/>
+                                          </p:stCondLst>
+                                        </p:cTn>
                                         <p:tgtEl>
                                           <p:spTgt spid="7"/>
                                         </p:tgtEl>
@@ -9819,7 +10749,7 @@
                                     </p:set>
                                     <p:animEffect transition="in" filter="fade">
                                       <p:cBhvr>
-                                        <p:cTn id="16" dur="400"/>
+                                        <p:cTn id="21" dur="400"/>
                                         <p:tgtEl>
                                           <p:spTgt spid="7"/>
                                         </p:tgtEl>
@@ -9828,15 +10758,28 @@
                                   </p:childTnLst>
                                 </p:cTn>
                               </p:par>
+                            </p:childTnLst>
+                          </p:cTn>
+                        </p:par>
+                        <p:par>
+                          <p:cTn id="22" fill="hold">
+                            <p:stCondLst>
+                              <p:cond delay="4920"/>
+                            </p:stCondLst>
+                            <p:childTnLst>
                               <p:par>
                                 <p:cTn presetID="10" presetClass="entr" presetSubtype="0" fill="hold" grpId="0" nodeType="afterEffect">
                                   <p:stCondLst>
-                                    <p:cond delay="4920"/>
+                                    <p:cond delay="0"/>
                                   </p:stCondLst>
                                   <p:childTnLst>
                                     <p:set>
                                       <p:cBhvr>
-                                        <p:cTn id="17" dur="1"/>
+                                        <p:cTn id="23" dur="1" fill="hold">
+                                          <p:stCondLst>
+                                            <p:cond delay="0"/>
+                                          </p:stCondLst>
+                                        </p:cTn>
                                         <p:tgtEl>
                                           <p:spTgt spid="8"/>
                                         </p:tgtEl>
@@ -9850,7 +10793,7 @@
                                     </p:set>
                                     <p:animEffect transition="in" filter="fade">
                                       <p:cBhvr>
-                                        <p:cTn id="18" dur="400"/>
+                                        <p:cTn id="24" dur="400"/>
                                         <p:tgtEl>
                                           <p:spTgt spid="8"/>
                                         </p:tgtEl>
@@ -9859,15 +10802,28 @@
                                   </p:childTnLst>
                                 </p:cTn>
                               </p:par>
+                            </p:childTnLst>
+                          </p:cTn>
+                        </p:par>
+                        <p:par>
+                          <p:cTn id="25" fill="hold">
+                            <p:stCondLst>
+                              <p:cond delay="6160"/>
+                            </p:stCondLst>
+                            <p:childTnLst>
                               <p:par>
                                 <p:cTn presetID="10" presetClass="entr" presetSubtype="0" fill="hold" grpId="0" nodeType="afterEffect">
                                   <p:stCondLst>
-                                    <p:cond delay="6160"/>
+                                    <p:cond delay="0"/>
                                   </p:stCondLst>
                                   <p:childTnLst>
                                     <p:set>
                                       <p:cBhvr>
-                                        <p:cTn id="19" dur="1"/>
+                                        <p:cTn id="26" dur="1" fill="hold">
+                                          <p:stCondLst>
+                                            <p:cond delay="0"/>
+                                          </p:stCondLst>
+                                        </p:cTn>
                                         <p:tgtEl>
                                           <p:spTgt spid="10"/>
                                         </p:tgtEl>
@@ -9881,7 +10837,7 @@
                                     </p:set>
                                     <p:animEffect transition="in" filter="fade">
                                       <p:cBhvr>
-                                        <p:cTn id="20" dur="400"/>
+                                        <p:cTn id="27" dur="400"/>
                                         <p:tgtEl>
                                           <p:spTgt spid="10"/>
                                         </p:tgtEl>
@@ -9890,15 +10846,28 @@
                                   </p:childTnLst>
                                 </p:cTn>
                               </p:par>
+                            </p:childTnLst>
+                          </p:cTn>
+                        </p:par>
+                        <p:par>
+                          <p:cTn id="28" fill="hold">
+                            <p:stCondLst>
+                              <p:cond delay="7520"/>
+                            </p:stCondLst>
+                            <p:childTnLst>
                               <p:par>
                                 <p:cTn presetID="10" presetClass="entr" presetSubtype="0" fill="hold" grpId="0" nodeType="afterEffect">
                                   <p:stCondLst>
-                                    <p:cond delay="7520"/>
+                                    <p:cond delay="0"/>
                                   </p:stCondLst>
                                   <p:childTnLst>
                                     <p:set>
                                       <p:cBhvr>
-                                        <p:cTn id="21" dur="1"/>
+                                        <p:cTn id="29" dur="1" fill="hold">
+                                          <p:stCondLst>
+                                            <p:cond delay="0"/>
+                                          </p:stCondLst>
+                                        </p:cTn>
                                         <p:tgtEl>
                                           <p:spTgt spid="11"/>
                                         </p:tgtEl>
@@ -9912,7 +10881,7 @@
                                     </p:set>
                                     <p:animEffect transition="in" filter="fade">
                                       <p:cBhvr>
-                                        <p:cTn id="22" dur="400"/>
+                                        <p:cTn id="30" dur="400"/>
                                         <p:tgtEl>
                                           <p:spTgt spid="11"/>
                                         </p:tgtEl>
@@ -9921,15 +10890,28 @@
                                   </p:childTnLst>
                                 </p:cTn>
                               </p:par>
+                            </p:childTnLst>
+                          </p:cTn>
+                        </p:par>
+                        <p:par>
+                          <p:cTn id="31" fill="hold">
+                            <p:stCondLst>
+                              <p:cond delay="9000"/>
+                            </p:stCondLst>
+                            <p:childTnLst>
                               <p:par>
                                 <p:cTn presetID="10" presetClass="entr" presetSubtype="0" fill="hold" grpId="0" nodeType="afterEffect">
                                   <p:stCondLst>
-                                    <p:cond delay="9000"/>
+                                    <p:cond delay="0"/>
                                   </p:stCondLst>
                                   <p:childTnLst>
                                     <p:set>
                                       <p:cBhvr>
-                                        <p:cTn id="23" dur="1"/>
+                                        <p:cTn id="32" dur="1" fill="hold">
+                                          <p:stCondLst>
+                                            <p:cond delay="0"/>
+                                          </p:stCondLst>
+                                        </p:cTn>
                                         <p:tgtEl>
                                           <p:spTgt spid="12"/>
                                         </p:tgtEl>
@@ -9943,7 +10925,7 @@
                                     </p:set>
                                     <p:animEffect transition="in" filter="fade">
                                       <p:cBhvr>
-                                        <p:cTn id="24" dur="400"/>
+                                        <p:cTn id="33" dur="400"/>
                                         <p:tgtEl>
                                           <p:spTgt spid="12"/>
                                         </p:tgtEl>
@@ -10708,10 +11690,7 @@
                   <p:par>
                     <p:cTn id="3" fill="hold">
                       <p:stCondLst>
-                        <p:cond delay="indefinite"/>
-                        <p:cond evt="onBegin" delay="0">
-                          <p:tn val="2"/>
-                        </p:cond>
+                        <p:cond delay="0"/>
                       </p:stCondLst>
                       <p:childTnLst>
                         <p:par>
@@ -10728,7 +11707,11 @@
                                   <p:childTnLst>
                                     <p:set>
                                       <p:cBhvr>
-                                        <p:cTn id="5" dur="1"/>
+                                        <p:cTn id="5" dur="1" fill="hold">
+                                          <p:stCondLst>
+                                            <p:cond delay="0"/>
+                                          </p:stCondLst>
+                                        </p:cTn>
                                         <p:tgtEl>
                                           <p:spTgt spid="2"/>
                                         </p:tgtEl>
@@ -10751,15 +11734,28 @@
                                   </p:childTnLst>
                                 </p:cTn>
                               </p:par>
+                            </p:childTnLst>
+                          </p:cTn>
+                        </p:par>
+                        <p:par>
+                          <p:cTn id="7" fill="hold">
+                            <p:stCondLst>
+                              <p:cond delay="450"/>
+                            </p:stCondLst>
+                            <p:childTnLst>
                               <p:par>
                                 <p:cTn presetID="10" presetClass="entr" presetSubtype="0" fill="hold" grpId="0" nodeType="afterEffect">
                                   <p:stCondLst>
-                                    <p:cond delay="450"/>
+                                    <p:cond delay="0"/>
                                   </p:stCondLst>
                                   <p:childTnLst>
                                     <p:set>
                                       <p:cBhvr>
-                                        <p:cTn id="7" dur="1"/>
+                                        <p:cTn id="8" dur="1" fill="hold">
+                                          <p:stCondLst>
+                                            <p:cond delay="0"/>
+                                          </p:stCondLst>
+                                        </p:cTn>
                                         <p:tgtEl>
                                           <p:spTgt spid="3"/>
                                         </p:tgtEl>
@@ -10773,7 +11769,7 @@
                                     </p:set>
                                     <p:animEffect transition="in" filter="fade">
                                       <p:cBhvr>
-                                        <p:cTn id="8" dur="350"/>
+                                        <p:cTn id="9" dur="350"/>
                                         <p:tgtEl>
                                           <p:spTgt spid="3"/>
                                         </p:tgtEl>
@@ -10782,15 +11778,28 @@
                                   </p:childTnLst>
                                 </p:cTn>
                               </p:par>
+                            </p:childTnLst>
+                          </p:cTn>
+                        </p:par>
+                        <p:par>
+                          <p:cTn id="10" fill="hold">
+                            <p:stCondLst>
+                              <p:cond delay="1000"/>
+                            </p:stCondLst>
+                            <p:childTnLst>
                               <p:par>
                                 <p:cTn presetID="10" presetClass="entr" presetSubtype="0" fill="hold" grpId="0" nodeType="afterEffect">
                                   <p:stCondLst>
-                                    <p:cond delay="1000"/>
+                                    <p:cond delay="0"/>
                                   </p:stCondLst>
                                   <p:childTnLst>
                                     <p:set>
                                       <p:cBhvr>
-                                        <p:cTn id="9" dur="1"/>
+                                        <p:cTn id="11" dur="1" fill="hold">
+                                          <p:stCondLst>
+                                            <p:cond delay="0"/>
+                                          </p:stCondLst>
+                                        </p:cTn>
                                         <p:tgtEl>
                                           <p:spTgt spid="5"/>
                                         </p:tgtEl>
@@ -10804,7 +11813,7 @@
                                     </p:set>
                                     <p:animEffect transition="in" filter="fade">
                                       <p:cBhvr>
-                                        <p:cTn id="10" dur="350"/>
+                                        <p:cTn id="12" dur="350"/>
                                         <p:tgtEl>
                                           <p:spTgt spid="5"/>
                                         </p:tgtEl>
@@ -10813,15 +11822,28 @@
                                   </p:childTnLst>
                                 </p:cTn>
                               </p:par>
+                            </p:childTnLst>
+                          </p:cTn>
+                        </p:par>
+                        <p:par>
+                          <p:cTn id="13" fill="hold">
+                            <p:stCondLst>
+                              <p:cond delay="1650"/>
+                            </p:stCondLst>
+                            <p:childTnLst>
                               <p:par>
                                 <p:cTn presetID="10" presetClass="entr" presetSubtype="0" fill="hold" grpId="0" nodeType="afterEffect">
                                   <p:stCondLst>
-                                    <p:cond delay="1650"/>
+                                    <p:cond delay="0"/>
                                   </p:stCondLst>
                                   <p:childTnLst>
                                     <p:set>
                                       <p:cBhvr>
-                                        <p:cTn id="11" dur="1"/>
+                                        <p:cTn id="14" dur="1" fill="hold">
+                                          <p:stCondLst>
+                                            <p:cond delay="0"/>
+                                          </p:stCondLst>
+                                        </p:cTn>
                                         <p:tgtEl>
                                           <p:spTgt spid="6"/>
                                         </p:tgtEl>
@@ -10835,7 +11857,7 @@
                                     </p:set>
                                     <p:animEffect transition="in" filter="fade">
                                       <p:cBhvr>
-                                        <p:cTn id="12" dur="350"/>
+                                        <p:cTn id="15" dur="350"/>
                                         <p:tgtEl>
                                           <p:spTgt spid="6"/>
                                         </p:tgtEl>
@@ -10844,15 +11866,28 @@
                                   </p:childTnLst>
                                 </p:cTn>
                               </p:par>
+                            </p:childTnLst>
+                          </p:cTn>
+                        </p:par>
+                        <p:par>
+                          <p:cTn id="16" fill="hold">
+                            <p:stCondLst>
+                              <p:cond delay="2400"/>
+                            </p:stCondLst>
+                            <p:childTnLst>
                               <p:par>
                                 <p:cTn presetID="10" presetClass="entr" presetSubtype="0" fill="hold" grpId="0" nodeType="afterEffect">
                                   <p:stCondLst>
-                                    <p:cond delay="2400"/>
+                                    <p:cond delay="0"/>
                                   </p:stCondLst>
                                   <p:childTnLst>
                                     <p:set>
                                       <p:cBhvr>
-                                        <p:cTn id="13" dur="1"/>
+                                        <p:cTn id="17" dur="1" fill="hold">
+                                          <p:stCondLst>
+                                            <p:cond delay="0"/>
+                                          </p:stCondLst>
+                                        </p:cTn>
                                         <p:tgtEl>
                                           <p:spTgt spid="7"/>
                                         </p:tgtEl>
@@ -10866,7 +11901,7 @@
                                     </p:set>
                                     <p:animEffect transition="in" filter="fade">
                                       <p:cBhvr>
-                                        <p:cTn id="14" dur="350"/>
+                                        <p:cTn id="18" dur="350"/>
                                         <p:tgtEl>
                                           <p:spTgt spid="7"/>
                                         </p:tgtEl>
@@ -10875,15 +11910,28 @@
                                   </p:childTnLst>
                                 </p:cTn>
                               </p:par>
+                            </p:childTnLst>
+                          </p:cTn>
+                        </p:par>
+                        <p:par>
+                          <p:cTn id="19" fill="hold">
+                            <p:stCondLst>
+                              <p:cond delay="3250"/>
+                            </p:stCondLst>
+                            <p:childTnLst>
                               <p:par>
                                 <p:cTn presetID="10" presetClass="entr" presetSubtype="0" fill="hold" grpId="0" nodeType="afterEffect">
                                   <p:stCondLst>
-                                    <p:cond delay="3250"/>
+                                    <p:cond delay="0"/>
                                   </p:stCondLst>
                                   <p:childTnLst>
                                     <p:set>
                                       <p:cBhvr>
-                                        <p:cTn id="15" dur="1"/>
+                                        <p:cTn id="20" dur="1" fill="hold">
+                                          <p:stCondLst>
+                                            <p:cond delay="0"/>
+                                          </p:stCondLst>
+                                        </p:cTn>
                                         <p:tgtEl>
                                           <p:spTgt spid="8"/>
                                         </p:tgtEl>
@@ -10897,7 +11945,7 @@
                                     </p:set>
                                     <p:animEffect transition="in" filter="fade">
                                       <p:cBhvr>
-                                        <p:cTn id="16" dur="350"/>
+                                        <p:cTn id="21" dur="350"/>
                                         <p:tgtEl>
                                           <p:spTgt spid="8"/>
                                         </p:tgtEl>
@@ -10906,15 +11954,28 @@
                                   </p:childTnLst>
                                 </p:cTn>
                               </p:par>
+                            </p:childTnLst>
+                          </p:cTn>
+                        </p:par>
+                        <p:par>
+                          <p:cTn id="22" fill="hold">
+                            <p:stCondLst>
+                              <p:cond delay="4200"/>
+                            </p:stCondLst>
+                            <p:childTnLst>
                               <p:par>
                                 <p:cTn presetID="10" presetClass="entr" presetSubtype="0" fill="hold" grpId="0" nodeType="afterEffect">
                                   <p:stCondLst>
-                                    <p:cond delay="4200"/>
+                                    <p:cond delay="0"/>
                                   </p:stCondLst>
                                   <p:childTnLst>
                                     <p:set>
                                       <p:cBhvr>
-                                        <p:cTn id="17" dur="1"/>
+                                        <p:cTn id="23" dur="1" fill="hold">
+                                          <p:stCondLst>
+                                            <p:cond delay="0"/>
+                                          </p:stCondLst>
+                                        </p:cTn>
                                         <p:tgtEl>
                                           <p:spTgt spid="9"/>
                                         </p:tgtEl>
@@ -10928,7 +11989,7 @@
                                     </p:set>
                                     <p:animEffect transition="in" filter="fade">
                                       <p:cBhvr>
-                                        <p:cTn id="18" dur="350"/>
+                                        <p:cTn id="24" dur="350"/>
                                         <p:tgtEl>
                                           <p:spTgt spid="9"/>
                                         </p:tgtEl>
@@ -10937,15 +11998,28 @@
                                   </p:childTnLst>
                                 </p:cTn>
                               </p:par>
+                            </p:childTnLst>
+                          </p:cTn>
+                        </p:par>
+                        <p:par>
+                          <p:cTn id="25" fill="hold">
+                            <p:stCondLst>
+                              <p:cond delay="5250"/>
+                            </p:stCondLst>
+                            <p:childTnLst>
                               <p:par>
                                 <p:cTn presetID="10" presetClass="entr" presetSubtype="0" fill="hold" grpId="0" nodeType="afterEffect">
                                   <p:stCondLst>
-                                    <p:cond delay="5250"/>
+                                    <p:cond delay="0"/>
                                   </p:stCondLst>
                                   <p:childTnLst>
                                     <p:set>
                                       <p:cBhvr>
-                                        <p:cTn id="19" dur="1"/>
+                                        <p:cTn id="26" dur="1" fill="hold">
+                                          <p:stCondLst>
+                                            <p:cond delay="0"/>
+                                          </p:stCondLst>
+                                        </p:cTn>
                                         <p:tgtEl>
                                           <p:spTgt spid="10"/>
                                         </p:tgtEl>
@@ -10959,7 +12033,7 @@
                                     </p:set>
                                     <p:animEffect transition="in" filter="fade">
                                       <p:cBhvr>
-                                        <p:cTn id="20" dur="350"/>
+                                        <p:cTn id="27" dur="350"/>
                                         <p:tgtEl>
                                           <p:spTgt spid="10"/>
                                         </p:tgtEl>
@@ -10968,15 +12042,28 @@
                                   </p:childTnLst>
                                 </p:cTn>
                               </p:par>
+                            </p:childTnLst>
+                          </p:cTn>
+                        </p:par>
+                        <p:par>
+                          <p:cTn id="28" fill="hold">
+                            <p:stCondLst>
+                              <p:cond delay="6400"/>
+                            </p:stCondLst>
+                            <p:childTnLst>
                               <p:par>
                                 <p:cTn presetID="10" presetClass="entr" presetSubtype="0" fill="hold" grpId="0" nodeType="afterEffect">
                                   <p:stCondLst>
-                                    <p:cond delay="6400"/>
+                                    <p:cond delay="0"/>
                                   </p:stCondLst>
                                   <p:childTnLst>
                                     <p:set>
                                       <p:cBhvr>
-                                        <p:cTn id="21" dur="1"/>
+                                        <p:cTn id="29" dur="1" fill="hold">
+                                          <p:stCondLst>
+                                            <p:cond delay="0"/>
+                                          </p:stCondLst>
+                                        </p:cTn>
                                         <p:tgtEl>
                                           <p:spTgt spid="11"/>
                                         </p:tgtEl>
@@ -10990,7 +12077,7 @@
                                     </p:set>
                                     <p:animEffect transition="in" filter="fade">
                                       <p:cBhvr>
-                                        <p:cTn id="22" dur="350"/>
+                                        <p:cTn id="30" dur="350"/>
                                         <p:tgtEl>
                                           <p:spTgt spid="11"/>
                                         </p:tgtEl>
@@ -10999,15 +12086,28 @@
                                   </p:childTnLst>
                                 </p:cTn>
                               </p:par>
+                            </p:childTnLst>
+                          </p:cTn>
+                        </p:par>
+                        <p:par>
+                          <p:cTn id="31" fill="hold">
+                            <p:stCondLst>
+                              <p:cond delay="7650"/>
+                            </p:stCondLst>
+                            <p:childTnLst>
                               <p:par>
                                 <p:cTn presetID="10" presetClass="entr" presetSubtype="0" fill="hold" grpId="0" nodeType="afterEffect">
                                   <p:stCondLst>
-                                    <p:cond delay="7650"/>
+                                    <p:cond delay="0"/>
                                   </p:stCondLst>
                                   <p:childTnLst>
                                     <p:set>
                                       <p:cBhvr>
-                                        <p:cTn id="23" dur="1"/>
+                                        <p:cTn id="32" dur="1" fill="hold">
+                                          <p:stCondLst>
+                                            <p:cond delay="0"/>
+                                          </p:stCondLst>
+                                        </p:cTn>
                                         <p:tgtEl>
                                           <p:spTgt spid="12"/>
                                         </p:tgtEl>
@@ -11021,7 +12121,7 @@
                                     </p:set>
                                     <p:animEffect transition="in" filter="fade">
                                       <p:cBhvr>
-                                        <p:cTn id="24" dur="350"/>
+                                        <p:cTn id="33" dur="350"/>
                                         <p:tgtEl>
                                           <p:spTgt spid="12"/>
                                         </p:tgtEl>
@@ -11030,15 +12130,28 @@
                                   </p:childTnLst>
                                 </p:cTn>
                               </p:par>
+                            </p:childTnLst>
+                          </p:cTn>
+                        </p:par>
+                        <p:par>
+                          <p:cTn id="34" fill="hold">
+                            <p:stCondLst>
+                              <p:cond delay="9000"/>
+                            </p:stCondLst>
+                            <p:childTnLst>
                               <p:par>
                                 <p:cTn presetID="10" presetClass="entr" presetSubtype="0" fill="hold" grpId="0" nodeType="afterEffect">
                                   <p:stCondLst>
-                                    <p:cond delay="9000"/>
+                                    <p:cond delay="0"/>
                                   </p:stCondLst>
                                   <p:childTnLst>
                                     <p:set>
                                       <p:cBhvr>
-                                        <p:cTn id="25" dur="1"/>
+                                        <p:cTn id="35" dur="1" fill="hold">
+                                          <p:stCondLst>
+                                            <p:cond delay="0"/>
+                                          </p:stCondLst>
+                                        </p:cTn>
                                         <p:tgtEl>
                                           <p:spTgt spid="13"/>
                                         </p:tgtEl>
@@ -11052,7 +12165,7 @@
                                     </p:set>
                                     <p:animEffect transition="in" filter="fade">
                                       <p:cBhvr>
-                                        <p:cTn id="26" dur="350"/>
+                                        <p:cTn id="36" dur="350"/>
                                         <p:tgtEl>
                                           <p:spTgt spid="13"/>
                                         </p:tgtEl>
@@ -11061,15 +12174,28 @@
                                   </p:childTnLst>
                                 </p:cTn>
                               </p:par>
+                            </p:childTnLst>
+                          </p:cTn>
+                        </p:par>
+                        <p:par>
+                          <p:cTn id="37" fill="hold">
+                            <p:stCondLst>
+                              <p:cond delay="10450"/>
+                            </p:stCondLst>
+                            <p:childTnLst>
                               <p:par>
                                 <p:cTn presetID="10" presetClass="entr" presetSubtype="0" fill="hold" grpId="0" nodeType="afterEffect">
                                   <p:stCondLst>
-                                    <p:cond delay="10450"/>
+                                    <p:cond delay="0"/>
                                   </p:stCondLst>
                                   <p:childTnLst>
                                     <p:set>
                                       <p:cBhvr>
-                                        <p:cTn id="27" dur="1"/>
+                                        <p:cTn id="38" dur="1" fill="hold">
+                                          <p:stCondLst>
+                                            <p:cond delay="0"/>
+                                          </p:stCondLst>
+                                        </p:cTn>
                                         <p:tgtEl>
                                           <p:spTgt spid="14"/>
                                         </p:tgtEl>
@@ -11083,7 +12209,7 @@
                                     </p:set>
                                     <p:animEffect transition="in" filter="fade">
                                       <p:cBhvr>
-                                        <p:cTn id="28" dur="350"/>
+                                        <p:cTn id="39" dur="350"/>
                                         <p:tgtEl>
                                           <p:spTgt spid="14"/>
                                         </p:tgtEl>
@@ -11092,15 +12218,28 @@
                                   </p:childTnLst>
                                 </p:cTn>
                               </p:par>
+                            </p:childTnLst>
+                          </p:cTn>
+                        </p:par>
+                        <p:par>
+                          <p:cTn id="40" fill="hold">
+                            <p:stCondLst>
+                              <p:cond delay="12000"/>
+                            </p:stCondLst>
+                            <p:childTnLst>
                               <p:par>
                                 <p:cTn presetID="10" presetClass="entr" presetSubtype="0" fill="hold" grpId="0" nodeType="afterEffect">
                                   <p:stCondLst>
-                                    <p:cond delay="12000"/>
+                                    <p:cond delay="0"/>
                                   </p:stCondLst>
                                   <p:childTnLst>
                                     <p:set>
                                       <p:cBhvr>
-                                        <p:cTn id="29" dur="1"/>
+                                        <p:cTn id="41" dur="1" fill="hold">
+                                          <p:stCondLst>
+                                            <p:cond delay="0"/>
+                                          </p:stCondLst>
+                                        </p:cTn>
                                         <p:tgtEl>
                                           <p:spTgt spid="15"/>
                                         </p:tgtEl>
@@ -11114,7 +12253,7 @@
                                     </p:set>
                                     <p:animEffect transition="in" filter="fade">
                                       <p:cBhvr>
-                                        <p:cTn id="30" dur="350"/>
+                                        <p:cTn id="42" dur="350"/>
                                         <p:tgtEl>
                                           <p:spTgt spid="15"/>
                                         </p:tgtEl>
@@ -11123,15 +12262,28 @@
                                   </p:childTnLst>
                                 </p:cTn>
                               </p:par>
+                            </p:childTnLst>
+                          </p:cTn>
+                        </p:par>
+                        <p:par>
+                          <p:cTn id="43" fill="hold">
+                            <p:stCondLst>
+                              <p:cond delay="13650"/>
+                            </p:stCondLst>
+                            <p:childTnLst>
                               <p:par>
                                 <p:cTn presetID="10" presetClass="entr" presetSubtype="0" fill="hold" grpId="0" nodeType="afterEffect">
                                   <p:stCondLst>
-                                    <p:cond delay="13650"/>
+                                    <p:cond delay="0"/>
                                   </p:stCondLst>
                                   <p:childTnLst>
                                     <p:set>
                                       <p:cBhvr>
-                                        <p:cTn id="31" dur="1"/>
+                                        <p:cTn id="44" dur="1" fill="hold">
+                                          <p:stCondLst>
+                                            <p:cond delay="0"/>
+                                          </p:stCondLst>
+                                        </p:cTn>
                                         <p:tgtEl>
                                           <p:spTgt spid="16"/>
                                         </p:tgtEl>
@@ -11145,7 +12297,7 @@
                                     </p:set>
                                     <p:animEffect transition="in" filter="fade">
                                       <p:cBhvr>
-                                        <p:cTn id="32" dur="350"/>
+                                        <p:cTn id="45" dur="350"/>
                                         <p:tgtEl>
                                           <p:spTgt spid="16"/>
                                         </p:tgtEl>
@@ -11154,15 +12306,28 @@
                                   </p:childTnLst>
                                 </p:cTn>
                               </p:par>
+                            </p:childTnLst>
+                          </p:cTn>
+                        </p:par>
+                        <p:par>
+                          <p:cTn id="46" fill="hold">
+                            <p:stCondLst>
+                              <p:cond delay="15400"/>
+                            </p:stCondLst>
+                            <p:childTnLst>
                               <p:par>
                                 <p:cTn presetID="10" presetClass="entr" presetSubtype="0" fill="hold" grpId="0" nodeType="afterEffect">
                                   <p:stCondLst>
-                                    <p:cond delay="15400"/>
+                                    <p:cond delay="0"/>
                                   </p:stCondLst>
                                   <p:childTnLst>
                                     <p:set>
                                       <p:cBhvr>
-                                        <p:cTn id="33" dur="1"/>
+                                        <p:cTn id="47" dur="1" fill="hold">
+                                          <p:stCondLst>
+                                            <p:cond delay="0"/>
+                                          </p:stCondLst>
+                                        </p:cTn>
                                         <p:tgtEl>
                                           <p:spTgt spid="17"/>
                                         </p:tgtEl>
@@ -11176,7 +12341,7 @@
                                     </p:set>
                                     <p:animEffect transition="in" filter="fade">
                                       <p:cBhvr>
-                                        <p:cTn id="34" dur="350"/>
+                                        <p:cTn id="48" dur="350"/>
                                         <p:tgtEl>
                                           <p:spTgt spid="17"/>
                                         </p:tgtEl>
@@ -11185,15 +12350,28 @@
                                   </p:childTnLst>
                                 </p:cTn>
                               </p:par>
+                            </p:childTnLst>
+                          </p:cTn>
+                        </p:par>
+                        <p:par>
+                          <p:cTn id="49" fill="hold">
+                            <p:stCondLst>
+                              <p:cond delay="17250"/>
+                            </p:stCondLst>
+                            <p:childTnLst>
                               <p:par>
                                 <p:cTn presetID="10" presetClass="entr" presetSubtype="0" fill="hold" grpId="0" nodeType="afterEffect">
                                   <p:stCondLst>
-                                    <p:cond delay="17250"/>
+                                    <p:cond delay="0"/>
                                   </p:stCondLst>
                                   <p:childTnLst>
                                     <p:set>
                                       <p:cBhvr>
-                                        <p:cTn id="35" dur="1"/>
+                                        <p:cTn id="50" dur="1" fill="hold">
+                                          <p:stCondLst>
+                                            <p:cond delay="0"/>
+                                          </p:stCondLst>
+                                        </p:cTn>
                                         <p:tgtEl>
                                           <p:spTgt spid="18"/>
                                         </p:tgtEl>
@@ -11207,7 +12385,7 @@
                                     </p:set>
                                     <p:animEffect transition="in" filter="fade">
                                       <p:cBhvr>
-                                        <p:cTn id="36" dur="350"/>
+                                        <p:cTn id="51" dur="350"/>
                                         <p:tgtEl>
                                           <p:spTgt spid="18"/>
                                         </p:tgtEl>
@@ -11216,15 +12394,28 @@
                                   </p:childTnLst>
                                 </p:cTn>
                               </p:par>
+                            </p:childTnLst>
+                          </p:cTn>
+                        </p:par>
+                        <p:par>
+                          <p:cTn id="52" fill="hold">
+                            <p:stCondLst>
+                              <p:cond delay="19200"/>
+                            </p:stCondLst>
+                            <p:childTnLst>
                               <p:par>
                                 <p:cTn presetID="10" presetClass="entr" presetSubtype="0" fill="hold" grpId="0" nodeType="afterEffect">
                                   <p:stCondLst>
-                                    <p:cond delay="19200"/>
+                                    <p:cond delay="0"/>
                                   </p:stCondLst>
                                   <p:childTnLst>
                                     <p:set>
                                       <p:cBhvr>
-                                        <p:cTn id="37" dur="1"/>
+                                        <p:cTn id="53" dur="1" fill="hold">
+                                          <p:stCondLst>
+                                            <p:cond delay="0"/>
+                                          </p:stCondLst>
+                                        </p:cTn>
                                         <p:tgtEl>
                                           <p:spTgt spid="19"/>
                                         </p:tgtEl>
@@ -11238,7 +12429,7 @@
                                     </p:set>
                                     <p:animEffect transition="in" filter="fade">
                                       <p:cBhvr>
-                                        <p:cTn id="38" dur="350"/>
+                                        <p:cTn id="54" dur="350"/>
                                         <p:tgtEl>
                                           <p:spTgt spid="19"/>
                                         </p:tgtEl>
@@ -11247,15 +12438,28 @@
                                   </p:childTnLst>
                                 </p:cTn>
                               </p:par>
+                            </p:childTnLst>
+                          </p:cTn>
+                        </p:par>
+                        <p:par>
+                          <p:cTn id="55" fill="hold">
+                            <p:stCondLst>
+                              <p:cond delay="21250"/>
+                            </p:stCondLst>
+                            <p:childTnLst>
                               <p:par>
                                 <p:cTn presetID="10" presetClass="entr" presetSubtype="0" fill="hold" grpId="0" nodeType="afterEffect">
                                   <p:stCondLst>
-                                    <p:cond delay="21250"/>
+                                    <p:cond delay="0"/>
                                   </p:stCondLst>
                                   <p:childTnLst>
                                     <p:set>
                                       <p:cBhvr>
-                                        <p:cTn id="39" dur="1"/>
+                                        <p:cTn id="56" dur="1" fill="hold">
+                                          <p:stCondLst>
+                                            <p:cond delay="0"/>
+                                          </p:stCondLst>
+                                        </p:cTn>
                                         <p:tgtEl>
                                           <p:spTgt spid="20"/>
                                         </p:tgtEl>
@@ -11269,7 +12473,7 @@
                                     </p:set>
                                     <p:animEffect transition="in" filter="fade">
                                       <p:cBhvr>
-                                        <p:cTn id="40" dur="350"/>
+                                        <p:cTn id="57" dur="350"/>
                                         <p:tgtEl>
                                           <p:spTgt spid="20"/>
                                         </p:tgtEl>
@@ -12132,10 +13336,7 @@
                   <p:par>
                     <p:cTn id="3" fill="hold">
                       <p:stCondLst>
-                        <p:cond delay="indefinite"/>
-                        <p:cond evt="onBegin" delay="0">
-                          <p:tn val="2"/>
-                        </p:cond>
+                        <p:cond delay="0"/>
                       </p:stCondLst>
                       <p:childTnLst>
                         <p:par>
@@ -12152,7 +13353,11 @@
                                   <p:childTnLst>
                                     <p:set>
                                       <p:cBhvr>
-                                        <p:cTn id="5" dur="1"/>
+                                        <p:cTn id="5" dur="1" fill="hold">
+                                          <p:stCondLst>
+                                            <p:cond delay="0"/>
+                                          </p:stCondLst>
+                                        </p:cTn>
                                         <p:tgtEl>
                                           <p:spTgt spid="2"/>
                                         </p:tgtEl>
@@ -12213,15 +13418,28 @@
                                   </p:childTnLst>
                                 </p:cTn>
                               </p:par>
+                            </p:childTnLst>
+                          </p:cTn>
+                        </p:par>
+                        <p:par>
+                          <p:cTn id="8" fill="hold">
+                            <p:stCondLst>
+                              <p:cond delay="550"/>
+                            </p:stCondLst>
+                            <p:childTnLst>
                               <p:par>
                                 <p:cTn presetID="2" presetClass="entr" presetSubtype="4" fill="hold" grpId="0" nodeType="afterEffect">
                                   <p:stCondLst>
-                                    <p:cond delay="550"/>
+                                    <p:cond delay="0"/>
                                   </p:stCondLst>
                                   <p:childTnLst>
                                     <p:set>
                                       <p:cBhvr>
-                                        <p:cTn id="8" dur="1"/>
+                                        <p:cTn id="9" dur="1" fill="hold">
+                                          <p:stCondLst>
+                                            <p:cond delay="0"/>
+                                          </p:stCondLst>
+                                        </p:cTn>
                                         <p:tgtEl>
                                           <p:spTgt spid="3"/>
                                         </p:tgtEl>
@@ -12235,7 +13453,7 @@
                                     </p:set>
                                     <p:anim calcmode="lin" valueType="num">
                                       <p:cBhvr additive="base">
-                                        <p:cTn id="9" dur="400"/>
+                                        <p:cTn id="10" dur="400"/>
                                         <p:tgtEl>
                                           <p:spTgt spid="3"/>
                                         </p:tgtEl>
@@ -12258,7 +13476,7 @@
                                     </p:anim>
                                     <p:anim calcmode="lin" valueType="num">
                                       <p:cBhvr additive="base">
-                                        <p:cTn id="10" dur="400"/>
+                                        <p:cTn id="11" dur="400"/>
                                         <p:tgtEl>
                                           <p:spTgt spid="3"/>
                                         </p:tgtEl>
@@ -12282,15 +13500,28 @@
                                   </p:childTnLst>
                                 </p:cTn>
                               </p:par>
+                            </p:childTnLst>
+                          </p:cTn>
+                        </p:par>
+                        <p:par>
+                          <p:cTn id="12" fill="hold">
+                            <p:stCondLst>
+                              <p:cond delay="1250"/>
+                            </p:stCondLst>
+                            <p:childTnLst>
                               <p:par>
                                 <p:cTn presetID="2" presetClass="entr" presetSubtype="4" fill="hold" grpId="0" nodeType="afterEffect">
                                   <p:stCondLst>
-                                    <p:cond delay="1250"/>
+                                    <p:cond delay="0"/>
                                   </p:stCondLst>
                                   <p:childTnLst>
                                     <p:set>
                                       <p:cBhvr>
-                                        <p:cTn id="11" dur="1"/>
+                                        <p:cTn id="13" dur="1" fill="hold">
+                                          <p:stCondLst>
+                                            <p:cond delay="0"/>
+                                          </p:stCondLst>
+                                        </p:cTn>
                                         <p:tgtEl>
                                           <p:spTgt spid="5"/>
                                         </p:tgtEl>
@@ -12304,7 +13535,7 @@
                                     </p:set>
                                     <p:anim calcmode="lin" valueType="num">
                                       <p:cBhvr additive="base">
-                                        <p:cTn id="12" dur="400"/>
+                                        <p:cTn id="14" dur="400"/>
                                         <p:tgtEl>
                                           <p:spTgt spid="5"/>
                                         </p:tgtEl>
@@ -12327,7 +13558,7 @@
                                     </p:anim>
                                     <p:anim calcmode="lin" valueType="num">
                                       <p:cBhvr additive="base">
-                                        <p:cTn id="13" dur="400"/>
+                                        <p:cTn id="15" dur="400"/>
                                         <p:tgtEl>
                                           <p:spTgt spid="5"/>
                                         </p:tgtEl>
@@ -12351,15 +13582,28 @@
                                   </p:childTnLst>
                                 </p:cTn>
                               </p:par>
+                            </p:childTnLst>
+                          </p:cTn>
+                        </p:par>
+                        <p:par>
+                          <p:cTn id="16" fill="hold">
+                            <p:stCondLst>
+                              <p:cond delay="2100"/>
+                            </p:stCondLst>
+                            <p:childTnLst>
                               <p:par>
                                 <p:cTn presetID="2" presetClass="entr" presetSubtype="4" fill="hold" grpId="0" nodeType="afterEffect">
                                   <p:stCondLst>
-                                    <p:cond delay="2100"/>
+                                    <p:cond delay="0"/>
                                   </p:stCondLst>
                                   <p:childTnLst>
                                     <p:set>
                                       <p:cBhvr>
-                                        <p:cTn id="14" dur="1"/>
+                                        <p:cTn id="17" dur="1" fill="hold">
+                                          <p:stCondLst>
+                                            <p:cond delay="0"/>
+                                          </p:stCondLst>
+                                        </p:cTn>
                                         <p:tgtEl>
                                           <p:spTgt spid="9"/>
                                         </p:tgtEl>
@@ -12373,7 +13617,7 @@
                                     </p:set>
                                     <p:anim calcmode="lin" valueType="num">
                                       <p:cBhvr additive="base">
-                                        <p:cTn id="15" dur="400"/>
+                                        <p:cTn id="18" dur="400"/>
                                         <p:tgtEl>
                                           <p:spTgt spid="9"/>
                                         </p:tgtEl>
@@ -12396,7 +13640,7 @@
                                     </p:anim>
                                     <p:anim calcmode="lin" valueType="num">
                                       <p:cBhvr additive="base">
-                                        <p:cTn id="16" dur="400"/>
+                                        <p:cTn id="19" dur="400"/>
                                         <p:tgtEl>
                                           <p:spTgt spid="9"/>
                                         </p:tgtEl>
@@ -12420,15 +13664,28 @@
                                   </p:childTnLst>
                                 </p:cTn>
                               </p:par>
+                            </p:childTnLst>
+                          </p:cTn>
+                        </p:par>
+                        <p:par>
+                          <p:cTn id="20" fill="hold">
+                            <p:stCondLst>
+                              <p:cond delay="3100"/>
+                            </p:stCondLst>
+                            <p:childTnLst>
                               <p:par>
                                 <p:cTn presetID="2" presetClass="entr" presetSubtype="4" fill="hold" grpId="0" nodeType="afterEffect">
                                   <p:stCondLst>
-                                    <p:cond delay="3100"/>
+                                    <p:cond delay="0"/>
                                   </p:stCondLst>
                                   <p:childTnLst>
                                     <p:set>
                                       <p:cBhvr>
-                                        <p:cTn id="17" dur="1"/>
+                                        <p:cTn id="21" dur="1" fill="hold">
+                                          <p:stCondLst>
+                                            <p:cond delay="0"/>
+                                          </p:stCondLst>
+                                        </p:cTn>
                                         <p:tgtEl>
                                           <p:spTgt spid="6"/>
                                         </p:tgtEl>
@@ -12442,7 +13699,7 @@
                                     </p:set>
                                     <p:anim calcmode="lin" valueType="num">
                                       <p:cBhvr additive="base">
-                                        <p:cTn id="18" dur="400"/>
+                                        <p:cTn id="22" dur="400"/>
                                         <p:tgtEl>
                                           <p:spTgt spid="6"/>
                                         </p:tgtEl>
@@ -12465,7 +13722,7 @@
                                     </p:anim>
                                     <p:anim calcmode="lin" valueType="num">
                                       <p:cBhvr additive="base">
-                                        <p:cTn id="19" dur="400"/>
+                                        <p:cTn id="23" dur="400"/>
                                         <p:tgtEl>
                                           <p:spTgt spid="6"/>
                                         </p:tgtEl>
@@ -12489,15 +13746,28 @@
                                   </p:childTnLst>
                                 </p:cTn>
                               </p:par>
+                            </p:childTnLst>
+                          </p:cTn>
+                        </p:par>
+                        <p:par>
+                          <p:cTn id="24" fill="hold">
+                            <p:stCondLst>
+                              <p:cond delay="4250"/>
+                            </p:stCondLst>
+                            <p:childTnLst>
                               <p:par>
                                 <p:cTn presetID="2" presetClass="entr" presetSubtype="4" fill="hold" grpId="0" nodeType="afterEffect">
                                   <p:stCondLst>
-                                    <p:cond delay="4250"/>
+                                    <p:cond delay="0"/>
                                   </p:stCondLst>
                                   <p:childTnLst>
                                     <p:set>
                                       <p:cBhvr>
-                                        <p:cTn id="20" dur="1"/>
+                                        <p:cTn id="25" dur="1" fill="hold">
+                                          <p:stCondLst>
+                                            <p:cond delay="0"/>
+                                          </p:stCondLst>
+                                        </p:cTn>
                                         <p:tgtEl>
                                           <p:spTgt spid="10"/>
                                         </p:tgtEl>
@@ -12511,7 +13781,7 @@
                                     </p:set>
                                     <p:anim calcmode="lin" valueType="num">
                                       <p:cBhvr additive="base">
-                                        <p:cTn id="21" dur="400"/>
+                                        <p:cTn id="26" dur="400"/>
                                         <p:tgtEl>
                                           <p:spTgt spid="10"/>
                                         </p:tgtEl>
@@ -12534,7 +13804,7 @@
                                     </p:anim>
                                     <p:anim calcmode="lin" valueType="num">
                                       <p:cBhvr additive="base">
-                                        <p:cTn id="22" dur="400"/>
+                                        <p:cTn id="27" dur="400"/>
                                         <p:tgtEl>
                                           <p:spTgt spid="10"/>
                                         </p:tgtEl>
@@ -12558,15 +13828,28 @@
                                   </p:childTnLst>
                                 </p:cTn>
                               </p:par>
+                            </p:childTnLst>
+                          </p:cTn>
+                        </p:par>
+                        <p:par>
+                          <p:cTn id="28" fill="hold">
+                            <p:stCondLst>
+                              <p:cond delay="5550"/>
+                            </p:stCondLst>
+                            <p:childTnLst>
                               <p:par>
                                 <p:cTn presetID="2" presetClass="entr" presetSubtype="4" fill="hold" grpId="0" nodeType="afterEffect">
                                   <p:stCondLst>
-                                    <p:cond delay="5550"/>
+                                    <p:cond delay="0"/>
                                   </p:stCondLst>
                                   <p:childTnLst>
                                     <p:set>
                                       <p:cBhvr>
-                                        <p:cTn id="23" dur="1"/>
+                                        <p:cTn id="29" dur="1" fill="hold">
+                                          <p:stCondLst>
+                                            <p:cond delay="0"/>
+                                          </p:stCondLst>
+                                        </p:cTn>
                                         <p:tgtEl>
                                           <p:spTgt spid="7"/>
                                         </p:tgtEl>
@@ -12580,7 +13863,7 @@
                                     </p:set>
                                     <p:anim calcmode="lin" valueType="num">
                                       <p:cBhvr additive="base">
-                                        <p:cTn id="24" dur="400"/>
+                                        <p:cTn id="30" dur="400"/>
                                         <p:tgtEl>
                                           <p:spTgt spid="7"/>
                                         </p:tgtEl>
@@ -12603,7 +13886,7 @@
                                     </p:anim>
                                     <p:anim calcmode="lin" valueType="num">
                                       <p:cBhvr additive="base">
-                                        <p:cTn id="25" dur="400"/>
+                                        <p:cTn id="31" dur="400"/>
                                         <p:tgtEl>
                                           <p:spTgt spid="7"/>
                                         </p:tgtEl>
@@ -12627,15 +13910,28 @@
                                   </p:childTnLst>
                                 </p:cTn>
                               </p:par>
+                            </p:childTnLst>
+                          </p:cTn>
+                        </p:par>
+                        <p:par>
+                          <p:cTn id="32" fill="hold">
+                            <p:stCondLst>
+                              <p:cond delay="7000"/>
+                            </p:stCondLst>
+                            <p:childTnLst>
                               <p:par>
                                 <p:cTn presetID="2" presetClass="entr" presetSubtype="4" fill="hold" grpId="0" nodeType="afterEffect">
                                   <p:stCondLst>
-                                    <p:cond delay="7000"/>
+                                    <p:cond delay="0"/>
                                   </p:stCondLst>
                                   <p:childTnLst>
                                     <p:set>
                                       <p:cBhvr>
-                                        <p:cTn id="26" dur="1"/>
+                                        <p:cTn id="33" dur="1" fill="hold">
+                                          <p:stCondLst>
+                                            <p:cond delay="0"/>
+                                          </p:stCondLst>
+                                        </p:cTn>
                                         <p:tgtEl>
                                           <p:spTgt spid="11"/>
                                         </p:tgtEl>
@@ -12649,7 +13945,7 @@
                                     </p:set>
                                     <p:anim calcmode="lin" valueType="num">
                                       <p:cBhvr additive="base">
-                                        <p:cTn id="27" dur="400"/>
+                                        <p:cTn id="34" dur="400"/>
                                         <p:tgtEl>
                                           <p:spTgt spid="11"/>
                                         </p:tgtEl>
@@ -12672,7 +13968,7 @@
                                     </p:anim>
                                     <p:anim calcmode="lin" valueType="num">
                                       <p:cBhvr additive="base">
-                                        <p:cTn id="28" dur="400"/>
+                                        <p:cTn id="35" dur="400"/>
                                         <p:tgtEl>
                                           <p:spTgt spid="11"/>
                                         </p:tgtEl>
@@ -12696,15 +13992,28 @@
                                   </p:childTnLst>
                                 </p:cTn>
                               </p:par>
+                            </p:childTnLst>
+                          </p:cTn>
+                        </p:par>
+                        <p:par>
+                          <p:cTn id="36" fill="hold">
+                            <p:stCondLst>
+                              <p:cond delay="8600"/>
+                            </p:stCondLst>
+                            <p:childTnLst>
                               <p:par>
                                 <p:cTn presetID="2" presetClass="entr" presetSubtype="4" fill="hold" grpId="0" nodeType="afterEffect">
                                   <p:stCondLst>
-                                    <p:cond delay="8600"/>
+                                    <p:cond delay="0"/>
                                   </p:stCondLst>
                                   <p:childTnLst>
                                     <p:set>
                                       <p:cBhvr>
-                                        <p:cTn id="29" dur="1"/>
+                                        <p:cTn id="37" dur="1" fill="hold">
+                                          <p:stCondLst>
+                                            <p:cond delay="0"/>
+                                          </p:stCondLst>
+                                        </p:cTn>
                                         <p:tgtEl>
                                           <p:spTgt spid="8"/>
                                         </p:tgtEl>
@@ -12718,7 +14027,7 @@
                                     </p:set>
                                     <p:anim calcmode="lin" valueType="num">
                                       <p:cBhvr additive="base">
-                                        <p:cTn id="30" dur="400"/>
+                                        <p:cTn id="38" dur="400"/>
                                         <p:tgtEl>
                                           <p:spTgt spid="8"/>
                                         </p:tgtEl>
@@ -12741,7 +14050,7 @@
                                     </p:anim>
                                     <p:anim calcmode="lin" valueType="num">
                                       <p:cBhvr additive="base">
-                                        <p:cTn id="31" dur="400"/>
+                                        <p:cTn id="39" dur="400"/>
                                         <p:tgtEl>
                                           <p:spTgt spid="8"/>
                                         </p:tgtEl>
@@ -12765,15 +14074,28 @@
                                   </p:childTnLst>
                                 </p:cTn>
                               </p:par>
+                            </p:childTnLst>
+                          </p:cTn>
+                        </p:par>
+                        <p:par>
+                          <p:cTn id="40" fill="hold">
+                            <p:stCondLst>
+                              <p:cond delay="10350"/>
+                            </p:stCondLst>
+                            <p:childTnLst>
                               <p:par>
                                 <p:cTn presetID="2" presetClass="entr" presetSubtype="4" fill="hold" grpId="0" nodeType="afterEffect">
                                   <p:stCondLst>
-                                    <p:cond delay="10350"/>
+                                    <p:cond delay="0"/>
                                   </p:stCondLst>
                                   <p:childTnLst>
                                     <p:set>
                                       <p:cBhvr>
-                                        <p:cTn id="32" dur="1"/>
+                                        <p:cTn id="41" dur="1" fill="hold">
+                                          <p:stCondLst>
+                                            <p:cond delay="0"/>
+                                          </p:stCondLst>
+                                        </p:cTn>
                                         <p:tgtEl>
                                           <p:spTgt spid="12"/>
                                         </p:tgtEl>
@@ -12787,7 +14109,7 @@
                                     </p:set>
                                     <p:anim calcmode="lin" valueType="num">
                                       <p:cBhvr additive="base">
-                                        <p:cTn id="33" dur="400"/>
+                                        <p:cTn id="42" dur="400"/>
                                         <p:tgtEl>
                                           <p:spTgt spid="12"/>
                                         </p:tgtEl>
@@ -12810,7 +14132,7 @@
                                     </p:anim>
                                     <p:anim calcmode="lin" valueType="num">
                                       <p:cBhvr additive="base">
-                                        <p:cTn id="34" dur="400"/>
+                                        <p:cTn id="43" dur="400"/>
                                         <p:tgtEl>
                                           <p:spTgt spid="12"/>
                                         </p:tgtEl>
@@ -12834,15 +14156,28 @@
                                   </p:childTnLst>
                                 </p:cTn>
                               </p:par>
+                            </p:childTnLst>
+                          </p:cTn>
+                        </p:par>
+                        <p:par>
+                          <p:cTn id="44" fill="hold">
+                            <p:stCondLst>
+                              <p:cond delay="12250"/>
+                            </p:stCondLst>
+                            <p:childTnLst>
                               <p:par>
                                 <p:cTn presetID="2" presetClass="entr" presetSubtype="4" fill="hold" grpId="0" nodeType="afterEffect">
                                   <p:stCondLst>
-                                    <p:cond delay="12250"/>
+                                    <p:cond delay="0"/>
                                   </p:stCondLst>
                                   <p:childTnLst>
                                     <p:set>
                                       <p:cBhvr>
-                                        <p:cTn id="35" dur="1"/>
+                                        <p:cTn id="45" dur="1" fill="hold">
+                                          <p:stCondLst>
+                                            <p:cond delay="0"/>
+                                          </p:stCondLst>
+                                        </p:cTn>
                                         <p:tgtEl>
                                           <p:spTgt spid="13"/>
                                         </p:tgtEl>
@@ -12856,7 +14191,7 @@
                                     </p:set>
                                     <p:anim calcmode="lin" valueType="num">
                                       <p:cBhvr additive="base">
-                                        <p:cTn id="36" dur="400"/>
+                                        <p:cTn id="46" dur="400"/>
                                         <p:tgtEl>
                                           <p:spTgt spid="13"/>
                                         </p:tgtEl>
@@ -12879,7 +14214,7 @@
                                     </p:anim>
                                     <p:anim calcmode="lin" valueType="num">
                                       <p:cBhvr additive="base">
-                                        <p:cTn id="37" dur="400"/>
+                                        <p:cTn id="47" dur="400"/>
                                         <p:tgtEl>
                                           <p:spTgt spid="13"/>
                                         </p:tgtEl>
@@ -12903,15 +14238,28 @@
                                   </p:childTnLst>
                                 </p:cTn>
                               </p:par>
+                            </p:childTnLst>
+                          </p:cTn>
+                        </p:par>
+                        <p:par>
+                          <p:cTn id="48" fill="hold">
+                            <p:stCondLst>
+                              <p:cond delay="14300"/>
+                            </p:stCondLst>
+                            <p:childTnLst>
                               <p:par>
                                 <p:cTn presetID="2" presetClass="entr" presetSubtype="4" fill="hold" grpId="0" nodeType="afterEffect">
                                   <p:stCondLst>
-                                    <p:cond delay="14300"/>
+                                    <p:cond delay="0"/>
                                   </p:stCondLst>
                                   <p:childTnLst>
                                     <p:set>
                                       <p:cBhvr>
-                                        <p:cTn id="38" dur="1"/>
+                                        <p:cTn id="49" dur="1" fill="hold">
+                                          <p:stCondLst>
+                                            <p:cond delay="0"/>
+                                          </p:stCondLst>
+                                        </p:cTn>
                                         <p:tgtEl>
                                           <p:spTgt spid="17"/>
                                         </p:tgtEl>
@@ -12925,7 +14273,7 @@
                                     </p:set>
                                     <p:anim calcmode="lin" valueType="num">
                                       <p:cBhvr additive="base">
-                                        <p:cTn id="39" dur="400"/>
+                                        <p:cTn id="50" dur="400"/>
                                         <p:tgtEl>
                                           <p:spTgt spid="17"/>
                                         </p:tgtEl>
@@ -12948,7 +14296,7 @@
                                     </p:anim>
                                     <p:anim calcmode="lin" valueType="num">
                                       <p:cBhvr additive="base">
-                                        <p:cTn id="40" dur="400"/>
+                                        <p:cTn id="51" dur="400"/>
                                         <p:tgtEl>
                                           <p:spTgt spid="17"/>
                                         </p:tgtEl>
@@ -12972,15 +14320,28 @@
                                   </p:childTnLst>
                                 </p:cTn>
                               </p:par>
+                            </p:childTnLst>
+                          </p:cTn>
+                        </p:par>
+                        <p:par>
+                          <p:cTn id="52" fill="hold">
+                            <p:stCondLst>
+                              <p:cond delay="16500"/>
+                            </p:stCondLst>
+                            <p:childTnLst>
                               <p:par>
                                 <p:cTn presetID="2" presetClass="entr" presetSubtype="4" fill="hold" grpId="0" nodeType="afterEffect">
                                   <p:stCondLst>
-                                    <p:cond delay="16500"/>
+                                    <p:cond delay="0"/>
                                   </p:stCondLst>
                                   <p:childTnLst>
                                     <p:set>
                                       <p:cBhvr>
-                                        <p:cTn id="41" dur="1"/>
+                                        <p:cTn id="53" dur="1" fill="hold">
+                                          <p:stCondLst>
+                                            <p:cond delay="0"/>
+                                          </p:stCondLst>
+                                        </p:cTn>
                                         <p:tgtEl>
                                           <p:spTgt spid="14"/>
                                         </p:tgtEl>
@@ -12994,7 +14355,7 @@
                                     </p:set>
                                     <p:anim calcmode="lin" valueType="num">
                                       <p:cBhvr additive="base">
-                                        <p:cTn id="42" dur="400"/>
+                                        <p:cTn id="54" dur="400"/>
                                         <p:tgtEl>
                                           <p:spTgt spid="14"/>
                                         </p:tgtEl>
@@ -13017,7 +14378,7 @@
                                     </p:anim>
                                     <p:anim calcmode="lin" valueType="num">
                                       <p:cBhvr additive="base">
-                                        <p:cTn id="43" dur="400"/>
+                                        <p:cTn id="55" dur="400"/>
                                         <p:tgtEl>
                                           <p:spTgt spid="14"/>
                                         </p:tgtEl>
@@ -13041,15 +14402,28 @@
                                   </p:childTnLst>
                                 </p:cTn>
                               </p:par>
+                            </p:childTnLst>
+                          </p:cTn>
+                        </p:par>
+                        <p:par>
+                          <p:cTn id="56" fill="hold">
+                            <p:stCondLst>
+                              <p:cond delay="18850"/>
+                            </p:stCondLst>
+                            <p:childTnLst>
                               <p:par>
                                 <p:cTn presetID="2" presetClass="entr" presetSubtype="4" fill="hold" grpId="0" nodeType="afterEffect">
                                   <p:stCondLst>
-                                    <p:cond delay="18850"/>
+                                    <p:cond delay="0"/>
                                   </p:stCondLst>
                                   <p:childTnLst>
                                     <p:set>
                                       <p:cBhvr>
-                                        <p:cTn id="44" dur="1"/>
+                                        <p:cTn id="57" dur="1" fill="hold">
+                                          <p:stCondLst>
+                                            <p:cond delay="0"/>
+                                          </p:stCondLst>
+                                        </p:cTn>
                                         <p:tgtEl>
                                           <p:spTgt spid="18"/>
                                         </p:tgtEl>
@@ -13063,7 +14437,7 @@
                                     </p:set>
                                     <p:anim calcmode="lin" valueType="num">
                                       <p:cBhvr additive="base">
-                                        <p:cTn id="45" dur="400"/>
+                                        <p:cTn id="58" dur="400"/>
                                         <p:tgtEl>
                                           <p:spTgt spid="18"/>
                                         </p:tgtEl>
@@ -13086,7 +14460,7 @@
                                     </p:anim>
                                     <p:anim calcmode="lin" valueType="num">
                                       <p:cBhvr additive="base">
-                                        <p:cTn id="46" dur="400"/>
+                                        <p:cTn id="59" dur="400"/>
                                         <p:tgtEl>
                                           <p:spTgt spid="18"/>
                                         </p:tgtEl>
@@ -13110,15 +14484,28 @@
                                   </p:childTnLst>
                                 </p:cTn>
                               </p:par>
+                            </p:childTnLst>
+                          </p:cTn>
+                        </p:par>
+                        <p:par>
+                          <p:cTn id="60" fill="hold">
+                            <p:stCondLst>
+                              <p:cond delay="21350"/>
+                            </p:stCondLst>
+                            <p:childTnLst>
                               <p:par>
                                 <p:cTn presetID="2" presetClass="entr" presetSubtype="4" fill="hold" grpId="0" nodeType="afterEffect">
                                   <p:stCondLst>
-                                    <p:cond delay="21350"/>
+                                    <p:cond delay="0"/>
                                   </p:stCondLst>
                                   <p:childTnLst>
                                     <p:set>
                                       <p:cBhvr>
-                                        <p:cTn id="47" dur="1"/>
+                                        <p:cTn id="61" dur="1" fill="hold">
+                                          <p:stCondLst>
+                                            <p:cond delay="0"/>
+                                          </p:stCondLst>
+                                        </p:cTn>
                                         <p:tgtEl>
                                           <p:spTgt spid="15"/>
                                         </p:tgtEl>
@@ -13132,7 +14519,7 @@
                                     </p:set>
                                     <p:anim calcmode="lin" valueType="num">
                                       <p:cBhvr additive="base">
-                                        <p:cTn id="48" dur="400"/>
+                                        <p:cTn id="62" dur="400"/>
                                         <p:tgtEl>
                                           <p:spTgt spid="15"/>
                                         </p:tgtEl>
@@ -13155,7 +14542,7 @@
                                     </p:anim>
                                     <p:anim calcmode="lin" valueType="num">
                                       <p:cBhvr additive="base">
-                                        <p:cTn id="49" dur="400"/>
+                                        <p:cTn id="63" dur="400"/>
                                         <p:tgtEl>
                                           <p:spTgt spid="15"/>
                                         </p:tgtEl>
@@ -13179,15 +14566,28 @@
                                   </p:childTnLst>
                                 </p:cTn>
                               </p:par>
+                            </p:childTnLst>
+                          </p:cTn>
+                        </p:par>
+                        <p:par>
+                          <p:cTn id="64" fill="hold">
+                            <p:stCondLst>
+                              <p:cond delay="24000"/>
+                            </p:stCondLst>
+                            <p:childTnLst>
                               <p:par>
                                 <p:cTn presetID="2" presetClass="entr" presetSubtype="4" fill="hold" grpId="0" nodeType="afterEffect">
                                   <p:stCondLst>
-                                    <p:cond delay="24000"/>
+                                    <p:cond delay="0"/>
                                   </p:stCondLst>
                                   <p:childTnLst>
                                     <p:set>
                                       <p:cBhvr>
-                                        <p:cTn id="50" dur="1"/>
+                                        <p:cTn id="65" dur="1" fill="hold">
+                                          <p:stCondLst>
+                                            <p:cond delay="0"/>
+                                          </p:stCondLst>
+                                        </p:cTn>
                                         <p:tgtEl>
                                           <p:spTgt spid="19"/>
                                         </p:tgtEl>
@@ -13201,7 +14601,7 @@
                                     </p:set>
                                     <p:anim calcmode="lin" valueType="num">
                                       <p:cBhvr additive="base">
-                                        <p:cTn id="51" dur="400"/>
+                                        <p:cTn id="66" dur="400"/>
                                         <p:tgtEl>
                                           <p:spTgt spid="19"/>
                                         </p:tgtEl>
@@ -13224,7 +14624,7 @@
                                     </p:anim>
                                     <p:anim calcmode="lin" valueType="num">
                                       <p:cBhvr additive="base">
-                                        <p:cTn id="52" dur="400"/>
+                                        <p:cTn id="67" dur="400"/>
                                         <p:tgtEl>
                                           <p:spTgt spid="19"/>
                                         </p:tgtEl>
@@ -13248,15 +14648,28 @@
                                   </p:childTnLst>
                                 </p:cTn>
                               </p:par>
+                            </p:childTnLst>
+                          </p:cTn>
+                        </p:par>
+                        <p:par>
+                          <p:cTn id="68" fill="hold">
+                            <p:stCondLst>
+                              <p:cond delay="26800"/>
+                            </p:stCondLst>
+                            <p:childTnLst>
                               <p:par>
                                 <p:cTn presetID="2" presetClass="entr" presetSubtype="4" fill="hold" grpId="0" nodeType="afterEffect">
                                   <p:stCondLst>
-                                    <p:cond delay="26800"/>
+                                    <p:cond delay="0"/>
                                   </p:stCondLst>
                                   <p:childTnLst>
                                     <p:set>
                                       <p:cBhvr>
-                                        <p:cTn id="53" dur="1"/>
+                                        <p:cTn id="69" dur="1" fill="hold">
+                                          <p:stCondLst>
+                                            <p:cond delay="0"/>
+                                          </p:stCondLst>
+                                        </p:cTn>
                                         <p:tgtEl>
                                           <p:spTgt spid="16"/>
                                         </p:tgtEl>
@@ -13270,7 +14683,7 @@
                                     </p:set>
                                     <p:anim calcmode="lin" valueType="num">
                                       <p:cBhvr additive="base">
-                                        <p:cTn id="54" dur="400"/>
+                                        <p:cTn id="70" dur="400"/>
                                         <p:tgtEl>
                                           <p:spTgt spid="16"/>
                                         </p:tgtEl>
@@ -13293,7 +14706,7 @@
                                     </p:anim>
                                     <p:anim calcmode="lin" valueType="num">
                                       <p:cBhvr additive="base">
-                                        <p:cTn id="55" dur="400"/>
+                                        <p:cTn id="71" dur="400"/>
                                         <p:tgtEl>
                                           <p:spTgt spid="16"/>
                                         </p:tgtEl>
@@ -13317,15 +14730,28 @@
                                   </p:childTnLst>
                                 </p:cTn>
                               </p:par>
+                            </p:childTnLst>
+                          </p:cTn>
+                        </p:par>
+                        <p:par>
+                          <p:cTn id="72" fill="hold">
+                            <p:stCondLst>
+                              <p:cond delay="29750"/>
+                            </p:stCondLst>
+                            <p:childTnLst>
                               <p:par>
                                 <p:cTn presetID="2" presetClass="entr" presetSubtype="4" fill="hold" grpId="0" nodeType="afterEffect">
                                   <p:stCondLst>
-                                    <p:cond delay="29750"/>
+                                    <p:cond delay="0"/>
                                   </p:stCondLst>
                                   <p:childTnLst>
                                     <p:set>
                                       <p:cBhvr>
-                                        <p:cTn id="56" dur="1"/>
+                                        <p:cTn id="73" dur="1" fill="hold">
+                                          <p:stCondLst>
+                                            <p:cond delay="0"/>
+                                          </p:stCondLst>
+                                        </p:cTn>
                                         <p:tgtEl>
                                           <p:spTgt spid="20"/>
                                         </p:tgtEl>
@@ -13339,7 +14765,7 @@
                                     </p:set>
                                     <p:anim calcmode="lin" valueType="num">
                                       <p:cBhvr additive="base">
-                                        <p:cTn id="57" dur="400"/>
+                                        <p:cTn id="74" dur="400"/>
                                         <p:tgtEl>
                                           <p:spTgt spid="20"/>
                                         </p:tgtEl>
@@ -13362,7 +14788,7 @@
                                     </p:anim>
                                     <p:anim calcmode="lin" valueType="num">
                                       <p:cBhvr additive="base">
-                                        <p:cTn id="58" dur="400"/>
+                                        <p:cTn id="75" dur="400"/>
                                         <p:tgtEl>
                                           <p:spTgt spid="20"/>
                                         </p:tgtEl>
@@ -13386,15 +14812,28 @@
                                   </p:childTnLst>
                                 </p:cTn>
                               </p:par>
+                            </p:childTnLst>
+                          </p:cTn>
+                        </p:par>
+                        <p:par>
+                          <p:cTn id="76" fill="hold">
+                            <p:stCondLst>
+                              <p:cond delay="32850"/>
+                            </p:stCondLst>
+                            <p:childTnLst>
                               <p:par>
                                 <p:cTn presetID="2" presetClass="entr" presetSubtype="4" fill="hold" grpId="0" nodeType="afterEffect">
                                   <p:stCondLst>
-                                    <p:cond delay="32850"/>
+                                    <p:cond delay="0"/>
                                   </p:stCondLst>
                                   <p:childTnLst>
                                     <p:set>
                                       <p:cBhvr>
-                                        <p:cTn id="59" dur="1"/>
+                                        <p:cTn id="77" dur="1" fill="hold">
+                                          <p:stCondLst>
+                                            <p:cond delay="0"/>
+                                          </p:stCondLst>
+                                        </p:cTn>
                                         <p:tgtEl>
                                           <p:spTgt spid="21"/>
                                         </p:tgtEl>
@@ -13408,7 +14847,7 @@
                                     </p:set>
                                     <p:anim calcmode="lin" valueType="num">
                                       <p:cBhvr additive="base">
-                                        <p:cTn id="60" dur="400"/>
+                                        <p:cTn id="78" dur="400"/>
                                         <p:tgtEl>
                                           <p:spTgt spid="21"/>
                                         </p:tgtEl>
@@ -13431,7 +14870,7 @@
                                     </p:anim>
                                     <p:anim calcmode="lin" valueType="num">
                                       <p:cBhvr additive="base">
-                                        <p:cTn id="61" dur="400"/>
+                                        <p:cTn id="79" dur="400"/>
                                         <p:tgtEl>
                                           <p:spTgt spid="21"/>
                                         </p:tgtEl>
@@ -13455,15 +14894,28 @@
                                   </p:childTnLst>
                                 </p:cTn>
                               </p:par>
+                            </p:childTnLst>
+                          </p:cTn>
+                        </p:par>
+                        <p:par>
+                          <p:cTn id="80" fill="hold">
+                            <p:stCondLst>
+                              <p:cond delay="36100"/>
+                            </p:stCondLst>
+                            <p:childTnLst>
                               <p:par>
                                 <p:cTn presetID="2" presetClass="entr" presetSubtype="4" fill="hold" grpId="0" nodeType="afterEffect">
                                   <p:stCondLst>
-                                    <p:cond delay="36100"/>
+                                    <p:cond delay="0"/>
                                   </p:stCondLst>
                                   <p:childTnLst>
                                     <p:set>
                                       <p:cBhvr>
-                                        <p:cTn id="62" dur="1"/>
+                                        <p:cTn id="81" dur="1" fill="hold">
+                                          <p:stCondLst>
+                                            <p:cond delay="0"/>
+                                          </p:stCondLst>
+                                        </p:cTn>
                                         <p:tgtEl>
                                           <p:spTgt spid="22"/>
                                         </p:tgtEl>
@@ -13477,7 +14929,7 @@
                                     </p:set>
                                     <p:anim calcmode="lin" valueType="num">
                                       <p:cBhvr additive="base">
-                                        <p:cTn id="63" dur="400"/>
+                                        <p:cTn id="82" dur="400"/>
                                         <p:tgtEl>
                                           <p:spTgt spid="22"/>
                                         </p:tgtEl>
@@ -13500,7 +14952,7 @@
                                     </p:anim>
                                     <p:anim calcmode="lin" valueType="num">
                                       <p:cBhvr additive="base">
-                                        <p:cTn id="64" dur="400"/>
+                                        <p:cTn id="83" dur="400"/>
                                         <p:tgtEl>
                                           <p:spTgt spid="22"/>
                                         </p:tgtEl>
@@ -14425,10 +15877,7 @@
                   <p:par>
                     <p:cTn id="3" fill="hold">
                       <p:stCondLst>
-                        <p:cond delay="indefinite"/>
-                        <p:cond evt="onBegin" delay="0">
-                          <p:tn val="2"/>
-                        </p:cond>
+                        <p:cond delay="0"/>
                       </p:stCondLst>
                       <p:childTnLst>
                         <p:par>
@@ -14445,7 +15894,11 @@
                                   <p:childTnLst>
                                     <p:set>
                                       <p:cBhvr>
-                                        <p:cTn id="5" dur="1"/>
+                                        <p:cTn id="5" dur="1" fill="hold">
+                                          <p:stCondLst>
+                                            <p:cond delay="0"/>
+                                          </p:stCondLst>
+                                        </p:cTn>
                                         <p:tgtEl>
                                           <p:spTgt spid="2"/>
                                         </p:tgtEl>
@@ -14468,15 +15921,28 @@
                                   </p:childTnLst>
                                 </p:cTn>
                               </p:par>
+                            </p:childTnLst>
+                          </p:cTn>
+                        </p:par>
+                        <p:par>
+                          <p:cTn id="7" fill="hold">
+                            <p:stCondLst>
+                              <p:cond delay="520"/>
+                            </p:stCondLst>
+                            <p:childTnLst>
                               <p:par>
                                 <p:cTn presetID="10" presetClass="entr" presetSubtype="0" fill="hold" grpId="0" nodeType="afterEffect">
                                   <p:stCondLst>
-                                    <p:cond delay="520"/>
+                                    <p:cond delay="0"/>
                                   </p:stCondLst>
                                   <p:childTnLst>
                                     <p:set>
                                       <p:cBhvr>
-                                        <p:cTn id="7" dur="1"/>
+                                        <p:cTn id="8" dur="1" fill="hold">
+                                          <p:stCondLst>
+                                            <p:cond delay="0"/>
+                                          </p:stCondLst>
+                                        </p:cTn>
                                         <p:tgtEl>
                                           <p:spTgt spid="3"/>
                                         </p:tgtEl>
@@ -14490,7 +15956,7 @@
                                     </p:set>
                                     <p:animEffect transition="in" filter="fade">
                                       <p:cBhvr>
-                                        <p:cTn id="8" dur="400"/>
+                                        <p:cTn id="9" dur="400"/>
                                         <p:tgtEl>
                                           <p:spTgt spid="3"/>
                                         </p:tgtEl>
@@ -14499,15 +15965,28 @@
                                   </p:childTnLst>
                                 </p:cTn>
                               </p:par>
+                            </p:childTnLst>
+                          </p:cTn>
+                        </p:par>
+                        <p:par>
+                          <p:cTn id="10" fill="hold">
+                            <p:stCondLst>
+                              <p:cond delay="1160"/>
+                            </p:stCondLst>
+                            <p:childTnLst>
                               <p:par>
                                 <p:cTn presetID="10" presetClass="entr" presetSubtype="0" fill="hold" grpId="0" nodeType="afterEffect">
                                   <p:stCondLst>
-                                    <p:cond delay="1160"/>
+                                    <p:cond delay="0"/>
                                   </p:stCondLst>
                                   <p:childTnLst>
                                     <p:set>
                                       <p:cBhvr>
-                                        <p:cTn id="9" dur="1"/>
+                                        <p:cTn id="11" dur="1" fill="hold">
+                                          <p:stCondLst>
+                                            <p:cond delay="0"/>
+                                          </p:stCondLst>
+                                        </p:cTn>
                                         <p:tgtEl>
                                           <p:spTgt spid="5"/>
                                         </p:tgtEl>
@@ -14521,7 +16000,7 @@
                                     </p:set>
                                     <p:animEffect transition="in" filter="fade">
                                       <p:cBhvr>
-                                        <p:cTn id="10" dur="400"/>
+                                        <p:cTn id="12" dur="400"/>
                                         <p:tgtEl>
                                           <p:spTgt spid="5"/>
                                         </p:tgtEl>
@@ -14530,15 +16009,28 @@
                                   </p:childTnLst>
                                 </p:cTn>
                               </p:par>
+                            </p:childTnLst>
+                          </p:cTn>
+                        </p:par>
+                        <p:par>
+                          <p:cTn id="13" fill="hold">
+                            <p:stCondLst>
+                              <p:cond delay="1920"/>
+                            </p:stCondLst>
+                            <p:childTnLst>
                               <p:par>
                                 <p:cTn presetID="10" presetClass="entr" presetSubtype="0" fill="hold" grpId="0" nodeType="afterEffect">
                                   <p:stCondLst>
-                                    <p:cond delay="1920"/>
+                                    <p:cond delay="0"/>
                                   </p:stCondLst>
                                   <p:childTnLst>
                                     <p:set>
                                       <p:cBhvr>
-                                        <p:cTn id="11" dur="1"/>
+                                        <p:cTn id="14" dur="1" fill="hold">
+                                          <p:stCondLst>
+                                            <p:cond delay="0"/>
+                                          </p:stCondLst>
+                                        </p:cTn>
                                         <p:tgtEl>
                                           <p:spTgt spid="7"/>
                                         </p:tgtEl>
@@ -14552,7 +16044,7 @@
                                     </p:set>
                                     <p:animEffect transition="in" filter="fade">
                                       <p:cBhvr>
-                                        <p:cTn id="12" dur="400"/>
+                                        <p:cTn id="15" dur="400"/>
                                         <p:tgtEl>
                                           <p:spTgt spid="7"/>
                                         </p:tgtEl>
@@ -14561,15 +16053,28 @@
                                   </p:childTnLst>
                                 </p:cTn>
                               </p:par>
+                            </p:childTnLst>
+                          </p:cTn>
+                        </p:par>
+                        <p:par>
+                          <p:cTn id="16" fill="hold">
+                            <p:stCondLst>
+                              <p:cond delay="2800"/>
+                            </p:stCondLst>
+                            <p:childTnLst>
                               <p:par>
                                 <p:cTn presetID="10" presetClass="entr" presetSubtype="0" fill="hold" grpId="0" nodeType="afterEffect">
                                   <p:stCondLst>
-                                    <p:cond delay="2800"/>
+                                    <p:cond delay="0"/>
                                   </p:stCondLst>
                                   <p:childTnLst>
                                     <p:set>
                                       <p:cBhvr>
-                                        <p:cTn id="13" dur="1"/>
+                                        <p:cTn id="17" dur="1" fill="hold">
+                                          <p:stCondLst>
+                                            <p:cond delay="0"/>
+                                          </p:stCondLst>
+                                        </p:cTn>
                                         <p:tgtEl>
                                           <p:spTgt spid="9"/>
                                         </p:tgtEl>
@@ -14583,7 +16088,7 @@
                                     </p:set>
                                     <p:animEffect transition="in" filter="fade">
                                       <p:cBhvr>
-                                        <p:cTn id="14" dur="400"/>
+                                        <p:cTn id="18" dur="400"/>
                                         <p:tgtEl>
                                           <p:spTgt spid="9"/>
                                         </p:tgtEl>
@@ -14592,15 +16097,28 @@
                                   </p:childTnLst>
                                 </p:cTn>
                               </p:par>
+                            </p:childTnLst>
+                          </p:cTn>
+                        </p:par>
+                        <p:par>
+                          <p:cTn id="19" fill="hold">
+                            <p:stCondLst>
+                              <p:cond delay="3800"/>
+                            </p:stCondLst>
+                            <p:childTnLst>
                               <p:par>
                                 <p:cTn presetID="10" presetClass="entr" presetSubtype="0" fill="hold" grpId="0" nodeType="afterEffect">
                                   <p:stCondLst>
-                                    <p:cond delay="3800"/>
+                                    <p:cond delay="0"/>
                                   </p:stCondLst>
                                   <p:childTnLst>
                                     <p:set>
                                       <p:cBhvr>
-                                        <p:cTn id="15" dur="1"/>
+                                        <p:cTn id="20" dur="1" fill="hold">
+                                          <p:stCondLst>
+                                            <p:cond delay="0"/>
+                                          </p:stCondLst>
+                                        </p:cTn>
                                         <p:tgtEl>
                                           <p:spTgt spid="6"/>
                                         </p:tgtEl>
@@ -14614,7 +16132,7 @@
                                     </p:set>
                                     <p:animEffect transition="in" filter="fade">
                                       <p:cBhvr>
-                                        <p:cTn id="16" dur="400"/>
+                                        <p:cTn id="21" dur="400"/>
                                         <p:tgtEl>
                                           <p:spTgt spid="6"/>
                                         </p:tgtEl>
@@ -14623,15 +16141,28 @@
                                   </p:childTnLst>
                                 </p:cTn>
                               </p:par>
+                            </p:childTnLst>
+                          </p:cTn>
+                        </p:par>
+                        <p:par>
+                          <p:cTn id="22" fill="hold">
+                            <p:stCondLst>
+                              <p:cond delay="4920"/>
+                            </p:stCondLst>
+                            <p:childTnLst>
                               <p:par>
                                 <p:cTn presetID="10" presetClass="entr" presetSubtype="0" fill="hold" grpId="0" nodeType="afterEffect">
                                   <p:stCondLst>
-                                    <p:cond delay="4920"/>
+                                    <p:cond delay="0"/>
                                   </p:stCondLst>
                                   <p:childTnLst>
                                     <p:set>
                                       <p:cBhvr>
-                                        <p:cTn id="17" dur="1"/>
+                                        <p:cTn id="23" dur="1" fill="hold">
+                                          <p:stCondLst>
+                                            <p:cond delay="0"/>
+                                          </p:stCondLst>
+                                        </p:cTn>
                                         <p:tgtEl>
                                           <p:spTgt spid="8"/>
                                         </p:tgtEl>
@@ -14645,7 +16176,7 @@
                                     </p:set>
                                     <p:animEffect transition="in" filter="fade">
                                       <p:cBhvr>
-                                        <p:cTn id="18" dur="400"/>
+                                        <p:cTn id="24" dur="400"/>
                                         <p:tgtEl>
                                           <p:spTgt spid="8"/>
                                         </p:tgtEl>
@@ -14654,15 +16185,28 @@
                                   </p:childTnLst>
                                 </p:cTn>
                               </p:par>
+                            </p:childTnLst>
+                          </p:cTn>
+                        </p:par>
+                        <p:par>
+                          <p:cTn id="25" fill="hold">
+                            <p:stCondLst>
+                              <p:cond delay="6160"/>
+                            </p:stCondLst>
+                            <p:childTnLst>
                               <p:par>
                                 <p:cTn presetID="10" presetClass="entr" presetSubtype="0" fill="hold" grpId="0" nodeType="afterEffect">
                                   <p:stCondLst>
-                                    <p:cond delay="6160"/>
+                                    <p:cond delay="0"/>
                                   </p:stCondLst>
                                   <p:childTnLst>
                                     <p:set>
                                       <p:cBhvr>
-                                        <p:cTn id="19" dur="1"/>
+                                        <p:cTn id="26" dur="1" fill="hold">
+                                          <p:stCondLst>
+                                            <p:cond delay="0"/>
+                                          </p:stCondLst>
+                                        </p:cTn>
                                         <p:tgtEl>
                                           <p:spTgt spid="10"/>
                                         </p:tgtEl>
@@ -14676,7 +16220,7 @@
                                     </p:set>
                                     <p:animEffect transition="in" filter="fade">
                                       <p:cBhvr>
-                                        <p:cTn id="20" dur="400"/>
+                                        <p:cTn id="27" dur="400"/>
                                         <p:tgtEl>
                                           <p:spTgt spid="10"/>
                                         </p:tgtEl>
@@ -14685,15 +16229,28 @@
                                   </p:childTnLst>
                                 </p:cTn>
                               </p:par>
+                            </p:childTnLst>
+                          </p:cTn>
+                        </p:par>
+                        <p:par>
+                          <p:cTn id="28" fill="hold">
+                            <p:stCondLst>
+                              <p:cond delay="7520"/>
+                            </p:stCondLst>
+                            <p:childTnLst>
                               <p:par>
                                 <p:cTn presetID="10" presetClass="entr" presetSubtype="0" fill="hold" grpId="0" nodeType="afterEffect">
                                   <p:stCondLst>
-                                    <p:cond delay="7520"/>
+                                    <p:cond delay="0"/>
                                   </p:stCondLst>
                                   <p:childTnLst>
                                     <p:set>
                                       <p:cBhvr>
-                                        <p:cTn id="21" dur="1"/>
+                                        <p:cTn id="29" dur="1" fill="hold">
+                                          <p:stCondLst>
+                                            <p:cond delay="0"/>
+                                          </p:stCondLst>
+                                        </p:cTn>
                                         <p:tgtEl>
                                           <p:spTgt spid="12"/>
                                         </p:tgtEl>
@@ -14707,7 +16264,7 @@
                                     </p:set>
                                     <p:animEffect transition="in" filter="fade">
                                       <p:cBhvr>
-                                        <p:cTn id="22" dur="400"/>
+                                        <p:cTn id="30" dur="400"/>
                                         <p:tgtEl>
                                           <p:spTgt spid="12"/>
                                         </p:tgtEl>
@@ -14716,15 +16273,28 @@
                                   </p:childTnLst>
                                 </p:cTn>
                               </p:par>
+                            </p:childTnLst>
+                          </p:cTn>
+                        </p:par>
+                        <p:par>
+                          <p:cTn id="31" fill="hold">
+                            <p:stCondLst>
+                              <p:cond delay="9000"/>
+                            </p:stCondLst>
+                            <p:childTnLst>
                               <p:par>
                                 <p:cTn presetID="10" presetClass="entr" presetSubtype="0" fill="hold" grpId="0" nodeType="afterEffect">
                                   <p:stCondLst>
-                                    <p:cond delay="9000"/>
+                                    <p:cond delay="0"/>
                                   </p:stCondLst>
                                   <p:childTnLst>
                                     <p:set>
                                       <p:cBhvr>
-                                        <p:cTn id="23" dur="1"/>
+                                        <p:cTn id="32" dur="1" fill="hold">
+                                          <p:stCondLst>
+                                            <p:cond delay="0"/>
+                                          </p:stCondLst>
+                                        </p:cTn>
                                         <p:tgtEl>
                                           <p:spTgt spid="15"/>
                                         </p:tgtEl>
@@ -14738,7 +16308,7 @@
                                     </p:set>
                                     <p:animEffect transition="in" filter="fade">
                                       <p:cBhvr>
-                                        <p:cTn id="24" dur="400"/>
+                                        <p:cTn id="33" dur="400"/>
                                         <p:tgtEl>
                                           <p:spTgt spid="15"/>
                                         </p:tgtEl>
@@ -14747,15 +16317,28 @@
                                   </p:childTnLst>
                                 </p:cTn>
                               </p:par>
+                            </p:childTnLst>
+                          </p:cTn>
+                        </p:par>
+                        <p:par>
+                          <p:cTn id="34" fill="hold">
+                            <p:stCondLst>
+                              <p:cond delay="10600"/>
+                            </p:stCondLst>
+                            <p:childTnLst>
                               <p:par>
                                 <p:cTn presetID="10" presetClass="entr" presetSubtype="0" fill="hold" grpId="0" nodeType="afterEffect">
                                   <p:stCondLst>
-                                    <p:cond delay="10600"/>
+                                    <p:cond delay="0"/>
                                   </p:stCondLst>
                                   <p:childTnLst>
                                     <p:set>
                                       <p:cBhvr>
-                                        <p:cTn id="25" dur="1"/>
+                                        <p:cTn id="35" dur="1" fill="hold">
+                                          <p:stCondLst>
+                                            <p:cond delay="0"/>
+                                          </p:stCondLst>
+                                        </p:cTn>
                                         <p:tgtEl>
                                           <p:spTgt spid="18"/>
                                         </p:tgtEl>
@@ -14769,7 +16352,7 @@
                                     </p:set>
                                     <p:animEffect transition="in" filter="fade">
                                       <p:cBhvr>
-                                        <p:cTn id="26" dur="400"/>
+                                        <p:cTn id="36" dur="400"/>
                                         <p:tgtEl>
                                           <p:spTgt spid="18"/>
                                         </p:tgtEl>
@@ -14778,15 +16361,28 @@
                                   </p:childTnLst>
                                 </p:cTn>
                               </p:par>
+                            </p:childTnLst>
+                          </p:cTn>
+                        </p:par>
+                        <p:par>
+                          <p:cTn id="37" fill="hold">
+                            <p:stCondLst>
+                              <p:cond delay="12320"/>
+                            </p:stCondLst>
+                            <p:childTnLst>
                               <p:par>
                                 <p:cTn presetID="10" presetClass="entr" presetSubtype="0" fill="hold" grpId="0" nodeType="afterEffect">
                                   <p:stCondLst>
-                                    <p:cond delay="12320"/>
+                                    <p:cond delay="0"/>
                                   </p:stCondLst>
                                   <p:childTnLst>
                                     <p:set>
                                       <p:cBhvr>
-                                        <p:cTn id="27" dur="1"/>
+                                        <p:cTn id="38" dur="1" fill="hold">
+                                          <p:stCondLst>
+                                            <p:cond delay="0"/>
+                                          </p:stCondLst>
+                                        </p:cTn>
                                         <p:tgtEl>
                                           <p:spTgt spid="21"/>
                                         </p:tgtEl>
@@ -14800,7 +16396,7 @@
                                     </p:set>
                                     <p:animEffect transition="in" filter="fade">
                                       <p:cBhvr>
-                                        <p:cTn id="28" dur="400"/>
+                                        <p:cTn id="39" dur="400"/>
                                         <p:tgtEl>
                                           <p:spTgt spid="21"/>
                                         </p:tgtEl>
@@ -14809,15 +16405,28 @@
                                   </p:childTnLst>
                                 </p:cTn>
                               </p:par>
+                            </p:childTnLst>
+                          </p:cTn>
+                        </p:par>
+                        <p:par>
+                          <p:cTn id="40" fill="hold">
+                            <p:stCondLst>
+                              <p:cond delay="14160"/>
+                            </p:stCondLst>
+                            <p:childTnLst>
                               <p:par>
                                 <p:cTn presetID="10" presetClass="entr" presetSubtype="0" fill="hold" grpId="0" nodeType="afterEffect">
                                   <p:stCondLst>
-                                    <p:cond delay="14160"/>
+                                    <p:cond delay="0"/>
                                   </p:stCondLst>
                                   <p:childTnLst>
                                     <p:set>
                                       <p:cBhvr>
-                                        <p:cTn id="29" dur="1"/>
+                                        <p:cTn id="41" dur="1" fill="hold">
+                                          <p:stCondLst>
+                                            <p:cond delay="0"/>
+                                          </p:stCondLst>
+                                        </p:cTn>
                                         <p:tgtEl>
                                           <p:spTgt spid="11"/>
                                         </p:tgtEl>
@@ -14831,7 +16440,7 @@
                                     </p:set>
                                     <p:animEffect transition="in" filter="fade">
                                       <p:cBhvr>
-                                        <p:cTn id="30" dur="400"/>
+                                        <p:cTn id="42" dur="400"/>
                                         <p:tgtEl>
                                           <p:spTgt spid="11"/>
                                         </p:tgtEl>
@@ -14840,15 +16449,28 @@
                                   </p:childTnLst>
                                 </p:cTn>
                               </p:par>
+                            </p:childTnLst>
+                          </p:cTn>
+                        </p:par>
+                        <p:par>
+                          <p:cTn id="43" fill="hold">
+                            <p:stCondLst>
+                              <p:cond delay="16120"/>
+                            </p:stCondLst>
+                            <p:childTnLst>
                               <p:par>
                                 <p:cTn presetID="10" presetClass="entr" presetSubtype="0" fill="hold" grpId="0" nodeType="afterEffect">
                                   <p:stCondLst>
-                                    <p:cond delay="16120"/>
+                                    <p:cond delay="0"/>
                                   </p:stCondLst>
                                   <p:childTnLst>
                                     <p:set>
                                       <p:cBhvr>
-                                        <p:cTn id="31" dur="1"/>
+                                        <p:cTn id="44" dur="1" fill="hold">
+                                          <p:stCondLst>
+                                            <p:cond delay="0"/>
+                                          </p:stCondLst>
+                                        </p:cTn>
                                         <p:tgtEl>
                                           <p:spTgt spid="13"/>
                                         </p:tgtEl>
@@ -14862,7 +16484,7 @@
                                     </p:set>
                                     <p:animEffect transition="in" filter="fade">
                                       <p:cBhvr>
-                                        <p:cTn id="32" dur="400"/>
+                                        <p:cTn id="45" dur="400"/>
                                         <p:tgtEl>
                                           <p:spTgt spid="13"/>
                                         </p:tgtEl>
@@ -14871,15 +16493,28 @@
                                   </p:childTnLst>
                                 </p:cTn>
                               </p:par>
+                            </p:childTnLst>
+                          </p:cTn>
+                        </p:par>
+                        <p:par>
+                          <p:cTn id="46" fill="hold">
+                            <p:stCondLst>
+                              <p:cond delay="18200"/>
+                            </p:stCondLst>
+                            <p:childTnLst>
                               <p:par>
                                 <p:cTn presetID="10" presetClass="entr" presetSubtype="0" fill="hold" grpId="0" nodeType="afterEffect">
                                   <p:stCondLst>
-                                    <p:cond delay="18200"/>
+                                    <p:cond delay="0"/>
                                   </p:stCondLst>
                                   <p:childTnLst>
                                     <p:set>
                                       <p:cBhvr>
-                                        <p:cTn id="33" dur="1"/>
+                                        <p:cTn id="47" dur="1" fill="hold">
+                                          <p:stCondLst>
+                                            <p:cond delay="0"/>
+                                          </p:stCondLst>
+                                        </p:cTn>
                                         <p:tgtEl>
                                           <p:spTgt spid="16"/>
                                         </p:tgtEl>
@@ -14893,7 +16528,7 @@
                                     </p:set>
                                     <p:animEffect transition="in" filter="fade">
                                       <p:cBhvr>
-                                        <p:cTn id="34" dur="400"/>
+                                        <p:cTn id="48" dur="400"/>
                                         <p:tgtEl>
                                           <p:spTgt spid="16"/>
                                         </p:tgtEl>
@@ -14902,15 +16537,28 @@
                                   </p:childTnLst>
                                 </p:cTn>
                               </p:par>
+                            </p:childTnLst>
+                          </p:cTn>
+                        </p:par>
+                        <p:par>
+                          <p:cTn id="49" fill="hold">
+                            <p:stCondLst>
+                              <p:cond delay="20400"/>
+                            </p:stCondLst>
+                            <p:childTnLst>
                               <p:par>
                                 <p:cTn presetID="10" presetClass="entr" presetSubtype="0" fill="hold" grpId="0" nodeType="afterEffect">
                                   <p:stCondLst>
-                                    <p:cond delay="20400"/>
+                                    <p:cond delay="0"/>
                                   </p:stCondLst>
                                   <p:childTnLst>
                                     <p:set>
                                       <p:cBhvr>
-                                        <p:cTn id="35" dur="1"/>
+                                        <p:cTn id="50" dur="1" fill="hold">
+                                          <p:stCondLst>
+                                            <p:cond delay="0"/>
+                                          </p:stCondLst>
+                                        </p:cTn>
                                         <p:tgtEl>
                                           <p:spTgt spid="19"/>
                                         </p:tgtEl>
@@ -14924,7 +16572,7 @@
                                     </p:set>
                                     <p:animEffect transition="in" filter="fade">
                                       <p:cBhvr>
-                                        <p:cTn id="36" dur="400"/>
+                                        <p:cTn id="51" dur="400"/>
                                         <p:tgtEl>
                                           <p:spTgt spid="19"/>
                                         </p:tgtEl>
@@ -14933,15 +16581,28 @@
                                   </p:childTnLst>
                                 </p:cTn>
                               </p:par>
+                            </p:childTnLst>
+                          </p:cTn>
+                        </p:par>
+                        <p:par>
+                          <p:cTn id="52" fill="hold">
+                            <p:stCondLst>
+                              <p:cond delay="22720"/>
+                            </p:stCondLst>
+                            <p:childTnLst>
                               <p:par>
                                 <p:cTn presetID="10" presetClass="entr" presetSubtype="0" fill="hold" grpId="0" nodeType="afterEffect">
                                   <p:stCondLst>
-                                    <p:cond delay="22720"/>
+                                    <p:cond delay="0"/>
                                   </p:stCondLst>
                                   <p:childTnLst>
                                     <p:set>
                                       <p:cBhvr>
-                                        <p:cTn id="37" dur="1"/>
+                                        <p:cTn id="53" dur="1" fill="hold">
+                                          <p:stCondLst>
+                                            <p:cond delay="0"/>
+                                          </p:stCondLst>
+                                        </p:cTn>
                                         <p:tgtEl>
                                           <p:spTgt spid="22"/>
                                         </p:tgtEl>
@@ -14955,7 +16616,7 @@
                                     </p:set>
                                     <p:animEffect transition="in" filter="fade">
                                       <p:cBhvr>
-                                        <p:cTn id="38" dur="400"/>
+                                        <p:cTn id="54" dur="400"/>
                                         <p:tgtEl>
                                           <p:spTgt spid="22"/>
                                         </p:tgtEl>
@@ -14964,15 +16625,28 @@
                                   </p:childTnLst>
                                 </p:cTn>
                               </p:par>
+                            </p:childTnLst>
+                          </p:cTn>
+                        </p:par>
+                        <p:par>
+                          <p:cTn id="55" fill="hold">
+                            <p:stCondLst>
+                              <p:cond delay="25160"/>
+                            </p:stCondLst>
+                            <p:childTnLst>
                               <p:par>
                                 <p:cTn presetID="10" presetClass="entr" presetSubtype="0" fill="hold" grpId="0" nodeType="afterEffect">
                                   <p:stCondLst>
-                                    <p:cond delay="25160"/>
+                                    <p:cond delay="0"/>
                                   </p:stCondLst>
                                   <p:childTnLst>
                                     <p:set>
                                       <p:cBhvr>
-                                        <p:cTn id="39" dur="1"/>
+                                        <p:cTn id="56" dur="1" fill="hold">
+                                          <p:stCondLst>
+                                            <p:cond delay="0"/>
+                                          </p:stCondLst>
+                                        </p:cTn>
                                         <p:tgtEl>
                                           <p:spTgt spid="14"/>
                                         </p:tgtEl>
@@ -14986,7 +16660,7 @@
                                     </p:set>
                                     <p:animEffect transition="in" filter="fade">
                                       <p:cBhvr>
-                                        <p:cTn id="40" dur="400"/>
+                                        <p:cTn id="57" dur="400"/>
                                         <p:tgtEl>
                                           <p:spTgt spid="14"/>
                                         </p:tgtEl>
@@ -14995,15 +16669,28 @@
                                   </p:childTnLst>
                                 </p:cTn>
                               </p:par>
+                            </p:childTnLst>
+                          </p:cTn>
+                        </p:par>
+                        <p:par>
+                          <p:cTn id="58" fill="hold">
+                            <p:stCondLst>
+                              <p:cond delay="27720"/>
+                            </p:stCondLst>
+                            <p:childTnLst>
                               <p:par>
                                 <p:cTn presetID="10" presetClass="entr" presetSubtype="0" fill="hold" grpId="0" nodeType="afterEffect">
                                   <p:stCondLst>
-                                    <p:cond delay="27720"/>
+                                    <p:cond delay="0"/>
                                   </p:stCondLst>
                                   <p:childTnLst>
                                     <p:set>
                                       <p:cBhvr>
-                                        <p:cTn id="41" dur="1"/>
+                                        <p:cTn id="59" dur="1" fill="hold">
+                                          <p:stCondLst>
+                                            <p:cond delay="0"/>
+                                          </p:stCondLst>
+                                        </p:cTn>
                                         <p:tgtEl>
                                           <p:spTgt spid="17"/>
                                         </p:tgtEl>
@@ -15017,7 +16704,7 @@
                                     </p:set>
                                     <p:animEffect transition="in" filter="fade">
                                       <p:cBhvr>
-                                        <p:cTn id="42" dur="400"/>
+                                        <p:cTn id="60" dur="400"/>
                                         <p:tgtEl>
                                           <p:spTgt spid="17"/>
                                         </p:tgtEl>
@@ -15026,15 +16713,28 @@
                                   </p:childTnLst>
                                 </p:cTn>
                               </p:par>
+                            </p:childTnLst>
+                          </p:cTn>
+                        </p:par>
+                        <p:par>
+                          <p:cTn id="61" fill="hold">
+                            <p:stCondLst>
+                              <p:cond delay="30400"/>
+                            </p:stCondLst>
+                            <p:childTnLst>
                               <p:par>
                                 <p:cTn presetID="10" presetClass="entr" presetSubtype="0" fill="hold" grpId="0" nodeType="afterEffect">
                                   <p:stCondLst>
-                                    <p:cond delay="30400"/>
+                                    <p:cond delay="0"/>
                                   </p:stCondLst>
                                   <p:childTnLst>
                                     <p:set>
                                       <p:cBhvr>
-                                        <p:cTn id="43" dur="1"/>
+                                        <p:cTn id="62" dur="1" fill="hold">
+                                          <p:stCondLst>
+                                            <p:cond delay="0"/>
+                                          </p:stCondLst>
+                                        </p:cTn>
                                         <p:tgtEl>
                                           <p:spTgt spid="20"/>
                                         </p:tgtEl>
@@ -15048,7 +16748,7 @@
                                     </p:set>
                                     <p:animEffect transition="in" filter="fade">
                                       <p:cBhvr>
-                                        <p:cTn id="44" dur="400"/>
+                                        <p:cTn id="63" dur="400"/>
                                         <p:tgtEl>
                                           <p:spTgt spid="20"/>
                                         </p:tgtEl>
@@ -15057,15 +16757,28 @@
                                   </p:childTnLst>
                                 </p:cTn>
                               </p:par>
+                            </p:childTnLst>
+                          </p:cTn>
+                        </p:par>
+                        <p:par>
+                          <p:cTn id="64" fill="hold">
+                            <p:stCondLst>
+                              <p:cond delay="33200"/>
+                            </p:stCondLst>
+                            <p:childTnLst>
                               <p:par>
                                 <p:cTn presetID="10" presetClass="entr" presetSubtype="0" fill="hold" grpId="0" nodeType="afterEffect">
                                   <p:stCondLst>
-                                    <p:cond delay="33200"/>
+                                    <p:cond delay="0"/>
                                   </p:stCondLst>
                                   <p:childTnLst>
                                     <p:set>
                                       <p:cBhvr>
-                                        <p:cTn id="45" dur="1"/>
+                                        <p:cTn id="65" dur="1" fill="hold">
+                                          <p:stCondLst>
+                                            <p:cond delay="0"/>
+                                          </p:stCondLst>
+                                        </p:cTn>
                                         <p:tgtEl>
                                           <p:spTgt spid="23"/>
                                         </p:tgtEl>
@@ -15079,7 +16792,7 @@
                                     </p:set>
                                     <p:animEffect transition="in" filter="fade">
                                       <p:cBhvr>
-                                        <p:cTn id="46" dur="400"/>
+                                        <p:cTn id="66" dur="400"/>
                                         <p:tgtEl>
                                           <p:spTgt spid="23"/>
                                         </p:tgtEl>
@@ -15088,15 +16801,28 @@
                                   </p:childTnLst>
                                 </p:cTn>
                               </p:par>
+                            </p:childTnLst>
+                          </p:cTn>
+                        </p:par>
+                        <p:par>
+                          <p:cTn id="67" fill="hold">
+                            <p:stCondLst>
+                              <p:cond delay="36120"/>
+                            </p:stCondLst>
+                            <p:childTnLst>
                               <p:par>
                                 <p:cTn presetID="10" presetClass="entr" presetSubtype="0" fill="hold" grpId="0" nodeType="afterEffect">
                                   <p:stCondLst>
-                                    <p:cond delay="36120"/>
+                                    <p:cond delay="0"/>
                                   </p:stCondLst>
                                   <p:childTnLst>
                                     <p:set>
                                       <p:cBhvr>
-                                        <p:cTn id="47" dur="1"/>
+                                        <p:cTn id="68" dur="1" fill="hold">
+                                          <p:stCondLst>
+                                            <p:cond delay="0"/>
+                                          </p:stCondLst>
+                                        </p:cTn>
                                         <p:tgtEl>
                                           <p:spTgt spid="24"/>
                                         </p:tgtEl>
@@ -15110,7 +16836,7 @@
                                     </p:set>
                                     <p:animEffect transition="in" filter="fade">
                                       <p:cBhvr>
-                                        <p:cTn id="48" dur="400"/>
+                                        <p:cTn id="69" dur="400"/>
                                         <p:tgtEl>
                                           <p:spTgt spid="24"/>
                                         </p:tgtEl>
@@ -15119,15 +16845,28 @@
                                   </p:childTnLst>
                                 </p:cTn>
                               </p:par>
+                            </p:childTnLst>
+                          </p:cTn>
+                        </p:par>
+                        <p:par>
+                          <p:cTn id="70" fill="hold">
+                            <p:stCondLst>
+                              <p:cond delay="39160"/>
+                            </p:stCondLst>
+                            <p:childTnLst>
                               <p:par>
                                 <p:cTn presetID="10" presetClass="entr" presetSubtype="0" fill="hold" grpId="0" nodeType="afterEffect">
                                   <p:stCondLst>
-                                    <p:cond delay="39160"/>
+                                    <p:cond delay="0"/>
                                   </p:stCondLst>
                                   <p:childTnLst>
                                     <p:set>
                                       <p:cBhvr>
-                                        <p:cTn id="49" dur="1"/>
+                                        <p:cTn id="71" dur="1" fill="hold">
+                                          <p:stCondLst>
+                                            <p:cond delay="0"/>
+                                          </p:stCondLst>
+                                        </p:cTn>
                                         <p:tgtEl>
                                           <p:spTgt spid="25"/>
                                         </p:tgtEl>
@@ -15141,7 +16880,7 @@
                                     </p:set>
                                     <p:animEffect transition="in" filter="fade">
                                       <p:cBhvr>
-                                        <p:cTn id="50" dur="400"/>
+                                        <p:cTn id="72" dur="400"/>
                                         <p:tgtEl>
                                           <p:spTgt spid="25"/>
                                         </p:tgtEl>

--- a/examples/quarterly-report/Q3经营汇报-智能喂食器业务.pptx
+++ b/examples/quarterly-report/Q3经营汇报-智能喂食器业务.pptx
@@ -2628,9 +2628,16 @@
   <p:cSld name="Slide 1">
     <p:bg>
       <p:bgPr>
-        <a:solidFill>
-          <a:srgbClr val="16283C"/>
-        </a:solidFill>
+        <a:blipFill dpi="0" rotWithShape="1">
+          <a:blip r:embed="rId1">
+            <a:lum/>
+          </a:blip>
+          <a:srcRect/>
+          <a:stretch>
+            <a:fillRect/>
+          </a:stretch>
+        </a:blipFill>
+        <a:effectLst/>
       </p:bgPr>
     </p:bg>
     <p:spTree>
@@ -2740,9 +2747,35 @@
           </a:p>
         </p:txBody>
       </p:sp>
-      <p:sp>
-        <p:nvSpPr>
-          <p:cNvPr id="5" name="Text 3"/>
+      <p:pic>
+        <p:nvPicPr>
+          <p:cNvPr id="5" name="Image 0" descr="assets/glow.png">    </p:cNvPr>
+          <p:cNvPicPr>
+            <a:picLocks noChangeAspect="1"/>
+          </p:cNvPicPr>
+          <p:nvPr/>
+        </p:nvPicPr>
+        <p:blipFill>
+          <a:blip r:embed="rId2">
+            <a:alphaModFix amt="38000"/>
+          </a:blip>
+          <a:stretch>
+            <a:fillRect/>
+          </a:stretch>
+        </p:blipFill>
+        <p:spPr>
+          <a:xfrm>
+            <a:off x="-1005840" y="1371600"/>
+            <a:ext cx="7772400" cy="4754880"/>
+          </a:xfrm>
+          <a:prstGeom prst="rect">
+            <a:avLst/>
+          </a:prstGeom>
+        </p:spPr>
+      </p:pic>
+      <p:sp>
+        <p:nvSpPr>
+          <p:cNvPr id="6" name="Text 3"/>
           <p:cNvSpPr/>
           <p:nvPr/>
         </p:nvSpPr>
@@ -2781,7 +2814,7 @@
       </p:sp>
       <p:sp>
         <p:nvSpPr>
-          <p:cNvPr id="6" name="Text 4"/>
+          <p:cNvPr id="7" name="Text 4"/>
           <p:cNvSpPr/>
           <p:nvPr/>
         </p:nvSpPr>
@@ -2820,7 +2853,7 @@
       </p:sp>
       <p:sp>
         <p:nvSpPr>
-          <p:cNvPr id="7" name="Text 5"/>
+          <p:cNvPr id="8" name="Text 5"/>
           <p:cNvSpPr/>
           <p:nvPr/>
         </p:nvSpPr>
@@ -3098,7 +3131,7 @@
                                           </p:stCondLst>
                                         </p:cTn>
                                         <p:tgtEl>
-                                          <p:spTgt spid="3"/>
+                                          <p:spTgt spid="7"/>
                                         </p:tgtEl>
                                         <p:attrNameLst>
                                           <p:attrName>style.visibility</p:attrName>
@@ -3112,7 +3145,7 @@
                                       <p:cBhvr>
                                         <p:cTn id="18" dur="450"/>
                                         <p:tgtEl>
-                                          <p:spTgt spid="3"/>
+                                          <p:spTgt spid="7"/>
                                         </p:tgtEl>
                                       </p:cBhvr>
                                     </p:animEffect>
@@ -3142,7 +3175,7 @@
                                           </p:stCondLst>
                                         </p:cTn>
                                         <p:tgtEl>
-                                          <p:spTgt spid="7"/>
+                                          <p:spTgt spid="3"/>
                                         </p:tgtEl>
                                         <p:attrNameLst>
                                           <p:attrName>style.visibility</p:attrName>
@@ -3156,7 +3189,51 @@
                                       <p:cBhvr>
                                         <p:cTn id="21" dur="450"/>
                                         <p:tgtEl>
-                                          <p:spTgt spid="7"/>
+                                          <p:spTgt spid="3"/>
+                                        </p:tgtEl>
+                                      </p:cBhvr>
+                                    </p:animEffect>
+                                  </p:childTnLst>
+                                </p:cTn>
+                              </p:par>
+                            </p:childTnLst>
+                          </p:cTn>
+                        </p:par>
+                        <p:par>
+                          <p:cTn id="22" fill="hold">
+                            <p:stCondLst>
+                              <p:cond delay="6480"/>
+                            </p:stCondLst>
+                            <p:childTnLst>
+                              <p:par>
+                                <p:cTn presetID="10" presetClass="entr" presetSubtype="0" fill="hold" grpId="0" nodeType="afterEffect">
+                                  <p:stCondLst>
+                                    <p:cond delay="0"/>
+                                  </p:stCondLst>
+                                  <p:childTnLst>
+                                    <p:set>
+                                      <p:cBhvr>
+                                        <p:cTn id="23" dur="1" fill="hold">
+                                          <p:stCondLst>
+                                            <p:cond delay="0"/>
+                                          </p:stCondLst>
+                                        </p:cTn>
+                                        <p:tgtEl>
+                                          <p:spTgt spid="8"/>
+                                        </p:tgtEl>
+                                        <p:attrNameLst>
+                                          <p:attrName>style.visibility</p:attrName>
+                                        </p:attrNameLst>
+                                      </p:cBhvr>
+                                      <p:to>
+                                        <p:strVal val="visible"/>
+                                      </p:to>
+                                    </p:set>
+                                    <p:animEffect transition="in" filter="fade">
+                                      <p:cBhvr>
+                                        <p:cTn id="24" dur="450"/>
+                                        <p:tgtEl>
+                                          <p:spTgt spid="8"/>
                                         </p:tgtEl>
                                       </p:cBhvr>
                                     </p:animEffect>
@@ -3195,8 +3272,9 @@
       <p:bldP spid="4" grpId="0"/>
       <p:bldP spid="5" grpId="0"/>
       <p:bldP spid="6" grpId="0"/>
+      <p:bldP spid="7" grpId="0"/>
       <p:bldP spid="3" grpId="0"/>
-      <p:bldP spid="7" grpId="0"/>
+      <p:bldP spid="8" grpId="0"/>
     </p:bldLst>
   </p:timing>
 </p:sld>
@@ -4427,9 +4505,16 @@
   <p:cSld name="Slide 11">
     <p:bg>
       <p:bgPr>
-        <a:solidFill>
-          <a:srgbClr val="16283C"/>
-        </a:solidFill>
+        <a:blipFill dpi="0" rotWithShape="1">
+          <a:blip r:embed="rId1">
+            <a:lum/>
+          </a:blip>
+          <a:srcRect/>
+          <a:stretch>
+            <a:fillRect/>
+          </a:stretch>
+        </a:blipFill>
+        <a:effectLst/>
       </p:bgPr>
     </p:bg>
     <p:spTree>
@@ -8858,20 +8943,670 @@
                             </p:childTnLst>
                           </p:cTn>
                         </p:par>
+                      </p:childTnLst>
+                    </p:cTn>
+                  </p:par>
+                </p:childTnLst>
+              </p:cTn>
+              <p:prevCondLst>
+                <p:cond evt="onPrev" delay="0">
+                  <p:tgtEl>
+                    <p:sldTgt/>
+                  </p:tgtEl>
+                </p:cond>
+              </p:prevCondLst>
+              <p:nextCondLst>
+                <p:cond evt="onNext" delay="0">
+                  <p:tgtEl>
+                    <p:sldTgt/>
+                  </p:tgtEl>
+                </p:cond>
+              </p:nextCondLst>
+            </p:seq>
+          </p:childTnLst>
+        </p:cTn>
+      </p:par>
+    </p:tnLst>
+    <p:bldLst>
+      <p:bldP spid="5" grpId="0"/>
+      <p:bldP spid="6" grpId="0"/>
+    </p:bldLst>
+  </p:timing>
+</p:sld>
+</file>
+
+<file path=ppt/slides/slide5.xml><?xml version="1.0" encoding="utf-8"?>
+<p:sld xmlns:a="http://schemas.openxmlformats.org/drawingml/2006/main" xmlns:r="http://schemas.openxmlformats.org/officeDocument/2006/relationships" xmlns:p="http://schemas.openxmlformats.org/presentationml/2006/main">
+  <p:cSld name="Slide 5">
+    <p:bg>
+      <p:bgPr>
+        <a:solidFill>
+          <a:srgbClr val="F6F8FB"/>
+        </a:solidFill>
+      </p:bgPr>
+    </p:bg>
+    <p:spTree>
+      <p:nvGrpSpPr>
+        <p:cNvPr id="1" name=""/>
+        <p:cNvGrpSpPr/>
+        <p:nvPr/>
+      </p:nvGrpSpPr>
+      <p:grpSpPr>
+        <a:xfrm>
+          <a:off x="0" y="0"/>
+          <a:ext cx="0" cy="0"/>
+          <a:chOff x="0" y="0"/>
+          <a:chExt cx="0" cy="0"/>
+        </a:xfrm>
+      </p:grpSpPr>
+      <p:sp>
+        <p:nvSpPr>
+          <p:cNvPr id="2" name="Text 0"/>
+          <p:cNvSpPr/>
+          <p:nvPr/>
+        </p:nvSpPr>
+        <p:spPr>
+          <a:xfrm>
+            <a:off x="457200" y="384048"/>
+            <a:ext cx="11274552" cy="548640"/>
+          </a:xfrm>
+          <a:prstGeom prst="rect">
+            <a:avLst/>
+          </a:prstGeom>
+          <a:noFill/>
+          <a:ln/>
+        </p:spPr>
+        <p:txBody>
+          <a:bodyPr wrap="square" lIns="0" tIns="0" rIns="0" bIns="0" rtlCol="0" anchor="ctr"/>
+          <a:lstStyle/>
+          <a:p>
+            <a:pPr indent="0" marL="0">
+              <a:buNone/>
+            </a:pPr>
+            <a:r>
+              <a:rPr lang="en-US" sz="3000" b="1" dirty="0">
+                <a:solidFill>
+                  <a:srgbClr val="1F3A5F"/>
+                </a:solidFill>
+                <a:latin typeface="微软雅黑" pitchFamily="34" charset="0"/>
+                <a:ea typeface="微软雅黑" pitchFamily="34" charset="-122"/>
+                <a:cs typeface="微软雅黑" pitchFamily="34" charset="-120"/>
+              </a:rPr>
+              <a:t>成本问题</a:t>
+            </a:r>
+            <a:endParaRPr lang="en-US" sz="3000" dirty="0"/>
+          </a:p>
+        </p:txBody>
+      </p:sp>
+      <p:sp>
+        <p:nvSpPr>
+          <p:cNvPr id="3" name="Text 1"/>
+          <p:cNvSpPr/>
+          <p:nvPr/>
+        </p:nvSpPr>
+        <p:spPr>
+          <a:xfrm>
+            <a:off x="457200" y="950976"/>
+            <a:ext cx="11274552" cy="310896"/>
+          </a:xfrm>
+          <a:prstGeom prst="rect">
+            <a:avLst/>
+          </a:prstGeom>
+          <a:noFill/>
+          <a:ln/>
+        </p:spPr>
+        <p:txBody>
+          <a:bodyPr wrap="square" lIns="0" tIns="0" rIns="0" bIns="0" rtlCol="0" anchor="ctr"/>
+          <a:lstStyle/>
+          <a:p>
+            <a:pPr indent="0" marL="0">
+              <a:buNone/>
+            </a:pPr>
+            <a:r>
+              <a:rPr lang="en-US" sz="1400" dirty="0">
+                <a:solidFill>
+                  <a:srgbClr val="64748B"/>
+                </a:solidFill>
+                <a:latin typeface="微软雅黑" pitchFamily="34" charset="0"/>
+                <a:ea typeface="微软雅黑" pitchFamily="34" charset="-122"/>
+                <a:cs typeface="微软雅黑" pitchFamily="34" charset="-120"/>
+              </a:rPr>
+              <a:t>单台履约成本 213 元，同比 +9%</a:t>
+            </a:r>
+            <a:endParaRPr lang="en-US" sz="1400" dirty="0"/>
+          </a:p>
+        </p:txBody>
+      </p:sp>
+      <p:graphicFrame>
+        <p:nvGraphicFramePr>
+          <p:cNvPr id="5" name="Chart 0" descr=""/>
+          <p:cNvGraphicFramePr/>
+          <p:nvPr/>
+        </p:nvGraphicFramePr>
+        <p:xfrm>
+          <a:off x="731520" y="1508760"/>
+          <a:ext cx="5120640" cy="4480560"/>
+        </p:xfrm>
+        <a:graphic xmlns:a="http://schemas.openxmlformats.org/drawingml/2006/main">
+          <a:graphicData uri="http://schemas.openxmlformats.org/drawingml/2006/chart">
+            <c:chart xmlns:c="http://schemas.openxmlformats.org/drawingml/2006/chart" r:id="rId1"/>
+          </a:graphicData>
+        </a:graphic>
+      </p:graphicFrame>
+      <p:sp>
+        <p:nvSpPr>
+          <p:cNvPr id="6" name="Text 2"/>
+          <p:cNvSpPr/>
+          <p:nvPr/>
+        </p:nvSpPr>
+        <p:spPr>
+          <a:xfrm>
+            <a:off x="2148840" y="3246120"/>
+            <a:ext cx="2286000" cy="365760"/>
+          </a:xfrm>
+          <a:prstGeom prst="rect">
+            <a:avLst/>
+          </a:prstGeom>
+          <a:noFill/>
+          <a:ln/>
+        </p:spPr>
+        <p:txBody>
+          <a:bodyPr wrap="square" lIns="0" tIns="0" rIns="0" bIns="0" rtlCol="0" anchor="ctr"/>
+          <a:lstStyle/>
+          <a:p>
+            <a:pPr algn="ctr" indent="0" marL="0">
+              <a:buNone/>
+            </a:pPr>
+            <a:r>
+              <a:rPr lang="en-US" sz="1500" b="1" dirty="0">
+                <a:solidFill>
+                  <a:srgbClr val="1E293B"/>
+                </a:solidFill>
+                <a:latin typeface="微软雅黑" pitchFamily="34" charset="0"/>
+                <a:ea typeface="微软雅黑" pitchFamily="34" charset="-122"/>
+                <a:cs typeface="微软雅黑" pitchFamily="34" charset="-120"/>
+              </a:rPr>
+              <a:t>物流与包材</a:t>
+            </a:r>
+            <a:endParaRPr lang="en-US" sz="1500" dirty="0"/>
+          </a:p>
+        </p:txBody>
+      </p:sp>
+      <p:sp>
+        <p:nvSpPr>
+          <p:cNvPr id="7" name="Text 3"/>
+          <p:cNvSpPr/>
+          <p:nvPr/>
+        </p:nvSpPr>
+        <p:spPr>
+          <a:xfrm>
+            <a:off x="2148840" y="3611880"/>
+            <a:ext cx="2286000" cy="320040"/>
+          </a:xfrm>
+          <a:prstGeom prst="rect">
+            <a:avLst/>
+          </a:prstGeom>
+          <a:noFill/>
+          <a:ln/>
+        </p:spPr>
+        <p:txBody>
+          <a:bodyPr wrap="square" lIns="0" tIns="0" rIns="0" bIns="0" rtlCol="0" anchor="ctr"/>
+          <a:lstStyle/>
+          <a:p>
+            <a:pPr algn="ctr" indent="0" marL="0">
+              <a:buNone/>
+            </a:pPr>
+            <a:r>
+              <a:rPr lang="en-US" sz="1300" dirty="0">
+                <a:solidFill>
+                  <a:srgbClr val="64748B"/>
+                </a:solidFill>
+                <a:latin typeface="微软雅黑" pitchFamily="34" charset="0"/>
+                <a:ea typeface="微软雅黑" pitchFamily="34" charset="-122"/>
+                <a:cs typeface="微软雅黑" pitchFamily="34" charset="-120"/>
+              </a:rPr>
+              <a:t>占成本 56%</a:t>
+            </a:r>
+            <a:endParaRPr lang="en-US" sz="1300" dirty="0"/>
+          </a:p>
+        </p:txBody>
+      </p:sp>
+      <p:sp>
+        <p:nvSpPr>
+          <p:cNvPr id="8" name="Text 4"/>
+          <p:cNvSpPr/>
+          <p:nvPr/>
+        </p:nvSpPr>
+        <p:spPr>
+          <a:xfrm>
+            <a:off x="6492240" y="1645920"/>
+            <a:ext cx="2926080" cy="1031240"/>
+          </a:xfrm>
+          <a:prstGeom prst="rect">
+            <a:avLst/>
+          </a:prstGeom>
+          <a:noFill/>
+          <a:ln/>
+        </p:spPr>
+        <p:txBody>
+          <a:bodyPr wrap="square" lIns="0" tIns="0" rIns="0" bIns="0" rtlCol="0" anchor="ctr"/>
+          <a:lstStyle/>
+          <a:p>
+            <a:pPr indent="0" marL="0">
+              <a:buNone/>
+            </a:pPr>
+            <a:r>
+              <a:rPr lang="en-US" sz="5600" b="1" dirty="0">
+                <a:solidFill>
+                  <a:srgbClr val="E8590C"/>
+                </a:solidFill>
+                <a:latin typeface="微软雅黑" pitchFamily="34" charset="0"/>
+                <a:ea typeface="微软雅黑" pitchFamily="34" charset="-122"/>
+                <a:cs typeface="微软雅黑" pitchFamily="34" charset="-120"/>
+              </a:rPr>
+              <a:t>78%</a:t>
+            </a:r>
+            <a:endParaRPr lang="en-US" sz="5600" dirty="0"/>
+          </a:p>
+        </p:txBody>
+      </p:sp>
+      <p:sp>
+        <p:nvSpPr>
+          <p:cNvPr id="9" name="Text 5"/>
+          <p:cNvSpPr/>
+          <p:nvPr/>
+        </p:nvSpPr>
+        <p:spPr>
+          <a:xfrm>
+            <a:off x="6492240" y="2788920"/>
+            <a:ext cx="4937760" cy="365760"/>
+          </a:xfrm>
+          <a:prstGeom prst="rect">
+            <a:avLst/>
+          </a:prstGeom>
+          <a:noFill/>
+          <a:ln/>
+        </p:spPr>
+        <p:txBody>
+          <a:bodyPr wrap="square" lIns="0" tIns="0" rIns="0" bIns="0" rtlCol="0" anchor="ctr"/>
+          <a:lstStyle/>
+          <a:p>
+            <a:pPr indent="0" marL="0">
+              <a:buNone/>
+            </a:pPr>
+            <a:r>
+              <a:rPr lang="en-US" sz="1500" dirty="0">
+                <a:solidFill>
+                  <a:srgbClr val="64748B"/>
+                </a:solidFill>
+                <a:latin typeface="微软雅黑" pitchFamily="34" charset="0"/>
+                <a:ea typeface="微软雅黑" pitchFamily="34" charset="-122"/>
+                <a:cs typeface="微软雅黑" pitchFamily="34" charset="-120"/>
+              </a:rPr>
+              <a:t>成本增量中物流与包材的占比</a:t>
+            </a:r>
+            <a:endParaRPr lang="en-US" sz="1500" dirty="0"/>
+          </a:p>
+        </p:txBody>
+      </p:sp>
+      <p:sp>
+        <p:nvSpPr>
+          <p:cNvPr id="10" name="Text 6"/>
+          <p:cNvSpPr/>
+          <p:nvPr/>
+        </p:nvSpPr>
+        <p:spPr>
+          <a:xfrm>
+            <a:off x="6492240" y="3429000"/>
+            <a:ext cx="4937760" cy="384048"/>
+          </a:xfrm>
+          <a:prstGeom prst="rect">
+            <a:avLst/>
+          </a:prstGeom>
+          <a:noFill/>
+          <a:ln/>
+        </p:spPr>
+        <p:txBody>
+          <a:bodyPr wrap="square" lIns="0" tIns="0" rIns="0" bIns="0" rtlCol="0" anchor="ctr"/>
+          <a:lstStyle/>
+          <a:p>
+            <a:pPr indent="0" marL="0">
+              <a:buNone/>
+            </a:pPr>
+            <a:r>
+              <a:rPr lang="en-US" sz="1700" b="1" dirty="0">
+                <a:solidFill>
+                  <a:srgbClr val="1E293B"/>
+                </a:solidFill>
+                <a:latin typeface="微软雅黑" pitchFamily="34" charset="0"/>
+                <a:ea typeface="微软雅黑" pitchFamily="34" charset="-122"/>
+                <a:cs typeface="微软雅黑" pitchFamily="34" charset="-120"/>
+              </a:rPr>
+              <a:t>物流费上涨</a:t>
+            </a:r>
+            <a:endParaRPr lang="en-US" sz="1700" dirty="0"/>
+          </a:p>
+        </p:txBody>
+      </p:sp>
+      <p:sp>
+        <p:nvSpPr>
+          <p:cNvPr id="11" name="Text 7"/>
+          <p:cNvSpPr/>
+          <p:nvPr/>
+        </p:nvSpPr>
+        <p:spPr>
+          <a:xfrm>
+            <a:off x="6492240" y="3840480"/>
+            <a:ext cx="4937760" cy="365760"/>
+          </a:xfrm>
+          <a:prstGeom prst="rect">
+            <a:avLst/>
+          </a:prstGeom>
+          <a:noFill/>
+          <a:ln/>
+        </p:spPr>
+        <p:txBody>
+          <a:bodyPr wrap="square" lIns="0" tIns="0" rIns="0" bIns="0" rtlCol="0" anchor="ctr"/>
+          <a:lstStyle/>
+          <a:p>
+            <a:pPr indent="0" marL="0">
+              <a:buNone/>
+            </a:pPr>
+            <a:r>
+              <a:rPr lang="en-US" sz="1350" dirty="0">
+                <a:solidFill>
+                  <a:srgbClr val="64748B"/>
+                </a:solidFill>
+                <a:latin typeface="微软雅黑" pitchFamily="34" charset="0"/>
+                <a:ea typeface="微软雅黑" pitchFamily="34" charset="-122"/>
+                <a:cs typeface="微软雅黑" pitchFamily="34" charset="-120"/>
+              </a:rPr>
+              <a:t>快运单价 Q3 环比 +12%，大件抛比吃亏</a:t>
+            </a:r>
+            <a:endParaRPr lang="en-US" sz="1350" dirty="0"/>
+          </a:p>
+        </p:txBody>
+      </p:sp>
+      <p:sp>
+        <p:nvSpPr>
+          <p:cNvPr id="12" name="Text 8"/>
+          <p:cNvSpPr/>
+          <p:nvPr/>
+        </p:nvSpPr>
+        <p:spPr>
+          <a:xfrm>
+            <a:off x="6492240" y="4572000"/>
+            <a:ext cx="4937760" cy="384048"/>
+          </a:xfrm>
+          <a:prstGeom prst="rect">
+            <a:avLst/>
+          </a:prstGeom>
+          <a:noFill/>
+          <a:ln/>
+        </p:spPr>
+        <p:txBody>
+          <a:bodyPr wrap="square" lIns="0" tIns="0" rIns="0" bIns="0" rtlCol="0" anchor="ctr"/>
+          <a:lstStyle/>
+          <a:p>
+            <a:pPr indent="0" marL="0">
+              <a:buNone/>
+            </a:pPr>
+            <a:r>
+              <a:rPr lang="en-US" sz="1700" b="1" dirty="0">
+                <a:solidFill>
+                  <a:srgbClr val="1E293B"/>
+                </a:solidFill>
+                <a:latin typeface="微软雅黑" pitchFamily="34" charset="0"/>
+                <a:ea typeface="微软雅黑" pitchFamily="34" charset="-122"/>
+                <a:cs typeface="微软雅黑" pitchFamily="34" charset="-120"/>
+              </a:rPr>
+              <a:t>包材损耗率高</a:t>
+            </a:r>
+            <a:endParaRPr lang="en-US" sz="1700" dirty="0"/>
+          </a:p>
+        </p:txBody>
+      </p:sp>
+      <p:sp>
+        <p:nvSpPr>
+          <p:cNvPr id="13" name="Text 9"/>
+          <p:cNvSpPr/>
+          <p:nvPr/>
+        </p:nvSpPr>
+        <p:spPr>
+          <a:xfrm>
+            <a:off x="6492240" y="4983480"/>
+            <a:ext cx="4937760" cy="365760"/>
+          </a:xfrm>
+          <a:prstGeom prst="rect">
+            <a:avLst/>
+          </a:prstGeom>
+          <a:noFill/>
+          <a:ln/>
+        </p:spPr>
+        <p:txBody>
+          <a:bodyPr wrap="square" lIns="0" tIns="0" rIns="0" bIns="0" rtlCol="0" anchor="ctr"/>
+          <a:lstStyle/>
+          <a:p>
+            <a:pPr indent="0" marL="0">
+              <a:buNone/>
+            </a:pPr>
+            <a:r>
+              <a:rPr lang="en-US" sz="1350" dirty="0">
+                <a:solidFill>
+                  <a:srgbClr val="64748B"/>
+                </a:solidFill>
+                <a:latin typeface="微软雅黑" pitchFamily="34" charset="0"/>
+                <a:ea typeface="微软雅黑" pitchFamily="34" charset="-122"/>
+                <a:cs typeface="微软雅黑" pitchFamily="34" charset="-120"/>
+              </a:rPr>
+              <a:t>F2 包装兼容旧模具，破损率 3.1%</a:t>
+            </a:r>
+            <a:endParaRPr lang="en-US" sz="1350" dirty="0"/>
+          </a:p>
+        </p:txBody>
+      </p:sp>
+      <p:sp>
+        <p:nvSpPr>
+          <p:cNvPr id="14" name="Text 10"/>
+          <p:cNvSpPr/>
+          <p:nvPr/>
+        </p:nvSpPr>
+        <p:spPr>
+          <a:xfrm>
+            <a:off x="457200" y="6473952"/>
+            <a:ext cx="5486400" cy="274320"/>
+          </a:xfrm>
+          <a:prstGeom prst="rect">
+            <a:avLst/>
+          </a:prstGeom>
+          <a:noFill/>
+          <a:ln/>
+        </p:spPr>
+        <p:txBody>
+          <a:bodyPr wrap="square" lIns="0" tIns="0" rIns="0" bIns="0" rtlCol="0" anchor="ctr"/>
+          <a:lstStyle/>
+          <a:p>
+            <a:pPr indent="0" marL="0">
+              <a:buNone/>
+            </a:pPr>
+            <a:r>
+              <a:rPr lang="en-US" sz="1200" dirty="0">
+                <a:solidFill>
+                  <a:srgbClr val="64748B"/>
+                </a:solidFill>
+                <a:latin typeface="微软雅黑" pitchFamily="34" charset="0"/>
+                <a:ea typeface="微软雅黑" pitchFamily="34" charset="-122"/>
+                <a:cs typeface="微软雅黑" pitchFamily="34" charset="-120"/>
+              </a:rPr>
+              <a:t>示例数据，仅供演示</a:t>
+            </a:r>
+            <a:endParaRPr lang="en-US" sz="1200" dirty="0"/>
+          </a:p>
+        </p:txBody>
+      </p:sp>
+      <p:sp>
+        <p:nvSpPr>
+          <p:cNvPr id="15" name="Text 11"/>
+          <p:cNvSpPr/>
+          <p:nvPr/>
+        </p:nvSpPr>
+        <p:spPr>
+          <a:xfrm>
+            <a:off x="10634472" y="6473952"/>
+            <a:ext cx="1097280" cy="274320"/>
+          </a:xfrm>
+          <a:prstGeom prst="rect">
+            <a:avLst/>
+          </a:prstGeom>
+          <a:noFill/>
+          <a:ln/>
+        </p:spPr>
+        <p:txBody>
+          <a:bodyPr wrap="square" lIns="0" tIns="0" rIns="0" bIns="0" rtlCol="0" anchor="ctr"/>
+          <a:lstStyle/>
+          <a:p>
+            <a:pPr algn="r" indent="0" marL="0">
+              <a:buNone/>
+            </a:pPr>
+            <a:r>
+              <a:rPr lang="en-US" sz="1200" dirty="0">
+                <a:solidFill>
+                  <a:srgbClr val="64748B"/>
+                </a:solidFill>
+                <a:latin typeface="微软雅黑" pitchFamily="34" charset="0"/>
+                <a:ea typeface="微软雅黑" pitchFamily="34" charset="-122"/>
+                <a:cs typeface="微软雅黑" pitchFamily="34" charset="-120"/>
+              </a:rPr>
+              <a:t>5 / 11</a:t>
+            </a:r>
+            <a:endParaRPr lang="en-US" sz="1200" dirty="0"/>
+          </a:p>
+        </p:txBody>
+      </p:sp>
+    </p:spTree>
+  </p:cSld>
+  <p:clrMapOvr>
+    <a:masterClrMapping/>
+  </p:clrMapOvr>
+  <p:transition spd="med">
+    <p:fade/>
+  </p:transition>
+  <p:timing>
+    <p:tnLst>
+      <p:par>
+        <p:cTn id="1" dur="indefinite" restart="never" nodeType="tmRoot">
+          <p:childTnLst>
+            <p:seq concurrent="1" nextAc="seek">
+              <p:cTn id="2" dur="indefinite" nodeType="mainSeq">
+                <p:childTnLst>
+                  <p:par>
+                    <p:cTn id="3" fill="hold">
+                      <p:stCondLst>
+                        <p:cond delay="0"/>
+                      </p:stCondLst>
+                      <p:childTnLst>
                         <p:par>
-                          <p:cTn id="10" fill="hold">
+                          <p:cTn id="4" fill="hold">
                             <p:stCondLst>
-                              <p:cond delay="800"/>
+                              <p:cond delay="150"/>
                             </p:stCondLst>
                             <p:childTnLst>
                               <p:par>
-                                <p:cTn presetID="22" presetClass="entr" presetSubtype="8" fill="hold" grpId="0" nodeType="afterEffect">
+                                <p:cTn presetID="10" presetClass="entr" presetSubtype="0" fill="hold" grpId="0" nodeType="afterEffect">
                                   <p:stCondLst>
                                     <p:cond delay="0"/>
                                   </p:stCondLst>
                                   <p:childTnLst>
                                     <p:set>
                                       <p:cBhvr>
+                                        <p:cTn id="5" dur="1" fill="hold">
+                                          <p:stCondLst>
+                                            <p:cond delay="0"/>
+                                          </p:stCondLst>
+                                        </p:cTn>
+                                        <p:tgtEl>
+                                          <p:spTgt spid="2"/>
+                                        </p:tgtEl>
+                                        <p:attrNameLst>
+                                          <p:attrName>style.visibility</p:attrName>
+                                        </p:attrNameLst>
+                                      </p:cBhvr>
+                                      <p:to>
+                                        <p:strVal val="visible"/>
+                                      </p:to>
+                                    </p:set>
+                                    <p:animEffect transition="in" filter="fade">
+                                      <p:cBhvr>
+                                        <p:cTn id="6" dur="400"/>
+                                        <p:tgtEl>
+                                          <p:spTgt spid="2"/>
+                                        </p:tgtEl>
+                                      </p:cBhvr>
+                                    </p:animEffect>
+                                  </p:childTnLst>
+                                </p:cTn>
+                              </p:par>
+                            </p:childTnLst>
+                          </p:cTn>
+                        </p:par>
+                        <p:par>
+                          <p:cTn id="7" fill="hold">
+                            <p:stCondLst>
+                              <p:cond delay="850"/>
+                            </p:stCondLst>
+                            <p:childTnLst>
+                              <p:par>
+                                <p:cTn presetID="10" presetClass="entr" presetSubtype="0" fill="hold" grpId="0" nodeType="afterEffect">
+                                  <p:stCondLst>
+                                    <p:cond delay="0"/>
+                                  </p:stCondLst>
+                                  <p:childTnLst>
+                                    <p:set>
+                                      <p:cBhvr>
+                                        <p:cTn id="8" dur="1" fill="hold">
+                                          <p:stCondLst>
+                                            <p:cond delay="0"/>
+                                          </p:stCondLst>
+                                        </p:cTn>
+                                        <p:tgtEl>
+                                          <p:spTgt spid="3"/>
+                                        </p:tgtEl>
+                                        <p:attrNameLst>
+                                          <p:attrName>style.visibility</p:attrName>
+                                        </p:attrNameLst>
+                                      </p:cBhvr>
+                                      <p:to>
+                                        <p:strVal val="visible"/>
+                                      </p:to>
+                                    </p:set>
+                                    <p:animEffect transition="in" filter="fade">
+                                      <p:cBhvr>
+                                        <p:cTn id="9" dur="400"/>
+                                        <p:tgtEl>
+                                          <p:spTgt spid="3"/>
+                                        </p:tgtEl>
+                                      </p:cBhvr>
+                                    </p:animEffect>
+                                  </p:childTnLst>
+                                </p:cTn>
+                              </p:par>
+                            </p:childTnLst>
+                          </p:cTn>
+                        </p:par>
+                        <p:par>
+                          <p:cTn id="10" fill="hold">
+                            <p:stCondLst>
+                              <p:cond delay="1700"/>
+                            </p:stCondLst>
+                            <p:childTnLst>
+                              <p:par>
+                                <p:cTn presetID="10" presetClass="entr" presetSubtype="0" fill="hold" grpId="0" nodeType="afterEffect">
+                                  <p:stCondLst>
+                                    <p:cond delay="0"/>
+                                  </p:stCondLst>
+                                  <p:childTnLst>
+                                    <p:set>
+                                      <p:cBhvr>
                                         <p:cTn id="11" dur="1" fill="hold">
                                           <p:stCondLst>
                                             <p:cond delay="0"/>
@@ -8888,11 +9623,407 @@
                                         <p:strVal val="visible"/>
                                       </p:to>
                                     </p:set>
-                                    <p:animEffect transition="in" filter="wipe(right)">
-                                      <p:cBhvr>
-                                        <p:cTn id="12" dur="700"/>
+                                    <p:animEffect transition="in" filter="fade">
+                                      <p:cBhvr>
+                                        <p:cTn id="12" dur="400"/>
                                         <p:tgtEl>
                                           <p:spTgt spid="8"/>
+                                        </p:tgtEl>
+                                      </p:cBhvr>
+                                    </p:animEffect>
+                                  </p:childTnLst>
+                                </p:cTn>
+                              </p:par>
+                            </p:childTnLst>
+                          </p:cTn>
+                        </p:par>
+                        <p:par>
+                          <p:cTn id="13" fill="hold">
+                            <p:stCondLst>
+                              <p:cond delay="2700"/>
+                            </p:stCondLst>
+                            <p:childTnLst>
+                              <p:par>
+                                <p:cTn presetID="10" presetClass="entr" presetSubtype="0" fill="hold" grpId="0" nodeType="afterEffect">
+                                  <p:stCondLst>
+                                    <p:cond delay="0"/>
+                                  </p:stCondLst>
+                                  <p:childTnLst>
+                                    <p:set>
+                                      <p:cBhvr>
+                                        <p:cTn id="14" dur="1" fill="hold">
+                                          <p:stCondLst>
+                                            <p:cond delay="0"/>
+                                          </p:stCondLst>
+                                        </p:cTn>
+                                        <p:tgtEl>
+                                          <p:spTgt spid="9"/>
+                                        </p:tgtEl>
+                                        <p:attrNameLst>
+                                          <p:attrName>style.visibility</p:attrName>
+                                        </p:attrNameLst>
+                                      </p:cBhvr>
+                                      <p:to>
+                                        <p:strVal val="visible"/>
+                                      </p:to>
+                                    </p:set>
+                                    <p:animEffect transition="in" filter="fade">
+                                      <p:cBhvr>
+                                        <p:cTn id="15" dur="400"/>
+                                        <p:tgtEl>
+                                          <p:spTgt spid="9"/>
+                                        </p:tgtEl>
+                                      </p:cBhvr>
+                                    </p:animEffect>
+                                  </p:childTnLst>
+                                </p:cTn>
+                              </p:par>
+                            </p:childTnLst>
+                          </p:cTn>
+                        </p:par>
+                        <p:par>
+                          <p:cTn id="16" fill="hold">
+                            <p:stCondLst>
+                              <p:cond delay="3850"/>
+                            </p:stCondLst>
+                            <p:childTnLst>
+                              <p:par>
+                                <p:cTn presetID="10" presetClass="entr" presetSubtype="0" fill="hold" grpId="0" nodeType="afterEffect">
+                                  <p:stCondLst>
+                                    <p:cond delay="0"/>
+                                  </p:stCondLst>
+                                  <p:childTnLst>
+                                    <p:set>
+                                      <p:cBhvr>
+                                        <p:cTn id="17" dur="1" fill="hold">
+                                          <p:stCondLst>
+                                            <p:cond delay="0"/>
+                                          </p:stCondLst>
+                                        </p:cTn>
+                                        <p:tgtEl>
+                                          <p:spTgt spid="6"/>
+                                        </p:tgtEl>
+                                        <p:attrNameLst>
+                                          <p:attrName>style.visibility</p:attrName>
+                                        </p:attrNameLst>
+                                      </p:cBhvr>
+                                      <p:to>
+                                        <p:strVal val="visible"/>
+                                      </p:to>
+                                    </p:set>
+                                    <p:animEffect transition="in" filter="fade">
+                                      <p:cBhvr>
+                                        <p:cTn id="18" dur="400"/>
+                                        <p:tgtEl>
+                                          <p:spTgt spid="6"/>
+                                        </p:tgtEl>
+                                      </p:cBhvr>
+                                    </p:animEffect>
+                                  </p:childTnLst>
+                                </p:cTn>
+                              </p:par>
+                            </p:childTnLst>
+                          </p:cTn>
+                        </p:par>
+                        <p:par>
+                          <p:cTn id="19" fill="hold">
+                            <p:stCondLst>
+                              <p:cond delay="5150"/>
+                            </p:stCondLst>
+                            <p:childTnLst>
+                              <p:par>
+                                <p:cTn presetID="10" presetClass="entr" presetSubtype="0" fill="hold" grpId="0" nodeType="afterEffect">
+                                  <p:stCondLst>
+                                    <p:cond delay="0"/>
+                                  </p:stCondLst>
+                                  <p:childTnLst>
+                                    <p:set>
+                                      <p:cBhvr>
+                                        <p:cTn id="20" dur="1" fill="hold">
+                                          <p:stCondLst>
+                                            <p:cond delay="0"/>
+                                          </p:stCondLst>
+                                        </p:cTn>
+                                        <p:tgtEl>
+                                          <p:spTgt spid="10"/>
+                                        </p:tgtEl>
+                                        <p:attrNameLst>
+                                          <p:attrName>style.visibility</p:attrName>
+                                        </p:attrNameLst>
+                                      </p:cBhvr>
+                                      <p:to>
+                                        <p:strVal val="visible"/>
+                                      </p:to>
+                                    </p:set>
+                                    <p:animEffect transition="in" filter="fade">
+                                      <p:cBhvr>
+                                        <p:cTn id="21" dur="400"/>
+                                        <p:tgtEl>
+                                          <p:spTgt spid="10"/>
+                                        </p:tgtEl>
+                                      </p:cBhvr>
+                                    </p:animEffect>
+                                  </p:childTnLst>
+                                </p:cTn>
+                              </p:par>
+                            </p:childTnLst>
+                          </p:cTn>
+                        </p:par>
+                        <p:par>
+                          <p:cTn id="22" fill="hold">
+                            <p:stCondLst>
+                              <p:cond delay="6600"/>
+                            </p:stCondLst>
+                            <p:childTnLst>
+                              <p:par>
+                                <p:cTn presetID="10" presetClass="entr" presetSubtype="0" fill="hold" grpId="0" nodeType="afterEffect">
+                                  <p:stCondLst>
+                                    <p:cond delay="0"/>
+                                  </p:stCondLst>
+                                  <p:childTnLst>
+                                    <p:set>
+                                      <p:cBhvr>
+                                        <p:cTn id="23" dur="1" fill="hold">
+                                          <p:stCondLst>
+                                            <p:cond delay="0"/>
+                                          </p:stCondLst>
+                                        </p:cTn>
+                                        <p:tgtEl>
+                                          <p:spTgt spid="7"/>
+                                        </p:tgtEl>
+                                        <p:attrNameLst>
+                                          <p:attrName>style.visibility</p:attrName>
+                                        </p:attrNameLst>
+                                      </p:cBhvr>
+                                      <p:to>
+                                        <p:strVal val="visible"/>
+                                      </p:to>
+                                    </p:set>
+                                    <p:animEffect transition="in" filter="fade">
+                                      <p:cBhvr>
+                                        <p:cTn id="24" dur="400"/>
+                                        <p:tgtEl>
+                                          <p:spTgt spid="7"/>
+                                        </p:tgtEl>
+                                      </p:cBhvr>
+                                    </p:animEffect>
+                                  </p:childTnLst>
+                                </p:cTn>
+                              </p:par>
+                            </p:childTnLst>
+                          </p:cTn>
+                        </p:par>
+                        <p:par>
+                          <p:cTn id="25" fill="hold">
+                            <p:stCondLst>
+                              <p:cond delay="8200"/>
+                            </p:stCondLst>
+                            <p:childTnLst>
+                              <p:par>
+                                <p:cTn presetID="10" presetClass="entr" presetSubtype="0" fill="hold" grpId="0" nodeType="afterEffect">
+                                  <p:stCondLst>
+                                    <p:cond delay="0"/>
+                                  </p:stCondLst>
+                                  <p:childTnLst>
+                                    <p:set>
+                                      <p:cBhvr>
+                                        <p:cTn id="26" dur="1" fill="hold">
+                                          <p:stCondLst>
+                                            <p:cond delay="0"/>
+                                          </p:stCondLst>
+                                        </p:cTn>
+                                        <p:tgtEl>
+                                          <p:spTgt spid="11"/>
+                                        </p:tgtEl>
+                                        <p:attrNameLst>
+                                          <p:attrName>style.visibility</p:attrName>
+                                        </p:attrNameLst>
+                                      </p:cBhvr>
+                                      <p:to>
+                                        <p:strVal val="visible"/>
+                                      </p:to>
+                                    </p:set>
+                                    <p:animEffect transition="in" filter="fade">
+                                      <p:cBhvr>
+                                        <p:cTn id="27" dur="400"/>
+                                        <p:tgtEl>
+                                          <p:spTgt spid="11"/>
+                                        </p:tgtEl>
+                                      </p:cBhvr>
+                                    </p:animEffect>
+                                  </p:childTnLst>
+                                </p:cTn>
+                              </p:par>
+                            </p:childTnLst>
+                          </p:cTn>
+                        </p:par>
+                        <p:par>
+                          <p:cTn id="28" fill="hold">
+                            <p:stCondLst>
+                              <p:cond delay="9950"/>
+                            </p:stCondLst>
+                            <p:childTnLst>
+                              <p:par>
+                                <p:cTn presetID="10" presetClass="entr" presetSubtype="0" fill="hold" grpId="0" nodeType="afterEffect">
+                                  <p:stCondLst>
+                                    <p:cond delay="0"/>
+                                  </p:stCondLst>
+                                  <p:childTnLst>
+                                    <p:set>
+                                      <p:cBhvr>
+                                        <p:cTn id="29" dur="1" fill="hold">
+                                          <p:stCondLst>
+                                            <p:cond delay="0"/>
+                                          </p:stCondLst>
+                                        </p:cTn>
+                                        <p:tgtEl>
+                                          <p:spTgt spid="12"/>
+                                        </p:tgtEl>
+                                        <p:attrNameLst>
+                                          <p:attrName>style.visibility</p:attrName>
+                                        </p:attrNameLst>
+                                      </p:cBhvr>
+                                      <p:to>
+                                        <p:strVal val="visible"/>
+                                      </p:to>
+                                    </p:set>
+                                    <p:animEffect transition="in" filter="fade">
+                                      <p:cBhvr>
+                                        <p:cTn id="30" dur="400"/>
+                                        <p:tgtEl>
+                                          <p:spTgt spid="12"/>
+                                        </p:tgtEl>
+                                      </p:cBhvr>
+                                    </p:animEffect>
+                                  </p:childTnLst>
+                                </p:cTn>
+                              </p:par>
+                            </p:childTnLst>
+                          </p:cTn>
+                        </p:par>
+                        <p:par>
+                          <p:cTn id="31" fill="hold">
+                            <p:stCondLst>
+                              <p:cond delay="11850"/>
+                            </p:stCondLst>
+                            <p:childTnLst>
+                              <p:par>
+                                <p:cTn presetID="10" presetClass="entr" presetSubtype="0" fill="hold" grpId="0" nodeType="afterEffect">
+                                  <p:stCondLst>
+                                    <p:cond delay="0"/>
+                                  </p:stCondLst>
+                                  <p:childTnLst>
+                                    <p:set>
+                                      <p:cBhvr>
+                                        <p:cTn id="32" dur="1" fill="hold">
+                                          <p:stCondLst>
+                                            <p:cond delay="0"/>
+                                          </p:stCondLst>
+                                        </p:cTn>
+                                        <p:tgtEl>
+                                          <p:spTgt spid="13"/>
+                                        </p:tgtEl>
+                                        <p:attrNameLst>
+                                          <p:attrName>style.visibility</p:attrName>
+                                        </p:attrNameLst>
+                                      </p:cBhvr>
+                                      <p:to>
+                                        <p:strVal val="visible"/>
+                                      </p:to>
+                                    </p:set>
+                                    <p:animEffect transition="in" filter="fade">
+                                      <p:cBhvr>
+                                        <p:cTn id="33" dur="400"/>
+                                        <p:tgtEl>
+                                          <p:spTgt spid="13"/>
+                                        </p:tgtEl>
+                                      </p:cBhvr>
+                                    </p:animEffect>
+                                  </p:childTnLst>
+                                </p:cTn>
+                              </p:par>
+                            </p:childTnLst>
+                          </p:cTn>
+                        </p:par>
+                        <p:par>
+                          <p:cTn id="34" fill="hold">
+                            <p:stCondLst>
+                              <p:cond delay="13900"/>
+                            </p:stCondLst>
+                            <p:childTnLst>
+                              <p:par>
+                                <p:cTn presetID="10" presetClass="entr" presetSubtype="0" fill="hold" grpId="0" nodeType="afterEffect">
+                                  <p:stCondLst>
+                                    <p:cond delay="0"/>
+                                  </p:stCondLst>
+                                  <p:childTnLst>
+                                    <p:set>
+                                      <p:cBhvr>
+                                        <p:cTn id="35" dur="1" fill="hold">
+                                          <p:stCondLst>
+                                            <p:cond delay="0"/>
+                                          </p:stCondLst>
+                                        </p:cTn>
+                                        <p:tgtEl>
+                                          <p:spTgt spid="14"/>
+                                        </p:tgtEl>
+                                        <p:attrNameLst>
+                                          <p:attrName>style.visibility</p:attrName>
+                                        </p:attrNameLst>
+                                      </p:cBhvr>
+                                      <p:to>
+                                        <p:strVal val="visible"/>
+                                      </p:to>
+                                    </p:set>
+                                    <p:animEffect transition="in" filter="fade">
+                                      <p:cBhvr>
+                                        <p:cTn id="36" dur="400"/>
+                                        <p:tgtEl>
+                                          <p:spTgt spid="14"/>
+                                        </p:tgtEl>
+                                      </p:cBhvr>
+                                    </p:animEffect>
+                                  </p:childTnLst>
+                                </p:cTn>
+                              </p:par>
+                            </p:childTnLst>
+                          </p:cTn>
+                        </p:par>
+                        <p:par>
+                          <p:cTn id="37" fill="hold">
+                            <p:stCondLst>
+                              <p:cond delay="16100"/>
+                            </p:stCondLst>
+                            <p:childTnLst>
+                              <p:par>
+                                <p:cTn presetID="10" presetClass="entr" presetSubtype="0" fill="hold" grpId="0" nodeType="afterEffect">
+                                  <p:stCondLst>
+                                    <p:cond delay="0"/>
+                                  </p:stCondLst>
+                                  <p:childTnLst>
+                                    <p:set>
+                                      <p:cBhvr>
+                                        <p:cTn id="38" dur="1" fill="hold">
+                                          <p:stCondLst>
+                                            <p:cond delay="0"/>
+                                          </p:stCondLst>
+                                        </p:cTn>
+                                        <p:tgtEl>
+                                          <p:spTgt spid="15"/>
+                                        </p:tgtEl>
+                                        <p:attrNameLst>
+                                          <p:attrName>style.visibility</p:attrName>
+                                        </p:attrNameLst>
+                                      </p:cBhvr>
+                                      <p:to>
+                                        <p:strVal val="visible"/>
+                                      </p:to>
+                                    </p:set>
+                                    <p:animEffect transition="in" filter="fade">
+                                      <p:cBhvr>
+                                        <p:cTn id="39" dur="400"/>
+                                        <p:tgtEl>
+                                          <p:spTgt spid="15"/>
                                         </p:tgtEl>
                                       </p:cBhvr>
                                     </p:animEffect>
@@ -8927,1146 +10058,6 @@
       </p:par>
     </p:tnLst>
     <p:bldLst>
-      <p:bldP spid="5" grpId="0"/>
-      <p:bldP spid="6" grpId="0"/>
-      <p:bldGraphic spid="8" grpId="0">
-        <p:bldSub>
-          <a:bldChart bld="category" animBg="1"/>
-        </p:bldSub>
-      </p:bldGraphic>
-    </p:bldLst>
-  </p:timing>
-</p:sld>
-</file>
-
-<file path=ppt/slides/slide5.xml><?xml version="1.0" encoding="utf-8"?>
-<p:sld xmlns:a="http://schemas.openxmlformats.org/drawingml/2006/main" xmlns:r="http://schemas.openxmlformats.org/officeDocument/2006/relationships" xmlns:p="http://schemas.openxmlformats.org/presentationml/2006/main">
-  <p:cSld name="Slide 5">
-    <p:bg>
-      <p:bgPr>
-        <a:solidFill>
-          <a:srgbClr val="F6F8FB"/>
-        </a:solidFill>
-      </p:bgPr>
-    </p:bg>
-    <p:spTree>
-      <p:nvGrpSpPr>
-        <p:cNvPr id="1" name=""/>
-        <p:cNvGrpSpPr/>
-        <p:nvPr/>
-      </p:nvGrpSpPr>
-      <p:grpSpPr>
-        <a:xfrm>
-          <a:off x="0" y="0"/>
-          <a:ext cx="0" cy="0"/>
-          <a:chOff x="0" y="0"/>
-          <a:chExt cx="0" cy="0"/>
-        </a:xfrm>
-      </p:grpSpPr>
-      <p:sp>
-        <p:nvSpPr>
-          <p:cNvPr id="2" name="Text 0"/>
-          <p:cNvSpPr/>
-          <p:nvPr/>
-        </p:nvSpPr>
-        <p:spPr>
-          <a:xfrm>
-            <a:off x="457200" y="384048"/>
-            <a:ext cx="11274552" cy="548640"/>
-          </a:xfrm>
-          <a:prstGeom prst="rect">
-            <a:avLst/>
-          </a:prstGeom>
-          <a:noFill/>
-          <a:ln/>
-        </p:spPr>
-        <p:txBody>
-          <a:bodyPr wrap="square" lIns="0" tIns="0" rIns="0" bIns="0" rtlCol="0" anchor="ctr"/>
-          <a:lstStyle/>
-          <a:p>
-            <a:pPr indent="0" marL="0">
-              <a:buNone/>
-            </a:pPr>
-            <a:r>
-              <a:rPr lang="en-US" sz="3000" b="1" dirty="0">
-                <a:solidFill>
-                  <a:srgbClr val="1F3A5F"/>
-                </a:solidFill>
-                <a:latin typeface="微软雅黑" pitchFamily="34" charset="0"/>
-                <a:ea typeface="微软雅黑" pitchFamily="34" charset="-122"/>
-                <a:cs typeface="微软雅黑" pitchFamily="34" charset="-120"/>
-              </a:rPr>
-              <a:t>成本问题</a:t>
-            </a:r>
-            <a:endParaRPr lang="en-US" sz="3000" dirty="0"/>
-          </a:p>
-        </p:txBody>
-      </p:sp>
-      <p:sp>
-        <p:nvSpPr>
-          <p:cNvPr id="3" name="Text 1"/>
-          <p:cNvSpPr/>
-          <p:nvPr/>
-        </p:nvSpPr>
-        <p:spPr>
-          <a:xfrm>
-            <a:off x="457200" y="950976"/>
-            <a:ext cx="11274552" cy="310896"/>
-          </a:xfrm>
-          <a:prstGeom prst="rect">
-            <a:avLst/>
-          </a:prstGeom>
-          <a:noFill/>
-          <a:ln/>
-        </p:spPr>
-        <p:txBody>
-          <a:bodyPr wrap="square" lIns="0" tIns="0" rIns="0" bIns="0" rtlCol="0" anchor="ctr"/>
-          <a:lstStyle/>
-          <a:p>
-            <a:pPr indent="0" marL="0">
-              <a:buNone/>
-            </a:pPr>
-            <a:r>
-              <a:rPr lang="en-US" sz="1400" dirty="0">
-                <a:solidFill>
-                  <a:srgbClr val="64748B"/>
-                </a:solidFill>
-                <a:latin typeface="微软雅黑" pitchFamily="34" charset="0"/>
-                <a:ea typeface="微软雅黑" pitchFamily="34" charset="-122"/>
-                <a:cs typeface="微软雅黑" pitchFamily="34" charset="-120"/>
-              </a:rPr>
-              <a:t>单台履约成本 213 元，同比 +9%</a:t>
-            </a:r>
-            <a:endParaRPr lang="en-US" sz="1400" dirty="0"/>
-          </a:p>
-        </p:txBody>
-      </p:sp>
-      <p:graphicFrame>
-        <p:nvGraphicFramePr>
-          <p:cNvPr id="5" name="Chart 0" descr=""/>
-          <p:cNvGraphicFramePr/>
-          <p:nvPr/>
-        </p:nvGraphicFramePr>
-        <p:xfrm>
-          <a:off x="731520" y="1508760"/>
-          <a:ext cx="5120640" cy="4480560"/>
-        </p:xfrm>
-        <a:graphic xmlns:a="http://schemas.openxmlformats.org/drawingml/2006/main">
-          <a:graphicData uri="http://schemas.openxmlformats.org/drawingml/2006/chart">
-            <c:chart xmlns:c="http://schemas.openxmlformats.org/drawingml/2006/chart" r:id="rId1"/>
-          </a:graphicData>
-        </a:graphic>
-      </p:graphicFrame>
-      <p:sp>
-        <p:nvSpPr>
-          <p:cNvPr id="6" name="Text 2"/>
-          <p:cNvSpPr/>
-          <p:nvPr/>
-        </p:nvSpPr>
-        <p:spPr>
-          <a:xfrm>
-            <a:off x="2148840" y="3246120"/>
-            <a:ext cx="2286000" cy="365760"/>
-          </a:xfrm>
-          <a:prstGeom prst="rect">
-            <a:avLst/>
-          </a:prstGeom>
-          <a:noFill/>
-          <a:ln/>
-        </p:spPr>
-        <p:txBody>
-          <a:bodyPr wrap="square" lIns="0" tIns="0" rIns="0" bIns="0" rtlCol="0" anchor="ctr"/>
-          <a:lstStyle/>
-          <a:p>
-            <a:pPr algn="ctr" indent="0" marL="0">
-              <a:buNone/>
-            </a:pPr>
-            <a:r>
-              <a:rPr lang="en-US" sz="1500" b="1" dirty="0">
-                <a:solidFill>
-                  <a:srgbClr val="1E293B"/>
-                </a:solidFill>
-                <a:latin typeface="微软雅黑" pitchFamily="34" charset="0"/>
-                <a:ea typeface="微软雅黑" pitchFamily="34" charset="-122"/>
-                <a:cs typeface="微软雅黑" pitchFamily="34" charset="-120"/>
-              </a:rPr>
-              <a:t>物流与包材</a:t>
-            </a:r>
-            <a:endParaRPr lang="en-US" sz="1500" dirty="0"/>
-          </a:p>
-        </p:txBody>
-      </p:sp>
-      <p:sp>
-        <p:nvSpPr>
-          <p:cNvPr id="7" name="Text 3"/>
-          <p:cNvSpPr/>
-          <p:nvPr/>
-        </p:nvSpPr>
-        <p:spPr>
-          <a:xfrm>
-            <a:off x="2148840" y="3611880"/>
-            <a:ext cx="2286000" cy="320040"/>
-          </a:xfrm>
-          <a:prstGeom prst="rect">
-            <a:avLst/>
-          </a:prstGeom>
-          <a:noFill/>
-          <a:ln/>
-        </p:spPr>
-        <p:txBody>
-          <a:bodyPr wrap="square" lIns="0" tIns="0" rIns="0" bIns="0" rtlCol="0" anchor="ctr"/>
-          <a:lstStyle/>
-          <a:p>
-            <a:pPr algn="ctr" indent="0" marL="0">
-              <a:buNone/>
-            </a:pPr>
-            <a:r>
-              <a:rPr lang="en-US" sz="1300" dirty="0">
-                <a:solidFill>
-                  <a:srgbClr val="64748B"/>
-                </a:solidFill>
-                <a:latin typeface="微软雅黑" pitchFamily="34" charset="0"/>
-                <a:ea typeface="微软雅黑" pitchFamily="34" charset="-122"/>
-                <a:cs typeface="微软雅黑" pitchFamily="34" charset="-120"/>
-              </a:rPr>
-              <a:t>占成本 56%</a:t>
-            </a:r>
-            <a:endParaRPr lang="en-US" sz="1300" dirty="0"/>
-          </a:p>
-        </p:txBody>
-      </p:sp>
-      <p:sp>
-        <p:nvSpPr>
-          <p:cNvPr id="8" name="Text 4"/>
-          <p:cNvSpPr/>
-          <p:nvPr/>
-        </p:nvSpPr>
-        <p:spPr>
-          <a:xfrm>
-            <a:off x="6492240" y="1645920"/>
-            <a:ext cx="2926080" cy="1031240"/>
-          </a:xfrm>
-          <a:prstGeom prst="rect">
-            <a:avLst/>
-          </a:prstGeom>
-          <a:noFill/>
-          <a:ln/>
-        </p:spPr>
-        <p:txBody>
-          <a:bodyPr wrap="square" lIns="0" tIns="0" rIns="0" bIns="0" rtlCol="0" anchor="ctr"/>
-          <a:lstStyle/>
-          <a:p>
-            <a:pPr indent="0" marL="0">
-              <a:buNone/>
-            </a:pPr>
-            <a:r>
-              <a:rPr lang="en-US" sz="5600" b="1" dirty="0">
-                <a:solidFill>
-                  <a:srgbClr val="E8590C"/>
-                </a:solidFill>
-                <a:latin typeface="微软雅黑" pitchFamily="34" charset="0"/>
-                <a:ea typeface="微软雅黑" pitchFamily="34" charset="-122"/>
-                <a:cs typeface="微软雅黑" pitchFamily="34" charset="-120"/>
-              </a:rPr>
-              <a:t>78%</a:t>
-            </a:r>
-            <a:endParaRPr lang="en-US" sz="5600" dirty="0"/>
-          </a:p>
-        </p:txBody>
-      </p:sp>
-      <p:sp>
-        <p:nvSpPr>
-          <p:cNvPr id="9" name="Text 5"/>
-          <p:cNvSpPr/>
-          <p:nvPr/>
-        </p:nvSpPr>
-        <p:spPr>
-          <a:xfrm>
-            <a:off x="6492240" y="2788920"/>
-            <a:ext cx="4937760" cy="365760"/>
-          </a:xfrm>
-          <a:prstGeom prst="rect">
-            <a:avLst/>
-          </a:prstGeom>
-          <a:noFill/>
-          <a:ln/>
-        </p:spPr>
-        <p:txBody>
-          <a:bodyPr wrap="square" lIns="0" tIns="0" rIns="0" bIns="0" rtlCol="0" anchor="ctr"/>
-          <a:lstStyle/>
-          <a:p>
-            <a:pPr indent="0" marL="0">
-              <a:buNone/>
-            </a:pPr>
-            <a:r>
-              <a:rPr lang="en-US" sz="1500" dirty="0">
-                <a:solidFill>
-                  <a:srgbClr val="64748B"/>
-                </a:solidFill>
-                <a:latin typeface="微软雅黑" pitchFamily="34" charset="0"/>
-                <a:ea typeface="微软雅黑" pitchFamily="34" charset="-122"/>
-                <a:cs typeface="微软雅黑" pitchFamily="34" charset="-120"/>
-              </a:rPr>
-              <a:t>成本增量中物流与包材的占比</a:t>
-            </a:r>
-            <a:endParaRPr lang="en-US" sz="1500" dirty="0"/>
-          </a:p>
-        </p:txBody>
-      </p:sp>
-      <p:sp>
-        <p:nvSpPr>
-          <p:cNvPr id="10" name="Text 6"/>
-          <p:cNvSpPr/>
-          <p:nvPr/>
-        </p:nvSpPr>
-        <p:spPr>
-          <a:xfrm>
-            <a:off x="6492240" y="3429000"/>
-            <a:ext cx="4937760" cy="384048"/>
-          </a:xfrm>
-          <a:prstGeom prst="rect">
-            <a:avLst/>
-          </a:prstGeom>
-          <a:noFill/>
-          <a:ln/>
-        </p:spPr>
-        <p:txBody>
-          <a:bodyPr wrap="square" lIns="0" tIns="0" rIns="0" bIns="0" rtlCol="0" anchor="ctr"/>
-          <a:lstStyle/>
-          <a:p>
-            <a:pPr indent="0" marL="0">
-              <a:buNone/>
-            </a:pPr>
-            <a:r>
-              <a:rPr lang="en-US" sz="1700" b="1" dirty="0">
-                <a:solidFill>
-                  <a:srgbClr val="1E293B"/>
-                </a:solidFill>
-                <a:latin typeface="微软雅黑" pitchFamily="34" charset="0"/>
-                <a:ea typeface="微软雅黑" pitchFamily="34" charset="-122"/>
-                <a:cs typeface="微软雅黑" pitchFamily="34" charset="-120"/>
-              </a:rPr>
-              <a:t>物流费上涨</a:t>
-            </a:r>
-            <a:endParaRPr lang="en-US" sz="1700" dirty="0"/>
-          </a:p>
-        </p:txBody>
-      </p:sp>
-      <p:sp>
-        <p:nvSpPr>
-          <p:cNvPr id="11" name="Text 7"/>
-          <p:cNvSpPr/>
-          <p:nvPr/>
-        </p:nvSpPr>
-        <p:spPr>
-          <a:xfrm>
-            <a:off x="6492240" y="3840480"/>
-            <a:ext cx="4937760" cy="365760"/>
-          </a:xfrm>
-          <a:prstGeom prst="rect">
-            <a:avLst/>
-          </a:prstGeom>
-          <a:noFill/>
-          <a:ln/>
-        </p:spPr>
-        <p:txBody>
-          <a:bodyPr wrap="square" lIns="0" tIns="0" rIns="0" bIns="0" rtlCol="0" anchor="ctr"/>
-          <a:lstStyle/>
-          <a:p>
-            <a:pPr indent="0" marL="0">
-              <a:buNone/>
-            </a:pPr>
-            <a:r>
-              <a:rPr lang="en-US" sz="1350" dirty="0">
-                <a:solidFill>
-                  <a:srgbClr val="64748B"/>
-                </a:solidFill>
-                <a:latin typeface="微软雅黑" pitchFamily="34" charset="0"/>
-                <a:ea typeface="微软雅黑" pitchFamily="34" charset="-122"/>
-                <a:cs typeface="微软雅黑" pitchFamily="34" charset="-120"/>
-              </a:rPr>
-              <a:t>快运单价 Q3 环比 +12%，大件抛比吃亏</a:t>
-            </a:r>
-            <a:endParaRPr lang="en-US" sz="1350" dirty="0"/>
-          </a:p>
-        </p:txBody>
-      </p:sp>
-      <p:sp>
-        <p:nvSpPr>
-          <p:cNvPr id="12" name="Text 8"/>
-          <p:cNvSpPr/>
-          <p:nvPr/>
-        </p:nvSpPr>
-        <p:spPr>
-          <a:xfrm>
-            <a:off x="6492240" y="4572000"/>
-            <a:ext cx="4937760" cy="384048"/>
-          </a:xfrm>
-          <a:prstGeom prst="rect">
-            <a:avLst/>
-          </a:prstGeom>
-          <a:noFill/>
-          <a:ln/>
-        </p:spPr>
-        <p:txBody>
-          <a:bodyPr wrap="square" lIns="0" tIns="0" rIns="0" bIns="0" rtlCol="0" anchor="ctr"/>
-          <a:lstStyle/>
-          <a:p>
-            <a:pPr indent="0" marL="0">
-              <a:buNone/>
-            </a:pPr>
-            <a:r>
-              <a:rPr lang="en-US" sz="1700" b="1" dirty="0">
-                <a:solidFill>
-                  <a:srgbClr val="1E293B"/>
-                </a:solidFill>
-                <a:latin typeface="微软雅黑" pitchFamily="34" charset="0"/>
-                <a:ea typeface="微软雅黑" pitchFamily="34" charset="-122"/>
-                <a:cs typeface="微软雅黑" pitchFamily="34" charset="-120"/>
-              </a:rPr>
-              <a:t>包材损耗率高</a:t>
-            </a:r>
-            <a:endParaRPr lang="en-US" sz="1700" dirty="0"/>
-          </a:p>
-        </p:txBody>
-      </p:sp>
-      <p:sp>
-        <p:nvSpPr>
-          <p:cNvPr id="13" name="Text 9"/>
-          <p:cNvSpPr/>
-          <p:nvPr/>
-        </p:nvSpPr>
-        <p:spPr>
-          <a:xfrm>
-            <a:off x="6492240" y="4983480"/>
-            <a:ext cx="4937760" cy="365760"/>
-          </a:xfrm>
-          <a:prstGeom prst="rect">
-            <a:avLst/>
-          </a:prstGeom>
-          <a:noFill/>
-          <a:ln/>
-        </p:spPr>
-        <p:txBody>
-          <a:bodyPr wrap="square" lIns="0" tIns="0" rIns="0" bIns="0" rtlCol="0" anchor="ctr"/>
-          <a:lstStyle/>
-          <a:p>
-            <a:pPr indent="0" marL="0">
-              <a:buNone/>
-            </a:pPr>
-            <a:r>
-              <a:rPr lang="en-US" sz="1350" dirty="0">
-                <a:solidFill>
-                  <a:srgbClr val="64748B"/>
-                </a:solidFill>
-                <a:latin typeface="微软雅黑" pitchFamily="34" charset="0"/>
-                <a:ea typeface="微软雅黑" pitchFamily="34" charset="-122"/>
-                <a:cs typeface="微软雅黑" pitchFamily="34" charset="-120"/>
-              </a:rPr>
-              <a:t>F2 包装兼容旧模具，破损率 3.1%</a:t>
-            </a:r>
-            <a:endParaRPr lang="en-US" sz="1350" dirty="0"/>
-          </a:p>
-        </p:txBody>
-      </p:sp>
-      <p:sp>
-        <p:nvSpPr>
-          <p:cNvPr id="14" name="Text 10"/>
-          <p:cNvSpPr/>
-          <p:nvPr/>
-        </p:nvSpPr>
-        <p:spPr>
-          <a:xfrm>
-            <a:off x="457200" y="6473952"/>
-            <a:ext cx="5486400" cy="274320"/>
-          </a:xfrm>
-          <a:prstGeom prst="rect">
-            <a:avLst/>
-          </a:prstGeom>
-          <a:noFill/>
-          <a:ln/>
-        </p:spPr>
-        <p:txBody>
-          <a:bodyPr wrap="square" lIns="0" tIns="0" rIns="0" bIns="0" rtlCol="0" anchor="ctr"/>
-          <a:lstStyle/>
-          <a:p>
-            <a:pPr indent="0" marL="0">
-              <a:buNone/>
-            </a:pPr>
-            <a:r>
-              <a:rPr lang="en-US" sz="1200" dirty="0">
-                <a:solidFill>
-                  <a:srgbClr val="64748B"/>
-                </a:solidFill>
-                <a:latin typeface="微软雅黑" pitchFamily="34" charset="0"/>
-                <a:ea typeface="微软雅黑" pitchFamily="34" charset="-122"/>
-                <a:cs typeface="微软雅黑" pitchFamily="34" charset="-120"/>
-              </a:rPr>
-              <a:t>示例数据，仅供演示</a:t>
-            </a:r>
-            <a:endParaRPr lang="en-US" sz="1200" dirty="0"/>
-          </a:p>
-        </p:txBody>
-      </p:sp>
-      <p:sp>
-        <p:nvSpPr>
-          <p:cNvPr id="15" name="Text 11"/>
-          <p:cNvSpPr/>
-          <p:nvPr/>
-        </p:nvSpPr>
-        <p:spPr>
-          <a:xfrm>
-            <a:off x="10634472" y="6473952"/>
-            <a:ext cx="1097280" cy="274320"/>
-          </a:xfrm>
-          <a:prstGeom prst="rect">
-            <a:avLst/>
-          </a:prstGeom>
-          <a:noFill/>
-          <a:ln/>
-        </p:spPr>
-        <p:txBody>
-          <a:bodyPr wrap="square" lIns="0" tIns="0" rIns="0" bIns="0" rtlCol="0" anchor="ctr"/>
-          <a:lstStyle/>
-          <a:p>
-            <a:pPr algn="r" indent="0" marL="0">
-              <a:buNone/>
-            </a:pPr>
-            <a:r>
-              <a:rPr lang="en-US" sz="1200" dirty="0">
-                <a:solidFill>
-                  <a:srgbClr val="64748B"/>
-                </a:solidFill>
-                <a:latin typeface="微软雅黑" pitchFamily="34" charset="0"/>
-                <a:ea typeface="微软雅黑" pitchFamily="34" charset="-122"/>
-                <a:cs typeface="微软雅黑" pitchFamily="34" charset="-120"/>
-              </a:rPr>
-              <a:t>5 / 11</a:t>
-            </a:r>
-            <a:endParaRPr lang="en-US" sz="1200" dirty="0"/>
-          </a:p>
-        </p:txBody>
-      </p:sp>
-    </p:spTree>
-  </p:cSld>
-  <p:clrMapOvr>
-    <a:masterClrMapping/>
-  </p:clrMapOvr>
-  <p:transition spd="med">
-    <p:fade/>
-  </p:transition>
-  <p:timing>
-    <p:tnLst>
-      <p:par>
-        <p:cTn id="1" dur="indefinite" restart="never" nodeType="tmRoot">
-          <p:childTnLst>
-            <p:seq concurrent="1" nextAc="seek">
-              <p:cTn id="2" dur="indefinite" nodeType="mainSeq">
-                <p:childTnLst>
-                  <p:par>
-                    <p:cTn id="3" fill="hold">
-                      <p:stCondLst>
-                        <p:cond delay="0"/>
-                      </p:stCondLst>
-                      <p:childTnLst>
-                        <p:par>
-                          <p:cTn id="4" fill="hold">
-                            <p:stCondLst>
-                              <p:cond delay="0"/>
-                            </p:stCondLst>
-                            <p:childTnLst>
-                              <p:par>
-                                <p:cTn presetID="10" presetClass="entr" presetSubtype="0" fill="hold" grpId="0" nodeType="afterEffect">
-                                  <p:stCondLst>
-                                    <p:cond delay="0"/>
-                                  </p:stCondLst>
-                                  <p:childTnLst>
-                                    <p:set>
-                                      <p:cBhvr>
-                                        <p:cTn id="5" dur="1" fill="hold">
-                                          <p:stCondLst>
-                                            <p:cond delay="0"/>
-                                          </p:stCondLst>
-                                        </p:cTn>
-                                        <p:tgtEl>
-                                          <p:spTgt spid="5"/>
-                                        </p:tgtEl>
-                                        <p:attrNameLst>
-                                          <p:attrName>style.visibility</p:attrName>
-                                        </p:attrNameLst>
-                                      </p:cBhvr>
-                                      <p:to>
-                                        <p:strVal val="visible"/>
-                                      </p:to>
-                                    </p:set>
-                                    <p:animEffect transition="in" filter="fade">
-                                      <p:cBhvr>
-                                        <p:cTn id="6" dur="400"/>
-                                        <p:tgtEl>
-                                          <p:spTgt spid="5"/>
-                                        </p:tgtEl>
-                                      </p:cBhvr>
-                                    </p:animEffect>
-                                  </p:childTnLst>
-                                </p:cTn>
-                              </p:par>
-                            </p:childTnLst>
-                          </p:cTn>
-                        </p:par>
-                        <p:par>
-                          <p:cTn id="7" fill="hold">
-                            <p:stCondLst>
-                              <p:cond delay="550"/>
-                            </p:stCondLst>
-                            <p:childTnLst>
-                              <p:par>
-                                <p:cTn presetID="10" presetClass="entr" presetSubtype="0" fill="hold" grpId="0" nodeType="afterEffect">
-                                  <p:stCondLst>
-                                    <p:cond delay="0"/>
-                                  </p:stCondLst>
-                                  <p:childTnLst>
-                                    <p:set>
-                                      <p:cBhvr>
-                                        <p:cTn id="8" dur="1" fill="hold">
-                                          <p:stCondLst>
-                                            <p:cond delay="0"/>
-                                          </p:stCondLst>
-                                        </p:cTn>
-                                        <p:tgtEl>
-                                          <p:spTgt spid="2"/>
-                                        </p:tgtEl>
-                                        <p:attrNameLst>
-                                          <p:attrName>style.visibility</p:attrName>
-                                        </p:attrNameLst>
-                                      </p:cBhvr>
-                                      <p:to>
-                                        <p:strVal val="visible"/>
-                                      </p:to>
-                                    </p:set>
-                                    <p:animEffect transition="in" filter="fade">
-                                      <p:cBhvr>
-                                        <p:cTn id="9" dur="400"/>
-                                        <p:tgtEl>
-                                          <p:spTgt spid="2"/>
-                                        </p:tgtEl>
-                                      </p:cBhvr>
-                                    </p:animEffect>
-                                  </p:childTnLst>
-                                </p:cTn>
-                              </p:par>
-                            </p:childTnLst>
-                          </p:cTn>
-                        </p:par>
-                        <p:par>
-                          <p:cTn id="10" fill="hold">
-                            <p:stCondLst>
-                              <p:cond delay="1250"/>
-                            </p:stCondLst>
-                            <p:childTnLst>
-                              <p:par>
-                                <p:cTn presetID="10" presetClass="entr" presetSubtype="0" fill="hold" grpId="0" nodeType="afterEffect">
-                                  <p:stCondLst>
-                                    <p:cond delay="0"/>
-                                  </p:stCondLst>
-                                  <p:childTnLst>
-                                    <p:set>
-                                      <p:cBhvr>
-                                        <p:cTn id="11" dur="1" fill="hold">
-                                          <p:stCondLst>
-                                            <p:cond delay="0"/>
-                                          </p:stCondLst>
-                                        </p:cTn>
-                                        <p:tgtEl>
-                                          <p:spTgt spid="3"/>
-                                        </p:tgtEl>
-                                        <p:attrNameLst>
-                                          <p:attrName>style.visibility</p:attrName>
-                                        </p:attrNameLst>
-                                      </p:cBhvr>
-                                      <p:to>
-                                        <p:strVal val="visible"/>
-                                      </p:to>
-                                    </p:set>
-                                    <p:animEffect transition="in" filter="fade">
-                                      <p:cBhvr>
-                                        <p:cTn id="12" dur="400"/>
-                                        <p:tgtEl>
-                                          <p:spTgt spid="3"/>
-                                        </p:tgtEl>
-                                      </p:cBhvr>
-                                    </p:animEffect>
-                                  </p:childTnLst>
-                                </p:cTn>
-                              </p:par>
-                            </p:childTnLst>
-                          </p:cTn>
-                        </p:par>
-                        <p:par>
-                          <p:cTn id="13" fill="hold">
-                            <p:stCondLst>
-                              <p:cond delay="2100"/>
-                            </p:stCondLst>
-                            <p:childTnLst>
-                              <p:par>
-                                <p:cTn presetID="10" presetClass="entr" presetSubtype="0" fill="hold" grpId="0" nodeType="afterEffect">
-                                  <p:stCondLst>
-                                    <p:cond delay="0"/>
-                                  </p:stCondLst>
-                                  <p:childTnLst>
-                                    <p:set>
-                                      <p:cBhvr>
-                                        <p:cTn id="14" dur="1" fill="hold">
-                                          <p:stCondLst>
-                                            <p:cond delay="0"/>
-                                          </p:stCondLst>
-                                        </p:cTn>
-                                        <p:tgtEl>
-                                          <p:spTgt spid="8"/>
-                                        </p:tgtEl>
-                                        <p:attrNameLst>
-                                          <p:attrName>style.visibility</p:attrName>
-                                        </p:attrNameLst>
-                                      </p:cBhvr>
-                                      <p:to>
-                                        <p:strVal val="visible"/>
-                                      </p:to>
-                                    </p:set>
-                                    <p:animEffect transition="in" filter="fade">
-                                      <p:cBhvr>
-                                        <p:cTn id="15" dur="400"/>
-                                        <p:tgtEl>
-                                          <p:spTgt spid="8"/>
-                                        </p:tgtEl>
-                                      </p:cBhvr>
-                                    </p:animEffect>
-                                  </p:childTnLst>
-                                </p:cTn>
-                              </p:par>
-                            </p:childTnLst>
-                          </p:cTn>
-                        </p:par>
-                        <p:par>
-                          <p:cTn id="16" fill="hold">
-                            <p:stCondLst>
-                              <p:cond delay="3100"/>
-                            </p:stCondLst>
-                            <p:childTnLst>
-                              <p:par>
-                                <p:cTn presetID="10" presetClass="entr" presetSubtype="0" fill="hold" grpId="0" nodeType="afterEffect">
-                                  <p:stCondLst>
-                                    <p:cond delay="0"/>
-                                  </p:stCondLst>
-                                  <p:childTnLst>
-                                    <p:set>
-                                      <p:cBhvr>
-                                        <p:cTn id="17" dur="1" fill="hold">
-                                          <p:stCondLst>
-                                            <p:cond delay="0"/>
-                                          </p:stCondLst>
-                                        </p:cTn>
-                                        <p:tgtEl>
-                                          <p:spTgt spid="9"/>
-                                        </p:tgtEl>
-                                        <p:attrNameLst>
-                                          <p:attrName>style.visibility</p:attrName>
-                                        </p:attrNameLst>
-                                      </p:cBhvr>
-                                      <p:to>
-                                        <p:strVal val="visible"/>
-                                      </p:to>
-                                    </p:set>
-                                    <p:animEffect transition="in" filter="fade">
-                                      <p:cBhvr>
-                                        <p:cTn id="18" dur="400"/>
-                                        <p:tgtEl>
-                                          <p:spTgt spid="9"/>
-                                        </p:tgtEl>
-                                      </p:cBhvr>
-                                    </p:animEffect>
-                                  </p:childTnLst>
-                                </p:cTn>
-                              </p:par>
-                            </p:childTnLst>
-                          </p:cTn>
-                        </p:par>
-                        <p:par>
-                          <p:cTn id="19" fill="hold">
-                            <p:stCondLst>
-                              <p:cond delay="4250"/>
-                            </p:stCondLst>
-                            <p:childTnLst>
-                              <p:par>
-                                <p:cTn presetID="10" presetClass="entr" presetSubtype="0" fill="hold" grpId="0" nodeType="afterEffect">
-                                  <p:stCondLst>
-                                    <p:cond delay="0"/>
-                                  </p:stCondLst>
-                                  <p:childTnLst>
-                                    <p:set>
-                                      <p:cBhvr>
-                                        <p:cTn id="20" dur="1" fill="hold">
-                                          <p:stCondLst>
-                                            <p:cond delay="0"/>
-                                          </p:stCondLst>
-                                        </p:cTn>
-                                        <p:tgtEl>
-                                          <p:spTgt spid="6"/>
-                                        </p:tgtEl>
-                                        <p:attrNameLst>
-                                          <p:attrName>style.visibility</p:attrName>
-                                        </p:attrNameLst>
-                                      </p:cBhvr>
-                                      <p:to>
-                                        <p:strVal val="visible"/>
-                                      </p:to>
-                                    </p:set>
-                                    <p:animEffect transition="in" filter="fade">
-                                      <p:cBhvr>
-                                        <p:cTn id="21" dur="400"/>
-                                        <p:tgtEl>
-                                          <p:spTgt spid="6"/>
-                                        </p:tgtEl>
-                                      </p:cBhvr>
-                                    </p:animEffect>
-                                  </p:childTnLst>
-                                </p:cTn>
-                              </p:par>
-                            </p:childTnLst>
-                          </p:cTn>
-                        </p:par>
-                        <p:par>
-                          <p:cTn id="22" fill="hold">
-                            <p:stCondLst>
-                              <p:cond delay="5550"/>
-                            </p:stCondLst>
-                            <p:childTnLst>
-                              <p:par>
-                                <p:cTn presetID="10" presetClass="entr" presetSubtype="0" fill="hold" grpId="0" nodeType="afterEffect">
-                                  <p:stCondLst>
-                                    <p:cond delay="0"/>
-                                  </p:stCondLst>
-                                  <p:childTnLst>
-                                    <p:set>
-                                      <p:cBhvr>
-                                        <p:cTn id="23" dur="1" fill="hold">
-                                          <p:stCondLst>
-                                            <p:cond delay="0"/>
-                                          </p:stCondLst>
-                                        </p:cTn>
-                                        <p:tgtEl>
-                                          <p:spTgt spid="10"/>
-                                        </p:tgtEl>
-                                        <p:attrNameLst>
-                                          <p:attrName>style.visibility</p:attrName>
-                                        </p:attrNameLst>
-                                      </p:cBhvr>
-                                      <p:to>
-                                        <p:strVal val="visible"/>
-                                      </p:to>
-                                    </p:set>
-                                    <p:animEffect transition="in" filter="fade">
-                                      <p:cBhvr>
-                                        <p:cTn id="24" dur="400"/>
-                                        <p:tgtEl>
-                                          <p:spTgt spid="10"/>
-                                        </p:tgtEl>
-                                      </p:cBhvr>
-                                    </p:animEffect>
-                                  </p:childTnLst>
-                                </p:cTn>
-                              </p:par>
-                            </p:childTnLst>
-                          </p:cTn>
-                        </p:par>
-                        <p:par>
-                          <p:cTn id="25" fill="hold">
-                            <p:stCondLst>
-                              <p:cond delay="7000"/>
-                            </p:stCondLst>
-                            <p:childTnLst>
-                              <p:par>
-                                <p:cTn presetID="10" presetClass="entr" presetSubtype="0" fill="hold" grpId="0" nodeType="afterEffect">
-                                  <p:stCondLst>
-                                    <p:cond delay="0"/>
-                                  </p:stCondLst>
-                                  <p:childTnLst>
-                                    <p:set>
-                                      <p:cBhvr>
-                                        <p:cTn id="26" dur="1" fill="hold">
-                                          <p:stCondLst>
-                                            <p:cond delay="0"/>
-                                          </p:stCondLst>
-                                        </p:cTn>
-                                        <p:tgtEl>
-                                          <p:spTgt spid="7"/>
-                                        </p:tgtEl>
-                                        <p:attrNameLst>
-                                          <p:attrName>style.visibility</p:attrName>
-                                        </p:attrNameLst>
-                                      </p:cBhvr>
-                                      <p:to>
-                                        <p:strVal val="visible"/>
-                                      </p:to>
-                                    </p:set>
-                                    <p:animEffect transition="in" filter="fade">
-                                      <p:cBhvr>
-                                        <p:cTn id="27" dur="400"/>
-                                        <p:tgtEl>
-                                          <p:spTgt spid="7"/>
-                                        </p:tgtEl>
-                                      </p:cBhvr>
-                                    </p:animEffect>
-                                  </p:childTnLst>
-                                </p:cTn>
-                              </p:par>
-                            </p:childTnLst>
-                          </p:cTn>
-                        </p:par>
-                        <p:par>
-                          <p:cTn id="28" fill="hold">
-                            <p:stCondLst>
-                              <p:cond delay="8600"/>
-                            </p:stCondLst>
-                            <p:childTnLst>
-                              <p:par>
-                                <p:cTn presetID="10" presetClass="entr" presetSubtype="0" fill="hold" grpId="0" nodeType="afterEffect">
-                                  <p:stCondLst>
-                                    <p:cond delay="0"/>
-                                  </p:stCondLst>
-                                  <p:childTnLst>
-                                    <p:set>
-                                      <p:cBhvr>
-                                        <p:cTn id="29" dur="1" fill="hold">
-                                          <p:stCondLst>
-                                            <p:cond delay="0"/>
-                                          </p:stCondLst>
-                                        </p:cTn>
-                                        <p:tgtEl>
-                                          <p:spTgt spid="11"/>
-                                        </p:tgtEl>
-                                        <p:attrNameLst>
-                                          <p:attrName>style.visibility</p:attrName>
-                                        </p:attrNameLst>
-                                      </p:cBhvr>
-                                      <p:to>
-                                        <p:strVal val="visible"/>
-                                      </p:to>
-                                    </p:set>
-                                    <p:animEffect transition="in" filter="fade">
-                                      <p:cBhvr>
-                                        <p:cTn id="30" dur="400"/>
-                                        <p:tgtEl>
-                                          <p:spTgt spid="11"/>
-                                        </p:tgtEl>
-                                      </p:cBhvr>
-                                    </p:animEffect>
-                                  </p:childTnLst>
-                                </p:cTn>
-                              </p:par>
-                            </p:childTnLst>
-                          </p:cTn>
-                        </p:par>
-                        <p:par>
-                          <p:cTn id="31" fill="hold">
-                            <p:stCondLst>
-                              <p:cond delay="10350"/>
-                            </p:stCondLst>
-                            <p:childTnLst>
-                              <p:par>
-                                <p:cTn presetID="10" presetClass="entr" presetSubtype="0" fill="hold" grpId="0" nodeType="afterEffect">
-                                  <p:stCondLst>
-                                    <p:cond delay="0"/>
-                                  </p:stCondLst>
-                                  <p:childTnLst>
-                                    <p:set>
-                                      <p:cBhvr>
-                                        <p:cTn id="32" dur="1" fill="hold">
-                                          <p:stCondLst>
-                                            <p:cond delay="0"/>
-                                          </p:stCondLst>
-                                        </p:cTn>
-                                        <p:tgtEl>
-                                          <p:spTgt spid="12"/>
-                                        </p:tgtEl>
-                                        <p:attrNameLst>
-                                          <p:attrName>style.visibility</p:attrName>
-                                        </p:attrNameLst>
-                                      </p:cBhvr>
-                                      <p:to>
-                                        <p:strVal val="visible"/>
-                                      </p:to>
-                                    </p:set>
-                                    <p:animEffect transition="in" filter="fade">
-                                      <p:cBhvr>
-                                        <p:cTn id="33" dur="400"/>
-                                        <p:tgtEl>
-                                          <p:spTgt spid="12"/>
-                                        </p:tgtEl>
-                                      </p:cBhvr>
-                                    </p:animEffect>
-                                  </p:childTnLst>
-                                </p:cTn>
-                              </p:par>
-                            </p:childTnLst>
-                          </p:cTn>
-                        </p:par>
-                        <p:par>
-                          <p:cTn id="34" fill="hold">
-                            <p:stCondLst>
-                              <p:cond delay="12250"/>
-                            </p:stCondLst>
-                            <p:childTnLst>
-                              <p:par>
-                                <p:cTn presetID="10" presetClass="entr" presetSubtype="0" fill="hold" grpId="0" nodeType="afterEffect">
-                                  <p:stCondLst>
-                                    <p:cond delay="0"/>
-                                  </p:stCondLst>
-                                  <p:childTnLst>
-                                    <p:set>
-                                      <p:cBhvr>
-                                        <p:cTn id="35" dur="1" fill="hold">
-                                          <p:stCondLst>
-                                            <p:cond delay="0"/>
-                                          </p:stCondLst>
-                                        </p:cTn>
-                                        <p:tgtEl>
-                                          <p:spTgt spid="13"/>
-                                        </p:tgtEl>
-                                        <p:attrNameLst>
-                                          <p:attrName>style.visibility</p:attrName>
-                                        </p:attrNameLst>
-                                      </p:cBhvr>
-                                      <p:to>
-                                        <p:strVal val="visible"/>
-                                      </p:to>
-                                    </p:set>
-                                    <p:animEffect transition="in" filter="fade">
-                                      <p:cBhvr>
-                                        <p:cTn id="36" dur="400"/>
-                                        <p:tgtEl>
-                                          <p:spTgt spid="13"/>
-                                        </p:tgtEl>
-                                      </p:cBhvr>
-                                    </p:animEffect>
-                                  </p:childTnLst>
-                                </p:cTn>
-                              </p:par>
-                            </p:childTnLst>
-                          </p:cTn>
-                        </p:par>
-                        <p:par>
-                          <p:cTn id="37" fill="hold">
-                            <p:stCondLst>
-                              <p:cond delay="14300"/>
-                            </p:stCondLst>
-                            <p:childTnLst>
-                              <p:par>
-                                <p:cTn presetID="10" presetClass="entr" presetSubtype="0" fill="hold" grpId="0" nodeType="afterEffect">
-                                  <p:stCondLst>
-                                    <p:cond delay="0"/>
-                                  </p:stCondLst>
-                                  <p:childTnLst>
-                                    <p:set>
-                                      <p:cBhvr>
-                                        <p:cTn id="38" dur="1" fill="hold">
-                                          <p:stCondLst>
-                                            <p:cond delay="0"/>
-                                          </p:stCondLst>
-                                        </p:cTn>
-                                        <p:tgtEl>
-                                          <p:spTgt spid="14"/>
-                                        </p:tgtEl>
-                                        <p:attrNameLst>
-                                          <p:attrName>style.visibility</p:attrName>
-                                        </p:attrNameLst>
-                                      </p:cBhvr>
-                                      <p:to>
-                                        <p:strVal val="visible"/>
-                                      </p:to>
-                                    </p:set>
-                                    <p:animEffect transition="in" filter="fade">
-                                      <p:cBhvr>
-                                        <p:cTn id="39" dur="400"/>
-                                        <p:tgtEl>
-                                          <p:spTgt spid="14"/>
-                                        </p:tgtEl>
-                                      </p:cBhvr>
-                                    </p:animEffect>
-                                  </p:childTnLst>
-                                </p:cTn>
-                              </p:par>
-                            </p:childTnLst>
-                          </p:cTn>
-                        </p:par>
-                        <p:par>
-                          <p:cTn id="40" fill="hold">
-                            <p:stCondLst>
-                              <p:cond delay="16500"/>
-                            </p:stCondLst>
-                            <p:childTnLst>
-                              <p:par>
-                                <p:cTn presetID="10" presetClass="entr" presetSubtype="0" fill="hold" grpId="0" nodeType="afterEffect">
-                                  <p:stCondLst>
-                                    <p:cond delay="0"/>
-                                  </p:stCondLst>
-                                  <p:childTnLst>
-                                    <p:set>
-                                      <p:cBhvr>
-                                        <p:cTn id="41" dur="1" fill="hold">
-                                          <p:stCondLst>
-                                            <p:cond delay="0"/>
-                                          </p:stCondLst>
-                                        </p:cTn>
-                                        <p:tgtEl>
-                                          <p:spTgt spid="15"/>
-                                        </p:tgtEl>
-                                        <p:attrNameLst>
-                                          <p:attrName>style.visibility</p:attrName>
-                                        </p:attrNameLst>
-                                      </p:cBhvr>
-                                      <p:to>
-                                        <p:strVal val="visible"/>
-                                      </p:to>
-                                    </p:set>
-                                    <p:animEffect transition="in" filter="fade">
-                                      <p:cBhvr>
-                                        <p:cTn id="42" dur="400"/>
-                                        <p:tgtEl>
-                                          <p:spTgt spid="15"/>
-                                        </p:tgtEl>
-                                      </p:cBhvr>
-                                    </p:animEffect>
-                                  </p:childTnLst>
-                                </p:cTn>
-                              </p:par>
-                            </p:childTnLst>
-                          </p:cTn>
-                        </p:par>
-                      </p:childTnLst>
-                    </p:cTn>
-                  </p:par>
-                </p:childTnLst>
-              </p:cTn>
-              <p:prevCondLst>
-                <p:cond evt="onPrev" delay="0">
-                  <p:tgtEl>
-                    <p:sldTgt/>
-                  </p:tgtEl>
-                </p:cond>
-              </p:prevCondLst>
-              <p:nextCondLst>
-                <p:cond evt="onNext" delay="0">
-                  <p:tgtEl>
-                    <p:sldTgt/>
-                  </p:tgtEl>
-                </p:cond>
-              </p:nextCondLst>
-            </p:seq>
-          </p:childTnLst>
-        </p:cTn>
-      </p:par>
-    </p:tnLst>
-    <p:bldLst>
-      <p:bldP spid="5" grpId="0"/>
       <p:bldP spid="2" grpId="0"/>
       <p:bldP spid="3" grpId="0"/>
       <p:bldP spid="8" grpId="0"/>
@@ -10500,7 +10491,7 @@
                         <p:par>
                           <p:cTn id="4" fill="hold">
                             <p:stCondLst>
-                              <p:cond delay="0"/>
+                              <p:cond delay="120"/>
                             </p:stCondLst>
                             <p:childTnLst>
                               <p:par>
@@ -10517,7 +10508,7 @@
                                           </p:stCondLst>
                                         </p:cTn>
                                         <p:tgtEl>
-                                          <p:spTgt spid="9"/>
+                                          <p:spTgt spid="2"/>
                                         </p:tgtEl>
                                         <p:attrNameLst>
                                           <p:attrName>style.visibility</p:attrName>
@@ -10531,7 +10522,7 @@
                                       <p:cBhvr>
                                         <p:cTn id="6" dur="400"/>
                                         <p:tgtEl>
-                                          <p:spTgt spid="9"/>
+                                          <p:spTgt spid="2"/>
                                         </p:tgtEl>
                                       </p:cBhvr>
                                     </p:animEffect>
@@ -10544,7 +10535,7 @@
                         <p:par>
                           <p:cTn id="7" fill="hold">
                             <p:stCondLst>
-                              <p:cond delay="520"/>
+                              <p:cond delay="760"/>
                             </p:stCondLst>
                             <p:childTnLst>
                               <p:par>
@@ -10561,7 +10552,7 @@
                                           </p:stCondLst>
                                         </p:cTn>
                                         <p:tgtEl>
-                                          <p:spTgt spid="2"/>
+                                          <p:spTgt spid="3"/>
                                         </p:tgtEl>
                                         <p:attrNameLst>
                                           <p:attrName>style.visibility</p:attrName>
@@ -10575,7 +10566,7 @@
                                       <p:cBhvr>
                                         <p:cTn id="9" dur="400"/>
                                         <p:tgtEl>
-                                          <p:spTgt spid="2"/>
+                                          <p:spTgt spid="3"/>
                                         </p:tgtEl>
                                       </p:cBhvr>
                                     </p:animEffect>
@@ -10588,7 +10579,7 @@
                         <p:par>
                           <p:cTn id="10" fill="hold">
                             <p:stCondLst>
-                              <p:cond delay="1160"/>
+                              <p:cond delay="1520"/>
                             </p:stCondLst>
                             <p:childTnLst>
                               <p:par>
@@ -10605,7 +10596,7 @@
                                           </p:stCondLst>
                                         </p:cTn>
                                         <p:tgtEl>
-                                          <p:spTgt spid="3"/>
+                                          <p:spTgt spid="5"/>
                                         </p:tgtEl>
                                         <p:attrNameLst>
                                           <p:attrName>style.visibility</p:attrName>
@@ -10619,7 +10610,7 @@
                                       <p:cBhvr>
                                         <p:cTn id="12" dur="400"/>
                                         <p:tgtEl>
-                                          <p:spTgt spid="3"/>
+                                          <p:spTgt spid="5"/>
                                         </p:tgtEl>
                                       </p:cBhvr>
                                     </p:animEffect>
@@ -10632,7 +10623,7 @@
                         <p:par>
                           <p:cTn id="13" fill="hold">
                             <p:stCondLst>
-                              <p:cond delay="1920"/>
+                              <p:cond delay="2400"/>
                             </p:stCondLst>
                             <p:childTnLst>
                               <p:par>
@@ -10649,7 +10640,7 @@
                                           </p:stCondLst>
                                         </p:cTn>
                                         <p:tgtEl>
-                                          <p:spTgt spid="5"/>
+                                          <p:spTgt spid="6"/>
                                         </p:tgtEl>
                                         <p:attrNameLst>
                                           <p:attrName>style.visibility</p:attrName>
@@ -10663,7 +10654,7 @@
                                       <p:cBhvr>
                                         <p:cTn id="15" dur="400"/>
                                         <p:tgtEl>
-                                          <p:spTgt spid="5"/>
+                                          <p:spTgt spid="6"/>
                                         </p:tgtEl>
                                       </p:cBhvr>
                                     </p:animEffect>
@@ -10676,7 +10667,7 @@
                         <p:par>
                           <p:cTn id="16" fill="hold">
                             <p:stCondLst>
-                              <p:cond delay="2800"/>
+                              <p:cond delay="3400"/>
                             </p:stCondLst>
                             <p:childTnLst>
                               <p:par>
@@ -10693,7 +10684,7 @@
                                           </p:stCondLst>
                                         </p:cTn>
                                         <p:tgtEl>
-                                          <p:spTgt spid="6"/>
+                                          <p:spTgt spid="7"/>
                                         </p:tgtEl>
                                         <p:attrNameLst>
                                           <p:attrName>style.visibility</p:attrName>
@@ -10707,7 +10698,7 @@
                                       <p:cBhvr>
                                         <p:cTn id="18" dur="400"/>
                                         <p:tgtEl>
-                                          <p:spTgt spid="6"/>
+                                          <p:spTgt spid="7"/>
                                         </p:tgtEl>
                                       </p:cBhvr>
                                     </p:animEffect>
@@ -10720,7 +10711,7 @@
                         <p:par>
                           <p:cTn id="19" fill="hold">
                             <p:stCondLst>
-                              <p:cond delay="3800"/>
+                              <p:cond delay="4520"/>
                             </p:stCondLst>
                             <p:childTnLst>
                               <p:par>
@@ -10737,7 +10728,7 @@
                                           </p:stCondLst>
                                         </p:cTn>
                                         <p:tgtEl>
-                                          <p:spTgt spid="7"/>
+                                          <p:spTgt spid="8"/>
                                         </p:tgtEl>
                                         <p:attrNameLst>
                                           <p:attrName>style.visibility</p:attrName>
@@ -10751,7 +10742,7 @@
                                       <p:cBhvr>
                                         <p:cTn id="21" dur="400"/>
                                         <p:tgtEl>
-                                          <p:spTgt spid="7"/>
+                                          <p:spTgt spid="8"/>
                                         </p:tgtEl>
                                       </p:cBhvr>
                                     </p:animEffect>
@@ -10764,7 +10755,7 @@
                         <p:par>
                           <p:cTn id="22" fill="hold">
                             <p:stCondLst>
-                              <p:cond delay="4920"/>
+                              <p:cond delay="5760"/>
                             </p:stCondLst>
                             <p:childTnLst>
                               <p:par>
@@ -10781,7 +10772,7 @@
                                           </p:stCondLst>
                                         </p:cTn>
                                         <p:tgtEl>
-                                          <p:spTgt spid="8"/>
+                                          <p:spTgt spid="10"/>
                                         </p:tgtEl>
                                         <p:attrNameLst>
                                           <p:attrName>style.visibility</p:attrName>
@@ -10795,7 +10786,7 @@
                                       <p:cBhvr>
                                         <p:cTn id="24" dur="400"/>
                                         <p:tgtEl>
-                                          <p:spTgt spid="8"/>
+                                          <p:spTgt spid="10"/>
                                         </p:tgtEl>
                                       </p:cBhvr>
                                     </p:animEffect>
@@ -10808,7 +10799,7 @@
                         <p:par>
                           <p:cTn id="25" fill="hold">
                             <p:stCondLst>
-                              <p:cond delay="6160"/>
+                              <p:cond delay="7120"/>
                             </p:stCondLst>
                             <p:childTnLst>
                               <p:par>
@@ -10825,7 +10816,7 @@
                                           </p:stCondLst>
                                         </p:cTn>
                                         <p:tgtEl>
-                                          <p:spTgt spid="10"/>
+                                          <p:spTgt spid="11"/>
                                         </p:tgtEl>
                                         <p:attrNameLst>
                                           <p:attrName>style.visibility</p:attrName>
@@ -10839,7 +10830,7 @@
                                       <p:cBhvr>
                                         <p:cTn id="27" dur="400"/>
                                         <p:tgtEl>
-                                          <p:spTgt spid="10"/>
+                                          <p:spTgt spid="11"/>
                                         </p:tgtEl>
                                       </p:cBhvr>
                                     </p:animEffect>
@@ -10852,7 +10843,7 @@
                         <p:par>
                           <p:cTn id="28" fill="hold">
                             <p:stCondLst>
-                              <p:cond delay="7520"/>
+                              <p:cond delay="8600"/>
                             </p:stCondLst>
                             <p:childTnLst>
                               <p:par>
@@ -10869,7 +10860,7 @@
                                           </p:stCondLst>
                                         </p:cTn>
                                         <p:tgtEl>
-                                          <p:spTgt spid="11"/>
+                                          <p:spTgt spid="12"/>
                                         </p:tgtEl>
                                         <p:attrNameLst>
                                           <p:attrName>style.visibility</p:attrName>
@@ -10882,50 +10873,6 @@
                                     <p:animEffect transition="in" filter="fade">
                                       <p:cBhvr>
                                         <p:cTn id="30" dur="400"/>
-                                        <p:tgtEl>
-                                          <p:spTgt spid="11"/>
-                                        </p:tgtEl>
-                                      </p:cBhvr>
-                                    </p:animEffect>
-                                  </p:childTnLst>
-                                </p:cTn>
-                              </p:par>
-                            </p:childTnLst>
-                          </p:cTn>
-                        </p:par>
-                        <p:par>
-                          <p:cTn id="31" fill="hold">
-                            <p:stCondLst>
-                              <p:cond delay="9000"/>
-                            </p:stCondLst>
-                            <p:childTnLst>
-                              <p:par>
-                                <p:cTn presetID="10" presetClass="entr" presetSubtype="0" fill="hold" grpId="0" nodeType="afterEffect">
-                                  <p:stCondLst>
-                                    <p:cond delay="0"/>
-                                  </p:stCondLst>
-                                  <p:childTnLst>
-                                    <p:set>
-                                      <p:cBhvr>
-                                        <p:cTn id="32" dur="1" fill="hold">
-                                          <p:stCondLst>
-                                            <p:cond delay="0"/>
-                                          </p:stCondLst>
-                                        </p:cTn>
-                                        <p:tgtEl>
-                                          <p:spTgt spid="12"/>
-                                        </p:tgtEl>
-                                        <p:attrNameLst>
-                                          <p:attrName>style.visibility</p:attrName>
-                                        </p:attrNameLst>
-                                      </p:cBhvr>
-                                      <p:to>
-                                        <p:strVal val="visible"/>
-                                      </p:to>
-                                    </p:set>
-                                    <p:animEffect transition="in" filter="fade">
-                                      <p:cBhvr>
-                                        <p:cTn id="33" dur="400"/>
                                         <p:tgtEl>
                                           <p:spTgt spid="12"/>
                                         </p:tgtEl>
@@ -10962,7 +10909,6 @@
       </p:par>
     </p:tnLst>
     <p:bldLst>
-      <p:bldP spid="9" grpId="0"/>
       <p:bldP spid="2" grpId="0"/>
       <p:bldP spid="3" grpId="0"/>
       <p:bldP spid="5" grpId="0"/>
